--- a/Auditoria_y_Control_de_Calidad_BIM_Gesconvial_Sesion6.pptx
+++ b/Auditoria_y_Control_de_Calidad_BIM_Gesconvial_Sesion6.pptx
@@ -2,59 +2,59 @@
 <file path=ppt/presentation.xml><?xml version="1.0" encoding="utf-8"?>
 <p:presentation xmlns:p="http://schemas.openxmlformats.org/presentationml/2006/main">
   <p:sldMasterIdLst>
-    <p:sldMasterId xmlns:r="http://schemas.openxmlformats.org/officeDocument/2006/relationships" id="2147483648" r:id="Ra5d3ecefa4274dca"/>
+    <p:sldMasterId xmlns:r="http://schemas.openxmlformats.org/officeDocument/2006/relationships" id="2147483648" r:id="R2c11ca146439464b"/>
   </p:sldMasterIdLst>
   <p:notesMasterIdLst>
-    <p:notesMasterId xmlns:r="http://schemas.openxmlformats.org/officeDocument/2006/relationships" r:id="Rd08a14080221425a"/>
+    <p:notesMasterId xmlns:r="http://schemas.openxmlformats.org/officeDocument/2006/relationships" r:id="R4a657d065f73415f"/>
   </p:notesMasterIdLst>
   <p:sldIdLst>
-    <p:sldId xmlns:r="http://schemas.openxmlformats.org/officeDocument/2006/relationships" id="256" r:id="Ra57ea16385f34d79"/>
-    <p:sldId xmlns:r="http://schemas.openxmlformats.org/officeDocument/2006/relationships" id="257" r:id="Rd08570c0f13a4178"/>
-    <p:sldId xmlns:r="http://schemas.openxmlformats.org/officeDocument/2006/relationships" id="258" r:id="R5936f6f4f8fd400f"/>
-    <p:sldId xmlns:r="http://schemas.openxmlformats.org/officeDocument/2006/relationships" id="259" r:id="R694e7bcb0825424c"/>
-    <p:sldId xmlns:r="http://schemas.openxmlformats.org/officeDocument/2006/relationships" id="260" r:id="Rf5fbef874c794986"/>
-    <p:sldId xmlns:r="http://schemas.openxmlformats.org/officeDocument/2006/relationships" id="261" r:id="R65722caf255b49e0"/>
-    <p:sldId xmlns:r="http://schemas.openxmlformats.org/officeDocument/2006/relationships" id="262" r:id="R4e7d52a8a9874869"/>
-    <p:sldId xmlns:r="http://schemas.openxmlformats.org/officeDocument/2006/relationships" id="263" r:id="R2df070a720634a97"/>
-    <p:sldId xmlns:r="http://schemas.openxmlformats.org/officeDocument/2006/relationships" id="264" r:id="R3f8caaab478f412f"/>
-    <p:sldId xmlns:r="http://schemas.openxmlformats.org/officeDocument/2006/relationships" id="265" r:id="R0938ab0c9e584180"/>
-    <p:sldId xmlns:r="http://schemas.openxmlformats.org/officeDocument/2006/relationships" id="266" r:id="Rbcfea357119949a3"/>
-    <p:sldId xmlns:r="http://schemas.openxmlformats.org/officeDocument/2006/relationships" id="267" r:id="Rb5df021e7eba43ab"/>
-    <p:sldId xmlns:r="http://schemas.openxmlformats.org/officeDocument/2006/relationships" id="268" r:id="Rf7c1f48e010f4dce"/>
-    <p:sldId xmlns:r="http://schemas.openxmlformats.org/officeDocument/2006/relationships" id="269" r:id="Rcfcd0c0aafe242a8"/>
-    <p:sldId xmlns:r="http://schemas.openxmlformats.org/officeDocument/2006/relationships" id="270" r:id="R53d79b285bb7489e"/>
-    <p:sldId xmlns:r="http://schemas.openxmlformats.org/officeDocument/2006/relationships" id="271" r:id="R3426cff175db4b1c"/>
-    <p:sldId xmlns:r="http://schemas.openxmlformats.org/officeDocument/2006/relationships" id="272" r:id="R5b3cc790ceb5442a"/>
-    <p:sldId xmlns:r="http://schemas.openxmlformats.org/officeDocument/2006/relationships" id="273" r:id="R64b49be8b63e4398"/>
-    <p:sldId xmlns:r="http://schemas.openxmlformats.org/officeDocument/2006/relationships" id="274" r:id="Raccfdd9cf3c04f90"/>
-    <p:sldId xmlns:r="http://schemas.openxmlformats.org/officeDocument/2006/relationships" id="275" r:id="R3fb396454f414dfe"/>
-    <p:sldId xmlns:r="http://schemas.openxmlformats.org/officeDocument/2006/relationships" id="276" r:id="R5d07fb346e384f32"/>
-    <p:sldId xmlns:r="http://schemas.openxmlformats.org/officeDocument/2006/relationships" id="277" r:id="Rdcefa20ed61f48c8"/>
-    <p:sldId xmlns:r="http://schemas.openxmlformats.org/officeDocument/2006/relationships" id="278" r:id="R62e7f13f345d4bf2"/>
-    <p:sldId xmlns:r="http://schemas.openxmlformats.org/officeDocument/2006/relationships" id="279" r:id="R9ce24dd776954fb4"/>
-    <p:sldId xmlns:r="http://schemas.openxmlformats.org/officeDocument/2006/relationships" id="280" r:id="R1aa6a3c689634dd5"/>
-    <p:sldId xmlns:r="http://schemas.openxmlformats.org/officeDocument/2006/relationships" id="281" r:id="R182346add5854c88"/>
-    <p:sldId xmlns:r="http://schemas.openxmlformats.org/officeDocument/2006/relationships" id="282" r:id="R4dac52a413ed4f4c"/>
-    <p:sldId xmlns:r="http://schemas.openxmlformats.org/officeDocument/2006/relationships" id="283" r:id="R48bd8e413ddc4fd9"/>
-    <p:sldId xmlns:r="http://schemas.openxmlformats.org/officeDocument/2006/relationships" id="284" r:id="Rdfdb16842e544fc4"/>
-    <p:sldId xmlns:r="http://schemas.openxmlformats.org/officeDocument/2006/relationships" id="285" r:id="Rb6fd07597dfa45f9"/>
-    <p:sldId xmlns:r="http://schemas.openxmlformats.org/officeDocument/2006/relationships" id="286" r:id="R204cecfbe27b49f8"/>
-    <p:sldId xmlns:r="http://schemas.openxmlformats.org/officeDocument/2006/relationships" id="287" r:id="R5cc68802b49d44bd"/>
-    <p:sldId xmlns:r="http://schemas.openxmlformats.org/officeDocument/2006/relationships" id="288" r:id="R85c23b92c7684e25"/>
-    <p:sldId xmlns:r="http://schemas.openxmlformats.org/officeDocument/2006/relationships" id="289" r:id="Re424eb9a3fb14105"/>
-    <p:sldId xmlns:r="http://schemas.openxmlformats.org/officeDocument/2006/relationships" id="290" r:id="Re12e087e45cd45c3"/>
-    <p:sldId xmlns:r="http://schemas.openxmlformats.org/officeDocument/2006/relationships" id="291" r:id="Re231b8f977ef4ad5"/>
-    <p:sldId xmlns:r="http://schemas.openxmlformats.org/officeDocument/2006/relationships" id="292" r:id="Rb3604dd49bd943dd"/>
-    <p:sldId xmlns:r="http://schemas.openxmlformats.org/officeDocument/2006/relationships" id="293" r:id="Rf509c44421a44fea"/>
-    <p:sldId xmlns:r="http://schemas.openxmlformats.org/officeDocument/2006/relationships" id="294" r:id="R4776488fc2ff4e50"/>
-    <p:sldId xmlns:r="http://schemas.openxmlformats.org/officeDocument/2006/relationships" id="295" r:id="Re905740a8f9a48f7"/>
-    <p:sldId xmlns:r="http://schemas.openxmlformats.org/officeDocument/2006/relationships" id="296" r:id="R4169697d643d458d"/>
-    <p:sldId xmlns:r="http://schemas.openxmlformats.org/officeDocument/2006/relationships" id="297" r:id="Ra1c96edd9cf64f1b"/>
-    <p:sldId xmlns:r="http://schemas.openxmlformats.org/officeDocument/2006/relationships" id="298" r:id="R5791afed117842f5"/>
-    <p:sldId xmlns:r="http://schemas.openxmlformats.org/officeDocument/2006/relationships" id="299" r:id="R4ea23b403ab84a6a"/>
-    <p:sldId xmlns:r="http://schemas.openxmlformats.org/officeDocument/2006/relationships" id="300" r:id="Ra12f07f94042404d"/>
-    <p:sldId xmlns:r="http://schemas.openxmlformats.org/officeDocument/2006/relationships" id="301" r:id="R7b148e9dfdba4746"/>
-    <p:sldId xmlns:r="http://schemas.openxmlformats.org/officeDocument/2006/relationships" id="302" r:id="R666d7bd5209e4dfb"/>
+    <p:sldId xmlns:r="http://schemas.openxmlformats.org/officeDocument/2006/relationships" id="256" r:id="Rde6c9afb50d54b64"/>
+    <p:sldId xmlns:r="http://schemas.openxmlformats.org/officeDocument/2006/relationships" id="257" r:id="R91ae3cb6869242dc"/>
+    <p:sldId xmlns:r="http://schemas.openxmlformats.org/officeDocument/2006/relationships" id="258" r:id="Re575203039704e45"/>
+    <p:sldId xmlns:r="http://schemas.openxmlformats.org/officeDocument/2006/relationships" id="259" r:id="Re2ddc906c9ad4ea8"/>
+    <p:sldId xmlns:r="http://schemas.openxmlformats.org/officeDocument/2006/relationships" id="260" r:id="R32299dd203644f59"/>
+    <p:sldId xmlns:r="http://schemas.openxmlformats.org/officeDocument/2006/relationships" id="261" r:id="R87f7b976411442f9"/>
+    <p:sldId xmlns:r="http://schemas.openxmlformats.org/officeDocument/2006/relationships" id="262" r:id="R22a4abb9ee284846"/>
+    <p:sldId xmlns:r="http://schemas.openxmlformats.org/officeDocument/2006/relationships" id="263" r:id="R23858e3fb6524b88"/>
+    <p:sldId xmlns:r="http://schemas.openxmlformats.org/officeDocument/2006/relationships" id="264" r:id="R98c0df8bc1e94f37"/>
+    <p:sldId xmlns:r="http://schemas.openxmlformats.org/officeDocument/2006/relationships" id="265" r:id="R59b129bf4456438d"/>
+    <p:sldId xmlns:r="http://schemas.openxmlformats.org/officeDocument/2006/relationships" id="266" r:id="Rd7da1f0603074af9"/>
+    <p:sldId xmlns:r="http://schemas.openxmlformats.org/officeDocument/2006/relationships" id="267" r:id="R02a7e0d828ed49b7"/>
+    <p:sldId xmlns:r="http://schemas.openxmlformats.org/officeDocument/2006/relationships" id="268" r:id="R6a691dbb966243e7"/>
+    <p:sldId xmlns:r="http://schemas.openxmlformats.org/officeDocument/2006/relationships" id="269" r:id="Ra92eec2fc8994e69"/>
+    <p:sldId xmlns:r="http://schemas.openxmlformats.org/officeDocument/2006/relationships" id="270" r:id="R194eb49cf1ed4e44"/>
+    <p:sldId xmlns:r="http://schemas.openxmlformats.org/officeDocument/2006/relationships" id="271" r:id="Rc6cbad2ce2c941e9"/>
+    <p:sldId xmlns:r="http://schemas.openxmlformats.org/officeDocument/2006/relationships" id="272" r:id="R5bab25a8269540a8"/>
+    <p:sldId xmlns:r="http://schemas.openxmlformats.org/officeDocument/2006/relationships" id="273" r:id="Rdc9d6efe4d0741e8"/>
+    <p:sldId xmlns:r="http://schemas.openxmlformats.org/officeDocument/2006/relationships" id="274" r:id="R17565914cabc4a33"/>
+    <p:sldId xmlns:r="http://schemas.openxmlformats.org/officeDocument/2006/relationships" id="275" r:id="R25152b05d937476f"/>
+    <p:sldId xmlns:r="http://schemas.openxmlformats.org/officeDocument/2006/relationships" id="276" r:id="R1c0d420ced01424b"/>
+    <p:sldId xmlns:r="http://schemas.openxmlformats.org/officeDocument/2006/relationships" id="277" r:id="R64b7982ffc7243cd"/>
+    <p:sldId xmlns:r="http://schemas.openxmlformats.org/officeDocument/2006/relationships" id="278" r:id="Rc033553f137c4152"/>
+    <p:sldId xmlns:r="http://schemas.openxmlformats.org/officeDocument/2006/relationships" id="279" r:id="R9a155352a22f482c"/>
+    <p:sldId xmlns:r="http://schemas.openxmlformats.org/officeDocument/2006/relationships" id="280" r:id="R6c831b4a8d844f6c"/>
+    <p:sldId xmlns:r="http://schemas.openxmlformats.org/officeDocument/2006/relationships" id="281" r:id="R56ff9d4ebd794c4c"/>
+    <p:sldId xmlns:r="http://schemas.openxmlformats.org/officeDocument/2006/relationships" id="282" r:id="R91a2195164c64406"/>
+    <p:sldId xmlns:r="http://schemas.openxmlformats.org/officeDocument/2006/relationships" id="283" r:id="R0dc75c560ffd494c"/>
+    <p:sldId xmlns:r="http://schemas.openxmlformats.org/officeDocument/2006/relationships" id="284" r:id="Rb1ec2d7f5ad34b4b"/>
+    <p:sldId xmlns:r="http://schemas.openxmlformats.org/officeDocument/2006/relationships" id="285" r:id="R865cf8a32aa54e7a"/>
+    <p:sldId xmlns:r="http://schemas.openxmlformats.org/officeDocument/2006/relationships" id="286" r:id="Rb684a0de4b0e45c1"/>
+    <p:sldId xmlns:r="http://schemas.openxmlformats.org/officeDocument/2006/relationships" id="287" r:id="R1b76c7fc15174785"/>
+    <p:sldId xmlns:r="http://schemas.openxmlformats.org/officeDocument/2006/relationships" id="288" r:id="Rd48af766cb094934"/>
+    <p:sldId xmlns:r="http://schemas.openxmlformats.org/officeDocument/2006/relationships" id="289" r:id="R2b7904ac2b934eb6"/>
+    <p:sldId xmlns:r="http://schemas.openxmlformats.org/officeDocument/2006/relationships" id="290" r:id="R6d2c7d5ff2d94989"/>
+    <p:sldId xmlns:r="http://schemas.openxmlformats.org/officeDocument/2006/relationships" id="291" r:id="R4f19401f0e2546c5"/>
+    <p:sldId xmlns:r="http://schemas.openxmlformats.org/officeDocument/2006/relationships" id="292" r:id="R6050303a04124511"/>
+    <p:sldId xmlns:r="http://schemas.openxmlformats.org/officeDocument/2006/relationships" id="293" r:id="R49432e512ea34295"/>
+    <p:sldId xmlns:r="http://schemas.openxmlformats.org/officeDocument/2006/relationships" id="294" r:id="R6facf9bcd8d34391"/>
+    <p:sldId xmlns:r="http://schemas.openxmlformats.org/officeDocument/2006/relationships" id="295" r:id="R106b479636214142"/>
+    <p:sldId xmlns:r="http://schemas.openxmlformats.org/officeDocument/2006/relationships" id="296" r:id="R0515c20b87524da5"/>
+    <p:sldId xmlns:r="http://schemas.openxmlformats.org/officeDocument/2006/relationships" id="297" r:id="Rf26ffd5b0fdf4c51"/>
+    <p:sldId xmlns:r="http://schemas.openxmlformats.org/officeDocument/2006/relationships" id="298" r:id="R4afeb3940cca4f3e"/>
+    <p:sldId xmlns:r="http://schemas.openxmlformats.org/officeDocument/2006/relationships" id="299" r:id="R92560ac9a58845ce"/>
+    <p:sldId xmlns:r="http://schemas.openxmlformats.org/officeDocument/2006/relationships" id="300" r:id="Rb4dad8830b244891"/>
+    <p:sldId xmlns:r="http://schemas.openxmlformats.org/officeDocument/2006/relationships" id="301" r:id="R826e6ff2d8a3447f"/>
+    <p:sldId xmlns:r="http://schemas.openxmlformats.org/officeDocument/2006/relationships" id="302" r:id="R4065fb467bab4e63"/>
   </p:sldIdLst>
   <p:sldSz cx="12192000" cy="6858000"/>
   <p:notesSz cx="6858000" cy="9144000"/>
@@ -3590,7 +3590,7 @@
           <p:cNvPr id="2" name="Title 1">
             <a:extLst xmlns:a="http://schemas.openxmlformats.org/drawingml/2006/main">
               <a:ext uri="{FF2B5EF4-FFF2-40B4-BE49-F238E27FC236}">
-                <a16:creationId xmlns:a16="http://schemas.microsoft.com/office/drawing/2014/main" id="{6326B724-F667-4454-BD7C-C75A9E8ADD74}"/>
+                <a16:creationId xmlns:a16="http://schemas.microsoft.com/office/drawing/2014/main" id="{F62064BE-B93F-474C-83C2-AF07EC9FEDA7}"/>
               </a:ext>
             </a:extLst>
           </p:cNvPr>
@@ -3623,7 +3623,7 @@
           <p:cNvPr id="3" name="Subtitle 2">
             <a:extLst xmlns:a="http://schemas.openxmlformats.org/drawingml/2006/main">
               <a:ext uri="{FF2B5EF4-FFF2-40B4-BE49-F238E27FC236}">
-                <a16:creationId xmlns:a16="http://schemas.microsoft.com/office/drawing/2014/main" id="{5EDC2AB4-FD9C-4D22-8C28-254849B3F617}"/>
+                <a16:creationId xmlns:a16="http://schemas.microsoft.com/office/drawing/2014/main" id="{F6A6A300-D3AC-48FF-8C36-F5CC7DA9193A}"/>
               </a:ext>
             </a:extLst>
           </p:cNvPr>
@@ -3747,7 +3747,7 @@
           <p:cNvPr id="4" name="Date Placeholder 3">
             <a:extLst xmlns:a="http://schemas.openxmlformats.org/drawingml/2006/main">
               <a:ext uri="{FF2B5EF4-FFF2-40B4-BE49-F238E27FC236}">
-                <a16:creationId xmlns:a16="http://schemas.microsoft.com/office/drawing/2014/main" id="{854DBAC4-2217-433C-B4C8-0E07131F4FEF}"/>
+                <a16:creationId xmlns:a16="http://schemas.microsoft.com/office/drawing/2014/main" id="{9C988E6D-3AAC-4A8F-8333-97E842F0A6CF}"/>
               </a:ext>
             </a:extLst>
           </p:cNvPr>
@@ -3775,7 +3775,7 @@
           <p:cNvPr id="5" name="Footer Placeholder 4">
             <a:extLst xmlns:a="http://schemas.openxmlformats.org/drawingml/2006/main">
               <a:ext uri="{FF2B5EF4-FFF2-40B4-BE49-F238E27FC236}">
-                <a16:creationId xmlns:a16="http://schemas.microsoft.com/office/drawing/2014/main" id="{D08AD44E-E74C-4FC0-A0D8-78AA8E11DD1F}"/>
+                <a16:creationId xmlns:a16="http://schemas.microsoft.com/office/drawing/2014/main" id="{0EDE719F-1281-48CD-976E-B3A0F492F84F}"/>
               </a:ext>
             </a:extLst>
           </p:cNvPr>
@@ -3800,7 +3800,7 @@
           <p:cNvPr id="6" name="Slide Number Placeholder 5">
             <a:extLst xmlns:a="http://schemas.openxmlformats.org/drawingml/2006/main">
               <a:ext uri="{FF2B5EF4-FFF2-40B4-BE49-F238E27FC236}">
-                <a16:creationId xmlns:a16="http://schemas.microsoft.com/office/drawing/2014/main" id="{B904A714-8BF3-40F8-BD92-31C91C96F515}"/>
+                <a16:creationId xmlns:a16="http://schemas.microsoft.com/office/drawing/2014/main" id="{FC1B0D7A-13C8-4ADC-8E49-BBC6808403D0}"/>
               </a:ext>
             </a:extLst>
           </p:cNvPr>
@@ -3845,7 +3845,7 @@
           <p:cNvPr id="2" name="Title 1">
             <a:extLst xmlns:a="http://schemas.openxmlformats.org/drawingml/2006/main">
               <a:ext uri="{FF2B5EF4-FFF2-40B4-BE49-F238E27FC236}">
-                <a16:creationId xmlns:a16="http://schemas.microsoft.com/office/drawing/2014/main" id="{D3A56237-E44C-461A-9FD3-6B9E8214FCDE}"/>
+                <a16:creationId xmlns:a16="http://schemas.microsoft.com/office/drawing/2014/main" id="{95F79DB7-EDE6-466E-A882-05D5E9C9F43F}"/>
               </a:ext>
             </a:extLst>
           </p:cNvPr>
@@ -3873,7 +3873,7 @@
           <p:cNvPr id="3" name="Vertical Text Placeholder 2">
             <a:extLst xmlns:a="http://schemas.openxmlformats.org/drawingml/2006/main">
               <a:ext uri="{FF2B5EF4-FFF2-40B4-BE49-F238E27FC236}">
-                <a16:creationId xmlns:a16="http://schemas.microsoft.com/office/drawing/2014/main" id="{A3E544F5-70A4-498D-B059-B4E3D09429E1}"/>
+                <a16:creationId xmlns:a16="http://schemas.microsoft.com/office/drawing/2014/main" id="{F661EC00-F948-4CFA-B15B-91F699C1539C}"/>
               </a:ext>
             </a:extLst>
           </p:cNvPr>
@@ -3936,7 +3936,7 @@
           <p:cNvPr id="4" name="Date Placeholder 3">
             <a:extLst xmlns:a="http://schemas.openxmlformats.org/drawingml/2006/main">
               <a:ext uri="{FF2B5EF4-FFF2-40B4-BE49-F238E27FC236}">
-                <a16:creationId xmlns:a16="http://schemas.microsoft.com/office/drawing/2014/main" id="{A94F9EFF-AC0E-4A3F-9A09-41AADD60BE1E}"/>
+                <a16:creationId xmlns:a16="http://schemas.microsoft.com/office/drawing/2014/main" id="{426070CB-36B6-4269-9F39-EFE0ECE8F8D0}"/>
               </a:ext>
             </a:extLst>
           </p:cNvPr>
@@ -3964,7 +3964,7 @@
           <p:cNvPr id="5" name="Footer Placeholder 4">
             <a:extLst xmlns:a="http://schemas.openxmlformats.org/drawingml/2006/main">
               <a:ext uri="{FF2B5EF4-FFF2-40B4-BE49-F238E27FC236}">
-                <a16:creationId xmlns:a16="http://schemas.microsoft.com/office/drawing/2014/main" id="{2FBEBD1C-78A3-4A46-A954-87A8F311B24B}"/>
+                <a16:creationId xmlns:a16="http://schemas.microsoft.com/office/drawing/2014/main" id="{E14D633A-474B-43C4-8FAA-CCBCB6A942F4}"/>
               </a:ext>
             </a:extLst>
           </p:cNvPr>
@@ -3989,7 +3989,7 @@
           <p:cNvPr id="6" name="Slide Number Placeholder 5">
             <a:extLst xmlns:a="http://schemas.openxmlformats.org/drawingml/2006/main">
               <a:ext uri="{FF2B5EF4-FFF2-40B4-BE49-F238E27FC236}">
-                <a16:creationId xmlns:a16="http://schemas.microsoft.com/office/drawing/2014/main" id="{5779D0B3-AB05-4B4C-BB53-3CD493F44416}"/>
+                <a16:creationId xmlns:a16="http://schemas.microsoft.com/office/drawing/2014/main" id="{83A81F3A-A06D-4DDD-94F8-C78B378EAE07}"/>
               </a:ext>
             </a:extLst>
           </p:cNvPr>
@@ -4034,7 +4034,7 @@
           <p:cNvPr id="2" name="Vertical Title 1">
             <a:extLst xmlns:a="http://schemas.openxmlformats.org/drawingml/2006/main">
               <a:ext uri="{FF2B5EF4-FFF2-40B4-BE49-F238E27FC236}">
-                <a16:creationId xmlns:a16="http://schemas.microsoft.com/office/drawing/2014/main" id="{92CBA251-D701-47D5-BCFD-1000FEB71E23}"/>
+                <a16:creationId xmlns:a16="http://schemas.microsoft.com/office/drawing/2014/main" id="{0F3873A2-EAE2-48F7-8816-74DA9790AA09}"/>
               </a:ext>
             </a:extLst>
           </p:cNvPr>
@@ -4067,7 +4067,7 @@
           <p:cNvPr id="3" name="Vertical Text Placeholder 2">
             <a:extLst xmlns:a="http://schemas.openxmlformats.org/drawingml/2006/main">
               <a:ext uri="{FF2B5EF4-FFF2-40B4-BE49-F238E27FC236}">
-                <a16:creationId xmlns:a16="http://schemas.microsoft.com/office/drawing/2014/main" id="{077723AF-24CE-40E6-A197-D883162A87C4}"/>
+                <a16:creationId xmlns:a16="http://schemas.microsoft.com/office/drawing/2014/main" id="{F56CBD85-D31C-47DC-9EA2-E61A3640B0FD}"/>
               </a:ext>
             </a:extLst>
           </p:cNvPr>
@@ -4135,7 +4135,7 @@
           <p:cNvPr id="4" name="Date Placeholder 3">
             <a:extLst xmlns:a="http://schemas.openxmlformats.org/drawingml/2006/main">
               <a:ext uri="{FF2B5EF4-FFF2-40B4-BE49-F238E27FC236}">
-                <a16:creationId xmlns:a16="http://schemas.microsoft.com/office/drawing/2014/main" id="{BDEDDBC9-DC41-4CA8-9479-B9A278AA1556}"/>
+                <a16:creationId xmlns:a16="http://schemas.microsoft.com/office/drawing/2014/main" id="{91EB44A8-80E8-401F-8858-36619B4C4FF3}"/>
               </a:ext>
             </a:extLst>
           </p:cNvPr>
@@ -4163,7 +4163,7 @@
           <p:cNvPr id="5" name="Footer Placeholder 4">
             <a:extLst xmlns:a="http://schemas.openxmlformats.org/drawingml/2006/main">
               <a:ext uri="{FF2B5EF4-FFF2-40B4-BE49-F238E27FC236}">
-                <a16:creationId xmlns:a16="http://schemas.microsoft.com/office/drawing/2014/main" id="{9FC5D08E-5062-4F94-9697-D13712E9252D}"/>
+                <a16:creationId xmlns:a16="http://schemas.microsoft.com/office/drawing/2014/main" id="{7045CB85-3000-429E-B9E7-DF0E85DB1F8B}"/>
               </a:ext>
             </a:extLst>
           </p:cNvPr>
@@ -4188,7 +4188,7 @@
           <p:cNvPr id="6" name="Slide Number Placeholder 5">
             <a:extLst xmlns:a="http://schemas.openxmlformats.org/drawingml/2006/main">
               <a:ext uri="{FF2B5EF4-FFF2-40B4-BE49-F238E27FC236}">
-                <a16:creationId xmlns:a16="http://schemas.microsoft.com/office/drawing/2014/main" id="{5E38F9AB-FE32-49AA-8F21-3404802D2219}"/>
+                <a16:creationId xmlns:a16="http://schemas.microsoft.com/office/drawing/2014/main" id="{C8F3AFDA-5E41-49CA-84FC-CC1116D62D5C}"/>
               </a:ext>
             </a:extLst>
           </p:cNvPr>
@@ -4233,7 +4233,7 @@
           <p:cNvPr id="2" name="Title 1">
             <a:extLst xmlns:a="http://schemas.openxmlformats.org/drawingml/2006/main">
               <a:ext uri="{FF2B5EF4-FFF2-40B4-BE49-F238E27FC236}">
-                <a16:creationId xmlns:a16="http://schemas.microsoft.com/office/drawing/2014/main" id="{369E1386-479F-4405-BB6E-39ED1A5986AD}"/>
+                <a16:creationId xmlns:a16="http://schemas.microsoft.com/office/drawing/2014/main" id="{67D3FAD7-0085-45B4-836C-0C5AEF9280FC}"/>
               </a:ext>
             </a:extLst>
           </p:cNvPr>
@@ -4261,7 +4261,7 @@
           <p:cNvPr id="3" name="Content Placeholder 2">
             <a:extLst xmlns:a="http://schemas.openxmlformats.org/drawingml/2006/main">
               <a:ext uri="{FF2B5EF4-FFF2-40B4-BE49-F238E27FC236}">
-                <a16:creationId xmlns:a16="http://schemas.microsoft.com/office/drawing/2014/main" id="{8B78AEDA-2D12-4CA6-81EB-A0D615948801}"/>
+                <a16:creationId xmlns:a16="http://schemas.microsoft.com/office/drawing/2014/main" id="{309A5883-62CD-4011-9108-480B740FA257}"/>
               </a:ext>
             </a:extLst>
           </p:cNvPr>
@@ -4324,7 +4324,7 @@
           <p:cNvPr id="4" name="Date Placeholder 3">
             <a:extLst xmlns:a="http://schemas.openxmlformats.org/drawingml/2006/main">
               <a:ext uri="{FF2B5EF4-FFF2-40B4-BE49-F238E27FC236}">
-                <a16:creationId xmlns:a16="http://schemas.microsoft.com/office/drawing/2014/main" id="{70DB5119-D75B-4DAF-BEDF-88655D99B43D}"/>
+                <a16:creationId xmlns:a16="http://schemas.microsoft.com/office/drawing/2014/main" id="{1F6A3706-7A3C-4420-A5C4-0DAE8E4E4718}"/>
               </a:ext>
             </a:extLst>
           </p:cNvPr>
@@ -4352,7 +4352,7 @@
           <p:cNvPr id="5" name="Footer Placeholder 4">
             <a:extLst xmlns:a="http://schemas.openxmlformats.org/drawingml/2006/main">
               <a:ext uri="{FF2B5EF4-FFF2-40B4-BE49-F238E27FC236}">
-                <a16:creationId xmlns:a16="http://schemas.microsoft.com/office/drawing/2014/main" id="{29A4AC7A-A622-4299-9A84-33D8A29510D4}"/>
+                <a16:creationId xmlns:a16="http://schemas.microsoft.com/office/drawing/2014/main" id="{F4BFEBAB-767A-4A51-AD57-B5D4C6831B16}"/>
               </a:ext>
             </a:extLst>
           </p:cNvPr>
@@ -4377,7 +4377,7 @@
           <p:cNvPr id="6" name="Slide Number Placeholder 5">
             <a:extLst xmlns:a="http://schemas.openxmlformats.org/drawingml/2006/main">
               <a:ext uri="{FF2B5EF4-FFF2-40B4-BE49-F238E27FC236}">
-                <a16:creationId xmlns:a16="http://schemas.microsoft.com/office/drawing/2014/main" id="{D008EA13-173B-4101-A827-D11BD5911FF2}"/>
+                <a16:creationId xmlns:a16="http://schemas.microsoft.com/office/drawing/2014/main" id="{912ABCEA-76B1-41B8-A69B-5AF5CA5E0B1A}"/>
               </a:ext>
             </a:extLst>
           </p:cNvPr>
@@ -4422,7 +4422,7 @@
           <p:cNvPr id="2" name="Title 1">
             <a:extLst xmlns:a="http://schemas.openxmlformats.org/drawingml/2006/main">
               <a:ext uri="{FF2B5EF4-FFF2-40B4-BE49-F238E27FC236}">
-                <a16:creationId xmlns:a16="http://schemas.microsoft.com/office/drawing/2014/main" id="{CD9BBB2E-F249-4B8D-A9C1-6CC1F9B1D541}"/>
+                <a16:creationId xmlns:a16="http://schemas.microsoft.com/office/drawing/2014/main" id="{C4122EB5-69D2-4A50-9F60-35B9368FF79E}"/>
               </a:ext>
             </a:extLst>
           </p:cNvPr>
@@ -4460,7 +4460,7 @@
           <p:cNvPr id="3" name="Text Placeholder 2">
             <a:extLst xmlns:a="http://schemas.openxmlformats.org/drawingml/2006/main">
               <a:ext uri="{FF2B5EF4-FFF2-40B4-BE49-F238E27FC236}">
-                <a16:creationId xmlns:a16="http://schemas.microsoft.com/office/drawing/2014/main" id="{BF7445B9-EC08-4748-9021-1A8B1885F92E}"/>
+                <a16:creationId xmlns:a16="http://schemas.microsoft.com/office/drawing/2014/main" id="{8EE14D84-20BB-4E29-8278-DC6D5016E501}"/>
               </a:ext>
             </a:extLst>
           </p:cNvPr>
@@ -4586,7 +4586,7 @@
           <p:cNvPr id="4" name="Date Placeholder 3">
             <a:extLst xmlns:a="http://schemas.openxmlformats.org/drawingml/2006/main">
               <a:ext uri="{FF2B5EF4-FFF2-40B4-BE49-F238E27FC236}">
-                <a16:creationId xmlns:a16="http://schemas.microsoft.com/office/drawing/2014/main" id="{3FDA1B4D-F679-4B41-B6E2-0082E95F0A94}"/>
+                <a16:creationId xmlns:a16="http://schemas.microsoft.com/office/drawing/2014/main" id="{6A8105B4-F6FA-4A7A-9CD8-919D33963299}"/>
               </a:ext>
             </a:extLst>
           </p:cNvPr>
@@ -4614,7 +4614,7 @@
           <p:cNvPr id="5" name="Footer Placeholder 4">
             <a:extLst xmlns:a="http://schemas.openxmlformats.org/drawingml/2006/main">
               <a:ext uri="{FF2B5EF4-FFF2-40B4-BE49-F238E27FC236}">
-                <a16:creationId xmlns:a16="http://schemas.microsoft.com/office/drawing/2014/main" id="{3282E0E1-2519-43FF-BAAD-6B82448DB204}"/>
+                <a16:creationId xmlns:a16="http://schemas.microsoft.com/office/drawing/2014/main" id="{9A7C3F2B-74BE-4FE6-9664-E61259447295}"/>
               </a:ext>
             </a:extLst>
           </p:cNvPr>
@@ -4639,7 +4639,7 @@
           <p:cNvPr id="6" name="Slide Number Placeholder 5">
             <a:extLst xmlns:a="http://schemas.openxmlformats.org/drawingml/2006/main">
               <a:ext uri="{FF2B5EF4-FFF2-40B4-BE49-F238E27FC236}">
-                <a16:creationId xmlns:a16="http://schemas.microsoft.com/office/drawing/2014/main" id="{D0664119-D961-4B24-8854-17306C36C8C5}"/>
+                <a16:creationId xmlns:a16="http://schemas.microsoft.com/office/drawing/2014/main" id="{2C723FE0-9BE8-4C5C-9C55-DE189FD45279}"/>
               </a:ext>
             </a:extLst>
           </p:cNvPr>
@@ -4684,7 +4684,7 @@
           <p:cNvPr id="2" name="Title 1">
             <a:extLst xmlns:a="http://schemas.openxmlformats.org/drawingml/2006/main">
               <a:ext uri="{FF2B5EF4-FFF2-40B4-BE49-F238E27FC236}">
-                <a16:creationId xmlns:a16="http://schemas.microsoft.com/office/drawing/2014/main" id="{EEF933FF-DADF-4CF1-88BE-3FA108AEE842}"/>
+                <a16:creationId xmlns:a16="http://schemas.microsoft.com/office/drawing/2014/main" id="{2171030C-6065-49D8-8A9D-618A4C84B2F5}"/>
               </a:ext>
             </a:extLst>
           </p:cNvPr>
@@ -4712,7 +4712,7 @@
           <p:cNvPr id="3" name="Content Placeholder 2">
             <a:extLst xmlns:a="http://schemas.openxmlformats.org/drawingml/2006/main">
               <a:ext uri="{FF2B5EF4-FFF2-40B4-BE49-F238E27FC236}">
-                <a16:creationId xmlns:a16="http://schemas.microsoft.com/office/drawing/2014/main" id="{2D90623F-26E7-47C8-90D9-B908751BAEE0}"/>
+                <a16:creationId xmlns:a16="http://schemas.microsoft.com/office/drawing/2014/main" id="{EA6E140C-F660-4E41-8167-0501FF322B0D}"/>
               </a:ext>
             </a:extLst>
           </p:cNvPr>
@@ -4817,7 +4817,7 @@
           <p:cNvPr id="4" name="Content Placeholder 3">
             <a:extLst xmlns:a="http://schemas.openxmlformats.org/drawingml/2006/main">
               <a:ext uri="{FF2B5EF4-FFF2-40B4-BE49-F238E27FC236}">
-                <a16:creationId xmlns:a16="http://schemas.microsoft.com/office/drawing/2014/main" id="{DE88AB01-D94A-48F6-934D-72861F8466DE}"/>
+                <a16:creationId xmlns:a16="http://schemas.microsoft.com/office/drawing/2014/main" id="{374BA057-33DF-4999-8C2E-D8EF8E188F1C}"/>
               </a:ext>
             </a:extLst>
           </p:cNvPr>
@@ -4922,7 +4922,7 @@
           <p:cNvPr id="5" name="Date Placeholder 4">
             <a:extLst xmlns:a="http://schemas.openxmlformats.org/drawingml/2006/main">
               <a:ext uri="{FF2B5EF4-FFF2-40B4-BE49-F238E27FC236}">
-                <a16:creationId xmlns:a16="http://schemas.microsoft.com/office/drawing/2014/main" id="{063E2AE4-2761-44ED-9BAF-0A3A4F64B195}"/>
+                <a16:creationId xmlns:a16="http://schemas.microsoft.com/office/drawing/2014/main" id="{931540D3-C5EB-4EBD-B435-B55A445B1037}"/>
               </a:ext>
             </a:extLst>
           </p:cNvPr>
@@ -4950,7 +4950,7 @@
           <p:cNvPr id="6" name="Footer Placeholder 5">
             <a:extLst xmlns:a="http://schemas.openxmlformats.org/drawingml/2006/main">
               <a:ext uri="{FF2B5EF4-FFF2-40B4-BE49-F238E27FC236}">
-                <a16:creationId xmlns:a16="http://schemas.microsoft.com/office/drawing/2014/main" id="{5E271DFC-1F66-4704-A71B-9FF78BB8FEEC}"/>
+                <a16:creationId xmlns:a16="http://schemas.microsoft.com/office/drawing/2014/main" id="{5CB02741-4990-4F48-96EA-16AA15FF6070}"/>
               </a:ext>
             </a:extLst>
           </p:cNvPr>
@@ -4975,7 +4975,7 @@
           <p:cNvPr id="7" name="Slide Number Placeholder 6">
             <a:extLst xmlns:a="http://schemas.openxmlformats.org/drawingml/2006/main">
               <a:ext uri="{FF2B5EF4-FFF2-40B4-BE49-F238E27FC236}">
-                <a16:creationId xmlns:a16="http://schemas.microsoft.com/office/drawing/2014/main" id="{86E5F2F0-E504-433E-A334-5C17AB4712A9}"/>
+                <a16:creationId xmlns:a16="http://schemas.microsoft.com/office/drawing/2014/main" id="{6BCD1B5E-5633-416C-B760-2304B71FAB7E}"/>
               </a:ext>
             </a:extLst>
           </p:cNvPr>
@@ -5020,7 +5020,7 @@
           <p:cNvPr id="2" name="Title 1">
             <a:extLst xmlns:a="http://schemas.openxmlformats.org/drawingml/2006/main">
               <a:ext uri="{FF2B5EF4-FFF2-40B4-BE49-F238E27FC236}">
-                <a16:creationId xmlns:a16="http://schemas.microsoft.com/office/drawing/2014/main" id="{50831CE1-E4DE-49D7-8764-B53FD46A6121}"/>
+                <a16:creationId xmlns:a16="http://schemas.microsoft.com/office/drawing/2014/main" id="{50E67B1B-CEF5-4EC9-89FB-3DC04AD50F80}"/>
               </a:ext>
             </a:extLst>
           </p:cNvPr>
@@ -5053,7 +5053,7 @@
           <p:cNvPr id="3" name="Text Placeholder 2">
             <a:extLst xmlns:a="http://schemas.openxmlformats.org/drawingml/2006/main">
               <a:ext uri="{FF2B5EF4-FFF2-40B4-BE49-F238E27FC236}">
-                <a16:creationId xmlns:a16="http://schemas.microsoft.com/office/drawing/2014/main" id="{26255B19-8AA5-4768-9B95-DEF1016AC89F}"/>
+                <a16:creationId xmlns:a16="http://schemas.microsoft.com/office/drawing/2014/main" id="{91C2E8A2-4996-449D-BD85-1A74A99B074A}"/>
               </a:ext>
             </a:extLst>
           </p:cNvPr>
@@ -5125,7 +5125,7 @@
           <p:cNvPr id="4" name="Content Placeholder 3">
             <a:extLst xmlns:a="http://schemas.openxmlformats.org/drawingml/2006/main">
               <a:ext uri="{FF2B5EF4-FFF2-40B4-BE49-F238E27FC236}">
-                <a16:creationId xmlns:a16="http://schemas.microsoft.com/office/drawing/2014/main" id="{A72D9497-9466-4ABD-AA96-111A274B4F3F}"/>
+                <a16:creationId xmlns:a16="http://schemas.microsoft.com/office/drawing/2014/main" id="{7D006DFA-81A6-4696-9F40-89571E57BA1C}"/>
               </a:ext>
             </a:extLst>
           </p:cNvPr>
@@ -5230,7 +5230,7 @@
           <p:cNvPr id="5" name="Text Placeholder 4">
             <a:extLst xmlns:a="http://schemas.openxmlformats.org/drawingml/2006/main">
               <a:ext uri="{FF2B5EF4-FFF2-40B4-BE49-F238E27FC236}">
-                <a16:creationId xmlns:a16="http://schemas.microsoft.com/office/drawing/2014/main" id="{1AF93FEC-C37C-4AFA-A59C-A8DC337410E7}"/>
+                <a16:creationId xmlns:a16="http://schemas.microsoft.com/office/drawing/2014/main" id="{4B1C0AB5-B4D2-490B-95E3-5A5F05B819D7}"/>
               </a:ext>
             </a:extLst>
           </p:cNvPr>
@@ -5302,7 +5302,7 @@
           <p:cNvPr id="6" name="Content Placeholder 5">
             <a:extLst xmlns:a="http://schemas.openxmlformats.org/drawingml/2006/main">
               <a:ext uri="{FF2B5EF4-FFF2-40B4-BE49-F238E27FC236}">
-                <a16:creationId xmlns:a16="http://schemas.microsoft.com/office/drawing/2014/main" id="{CD2BEEAD-49DB-415A-8A21-8C1EF802533A}"/>
+                <a16:creationId xmlns:a16="http://schemas.microsoft.com/office/drawing/2014/main" id="{99EBE332-B52E-48F9-A4AD-04A823B73E3E}"/>
               </a:ext>
             </a:extLst>
           </p:cNvPr>
@@ -5407,7 +5407,7 @@
           <p:cNvPr id="7" name="Date Placeholder 6">
             <a:extLst xmlns:a="http://schemas.openxmlformats.org/drawingml/2006/main">
               <a:ext uri="{FF2B5EF4-FFF2-40B4-BE49-F238E27FC236}">
-                <a16:creationId xmlns:a16="http://schemas.microsoft.com/office/drawing/2014/main" id="{1B823230-E387-4F9E-B0D9-BA62DCBB8D1E}"/>
+                <a16:creationId xmlns:a16="http://schemas.microsoft.com/office/drawing/2014/main" id="{3D7F5171-BA0D-42A4-AEE4-B54A29EF5C62}"/>
               </a:ext>
             </a:extLst>
           </p:cNvPr>
@@ -5435,7 +5435,7 @@
           <p:cNvPr id="8" name="Footer Placeholder 7">
             <a:extLst xmlns:a="http://schemas.openxmlformats.org/drawingml/2006/main">
               <a:ext uri="{FF2B5EF4-FFF2-40B4-BE49-F238E27FC236}">
-                <a16:creationId xmlns:a16="http://schemas.microsoft.com/office/drawing/2014/main" id="{C094D13A-69BE-4599-BB8C-1B43CDD77C3A}"/>
+                <a16:creationId xmlns:a16="http://schemas.microsoft.com/office/drawing/2014/main" id="{901B7606-16AF-4005-8F81-DBDF206B000D}"/>
               </a:ext>
             </a:extLst>
           </p:cNvPr>
@@ -5460,7 +5460,7 @@
           <p:cNvPr id="9" name="Slide Number Placeholder 8">
             <a:extLst xmlns:a="http://schemas.openxmlformats.org/drawingml/2006/main">
               <a:ext uri="{FF2B5EF4-FFF2-40B4-BE49-F238E27FC236}">
-                <a16:creationId xmlns:a16="http://schemas.microsoft.com/office/drawing/2014/main" id="{ED3A832E-368C-4779-8B59-43DCE4236BA8}"/>
+                <a16:creationId xmlns:a16="http://schemas.microsoft.com/office/drawing/2014/main" id="{BA8F9DFC-92FD-4F1D-9783-36A1E56D4F41}"/>
               </a:ext>
             </a:extLst>
           </p:cNvPr>
@@ -5505,7 +5505,7 @@
           <p:cNvPr id="2" name="Title 1">
             <a:extLst xmlns:a="http://schemas.openxmlformats.org/drawingml/2006/main">
               <a:ext uri="{FF2B5EF4-FFF2-40B4-BE49-F238E27FC236}">
-                <a16:creationId xmlns:a16="http://schemas.microsoft.com/office/drawing/2014/main" id="{89A745BD-3C65-4912-9DFC-6F213993B4D7}"/>
+                <a16:creationId xmlns:a16="http://schemas.microsoft.com/office/drawing/2014/main" id="{A550108E-B957-43F6-8A1A-8FA5DAD5ABD1}"/>
               </a:ext>
             </a:extLst>
           </p:cNvPr>
@@ -5533,7 +5533,7 @@
           <p:cNvPr id="3" name="Date Placeholder 2">
             <a:extLst xmlns:a="http://schemas.openxmlformats.org/drawingml/2006/main">
               <a:ext uri="{FF2B5EF4-FFF2-40B4-BE49-F238E27FC236}">
-                <a16:creationId xmlns:a16="http://schemas.microsoft.com/office/drawing/2014/main" id="{9BA1DF52-A858-4A8E-8AF8-36271742A4A2}"/>
+                <a16:creationId xmlns:a16="http://schemas.microsoft.com/office/drawing/2014/main" id="{D333789D-36B5-427B-8E38-738A98931151}"/>
               </a:ext>
             </a:extLst>
           </p:cNvPr>
@@ -5561,7 +5561,7 @@
           <p:cNvPr id="4" name="Footer Placeholder 3">
             <a:extLst xmlns:a="http://schemas.openxmlformats.org/drawingml/2006/main">
               <a:ext uri="{FF2B5EF4-FFF2-40B4-BE49-F238E27FC236}">
-                <a16:creationId xmlns:a16="http://schemas.microsoft.com/office/drawing/2014/main" id="{F64780B2-05AC-4AC4-B825-B7E62F168234}"/>
+                <a16:creationId xmlns:a16="http://schemas.microsoft.com/office/drawing/2014/main" id="{1418B133-D9A3-4AC5-BD18-C5AC3CC1FAB9}"/>
               </a:ext>
             </a:extLst>
           </p:cNvPr>
@@ -5586,7 +5586,7 @@
           <p:cNvPr id="5" name="Slide Number Placeholder 4">
             <a:extLst xmlns:a="http://schemas.openxmlformats.org/drawingml/2006/main">
               <a:ext uri="{FF2B5EF4-FFF2-40B4-BE49-F238E27FC236}">
-                <a16:creationId xmlns:a16="http://schemas.microsoft.com/office/drawing/2014/main" id="{3C7BE503-1197-4B34-B7B3-CF92462FA1D3}"/>
+                <a16:creationId xmlns:a16="http://schemas.microsoft.com/office/drawing/2014/main" id="{20B7525B-3558-41A9-BC92-77593EEB560D}"/>
               </a:ext>
             </a:extLst>
           </p:cNvPr>
@@ -5631,7 +5631,7 @@
           <p:cNvPr id="2" name="Date Placeholder 1">
             <a:extLst xmlns:a="http://schemas.openxmlformats.org/drawingml/2006/main">
               <a:ext uri="{FF2B5EF4-FFF2-40B4-BE49-F238E27FC236}">
-                <a16:creationId xmlns:a16="http://schemas.microsoft.com/office/drawing/2014/main" id="{812EECEA-0FDF-4581-A6F3-408E651ED911}"/>
+                <a16:creationId xmlns:a16="http://schemas.microsoft.com/office/drawing/2014/main" id="{FBEC506F-F92B-4EC5-A954-BF3FF5B2C789}"/>
               </a:ext>
             </a:extLst>
           </p:cNvPr>
@@ -5659,7 +5659,7 @@
           <p:cNvPr id="3" name="Footer Placeholder 2">
             <a:extLst xmlns:a="http://schemas.openxmlformats.org/drawingml/2006/main">
               <a:ext uri="{FF2B5EF4-FFF2-40B4-BE49-F238E27FC236}">
-                <a16:creationId xmlns:a16="http://schemas.microsoft.com/office/drawing/2014/main" id="{15CAC49F-6BDB-4680-BDE1-BC42A2612E75}"/>
+                <a16:creationId xmlns:a16="http://schemas.microsoft.com/office/drawing/2014/main" id="{81413566-FA15-4E23-9C6D-DC7E0620CE83}"/>
               </a:ext>
             </a:extLst>
           </p:cNvPr>
@@ -5684,7 +5684,7 @@
           <p:cNvPr id="4" name="Slide Number Placeholder 3">
             <a:extLst xmlns:a="http://schemas.openxmlformats.org/drawingml/2006/main">
               <a:ext uri="{FF2B5EF4-FFF2-40B4-BE49-F238E27FC236}">
-                <a16:creationId xmlns:a16="http://schemas.microsoft.com/office/drawing/2014/main" id="{65233AE2-7950-44FE-AAF3-416366685B56}"/>
+                <a16:creationId xmlns:a16="http://schemas.microsoft.com/office/drawing/2014/main" id="{55FB8566-F8DB-40EA-8F6C-E9BA7BEFD39F}"/>
               </a:ext>
             </a:extLst>
           </p:cNvPr>
@@ -5729,7 +5729,7 @@
           <p:cNvPr id="2" name="Title 1">
             <a:extLst xmlns:a="http://schemas.openxmlformats.org/drawingml/2006/main">
               <a:ext uri="{FF2B5EF4-FFF2-40B4-BE49-F238E27FC236}">
-                <a16:creationId xmlns:a16="http://schemas.microsoft.com/office/drawing/2014/main" id="{6A223441-9A09-4FA6-A4CB-3786E39523A4}"/>
+                <a16:creationId xmlns:a16="http://schemas.microsoft.com/office/drawing/2014/main" id="{E6CE9CD6-B401-455C-9A05-55CF81161F2A}"/>
               </a:ext>
             </a:extLst>
           </p:cNvPr>
@@ -5767,7 +5767,7 @@
           <p:cNvPr id="3" name="Content Placeholder 2">
             <a:extLst xmlns:a="http://schemas.openxmlformats.org/drawingml/2006/main">
               <a:ext uri="{FF2B5EF4-FFF2-40B4-BE49-F238E27FC236}">
-                <a16:creationId xmlns:a16="http://schemas.microsoft.com/office/drawing/2014/main" id="{CE5168F5-476B-4A89-87E0-24C7A37A9B45}"/>
+                <a16:creationId xmlns:a16="http://schemas.microsoft.com/office/drawing/2014/main" id="{09FA535E-7FDB-443E-80EC-30792C41EE62}"/>
               </a:ext>
             </a:extLst>
           </p:cNvPr>
@@ -5872,7 +5872,7 @@
           <p:cNvPr id="4" name="Text Placeholder 3">
             <a:extLst xmlns:a="http://schemas.openxmlformats.org/drawingml/2006/main">
               <a:ext uri="{FF2B5EF4-FFF2-40B4-BE49-F238E27FC236}">
-                <a16:creationId xmlns:a16="http://schemas.microsoft.com/office/drawing/2014/main" id="{1D2D08FF-EB9D-45D6-81AB-77B71B4EDE23}"/>
+                <a16:creationId xmlns:a16="http://schemas.microsoft.com/office/drawing/2014/main" id="{C333B990-D3D2-4659-9B3F-4B90515F44C7}"/>
               </a:ext>
             </a:extLst>
           </p:cNvPr>
@@ -5944,7 +5944,7 @@
           <p:cNvPr id="5" name="Date Placeholder 4">
             <a:extLst xmlns:a="http://schemas.openxmlformats.org/drawingml/2006/main">
               <a:ext uri="{FF2B5EF4-FFF2-40B4-BE49-F238E27FC236}">
-                <a16:creationId xmlns:a16="http://schemas.microsoft.com/office/drawing/2014/main" id="{D5A69B0A-B13E-4FEA-9B39-9DAB0DEB43D7}"/>
+                <a16:creationId xmlns:a16="http://schemas.microsoft.com/office/drawing/2014/main" id="{938901E3-C307-4A4E-AEF4-25D3C30D1CDB}"/>
               </a:ext>
             </a:extLst>
           </p:cNvPr>
@@ -5972,7 +5972,7 @@
           <p:cNvPr id="6" name="Footer Placeholder 5">
             <a:extLst xmlns:a="http://schemas.openxmlformats.org/drawingml/2006/main">
               <a:ext uri="{FF2B5EF4-FFF2-40B4-BE49-F238E27FC236}">
-                <a16:creationId xmlns:a16="http://schemas.microsoft.com/office/drawing/2014/main" id="{DB058D99-B1F0-47DB-A4E7-3B3FD801C873}"/>
+                <a16:creationId xmlns:a16="http://schemas.microsoft.com/office/drawing/2014/main" id="{8F9A89AB-5515-4094-BF5E-7F2046ADC0D6}"/>
               </a:ext>
             </a:extLst>
           </p:cNvPr>
@@ -5997,7 +5997,7 @@
           <p:cNvPr id="7" name="Slide Number Placeholder 6">
             <a:extLst xmlns:a="http://schemas.openxmlformats.org/drawingml/2006/main">
               <a:ext uri="{FF2B5EF4-FFF2-40B4-BE49-F238E27FC236}">
-                <a16:creationId xmlns:a16="http://schemas.microsoft.com/office/drawing/2014/main" id="{F5FE373B-3E89-43A3-9986-3BFF8A3E4B12}"/>
+                <a16:creationId xmlns:a16="http://schemas.microsoft.com/office/drawing/2014/main" id="{CC4B240E-4CDB-4668-9307-A2BEA845A2A7}"/>
               </a:ext>
             </a:extLst>
           </p:cNvPr>
@@ -6042,7 +6042,7 @@
           <p:cNvPr id="2" name="Title 1">
             <a:extLst xmlns:a="http://schemas.openxmlformats.org/drawingml/2006/main">
               <a:ext uri="{FF2B5EF4-FFF2-40B4-BE49-F238E27FC236}">
-                <a16:creationId xmlns:a16="http://schemas.microsoft.com/office/drawing/2014/main" id="{CAECC853-DD45-446F-BCD8-1E729585C46F}"/>
+                <a16:creationId xmlns:a16="http://schemas.microsoft.com/office/drawing/2014/main" id="{7AF72CC0-780E-4181-8D5B-4CA67ADB1FA4}"/>
               </a:ext>
             </a:extLst>
           </p:cNvPr>
@@ -6080,7 +6080,7 @@
           <p:cNvPr id="3" name="Picture Placeholder 2">
             <a:extLst xmlns:a="http://schemas.openxmlformats.org/drawingml/2006/main">
               <a:ext uri="{FF2B5EF4-FFF2-40B4-BE49-F238E27FC236}">
-                <a16:creationId xmlns:a16="http://schemas.microsoft.com/office/drawing/2014/main" id="{B22D8153-2F78-4460-8073-B6BF221517BC}"/>
+                <a16:creationId xmlns:a16="http://schemas.microsoft.com/office/drawing/2014/main" id="{4FC2E5C4-3C26-45CE-967D-B4EE0345F40C}"/>
               </a:ext>
             </a:extLst>
           </p:cNvPr>
@@ -6147,7 +6147,7 @@
           <p:cNvPr id="4" name="Text Placeholder 3">
             <a:extLst xmlns:a="http://schemas.openxmlformats.org/drawingml/2006/main">
               <a:ext uri="{FF2B5EF4-FFF2-40B4-BE49-F238E27FC236}">
-                <a16:creationId xmlns:a16="http://schemas.microsoft.com/office/drawing/2014/main" id="{05EF4F1D-7539-46B4-904F-05A7E63EFCAF}"/>
+                <a16:creationId xmlns:a16="http://schemas.microsoft.com/office/drawing/2014/main" id="{58D09FC5-55AE-45AA-924C-313A39624FAE}"/>
               </a:ext>
             </a:extLst>
           </p:cNvPr>
@@ -6219,7 +6219,7 @@
           <p:cNvPr id="5" name="Date Placeholder 4">
             <a:extLst xmlns:a="http://schemas.openxmlformats.org/drawingml/2006/main">
               <a:ext uri="{FF2B5EF4-FFF2-40B4-BE49-F238E27FC236}">
-                <a16:creationId xmlns:a16="http://schemas.microsoft.com/office/drawing/2014/main" id="{5AC21956-047A-4EBD-9E40-0CD1431CDC53}"/>
+                <a16:creationId xmlns:a16="http://schemas.microsoft.com/office/drawing/2014/main" id="{75EB1D66-764F-4769-8680-4E831840CF8B}"/>
               </a:ext>
             </a:extLst>
           </p:cNvPr>
@@ -6247,7 +6247,7 @@
           <p:cNvPr id="6" name="Footer Placeholder 5">
             <a:extLst xmlns:a="http://schemas.openxmlformats.org/drawingml/2006/main">
               <a:ext uri="{FF2B5EF4-FFF2-40B4-BE49-F238E27FC236}">
-                <a16:creationId xmlns:a16="http://schemas.microsoft.com/office/drawing/2014/main" id="{CFF3A25D-2DDF-4CF5-97EE-64239ED86031}"/>
+                <a16:creationId xmlns:a16="http://schemas.microsoft.com/office/drawing/2014/main" id="{813A60E1-9B5D-4701-BF79-5F0739672672}"/>
               </a:ext>
             </a:extLst>
           </p:cNvPr>
@@ -6272,7 +6272,7 @@
           <p:cNvPr id="7" name="Slide Number Placeholder 6">
             <a:extLst xmlns:a="http://schemas.openxmlformats.org/drawingml/2006/main">
               <a:ext uri="{FF2B5EF4-FFF2-40B4-BE49-F238E27FC236}">
-                <a16:creationId xmlns:a16="http://schemas.microsoft.com/office/drawing/2014/main" id="{8BF994CC-5D7A-4C8C-B1EC-BF2B58DF1459}"/>
+                <a16:creationId xmlns:a16="http://schemas.microsoft.com/office/drawing/2014/main" id="{18290B2D-CD88-4115-94EA-9E48E1B1DB82}"/>
               </a:ext>
             </a:extLst>
           </p:cNvPr>
@@ -6322,7 +6322,7 @@
           <p:cNvPr id="2" name="Title Placeholder 1">
             <a:extLst xmlns:a="http://schemas.openxmlformats.org/drawingml/2006/main">
               <a:ext uri="{FF2B5EF4-FFF2-40B4-BE49-F238E27FC236}">
-                <a16:creationId xmlns:a16="http://schemas.microsoft.com/office/drawing/2014/main" id="{90A96664-769D-43FE-A539-9D70B11A165A}"/>
+                <a16:creationId xmlns:a16="http://schemas.microsoft.com/office/drawing/2014/main" id="{63AC5473-87EF-4DF6-82F2-8C0479A9B317}"/>
               </a:ext>
             </a:extLst>
           </p:cNvPr>
@@ -6360,7 +6360,7 @@
           <p:cNvPr id="3" name="Text Placeholder 2">
             <a:extLst xmlns:a="http://schemas.openxmlformats.org/drawingml/2006/main">
               <a:ext uri="{FF2B5EF4-FFF2-40B4-BE49-F238E27FC236}">
-                <a16:creationId xmlns:a16="http://schemas.microsoft.com/office/drawing/2014/main" id="{CCB52E71-E83F-48E8-8EA3-DBCE8AD664B2}"/>
+                <a16:creationId xmlns:a16="http://schemas.microsoft.com/office/drawing/2014/main" id="{0C26BC7B-7EA2-48A3-8562-0BA467D002F3}"/>
               </a:ext>
             </a:extLst>
           </p:cNvPr>
@@ -6433,7 +6433,7 @@
           <p:cNvPr id="4" name="Date Placeholder 3">
             <a:extLst xmlns:a="http://schemas.openxmlformats.org/drawingml/2006/main">
               <a:ext uri="{FF2B5EF4-FFF2-40B4-BE49-F238E27FC236}">
-                <a16:creationId xmlns:a16="http://schemas.microsoft.com/office/drawing/2014/main" id="{06D40F7F-A0FC-40C9-9D4A-00CFBA2F55F0}"/>
+                <a16:creationId xmlns:a16="http://schemas.microsoft.com/office/drawing/2014/main" id="{93200F80-51F5-43C8-A629-19EC546AC5AF}"/>
               </a:ext>
             </a:extLst>
           </p:cNvPr>
@@ -6480,7 +6480,7 @@
           <p:cNvPr id="5" name="Footer Placeholder 4">
             <a:extLst xmlns:a="http://schemas.openxmlformats.org/drawingml/2006/main">
               <a:ext uri="{FF2B5EF4-FFF2-40B4-BE49-F238E27FC236}">
-                <a16:creationId xmlns:a16="http://schemas.microsoft.com/office/drawing/2014/main" id="{67E261E0-431D-4CA3-9DC4-6E891DAC3768}"/>
+                <a16:creationId xmlns:a16="http://schemas.microsoft.com/office/drawing/2014/main" id="{94D0EA44-22FC-4B03-8392-2D5C4FD11D27}"/>
               </a:ext>
             </a:extLst>
           </p:cNvPr>
@@ -6524,7 +6524,7 @@
           <p:cNvPr id="6" name="Slide Number Placeholder 5">
             <a:extLst xmlns:a="http://schemas.openxmlformats.org/drawingml/2006/main">
               <a:ext uri="{FF2B5EF4-FFF2-40B4-BE49-F238E27FC236}">
-                <a16:creationId xmlns:a16="http://schemas.microsoft.com/office/drawing/2014/main" id="{67D1776E-1861-4550-B78B-90092D054B80}"/>
+                <a16:creationId xmlns:a16="http://schemas.microsoft.com/office/drawing/2014/main" id="{19E32D69-845D-4F51-BE19-54B2320C511A}"/>
               </a:ext>
             </a:extLst>
           </p:cNvPr>
@@ -6570,17 +6570,17 @@
   </p:cSld>
   <p:clrMap bg1="lt1" tx1="dk1" bg2="lt2" tx2="dk2" accent1="accent1" accent2="accent2" accent3="accent3" accent4="accent4" accent5="accent5" accent6="accent6" hlink="hlink" folHlink="folHlink"/>
   <p:sldLayoutIdLst>
-    <p:sldLayoutId xmlns:r="http://schemas.openxmlformats.org/officeDocument/2006/relationships" id="2147483649" r:id="Racd2d5a8780d4038"/>
-    <p:sldLayoutId xmlns:r="http://schemas.openxmlformats.org/officeDocument/2006/relationships" id="2147483650" r:id="R456b7b4278bb42f7"/>
-    <p:sldLayoutId xmlns:r="http://schemas.openxmlformats.org/officeDocument/2006/relationships" id="2147483651" r:id="R1a4501586762480b"/>
-    <p:sldLayoutId xmlns:r="http://schemas.openxmlformats.org/officeDocument/2006/relationships" id="2147483652" r:id="R2decf46b86ca4068"/>
-    <p:sldLayoutId xmlns:r="http://schemas.openxmlformats.org/officeDocument/2006/relationships" id="2147483653" r:id="Rec77bea5b1de4b88"/>
-    <p:sldLayoutId xmlns:r="http://schemas.openxmlformats.org/officeDocument/2006/relationships" id="2147483654" r:id="Ree3d02e7225b4f03"/>
-    <p:sldLayoutId xmlns:r="http://schemas.openxmlformats.org/officeDocument/2006/relationships" id="2147483655" r:id="R22f54154ac174c61"/>
-    <p:sldLayoutId xmlns:r="http://schemas.openxmlformats.org/officeDocument/2006/relationships" id="2147483656" r:id="Re666714145d84cea"/>
-    <p:sldLayoutId xmlns:r="http://schemas.openxmlformats.org/officeDocument/2006/relationships" id="2147483657" r:id="Ra0b41aca3d1b42b9"/>
-    <p:sldLayoutId xmlns:r="http://schemas.openxmlformats.org/officeDocument/2006/relationships" id="2147483658" r:id="Re22feb9a7ffa4f90"/>
-    <p:sldLayoutId xmlns:r="http://schemas.openxmlformats.org/officeDocument/2006/relationships" id="2147483659" r:id="R0aa30a9f79ea48b1"/>
+    <p:sldLayoutId xmlns:r="http://schemas.openxmlformats.org/officeDocument/2006/relationships" id="2147483649" r:id="R5900edfdd6714684"/>
+    <p:sldLayoutId xmlns:r="http://schemas.openxmlformats.org/officeDocument/2006/relationships" id="2147483650" r:id="R2c6c0c8c127c4f19"/>
+    <p:sldLayoutId xmlns:r="http://schemas.openxmlformats.org/officeDocument/2006/relationships" id="2147483651" r:id="Rc32789f209e14f06"/>
+    <p:sldLayoutId xmlns:r="http://schemas.openxmlformats.org/officeDocument/2006/relationships" id="2147483652" r:id="Rf80915e22d0446ec"/>
+    <p:sldLayoutId xmlns:r="http://schemas.openxmlformats.org/officeDocument/2006/relationships" id="2147483653" r:id="R8bbe74fce49b4b67"/>
+    <p:sldLayoutId xmlns:r="http://schemas.openxmlformats.org/officeDocument/2006/relationships" id="2147483654" r:id="R0398c8c994454858"/>
+    <p:sldLayoutId xmlns:r="http://schemas.openxmlformats.org/officeDocument/2006/relationships" id="2147483655" r:id="Rc7e4ae4de22343ce"/>
+    <p:sldLayoutId xmlns:r="http://schemas.openxmlformats.org/officeDocument/2006/relationships" id="2147483656" r:id="R06e98b95b87f4ece"/>
+    <p:sldLayoutId xmlns:r="http://schemas.openxmlformats.org/officeDocument/2006/relationships" id="2147483657" r:id="R63b47d48bfd545e7"/>
+    <p:sldLayoutId xmlns:r="http://schemas.openxmlformats.org/officeDocument/2006/relationships" id="2147483658" r:id="Re307f883bf8a43fb"/>
+    <p:sldLayoutId xmlns:r="http://schemas.openxmlformats.org/officeDocument/2006/relationships" id="2147483659" r:id="Re831b50a375f4dc1"/>
   </p:sldLayoutIdLst>
   <p:txStyles>
     <p:titleStyle>
@@ -7130,7 +7130,7 @@
           <p:nvPr/>
         </p:nvPicPr>
         <p:blipFill>
-          <a:blip xmlns:r="http://schemas.openxmlformats.org/officeDocument/2006/relationships" xmlns:a="http://schemas.openxmlformats.org/drawingml/2006/main" r:embed="Rc777b7df96ec475e"/>
+          <a:blip xmlns:r="http://schemas.openxmlformats.org/officeDocument/2006/relationships" xmlns:a="http://schemas.openxmlformats.org/drawingml/2006/main" r:embed="R6e796732ca8a4092"/>
           <a:stretch xmlns:a="http://schemas.openxmlformats.org/drawingml/2006/main">
             <a:fillRect l="0" t="0" r="0" b="0"/>
           </a:stretch>
@@ -7150,7 +7150,7 @@
           <p:cNvPr id="3" name="Rectangle 2">
             <a:extLst xmlns:a="http://schemas.openxmlformats.org/drawingml/2006/main">
               <a:ext uri="{FF2B5EF4-FFF2-40B4-BE49-F238E27FC236}">
-                <a16:creationId xmlns:a16="http://schemas.microsoft.com/office/drawing/2014/main" id="{BB22F1DD-B01C-4EE6-B9BC-77E8C4EE1A15}"/>
+                <a16:creationId xmlns:a16="http://schemas.microsoft.com/office/drawing/2014/main" id="{2B1BD44E-67EE-4727-8EDE-5ED12B572751}"/>
               </a:ext>
             </a:extLst>
           </p:cNvPr>
@@ -7203,7 +7203,7 @@
           <p:cNvPr id="4" name="Rectangle 3">
             <a:extLst xmlns:a="http://schemas.openxmlformats.org/drawingml/2006/main">
               <a:ext uri="{FF2B5EF4-FFF2-40B4-BE49-F238E27FC236}">
-                <a16:creationId xmlns:a16="http://schemas.microsoft.com/office/drawing/2014/main" id="{6D52A8FE-ABD1-4546-BCE1-D5D9D270FF5E}"/>
+                <a16:creationId xmlns:a16="http://schemas.microsoft.com/office/drawing/2014/main" id="{8000E7F1-FBA3-43CD-BC40-EEA4223A7DB2}"/>
               </a:ext>
             </a:extLst>
           </p:cNvPr>
@@ -7256,7 +7256,7 @@
           <p:cNvPr id="5" name="Rectangle 4">
             <a:extLst xmlns:a="http://schemas.openxmlformats.org/drawingml/2006/main">
               <a:ext uri="{FF2B5EF4-FFF2-40B4-BE49-F238E27FC236}">
-                <a16:creationId xmlns:a16="http://schemas.microsoft.com/office/drawing/2014/main" id="{8EC2EFD9-3F6E-4F8F-A81F-34D5634AAC7D}"/>
+                <a16:creationId xmlns:a16="http://schemas.microsoft.com/office/drawing/2014/main" id="{59B24076-0FAF-4B59-843F-50FCE3291C8D}"/>
               </a:ext>
             </a:extLst>
           </p:cNvPr>
@@ -7313,7 +7313,7 @@
           <p:nvPr/>
         </p:nvPicPr>
         <p:blipFill>
-          <a:blip xmlns:r="http://schemas.openxmlformats.org/officeDocument/2006/relationships" xmlns:a="http://schemas.openxmlformats.org/drawingml/2006/main" r:embed="R47441897f7db45d0"/>
+          <a:blip xmlns:r="http://schemas.openxmlformats.org/officeDocument/2006/relationships" xmlns:a="http://schemas.openxmlformats.org/drawingml/2006/main" r:embed="R4693ca4b97304f3f"/>
           <a:stretch xmlns:a="http://schemas.openxmlformats.org/drawingml/2006/main">
             <a:fillRect l="0" t="0" r="0" b="0"/>
           </a:stretch>
@@ -7333,7 +7333,7 @@
           <p:cNvPr id="7" name="Rectangle 6">
             <a:extLst xmlns:a="http://schemas.openxmlformats.org/drawingml/2006/main">
               <a:ext uri="{FF2B5EF4-FFF2-40B4-BE49-F238E27FC236}">
-                <a16:creationId xmlns:a16="http://schemas.microsoft.com/office/drawing/2014/main" id="{20601954-6912-42DC-ACD8-7974FC8EE5F4}"/>
+                <a16:creationId xmlns:a16="http://schemas.microsoft.com/office/drawing/2014/main" id="{AECCA0E9-6AD7-49CF-A451-2871FFA8E297}"/>
               </a:ext>
             </a:extLst>
           </p:cNvPr>
@@ -7386,7 +7386,7 @@
           <p:cNvPr id="8" name="TextBox 7">
             <a:extLst xmlns:a="http://schemas.openxmlformats.org/drawingml/2006/main">
               <a:ext uri="{FF2B5EF4-FFF2-40B4-BE49-F238E27FC236}">
-                <a16:creationId xmlns:a16="http://schemas.microsoft.com/office/drawing/2014/main" id="{809278CA-9660-4885-969F-2A8A772767F5}"/>
+                <a16:creationId xmlns:a16="http://schemas.microsoft.com/office/drawing/2014/main" id="{0163E539-75F1-45EB-B908-2ACB205C0144}"/>
               </a:ext>
             </a:extLst>
           </p:cNvPr>
@@ -7441,7 +7441,7 @@
           <p:cNvPr id="9" name="TextBox 8">
             <a:extLst xmlns:a="http://schemas.openxmlformats.org/drawingml/2006/main">
               <a:ext uri="{FF2B5EF4-FFF2-40B4-BE49-F238E27FC236}">
-                <a16:creationId xmlns:a16="http://schemas.microsoft.com/office/drawing/2014/main" id="{258E4652-0B64-491E-A04A-7E9939E2751C}"/>
+                <a16:creationId xmlns:a16="http://schemas.microsoft.com/office/drawing/2014/main" id="{129A1FC2-55AA-4395-A5A3-E28979AA7F12}"/>
               </a:ext>
             </a:extLst>
           </p:cNvPr>
@@ -7496,7 +7496,7 @@
           <p:cNvPr id="10" name="TextBox 9">
             <a:extLst xmlns:a="http://schemas.openxmlformats.org/drawingml/2006/main">
               <a:ext uri="{FF2B5EF4-FFF2-40B4-BE49-F238E27FC236}">
-                <a16:creationId xmlns:a16="http://schemas.microsoft.com/office/drawing/2014/main" id="{FE225120-C55B-4D38-8D97-1D119F506493}"/>
+                <a16:creationId xmlns:a16="http://schemas.microsoft.com/office/drawing/2014/main" id="{3BCD87DA-F8A3-4312-B33A-0EB77F997B3E}"/>
               </a:ext>
             </a:extLst>
           </p:cNvPr>
@@ -7551,7 +7551,7 @@
           <p:cNvPr id="11" name="TextBox 10">
             <a:extLst xmlns:a="http://schemas.openxmlformats.org/drawingml/2006/main">
               <a:ext uri="{FF2B5EF4-FFF2-40B4-BE49-F238E27FC236}">
-                <a16:creationId xmlns:a16="http://schemas.microsoft.com/office/drawing/2014/main" id="{385EF6A1-829C-4A71-865B-594A8BC05614}"/>
+                <a16:creationId xmlns:a16="http://schemas.microsoft.com/office/drawing/2014/main" id="{101BE1B4-8132-4F3A-B69B-5E937BBE2241}"/>
               </a:ext>
             </a:extLst>
           </p:cNvPr>
@@ -7606,7 +7606,7 @@
           <p:cNvPr id="12" name="TextBox 11">
             <a:extLst xmlns:a="http://schemas.openxmlformats.org/drawingml/2006/main">
               <a:ext uri="{FF2B5EF4-FFF2-40B4-BE49-F238E27FC236}">
-                <a16:creationId xmlns:a16="http://schemas.microsoft.com/office/drawing/2014/main" id="{6E4078A6-D926-407F-8F98-40B7DC7816E6}"/>
+                <a16:creationId xmlns:a16="http://schemas.microsoft.com/office/drawing/2014/main" id="{CE549616-6C02-46D0-8A3C-1D846DC13CD5}"/>
               </a:ext>
             </a:extLst>
           </p:cNvPr>
@@ -7661,7 +7661,7 @@
           <p:cNvPr id="13" name="TextBox 12">
             <a:extLst xmlns:a="http://schemas.openxmlformats.org/drawingml/2006/main">
               <a:ext uri="{FF2B5EF4-FFF2-40B4-BE49-F238E27FC236}">
-                <a16:creationId xmlns:a16="http://schemas.microsoft.com/office/drawing/2014/main" id="{83B3CCFF-7677-4D7A-BF0B-3320CD04DB5C}"/>
+                <a16:creationId xmlns:a16="http://schemas.microsoft.com/office/drawing/2014/main" id="{8ABE5C01-BAD1-47BD-B696-B841405FED51}"/>
               </a:ext>
             </a:extLst>
           </p:cNvPr>
@@ -7716,7 +7716,7 @@
           <p:cNvPr id="14" name="Rectangle 13">
             <a:extLst xmlns:a="http://schemas.openxmlformats.org/drawingml/2006/main">
               <a:ext uri="{FF2B5EF4-FFF2-40B4-BE49-F238E27FC236}">
-                <a16:creationId xmlns:a16="http://schemas.microsoft.com/office/drawing/2014/main" id="{3BDD02E0-1519-4720-9193-755A8015A168}"/>
+                <a16:creationId xmlns:a16="http://schemas.microsoft.com/office/drawing/2014/main" id="{EA8AFEC2-20CB-4860-AB52-E21D4EC23835}"/>
               </a:ext>
             </a:extLst>
           </p:cNvPr>
@@ -7769,7 +7769,7 @@
           <p:cNvPr id="15" name="Rectangle 14">
             <a:extLst xmlns:a="http://schemas.openxmlformats.org/drawingml/2006/main">
               <a:ext uri="{FF2B5EF4-FFF2-40B4-BE49-F238E27FC236}">
-                <a16:creationId xmlns:a16="http://schemas.microsoft.com/office/drawing/2014/main" id="{A8A81803-A08C-45F8-84A8-91EFC8F155B3}"/>
+                <a16:creationId xmlns:a16="http://schemas.microsoft.com/office/drawing/2014/main" id="{65B6311D-E2CA-4DEA-9572-9D3E4415254D}"/>
               </a:ext>
             </a:extLst>
           </p:cNvPr>
@@ -7822,7 +7822,7 @@
           <p:cNvPr id="16" name="TextBox 15">
             <a:extLst xmlns:a="http://schemas.openxmlformats.org/drawingml/2006/main">
               <a:ext uri="{FF2B5EF4-FFF2-40B4-BE49-F238E27FC236}">
-                <a16:creationId xmlns:a16="http://schemas.microsoft.com/office/drawing/2014/main" id="{1DA7DC52-6723-4093-B7A3-9ED6E89EC094}"/>
+                <a16:creationId xmlns:a16="http://schemas.microsoft.com/office/drawing/2014/main" id="{353D2028-40ED-4D9F-939F-8EB90422C219}"/>
               </a:ext>
             </a:extLst>
           </p:cNvPr>
@@ -7877,7 +7877,7 @@
           <p:cNvPr id="17" name="TextBox 16">
             <a:extLst xmlns:a="http://schemas.openxmlformats.org/drawingml/2006/main">
               <a:ext uri="{FF2B5EF4-FFF2-40B4-BE49-F238E27FC236}">
-                <a16:creationId xmlns:a16="http://schemas.microsoft.com/office/drawing/2014/main" id="{FAE8D96B-6657-47A4-9381-F2E3164AA0D7}"/>
+                <a16:creationId xmlns:a16="http://schemas.microsoft.com/office/drawing/2014/main" id="{359F0294-4D6F-4606-AF86-B746AEE3CE04}"/>
               </a:ext>
             </a:extLst>
           </p:cNvPr>
@@ -7930,7 +7930,7 @@
     </p:spTree>
     <p:extLst>
       <p:ext uri="{BB962C8B-B14F-4D97-AF65-F5344CB8AC3E}">
-        <p14:creationId xmlns:p14="http://schemas.microsoft.com/office/powerpoint/2010/main" val="754949019"/>
+        <p14:creationId xmlns:p14="http://schemas.microsoft.com/office/powerpoint/2010/main" val="2037800595"/>
       </p:ext>
     </p:extLst>
   </p:cSld>
@@ -7958,7 +7958,7 @@
           <p:nvPr/>
         </p:nvPicPr>
         <p:blipFill>
-          <a:blip xmlns:r="http://schemas.openxmlformats.org/officeDocument/2006/relationships" xmlns:a="http://schemas.openxmlformats.org/drawingml/2006/main" r:embed="R88d9e12cf05642e2"/>
+          <a:blip xmlns:r="http://schemas.openxmlformats.org/officeDocument/2006/relationships" xmlns:a="http://schemas.openxmlformats.org/drawingml/2006/main" r:embed="R735d807f72e64309"/>
           <a:stretch xmlns:a="http://schemas.openxmlformats.org/drawingml/2006/main">
             <a:fillRect l="0" t="0" r="0" b="0"/>
           </a:stretch>
@@ -7978,7 +7978,7 @@
           <p:cNvPr id="3" name="Rectangle 2">
             <a:extLst xmlns:a="http://schemas.openxmlformats.org/drawingml/2006/main">
               <a:ext uri="{FF2B5EF4-FFF2-40B4-BE49-F238E27FC236}">
-                <a16:creationId xmlns:a16="http://schemas.microsoft.com/office/drawing/2014/main" id="{CA6F7415-51F1-4F63-9349-1220C31A2C95}"/>
+                <a16:creationId xmlns:a16="http://schemas.microsoft.com/office/drawing/2014/main" id="{0BAD4AAF-282E-4AD4-B0C4-B23AC318FFB6}"/>
               </a:ext>
             </a:extLst>
           </p:cNvPr>
@@ -8031,7 +8031,7 @@
           <p:cNvPr id="4" name="TextBox 3">
             <a:extLst xmlns:a="http://schemas.openxmlformats.org/drawingml/2006/main">
               <a:ext uri="{FF2B5EF4-FFF2-40B4-BE49-F238E27FC236}">
-                <a16:creationId xmlns:a16="http://schemas.microsoft.com/office/drawing/2014/main" id="{26931FBD-E16F-4FA7-B1B9-16E6916B1B2A}"/>
+                <a16:creationId xmlns:a16="http://schemas.microsoft.com/office/drawing/2014/main" id="{32383C36-11EA-498D-ACEE-87093BC4EDD4}"/>
               </a:ext>
             </a:extLst>
           </p:cNvPr>
@@ -8086,7 +8086,7 @@
           <p:cNvPr id="5" name="TextBox 4">
             <a:extLst xmlns:a="http://schemas.openxmlformats.org/drawingml/2006/main">
               <a:ext uri="{FF2B5EF4-FFF2-40B4-BE49-F238E27FC236}">
-                <a16:creationId xmlns:a16="http://schemas.microsoft.com/office/drawing/2014/main" id="{4D5DB291-289C-4BDB-BE19-1F89AF78F2D0}"/>
+                <a16:creationId xmlns:a16="http://schemas.microsoft.com/office/drawing/2014/main" id="{A21BD24F-6D53-4943-830A-171874CB0AB9}"/>
               </a:ext>
             </a:extLst>
           </p:cNvPr>
@@ -8327,7 +8327,7 @@
           <p:cNvPr id="7" name="Rectangle 6">
             <a:extLst xmlns:a="http://schemas.openxmlformats.org/drawingml/2006/main">
               <a:ext uri="{FF2B5EF4-FFF2-40B4-BE49-F238E27FC236}">
-                <a16:creationId xmlns:a16="http://schemas.microsoft.com/office/drawing/2014/main" id="{E71F3A61-31C5-4466-8582-F6AC33B6E5AE}"/>
+                <a16:creationId xmlns:a16="http://schemas.microsoft.com/office/drawing/2014/main" id="{30DB4684-1D0F-4EF1-86CB-2B2FAD99433B}"/>
               </a:ext>
             </a:extLst>
           </p:cNvPr>
@@ -8380,7 +8380,7 @@
           <p:cNvPr id="8" name="Rectangle 7">
             <a:extLst xmlns:a="http://schemas.openxmlformats.org/drawingml/2006/main">
               <a:ext uri="{FF2B5EF4-FFF2-40B4-BE49-F238E27FC236}">
-                <a16:creationId xmlns:a16="http://schemas.microsoft.com/office/drawing/2014/main" id="{FB5A6D8C-5FB7-432D-8D41-1DADFBD5EC8A}"/>
+                <a16:creationId xmlns:a16="http://schemas.microsoft.com/office/drawing/2014/main" id="{7DD254A5-4147-4797-ADAC-2F3C6B213B3E}"/>
               </a:ext>
             </a:extLst>
           </p:cNvPr>
@@ -8433,7 +8433,7 @@
           <p:cNvPr id="9" name="TextBox 8">
             <a:extLst xmlns:a="http://schemas.openxmlformats.org/drawingml/2006/main">
               <a:ext uri="{FF2B5EF4-FFF2-40B4-BE49-F238E27FC236}">
-                <a16:creationId xmlns:a16="http://schemas.microsoft.com/office/drawing/2014/main" id="{B9949AE3-1251-4372-8220-F5CB7A401C21}"/>
+                <a16:creationId xmlns:a16="http://schemas.microsoft.com/office/drawing/2014/main" id="{8FDD4180-E651-4586-A59A-25BBFAF29093}"/>
               </a:ext>
             </a:extLst>
           </p:cNvPr>
@@ -8488,7 +8488,7 @@
           <p:cNvPr id="10" name="TextBox 9">
             <a:extLst xmlns:a="http://schemas.openxmlformats.org/drawingml/2006/main">
               <a:ext uri="{FF2B5EF4-FFF2-40B4-BE49-F238E27FC236}">
-                <a16:creationId xmlns:a16="http://schemas.microsoft.com/office/drawing/2014/main" id="{96D2EB2B-3A5E-4FBC-9C85-D0FE76196FB3}"/>
+                <a16:creationId xmlns:a16="http://schemas.microsoft.com/office/drawing/2014/main" id="{E4EF5A21-BF5E-4077-A98E-36BBDC81D43C}"/>
               </a:ext>
             </a:extLst>
           </p:cNvPr>
@@ -8541,7 +8541,7 @@
     </p:spTree>
     <p:extLst>
       <p:ext uri="{BB962C8B-B14F-4D97-AF65-F5344CB8AC3E}">
-        <p14:creationId xmlns:p14="http://schemas.microsoft.com/office/powerpoint/2010/main" val="846578039"/>
+        <p14:creationId xmlns:p14="http://schemas.microsoft.com/office/powerpoint/2010/main" val="1585150990"/>
       </p:ext>
     </p:extLst>
   </p:cSld>
@@ -8569,7 +8569,7 @@
           <p:nvPr/>
         </p:nvPicPr>
         <p:blipFill>
-          <a:blip xmlns:r="http://schemas.openxmlformats.org/officeDocument/2006/relationships" xmlns:a="http://schemas.openxmlformats.org/drawingml/2006/main" r:embed="Rdf1ddeb258854a53"/>
+          <a:blip xmlns:r="http://schemas.openxmlformats.org/officeDocument/2006/relationships" xmlns:a="http://schemas.openxmlformats.org/drawingml/2006/main" r:embed="R2345d2c34c604c2f"/>
           <a:stretch xmlns:a="http://schemas.openxmlformats.org/drawingml/2006/main">
             <a:fillRect l="0" t="0" r="0" b="0"/>
           </a:stretch>
@@ -8589,7 +8589,7 @@
           <p:cNvPr id="3" name="Rectangle 2">
             <a:extLst xmlns:a="http://schemas.openxmlformats.org/drawingml/2006/main">
               <a:ext uri="{FF2B5EF4-FFF2-40B4-BE49-F238E27FC236}">
-                <a16:creationId xmlns:a16="http://schemas.microsoft.com/office/drawing/2014/main" id="{C08BF1A0-5C7B-481D-9EE4-9F2F90B9C8D8}"/>
+                <a16:creationId xmlns:a16="http://schemas.microsoft.com/office/drawing/2014/main" id="{7991C748-902C-43B4-8F09-DCAB8D5968A5}"/>
               </a:ext>
             </a:extLst>
           </p:cNvPr>
@@ -8642,7 +8642,7 @@
           <p:cNvPr id="4" name="TextBox 3">
             <a:extLst xmlns:a="http://schemas.openxmlformats.org/drawingml/2006/main">
               <a:ext uri="{FF2B5EF4-FFF2-40B4-BE49-F238E27FC236}">
-                <a16:creationId xmlns:a16="http://schemas.microsoft.com/office/drawing/2014/main" id="{7B3D22CD-DA49-4FCF-92F8-F08868D0E261}"/>
+                <a16:creationId xmlns:a16="http://schemas.microsoft.com/office/drawing/2014/main" id="{957DBFF4-6FE5-47DE-801D-911C7CE7020F}"/>
               </a:ext>
             </a:extLst>
           </p:cNvPr>
@@ -8697,7 +8697,7 @@
           <p:cNvPr id="5" name="TextBox 4">
             <a:extLst xmlns:a="http://schemas.openxmlformats.org/drawingml/2006/main">
               <a:ext uri="{FF2B5EF4-FFF2-40B4-BE49-F238E27FC236}">
-                <a16:creationId xmlns:a16="http://schemas.microsoft.com/office/drawing/2014/main" id="{416C97F9-A602-4B93-A6FC-EB4EB1E936D3}"/>
+                <a16:creationId xmlns:a16="http://schemas.microsoft.com/office/drawing/2014/main" id="{755FF586-DF63-4841-BBCF-4382AC290835}"/>
               </a:ext>
             </a:extLst>
           </p:cNvPr>
@@ -8752,7 +8752,7 @@
           <p:cNvPr id="6" name="TextBox 5">
             <a:extLst xmlns:a="http://schemas.openxmlformats.org/drawingml/2006/main">
               <a:ext uri="{FF2B5EF4-FFF2-40B4-BE49-F238E27FC236}">
-                <a16:creationId xmlns:a16="http://schemas.microsoft.com/office/drawing/2014/main" id="{E7A6D0D1-7A17-4762-8327-7B223D808906}"/>
+                <a16:creationId xmlns:a16="http://schemas.microsoft.com/office/drawing/2014/main" id="{AA87925E-D3EE-4CD3-B8BE-DF84F7E700AC}"/>
               </a:ext>
             </a:extLst>
           </p:cNvPr>
@@ -8864,7 +8864,7 @@
           <p:cNvPr id="7" name="TextBox 6">
             <a:extLst xmlns:a="http://schemas.openxmlformats.org/drawingml/2006/main">
               <a:ext uri="{FF2B5EF4-FFF2-40B4-BE49-F238E27FC236}">
-                <a16:creationId xmlns:a16="http://schemas.microsoft.com/office/drawing/2014/main" id="{8DD46A11-65B4-4670-A2DD-AFD2FB905CE3}"/>
+                <a16:creationId xmlns:a16="http://schemas.microsoft.com/office/drawing/2014/main" id="{2A995C89-7441-4C25-9357-3EC6FF25C6B2}"/>
               </a:ext>
             </a:extLst>
           </p:cNvPr>
@@ -8919,7 +8919,7 @@
           <p:cNvPr id="8" name="Rectangle 7">
             <a:extLst xmlns:a="http://schemas.openxmlformats.org/drawingml/2006/main">
               <a:ext uri="{FF2B5EF4-FFF2-40B4-BE49-F238E27FC236}">
-                <a16:creationId xmlns:a16="http://schemas.microsoft.com/office/drawing/2014/main" id="{19FCC30F-D794-4960-9FF1-D25A388828DB}"/>
+                <a16:creationId xmlns:a16="http://schemas.microsoft.com/office/drawing/2014/main" id="{CB99B7EB-8813-4434-8AF0-F0CE23DA3DF4}"/>
               </a:ext>
             </a:extLst>
           </p:cNvPr>
@@ -8972,7 +8972,7 @@
           <p:cNvPr id="9" name="Rectangle 8">
             <a:extLst xmlns:a="http://schemas.openxmlformats.org/drawingml/2006/main">
               <a:ext uri="{FF2B5EF4-FFF2-40B4-BE49-F238E27FC236}">
-                <a16:creationId xmlns:a16="http://schemas.microsoft.com/office/drawing/2014/main" id="{68C79B14-B1DB-4988-9BA0-645A49B07499}"/>
+                <a16:creationId xmlns:a16="http://schemas.microsoft.com/office/drawing/2014/main" id="{66ED9753-3023-43D4-B3CD-B42AE233DB97}"/>
               </a:ext>
             </a:extLst>
           </p:cNvPr>
@@ -9025,7 +9025,7 @@
           <p:cNvPr id="10" name="TextBox 9">
             <a:extLst xmlns:a="http://schemas.openxmlformats.org/drawingml/2006/main">
               <a:ext uri="{FF2B5EF4-FFF2-40B4-BE49-F238E27FC236}">
-                <a16:creationId xmlns:a16="http://schemas.microsoft.com/office/drawing/2014/main" id="{3DA88860-FB05-4DD7-A66B-B43887D8DB06}"/>
+                <a16:creationId xmlns:a16="http://schemas.microsoft.com/office/drawing/2014/main" id="{56EEBBD2-1CEF-4391-BA08-3F70F7E06476}"/>
               </a:ext>
             </a:extLst>
           </p:cNvPr>
@@ -9080,7 +9080,7 @@
           <p:cNvPr id="11" name="TextBox 10">
             <a:extLst xmlns:a="http://schemas.openxmlformats.org/drawingml/2006/main">
               <a:ext uri="{FF2B5EF4-FFF2-40B4-BE49-F238E27FC236}">
-                <a16:creationId xmlns:a16="http://schemas.microsoft.com/office/drawing/2014/main" id="{73C7C3F6-D16D-4711-8E34-EAD4BA6E67D0}"/>
+                <a16:creationId xmlns:a16="http://schemas.microsoft.com/office/drawing/2014/main" id="{AFF50F80-5864-4452-8795-43197398A531}"/>
               </a:ext>
             </a:extLst>
           </p:cNvPr>
@@ -9133,7 +9133,7 @@
     </p:spTree>
     <p:extLst>
       <p:ext uri="{BB962C8B-B14F-4D97-AF65-F5344CB8AC3E}">
-        <p14:creationId xmlns:p14="http://schemas.microsoft.com/office/powerpoint/2010/main" val="921680134"/>
+        <p14:creationId xmlns:p14="http://schemas.microsoft.com/office/powerpoint/2010/main" val="1743920400"/>
       </p:ext>
     </p:extLst>
   </p:cSld>
@@ -9157,7 +9157,7 @@
           <p:cNvPr id="2" name="Rectangle 1">
             <a:extLst xmlns:a="http://schemas.openxmlformats.org/drawingml/2006/main">
               <a:ext uri="{FF2B5EF4-FFF2-40B4-BE49-F238E27FC236}">
-                <a16:creationId xmlns:a16="http://schemas.microsoft.com/office/drawing/2014/main" id="{72939DA8-89F4-4A51-B327-34C7752DEDFF}"/>
+                <a16:creationId xmlns:a16="http://schemas.microsoft.com/office/drawing/2014/main" id="{41DE855B-3838-41A1-A26D-A5D945FFBFF5}"/>
               </a:ext>
             </a:extLst>
           </p:cNvPr>
@@ -9210,7 +9210,7 @@
           <p:cNvPr id="3" name="TextBox 2">
             <a:extLst xmlns:a="http://schemas.openxmlformats.org/drawingml/2006/main">
               <a:ext uri="{FF2B5EF4-FFF2-40B4-BE49-F238E27FC236}">
-                <a16:creationId xmlns:a16="http://schemas.microsoft.com/office/drawing/2014/main" id="{551E9DD1-5860-462F-B42B-4B1C97E23D01}"/>
+                <a16:creationId xmlns:a16="http://schemas.microsoft.com/office/drawing/2014/main" id="{F662546B-071F-4208-BEBE-0AFE86D06CD4}"/>
               </a:ext>
             </a:extLst>
           </p:cNvPr>
@@ -9265,7 +9265,7 @@
           <p:cNvPr id="4" name="TextBox 3">
             <a:extLst xmlns:a="http://schemas.openxmlformats.org/drawingml/2006/main">
               <a:ext uri="{FF2B5EF4-FFF2-40B4-BE49-F238E27FC236}">
-                <a16:creationId xmlns:a16="http://schemas.microsoft.com/office/drawing/2014/main" id="{8BAD2218-FD87-4BB1-A955-0ACFB9D237BC}"/>
+                <a16:creationId xmlns:a16="http://schemas.microsoft.com/office/drawing/2014/main" id="{A223A738-33AF-468C-963A-90A6C020966B}"/>
               </a:ext>
             </a:extLst>
           </p:cNvPr>
@@ -9295,14 +9295,14 @@
                 <a:spcPct val="110000"/>
               </a:lnSpc>
               <a:buNone/>
-              <a:defRPr sz="2000">
+              <a:defRPr sz="1400">
                 <a:latin typeface="Arial"/>
                 <a:ea typeface="Arial"/>
                 <a:cs typeface="Arial"/>
               </a:defRPr>
             </a:pPr>
             <a:r>
-              <a:rPr sz="2000" b="1" i="0">
+              <a:rPr sz="1400" b="1" i="0">
                 <a:solidFill>
                   <a:srgbClr val="FFFFFF"/>
                 </a:solidFill>
@@ -9320,7 +9320,7 @@
           <p:cNvPr id="5" name="TextBox 4">
             <a:extLst xmlns:a="http://schemas.openxmlformats.org/drawingml/2006/main">
               <a:ext uri="{FF2B5EF4-FFF2-40B4-BE49-F238E27FC236}">
-                <a16:creationId xmlns:a16="http://schemas.microsoft.com/office/drawing/2014/main" id="{E302CA8B-6FE1-437F-B269-7F25A021A19E}"/>
+                <a16:creationId xmlns:a16="http://schemas.microsoft.com/office/drawing/2014/main" id="{9861F382-BBD1-4333-8715-49F5B2C362F6}"/>
               </a:ext>
             </a:extLst>
           </p:cNvPr>
@@ -9375,7 +9375,7 @@
           <p:cNvPr id="6" name="Rectangle 5">
             <a:extLst xmlns:a="http://schemas.openxmlformats.org/drawingml/2006/main">
               <a:ext uri="{FF2B5EF4-FFF2-40B4-BE49-F238E27FC236}">
-                <a16:creationId xmlns:a16="http://schemas.microsoft.com/office/drawing/2014/main" id="{84C6D78B-A4EB-4565-951F-B3FFCF36238C}"/>
+                <a16:creationId xmlns:a16="http://schemas.microsoft.com/office/drawing/2014/main" id="{1415DE0D-EE52-44E2-BD8C-9D5B117F8F54}"/>
               </a:ext>
             </a:extLst>
           </p:cNvPr>
@@ -9426,7 +9426,7 @@
     </p:spTree>
     <p:extLst>
       <p:ext uri="{BB962C8B-B14F-4D97-AF65-F5344CB8AC3E}">
-        <p14:creationId xmlns:p14="http://schemas.microsoft.com/office/powerpoint/2010/main" val="1928935147"/>
+        <p14:creationId xmlns:p14="http://schemas.microsoft.com/office/powerpoint/2010/main" val="1913622166"/>
       </p:ext>
     </p:extLst>
   </p:cSld>
@@ -9454,7 +9454,7 @@
           <p:nvPr/>
         </p:nvPicPr>
         <p:blipFill>
-          <a:blip xmlns:r="http://schemas.openxmlformats.org/officeDocument/2006/relationships" xmlns:a="http://schemas.openxmlformats.org/drawingml/2006/main" r:embed="R4430093a2d184784"/>
+          <a:blip xmlns:r="http://schemas.openxmlformats.org/officeDocument/2006/relationships" xmlns:a="http://schemas.openxmlformats.org/drawingml/2006/main" r:embed="Rd5f148462c7b4636"/>
           <a:stretch xmlns:a="http://schemas.openxmlformats.org/drawingml/2006/main">
             <a:fillRect l="0" t="0" r="0" b="0"/>
           </a:stretch>
@@ -9474,7 +9474,7 @@
           <p:cNvPr id="3" name="Rectangle 2">
             <a:extLst xmlns:a="http://schemas.openxmlformats.org/drawingml/2006/main">
               <a:ext uri="{FF2B5EF4-FFF2-40B4-BE49-F238E27FC236}">
-                <a16:creationId xmlns:a16="http://schemas.microsoft.com/office/drawing/2014/main" id="{DB9D895B-A2C6-4895-A92B-E4AF735FA855}"/>
+                <a16:creationId xmlns:a16="http://schemas.microsoft.com/office/drawing/2014/main" id="{07099AC9-F6B5-4967-82E3-B46DBDB9EA56}"/>
               </a:ext>
             </a:extLst>
           </p:cNvPr>
@@ -9527,7 +9527,7 @@
           <p:cNvPr id="4" name="TextBox 3">
             <a:extLst xmlns:a="http://schemas.openxmlformats.org/drawingml/2006/main">
               <a:ext uri="{FF2B5EF4-FFF2-40B4-BE49-F238E27FC236}">
-                <a16:creationId xmlns:a16="http://schemas.microsoft.com/office/drawing/2014/main" id="{D097CA37-D4DB-4E8B-8726-98D9A95604B3}"/>
+                <a16:creationId xmlns:a16="http://schemas.microsoft.com/office/drawing/2014/main" id="{946F3464-80D4-401A-A34D-6E67D8A7306E}"/>
               </a:ext>
             </a:extLst>
           </p:cNvPr>
@@ -9582,7 +9582,7 @@
           <p:cNvPr id="5" name="TextBox 4">
             <a:extLst xmlns:a="http://schemas.openxmlformats.org/drawingml/2006/main">
               <a:ext uri="{FF2B5EF4-FFF2-40B4-BE49-F238E27FC236}">
-                <a16:creationId xmlns:a16="http://schemas.microsoft.com/office/drawing/2014/main" id="{03C33E5A-FB7B-4BEA-A4FD-04530610075E}"/>
+                <a16:creationId xmlns:a16="http://schemas.microsoft.com/office/drawing/2014/main" id="{13811FB1-4984-4F62-852B-5F33BF346F0D}"/>
               </a:ext>
             </a:extLst>
           </p:cNvPr>
@@ -9637,7 +9637,7 @@
           <p:cNvPr id="6" name="Rounded Rectangle 5">
             <a:extLst xmlns:a="http://schemas.openxmlformats.org/drawingml/2006/main">
               <a:ext uri="{FF2B5EF4-FFF2-40B4-BE49-F238E27FC236}">
-                <a16:creationId xmlns:a16="http://schemas.microsoft.com/office/drawing/2014/main" id="{840B5D6D-A258-4BAB-897E-10CBBD2C9D62}"/>
+                <a16:creationId xmlns:a16="http://schemas.microsoft.com/office/drawing/2014/main" id="{9FA97D81-8538-4B28-BFB7-79F1DCC21B58}"/>
               </a:ext>
             </a:extLst>
           </p:cNvPr>
@@ -9694,7 +9694,7 @@
           <p:cNvPr id="7" name="TextBox 6">
             <a:extLst xmlns:a="http://schemas.openxmlformats.org/drawingml/2006/main">
               <a:ext uri="{FF2B5EF4-FFF2-40B4-BE49-F238E27FC236}">
-                <a16:creationId xmlns:a16="http://schemas.microsoft.com/office/drawing/2014/main" id="{B020DE5F-AC1B-4B6C-81FA-5EEEB2133B35}"/>
+                <a16:creationId xmlns:a16="http://schemas.microsoft.com/office/drawing/2014/main" id="{13A1FBA3-AADC-40D9-97A4-BA37DAB2F97F}"/>
               </a:ext>
             </a:extLst>
           </p:cNvPr>
@@ -9749,7 +9749,7 @@
           <p:cNvPr id="8" name="TextBox 7">
             <a:extLst xmlns:a="http://schemas.openxmlformats.org/drawingml/2006/main">
               <a:ext uri="{FF2B5EF4-FFF2-40B4-BE49-F238E27FC236}">
-                <a16:creationId xmlns:a16="http://schemas.microsoft.com/office/drawing/2014/main" id="{0ABBBC5E-92BF-414C-82C5-EC900ED372A7}"/>
+                <a16:creationId xmlns:a16="http://schemas.microsoft.com/office/drawing/2014/main" id="{DAC4F606-2611-425F-B24D-BE468258FC09}"/>
               </a:ext>
             </a:extLst>
           </p:cNvPr>
@@ -9761,7 +9761,7 @@
         <p:spPr>
           <a:xfrm xmlns:a="http://schemas.openxmlformats.org/drawingml/2006/main">
             <a:off x="584200" y="2654300"/>
-            <a:ext cx="3318933" cy="701040"/>
+            <a:ext cx="3318933" cy="444500"/>
           </a:xfrm>
           <a:prstGeom xmlns:a="http://schemas.openxmlformats.org/drawingml/2006/main" prst="rect">
             <a:avLst/>
@@ -9779,14 +9779,14 @@
                 <a:spcPct val="115000"/>
               </a:lnSpc>
               <a:buNone/>
-              <a:defRPr sz="2000">
+              <a:defRPr sz="1400">
                 <a:latin typeface="Arial"/>
                 <a:ea typeface="Arial"/>
                 <a:cs typeface="Arial"/>
               </a:defRPr>
             </a:pPr>
             <a:r>
-              <a:rPr sz="2000" b="1" i="0">
+              <a:rPr sz="1400" b="1" i="0">
                 <a:solidFill>
                   <a:srgbClr val="102A43"/>
                 </a:solidFill>
@@ -9804,7 +9804,7 @@
           <p:cNvPr id="9" name="TextBox 8">
             <a:extLst xmlns:a="http://schemas.openxmlformats.org/drawingml/2006/main">
               <a:ext uri="{FF2B5EF4-FFF2-40B4-BE49-F238E27FC236}">
-                <a16:creationId xmlns:a16="http://schemas.microsoft.com/office/drawing/2014/main" id="{CE293E6A-8880-44E3-9F72-2CE446C3FDAD}"/>
+                <a16:creationId xmlns:a16="http://schemas.microsoft.com/office/drawing/2014/main" id="{DD172158-D7B9-470B-9E2D-880AC3CA2ADD}"/>
               </a:ext>
             </a:extLst>
           </p:cNvPr>
@@ -9889,7 +9889,7 @@
           <p:cNvPr id="10" name="Rounded Rectangle 9">
             <a:extLst xmlns:a="http://schemas.openxmlformats.org/drawingml/2006/main">
               <a:ext uri="{FF2B5EF4-FFF2-40B4-BE49-F238E27FC236}">
-                <a16:creationId xmlns:a16="http://schemas.microsoft.com/office/drawing/2014/main" id="{65DC800B-4200-4941-88B6-A0D301D73BD7}"/>
+                <a16:creationId xmlns:a16="http://schemas.microsoft.com/office/drawing/2014/main" id="{2F1C8407-372E-4054-8D6E-F4EF8A5B0B11}"/>
               </a:ext>
             </a:extLst>
           </p:cNvPr>
@@ -9946,7 +9946,7 @@
           <p:cNvPr id="11" name="TextBox 10">
             <a:extLst xmlns:a="http://schemas.openxmlformats.org/drawingml/2006/main">
               <a:ext uri="{FF2B5EF4-FFF2-40B4-BE49-F238E27FC236}">
-                <a16:creationId xmlns:a16="http://schemas.microsoft.com/office/drawing/2014/main" id="{4634731B-30C6-40A8-968D-A4C99E6A848B}"/>
+                <a16:creationId xmlns:a16="http://schemas.microsoft.com/office/drawing/2014/main" id="{601FFB1D-DC2F-4531-A3DF-FB9810FAD953}"/>
               </a:ext>
             </a:extLst>
           </p:cNvPr>
@@ -10001,7 +10001,7 @@
           <p:cNvPr id="12" name="TextBox 11">
             <a:extLst xmlns:a="http://schemas.openxmlformats.org/drawingml/2006/main">
               <a:ext uri="{FF2B5EF4-FFF2-40B4-BE49-F238E27FC236}">
-                <a16:creationId xmlns:a16="http://schemas.microsoft.com/office/drawing/2014/main" id="{E4738720-502B-4764-A788-23E5D5BF1AC0}"/>
+                <a16:creationId xmlns:a16="http://schemas.microsoft.com/office/drawing/2014/main" id="{B5BAB4EF-00B7-44F8-88E0-C54284955FD4}"/>
               </a:ext>
             </a:extLst>
           </p:cNvPr>
@@ -10031,14 +10031,14 @@
                 <a:spcPct val="115000"/>
               </a:lnSpc>
               <a:buNone/>
-              <a:defRPr sz="2000">
+              <a:defRPr sz="1400">
                 <a:latin typeface="Arial"/>
                 <a:ea typeface="Arial"/>
                 <a:cs typeface="Arial"/>
               </a:defRPr>
             </a:pPr>
             <a:r>
-              <a:rPr sz="2000" b="1" i="0">
+              <a:rPr sz="1400" b="1" i="0">
                 <a:solidFill>
                   <a:srgbClr val="102A43"/>
                 </a:solidFill>
@@ -10056,7 +10056,7 @@
           <p:cNvPr id="13" name="TextBox 12">
             <a:extLst xmlns:a="http://schemas.openxmlformats.org/drawingml/2006/main">
               <a:ext uri="{FF2B5EF4-FFF2-40B4-BE49-F238E27FC236}">
-                <a16:creationId xmlns:a16="http://schemas.microsoft.com/office/drawing/2014/main" id="{AD7BBA84-F38A-424F-90B2-994664FF3B3A}"/>
+                <a16:creationId xmlns:a16="http://schemas.microsoft.com/office/drawing/2014/main" id="{3FFB54D2-B0D1-4C1A-8183-B79E510C1D17}"/>
               </a:ext>
             </a:extLst>
           </p:cNvPr>
@@ -10141,7 +10141,7 @@
           <p:cNvPr id="14" name="Rounded Rectangle 13">
             <a:extLst xmlns:a="http://schemas.openxmlformats.org/drawingml/2006/main">
               <a:ext uri="{FF2B5EF4-FFF2-40B4-BE49-F238E27FC236}">
-                <a16:creationId xmlns:a16="http://schemas.microsoft.com/office/drawing/2014/main" id="{635A2E88-1206-4FFC-BE61-3FE5275B3AC4}"/>
+                <a16:creationId xmlns:a16="http://schemas.microsoft.com/office/drawing/2014/main" id="{D1FD2B5A-1BA3-4F0C-8A9E-D5551BA8B8D2}"/>
               </a:ext>
             </a:extLst>
           </p:cNvPr>
@@ -10198,7 +10198,7 @@
           <p:cNvPr id="15" name="TextBox 14">
             <a:extLst xmlns:a="http://schemas.openxmlformats.org/drawingml/2006/main">
               <a:ext uri="{FF2B5EF4-FFF2-40B4-BE49-F238E27FC236}">
-                <a16:creationId xmlns:a16="http://schemas.microsoft.com/office/drawing/2014/main" id="{79460D5F-0C09-4ACF-85A6-59A6A540CE21}"/>
+                <a16:creationId xmlns:a16="http://schemas.microsoft.com/office/drawing/2014/main" id="{A52101A6-4C6A-4079-B18F-F1450FCD389C}"/>
               </a:ext>
             </a:extLst>
           </p:cNvPr>
@@ -10253,7 +10253,7 @@
           <p:cNvPr id="16" name="TextBox 15">
             <a:extLst xmlns:a="http://schemas.openxmlformats.org/drawingml/2006/main">
               <a:ext uri="{FF2B5EF4-FFF2-40B4-BE49-F238E27FC236}">
-                <a16:creationId xmlns:a16="http://schemas.microsoft.com/office/drawing/2014/main" id="{2BF515E1-9D83-42D2-BF98-79E50FD69BDF}"/>
+                <a16:creationId xmlns:a16="http://schemas.microsoft.com/office/drawing/2014/main" id="{C9DDA60A-0223-4675-A3EA-8EF4D04135F7}"/>
               </a:ext>
             </a:extLst>
           </p:cNvPr>
@@ -10265,7 +10265,7 @@
         <p:spPr>
           <a:xfrm xmlns:a="http://schemas.openxmlformats.org/drawingml/2006/main">
             <a:off x="8288867" y="2654300"/>
-            <a:ext cx="3318933" cy="701040"/>
+            <a:ext cx="3318933" cy="444500"/>
           </a:xfrm>
           <a:prstGeom xmlns:a="http://schemas.openxmlformats.org/drawingml/2006/main" prst="rect">
             <a:avLst/>
@@ -10283,14 +10283,14 @@
                 <a:spcPct val="115000"/>
               </a:lnSpc>
               <a:buNone/>
-              <a:defRPr sz="2000">
+              <a:defRPr sz="1400">
                 <a:latin typeface="Arial"/>
                 <a:ea typeface="Arial"/>
                 <a:cs typeface="Arial"/>
               </a:defRPr>
             </a:pPr>
             <a:r>
-              <a:rPr sz="2000" b="1" i="0">
+              <a:rPr sz="1400" b="1" i="0">
                 <a:solidFill>
                   <a:srgbClr val="102A43"/>
                 </a:solidFill>
@@ -10308,7 +10308,7 @@
           <p:cNvPr id="17" name="TextBox 16">
             <a:extLst xmlns:a="http://schemas.openxmlformats.org/drawingml/2006/main">
               <a:ext uri="{FF2B5EF4-FFF2-40B4-BE49-F238E27FC236}">
-                <a16:creationId xmlns:a16="http://schemas.microsoft.com/office/drawing/2014/main" id="{F3556E86-441C-4EB8-958E-A5969FD033B2}"/>
+                <a16:creationId xmlns:a16="http://schemas.microsoft.com/office/drawing/2014/main" id="{B0C90782-C3DA-40E8-9114-ED7CED4598D2}"/>
               </a:ext>
             </a:extLst>
           </p:cNvPr>
@@ -10393,7 +10393,7 @@
           <p:cNvPr id="18" name="Rectangle 17">
             <a:extLst xmlns:a="http://schemas.openxmlformats.org/drawingml/2006/main">
               <a:ext uri="{FF2B5EF4-FFF2-40B4-BE49-F238E27FC236}">
-                <a16:creationId xmlns:a16="http://schemas.microsoft.com/office/drawing/2014/main" id="{8878CC91-4BC3-4854-BAFC-323D78686DA2}"/>
+                <a16:creationId xmlns:a16="http://schemas.microsoft.com/office/drawing/2014/main" id="{655F4121-885C-4EDF-939C-30004211C910}"/>
               </a:ext>
             </a:extLst>
           </p:cNvPr>
@@ -10446,7 +10446,7 @@
           <p:cNvPr id="19" name="Rectangle 18">
             <a:extLst xmlns:a="http://schemas.openxmlformats.org/drawingml/2006/main">
               <a:ext uri="{FF2B5EF4-FFF2-40B4-BE49-F238E27FC236}">
-                <a16:creationId xmlns:a16="http://schemas.microsoft.com/office/drawing/2014/main" id="{50F6C47A-FB3D-40B3-B67C-5B5A6A700587}"/>
+                <a16:creationId xmlns:a16="http://schemas.microsoft.com/office/drawing/2014/main" id="{3BA7AEF5-2665-4EAE-A94E-89A60D0DAB25}"/>
               </a:ext>
             </a:extLst>
           </p:cNvPr>
@@ -10499,7 +10499,7 @@
           <p:cNvPr id="20" name="TextBox 19">
             <a:extLst xmlns:a="http://schemas.openxmlformats.org/drawingml/2006/main">
               <a:ext uri="{FF2B5EF4-FFF2-40B4-BE49-F238E27FC236}">
-                <a16:creationId xmlns:a16="http://schemas.microsoft.com/office/drawing/2014/main" id="{BF764F35-52DE-488D-95F5-AB3402BB5E55}"/>
+                <a16:creationId xmlns:a16="http://schemas.microsoft.com/office/drawing/2014/main" id="{8FCA503D-2A2E-4E89-9D53-F81740C3CF77}"/>
               </a:ext>
             </a:extLst>
           </p:cNvPr>
@@ -10554,7 +10554,7 @@
           <p:cNvPr id="21" name="TextBox 20">
             <a:extLst xmlns:a="http://schemas.openxmlformats.org/drawingml/2006/main">
               <a:ext uri="{FF2B5EF4-FFF2-40B4-BE49-F238E27FC236}">
-                <a16:creationId xmlns:a16="http://schemas.microsoft.com/office/drawing/2014/main" id="{D5D85300-BB13-483E-B767-C56E9760CC26}"/>
+                <a16:creationId xmlns:a16="http://schemas.microsoft.com/office/drawing/2014/main" id="{A0A251E0-14B4-4B38-ABBC-3C4D37759034}"/>
               </a:ext>
             </a:extLst>
           </p:cNvPr>
@@ -10607,7 +10607,7 @@
     </p:spTree>
     <p:extLst>
       <p:ext uri="{BB962C8B-B14F-4D97-AF65-F5344CB8AC3E}">
-        <p14:creationId xmlns:p14="http://schemas.microsoft.com/office/powerpoint/2010/main" val="1483467064"/>
+        <p14:creationId xmlns:p14="http://schemas.microsoft.com/office/powerpoint/2010/main" val="1228304313"/>
       </p:ext>
     </p:extLst>
   </p:cSld>
@@ -10635,7 +10635,7 @@
           <p:nvPr/>
         </p:nvPicPr>
         <p:blipFill>
-          <a:blip xmlns:r="http://schemas.openxmlformats.org/officeDocument/2006/relationships" xmlns:a="http://schemas.openxmlformats.org/drawingml/2006/main" r:embed="R38a0f9db866b45cf"/>
+          <a:blip xmlns:r="http://schemas.openxmlformats.org/officeDocument/2006/relationships" xmlns:a="http://schemas.openxmlformats.org/drawingml/2006/main" r:embed="R23d5fe809298437b"/>
           <a:stretch xmlns:a="http://schemas.openxmlformats.org/drawingml/2006/main">
             <a:fillRect l="0" t="0" r="0" b="0"/>
           </a:stretch>
@@ -10655,7 +10655,7 @@
           <p:cNvPr id="3" name="Rectangle 2">
             <a:extLst xmlns:a="http://schemas.openxmlformats.org/drawingml/2006/main">
               <a:ext uri="{FF2B5EF4-FFF2-40B4-BE49-F238E27FC236}">
-                <a16:creationId xmlns:a16="http://schemas.microsoft.com/office/drawing/2014/main" id="{99675902-F25C-45DE-95CF-ABEBD00985FE}"/>
+                <a16:creationId xmlns:a16="http://schemas.microsoft.com/office/drawing/2014/main" id="{6A811E23-C73E-4AA9-9382-7828084819E9}"/>
               </a:ext>
             </a:extLst>
           </p:cNvPr>
@@ -10708,7 +10708,7 @@
           <p:cNvPr id="4" name="TextBox 3">
             <a:extLst xmlns:a="http://schemas.openxmlformats.org/drawingml/2006/main">
               <a:ext uri="{FF2B5EF4-FFF2-40B4-BE49-F238E27FC236}">
-                <a16:creationId xmlns:a16="http://schemas.microsoft.com/office/drawing/2014/main" id="{06829C67-607C-4770-B90A-94E7A3A4A742}"/>
+                <a16:creationId xmlns:a16="http://schemas.microsoft.com/office/drawing/2014/main" id="{E1F61D86-E297-461B-BE6D-12A9DF4416B2}"/>
               </a:ext>
             </a:extLst>
           </p:cNvPr>
@@ -10763,7 +10763,7 @@
           <p:cNvPr id="5" name="TextBox 4">
             <a:extLst xmlns:a="http://schemas.openxmlformats.org/drawingml/2006/main">
               <a:ext uri="{FF2B5EF4-FFF2-40B4-BE49-F238E27FC236}">
-                <a16:creationId xmlns:a16="http://schemas.microsoft.com/office/drawing/2014/main" id="{FF833A45-FDB2-496D-9A47-C75786020F48}"/>
+                <a16:creationId xmlns:a16="http://schemas.microsoft.com/office/drawing/2014/main" id="{793E5516-196C-4D8D-ABCD-8249EF2AE957}"/>
               </a:ext>
             </a:extLst>
           </p:cNvPr>
@@ -11163,7 +11163,7 @@
           <p:cNvPr id="7" name="Rectangle 6">
             <a:extLst xmlns:a="http://schemas.openxmlformats.org/drawingml/2006/main">
               <a:ext uri="{FF2B5EF4-FFF2-40B4-BE49-F238E27FC236}">
-                <a16:creationId xmlns:a16="http://schemas.microsoft.com/office/drawing/2014/main" id="{79D7E35B-29F2-4A68-973A-C675E6945C64}"/>
+                <a16:creationId xmlns:a16="http://schemas.microsoft.com/office/drawing/2014/main" id="{68015DF1-FD1B-4896-A208-4B1D217A579D}"/>
               </a:ext>
             </a:extLst>
           </p:cNvPr>
@@ -11216,7 +11216,7 @@
           <p:cNvPr id="8" name="Rectangle 7">
             <a:extLst xmlns:a="http://schemas.openxmlformats.org/drawingml/2006/main">
               <a:ext uri="{FF2B5EF4-FFF2-40B4-BE49-F238E27FC236}">
-                <a16:creationId xmlns:a16="http://schemas.microsoft.com/office/drawing/2014/main" id="{741591B0-581E-4C68-ACC5-230B7220864F}"/>
+                <a16:creationId xmlns:a16="http://schemas.microsoft.com/office/drawing/2014/main" id="{5000062A-0558-4F48-986B-B87E3E77AA40}"/>
               </a:ext>
             </a:extLst>
           </p:cNvPr>
@@ -11269,7 +11269,7 @@
           <p:cNvPr id="9" name="TextBox 8">
             <a:extLst xmlns:a="http://schemas.openxmlformats.org/drawingml/2006/main">
               <a:ext uri="{FF2B5EF4-FFF2-40B4-BE49-F238E27FC236}">
-                <a16:creationId xmlns:a16="http://schemas.microsoft.com/office/drawing/2014/main" id="{B71FA16A-AEC5-4FB8-AC52-FA9F1E0B2548}"/>
+                <a16:creationId xmlns:a16="http://schemas.microsoft.com/office/drawing/2014/main" id="{EC01D459-82C5-4222-A0A1-97A649169180}"/>
               </a:ext>
             </a:extLst>
           </p:cNvPr>
@@ -11324,7 +11324,7 @@
           <p:cNvPr id="10" name="TextBox 9">
             <a:extLst xmlns:a="http://schemas.openxmlformats.org/drawingml/2006/main">
               <a:ext uri="{FF2B5EF4-FFF2-40B4-BE49-F238E27FC236}">
-                <a16:creationId xmlns:a16="http://schemas.microsoft.com/office/drawing/2014/main" id="{2D1D2860-FB37-4189-9806-54FBAE4C7013}"/>
+                <a16:creationId xmlns:a16="http://schemas.microsoft.com/office/drawing/2014/main" id="{9AD53575-2672-49E9-8EBF-7C1DB07FE4BA}"/>
               </a:ext>
             </a:extLst>
           </p:cNvPr>
@@ -11377,7 +11377,7 @@
     </p:spTree>
     <p:extLst>
       <p:ext uri="{BB962C8B-B14F-4D97-AF65-F5344CB8AC3E}">
-        <p14:creationId xmlns:p14="http://schemas.microsoft.com/office/powerpoint/2010/main" val="417488228"/>
+        <p14:creationId xmlns:p14="http://schemas.microsoft.com/office/powerpoint/2010/main" val="1365408980"/>
       </p:ext>
     </p:extLst>
   </p:cSld>
@@ -11405,7 +11405,7 @@
           <p:nvPr/>
         </p:nvPicPr>
         <p:blipFill>
-          <a:blip xmlns:r="http://schemas.openxmlformats.org/officeDocument/2006/relationships" xmlns:a="http://schemas.openxmlformats.org/drawingml/2006/main" r:embed="R2e2060f6e9f348c9"/>
+          <a:blip xmlns:r="http://schemas.openxmlformats.org/officeDocument/2006/relationships" xmlns:a="http://schemas.openxmlformats.org/drawingml/2006/main" r:embed="R2f54e7ec7b8f4460"/>
           <a:stretch xmlns:a="http://schemas.openxmlformats.org/drawingml/2006/main">
             <a:fillRect l="0" t="0" r="0" b="0"/>
           </a:stretch>
@@ -11425,7 +11425,7 @@
           <p:cNvPr id="3" name="Rectangle 2">
             <a:extLst xmlns:a="http://schemas.openxmlformats.org/drawingml/2006/main">
               <a:ext uri="{FF2B5EF4-FFF2-40B4-BE49-F238E27FC236}">
-                <a16:creationId xmlns:a16="http://schemas.microsoft.com/office/drawing/2014/main" id="{FAC827D2-1502-40BF-8C64-FA15F1FD7A04}"/>
+                <a16:creationId xmlns:a16="http://schemas.microsoft.com/office/drawing/2014/main" id="{3328197D-03B9-49E0-B449-2390E8463ED1}"/>
               </a:ext>
             </a:extLst>
           </p:cNvPr>
@@ -11478,7 +11478,7 @@
           <p:cNvPr id="4" name="TextBox 3">
             <a:extLst xmlns:a="http://schemas.openxmlformats.org/drawingml/2006/main">
               <a:ext uri="{FF2B5EF4-FFF2-40B4-BE49-F238E27FC236}">
-                <a16:creationId xmlns:a16="http://schemas.microsoft.com/office/drawing/2014/main" id="{05867224-A2E2-47BE-8922-B4385FD07EAD}"/>
+                <a16:creationId xmlns:a16="http://schemas.microsoft.com/office/drawing/2014/main" id="{BF169FD0-C2B1-4DA6-83B8-F48A5BAED331}"/>
               </a:ext>
             </a:extLst>
           </p:cNvPr>
@@ -11533,7 +11533,7 @@
           <p:cNvPr id="5" name="TextBox 4">
             <a:extLst xmlns:a="http://schemas.openxmlformats.org/drawingml/2006/main">
               <a:ext uri="{FF2B5EF4-FFF2-40B4-BE49-F238E27FC236}">
-                <a16:creationId xmlns:a16="http://schemas.microsoft.com/office/drawing/2014/main" id="{5A13060C-D514-405A-BC42-0232A9BF3B1A}"/>
+                <a16:creationId xmlns:a16="http://schemas.microsoft.com/office/drawing/2014/main" id="{B4EC9621-0882-40DF-AA13-8C32B5B9C646}"/>
               </a:ext>
             </a:extLst>
           </p:cNvPr>
@@ -11588,7 +11588,7 @@
           <p:cNvPr id="6" name="TextBox 5">
             <a:extLst xmlns:a="http://schemas.openxmlformats.org/drawingml/2006/main">
               <a:ext uri="{FF2B5EF4-FFF2-40B4-BE49-F238E27FC236}">
-                <a16:creationId xmlns:a16="http://schemas.microsoft.com/office/drawing/2014/main" id="{6BE25DEE-E455-43C7-902B-0D3C2C60B977}"/>
+                <a16:creationId xmlns:a16="http://schemas.microsoft.com/office/drawing/2014/main" id="{0737A664-97B0-48D2-BD94-DDA83971069C}"/>
               </a:ext>
             </a:extLst>
           </p:cNvPr>
@@ -11727,7 +11727,7 @@
           <p:cNvPr id="7" name="Rectangle 6">
             <a:extLst xmlns:a="http://schemas.openxmlformats.org/drawingml/2006/main">
               <a:ext uri="{FF2B5EF4-FFF2-40B4-BE49-F238E27FC236}">
-                <a16:creationId xmlns:a16="http://schemas.microsoft.com/office/drawing/2014/main" id="{F6707CB1-BECB-4FDB-86A6-D0702E86EA27}"/>
+                <a16:creationId xmlns:a16="http://schemas.microsoft.com/office/drawing/2014/main" id="{4A1C1A52-F7D4-4E1B-98F4-86E9EB34A3CE}"/>
               </a:ext>
             </a:extLst>
           </p:cNvPr>
@@ -11780,7 +11780,7 @@
           <p:cNvPr id="8" name="Rectangle 7">
             <a:extLst xmlns:a="http://schemas.openxmlformats.org/drawingml/2006/main">
               <a:ext uri="{FF2B5EF4-FFF2-40B4-BE49-F238E27FC236}">
-                <a16:creationId xmlns:a16="http://schemas.microsoft.com/office/drawing/2014/main" id="{343F073E-4089-42C5-B556-2F4AB02A0F92}"/>
+                <a16:creationId xmlns:a16="http://schemas.microsoft.com/office/drawing/2014/main" id="{EEC74E1C-B15A-4652-864C-A2D1D814C612}"/>
               </a:ext>
             </a:extLst>
           </p:cNvPr>
@@ -11833,7 +11833,7 @@
           <p:cNvPr id="9" name="TextBox 8">
             <a:extLst xmlns:a="http://schemas.openxmlformats.org/drawingml/2006/main">
               <a:ext uri="{FF2B5EF4-FFF2-40B4-BE49-F238E27FC236}">
-                <a16:creationId xmlns:a16="http://schemas.microsoft.com/office/drawing/2014/main" id="{3ECF2B48-518A-4756-9E80-1C0349F6CE06}"/>
+                <a16:creationId xmlns:a16="http://schemas.microsoft.com/office/drawing/2014/main" id="{2CF8D616-2A10-4B8C-9055-AE31A3771743}"/>
               </a:ext>
             </a:extLst>
           </p:cNvPr>
@@ -11888,7 +11888,7 @@
           <p:cNvPr id="10" name="TextBox 9">
             <a:extLst xmlns:a="http://schemas.openxmlformats.org/drawingml/2006/main">
               <a:ext uri="{FF2B5EF4-FFF2-40B4-BE49-F238E27FC236}">
-                <a16:creationId xmlns:a16="http://schemas.microsoft.com/office/drawing/2014/main" id="{984EC3B8-B9C4-470F-AF4E-83A051180B3D}"/>
+                <a16:creationId xmlns:a16="http://schemas.microsoft.com/office/drawing/2014/main" id="{15E47439-7E9F-4021-9145-A17027D739A7}"/>
               </a:ext>
             </a:extLst>
           </p:cNvPr>
@@ -11941,7 +11941,7 @@
     </p:spTree>
     <p:extLst>
       <p:ext uri="{BB962C8B-B14F-4D97-AF65-F5344CB8AC3E}">
-        <p14:creationId xmlns:p14="http://schemas.microsoft.com/office/powerpoint/2010/main" val="1375349538"/>
+        <p14:creationId xmlns:p14="http://schemas.microsoft.com/office/powerpoint/2010/main" val="1188926140"/>
       </p:ext>
     </p:extLst>
   </p:cSld>
@@ -11969,7 +11969,7 @@
           <p:nvPr/>
         </p:nvPicPr>
         <p:blipFill>
-          <a:blip xmlns:r="http://schemas.openxmlformats.org/officeDocument/2006/relationships" xmlns:a="http://schemas.openxmlformats.org/drawingml/2006/main" r:embed="Re61a0a2c6fff4038"/>
+          <a:blip xmlns:r="http://schemas.openxmlformats.org/officeDocument/2006/relationships" xmlns:a="http://schemas.openxmlformats.org/drawingml/2006/main" r:embed="R235e7a3636ec4223"/>
           <a:stretch xmlns:a="http://schemas.openxmlformats.org/drawingml/2006/main">
             <a:fillRect l="0" t="0" r="0" b="0"/>
           </a:stretch>
@@ -11989,7 +11989,7 @@
           <p:cNvPr id="3" name="Rectangle 2">
             <a:extLst xmlns:a="http://schemas.openxmlformats.org/drawingml/2006/main">
               <a:ext uri="{FF2B5EF4-FFF2-40B4-BE49-F238E27FC236}">
-                <a16:creationId xmlns:a16="http://schemas.microsoft.com/office/drawing/2014/main" id="{A0501F5C-EB52-4B3E-8AAA-FF5F7755B5BB}"/>
+                <a16:creationId xmlns:a16="http://schemas.microsoft.com/office/drawing/2014/main" id="{D7878FBC-3B83-460B-826A-8B1670396A2A}"/>
               </a:ext>
             </a:extLst>
           </p:cNvPr>
@@ -12042,7 +12042,7 @@
           <p:cNvPr id="4" name="TextBox 3">
             <a:extLst xmlns:a="http://schemas.openxmlformats.org/drawingml/2006/main">
               <a:ext uri="{FF2B5EF4-FFF2-40B4-BE49-F238E27FC236}">
-                <a16:creationId xmlns:a16="http://schemas.microsoft.com/office/drawing/2014/main" id="{1DD632F5-DFC1-497B-AD1B-C63302BB8402}"/>
+                <a16:creationId xmlns:a16="http://schemas.microsoft.com/office/drawing/2014/main" id="{D399A5D2-475E-4B00-994F-C1B009EFFA2C}"/>
               </a:ext>
             </a:extLst>
           </p:cNvPr>
@@ -12097,7 +12097,7 @@
           <p:cNvPr id="5" name="TextBox 4">
             <a:extLst xmlns:a="http://schemas.openxmlformats.org/drawingml/2006/main">
               <a:ext uri="{FF2B5EF4-FFF2-40B4-BE49-F238E27FC236}">
-                <a16:creationId xmlns:a16="http://schemas.microsoft.com/office/drawing/2014/main" id="{25211DB4-74EB-4404-B3DF-D14E80AECB22}"/>
+                <a16:creationId xmlns:a16="http://schemas.microsoft.com/office/drawing/2014/main" id="{A64E75BA-3414-45B7-8EB2-023635E57DCA}"/>
               </a:ext>
             </a:extLst>
           </p:cNvPr>
@@ -12152,7 +12152,7 @@
           <p:cNvPr id="6" name="TextBox 5">
             <a:extLst xmlns:a="http://schemas.openxmlformats.org/drawingml/2006/main">
               <a:ext uri="{FF2B5EF4-FFF2-40B4-BE49-F238E27FC236}">
-                <a16:creationId xmlns:a16="http://schemas.microsoft.com/office/drawing/2014/main" id="{DB5DE1E8-8D8D-4C7E-824B-072FE868675B}"/>
+                <a16:creationId xmlns:a16="http://schemas.microsoft.com/office/drawing/2014/main" id="{1347656C-09DC-4D9A-AE6D-2E024D9A65B0}"/>
               </a:ext>
             </a:extLst>
           </p:cNvPr>
@@ -12291,7 +12291,7 @@
           <p:cNvPr id="7" name="Rectangle 6">
             <a:extLst xmlns:a="http://schemas.openxmlformats.org/drawingml/2006/main">
               <a:ext uri="{FF2B5EF4-FFF2-40B4-BE49-F238E27FC236}">
-                <a16:creationId xmlns:a16="http://schemas.microsoft.com/office/drawing/2014/main" id="{20AB1B26-F7EB-45FC-8485-DD1F69B4E4C0}"/>
+                <a16:creationId xmlns:a16="http://schemas.microsoft.com/office/drawing/2014/main" id="{519FE6E9-D387-4DD0-B478-72BE2E1298E8}"/>
               </a:ext>
             </a:extLst>
           </p:cNvPr>
@@ -12344,7 +12344,7 @@
           <p:cNvPr id="8" name="Rectangle 7">
             <a:extLst xmlns:a="http://schemas.openxmlformats.org/drawingml/2006/main">
               <a:ext uri="{FF2B5EF4-FFF2-40B4-BE49-F238E27FC236}">
-                <a16:creationId xmlns:a16="http://schemas.microsoft.com/office/drawing/2014/main" id="{CB065A30-F77D-4563-90E3-7CE41BDB86E9}"/>
+                <a16:creationId xmlns:a16="http://schemas.microsoft.com/office/drawing/2014/main" id="{2399DC91-616B-40B8-BC20-2FDD7B42A400}"/>
               </a:ext>
             </a:extLst>
           </p:cNvPr>
@@ -12397,7 +12397,7 @@
           <p:cNvPr id="9" name="TextBox 8">
             <a:extLst xmlns:a="http://schemas.openxmlformats.org/drawingml/2006/main">
               <a:ext uri="{FF2B5EF4-FFF2-40B4-BE49-F238E27FC236}">
-                <a16:creationId xmlns:a16="http://schemas.microsoft.com/office/drawing/2014/main" id="{4C47E9CE-AAB7-4EAE-AB24-6736EBC3DB86}"/>
+                <a16:creationId xmlns:a16="http://schemas.microsoft.com/office/drawing/2014/main" id="{A6AFE685-DA32-42F3-9B79-332667498B85}"/>
               </a:ext>
             </a:extLst>
           </p:cNvPr>
@@ -12452,7 +12452,7 @@
           <p:cNvPr id="10" name="TextBox 9">
             <a:extLst xmlns:a="http://schemas.openxmlformats.org/drawingml/2006/main">
               <a:ext uri="{FF2B5EF4-FFF2-40B4-BE49-F238E27FC236}">
-                <a16:creationId xmlns:a16="http://schemas.microsoft.com/office/drawing/2014/main" id="{4BADD0FE-A4FB-4CC5-9628-D9812DDBC15D}"/>
+                <a16:creationId xmlns:a16="http://schemas.microsoft.com/office/drawing/2014/main" id="{2C89D1AA-FB82-4F0B-B1A7-B1B88A37D009}"/>
               </a:ext>
             </a:extLst>
           </p:cNvPr>
@@ -12505,7 +12505,7 @@
     </p:spTree>
     <p:extLst>
       <p:ext uri="{BB962C8B-B14F-4D97-AF65-F5344CB8AC3E}">
-        <p14:creationId xmlns:p14="http://schemas.microsoft.com/office/powerpoint/2010/main" val="2118061578"/>
+        <p14:creationId xmlns:p14="http://schemas.microsoft.com/office/powerpoint/2010/main" val="1305478462"/>
       </p:ext>
     </p:extLst>
   </p:cSld>
@@ -12533,7 +12533,7 @@
           <p:nvPr/>
         </p:nvPicPr>
         <p:blipFill>
-          <a:blip xmlns:r="http://schemas.openxmlformats.org/officeDocument/2006/relationships" xmlns:a="http://schemas.openxmlformats.org/drawingml/2006/main" r:embed="Rd88b42b157144ee1"/>
+          <a:blip xmlns:r="http://schemas.openxmlformats.org/officeDocument/2006/relationships" xmlns:a="http://schemas.openxmlformats.org/drawingml/2006/main" r:embed="Raa40443a2a724e0b"/>
           <a:stretch xmlns:a="http://schemas.openxmlformats.org/drawingml/2006/main">
             <a:fillRect l="0" t="0" r="0" b="0"/>
           </a:stretch>
@@ -12553,7 +12553,7 @@
           <p:cNvPr id="3" name="Rectangle 2">
             <a:extLst xmlns:a="http://schemas.openxmlformats.org/drawingml/2006/main">
               <a:ext uri="{FF2B5EF4-FFF2-40B4-BE49-F238E27FC236}">
-                <a16:creationId xmlns:a16="http://schemas.microsoft.com/office/drawing/2014/main" id="{0B4897E7-7972-4812-8085-B89EF48C1391}"/>
+                <a16:creationId xmlns:a16="http://schemas.microsoft.com/office/drawing/2014/main" id="{8388B7B5-41E8-4425-BB43-B0C5C3E165DB}"/>
               </a:ext>
             </a:extLst>
           </p:cNvPr>
@@ -12606,7 +12606,7 @@
           <p:cNvPr id="4" name="TextBox 3">
             <a:extLst xmlns:a="http://schemas.openxmlformats.org/drawingml/2006/main">
               <a:ext uri="{FF2B5EF4-FFF2-40B4-BE49-F238E27FC236}">
-                <a16:creationId xmlns:a16="http://schemas.microsoft.com/office/drawing/2014/main" id="{400597C7-706B-4E95-88FE-1EA797F9D45F}"/>
+                <a16:creationId xmlns:a16="http://schemas.microsoft.com/office/drawing/2014/main" id="{C3716168-C0AD-4EC5-B75E-5745E69430ED}"/>
               </a:ext>
             </a:extLst>
           </p:cNvPr>
@@ -12661,7 +12661,7 @@
           <p:cNvPr id="5" name="TextBox 4">
             <a:extLst xmlns:a="http://schemas.openxmlformats.org/drawingml/2006/main">
               <a:ext uri="{FF2B5EF4-FFF2-40B4-BE49-F238E27FC236}">
-                <a16:creationId xmlns:a16="http://schemas.microsoft.com/office/drawing/2014/main" id="{3B964394-70E0-4057-B433-197C042F3F82}"/>
+                <a16:creationId xmlns:a16="http://schemas.microsoft.com/office/drawing/2014/main" id="{D256076F-BA25-43D6-B61B-2452898F5F26}"/>
               </a:ext>
             </a:extLst>
           </p:cNvPr>
@@ -12716,7 +12716,7 @@
           <p:cNvPr id="6" name="TextBox 5">
             <a:extLst xmlns:a="http://schemas.openxmlformats.org/drawingml/2006/main">
               <a:ext uri="{FF2B5EF4-FFF2-40B4-BE49-F238E27FC236}">
-                <a16:creationId xmlns:a16="http://schemas.microsoft.com/office/drawing/2014/main" id="{FF0D15B4-FE29-457A-B256-B23FA855F422}"/>
+                <a16:creationId xmlns:a16="http://schemas.microsoft.com/office/drawing/2014/main" id="{96F73B21-3A05-43DE-A96F-E718AB42EB4B}"/>
               </a:ext>
             </a:extLst>
           </p:cNvPr>
@@ -12855,7 +12855,7 @@
           <p:cNvPr id="7" name="Rectangle 6">
             <a:extLst xmlns:a="http://schemas.openxmlformats.org/drawingml/2006/main">
               <a:ext uri="{FF2B5EF4-FFF2-40B4-BE49-F238E27FC236}">
-                <a16:creationId xmlns:a16="http://schemas.microsoft.com/office/drawing/2014/main" id="{969B917D-C4D7-45D8-A953-2003D68B5687}"/>
+                <a16:creationId xmlns:a16="http://schemas.microsoft.com/office/drawing/2014/main" id="{5E475B82-36D6-49A9-A710-650547606588}"/>
               </a:ext>
             </a:extLst>
           </p:cNvPr>
@@ -12908,7 +12908,7 @@
           <p:cNvPr id="8" name="Rectangle 7">
             <a:extLst xmlns:a="http://schemas.openxmlformats.org/drawingml/2006/main">
               <a:ext uri="{FF2B5EF4-FFF2-40B4-BE49-F238E27FC236}">
-                <a16:creationId xmlns:a16="http://schemas.microsoft.com/office/drawing/2014/main" id="{D7E325AD-2184-474A-A3B1-887D6C4F5DC9}"/>
+                <a16:creationId xmlns:a16="http://schemas.microsoft.com/office/drawing/2014/main" id="{929DE466-D3AE-4EBD-9D87-742983429B79}"/>
               </a:ext>
             </a:extLst>
           </p:cNvPr>
@@ -12961,7 +12961,7 @@
           <p:cNvPr id="9" name="TextBox 8">
             <a:extLst xmlns:a="http://schemas.openxmlformats.org/drawingml/2006/main">
               <a:ext uri="{FF2B5EF4-FFF2-40B4-BE49-F238E27FC236}">
-                <a16:creationId xmlns:a16="http://schemas.microsoft.com/office/drawing/2014/main" id="{E2B83DC1-2013-4EF5-8F10-C2772D24C91D}"/>
+                <a16:creationId xmlns:a16="http://schemas.microsoft.com/office/drawing/2014/main" id="{3B52C25D-4796-44EE-96D4-1790B3CCB68A}"/>
               </a:ext>
             </a:extLst>
           </p:cNvPr>
@@ -13016,7 +13016,7 @@
           <p:cNvPr id="10" name="TextBox 9">
             <a:extLst xmlns:a="http://schemas.openxmlformats.org/drawingml/2006/main">
               <a:ext uri="{FF2B5EF4-FFF2-40B4-BE49-F238E27FC236}">
-                <a16:creationId xmlns:a16="http://schemas.microsoft.com/office/drawing/2014/main" id="{D7AB2628-C38A-44D2-9861-B5A444CF1931}"/>
+                <a16:creationId xmlns:a16="http://schemas.microsoft.com/office/drawing/2014/main" id="{66A84D79-5905-4748-B33E-7B0BB46491B6}"/>
               </a:ext>
             </a:extLst>
           </p:cNvPr>
@@ -13069,7 +13069,7 @@
     </p:spTree>
     <p:extLst>
       <p:ext uri="{BB962C8B-B14F-4D97-AF65-F5344CB8AC3E}">
-        <p14:creationId xmlns:p14="http://schemas.microsoft.com/office/powerpoint/2010/main" val="1567880920"/>
+        <p14:creationId xmlns:p14="http://schemas.microsoft.com/office/powerpoint/2010/main" val="1824023592"/>
       </p:ext>
     </p:extLst>
   </p:cSld>
@@ -13097,7 +13097,7 @@
           <p:nvPr/>
         </p:nvPicPr>
         <p:blipFill>
-          <a:blip xmlns:r="http://schemas.openxmlformats.org/officeDocument/2006/relationships" xmlns:a="http://schemas.openxmlformats.org/drawingml/2006/main" r:embed="R75e169c616e04c57"/>
+          <a:blip xmlns:r="http://schemas.openxmlformats.org/officeDocument/2006/relationships" xmlns:a="http://schemas.openxmlformats.org/drawingml/2006/main" r:embed="R8138b7121fcc439a"/>
           <a:stretch xmlns:a="http://schemas.openxmlformats.org/drawingml/2006/main">
             <a:fillRect l="0" t="0" r="0" b="0"/>
           </a:stretch>
@@ -13117,7 +13117,7 @@
           <p:cNvPr id="3" name="Rectangle 2">
             <a:extLst xmlns:a="http://schemas.openxmlformats.org/drawingml/2006/main">
               <a:ext uri="{FF2B5EF4-FFF2-40B4-BE49-F238E27FC236}">
-                <a16:creationId xmlns:a16="http://schemas.microsoft.com/office/drawing/2014/main" id="{72E766B2-8EED-4217-B2DA-74C2272FF008}"/>
+                <a16:creationId xmlns:a16="http://schemas.microsoft.com/office/drawing/2014/main" id="{D423E3AD-D522-4FA2-93D5-B8A773D6379C}"/>
               </a:ext>
             </a:extLst>
           </p:cNvPr>
@@ -13170,7 +13170,7 @@
           <p:cNvPr id="4" name="TextBox 3">
             <a:extLst xmlns:a="http://schemas.openxmlformats.org/drawingml/2006/main">
               <a:ext uri="{FF2B5EF4-FFF2-40B4-BE49-F238E27FC236}">
-                <a16:creationId xmlns:a16="http://schemas.microsoft.com/office/drawing/2014/main" id="{8B12B9AF-9F17-43D8-9957-E6183985BA7B}"/>
+                <a16:creationId xmlns:a16="http://schemas.microsoft.com/office/drawing/2014/main" id="{716BD035-2B31-41FE-986D-97873064FE01}"/>
               </a:ext>
             </a:extLst>
           </p:cNvPr>
@@ -13225,7 +13225,7 @@
           <p:cNvPr id="5" name="TextBox 4">
             <a:extLst xmlns:a="http://schemas.openxmlformats.org/drawingml/2006/main">
               <a:ext uri="{FF2B5EF4-FFF2-40B4-BE49-F238E27FC236}">
-                <a16:creationId xmlns:a16="http://schemas.microsoft.com/office/drawing/2014/main" id="{2194929B-DDAA-4D95-B9F7-336FD934DC77}"/>
+                <a16:creationId xmlns:a16="http://schemas.microsoft.com/office/drawing/2014/main" id="{FAF4892D-4787-449A-A141-C9C0B72D8978}"/>
               </a:ext>
             </a:extLst>
           </p:cNvPr>
@@ -13280,19 +13280,19 @@
           <p:cNvPr id="6" name="TextBox 5">
             <a:extLst xmlns:a="http://schemas.openxmlformats.org/drawingml/2006/main">
               <a:ext uri="{FF2B5EF4-FFF2-40B4-BE49-F238E27FC236}">
-                <a16:creationId xmlns:a16="http://schemas.microsoft.com/office/drawing/2014/main" id="{F3339E33-EC02-46F1-AC75-2C682E50A4A9}"/>
-              </a:ext>
-            </a:extLst>
-          </p:cNvPr>
-          <p:cNvSpPr>
-            <a:spLocks xmlns:a="http://schemas.openxmlformats.org/drawingml/2006/main" noGrp="1"/>
-          </p:cNvSpPr>
-          <p:nvPr/>
-        </p:nvSpPr>
-        <p:spPr>
-          <a:xfrm xmlns:a="http://schemas.openxmlformats.org/drawingml/2006/main">
-            <a:off x="406400" y="2159000"/>
-            <a:ext cx="10477500" cy="3556000"/>
+                <a16:creationId xmlns:a16="http://schemas.microsoft.com/office/drawing/2014/main" id="{C9601C30-8A42-415D-B780-0E2CB1AC3C39}"/>
+              </a:ext>
+            </a:extLst>
+          </p:cNvPr>
+          <p:cNvSpPr>
+            <a:spLocks xmlns:a="http://schemas.openxmlformats.org/drawingml/2006/main" noGrp="1"/>
+          </p:cNvSpPr>
+          <p:nvPr/>
+        </p:nvSpPr>
+        <p:spPr>
+          <a:xfrm xmlns:a="http://schemas.openxmlformats.org/drawingml/2006/main">
+            <a:off x="406400" y="2714625"/>
+            <a:ext cx="10477500" cy="2952750"/>
           </a:xfrm>
           <a:prstGeom xmlns:a="http://schemas.openxmlformats.org/drawingml/2006/main" prst="rect">
             <a:avLst/>
@@ -13419,7 +13419,7 @@
           <p:cNvPr id="7" name="Rectangle 6">
             <a:extLst xmlns:a="http://schemas.openxmlformats.org/drawingml/2006/main">
               <a:ext uri="{FF2B5EF4-FFF2-40B4-BE49-F238E27FC236}">
-                <a16:creationId xmlns:a16="http://schemas.microsoft.com/office/drawing/2014/main" id="{1A28AAAF-FF04-4EB0-968F-1248EB66C8C0}"/>
+                <a16:creationId xmlns:a16="http://schemas.microsoft.com/office/drawing/2014/main" id="{A84150A0-0565-46B9-A2D1-A0ABBEE73136}"/>
               </a:ext>
             </a:extLst>
           </p:cNvPr>
@@ -13472,7 +13472,7 @@
           <p:cNvPr id="8" name="Rectangle 7">
             <a:extLst xmlns:a="http://schemas.openxmlformats.org/drawingml/2006/main">
               <a:ext uri="{FF2B5EF4-FFF2-40B4-BE49-F238E27FC236}">
-                <a16:creationId xmlns:a16="http://schemas.microsoft.com/office/drawing/2014/main" id="{D6EFFAC5-594E-49E8-8EF4-9E8D4471855C}"/>
+                <a16:creationId xmlns:a16="http://schemas.microsoft.com/office/drawing/2014/main" id="{9980BE68-8440-4F14-8421-A31D88CE1765}"/>
               </a:ext>
             </a:extLst>
           </p:cNvPr>
@@ -13525,7 +13525,7 @@
           <p:cNvPr id="9" name="TextBox 8">
             <a:extLst xmlns:a="http://schemas.openxmlformats.org/drawingml/2006/main">
               <a:ext uri="{FF2B5EF4-FFF2-40B4-BE49-F238E27FC236}">
-                <a16:creationId xmlns:a16="http://schemas.microsoft.com/office/drawing/2014/main" id="{497F575D-846B-4872-8140-A22B6BB02060}"/>
+                <a16:creationId xmlns:a16="http://schemas.microsoft.com/office/drawing/2014/main" id="{C1CDECF5-D3E2-4257-9EF4-7B6982DAE01D}"/>
               </a:ext>
             </a:extLst>
           </p:cNvPr>
@@ -13580,7 +13580,7 @@
           <p:cNvPr id="10" name="TextBox 9">
             <a:extLst xmlns:a="http://schemas.openxmlformats.org/drawingml/2006/main">
               <a:ext uri="{FF2B5EF4-FFF2-40B4-BE49-F238E27FC236}">
-                <a16:creationId xmlns:a16="http://schemas.microsoft.com/office/drawing/2014/main" id="{CAF2FC24-4E74-44EB-BC5E-4B9CCDAACFFA}"/>
+                <a16:creationId xmlns:a16="http://schemas.microsoft.com/office/drawing/2014/main" id="{474C8CBD-02B5-44F9-8B7D-2DB6FE5A517B}"/>
               </a:ext>
             </a:extLst>
           </p:cNvPr>
@@ -13633,7 +13633,7 @@
     </p:spTree>
     <p:extLst>
       <p:ext uri="{BB962C8B-B14F-4D97-AF65-F5344CB8AC3E}">
-        <p14:creationId xmlns:p14="http://schemas.microsoft.com/office/powerpoint/2010/main" val="1193857480"/>
+        <p14:creationId xmlns:p14="http://schemas.microsoft.com/office/powerpoint/2010/main" val="1975869608"/>
       </p:ext>
     </p:extLst>
   </p:cSld>
@@ -13661,7 +13661,7 @@
           <p:nvPr/>
         </p:nvPicPr>
         <p:blipFill>
-          <a:blip xmlns:r="http://schemas.openxmlformats.org/officeDocument/2006/relationships" xmlns:a="http://schemas.openxmlformats.org/drawingml/2006/main" r:embed="R528301df405e4d1b"/>
+          <a:blip xmlns:r="http://schemas.openxmlformats.org/officeDocument/2006/relationships" xmlns:a="http://schemas.openxmlformats.org/drawingml/2006/main" r:embed="R4dbfee369d4e49af"/>
           <a:stretch xmlns:a="http://schemas.openxmlformats.org/drawingml/2006/main">
             <a:fillRect l="0" t="0" r="0" b="0"/>
           </a:stretch>
@@ -13681,7 +13681,7 @@
           <p:cNvPr id="3" name="Rectangle 2">
             <a:extLst xmlns:a="http://schemas.openxmlformats.org/drawingml/2006/main">
               <a:ext uri="{FF2B5EF4-FFF2-40B4-BE49-F238E27FC236}">
-                <a16:creationId xmlns:a16="http://schemas.microsoft.com/office/drawing/2014/main" id="{A3BCC47F-EA62-498B-B054-BBF731DD151D}"/>
+                <a16:creationId xmlns:a16="http://schemas.microsoft.com/office/drawing/2014/main" id="{D731CA7B-82BA-4156-89DA-61E4844EA797}"/>
               </a:ext>
             </a:extLst>
           </p:cNvPr>
@@ -13734,7 +13734,7 @@
           <p:cNvPr id="4" name="TextBox 3">
             <a:extLst xmlns:a="http://schemas.openxmlformats.org/drawingml/2006/main">
               <a:ext uri="{FF2B5EF4-FFF2-40B4-BE49-F238E27FC236}">
-                <a16:creationId xmlns:a16="http://schemas.microsoft.com/office/drawing/2014/main" id="{DF85D4B5-2865-47F4-8D62-BE704387DD02}"/>
+                <a16:creationId xmlns:a16="http://schemas.microsoft.com/office/drawing/2014/main" id="{34C0EF72-43E0-46A4-9F39-2707B03C9A52}"/>
               </a:ext>
             </a:extLst>
           </p:cNvPr>
@@ -13789,7 +13789,7 @@
           <p:cNvPr id="5" name="TextBox 4">
             <a:extLst xmlns:a="http://schemas.openxmlformats.org/drawingml/2006/main">
               <a:ext uri="{FF2B5EF4-FFF2-40B4-BE49-F238E27FC236}">
-                <a16:creationId xmlns:a16="http://schemas.microsoft.com/office/drawing/2014/main" id="{E98E88DC-81D2-45D9-A939-335D06450009}"/>
+                <a16:creationId xmlns:a16="http://schemas.microsoft.com/office/drawing/2014/main" id="{4766B6BE-4BBD-4728-B696-85924D11D3A0}"/>
               </a:ext>
             </a:extLst>
           </p:cNvPr>
@@ -13844,7 +13844,7 @@
           <p:cNvPr id="6" name="Rounded Rectangle 5">
             <a:extLst xmlns:a="http://schemas.openxmlformats.org/drawingml/2006/main">
               <a:ext uri="{FF2B5EF4-FFF2-40B4-BE49-F238E27FC236}">
-                <a16:creationId xmlns:a16="http://schemas.microsoft.com/office/drawing/2014/main" id="{D4409ED0-5099-48C8-BF0D-0F132A60DD6D}"/>
+                <a16:creationId xmlns:a16="http://schemas.microsoft.com/office/drawing/2014/main" id="{F36F2853-C2FF-410C-BAED-13502F52A945}"/>
               </a:ext>
             </a:extLst>
           </p:cNvPr>
@@ -13901,7 +13901,7 @@
           <p:cNvPr id="7" name="TextBox 6">
             <a:extLst xmlns:a="http://schemas.openxmlformats.org/drawingml/2006/main">
               <a:ext uri="{FF2B5EF4-FFF2-40B4-BE49-F238E27FC236}">
-                <a16:creationId xmlns:a16="http://schemas.microsoft.com/office/drawing/2014/main" id="{4BE122DF-29FF-4589-8B4C-F2D5807A2322}"/>
+                <a16:creationId xmlns:a16="http://schemas.microsoft.com/office/drawing/2014/main" id="{839685EC-A3E1-4442-94D7-523CEF43F477}"/>
               </a:ext>
             </a:extLst>
           </p:cNvPr>
@@ -13956,7 +13956,7 @@
           <p:cNvPr id="8" name="TextBox 7">
             <a:extLst xmlns:a="http://schemas.openxmlformats.org/drawingml/2006/main">
               <a:ext uri="{FF2B5EF4-FFF2-40B4-BE49-F238E27FC236}">
-                <a16:creationId xmlns:a16="http://schemas.microsoft.com/office/drawing/2014/main" id="{B15F5C6E-5F18-4EBD-BBD6-A094229A3316}"/>
+                <a16:creationId xmlns:a16="http://schemas.microsoft.com/office/drawing/2014/main" id="{BCC83EB8-1171-4647-B497-CF1A51E254AD}"/>
               </a:ext>
             </a:extLst>
           </p:cNvPr>
@@ -14011,7 +14011,7 @@
           <p:cNvPr id="9" name="TextBox 8">
             <a:extLst xmlns:a="http://schemas.openxmlformats.org/drawingml/2006/main">
               <a:ext uri="{FF2B5EF4-FFF2-40B4-BE49-F238E27FC236}">
-                <a16:creationId xmlns:a16="http://schemas.microsoft.com/office/drawing/2014/main" id="{6CC9AFC3-04BD-4B4C-94CA-5C7CBF35E6F3}"/>
+                <a16:creationId xmlns:a16="http://schemas.microsoft.com/office/drawing/2014/main" id="{D23F0488-BA6C-466D-BDD1-4B436767E34F}"/>
               </a:ext>
             </a:extLst>
           </p:cNvPr>
@@ -14066,7 +14066,7 @@
           <p:cNvPr id="10" name="Rounded Rectangle 9">
             <a:extLst xmlns:a="http://schemas.openxmlformats.org/drawingml/2006/main">
               <a:ext uri="{FF2B5EF4-FFF2-40B4-BE49-F238E27FC236}">
-                <a16:creationId xmlns:a16="http://schemas.microsoft.com/office/drawing/2014/main" id="{A59DA8F5-A991-4D36-81BA-73F22410F019}"/>
+                <a16:creationId xmlns:a16="http://schemas.microsoft.com/office/drawing/2014/main" id="{F1F48037-A996-4A00-8D36-10C0C0EC6C86}"/>
               </a:ext>
             </a:extLst>
           </p:cNvPr>
@@ -14123,7 +14123,7 @@
           <p:cNvPr id="11" name="TextBox 10">
             <a:extLst xmlns:a="http://schemas.openxmlformats.org/drawingml/2006/main">
               <a:ext uri="{FF2B5EF4-FFF2-40B4-BE49-F238E27FC236}">
-                <a16:creationId xmlns:a16="http://schemas.microsoft.com/office/drawing/2014/main" id="{DDB33BA5-C243-410D-B5C1-6268463396B4}"/>
+                <a16:creationId xmlns:a16="http://schemas.microsoft.com/office/drawing/2014/main" id="{2811895E-969F-4174-9239-4128C6BD58DC}"/>
               </a:ext>
             </a:extLst>
           </p:cNvPr>
@@ -14178,7 +14178,7 @@
           <p:cNvPr id="12" name="TextBox 11">
             <a:extLst xmlns:a="http://schemas.openxmlformats.org/drawingml/2006/main">
               <a:ext uri="{FF2B5EF4-FFF2-40B4-BE49-F238E27FC236}">
-                <a16:creationId xmlns:a16="http://schemas.microsoft.com/office/drawing/2014/main" id="{46DC0E03-C107-4F87-8F36-9A4F8AB67E56}"/>
+                <a16:creationId xmlns:a16="http://schemas.microsoft.com/office/drawing/2014/main" id="{CB4835FB-5055-4656-944D-E4C80A3A9193}"/>
               </a:ext>
             </a:extLst>
           </p:cNvPr>
@@ -14233,7 +14233,7 @@
           <p:cNvPr id="13" name="TextBox 12">
             <a:extLst xmlns:a="http://schemas.openxmlformats.org/drawingml/2006/main">
               <a:ext uri="{FF2B5EF4-FFF2-40B4-BE49-F238E27FC236}">
-                <a16:creationId xmlns:a16="http://schemas.microsoft.com/office/drawing/2014/main" id="{840B04D6-66C5-4674-A832-88866F7642E6}"/>
+                <a16:creationId xmlns:a16="http://schemas.microsoft.com/office/drawing/2014/main" id="{4FBB5CED-8A3F-46BF-A11B-2412067B327F}"/>
               </a:ext>
             </a:extLst>
           </p:cNvPr>
@@ -14288,7 +14288,7 @@
           <p:cNvPr id="14" name="Rounded Rectangle 13">
             <a:extLst xmlns:a="http://schemas.openxmlformats.org/drawingml/2006/main">
               <a:ext uri="{FF2B5EF4-FFF2-40B4-BE49-F238E27FC236}">
-                <a16:creationId xmlns:a16="http://schemas.microsoft.com/office/drawing/2014/main" id="{2B130CDF-2F0E-4AD8-B464-E064886A0FCA}"/>
+                <a16:creationId xmlns:a16="http://schemas.microsoft.com/office/drawing/2014/main" id="{6A50999E-5ECE-4746-A250-F3AECDECDD91}"/>
               </a:ext>
             </a:extLst>
           </p:cNvPr>
@@ -14345,7 +14345,7 @@
           <p:cNvPr id="15" name="TextBox 14">
             <a:extLst xmlns:a="http://schemas.openxmlformats.org/drawingml/2006/main">
               <a:ext uri="{FF2B5EF4-FFF2-40B4-BE49-F238E27FC236}">
-                <a16:creationId xmlns:a16="http://schemas.microsoft.com/office/drawing/2014/main" id="{C66FF05F-DAF7-4728-B17A-5E9A21D1CAB1}"/>
+                <a16:creationId xmlns:a16="http://schemas.microsoft.com/office/drawing/2014/main" id="{3B47A4C9-7691-4817-A606-5042281AAE7B}"/>
               </a:ext>
             </a:extLst>
           </p:cNvPr>
@@ -14400,7 +14400,7 @@
           <p:cNvPr id="16" name="TextBox 15">
             <a:extLst xmlns:a="http://schemas.openxmlformats.org/drawingml/2006/main">
               <a:ext uri="{FF2B5EF4-FFF2-40B4-BE49-F238E27FC236}">
-                <a16:creationId xmlns:a16="http://schemas.microsoft.com/office/drawing/2014/main" id="{B87FDCC9-CE17-4428-9445-15D06231FF87}"/>
+                <a16:creationId xmlns:a16="http://schemas.microsoft.com/office/drawing/2014/main" id="{C9DF3C68-63DB-484C-81CF-5EB05BCECA83}"/>
               </a:ext>
             </a:extLst>
           </p:cNvPr>
@@ -14455,7 +14455,7 @@
           <p:cNvPr id="17" name="TextBox 16">
             <a:extLst xmlns:a="http://schemas.openxmlformats.org/drawingml/2006/main">
               <a:ext uri="{FF2B5EF4-FFF2-40B4-BE49-F238E27FC236}">
-                <a16:creationId xmlns:a16="http://schemas.microsoft.com/office/drawing/2014/main" id="{1CA65039-A45F-45B2-9E6D-3E08C521078A}"/>
+                <a16:creationId xmlns:a16="http://schemas.microsoft.com/office/drawing/2014/main" id="{825B5DFA-59E2-4375-B4D4-7605F3AB0C26}"/>
               </a:ext>
             </a:extLst>
           </p:cNvPr>
@@ -14510,7 +14510,7 @@
           <p:cNvPr id="18" name="Rounded Rectangle 17">
             <a:extLst xmlns:a="http://schemas.openxmlformats.org/drawingml/2006/main">
               <a:ext uri="{FF2B5EF4-FFF2-40B4-BE49-F238E27FC236}">
-                <a16:creationId xmlns:a16="http://schemas.microsoft.com/office/drawing/2014/main" id="{C4AC599F-3B44-4908-85CD-8B30BB59D2E6}"/>
+                <a16:creationId xmlns:a16="http://schemas.microsoft.com/office/drawing/2014/main" id="{78445A3C-812D-4801-8314-B02249C2209A}"/>
               </a:ext>
             </a:extLst>
           </p:cNvPr>
@@ -14567,7 +14567,7 @@
           <p:cNvPr id="19" name="TextBox 18">
             <a:extLst xmlns:a="http://schemas.openxmlformats.org/drawingml/2006/main">
               <a:ext uri="{FF2B5EF4-FFF2-40B4-BE49-F238E27FC236}">
-                <a16:creationId xmlns:a16="http://schemas.microsoft.com/office/drawing/2014/main" id="{BBDF8A1F-0ED6-4616-B3B9-160881D15A0C}"/>
+                <a16:creationId xmlns:a16="http://schemas.microsoft.com/office/drawing/2014/main" id="{1B3C332D-5B25-43F8-AB06-8D5A15A6102E}"/>
               </a:ext>
             </a:extLst>
           </p:cNvPr>
@@ -14622,19 +14622,19 @@
           <p:cNvPr id="20" name="TextBox 19">
             <a:extLst xmlns:a="http://schemas.openxmlformats.org/drawingml/2006/main">
               <a:ext uri="{FF2B5EF4-FFF2-40B4-BE49-F238E27FC236}">
-                <a16:creationId xmlns:a16="http://schemas.microsoft.com/office/drawing/2014/main" id="{18466EA8-961D-4544-82F0-78B1A28A432D}"/>
-              </a:ext>
-            </a:extLst>
-          </p:cNvPr>
-          <p:cNvSpPr>
-            <a:spLocks xmlns:a="http://schemas.openxmlformats.org/drawingml/2006/main" noGrp="1"/>
-          </p:cNvSpPr>
-          <p:nvPr/>
-        </p:nvSpPr>
-        <p:spPr>
-          <a:xfrm xmlns:a="http://schemas.openxmlformats.org/drawingml/2006/main">
-            <a:off x="9169400" y="3848100"/>
-            <a:ext cx="2159000" cy="469392"/>
+                <a16:creationId xmlns:a16="http://schemas.microsoft.com/office/drawing/2014/main" id="{142AF688-E3A4-4240-A883-38E29C39A995}"/>
+              </a:ext>
+            </a:extLst>
+          </p:cNvPr>
+          <p:cNvSpPr>
+            <a:spLocks xmlns:a="http://schemas.openxmlformats.org/drawingml/2006/main" noGrp="1"/>
+          </p:cNvSpPr>
+          <p:nvPr/>
+        </p:nvSpPr>
+        <p:spPr>
+          <a:xfrm xmlns:a="http://schemas.openxmlformats.org/drawingml/2006/main">
+            <a:off x="9169400" y="4010025"/>
+            <a:ext cx="2159000" cy="409575"/>
           </a:xfrm>
           <a:prstGeom xmlns:a="http://schemas.openxmlformats.org/drawingml/2006/main" prst="rect">
             <a:avLst/>
@@ -14643,7 +14643,7 @@
         </p:spPr>
         <p:txBody>
           <a:bodyPr xmlns:a="http://schemas.openxmlformats.org/drawingml/2006/main" wrap="square" lIns="0" tIns="0" rIns="0" bIns="0" anchor="t">
-            <a:normAutofit fontScale="100000"/>
+            <a:normAutofit fontScale="87256"/>
           </a:bodyPr>
           <a:lstStyle xmlns:a="http://schemas.openxmlformats.org/drawingml/2006/main"/>
           <a:p xmlns:a="http://schemas.openxmlformats.org/drawingml/2006/main">
@@ -14677,7 +14677,7 @@
           <p:cNvPr id="21" name="Rectangle 20">
             <a:extLst xmlns:a="http://schemas.openxmlformats.org/drawingml/2006/main">
               <a:ext uri="{FF2B5EF4-FFF2-40B4-BE49-F238E27FC236}">
-                <a16:creationId xmlns:a16="http://schemas.microsoft.com/office/drawing/2014/main" id="{D31C3DC4-8612-4406-9A96-EBCC02D0A7B1}"/>
+                <a16:creationId xmlns:a16="http://schemas.microsoft.com/office/drawing/2014/main" id="{6A4A4A96-CCA0-4AD8-BAAB-349FACE19666}"/>
               </a:ext>
             </a:extLst>
           </p:cNvPr>
@@ -14730,7 +14730,7 @@
           <p:cNvPr id="22" name="Rectangle 21">
             <a:extLst xmlns:a="http://schemas.openxmlformats.org/drawingml/2006/main">
               <a:ext uri="{FF2B5EF4-FFF2-40B4-BE49-F238E27FC236}">
-                <a16:creationId xmlns:a16="http://schemas.microsoft.com/office/drawing/2014/main" id="{7A7EAC28-E318-48D2-9AC8-829A2B0C7780}"/>
+                <a16:creationId xmlns:a16="http://schemas.microsoft.com/office/drawing/2014/main" id="{36B378A8-F84F-422D-B9D2-69996648EA4F}"/>
               </a:ext>
             </a:extLst>
           </p:cNvPr>
@@ -14783,7 +14783,7 @@
           <p:cNvPr id="23" name="TextBox 22">
             <a:extLst xmlns:a="http://schemas.openxmlformats.org/drawingml/2006/main">
               <a:ext uri="{FF2B5EF4-FFF2-40B4-BE49-F238E27FC236}">
-                <a16:creationId xmlns:a16="http://schemas.microsoft.com/office/drawing/2014/main" id="{782CB9D0-2CE4-485B-A770-FA7903BC59F9}"/>
+                <a16:creationId xmlns:a16="http://schemas.microsoft.com/office/drawing/2014/main" id="{886B766F-5854-49BC-B877-DD78A33C51E0}"/>
               </a:ext>
             </a:extLst>
           </p:cNvPr>
@@ -14838,7 +14838,7 @@
           <p:cNvPr id="24" name="TextBox 23">
             <a:extLst xmlns:a="http://schemas.openxmlformats.org/drawingml/2006/main">
               <a:ext uri="{FF2B5EF4-FFF2-40B4-BE49-F238E27FC236}">
-                <a16:creationId xmlns:a16="http://schemas.microsoft.com/office/drawing/2014/main" id="{E4907C70-D6F4-4B28-BB70-99376753816B}"/>
+                <a16:creationId xmlns:a16="http://schemas.microsoft.com/office/drawing/2014/main" id="{F07B36A7-B46C-49F1-AE3D-C9043AEC96CC}"/>
               </a:ext>
             </a:extLst>
           </p:cNvPr>
@@ -14891,7 +14891,7 @@
     </p:spTree>
     <p:extLst>
       <p:ext uri="{BB962C8B-B14F-4D97-AF65-F5344CB8AC3E}">
-        <p14:creationId xmlns:p14="http://schemas.microsoft.com/office/powerpoint/2010/main" val="1912670415"/>
+        <p14:creationId xmlns:p14="http://schemas.microsoft.com/office/powerpoint/2010/main" val="1217233571"/>
       </p:ext>
     </p:extLst>
   </p:cSld>
@@ -14919,7 +14919,7 @@
           <p:nvPr/>
         </p:nvPicPr>
         <p:blipFill>
-          <a:blip xmlns:r="http://schemas.openxmlformats.org/officeDocument/2006/relationships" xmlns:a="http://schemas.openxmlformats.org/drawingml/2006/main" r:embed="Rc42717f4f34243ba"/>
+          <a:blip xmlns:r="http://schemas.openxmlformats.org/officeDocument/2006/relationships" xmlns:a="http://schemas.openxmlformats.org/drawingml/2006/main" r:embed="R1d837df132304788"/>
           <a:stretch xmlns:a="http://schemas.openxmlformats.org/drawingml/2006/main">
             <a:fillRect l="0" t="0" r="0" b="0"/>
           </a:stretch>
@@ -14939,7 +14939,7 @@
           <p:cNvPr id="3" name="Rectangle 2">
             <a:extLst xmlns:a="http://schemas.openxmlformats.org/drawingml/2006/main">
               <a:ext uri="{FF2B5EF4-FFF2-40B4-BE49-F238E27FC236}">
-                <a16:creationId xmlns:a16="http://schemas.microsoft.com/office/drawing/2014/main" id="{A75E2882-9FF7-413A-B917-A2282763F787}"/>
+                <a16:creationId xmlns:a16="http://schemas.microsoft.com/office/drawing/2014/main" id="{6102BA15-F438-46EA-8DD3-6D943F1D0A30}"/>
               </a:ext>
             </a:extLst>
           </p:cNvPr>
@@ -14992,7 +14992,7 @@
           <p:cNvPr id="4" name="TextBox 3">
             <a:extLst xmlns:a="http://schemas.openxmlformats.org/drawingml/2006/main">
               <a:ext uri="{FF2B5EF4-FFF2-40B4-BE49-F238E27FC236}">
-                <a16:creationId xmlns:a16="http://schemas.microsoft.com/office/drawing/2014/main" id="{846821E2-DA12-4C4C-B3CB-87BD55AC0758}"/>
+                <a16:creationId xmlns:a16="http://schemas.microsoft.com/office/drawing/2014/main" id="{DFBFBEDE-80DA-4D90-B8D3-19E6063CD872}"/>
               </a:ext>
             </a:extLst>
           </p:cNvPr>
@@ -15047,7 +15047,7 @@
           <p:cNvPr id="5" name="TextBox 4">
             <a:extLst xmlns:a="http://schemas.openxmlformats.org/drawingml/2006/main">
               <a:ext uri="{FF2B5EF4-FFF2-40B4-BE49-F238E27FC236}">
-                <a16:creationId xmlns:a16="http://schemas.microsoft.com/office/drawing/2014/main" id="{0180A471-25E6-45C6-9B78-487D89DBEBA2}"/>
+                <a16:creationId xmlns:a16="http://schemas.microsoft.com/office/drawing/2014/main" id="{4FDE7516-7B5B-4374-BC02-98B9DD543470}"/>
               </a:ext>
             </a:extLst>
           </p:cNvPr>
@@ -15102,7 +15102,7 @@
           <p:cNvPr id="6" name="TextBox 5">
             <a:extLst xmlns:a="http://schemas.openxmlformats.org/drawingml/2006/main">
               <a:ext uri="{FF2B5EF4-FFF2-40B4-BE49-F238E27FC236}">
-                <a16:creationId xmlns:a16="http://schemas.microsoft.com/office/drawing/2014/main" id="{5D4252A0-9481-431C-B7BF-4217AF164714}"/>
+                <a16:creationId xmlns:a16="http://schemas.microsoft.com/office/drawing/2014/main" id="{FD724BB3-8600-40B1-ACC5-D568DCA00556}"/>
               </a:ext>
             </a:extLst>
           </p:cNvPr>
@@ -15157,7 +15157,7 @@
           <p:cNvPr id="7" name="TextBox 6">
             <a:extLst xmlns:a="http://schemas.openxmlformats.org/drawingml/2006/main">
               <a:ext uri="{FF2B5EF4-FFF2-40B4-BE49-F238E27FC236}">
-                <a16:creationId xmlns:a16="http://schemas.microsoft.com/office/drawing/2014/main" id="{04472BDF-F230-4C21-BA74-3C938E7418CD}"/>
+                <a16:creationId xmlns:a16="http://schemas.microsoft.com/office/drawing/2014/main" id="{DB584CEA-95E8-442D-B9D6-D1D8F1C4EF85}"/>
               </a:ext>
             </a:extLst>
           </p:cNvPr>
@@ -15212,7 +15212,7 @@
           <p:cNvPr id="8" name="Rectangle 7">
             <a:extLst xmlns:a="http://schemas.openxmlformats.org/drawingml/2006/main">
               <a:ext uri="{FF2B5EF4-FFF2-40B4-BE49-F238E27FC236}">
-                <a16:creationId xmlns:a16="http://schemas.microsoft.com/office/drawing/2014/main" id="{0CF1F91C-E124-4CE6-A4A8-4878DB89F904}"/>
+                <a16:creationId xmlns:a16="http://schemas.microsoft.com/office/drawing/2014/main" id="{793E46E4-A133-4353-A431-A6828CBE0549}"/>
               </a:ext>
             </a:extLst>
           </p:cNvPr>
@@ -15265,7 +15265,7 @@
           <p:cNvPr id="9" name="TextBox 8">
             <a:extLst xmlns:a="http://schemas.openxmlformats.org/drawingml/2006/main">
               <a:ext uri="{FF2B5EF4-FFF2-40B4-BE49-F238E27FC236}">
-                <a16:creationId xmlns:a16="http://schemas.microsoft.com/office/drawing/2014/main" id="{A7B4540D-EF28-496F-ABB2-523EF4FEFF12}"/>
+                <a16:creationId xmlns:a16="http://schemas.microsoft.com/office/drawing/2014/main" id="{5C14B654-FB29-41FF-9CF2-0217F4850B66}"/>
               </a:ext>
             </a:extLst>
           </p:cNvPr>
@@ -15320,7 +15320,7 @@
           <p:cNvPr id="10" name="TextBox 9">
             <a:extLst xmlns:a="http://schemas.openxmlformats.org/drawingml/2006/main">
               <a:ext uri="{FF2B5EF4-FFF2-40B4-BE49-F238E27FC236}">
-                <a16:creationId xmlns:a16="http://schemas.microsoft.com/office/drawing/2014/main" id="{7C6207EB-DD12-49A8-8688-C01FAE18CB93}"/>
+                <a16:creationId xmlns:a16="http://schemas.microsoft.com/office/drawing/2014/main" id="{C6B18BB9-B9E9-4725-B8AA-B01B6C1783FD}"/>
               </a:ext>
             </a:extLst>
           </p:cNvPr>
@@ -15375,7 +15375,7 @@
           <p:cNvPr id="11" name="Rectangle 10">
             <a:extLst xmlns:a="http://schemas.openxmlformats.org/drawingml/2006/main">
               <a:ext uri="{FF2B5EF4-FFF2-40B4-BE49-F238E27FC236}">
-                <a16:creationId xmlns:a16="http://schemas.microsoft.com/office/drawing/2014/main" id="{3FF96F1E-FD1E-4741-92AA-B431B23CDD46}"/>
+                <a16:creationId xmlns:a16="http://schemas.microsoft.com/office/drawing/2014/main" id="{3CD06A7D-A8CC-4D83-AA82-44A2DEEB1F95}"/>
               </a:ext>
             </a:extLst>
           </p:cNvPr>
@@ -15428,7 +15428,7 @@
           <p:cNvPr id="12" name="TextBox 11">
             <a:extLst xmlns:a="http://schemas.openxmlformats.org/drawingml/2006/main">
               <a:ext uri="{FF2B5EF4-FFF2-40B4-BE49-F238E27FC236}">
-                <a16:creationId xmlns:a16="http://schemas.microsoft.com/office/drawing/2014/main" id="{4AD13AC2-B2FB-411A-95F9-116E603E9545}"/>
+                <a16:creationId xmlns:a16="http://schemas.microsoft.com/office/drawing/2014/main" id="{BFD7FA43-B00C-4AE6-A417-A5A3F00F9EDE}"/>
               </a:ext>
             </a:extLst>
           </p:cNvPr>
@@ -15483,7 +15483,7 @@
           <p:cNvPr id="13" name="TextBox 12">
             <a:extLst xmlns:a="http://schemas.openxmlformats.org/drawingml/2006/main">
               <a:ext uri="{FF2B5EF4-FFF2-40B4-BE49-F238E27FC236}">
-                <a16:creationId xmlns:a16="http://schemas.microsoft.com/office/drawing/2014/main" id="{9780498B-487D-490E-BD57-E093C8824982}"/>
+                <a16:creationId xmlns:a16="http://schemas.microsoft.com/office/drawing/2014/main" id="{CFECDD9B-B8E1-477C-ACF4-730FD0B69A62}"/>
               </a:ext>
             </a:extLst>
           </p:cNvPr>
@@ -15538,7 +15538,7 @@
           <p:cNvPr id="14" name="Rectangle 13">
             <a:extLst xmlns:a="http://schemas.openxmlformats.org/drawingml/2006/main">
               <a:ext uri="{FF2B5EF4-FFF2-40B4-BE49-F238E27FC236}">
-                <a16:creationId xmlns:a16="http://schemas.microsoft.com/office/drawing/2014/main" id="{6DCF37DD-6332-4957-97DA-827510F9B917}"/>
+                <a16:creationId xmlns:a16="http://schemas.microsoft.com/office/drawing/2014/main" id="{D1A4347D-399B-4046-A101-1F220ED01A96}"/>
               </a:ext>
             </a:extLst>
           </p:cNvPr>
@@ -15591,7 +15591,7 @@
           <p:cNvPr id="15" name="TextBox 14">
             <a:extLst xmlns:a="http://schemas.openxmlformats.org/drawingml/2006/main">
               <a:ext uri="{FF2B5EF4-FFF2-40B4-BE49-F238E27FC236}">
-                <a16:creationId xmlns:a16="http://schemas.microsoft.com/office/drawing/2014/main" id="{9E427E87-ED22-433D-8C84-9E6E97D22210}"/>
+                <a16:creationId xmlns:a16="http://schemas.microsoft.com/office/drawing/2014/main" id="{C6B4CBBF-E27A-4B0F-8B4F-E83EF611C7BB}"/>
               </a:ext>
             </a:extLst>
           </p:cNvPr>
@@ -15646,7 +15646,7 @@
           <p:cNvPr id="16" name="TextBox 15">
             <a:extLst xmlns:a="http://schemas.openxmlformats.org/drawingml/2006/main">
               <a:ext uri="{FF2B5EF4-FFF2-40B4-BE49-F238E27FC236}">
-                <a16:creationId xmlns:a16="http://schemas.microsoft.com/office/drawing/2014/main" id="{D8C09EF2-7DA6-4E5A-B19F-597FC6770FFF}"/>
+                <a16:creationId xmlns:a16="http://schemas.microsoft.com/office/drawing/2014/main" id="{8FDF05C3-8DDB-43AD-B2B0-328F5CC92C80}"/>
               </a:ext>
             </a:extLst>
           </p:cNvPr>
@@ -15701,7 +15701,7 @@
           <p:cNvPr id="17" name="Rectangle 16">
             <a:extLst xmlns:a="http://schemas.openxmlformats.org/drawingml/2006/main">
               <a:ext uri="{FF2B5EF4-FFF2-40B4-BE49-F238E27FC236}">
-                <a16:creationId xmlns:a16="http://schemas.microsoft.com/office/drawing/2014/main" id="{E5A02490-91B2-49E1-8450-A4E3A00216C2}"/>
+                <a16:creationId xmlns:a16="http://schemas.microsoft.com/office/drawing/2014/main" id="{C2FE937E-5DC7-48FC-9236-055125F7ED03}"/>
               </a:ext>
             </a:extLst>
           </p:cNvPr>
@@ -15754,7 +15754,7 @@
           <p:cNvPr id="18" name="TextBox 17">
             <a:extLst xmlns:a="http://schemas.openxmlformats.org/drawingml/2006/main">
               <a:ext uri="{FF2B5EF4-FFF2-40B4-BE49-F238E27FC236}">
-                <a16:creationId xmlns:a16="http://schemas.microsoft.com/office/drawing/2014/main" id="{5F5CF88F-6308-4CBC-864A-F4A6E9A07D57}"/>
+                <a16:creationId xmlns:a16="http://schemas.microsoft.com/office/drawing/2014/main" id="{3F05320B-85FA-40D6-A7C9-13791955D782}"/>
               </a:ext>
             </a:extLst>
           </p:cNvPr>
@@ -15809,7 +15809,7 @@
           <p:cNvPr id="19" name="TextBox 18">
             <a:extLst xmlns:a="http://schemas.openxmlformats.org/drawingml/2006/main">
               <a:ext uri="{FF2B5EF4-FFF2-40B4-BE49-F238E27FC236}">
-                <a16:creationId xmlns:a16="http://schemas.microsoft.com/office/drawing/2014/main" id="{BC279E34-DACE-4F4B-AEB5-2F631CB95925}"/>
+                <a16:creationId xmlns:a16="http://schemas.microsoft.com/office/drawing/2014/main" id="{E3AF855D-EFF8-49FF-990F-4EFE3A958962}"/>
               </a:ext>
             </a:extLst>
           </p:cNvPr>
@@ -15864,7 +15864,7 @@
           <p:cNvPr id="20" name="Rectangle 19">
             <a:extLst xmlns:a="http://schemas.openxmlformats.org/drawingml/2006/main">
               <a:ext uri="{FF2B5EF4-FFF2-40B4-BE49-F238E27FC236}">
-                <a16:creationId xmlns:a16="http://schemas.microsoft.com/office/drawing/2014/main" id="{D6B3BE64-C9E5-4389-9A2F-0F9AD49F34D5}"/>
+                <a16:creationId xmlns:a16="http://schemas.microsoft.com/office/drawing/2014/main" id="{153D4E5B-C8BB-451D-B230-3EAD927B08E5}"/>
               </a:ext>
             </a:extLst>
           </p:cNvPr>
@@ -15917,7 +15917,7 @@
           <p:cNvPr id="21" name="TextBox 20">
             <a:extLst xmlns:a="http://schemas.openxmlformats.org/drawingml/2006/main">
               <a:ext uri="{FF2B5EF4-FFF2-40B4-BE49-F238E27FC236}">
-                <a16:creationId xmlns:a16="http://schemas.microsoft.com/office/drawing/2014/main" id="{2F1F286D-09F8-4F49-85B2-DED9B2EED372}"/>
+                <a16:creationId xmlns:a16="http://schemas.microsoft.com/office/drawing/2014/main" id="{9E469EC7-8259-4A8C-A72F-4B323D5432F7}"/>
               </a:ext>
             </a:extLst>
           </p:cNvPr>
@@ -15972,7 +15972,7 @@
           <p:cNvPr id="22" name="TextBox 21">
             <a:extLst xmlns:a="http://schemas.openxmlformats.org/drawingml/2006/main">
               <a:ext uri="{FF2B5EF4-FFF2-40B4-BE49-F238E27FC236}">
-                <a16:creationId xmlns:a16="http://schemas.microsoft.com/office/drawing/2014/main" id="{A98C1950-228C-4AD3-8F1B-569061DD184B}"/>
+                <a16:creationId xmlns:a16="http://schemas.microsoft.com/office/drawing/2014/main" id="{4EDF4E68-D39F-4B64-9A6D-DB723918DA29}"/>
               </a:ext>
             </a:extLst>
           </p:cNvPr>
@@ -16027,7 +16027,7 @@
           <p:cNvPr id="23" name="Rectangle 22">
             <a:extLst xmlns:a="http://schemas.openxmlformats.org/drawingml/2006/main">
               <a:ext uri="{FF2B5EF4-FFF2-40B4-BE49-F238E27FC236}">
-                <a16:creationId xmlns:a16="http://schemas.microsoft.com/office/drawing/2014/main" id="{9792B418-32CD-4566-B666-87A01D7FD613}"/>
+                <a16:creationId xmlns:a16="http://schemas.microsoft.com/office/drawing/2014/main" id="{F4B5B6EA-E5B8-46E3-8C69-B281FAF489AC}"/>
               </a:ext>
             </a:extLst>
           </p:cNvPr>
@@ -16080,7 +16080,7 @@
           <p:cNvPr id="24" name="Rectangle 23">
             <a:extLst xmlns:a="http://schemas.openxmlformats.org/drawingml/2006/main">
               <a:ext uri="{FF2B5EF4-FFF2-40B4-BE49-F238E27FC236}">
-                <a16:creationId xmlns:a16="http://schemas.microsoft.com/office/drawing/2014/main" id="{6352713F-D42F-41C9-AAB1-3096CC1F0F39}"/>
+                <a16:creationId xmlns:a16="http://schemas.microsoft.com/office/drawing/2014/main" id="{741060DF-3665-4AD5-B604-1A3B5D6CCE97}"/>
               </a:ext>
             </a:extLst>
           </p:cNvPr>
@@ -16133,7 +16133,7 @@
           <p:cNvPr id="25" name="Rectangle 24">
             <a:extLst xmlns:a="http://schemas.openxmlformats.org/drawingml/2006/main">
               <a:ext uri="{FF2B5EF4-FFF2-40B4-BE49-F238E27FC236}">
-                <a16:creationId xmlns:a16="http://schemas.microsoft.com/office/drawing/2014/main" id="{265D9529-EAB1-4F6B-B355-4AD0EAC64625}"/>
+                <a16:creationId xmlns:a16="http://schemas.microsoft.com/office/drawing/2014/main" id="{7A5FF4AC-75C0-4E84-97C3-DF63013C6E43}"/>
               </a:ext>
             </a:extLst>
           </p:cNvPr>
@@ -16186,7 +16186,7 @@
           <p:cNvPr id="26" name="TextBox 25">
             <a:extLst xmlns:a="http://schemas.openxmlformats.org/drawingml/2006/main">
               <a:ext uri="{FF2B5EF4-FFF2-40B4-BE49-F238E27FC236}">
-                <a16:creationId xmlns:a16="http://schemas.microsoft.com/office/drawing/2014/main" id="{BF9D5E02-8876-4F0E-BB89-6DAE3CA0C7FA}"/>
+                <a16:creationId xmlns:a16="http://schemas.microsoft.com/office/drawing/2014/main" id="{45EF9CD4-2A2B-4C9D-A2A1-3CC52696AE66}"/>
               </a:ext>
             </a:extLst>
           </p:cNvPr>
@@ -16241,7 +16241,7 @@
           <p:cNvPr id="27" name="TextBox 26">
             <a:extLst xmlns:a="http://schemas.openxmlformats.org/drawingml/2006/main">
               <a:ext uri="{FF2B5EF4-FFF2-40B4-BE49-F238E27FC236}">
-                <a16:creationId xmlns:a16="http://schemas.microsoft.com/office/drawing/2014/main" id="{749D84C4-D4B0-4012-B2D7-C06069375C39}"/>
+                <a16:creationId xmlns:a16="http://schemas.microsoft.com/office/drawing/2014/main" id="{52659C20-6CDE-4581-A1A8-7B76DCF2644C}"/>
               </a:ext>
             </a:extLst>
           </p:cNvPr>
@@ -16294,7 +16294,7 @@
     </p:spTree>
     <p:extLst>
       <p:ext uri="{BB962C8B-B14F-4D97-AF65-F5344CB8AC3E}">
-        <p14:creationId xmlns:p14="http://schemas.microsoft.com/office/powerpoint/2010/main" val="423018963"/>
+        <p14:creationId xmlns:p14="http://schemas.microsoft.com/office/powerpoint/2010/main" val="1387366781"/>
       </p:ext>
     </p:extLst>
   </p:cSld>
@@ -16322,7 +16322,7 @@
           <p:nvPr/>
         </p:nvPicPr>
         <p:blipFill>
-          <a:blip xmlns:r="http://schemas.openxmlformats.org/officeDocument/2006/relationships" xmlns:a="http://schemas.openxmlformats.org/drawingml/2006/main" r:embed="Rfe6ac66683904444"/>
+          <a:blip xmlns:r="http://schemas.openxmlformats.org/officeDocument/2006/relationships" xmlns:a="http://schemas.openxmlformats.org/drawingml/2006/main" r:embed="R088bbb40c6f04434"/>
           <a:stretch xmlns:a="http://schemas.openxmlformats.org/drawingml/2006/main">
             <a:fillRect l="0" t="0" r="0" b="0"/>
           </a:stretch>
@@ -16342,7 +16342,7 @@
           <p:cNvPr id="3" name="Rectangle 2">
             <a:extLst xmlns:a="http://schemas.openxmlformats.org/drawingml/2006/main">
               <a:ext uri="{FF2B5EF4-FFF2-40B4-BE49-F238E27FC236}">
-                <a16:creationId xmlns:a16="http://schemas.microsoft.com/office/drawing/2014/main" id="{21A54E64-7DDC-483C-AC6C-7F1F97E02D71}"/>
+                <a16:creationId xmlns:a16="http://schemas.microsoft.com/office/drawing/2014/main" id="{F1FD715F-83C4-48B9-A6B0-E1B6502EF227}"/>
               </a:ext>
             </a:extLst>
           </p:cNvPr>
@@ -16395,7 +16395,7 @@
           <p:cNvPr id="4" name="TextBox 3">
             <a:extLst xmlns:a="http://schemas.openxmlformats.org/drawingml/2006/main">
               <a:ext uri="{FF2B5EF4-FFF2-40B4-BE49-F238E27FC236}">
-                <a16:creationId xmlns:a16="http://schemas.microsoft.com/office/drawing/2014/main" id="{1CA89A41-8D2C-485F-8E0E-802DDF54C6FE}"/>
+                <a16:creationId xmlns:a16="http://schemas.microsoft.com/office/drawing/2014/main" id="{7585E13D-8ABE-41DE-8B1A-48F5A8DEAC7E}"/>
               </a:ext>
             </a:extLst>
           </p:cNvPr>
@@ -16450,7 +16450,7 @@
           <p:cNvPr id="5" name="TextBox 4">
             <a:extLst xmlns:a="http://schemas.openxmlformats.org/drawingml/2006/main">
               <a:ext uri="{FF2B5EF4-FFF2-40B4-BE49-F238E27FC236}">
-                <a16:creationId xmlns:a16="http://schemas.microsoft.com/office/drawing/2014/main" id="{6F59E668-E3C5-4794-B5EE-C0A26FBBCFD2}"/>
+                <a16:creationId xmlns:a16="http://schemas.microsoft.com/office/drawing/2014/main" id="{12CB82E0-5392-4AF9-A819-AFCBAB44338D}"/>
               </a:ext>
             </a:extLst>
           </p:cNvPr>
@@ -16955,7 +16955,7 @@
           <p:cNvPr id="7" name="Rectangle 6">
             <a:extLst xmlns:a="http://schemas.openxmlformats.org/drawingml/2006/main">
               <a:ext uri="{FF2B5EF4-FFF2-40B4-BE49-F238E27FC236}">
-                <a16:creationId xmlns:a16="http://schemas.microsoft.com/office/drawing/2014/main" id="{DD57AD5F-AF72-4743-9324-BECE830E23C0}"/>
+                <a16:creationId xmlns:a16="http://schemas.microsoft.com/office/drawing/2014/main" id="{C0EB3D40-5AB4-4BD6-86A7-FE9D52933E33}"/>
               </a:ext>
             </a:extLst>
           </p:cNvPr>
@@ -17008,7 +17008,7 @@
           <p:cNvPr id="8" name="Rectangle 7">
             <a:extLst xmlns:a="http://schemas.openxmlformats.org/drawingml/2006/main">
               <a:ext uri="{FF2B5EF4-FFF2-40B4-BE49-F238E27FC236}">
-                <a16:creationId xmlns:a16="http://schemas.microsoft.com/office/drawing/2014/main" id="{A866CD9B-F373-44AD-8D65-C6F9EF3B616C}"/>
+                <a16:creationId xmlns:a16="http://schemas.microsoft.com/office/drawing/2014/main" id="{1D3B27A4-0316-42CE-9816-043BD5E54356}"/>
               </a:ext>
             </a:extLst>
           </p:cNvPr>
@@ -17061,7 +17061,7 @@
           <p:cNvPr id="9" name="TextBox 8">
             <a:extLst xmlns:a="http://schemas.openxmlformats.org/drawingml/2006/main">
               <a:ext uri="{FF2B5EF4-FFF2-40B4-BE49-F238E27FC236}">
-                <a16:creationId xmlns:a16="http://schemas.microsoft.com/office/drawing/2014/main" id="{4193CF58-E476-4709-A65B-E4F45D925765}"/>
+                <a16:creationId xmlns:a16="http://schemas.microsoft.com/office/drawing/2014/main" id="{34BC8C78-C9AD-49AA-A1F0-1EC19B32C3D4}"/>
               </a:ext>
             </a:extLst>
           </p:cNvPr>
@@ -17116,7 +17116,7 @@
           <p:cNvPr id="10" name="TextBox 9">
             <a:extLst xmlns:a="http://schemas.openxmlformats.org/drawingml/2006/main">
               <a:ext uri="{FF2B5EF4-FFF2-40B4-BE49-F238E27FC236}">
-                <a16:creationId xmlns:a16="http://schemas.microsoft.com/office/drawing/2014/main" id="{A54E878F-AAA5-4745-A81E-8A91F15EA776}"/>
+                <a16:creationId xmlns:a16="http://schemas.microsoft.com/office/drawing/2014/main" id="{5ABC86BE-A55D-4F5A-B956-B3430F8E7C86}"/>
               </a:ext>
             </a:extLst>
           </p:cNvPr>
@@ -17169,7 +17169,7 @@
     </p:spTree>
     <p:extLst>
       <p:ext uri="{BB962C8B-B14F-4D97-AF65-F5344CB8AC3E}">
-        <p14:creationId xmlns:p14="http://schemas.microsoft.com/office/powerpoint/2010/main" val="1488739546"/>
+        <p14:creationId xmlns:p14="http://schemas.microsoft.com/office/powerpoint/2010/main" val="500357184"/>
       </p:ext>
     </p:extLst>
   </p:cSld>
@@ -17197,7 +17197,7 @@
           <p:nvPr/>
         </p:nvPicPr>
         <p:blipFill>
-          <a:blip xmlns:r="http://schemas.openxmlformats.org/officeDocument/2006/relationships" xmlns:a="http://schemas.openxmlformats.org/drawingml/2006/main" r:embed="R02b3a09ac2c24198"/>
+          <a:blip xmlns:r="http://schemas.openxmlformats.org/officeDocument/2006/relationships" xmlns:a="http://schemas.openxmlformats.org/drawingml/2006/main" r:embed="R22bfd9596fa94174"/>
           <a:stretch xmlns:a="http://schemas.openxmlformats.org/drawingml/2006/main">
             <a:fillRect l="0" t="0" r="0" b="0"/>
           </a:stretch>
@@ -17217,7 +17217,7 @@
           <p:cNvPr id="3" name="Rectangle 2">
             <a:extLst xmlns:a="http://schemas.openxmlformats.org/drawingml/2006/main">
               <a:ext uri="{FF2B5EF4-FFF2-40B4-BE49-F238E27FC236}">
-                <a16:creationId xmlns:a16="http://schemas.microsoft.com/office/drawing/2014/main" id="{DF54E40F-05F1-4A1E-9E01-425B0AF80BF9}"/>
+                <a16:creationId xmlns:a16="http://schemas.microsoft.com/office/drawing/2014/main" id="{40810BF2-2B4C-4159-B6F4-BDC7EA00CCA4}"/>
               </a:ext>
             </a:extLst>
           </p:cNvPr>
@@ -17270,7 +17270,7 @@
           <p:cNvPr id="4" name="TextBox 3">
             <a:extLst xmlns:a="http://schemas.openxmlformats.org/drawingml/2006/main">
               <a:ext uri="{FF2B5EF4-FFF2-40B4-BE49-F238E27FC236}">
-                <a16:creationId xmlns:a16="http://schemas.microsoft.com/office/drawing/2014/main" id="{7283A760-CF9C-4101-B812-9FAB69140854}"/>
+                <a16:creationId xmlns:a16="http://schemas.microsoft.com/office/drawing/2014/main" id="{6A589FFD-B35E-4317-986D-82C27A6D504A}"/>
               </a:ext>
             </a:extLst>
           </p:cNvPr>
@@ -17325,7 +17325,7 @@
           <p:cNvPr id="5" name="TextBox 4">
             <a:extLst xmlns:a="http://schemas.openxmlformats.org/drawingml/2006/main">
               <a:ext uri="{FF2B5EF4-FFF2-40B4-BE49-F238E27FC236}">
-                <a16:creationId xmlns:a16="http://schemas.microsoft.com/office/drawing/2014/main" id="{F08CC355-1AAA-46FF-B0BF-8F5542F5BDE0}"/>
+                <a16:creationId xmlns:a16="http://schemas.microsoft.com/office/drawing/2014/main" id="{8BE82D30-5054-46A8-BB01-62628D3ECFE5}"/>
               </a:ext>
             </a:extLst>
           </p:cNvPr>
@@ -17620,7 +17620,7 @@
           <p:cNvPr id="7" name="Rectangle 6">
             <a:extLst xmlns:a="http://schemas.openxmlformats.org/drawingml/2006/main">
               <a:ext uri="{FF2B5EF4-FFF2-40B4-BE49-F238E27FC236}">
-                <a16:creationId xmlns:a16="http://schemas.microsoft.com/office/drawing/2014/main" id="{B707BFE5-B8D4-4D1F-AA66-CAFEE0767EE0}"/>
+                <a16:creationId xmlns:a16="http://schemas.microsoft.com/office/drawing/2014/main" id="{FAFFFAC2-9971-4514-8F72-E48FD80EDBCD}"/>
               </a:ext>
             </a:extLst>
           </p:cNvPr>
@@ -17673,7 +17673,7 @@
           <p:cNvPr id="8" name="Rectangle 7">
             <a:extLst xmlns:a="http://schemas.openxmlformats.org/drawingml/2006/main">
               <a:ext uri="{FF2B5EF4-FFF2-40B4-BE49-F238E27FC236}">
-                <a16:creationId xmlns:a16="http://schemas.microsoft.com/office/drawing/2014/main" id="{2D27D9FC-7941-4429-AEF4-49B3816B8F5F}"/>
+                <a16:creationId xmlns:a16="http://schemas.microsoft.com/office/drawing/2014/main" id="{3A7A6E75-CC0C-456E-8843-AF7CBEFD0275}"/>
               </a:ext>
             </a:extLst>
           </p:cNvPr>
@@ -17726,7 +17726,7 @@
           <p:cNvPr id="9" name="TextBox 8">
             <a:extLst xmlns:a="http://schemas.openxmlformats.org/drawingml/2006/main">
               <a:ext uri="{FF2B5EF4-FFF2-40B4-BE49-F238E27FC236}">
-                <a16:creationId xmlns:a16="http://schemas.microsoft.com/office/drawing/2014/main" id="{7E66AC5D-DDD2-4986-A6B0-5E88B04C2A2A}"/>
+                <a16:creationId xmlns:a16="http://schemas.microsoft.com/office/drawing/2014/main" id="{C65E964B-E8BF-4614-B3A1-15351509366F}"/>
               </a:ext>
             </a:extLst>
           </p:cNvPr>
@@ -17781,7 +17781,7 @@
           <p:cNvPr id="10" name="TextBox 9">
             <a:extLst xmlns:a="http://schemas.openxmlformats.org/drawingml/2006/main">
               <a:ext uri="{FF2B5EF4-FFF2-40B4-BE49-F238E27FC236}">
-                <a16:creationId xmlns:a16="http://schemas.microsoft.com/office/drawing/2014/main" id="{C8FAC2C1-498E-4954-BCAD-F6A92E8F6D4B}"/>
+                <a16:creationId xmlns:a16="http://schemas.microsoft.com/office/drawing/2014/main" id="{33E4554F-24C7-4388-8018-C9B3DD4413F0}"/>
               </a:ext>
             </a:extLst>
           </p:cNvPr>
@@ -17834,7 +17834,7 @@
     </p:spTree>
     <p:extLst>
       <p:ext uri="{BB962C8B-B14F-4D97-AF65-F5344CB8AC3E}">
-        <p14:creationId xmlns:p14="http://schemas.microsoft.com/office/powerpoint/2010/main" val="2143553449"/>
+        <p14:creationId xmlns:p14="http://schemas.microsoft.com/office/powerpoint/2010/main" val="165902265"/>
       </p:ext>
     </p:extLst>
   </p:cSld>
@@ -17858,7 +17858,7 @@
           <p:cNvPr id="2" name="Rectangle 1">
             <a:extLst xmlns:a="http://schemas.openxmlformats.org/drawingml/2006/main">
               <a:ext uri="{FF2B5EF4-FFF2-40B4-BE49-F238E27FC236}">
-                <a16:creationId xmlns:a16="http://schemas.microsoft.com/office/drawing/2014/main" id="{C3538049-601F-4F9C-A908-6B2AAC606006}"/>
+                <a16:creationId xmlns:a16="http://schemas.microsoft.com/office/drawing/2014/main" id="{49952883-92D6-4968-A308-BC08B127DE53}"/>
               </a:ext>
             </a:extLst>
           </p:cNvPr>
@@ -17911,7 +17911,7 @@
           <p:cNvPr id="3" name="TextBox 2">
             <a:extLst xmlns:a="http://schemas.openxmlformats.org/drawingml/2006/main">
               <a:ext uri="{FF2B5EF4-FFF2-40B4-BE49-F238E27FC236}">
-                <a16:creationId xmlns:a16="http://schemas.microsoft.com/office/drawing/2014/main" id="{B4CDE2D0-6058-4CA6-B239-5CAA43C6FC27}"/>
+                <a16:creationId xmlns:a16="http://schemas.microsoft.com/office/drawing/2014/main" id="{6DBF2AB3-49C8-41B2-BA4A-B41BBF8D6141}"/>
               </a:ext>
             </a:extLst>
           </p:cNvPr>
@@ -17966,7 +17966,7 @@
           <p:cNvPr id="4" name="TextBox 3">
             <a:extLst xmlns:a="http://schemas.openxmlformats.org/drawingml/2006/main">
               <a:ext uri="{FF2B5EF4-FFF2-40B4-BE49-F238E27FC236}">
-                <a16:creationId xmlns:a16="http://schemas.microsoft.com/office/drawing/2014/main" id="{07E6F255-86D4-4DD5-B88B-6F8F4BA9637A}"/>
+                <a16:creationId xmlns:a16="http://schemas.microsoft.com/office/drawing/2014/main" id="{4C090AD5-36E2-4866-B4A4-72F2988F037B}"/>
               </a:ext>
             </a:extLst>
           </p:cNvPr>
@@ -17996,14 +17996,14 @@
                 <a:spcPct val="110000"/>
               </a:lnSpc>
               <a:buNone/>
-              <a:defRPr sz="2000">
+              <a:defRPr sz="1400">
                 <a:latin typeface="Arial"/>
                 <a:ea typeface="Arial"/>
                 <a:cs typeface="Arial"/>
               </a:defRPr>
             </a:pPr>
             <a:r>
-              <a:rPr sz="2000" b="1" i="0">
+              <a:rPr sz="1400" b="1" i="0">
                 <a:solidFill>
                   <a:srgbClr val="FFFFFF"/>
                 </a:solidFill>
@@ -18021,7 +18021,7 @@
           <p:cNvPr id="5" name="TextBox 4">
             <a:extLst xmlns:a="http://schemas.openxmlformats.org/drawingml/2006/main">
               <a:ext uri="{FF2B5EF4-FFF2-40B4-BE49-F238E27FC236}">
-                <a16:creationId xmlns:a16="http://schemas.microsoft.com/office/drawing/2014/main" id="{2E28E4C6-8767-4221-BA15-D8499073F010}"/>
+                <a16:creationId xmlns:a16="http://schemas.microsoft.com/office/drawing/2014/main" id="{8F97A187-BE11-4381-AB68-21C4F294CF46}"/>
               </a:ext>
             </a:extLst>
           </p:cNvPr>
@@ -18076,7 +18076,7 @@
           <p:cNvPr id="6" name="Rectangle 5">
             <a:extLst xmlns:a="http://schemas.openxmlformats.org/drawingml/2006/main">
               <a:ext uri="{FF2B5EF4-FFF2-40B4-BE49-F238E27FC236}">
-                <a16:creationId xmlns:a16="http://schemas.microsoft.com/office/drawing/2014/main" id="{AF93C67D-B306-4AE3-9501-E29E8DAC55D3}"/>
+                <a16:creationId xmlns:a16="http://schemas.microsoft.com/office/drawing/2014/main" id="{E087D014-FC15-48C3-8E2D-7A3A85467122}"/>
               </a:ext>
             </a:extLst>
           </p:cNvPr>
@@ -18127,7 +18127,7 @@
     </p:spTree>
     <p:extLst>
       <p:ext uri="{BB962C8B-B14F-4D97-AF65-F5344CB8AC3E}">
-        <p14:creationId xmlns:p14="http://schemas.microsoft.com/office/powerpoint/2010/main" val="606078214"/>
+        <p14:creationId xmlns:p14="http://schemas.microsoft.com/office/powerpoint/2010/main" val="1161924770"/>
       </p:ext>
     </p:extLst>
   </p:cSld>
@@ -18155,7 +18155,7 @@
           <p:nvPr/>
         </p:nvPicPr>
         <p:blipFill>
-          <a:blip xmlns:r="http://schemas.openxmlformats.org/officeDocument/2006/relationships" xmlns:a="http://schemas.openxmlformats.org/drawingml/2006/main" r:embed="R4a709f66953c455a"/>
+          <a:blip xmlns:r="http://schemas.openxmlformats.org/officeDocument/2006/relationships" xmlns:a="http://schemas.openxmlformats.org/drawingml/2006/main" r:embed="Ra9612fb87bab4296"/>
           <a:stretch xmlns:a="http://schemas.openxmlformats.org/drawingml/2006/main">
             <a:fillRect l="0" t="0" r="0" b="0"/>
           </a:stretch>
@@ -18175,7 +18175,7 @@
           <p:cNvPr id="3" name="Rectangle 2">
             <a:extLst xmlns:a="http://schemas.openxmlformats.org/drawingml/2006/main">
               <a:ext uri="{FF2B5EF4-FFF2-40B4-BE49-F238E27FC236}">
-                <a16:creationId xmlns:a16="http://schemas.microsoft.com/office/drawing/2014/main" id="{58313375-6A4A-4798-B91F-40A0E5DA5B82}"/>
+                <a16:creationId xmlns:a16="http://schemas.microsoft.com/office/drawing/2014/main" id="{F65B02C7-CCFC-4C7E-9ACD-F89C95A5F866}"/>
               </a:ext>
             </a:extLst>
           </p:cNvPr>
@@ -18228,7 +18228,7 @@
           <p:cNvPr id="4" name="TextBox 3">
             <a:extLst xmlns:a="http://schemas.openxmlformats.org/drawingml/2006/main">
               <a:ext uri="{FF2B5EF4-FFF2-40B4-BE49-F238E27FC236}">
-                <a16:creationId xmlns:a16="http://schemas.microsoft.com/office/drawing/2014/main" id="{8BB57189-139E-4998-AFEB-DC2BC90F52E8}"/>
+                <a16:creationId xmlns:a16="http://schemas.microsoft.com/office/drawing/2014/main" id="{3FEB06DE-8834-4B6A-B7EE-3AF81245BECA}"/>
               </a:ext>
             </a:extLst>
           </p:cNvPr>
@@ -18283,7 +18283,7 @@
           <p:cNvPr id="5" name="TextBox 4">
             <a:extLst xmlns:a="http://schemas.openxmlformats.org/drawingml/2006/main">
               <a:ext uri="{FF2B5EF4-FFF2-40B4-BE49-F238E27FC236}">
-                <a16:creationId xmlns:a16="http://schemas.microsoft.com/office/drawing/2014/main" id="{9EAF4246-A517-4891-A547-ED2173D9AED3}"/>
+                <a16:creationId xmlns:a16="http://schemas.microsoft.com/office/drawing/2014/main" id="{03C2F289-D841-43F5-BA66-C52E1E6E4317}"/>
               </a:ext>
             </a:extLst>
           </p:cNvPr>
@@ -18338,7 +18338,7 @@
           <p:cNvPr id="6" name="TextBox 5">
             <a:extLst xmlns:a="http://schemas.openxmlformats.org/drawingml/2006/main">
               <a:ext uri="{FF2B5EF4-FFF2-40B4-BE49-F238E27FC236}">
-                <a16:creationId xmlns:a16="http://schemas.microsoft.com/office/drawing/2014/main" id="{3A0EA3AA-53E1-463A-B78A-7B3CB7D75ECB}"/>
+                <a16:creationId xmlns:a16="http://schemas.microsoft.com/office/drawing/2014/main" id="{294B889C-1DF1-418A-96C1-0CA5073065CA}"/>
               </a:ext>
             </a:extLst>
           </p:cNvPr>
@@ -18477,7 +18477,7 @@
           <p:cNvPr id="7" name="Rectangle 6">
             <a:extLst xmlns:a="http://schemas.openxmlformats.org/drawingml/2006/main">
               <a:ext uri="{FF2B5EF4-FFF2-40B4-BE49-F238E27FC236}">
-                <a16:creationId xmlns:a16="http://schemas.microsoft.com/office/drawing/2014/main" id="{4D1DC5F5-B08C-4264-B3FD-13D676EE7E6B}"/>
+                <a16:creationId xmlns:a16="http://schemas.microsoft.com/office/drawing/2014/main" id="{57B55BBE-1ABC-4305-9FC7-9C61FA3F3838}"/>
               </a:ext>
             </a:extLst>
           </p:cNvPr>
@@ -18530,7 +18530,7 @@
           <p:cNvPr id="8" name="Rectangle 7">
             <a:extLst xmlns:a="http://schemas.openxmlformats.org/drawingml/2006/main">
               <a:ext uri="{FF2B5EF4-FFF2-40B4-BE49-F238E27FC236}">
-                <a16:creationId xmlns:a16="http://schemas.microsoft.com/office/drawing/2014/main" id="{32236666-6391-4ECE-B2D9-853B4624C018}"/>
+                <a16:creationId xmlns:a16="http://schemas.microsoft.com/office/drawing/2014/main" id="{61FCAFC9-0B9F-4CF0-AC58-6DA1E10449E2}"/>
               </a:ext>
             </a:extLst>
           </p:cNvPr>
@@ -18583,7 +18583,7 @@
           <p:cNvPr id="9" name="TextBox 8">
             <a:extLst xmlns:a="http://schemas.openxmlformats.org/drawingml/2006/main">
               <a:ext uri="{FF2B5EF4-FFF2-40B4-BE49-F238E27FC236}">
-                <a16:creationId xmlns:a16="http://schemas.microsoft.com/office/drawing/2014/main" id="{38946201-4973-4EE3-8443-E1D281741D9C}"/>
+                <a16:creationId xmlns:a16="http://schemas.microsoft.com/office/drawing/2014/main" id="{BD50CE5B-74C5-4183-A490-9BFADE1797D6}"/>
               </a:ext>
             </a:extLst>
           </p:cNvPr>
@@ -18638,7 +18638,7 @@
           <p:cNvPr id="10" name="TextBox 9">
             <a:extLst xmlns:a="http://schemas.openxmlformats.org/drawingml/2006/main">
               <a:ext uri="{FF2B5EF4-FFF2-40B4-BE49-F238E27FC236}">
-                <a16:creationId xmlns:a16="http://schemas.microsoft.com/office/drawing/2014/main" id="{D6A36F1E-8F77-4DB4-B613-EFB6A3F5115C}"/>
+                <a16:creationId xmlns:a16="http://schemas.microsoft.com/office/drawing/2014/main" id="{56536C9C-C6BB-4754-9DF5-FA6C99CD003B}"/>
               </a:ext>
             </a:extLst>
           </p:cNvPr>
@@ -18691,7 +18691,7 @@
     </p:spTree>
     <p:extLst>
       <p:ext uri="{BB962C8B-B14F-4D97-AF65-F5344CB8AC3E}">
-        <p14:creationId xmlns:p14="http://schemas.microsoft.com/office/powerpoint/2010/main" val="1429827869"/>
+        <p14:creationId xmlns:p14="http://schemas.microsoft.com/office/powerpoint/2010/main" val="1207891734"/>
       </p:ext>
     </p:extLst>
   </p:cSld>
@@ -18719,7 +18719,7 @@
           <p:nvPr/>
         </p:nvPicPr>
         <p:blipFill>
-          <a:blip xmlns:r="http://schemas.openxmlformats.org/officeDocument/2006/relationships" xmlns:a="http://schemas.openxmlformats.org/drawingml/2006/main" r:embed="R6bb2c00ef82549fb"/>
+          <a:blip xmlns:r="http://schemas.openxmlformats.org/officeDocument/2006/relationships" xmlns:a="http://schemas.openxmlformats.org/drawingml/2006/main" r:embed="Rc4e5c08fe6814854"/>
           <a:stretch xmlns:a="http://schemas.openxmlformats.org/drawingml/2006/main">
             <a:fillRect l="0" t="0" r="0" b="0"/>
           </a:stretch>
@@ -18739,7 +18739,7 @@
           <p:cNvPr id="3" name="Rectangle 2">
             <a:extLst xmlns:a="http://schemas.openxmlformats.org/drawingml/2006/main">
               <a:ext uri="{FF2B5EF4-FFF2-40B4-BE49-F238E27FC236}">
-                <a16:creationId xmlns:a16="http://schemas.microsoft.com/office/drawing/2014/main" id="{2CDEED6C-0756-4603-8C65-01BD2E975E52}"/>
+                <a16:creationId xmlns:a16="http://schemas.microsoft.com/office/drawing/2014/main" id="{83696817-AD2D-40C2-B76B-D6D977BD7841}"/>
               </a:ext>
             </a:extLst>
           </p:cNvPr>
@@ -18792,7 +18792,7 @@
           <p:cNvPr id="4" name="TextBox 3">
             <a:extLst xmlns:a="http://schemas.openxmlformats.org/drawingml/2006/main">
               <a:ext uri="{FF2B5EF4-FFF2-40B4-BE49-F238E27FC236}">
-                <a16:creationId xmlns:a16="http://schemas.microsoft.com/office/drawing/2014/main" id="{69C12F7F-2192-4849-89D6-6276F8D2E665}"/>
+                <a16:creationId xmlns:a16="http://schemas.microsoft.com/office/drawing/2014/main" id="{E2AEA87E-C475-4800-8D55-932CB61E18F2}"/>
               </a:ext>
             </a:extLst>
           </p:cNvPr>
@@ -18847,7 +18847,7 @@
           <p:cNvPr id="5" name="TextBox 4">
             <a:extLst xmlns:a="http://schemas.openxmlformats.org/drawingml/2006/main">
               <a:ext uri="{FF2B5EF4-FFF2-40B4-BE49-F238E27FC236}">
-                <a16:creationId xmlns:a16="http://schemas.microsoft.com/office/drawing/2014/main" id="{A82A801A-78A7-4394-A110-C498C297B1D9}"/>
+                <a16:creationId xmlns:a16="http://schemas.microsoft.com/office/drawing/2014/main" id="{D899DBE2-2FF3-47BE-8AFB-68F3BB3EA5C0}"/>
               </a:ext>
             </a:extLst>
           </p:cNvPr>
@@ -19142,7 +19142,7 @@
           <p:cNvPr id="7" name="Rectangle 6">
             <a:extLst xmlns:a="http://schemas.openxmlformats.org/drawingml/2006/main">
               <a:ext uri="{FF2B5EF4-FFF2-40B4-BE49-F238E27FC236}">
-                <a16:creationId xmlns:a16="http://schemas.microsoft.com/office/drawing/2014/main" id="{0994A988-D1A1-44A4-A1FE-FB51FCDB9E82}"/>
+                <a16:creationId xmlns:a16="http://schemas.microsoft.com/office/drawing/2014/main" id="{C59DF45A-EED3-407E-B1A2-3784ACCA43AA}"/>
               </a:ext>
             </a:extLst>
           </p:cNvPr>
@@ -19195,7 +19195,7 @@
           <p:cNvPr id="8" name="Rectangle 7">
             <a:extLst xmlns:a="http://schemas.openxmlformats.org/drawingml/2006/main">
               <a:ext uri="{FF2B5EF4-FFF2-40B4-BE49-F238E27FC236}">
-                <a16:creationId xmlns:a16="http://schemas.microsoft.com/office/drawing/2014/main" id="{1BBB1DD2-39E9-4D0A-9760-951821D8A132}"/>
+                <a16:creationId xmlns:a16="http://schemas.microsoft.com/office/drawing/2014/main" id="{C2EF8DCA-E716-467D-9FBA-5E5026F02E00}"/>
               </a:ext>
             </a:extLst>
           </p:cNvPr>
@@ -19248,7 +19248,7 @@
           <p:cNvPr id="9" name="TextBox 8">
             <a:extLst xmlns:a="http://schemas.openxmlformats.org/drawingml/2006/main">
               <a:ext uri="{FF2B5EF4-FFF2-40B4-BE49-F238E27FC236}">
-                <a16:creationId xmlns:a16="http://schemas.microsoft.com/office/drawing/2014/main" id="{9BABF508-953D-4CB7-9D57-A0FB8A282F67}"/>
+                <a16:creationId xmlns:a16="http://schemas.microsoft.com/office/drawing/2014/main" id="{85520594-6A65-4C58-9CEF-27AB455205E6}"/>
               </a:ext>
             </a:extLst>
           </p:cNvPr>
@@ -19303,7 +19303,7 @@
           <p:cNvPr id="10" name="TextBox 9">
             <a:extLst xmlns:a="http://schemas.openxmlformats.org/drawingml/2006/main">
               <a:ext uri="{FF2B5EF4-FFF2-40B4-BE49-F238E27FC236}">
-                <a16:creationId xmlns:a16="http://schemas.microsoft.com/office/drawing/2014/main" id="{1B5A4308-0BC0-4658-A735-DE0940979B10}"/>
+                <a16:creationId xmlns:a16="http://schemas.microsoft.com/office/drawing/2014/main" id="{4B118EE2-B8A7-436B-A475-DF8F6C5E1D8B}"/>
               </a:ext>
             </a:extLst>
           </p:cNvPr>
@@ -19356,7 +19356,7 @@
     </p:spTree>
     <p:extLst>
       <p:ext uri="{BB962C8B-B14F-4D97-AF65-F5344CB8AC3E}">
-        <p14:creationId xmlns:p14="http://schemas.microsoft.com/office/powerpoint/2010/main" val="853086599"/>
+        <p14:creationId xmlns:p14="http://schemas.microsoft.com/office/powerpoint/2010/main" val="1254958480"/>
       </p:ext>
     </p:extLst>
   </p:cSld>
@@ -19384,7 +19384,7 @@
           <p:nvPr/>
         </p:nvPicPr>
         <p:blipFill>
-          <a:blip xmlns:r="http://schemas.openxmlformats.org/officeDocument/2006/relationships" xmlns:a="http://schemas.openxmlformats.org/drawingml/2006/main" r:embed="R274fbd8de1dd46d6"/>
+          <a:blip xmlns:r="http://schemas.openxmlformats.org/officeDocument/2006/relationships" xmlns:a="http://schemas.openxmlformats.org/drawingml/2006/main" r:embed="Ra4e8bd3aa88a44e8"/>
           <a:stretch xmlns:a="http://schemas.openxmlformats.org/drawingml/2006/main">
             <a:fillRect l="0" t="0" r="0" b="0"/>
           </a:stretch>
@@ -19404,7 +19404,7 @@
           <p:cNvPr id="3" name="Rectangle 2">
             <a:extLst xmlns:a="http://schemas.openxmlformats.org/drawingml/2006/main">
               <a:ext uri="{FF2B5EF4-FFF2-40B4-BE49-F238E27FC236}">
-                <a16:creationId xmlns:a16="http://schemas.microsoft.com/office/drawing/2014/main" id="{101FB5C8-0135-429C-B2E7-CD6524506BC3}"/>
+                <a16:creationId xmlns:a16="http://schemas.microsoft.com/office/drawing/2014/main" id="{3FEFE794-71E4-4F2A-A222-0D159D762E01}"/>
               </a:ext>
             </a:extLst>
           </p:cNvPr>
@@ -19457,7 +19457,7 @@
           <p:cNvPr id="4" name="TextBox 3">
             <a:extLst xmlns:a="http://schemas.openxmlformats.org/drawingml/2006/main">
               <a:ext uri="{FF2B5EF4-FFF2-40B4-BE49-F238E27FC236}">
-                <a16:creationId xmlns:a16="http://schemas.microsoft.com/office/drawing/2014/main" id="{9AF33F30-589F-4B5B-89B2-9F8615BF9B85}"/>
+                <a16:creationId xmlns:a16="http://schemas.microsoft.com/office/drawing/2014/main" id="{B95F55BD-D649-4570-B49F-DC4E03833F39}"/>
               </a:ext>
             </a:extLst>
           </p:cNvPr>
@@ -19512,7 +19512,7 @@
           <p:cNvPr id="5" name="TextBox 4">
             <a:extLst xmlns:a="http://schemas.openxmlformats.org/drawingml/2006/main">
               <a:ext uri="{FF2B5EF4-FFF2-40B4-BE49-F238E27FC236}">
-                <a16:creationId xmlns:a16="http://schemas.microsoft.com/office/drawing/2014/main" id="{EB60468C-F4CC-44D3-B8D7-C4F1A0256572}"/>
+                <a16:creationId xmlns:a16="http://schemas.microsoft.com/office/drawing/2014/main" id="{C243A085-9D44-48CE-8C03-B75D3EC9B62B}"/>
               </a:ext>
             </a:extLst>
           </p:cNvPr>
@@ -19861,7 +19861,7 @@
           <p:cNvPr id="7" name="Rectangle 6">
             <a:extLst xmlns:a="http://schemas.openxmlformats.org/drawingml/2006/main">
               <a:ext uri="{FF2B5EF4-FFF2-40B4-BE49-F238E27FC236}">
-                <a16:creationId xmlns:a16="http://schemas.microsoft.com/office/drawing/2014/main" id="{A0213011-6A43-4EE9-BEEF-1510B28AC163}"/>
+                <a16:creationId xmlns:a16="http://schemas.microsoft.com/office/drawing/2014/main" id="{E58F7AAC-CDEA-4F8D-8879-EA7124C24569}"/>
               </a:ext>
             </a:extLst>
           </p:cNvPr>
@@ -19914,7 +19914,7 @@
           <p:cNvPr id="8" name="Rectangle 7">
             <a:extLst xmlns:a="http://schemas.openxmlformats.org/drawingml/2006/main">
               <a:ext uri="{FF2B5EF4-FFF2-40B4-BE49-F238E27FC236}">
-                <a16:creationId xmlns:a16="http://schemas.microsoft.com/office/drawing/2014/main" id="{7C1D6867-9FF7-431F-91C1-9D1AE16AE1DC}"/>
+                <a16:creationId xmlns:a16="http://schemas.microsoft.com/office/drawing/2014/main" id="{8E09AC0D-F25B-4EBA-87C3-C50012C63F2F}"/>
               </a:ext>
             </a:extLst>
           </p:cNvPr>
@@ -19967,7 +19967,7 @@
           <p:cNvPr id="9" name="TextBox 8">
             <a:extLst xmlns:a="http://schemas.openxmlformats.org/drawingml/2006/main">
               <a:ext uri="{FF2B5EF4-FFF2-40B4-BE49-F238E27FC236}">
-                <a16:creationId xmlns:a16="http://schemas.microsoft.com/office/drawing/2014/main" id="{4DBE9A85-A58C-4E91-BACB-BA8D40BCC446}"/>
+                <a16:creationId xmlns:a16="http://schemas.microsoft.com/office/drawing/2014/main" id="{53EDB69D-C11F-482C-B8C7-91E2BF2F9146}"/>
               </a:ext>
             </a:extLst>
           </p:cNvPr>
@@ -20022,7 +20022,7 @@
           <p:cNvPr id="10" name="TextBox 9">
             <a:extLst xmlns:a="http://schemas.openxmlformats.org/drawingml/2006/main">
               <a:ext uri="{FF2B5EF4-FFF2-40B4-BE49-F238E27FC236}">
-                <a16:creationId xmlns:a16="http://schemas.microsoft.com/office/drawing/2014/main" id="{30796447-9F8F-4B16-BFBC-A361DCBC1CC0}"/>
+                <a16:creationId xmlns:a16="http://schemas.microsoft.com/office/drawing/2014/main" id="{5555B6F3-0DD4-407A-BE24-0A25140F299A}"/>
               </a:ext>
             </a:extLst>
           </p:cNvPr>
@@ -20075,7 +20075,7 @@
     </p:spTree>
     <p:extLst>
       <p:ext uri="{BB962C8B-B14F-4D97-AF65-F5344CB8AC3E}">
-        <p14:creationId xmlns:p14="http://schemas.microsoft.com/office/powerpoint/2010/main" val="1068911536"/>
+        <p14:creationId xmlns:p14="http://schemas.microsoft.com/office/powerpoint/2010/main" val="1643882200"/>
       </p:ext>
     </p:extLst>
   </p:cSld>
@@ -20103,7 +20103,7 @@
           <p:nvPr/>
         </p:nvPicPr>
         <p:blipFill>
-          <a:blip xmlns:r="http://schemas.openxmlformats.org/officeDocument/2006/relationships" xmlns:a="http://schemas.openxmlformats.org/drawingml/2006/main" r:embed="Re365fb45c8394908"/>
+          <a:blip xmlns:r="http://schemas.openxmlformats.org/officeDocument/2006/relationships" xmlns:a="http://schemas.openxmlformats.org/drawingml/2006/main" r:embed="R637bcf4be47b4ec7"/>
           <a:stretch xmlns:a="http://schemas.openxmlformats.org/drawingml/2006/main">
             <a:fillRect l="0" t="0" r="0" b="0"/>
           </a:stretch>
@@ -20123,7 +20123,7 @@
           <p:cNvPr id="3" name="Rectangle 2">
             <a:extLst xmlns:a="http://schemas.openxmlformats.org/drawingml/2006/main">
               <a:ext uri="{FF2B5EF4-FFF2-40B4-BE49-F238E27FC236}">
-                <a16:creationId xmlns:a16="http://schemas.microsoft.com/office/drawing/2014/main" id="{C91E920F-965A-47AD-B0FD-08CF42F99D61}"/>
+                <a16:creationId xmlns:a16="http://schemas.microsoft.com/office/drawing/2014/main" id="{D353CDDD-56F1-4504-90A4-E6C6FCC7E597}"/>
               </a:ext>
             </a:extLst>
           </p:cNvPr>
@@ -20176,7 +20176,7 @@
           <p:cNvPr id="4" name="TextBox 3">
             <a:extLst xmlns:a="http://schemas.openxmlformats.org/drawingml/2006/main">
               <a:ext uri="{FF2B5EF4-FFF2-40B4-BE49-F238E27FC236}">
-                <a16:creationId xmlns:a16="http://schemas.microsoft.com/office/drawing/2014/main" id="{CC9EAA8D-7CF8-48FB-B01D-5307F873DAC2}"/>
+                <a16:creationId xmlns:a16="http://schemas.microsoft.com/office/drawing/2014/main" id="{0093C643-67DD-4527-82D6-9139E76A2CB2}"/>
               </a:ext>
             </a:extLst>
           </p:cNvPr>
@@ -20231,7 +20231,7 @@
           <p:cNvPr id="5" name="TextBox 4">
             <a:extLst xmlns:a="http://schemas.openxmlformats.org/drawingml/2006/main">
               <a:ext uri="{FF2B5EF4-FFF2-40B4-BE49-F238E27FC236}">
-                <a16:creationId xmlns:a16="http://schemas.microsoft.com/office/drawing/2014/main" id="{323DC224-C004-4C15-8438-8451EBC6EBCA}"/>
+                <a16:creationId xmlns:a16="http://schemas.microsoft.com/office/drawing/2014/main" id="{8151A1AD-80C3-4B63-873A-69E39AE7C80A}"/>
               </a:ext>
             </a:extLst>
           </p:cNvPr>
@@ -20580,7 +20580,7 @@
           <p:cNvPr id="7" name="Rectangle 6">
             <a:extLst xmlns:a="http://schemas.openxmlformats.org/drawingml/2006/main">
               <a:ext uri="{FF2B5EF4-FFF2-40B4-BE49-F238E27FC236}">
-                <a16:creationId xmlns:a16="http://schemas.microsoft.com/office/drawing/2014/main" id="{2A7285A1-24AC-487B-91C7-00C7FB7D481C}"/>
+                <a16:creationId xmlns:a16="http://schemas.microsoft.com/office/drawing/2014/main" id="{AE342F68-F0E5-4CA2-B356-E8090902E035}"/>
               </a:ext>
             </a:extLst>
           </p:cNvPr>
@@ -20633,7 +20633,7 @@
           <p:cNvPr id="8" name="Rectangle 7">
             <a:extLst xmlns:a="http://schemas.openxmlformats.org/drawingml/2006/main">
               <a:ext uri="{FF2B5EF4-FFF2-40B4-BE49-F238E27FC236}">
-                <a16:creationId xmlns:a16="http://schemas.microsoft.com/office/drawing/2014/main" id="{236E439E-E7BB-48BB-B8E3-86A885BA7ADD}"/>
+                <a16:creationId xmlns:a16="http://schemas.microsoft.com/office/drawing/2014/main" id="{F34F137E-94D6-4A69-8647-0BCCF62CFBAD}"/>
               </a:ext>
             </a:extLst>
           </p:cNvPr>
@@ -20686,7 +20686,7 @@
           <p:cNvPr id="9" name="TextBox 8">
             <a:extLst xmlns:a="http://schemas.openxmlformats.org/drawingml/2006/main">
               <a:ext uri="{FF2B5EF4-FFF2-40B4-BE49-F238E27FC236}">
-                <a16:creationId xmlns:a16="http://schemas.microsoft.com/office/drawing/2014/main" id="{E1FC8F69-1832-4DA1-BC03-F11A8444A242}"/>
+                <a16:creationId xmlns:a16="http://schemas.microsoft.com/office/drawing/2014/main" id="{5A4574E5-69AC-4C50-B47B-374823236EE3}"/>
               </a:ext>
             </a:extLst>
           </p:cNvPr>
@@ -20741,7 +20741,7 @@
           <p:cNvPr id="10" name="TextBox 9">
             <a:extLst xmlns:a="http://schemas.openxmlformats.org/drawingml/2006/main">
               <a:ext uri="{FF2B5EF4-FFF2-40B4-BE49-F238E27FC236}">
-                <a16:creationId xmlns:a16="http://schemas.microsoft.com/office/drawing/2014/main" id="{96515EC6-58D6-49C0-AEBE-CE117830A492}"/>
+                <a16:creationId xmlns:a16="http://schemas.microsoft.com/office/drawing/2014/main" id="{30FA7AF3-BC97-4A7F-B085-7054044A68A9}"/>
               </a:ext>
             </a:extLst>
           </p:cNvPr>
@@ -20794,7 +20794,7 @@
     </p:spTree>
     <p:extLst>
       <p:ext uri="{BB962C8B-B14F-4D97-AF65-F5344CB8AC3E}">
-        <p14:creationId xmlns:p14="http://schemas.microsoft.com/office/powerpoint/2010/main" val="1972130800"/>
+        <p14:creationId xmlns:p14="http://schemas.microsoft.com/office/powerpoint/2010/main" val="880804159"/>
       </p:ext>
     </p:extLst>
   </p:cSld>
@@ -20822,7 +20822,7 @@
           <p:nvPr/>
         </p:nvPicPr>
         <p:blipFill>
-          <a:blip xmlns:r="http://schemas.openxmlformats.org/officeDocument/2006/relationships" xmlns:a="http://schemas.openxmlformats.org/drawingml/2006/main" r:embed="R5626466b363f4ea9"/>
+          <a:blip xmlns:r="http://schemas.openxmlformats.org/officeDocument/2006/relationships" xmlns:a="http://schemas.openxmlformats.org/drawingml/2006/main" r:embed="R2f9677f193cb4b45"/>
           <a:stretch xmlns:a="http://schemas.openxmlformats.org/drawingml/2006/main">
             <a:fillRect l="0" t="0" r="0" b="0"/>
           </a:stretch>
@@ -20842,7 +20842,7 @@
           <p:cNvPr id="3" name="Rectangle 2">
             <a:extLst xmlns:a="http://schemas.openxmlformats.org/drawingml/2006/main">
               <a:ext uri="{FF2B5EF4-FFF2-40B4-BE49-F238E27FC236}">
-                <a16:creationId xmlns:a16="http://schemas.microsoft.com/office/drawing/2014/main" id="{846BC4B4-6DF1-4D66-8AB9-9A01248885ED}"/>
+                <a16:creationId xmlns:a16="http://schemas.microsoft.com/office/drawing/2014/main" id="{4F2A9E09-69AC-407F-B93A-AD5C3C352191}"/>
               </a:ext>
             </a:extLst>
           </p:cNvPr>
@@ -20895,7 +20895,7 @@
           <p:cNvPr id="4" name="TextBox 3">
             <a:extLst xmlns:a="http://schemas.openxmlformats.org/drawingml/2006/main">
               <a:ext uri="{FF2B5EF4-FFF2-40B4-BE49-F238E27FC236}">
-                <a16:creationId xmlns:a16="http://schemas.microsoft.com/office/drawing/2014/main" id="{934C5BB0-3A50-4481-90A5-05C841B63DC9}"/>
+                <a16:creationId xmlns:a16="http://schemas.microsoft.com/office/drawing/2014/main" id="{5788D930-9D87-490B-AC05-7C4C9218B6A2}"/>
               </a:ext>
             </a:extLst>
           </p:cNvPr>
@@ -20950,7 +20950,7 @@
           <p:cNvPr id="5" name="TextBox 4">
             <a:extLst xmlns:a="http://schemas.openxmlformats.org/drawingml/2006/main">
               <a:ext uri="{FF2B5EF4-FFF2-40B4-BE49-F238E27FC236}">
-                <a16:creationId xmlns:a16="http://schemas.microsoft.com/office/drawing/2014/main" id="{90CEFB33-1C4C-43EC-9C33-CF785C8CD7D3}"/>
+                <a16:creationId xmlns:a16="http://schemas.microsoft.com/office/drawing/2014/main" id="{47754E5F-BC1E-41F5-8CCD-A0558ED32C0D}"/>
               </a:ext>
             </a:extLst>
           </p:cNvPr>
@@ -21245,7 +21245,7 @@
           <p:cNvPr id="7" name="Rectangle 6">
             <a:extLst xmlns:a="http://schemas.openxmlformats.org/drawingml/2006/main">
               <a:ext uri="{FF2B5EF4-FFF2-40B4-BE49-F238E27FC236}">
-                <a16:creationId xmlns:a16="http://schemas.microsoft.com/office/drawing/2014/main" id="{6A5F9EA7-3EAA-4AA2-8425-2719239653FE}"/>
+                <a16:creationId xmlns:a16="http://schemas.microsoft.com/office/drawing/2014/main" id="{1D2995CD-1A5E-4071-A2CC-18D97CB84581}"/>
               </a:ext>
             </a:extLst>
           </p:cNvPr>
@@ -21298,7 +21298,7 @@
           <p:cNvPr id="8" name="Rectangle 7">
             <a:extLst xmlns:a="http://schemas.openxmlformats.org/drawingml/2006/main">
               <a:ext uri="{FF2B5EF4-FFF2-40B4-BE49-F238E27FC236}">
-                <a16:creationId xmlns:a16="http://schemas.microsoft.com/office/drawing/2014/main" id="{4F4E46EE-96A9-4F80-BCA8-ABC875CE20E1}"/>
+                <a16:creationId xmlns:a16="http://schemas.microsoft.com/office/drawing/2014/main" id="{01442C76-B7F1-4B46-B11C-88812EC2C847}"/>
               </a:ext>
             </a:extLst>
           </p:cNvPr>
@@ -21351,7 +21351,7 @@
           <p:cNvPr id="9" name="TextBox 8">
             <a:extLst xmlns:a="http://schemas.openxmlformats.org/drawingml/2006/main">
               <a:ext uri="{FF2B5EF4-FFF2-40B4-BE49-F238E27FC236}">
-                <a16:creationId xmlns:a16="http://schemas.microsoft.com/office/drawing/2014/main" id="{FFC882BE-1209-4E31-B6F7-2425C1C397E2}"/>
+                <a16:creationId xmlns:a16="http://schemas.microsoft.com/office/drawing/2014/main" id="{BB80A08D-AA50-4AE0-95FE-C171FEB66766}"/>
               </a:ext>
             </a:extLst>
           </p:cNvPr>
@@ -21406,7 +21406,7 @@
           <p:cNvPr id="10" name="TextBox 9">
             <a:extLst xmlns:a="http://schemas.openxmlformats.org/drawingml/2006/main">
               <a:ext uri="{FF2B5EF4-FFF2-40B4-BE49-F238E27FC236}">
-                <a16:creationId xmlns:a16="http://schemas.microsoft.com/office/drawing/2014/main" id="{82AD1622-C869-4262-BC91-C9ABB501F7C3}"/>
+                <a16:creationId xmlns:a16="http://schemas.microsoft.com/office/drawing/2014/main" id="{EAB71AB5-E99D-4392-9C66-C2CB8530EA21}"/>
               </a:ext>
             </a:extLst>
           </p:cNvPr>
@@ -21459,7 +21459,7 @@
     </p:spTree>
     <p:extLst>
       <p:ext uri="{BB962C8B-B14F-4D97-AF65-F5344CB8AC3E}">
-        <p14:creationId xmlns:p14="http://schemas.microsoft.com/office/powerpoint/2010/main" val="588165330"/>
+        <p14:creationId xmlns:p14="http://schemas.microsoft.com/office/powerpoint/2010/main" val="1043340758"/>
       </p:ext>
     </p:extLst>
   </p:cSld>
@@ -21487,7 +21487,7 @@
           <p:nvPr/>
         </p:nvPicPr>
         <p:blipFill>
-          <a:blip xmlns:r="http://schemas.openxmlformats.org/officeDocument/2006/relationships" xmlns:a="http://schemas.openxmlformats.org/drawingml/2006/main" r:embed="R333a37e7d37e43f9"/>
+          <a:blip xmlns:r="http://schemas.openxmlformats.org/officeDocument/2006/relationships" xmlns:a="http://schemas.openxmlformats.org/drawingml/2006/main" r:embed="R081a1e7ac59f4fe9"/>
           <a:stretch xmlns:a="http://schemas.openxmlformats.org/drawingml/2006/main">
             <a:fillRect l="0" t="0" r="0" b="0"/>
           </a:stretch>
@@ -21507,7 +21507,7 @@
           <p:cNvPr id="3" name="Rectangle 2">
             <a:extLst xmlns:a="http://schemas.openxmlformats.org/drawingml/2006/main">
               <a:ext uri="{FF2B5EF4-FFF2-40B4-BE49-F238E27FC236}">
-                <a16:creationId xmlns:a16="http://schemas.microsoft.com/office/drawing/2014/main" id="{01AEF074-DC55-4F26-BA4A-E4EA9B9FFC42}"/>
+                <a16:creationId xmlns:a16="http://schemas.microsoft.com/office/drawing/2014/main" id="{22525A74-908B-4DEA-B5AC-D0EB8E73DFBB}"/>
               </a:ext>
             </a:extLst>
           </p:cNvPr>
@@ -21560,7 +21560,7 @@
           <p:cNvPr id="4" name="TextBox 3">
             <a:extLst xmlns:a="http://schemas.openxmlformats.org/drawingml/2006/main">
               <a:ext uri="{FF2B5EF4-FFF2-40B4-BE49-F238E27FC236}">
-                <a16:creationId xmlns:a16="http://schemas.microsoft.com/office/drawing/2014/main" id="{CC4422F4-8843-4837-A99C-B4BA52D1DFE5}"/>
+                <a16:creationId xmlns:a16="http://schemas.microsoft.com/office/drawing/2014/main" id="{7857AF5D-A934-4057-BE97-06E0A7B8C920}"/>
               </a:ext>
             </a:extLst>
           </p:cNvPr>
@@ -21615,7 +21615,7 @@
           <p:cNvPr id="5" name="TextBox 4">
             <a:extLst xmlns:a="http://schemas.openxmlformats.org/drawingml/2006/main">
               <a:ext uri="{FF2B5EF4-FFF2-40B4-BE49-F238E27FC236}">
-                <a16:creationId xmlns:a16="http://schemas.microsoft.com/office/drawing/2014/main" id="{89C61D01-09EB-4246-9399-E6C877F57BE7}"/>
+                <a16:creationId xmlns:a16="http://schemas.microsoft.com/office/drawing/2014/main" id="{A6F97781-C476-4B15-995E-462CA01E07C6}"/>
               </a:ext>
             </a:extLst>
           </p:cNvPr>
@@ -21670,7 +21670,7 @@
           <p:cNvPr id="6" name="TextBox 5">
             <a:extLst xmlns:a="http://schemas.openxmlformats.org/drawingml/2006/main">
               <a:ext uri="{FF2B5EF4-FFF2-40B4-BE49-F238E27FC236}">
-                <a16:creationId xmlns:a16="http://schemas.microsoft.com/office/drawing/2014/main" id="{76487712-C8A3-4E45-B34E-C32A86D77DCD}"/>
+                <a16:creationId xmlns:a16="http://schemas.microsoft.com/office/drawing/2014/main" id="{2F2079BC-12CC-48BB-9998-ACA10B723EA4}"/>
               </a:ext>
             </a:extLst>
           </p:cNvPr>
@@ -21836,7 +21836,7 @@
           <p:cNvPr id="7" name="Rectangle 6">
             <a:extLst xmlns:a="http://schemas.openxmlformats.org/drawingml/2006/main">
               <a:ext uri="{FF2B5EF4-FFF2-40B4-BE49-F238E27FC236}">
-                <a16:creationId xmlns:a16="http://schemas.microsoft.com/office/drawing/2014/main" id="{2CA5BA76-C30A-4713-96CE-B46304E9B1CD}"/>
+                <a16:creationId xmlns:a16="http://schemas.microsoft.com/office/drawing/2014/main" id="{B9C45D9D-A8A0-48A6-96E5-217195A6871C}"/>
               </a:ext>
             </a:extLst>
           </p:cNvPr>
@@ -21889,7 +21889,7 @@
           <p:cNvPr id="8" name="Rectangle 7">
             <a:extLst xmlns:a="http://schemas.openxmlformats.org/drawingml/2006/main">
               <a:ext uri="{FF2B5EF4-FFF2-40B4-BE49-F238E27FC236}">
-                <a16:creationId xmlns:a16="http://schemas.microsoft.com/office/drawing/2014/main" id="{CD23CE75-6F63-4684-81A6-D5A9B0CD4F27}"/>
+                <a16:creationId xmlns:a16="http://schemas.microsoft.com/office/drawing/2014/main" id="{65EDB572-872E-4620-BD06-B31CB26A76D7}"/>
               </a:ext>
             </a:extLst>
           </p:cNvPr>
@@ -21942,7 +21942,7 @@
           <p:cNvPr id="9" name="TextBox 8">
             <a:extLst xmlns:a="http://schemas.openxmlformats.org/drawingml/2006/main">
               <a:ext uri="{FF2B5EF4-FFF2-40B4-BE49-F238E27FC236}">
-                <a16:creationId xmlns:a16="http://schemas.microsoft.com/office/drawing/2014/main" id="{69F1CE1C-6E97-498E-AD65-FCD2F769C34A}"/>
+                <a16:creationId xmlns:a16="http://schemas.microsoft.com/office/drawing/2014/main" id="{A1E47ABA-8512-40F4-AE64-B2CF810AC4CC}"/>
               </a:ext>
             </a:extLst>
           </p:cNvPr>
@@ -21997,7 +21997,7 @@
           <p:cNvPr id="10" name="TextBox 9">
             <a:extLst xmlns:a="http://schemas.openxmlformats.org/drawingml/2006/main">
               <a:ext uri="{FF2B5EF4-FFF2-40B4-BE49-F238E27FC236}">
-                <a16:creationId xmlns:a16="http://schemas.microsoft.com/office/drawing/2014/main" id="{43541BEC-1955-4618-A677-F28762C1D9C7}"/>
+                <a16:creationId xmlns:a16="http://schemas.microsoft.com/office/drawing/2014/main" id="{CACCA7E1-6A7C-47A2-8F48-829BBB10727B}"/>
               </a:ext>
             </a:extLst>
           </p:cNvPr>
@@ -22050,7 +22050,7 @@
     </p:spTree>
     <p:extLst>
       <p:ext uri="{BB962C8B-B14F-4D97-AF65-F5344CB8AC3E}">
-        <p14:creationId xmlns:p14="http://schemas.microsoft.com/office/powerpoint/2010/main" val="1498965535"/>
+        <p14:creationId xmlns:p14="http://schemas.microsoft.com/office/powerpoint/2010/main" val="2104398574"/>
       </p:ext>
     </p:extLst>
   </p:cSld>
@@ -22078,7 +22078,7 @@
           <p:nvPr/>
         </p:nvPicPr>
         <p:blipFill>
-          <a:blip xmlns:r="http://schemas.openxmlformats.org/officeDocument/2006/relationships" xmlns:a="http://schemas.openxmlformats.org/drawingml/2006/main" r:embed="R45c871a5bc2a46a8"/>
+          <a:blip xmlns:r="http://schemas.openxmlformats.org/officeDocument/2006/relationships" xmlns:a="http://schemas.openxmlformats.org/drawingml/2006/main" r:embed="R84ddd73aadfc4213"/>
           <a:stretch xmlns:a="http://schemas.openxmlformats.org/drawingml/2006/main">
             <a:fillRect l="0" t="0" r="0" b="0"/>
           </a:stretch>
@@ -22098,7 +22098,7 @@
           <p:cNvPr id="3" name="Rectangle 2">
             <a:extLst xmlns:a="http://schemas.openxmlformats.org/drawingml/2006/main">
               <a:ext uri="{FF2B5EF4-FFF2-40B4-BE49-F238E27FC236}">
-                <a16:creationId xmlns:a16="http://schemas.microsoft.com/office/drawing/2014/main" id="{07FB489C-782E-49E7-983E-5F7E56AD90AA}"/>
+                <a16:creationId xmlns:a16="http://schemas.microsoft.com/office/drawing/2014/main" id="{FE42386E-F44F-4C43-8657-1AAD10406C76}"/>
               </a:ext>
             </a:extLst>
           </p:cNvPr>
@@ -22151,7 +22151,7 @@
           <p:cNvPr id="4" name="TextBox 3">
             <a:extLst xmlns:a="http://schemas.openxmlformats.org/drawingml/2006/main">
               <a:ext uri="{FF2B5EF4-FFF2-40B4-BE49-F238E27FC236}">
-                <a16:creationId xmlns:a16="http://schemas.microsoft.com/office/drawing/2014/main" id="{526B06CE-2E5A-40C9-A936-768B419F61F9}"/>
+                <a16:creationId xmlns:a16="http://schemas.microsoft.com/office/drawing/2014/main" id="{AFF56B87-849A-4F25-9B3C-7DD0AEA2EFB1}"/>
               </a:ext>
             </a:extLst>
           </p:cNvPr>
@@ -22206,7 +22206,7 @@
           <p:cNvPr id="5" name="TextBox 4">
             <a:extLst xmlns:a="http://schemas.openxmlformats.org/drawingml/2006/main">
               <a:ext uri="{FF2B5EF4-FFF2-40B4-BE49-F238E27FC236}">
-                <a16:creationId xmlns:a16="http://schemas.microsoft.com/office/drawing/2014/main" id="{4C921C34-7BD2-4958-BB7A-EAAEC8D703DE}"/>
+                <a16:creationId xmlns:a16="http://schemas.microsoft.com/office/drawing/2014/main" id="{A2FD7F62-A27D-402E-B906-62A894C44146}"/>
               </a:ext>
             </a:extLst>
           </p:cNvPr>
@@ -22261,7 +22261,7 @@
           <p:cNvPr id="6" name="TextBox 5">
             <a:extLst xmlns:a="http://schemas.openxmlformats.org/drawingml/2006/main">
               <a:ext uri="{FF2B5EF4-FFF2-40B4-BE49-F238E27FC236}">
-                <a16:creationId xmlns:a16="http://schemas.microsoft.com/office/drawing/2014/main" id="{58764174-8D11-4353-90C2-E1B86F17A7DD}"/>
+                <a16:creationId xmlns:a16="http://schemas.microsoft.com/office/drawing/2014/main" id="{B4EDB26E-36CA-4342-B848-DC4A1DC1CD35}"/>
               </a:ext>
             </a:extLst>
           </p:cNvPr>
@@ -22373,7 +22373,7 @@
           <p:cNvPr id="7" name="Rectangle 6">
             <a:extLst xmlns:a="http://schemas.openxmlformats.org/drawingml/2006/main">
               <a:ext uri="{FF2B5EF4-FFF2-40B4-BE49-F238E27FC236}">
-                <a16:creationId xmlns:a16="http://schemas.microsoft.com/office/drawing/2014/main" id="{91F68E1D-994A-4B5B-8F9E-5ACEB421C489}"/>
+                <a16:creationId xmlns:a16="http://schemas.microsoft.com/office/drawing/2014/main" id="{070B1369-3066-46F1-87A8-21B6FFCB6433}"/>
               </a:ext>
             </a:extLst>
           </p:cNvPr>
@@ -22426,7 +22426,7 @@
           <p:cNvPr id="8" name="Rectangle 7">
             <a:extLst xmlns:a="http://schemas.openxmlformats.org/drawingml/2006/main">
               <a:ext uri="{FF2B5EF4-FFF2-40B4-BE49-F238E27FC236}">
-                <a16:creationId xmlns:a16="http://schemas.microsoft.com/office/drawing/2014/main" id="{15C5D5C9-CBBC-4E83-9FAE-CE652571C84D}"/>
+                <a16:creationId xmlns:a16="http://schemas.microsoft.com/office/drawing/2014/main" id="{FF242952-3F1D-4DF3-945F-272FD6A57E0F}"/>
               </a:ext>
             </a:extLst>
           </p:cNvPr>
@@ -22479,7 +22479,7 @@
           <p:cNvPr id="9" name="TextBox 8">
             <a:extLst xmlns:a="http://schemas.openxmlformats.org/drawingml/2006/main">
               <a:ext uri="{FF2B5EF4-FFF2-40B4-BE49-F238E27FC236}">
-                <a16:creationId xmlns:a16="http://schemas.microsoft.com/office/drawing/2014/main" id="{5B89D58A-8BF1-4806-A694-7235C897DD30}"/>
+                <a16:creationId xmlns:a16="http://schemas.microsoft.com/office/drawing/2014/main" id="{4D532712-1941-4163-B0A8-B9E3BCF01162}"/>
               </a:ext>
             </a:extLst>
           </p:cNvPr>
@@ -22534,7 +22534,7 @@
           <p:cNvPr id="10" name="TextBox 9">
             <a:extLst xmlns:a="http://schemas.openxmlformats.org/drawingml/2006/main">
               <a:ext uri="{FF2B5EF4-FFF2-40B4-BE49-F238E27FC236}">
-                <a16:creationId xmlns:a16="http://schemas.microsoft.com/office/drawing/2014/main" id="{FD2D84D4-C0FD-461D-B612-567CFD4596E6}"/>
+                <a16:creationId xmlns:a16="http://schemas.microsoft.com/office/drawing/2014/main" id="{252BFCBB-7D3F-4EB8-88DE-A9F8288AB1FF}"/>
               </a:ext>
             </a:extLst>
           </p:cNvPr>
@@ -22587,7 +22587,7 @@
     </p:spTree>
     <p:extLst>
       <p:ext uri="{BB962C8B-B14F-4D97-AF65-F5344CB8AC3E}">
-        <p14:creationId xmlns:p14="http://schemas.microsoft.com/office/powerpoint/2010/main" val="256317674"/>
+        <p14:creationId xmlns:p14="http://schemas.microsoft.com/office/powerpoint/2010/main" val="1699292491"/>
       </p:ext>
     </p:extLst>
   </p:cSld>
@@ -22611,7 +22611,7 @@
           <p:cNvPr id="2" name="Rectangle 1">
             <a:extLst xmlns:a="http://schemas.openxmlformats.org/drawingml/2006/main">
               <a:ext uri="{FF2B5EF4-FFF2-40B4-BE49-F238E27FC236}">
-                <a16:creationId xmlns:a16="http://schemas.microsoft.com/office/drawing/2014/main" id="{63A42E2A-835F-4AFA-9E9F-E9E724C2398E}"/>
+                <a16:creationId xmlns:a16="http://schemas.microsoft.com/office/drawing/2014/main" id="{4AC666F2-2826-4FD4-9979-961CAA7B8E7F}"/>
               </a:ext>
             </a:extLst>
           </p:cNvPr>
@@ -22664,7 +22664,7 @@
           <p:cNvPr id="3" name="TextBox 2">
             <a:extLst xmlns:a="http://schemas.openxmlformats.org/drawingml/2006/main">
               <a:ext uri="{FF2B5EF4-FFF2-40B4-BE49-F238E27FC236}">
-                <a16:creationId xmlns:a16="http://schemas.microsoft.com/office/drawing/2014/main" id="{A8FD678E-03A9-4A64-A783-94391D036650}"/>
+                <a16:creationId xmlns:a16="http://schemas.microsoft.com/office/drawing/2014/main" id="{5C8C36C1-FBA3-48B8-8470-06B2A6FF13A2}"/>
               </a:ext>
             </a:extLst>
           </p:cNvPr>
@@ -22719,7 +22719,7 @@
           <p:cNvPr id="4" name="TextBox 3">
             <a:extLst xmlns:a="http://schemas.openxmlformats.org/drawingml/2006/main">
               <a:ext uri="{FF2B5EF4-FFF2-40B4-BE49-F238E27FC236}">
-                <a16:creationId xmlns:a16="http://schemas.microsoft.com/office/drawing/2014/main" id="{3F589D72-10FC-4CB4-A364-882394F23117}"/>
+                <a16:creationId xmlns:a16="http://schemas.microsoft.com/office/drawing/2014/main" id="{6FC76F7D-4B7D-475B-9C21-26B2AE8995D4}"/>
               </a:ext>
             </a:extLst>
           </p:cNvPr>
@@ -22774,7 +22774,7 @@
           <p:cNvPr id="5" name="TextBox 4">
             <a:extLst xmlns:a="http://schemas.openxmlformats.org/drawingml/2006/main">
               <a:ext uri="{FF2B5EF4-FFF2-40B4-BE49-F238E27FC236}">
-                <a16:creationId xmlns:a16="http://schemas.microsoft.com/office/drawing/2014/main" id="{745694DD-5F0B-4CBF-8D92-E66611D032EE}"/>
+                <a16:creationId xmlns:a16="http://schemas.microsoft.com/office/drawing/2014/main" id="{14C1AD4F-6487-4B5B-8566-8BF3B46E6F97}"/>
               </a:ext>
             </a:extLst>
           </p:cNvPr>
@@ -22829,7 +22829,7 @@
           <p:cNvPr id="6" name="Rectangle 5">
             <a:extLst xmlns:a="http://schemas.openxmlformats.org/drawingml/2006/main">
               <a:ext uri="{FF2B5EF4-FFF2-40B4-BE49-F238E27FC236}">
-                <a16:creationId xmlns:a16="http://schemas.microsoft.com/office/drawing/2014/main" id="{384A17FA-6092-4591-B67E-0EC995EAAA7D}"/>
+                <a16:creationId xmlns:a16="http://schemas.microsoft.com/office/drawing/2014/main" id="{42E4FF27-5EC4-47F6-8C93-EF7808AEEE65}"/>
               </a:ext>
             </a:extLst>
           </p:cNvPr>
@@ -22880,7 +22880,7 @@
     </p:spTree>
     <p:extLst>
       <p:ext uri="{BB962C8B-B14F-4D97-AF65-F5344CB8AC3E}">
-        <p14:creationId xmlns:p14="http://schemas.microsoft.com/office/powerpoint/2010/main" val="838631432"/>
+        <p14:creationId xmlns:p14="http://schemas.microsoft.com/office/powerpoint/2010/main" val="382331257"/>
       </p:ext>
     </p:extLst>
   </p:cSld>
@@ -22904,7 +22904,7 @@
           <p:cNvPr id="2" name="Rectangle 1">
             <a:extLst xmlns:a="http://schemas.openxmlformats.org/drawingml/2006/main">
               <a:ext uri="{FF2B5EF4-FFF2-40B4-BE49-F238E27FC236}">
-                <a16:creationId xmlns:a16="http://schemas.microsoft.com/office/drawing/2014/main" id="{7F826999-8232-45EA-A3D0-4C2C98B5D192}"/>
+                <a16:creationId xmlns:a16="http://schemas.microsoft.com/office/drawing/2014/main" id="{E1EBD97C-7B72-481F-8EE4-401E624541BE}"/>
               </a:ext>
             </a:extLst>
           </p:cNvPr>
@@ -22957,7 +22957,7 @@
           <p:cNvPr id="3" name="TextBox 2">
             <a:extLst xmlns:a="http://schemas.openxmlformats.org/drawingml/2006/main">
               <a:ext uri="{FF2B5EF4-FFF2-40B4-BE49-F238E27FC236}">
-                <a16:creationId xmlns:a16="http://schemas.microsoft.com/office/drawing/2014/main" id="{AA0FD8C5-2DB4-4E67-B172-F019FABF4084}"/>
+                <a16:creationId xmlns:a16="http://schemas.microsoft.com/office/drawing/2014/main" id="{C132AD41-86F0-4591-84E1-B11409719471}"/>
               </a:ext>
             </a:extLst>
           </p:cNvPr>
@@ -23012,7 +23012,7 @@
           <p:cNvPr id="4" name="TextBox 3">
             <a:extLst xmlns:a="http://schemas.openxmlformats.org/drawingml/2006/main">
               <a:ext uri="{FF2B5EF4-FFF2-40B4-BE49-F238E27FC236}">
-                <a16:creationId xmlns:a16="http://schemas.microsoft.com/office/drawing/2014/main" id="{218E68FF-7EFA-4751-AB50-F8248A2CB134}"/>
+                <a16:creationId xmlns:a16="http://schemas.microsoft.com/office/drawing/2014/main" id="{C9D8EE02-F1B8-49F6-9031-741A85A9694D}"/>
               </a:ext>
             </a:extLst>
           </p:cNvPr>
@@ -23042,14 +23042,14 @@
                 <a:spcPct val="110000"/>
               </a:lnSpc>
               <a:buNone/>
-              <a:defRPr sz="2000">
+              <a:defRPr sz="1400">
                 <a:latin typeface="Arial"/>
                 <a:ea typeface="Arial"/>
                 <a:cs typeface="Arial"/>
               </a:defRPr>
             </a:pPr>
             <a:r>
-              <a:rPr sz="2000" b="1" i="0">
+              <a:rPr sz="1400" b="1" i="0">
                 <a:solidFill>
                   <a:srgbClr val="FFFFFF"/>
                 </a:solidFill>
@@ -23067,7 +23067,7 @@
           <p:cNvPr id="5" name="TextBox 4">
             <a:extLst xmlns:a="http://schemas.openxmlformats.org/drawingml/2006/main">
               <a:ext uri="{FF2B5EF4-FFF2-40B4-BE49-F238E27FC236}">
-                <a16:creationId xmlns:a16="http://schemas.microsoft.com/office/drawing/2014/main" id="{8AA4CDA9-9FF7-453C-B61E-463E08DDEF73}"/>
+                <a16:creationId xmlns:a16="http://schemas.microsoft.com/office/drawing/2014/main" id="{8F047408-F0B3-4189-8A2B-934BCF96119C}"/>
               </a:ext>
             </a:extLst>
           </p:cNvPr>
@@ -23122,7 +23122,7 @@
           <p:cNvPr id="6" name="Rectangle 5">
             <a:extLst xmlns:a="http://schemas.openxmlformats.org/drawingml/2006/main">
               <a:ext uri="{FF2B5EF4-FFF2-40B4-BE49-F238E27FC236}">
-                <a16:creationId xmlns:a16="http://schemas.microsoft.com/office/drawing/2014/main" id="{02A7A65C-9BA1-41F2-A8EF-E01FD2A6B811}"/>
+                <a16:creationId xmlns:a16="http://schemas.microsoft.com/office/drawing/2014/main" id="{A4ED6CBC-0A86-4191-8610-A594F7F38793}"/>
               </a:ext>
             </a:extLst>
           </p:cNvPr>
@@ -23173,7 +23173,7 @@
     </p:spTree>
     <p:extLst>
       <p:ext uri="{BB962C8B-B14F-4D97-AF65-F5344CB8AC3E}">
-        <p14:creationId xmlns:p14="http://schemas.microsoft.com/office/powerpoint/2010/main" val="776697328"/>
+        <p14:creationId xmlns:p14="http://schemas.microsoft.com/office/powerpoint/2010/main" val="1908348370"/>
       </p:ext>
     </p:extLst>
   </p:cSld>
@@ -23201,7 +23201,7 @@
           <p:nvPr/>
         </p:nvPicPr>
         <p:blipFill>
-          <a:blip xmlns:r="http://schemas.openxmlformats.org/officeDocument/2006/relationships" xmlns:a="http://schemas.openxmlformats.org/drawingml/2006/main" r:embed="R04bd8339e68d45ca"/>
+          <a:blip xmlns:r="http://schemas.openxmlformats.org/officeDocument/2006/relationships" xmlns:a="http://schemas.openxmlformats.org/drawingml/2006/main" r:embed="Rfb24378a38094d68"/>
           <a:stretch xmlns:a="http://schemas.openxmlformats.org/drawingml/2006/main">
             <a:fillRect l="0" t="0" r="0" b="0"/>
           </a:stretch>
@@ -23221,7 +23221,7 @@
           <p:cNvPr id="3" name="Rectangle 2">
             <a:extLst xmlns:a="http://schemas.openxmlformats.org/drawingml/2006/main">
               <a:ext uri="{FF2B5EF4-FFF2-40B4-BE49-F238E27FC236}">
-                <a16:creationId xmlns:a16="http://schemas.microsoft.com/office/drawing/2014/main" id="{73B0061F-910F-4E23-AAEB-ABF3D39DE324}"/>
+                <a16:creationId xmlns:a16="http://schemas.microsoft.com/office/drawing/2014/main" id="{88996200-B914-4294-BA14-ED7682ABB107}"/>
               </a:ext>
             </a:extLst>
           </p:cNvPr>
@@ -23274,7 +23274,7 @@
           <p:cNvPr id="4" name="TextBox 3">
             <a:extLst xmlns:a="http://schemas.openxmlformats.org/drawingml/2006/main">
               <a:ext uri="{FF2B5EF4-FFF2-40B4-BE49-F238E27FC236}">
-                <a16:creationId xmlns:a16="http://schemas.microsoft.com/office/drawing/2014/main" id="{B3B30464-2B59-4F77-9924-6F1838C2B6C8}"/>
+                <a16:creationId xmlns:a16="http://schemas.microsoft.com/office/drawing/2014/main" id="{BDDB4189-5768-4747-8B3B-6BB2EC80B851}"/>
               </a:ext>
             </a:extLst>
           </p:cNvPr>
@@ -23329,7 +23329,7 @@
           <p:cNvPr id="5" name="TextBox 4">
             <a:extLst xmlns:a="http://schemas.openxmlformats.org/drawingml/2006/main">
               <a:ext uri="{FF2B5EF4-FFF2-40B4-BE49-F238E27FC236}">
-                <a16:creationId xmlns:a16="http://schemas.microsoft.com/office/drawing/2014/main" id="{A0D183D8-7C42-46DA-88C7-3CBFB32DABF0}"/>
+                <a16:creationId xmlns:a16="http://schemas.microsoft.com/office/drawing/2014/main" id="{D8B39F2F-27DC-4713-B54A-2F9B08888D4F}"/>
               </a:ext>
             </a:extLst>
           </p:cNvPr>
@@ -23384,7 +23384,7 @@
           <p:cNvPr id="6" name="TextBox 5">
             <a:extLst xmlns:a="http://schemas.openxmlformats.org/drawingml/2006/main">
               <a:ext uri="{FF2B5EF4-FFF2-40B4-BE49-F238E27FC236}">
-                <a16:creationId xmlns:a16="http://schemas.microsoft.com/office/drawing/2014/main" id="{65C25AFA-8433-4D76-8B8F-45B0F0D9B1C7}"/>
+                <a16:creationId xmlns:a16="http://schemas.microsoft.com/office/drawing/2014/main" id="{A3FBD4C7-4103-4462-A0BE-985CA1F4470C}"/>
               </a:ext>
             </a:extLst>
           </p:cNvPr>
@@ -23523,7 +23523,7 @@
           <p:cNvPr id="7" name="Rectangle 6">
             <a:extLst xmlns:a="http://schemas.openxmlformats.org/drawingml/2006/main">
               <a:ext uri="{FF2B5EF4-FFF2-40B4-BE49-F238E27FC236}">
-                <a16:creationId xmlns:a16="http://schemas.microsoft.com/office/drawing/2014/main" id="{22DB6E2B-D214-4419-A955-7BE83CFF3E35}"/>
+                <a16:creationId xmlns:a16="http://schemas.microsoft.com/office/drawing/2014/main" id="{F02246D3-2E65-48F9-9D22-B247CEB1B9B0}"/>
               </a:ext>
             </a:extLst>
           </p:cNvPr>
@@ -23576,7 +23576,7 @@
           <p:cNvPr id="8" name="Rectangle 7">
             <a:extLst xmlns:a="http://schemas.openxmlformats.org/drawingml/2006/main">
               <a:ext uri="{FF2B5EF4-FFF2-40B4-BE49-F238E27FC236}">
-                <a16:creationId xmlns:a16="http://schemas.microsoft.com/office/drawing/2014/main" id="{80C5D11B-4F6E-4031-83CF-AF388778B9EA}"/>
+                <a16:creationId xmlns:a16="http://schemas.microsoft.com/office/drawing/2014/main" id="{E5D7B930-BC86-4ECA-AB76-F314BB23C1B7}"/>
               </a:ext>
             </a:extLst>
           </p:cNvPr>
@@ -23629,7 +23629,7 @@
           <p:cNvPr id="9" name="TextBox 8">
             <a:extLst xmlns:a="http://schemas.openxmlformats.org/drawingml/2006/main">
               <a:ext uri="{FF2B5EF4-FFF2-40B4-BE49-F238E27FC236}">
-                <a16:creationId xmlns:a16="http://schemas.microsoft.com/office/drawing/2014/main" id="{FD8456FD-35A4-4483-8F7A-C6E9A9E59721}"/>
+                <a16:creationId xmlns:a16="http://schemas.microsoft.com/office/drawing/2014/main" id="{7E7D07F8-4D98-462A-A6D2-2965D2545B2F}"/>
               </a:ext>
             </a:extLst>
           </p:cNvPr>
@@ -23684,7 +23684,7 @@
           <p:cNvPr id="10" name="TextBox 9">
             <a:extLst xmlns:a="http://schemas.openxmlformats.org/drawingml/2006/main">
               <a:ext uri="{FF2B5EF4-FFF2-40B4-BE49-F238E27FC236}">
-                <a16:creationId xmlns:a16="http://schemas.microsoft.com/office/drawing/2014/main" id="{4D297D39-0D30-49DC-BB90-5DD7B7CA877A}"/>
+                <a16:creationId xmlns:a16="http://schemas.microsoft.com/office/drawing/2014/main" id="{F631EE90-9243-4598-96D0-DACCE65141F7}"/>
               </a:ext>
             </a:extLst>
           </p:cNvPr>
@@ -23737,7 +23737,7 @@
     </p:spTree>
     <p:extLst>
       <p:ext uri="{BB962C8B-B14F-4D97-AF65-F5344CB8AC3E}">
-        <p14:creationId xmlns:p14="http://schemas.microsoft.com/office/powerpoint/2010/main" val="1487922674"/>
+        <p14:creationId xmlns:p14="http://schemas.microsoft.com/office/powerpoint/2010/main" val="1744798693"/>
       </p:ext>
     </p:extLst>
   </p:cSld>
@@ -23765,7 +23765,7 @@
           <p:nvPr/>
         </p:nvPicPr>
         <p:blipFill>
-          <a:blip xmlns:r="http://schemas.openxmlformats.org/officeDocument/2006/relationships" xmlns:a="http://schemas.openxmlformats.org/drawingml/2006/main" r:embed="R51810d62421345e2"/>
+          <a:blip xmlns:r="http://schemas.openxmlformats.org/officeDocument/2006/relationships" xmlns:a="http://schemas.openxmlformats.org/drawingml/2006/main" r:embed="R5262f81ea2a745c9"/>
           <a:stretch xmlns:a="http://schemas.openxmlformats.org/drawingml/2006/main">
             <a:fillRect l="0" t="0" r="0" b="0"/>
           </a:stretch>
@@ -23785,7 +23785,7 @@
           <p:cNvPr id="3" name="Rectangle 2">
             <a:extLst xmlns:a="http://schemas.openxmlformats.org/drawingml/2006/main">
               <a:ext uri="{FF2B5EF4-FFF2-40B4-BE49-F238E27FC236}">
-                <a16:creationId xmlns:a16="http://schemas.microsoft.com/office/drawing/2014/main" id="{C33B463E-AB64-49E7-B9F7-F0A06FE5FFCB}"/>
+                <a16:creationId xmlns:a16="http://schemas.microsoft.com/office/drawing/2014/main" id="{111E4C72-308D-4AA8-8FC3-D1171AA441A5}"/>
               </a:ext>
             </a:extLst>
           </p:cNvPr>
@@ -23838,7 +23838,7 @@
           <p:cNvPr id="4" name="TextBox 3">
             <a:extLst xmlns:a="http://schemas.openxmlformats.org/drawingml/2006/main">
               <a:ext uri="{FF2B5EF4-FFF2-40B4-BE49-F238E27FC236}">
-                <a16:creationId xmlns:a16="http://schemas.microsoft.com/office/drawing/2014/main" id="{CDBA49BB-524D-452F-8039-1662779099CC}"/>
+                <a16:creationId xmlns:a16="http://schemas.microsoft.com/office/drawing/2014/main" id="{EDB70754-C93E-41B3-8BF1-1C356D92C4E8}"/>
               </a:ext>
             </a:extLst>
           </p:cNvPr>
@@ -23893,7 +23893,7 @@
           <p:cNvPr id="5" name="TextBox 4">
             <a:extLst xmlns:a="http://schemas.openxmlformats.org/drawingml/2006/main">
               <a:ext uri="{FF2B5EF4-FFF2-40B4-BE49-F238E27FC236}">
-                <a16:creationId xmlns:a16="http://schemas.microsoft.com/office/drawing/2014/main" id="{B6692B48-0921-47AE-AB41-5C062796C31B}"/>
+                <a16:creationId xmlns:a16="http://schemas.microsoft.com/office/drawing/2014/main" id="{869FCA2F-587B-4665-B6D2-C32D2398A4D5}"/>
               </a:ext>
             </a:extLst>
           </p:cNvPr>
@@ -23948,7 +23948,7 @@
           <p:cNvPr id="6" name="Rounded Rectangle 5">
             <a:extLst xmlns:a="http://schemas.openxmlformats.org/drawingml/2006/main">
               <a:ext uri="{FF2B5EF4-FFF2-40B4-BE49-F238E27FC236}">
-                <a16:creationId xmlns:a16="http://schemas.microsoft.com/office/drawing/2014/main" id="{6E00BB13-AE27-43D4-8EC0-D68A229CE8C3}"/>
+                <a16:creationId xmlns:a16="http://schemas.microsoft.com/office/drawing/2014/main" id="{9D3A49E9-295E-4461-B8EF-CBABF10B5C5E}"/>
               </a:ext>
             </a:extLst>
           </p:cNvPr>
@@ -24005,7 +24005,7 @@
           <p:cNvPr id="7" name="TextBox 6">
             <a:extLst xmlns:a="http://schemas.openxmlformats.org/drawingml/2006/main">
               <a:ext uri="{FF2B5EF4-FFF2-40B4-BE49-F238E27FC236}">
-                <a16:creationId xmlns:a16="http://schemas.microsoft.com/office/drawing/2014/main" id="{03355CF1-122E-40AF-A105-1CD45AA5BDFD}"/>
+                <a16:creationId xmlns:a16="http://schemas.microsoft.com/office/drawing/2014/main" id="{8F9C3F1A-FEF3-4375-B9DC-969FC5CD834F}"/>
               </a:ext>
             </a:extLst>
           </p:cNvPr>
@@ -24060,7 +24060,7 @@
           <p:cNvPr id="8" name="TextBox 7">
             <a:extLst xmlns:a="http://schemas.openxmlformats.org/drawingml/2006/main">
               <a:ext uri="{FF2B5EF4-FFF2-40B4-BE49-F238E27FC236}">
-                <a16:creationId xmlns:a16="http://schemas.microsoft.com/office/drawing/2014/main" id="{33DA03BE-6ADE-4E8A-BD50-5B4F93284AE1}"/>
+                <a16:creationId xmlns:a16="http://schemas.microsoft.com/office/drawing/2014/main" id="{E8C12906-6EDC-4972-8A18-0938D1AE786D}"/>
               </a:ext>
             </a:extLst>
           </p:cNvPr>
@@ -24090,14 +24090,14 @@
                 <a:spcPct val="115000"/>
               </a:lnSpc>
               <a:buNone/>
-              <a:defRPr sz="2000">
+              <a:defRPr sz="1400">
                 <a:latin typeface="Arial"/>
                 <a:ea typeface="Arial"/>
                 <a:cs typeface="Arial"/>
               </a:defRPr>
             </a:pPr>
             <a:r>
-              <a:rPr sz="2000" b="1" i="0">
+              <a:rPr sz="1400" b="1" i="0">
                 <a:solidFill>
                   <a:srgbClr val="102A43"/>
                 </a:solidFill>
@@ -24115,7 +24115,7 @@
           <p:cNvPr id="9" name="TextBox 8">
             <a:extLst xmlns:a="http://schemas.openxmlformats.org/drawingml/2006/main">
               <a:ext uri="{FF2B5EF4-FFF2-40B4-BE49-F238E27FC236}">
-                <a16:creationId xmlns:a16="http://schemas.microsoft.com/office/drawing/2014/main" id="{E18C9588-33D7-48DE-BEE4-50A08959E613}"/>
+                <a16:creationId xmlns:a16="http://schemas.microsoft.com/office/drawing/2014/main" id="{6694E4A9-6AAE-4313-9CA3-10550E1BD818}"/>
               </a:ext>
             </a:extLst>
           </p:cNvPr>
@@ -24200,7 +24200,7 @@
           <p:cNvPr id="10" name="Rounded Rectangle 9">
             <a:extLst xmlns:a="http://schemas.openxmlformats.org/drawingml/2006/main">
               <a:ext uri="{FF2B5EF4-FFF2-40B4-BE49-F238E27FC236}">
-                <a16:creationId xmlns:a16="http://schemas.microsoft.com/office/drawing/2014/main" id="{06BBB5C8-81A1-48E7-87F3-EB6807BE2FAA}"/>
+                <a16:creationId xmlns:a16="http://schemas.microsoft.com/office/drawing/2014/main" id="{4D9F4501-372F-4FA0-88AF-DFE2D32C7D09}"/>
               </a:ext>
             </a:extLst>
           </p:cNvPr>
@@ -24257,7 +24257,7 @@
           <p:cNvPr id="11" name="TextBox 10">
             <a:extLst xmlns:a="http://schemas.openxmlformats.org/drawingml/2006/main">
               <a:ext uri="{FF2B5EF4-FFF2-40B4-BE49-F238E27FC236}">
-                <a16:creationId xmlns:a16="http://schemas.microsoft.com/office/drawing/2014/main" id="{F2175AB0-88A5-4103-A167-CC42EF64CA56}"/>
+                <a16:creationId xmlns:a16="http://schemas.microsoft.com/office/drawing/2014/main" id="{44BA1CB6-5DBA-48D5-BA73-3F952B3C0B3A}"/>
               </a:ext>
             </a:extLst>
           </p:cNvPr>
@@ -24312,7 +24312,7 @@
           <p:cNvPr id="12" name="TextBox 11">
             <a:extLst xmlns:a="http://schemas.openxmlformats.org/drawingml/2006/main">
               <a:ext uri="{FF2B5EF4-FFF2-40B4-BE49-F238E27FC236}">
-                <a16:creationId xmlns:a16="http://schemas.microsoft.com/office/drawing/2014/main" id="{027BE72E-54C1-41C0-BC41-55CA4F782001}"/>
+                <a16:creationId xmlns:a16="http://schemas.microsoft.com/office/drawing/2014/main" id="{C8F00639-B717-4B6F-8E9C-543149009806}"/>
               </a:ext>
             </a:extLst>
           </p:cNvPr>
@@ -24342,14 +24342,14 @@
                 <a:spcPct val="115000"/>
               </a:lnSpc>
               <a:buNone/>
-              <a:defRPr sz="2000">
+              <a:defRPr sz="1400">
                 <a:latin typeface="Arial"/>
                 <a:ea typeface="Arial"/>
                 <a:cs typeface="Arial"/>
               </a:defRPr>
             </a:pPr>
             <a:r>
-              <a:rPr sz="2000" b="1" i="0">
+              <a:rPr sz="1400" b="1" i="0">
                 <a:solidFill>
                   <a:srgbClr val="102A43"/>
                 </a:solidFill>
@@ -24367,7 +24367,7 @@
           <p:cNvPr id="13" name="TextBox 12">
             <a:extLst xmlns:a="http://schemas.openxmlformats.org/drawingml/2006/main">
               <a:ext uri="{FF2B5EF4-FFF2-40B4-BE49-F238E27FC236}">
-                <a16:creationId xmlns:a16="http://schemas.microsoft.com/office/drawing/2014/main" id="{5A9AC419-14E5-4C78-8811-870860798C87}"/>
+                <a16:creationId xmlns:a16="http://schemas.microsoft.com/office/drawing/2014/main" id="{7EB8C9EA-9083-4E0A-86A8-F785582D13DC}"/>
               </a:ext>
             </a:extLst>
           </p:cNvPr>
@@ -24452,7 +24452,7 @@
           <p:cNvPr id="14" name="Rounded Rectangle 13">
             <a:extLst xmlns:a="http://schemas.openxmlformats.org/drawingml/2006/main">
               <a:ext uri="{FF2B5EF4-FFF2-40B4-BE49-F238E27FC236}">
-                <a16:creationId xmlns:a16="http://schemas.microsoft.com/office/drawing/2014/main" id="{EAED2011-EC9F-4236-A7D4-B9CE79F70567}"/>
+                <a16:creationId xmlns:a16="http://schemas.microsoft.com/office/drawing/2014/main" id="{5195B6EF-4B1E-477E-B71A-A32CF8A4C2DF}"/>
               </a:ext>
             </a:extLst>
           </p:cNvPr>
@@ -24509,7 +24509,7 @@
           <p:cNvPr id="15" name="TextBox 14">
             <a:extLst xmlns:a="http://schemas.openxmlformats.org/drawingml/2006/main">
               <a:ext uri="{FF2B5EF4-FFF2-40B4-BE49-F238E27FC236}">
-                <a16:creationId xmlns:a16="http://schemas.microsoft.com/office/drawing/2014/main" id="{34FFC46F-2612-414E-A809-3C537DCB313B}"/>
+                <a16:creationId xmlns:a16="http://schemas.microsoft.com/office/drawing/2014/main" id="{F6EE932D-2436-4E48-BFC3-C18ED759AF61}"/>
               </a:ext>
             </a:extLst>
           </p:cNvPr>
@@ -24564,7 +24564,7 @@
           <p:cNvPr id="16" name="TextBox 15">
             <a:extLst xmlns:a="http://schemas.openxmlformats.org/drawingml/2006/main">
               <a:ext uri="{FF2B5EF4-FFF2-40B4-BE49-F238E27FC236}">
-                <a16:creationId xmlns:a16="http://schemas.microsoft.com/office/drawing/2014/main" id="{6C1C5698-AFB5-4B9D-8F9B-24DEF0DBBB9E}"/>
+                <a16:creationId xmlns:a16="http://schemas.microsoft.com/office/drawing/2014/main" id="{2BBBE039-372A-4A28-ADFC-2B97CD34F28B}"/>
               </a:ext>
             </a:extLst>
           </p:cNvPr>
@@ -24594,14 +24594,14 @@
                 <a:spcPct val="115000"/>
               </a:lnSpc>
               <a:buNone/>
-              <a:defRPr sz="2000">
+              <a:defRPr sz="1400">
                 <a:latin typeface="Arial"/>
                 <a:ea typeface="Arial"/>
                 <a:cs typeface="Arial"/>
               </a:defRPr>
             </a:pPr>
             <a:r>
-              <a:rPr sz="2000" b="1" i="0">
+              <a:rPr sz="1400" b="1" i="0">
                 <a:solidFill>
                   <a:srgbClr val="102A43"/>
                 </a:solidFill>
@@ -24619,7 +24619,7 @@
           <p:cNvPr id="17" name="TextBox 16">
             <a:extLst xmlns:a="http://schemas.openxmlformats.org/drawingml/2006/main">
               <a:ext uri="{FF2B5EF4-FFF2-40B4-BE49-F238E27FC236}">
-                <a16:creationId xmlns:a16="http://schemas.microsoft.com/office/drawing/2014/main" id="{6B701518-D186-4C5E-9DBF-9C82856C18DA}"/>
+                <a16:creationId xmlns:a16="http://schemas.microsoft.com/office/drawing/2014/main" id="{A9805D3E-363B-4D36-9105-35F14749AD77}"/>
               </a:ext>
             </a:extLst>
           </p:cNvPr>
@@ -24704,7 +24704,7 @@
           <p:cNvPr id="18" name="Rectangle 17">
             <a:extLst xmlns:a="http://schemas.openxmlformats.org/drawingml/2006/main">
               <a:ext uri="{FF2B5EF4-FFF2-40B4-BE49-F238E27FC236}">
-                <a16:creationId xmlns:a16="http://schemas.microsoft.com/office/drawing/2014/main" id="{9800A5CA-6CA6-4085-8D7E-A20186DA0D11}"/>
+                <a16:creationId xmlns:a16="http://schemas.microsoft.com/office/drawing/2014/main" id="{5414D7FB-5EAD-43BF-9082-30ECCAA30471}"/>
               </a:ext>
             </a:extLst>
           </p:cNvPr>
@@ -24757,7 +24757,7 @@
           <p:cNvPr id="19" name="Rectangle 18">
             <a:extLst xmlns:a="http://schemas.openxmlformats.org/drawingml/2006/main">
               <a:ext uri="{FF2B5EF4-FFF2-40B4-BE49-F238E27FC236}">
-                <a16:creationId xmlns:a16="http://schemas.microsoft.com/office/drawing/2014/main" id="{746BABA9-B17D-40BD-A93A-989E64FCE81F}"/>
+                <a16:creationId xmlns:a16="http://schemas.microsoft.com/office/drawing/2014/main" id="{8A7B6023-E33E-4BF4-AE78-6C0D8D610D57}"/>
               </a:ext>
             </a:extLst>
           </p:cNvPr>
@@ -24810,7 +24810,7 @@
           <p:cNvPr id="20" name="TextBox 19">
             <a:extLst xmlns:a="http://schemas.openxmlformats.org/drawingml/2006/main">
               <a:ext uri="{FF2B5EF4-FFF2-40B4-BE49-F238E27FC236}">
-                <a16:creationId xmlns:a16="http://schemas.microsoft.com/office/drawing/2014/main" id="{F9ADB38B-1455-4A1E-9C6A-02C38559D278}"/>
+                <a16:creationId xmlns:a16="http://schemas.microsoft.com/office/drawing/2014/main" id="{20BA57C9-C3C9-42A2-AE48-2FD30CEDE5C0}"/>
               </a:ext>
             </a:extLst>
           </p:cNvPr>
@@ -24865,7 +24865,7 @@
           <p:cNvPr id="21" name="TextBox 20">
             <a:extLst xmlns:a="http://schemas.openxmlformats.org/drawingml/2006/main">
               <a:ext uri="{FF2B5EF4-FFF2-40B4-BE49-F238E27FC236}">
-                <a16:creationId xmlns:a16="http://schemas.microsoft.com/office/drawing/2014/main" id="{03628F22-640A-4404-9A14-E136F8C8A5B6}"/>
+                <a16:creationId xmlns:a16="http://schemas.microsoft.com/office/drawing/2014/main" id="{7A7B7D61-2169-47AE-97CA-E25CCAC30D89}"/>
               </a:ext>
             </a:extLst>
           </p:cNvPr>
@@ -24918,7 +24918,7 @@
     </p:spTree>
     <p:extLst>
       <p:ext uri="{BB962C8B-B14F-4D97-AF65-F5344CB8AC3E}">
-        <p14:creationId xmlns:p14="http://schemas.microsoft.com/office/powerpoint/2010/main" val="1588442703"/>
+        <p14:creationId xmlns:p14="http://schemas.microsoft.com/office/powerpoint/2010/main" val="237549872"/>
       </p:ext>
     </p:extLst>
   </p:cSld>
@@ -24946,7 +24946,7 @@
           <p:nvPr/>
         </p:nvPicPr>
         <p:blipFill>
-          <a:blip xmlns:r="http://schemas.openxmlformats.org/officeDocument/2006/relationships" xmlns:a="http://schemas.openxmlformats.org/drawingml/2006/main" r:embed="Rca67624fc08f44b7"/>
+          <a:blip xmlns:r="http://schemas.openxmlformats.org/officeDocument/2006/relationships" xmlns:a="http://schemas.openxmlformats.org/drawingml/2006/main" r:embed="R9c1bddaa980b4bf0"/>
           <a:stretch xmlns:a="http://schemas.openxmlformats.org/drawingml/2006/main">
             <a:fillRect l="0" t="0" r="0" b="0"/>
           </a:stretch>
@@ -24966,7 +24966,7 @@
           <p:cNvPr id="3" name="Rectangle 2">
             <a:extLst xmlns:a="http://schemas.openxmlformats.org/drawingml/2006/main">
               <a:ext uri="{FF2B5EF4-FFF2-40B4-BE49-F238E27FC236}">
-                <a16:creationId xmlns:a16="http://schemas.microsoft.com/office/drawing/2014/main" id="{4081A974-67C1-4ED9-8277-37CB0E489038}"/>
+                <a16:creationId xmlns:a16="http://schemas.microsoft.com/office/drawing/2014/main" id="{DC339CB9-74EE-402A-8BA3-0D91B1C003D6}"/>
               </a:ext>
             </a:extLst>
           </p:cNvPr>
@@ -25019,7 +25019,7 @@
           <p:cNvPr id="4" name="TextBox 3">
             <a:extLst xmlns:a="http://schemas.openxmlformats.org/drawingml/2006/main">
               <a:ext uri="{FF2B5EF4-FFF2-40B4-BE49-F238E27FC236}">
-                <a16:creationId xmlns:a16="http://schemas.microsoft.com/office/drawing/2014/main" id="{AC73F67D-9335-4FE7-8C01-278199A99794}"/>
+                <a16:creationId xmlns:a16="http://schemas.microsoft.com/office/drawing/2014/main" id="{4ED8E926-CD03-4E78-8E90-6C3A99519DA8}"/>
               </a:ext>
             </a:extLst>
           </p:cNvPr>
@@ -25074,7 +25074,7 @@
           <p:cNvPr id="5" name="TextBox 4">
             <a:extLst xmlns:a="http://schemas.openxmlformats.org/drawingml/2006/main">
               <a:ext uri="{FF2B5EF4-FFF2-40B4-BE49-F238E27FC236}">
-                <a16:creationId xmlns:a16="http://schemas.microsoft.com/office/drawing/2014/main" id="{2FC32B1A-58BD-4D36-AED2-45254EB09839}"/>
+                <a16:creationId xmlns:a16="http://schemas.microsoft.com/office/drawing/2014/main" id="{AD19BFF5-431C-4226-9BF0-68260E98FFD5}"/>
               </a:ext>
             </a:extLst>
           </p:cNvPr>
@@ -25129,7 +25129,7 @@
           <p:cNvPr id="6" name="TextBox 5">
             <a:extLst xmlns:a="http://schemas.openxmlformats.org/drawingml/2006/main">
               <a:ext uri="{FF2B5EF4-FFF2-40B4-BE49-F238E27FC236}">
-                <a16:creationId xmlns:a16="http://schemas.microsoft.com/office/drawing/2014/main" id="{3CF18266-ABBE-4FAC-817E-283F13539320}"/>
+                <a16:creationId xmlns:a16="http://schemas.microsoft.com/office/drawing/2014/main" id="{284AD74C-051D-49F6-ADFC-C64D3A6C94E5}"/>
               </a:ext>
             </a:extLst>
           </p:cNvPr>
@@ -25268,7 +25268,7 @@
           <p:cNvPr id="7" name="Rectangle 6">
             <a:extLst xmlns:a="http://schemas.openxmlformats.org/drawingml/2006/main">
               <a:ext uri="{FF2B5EF4-FFF2-40B4-BE49-F238E27FC236}">
-                <a16:creationId xmlns:a16="http://schemas.microsoft.com/office/drawing/2014/main" id="{684C1857-5A88-49FD-B2BE-E465AA5F8093}"/>
+                <a16:creationId xmlns:a16="http://schemas.microsoft.com/office/drawing/2014/main" id="{D5482D18-FCB0-46A8-989B-F0E3894BCF9B}"/>
               </a:ext>
             </a:extLst>
           </p:cNvPr>
@@ -25321,7 +25321,7 @@
           <p:cNvPr id="8" name="Rectangle 7">
             <a:extLst xmlns:a="http://schemas.openxmlformats.org/drawingml/2006/main">
               <a:ext uri="{FF2B5EF4-FFF2-40B4-BE49-F238E27FC236}">
-                <a16:creationId xmlns:a16="http://schemas.microsoft.com/office/drawing/2014/main" id="{C8D66D76-492D-445A-A3D5-B3540AB7F78C}"/>
+                <a16:creationId xmlns:a16="http://schemas.microsoft.com/office/drawing/2014/main" id="{FB99F4BC-17BB-486D-A499-3D22388B6E07}"/>
               </a:ext>
             </a:extLst>
           </p:cNvPr>
@@ -25374,7 +25374,7 @@
           <p:cNvPr id="9" name="TextBox 8">
             <a:extLst xmlns:a="http://schemas.openxmlformats.org/drawingml/2006/main">
               <a:ext uri="{FF2B5EF4-FFF2-40B4-BE49-F238E27FC236}">
-                <a16:creationId xmlns:a16="http://schemas.microsoft.com/office/drawing/2014/main" id="{A5F0095F-4E95-462F-A420-C532C92AB4F3}"/>
+                <a16:creationId xmlns:a16="http://schemas.microsoft.com/office/drawing/2014/main" id="{8C3FC312-43B0-4535-95E0-7B6EBF78BF6C}"/>
               </a:ext>
             </a:extLst>
           </p:cNvPr>
@@ -25429,7 +25429,7 @@
           <p:cNvPr id="10" name="TextBox 9">
             <a:extLst xmlns:a="http://schemas.openxmlformats.org/drawingml/2006/main">
               <a:ext uri="{FF2B5EF4-FFF2-40B4-BE49-F238E27FC236}">
-                <a16:creationId xmlns:a16="http://schemas.microsoft.com/office/drawing/2014/main" id="{D794D625-08A1-4CCF-A1EA-AB8A741A892D}"/>
+                <a16:creationId xmlns:a16="http://schemas.microsoft.com/office/drawing/2014/main" id="{C46F2F48-60A9-4D3F-A479-F3AD8DAB12AF}"/>
               </a:ext>
             </a:extLst>
           </p:cNvPr>
@@ -25482,7 +25482,7 @@
     </p:spTree>
     <p:extLst>
       <p:ext uri="{BB962C8B-B14F-4D97-AF65-F5344CB8AC3E}">
-        <p14:creationId xmlns:p14="http://schemas.microsoft.com/office/powerpoint/2010/main" val="987106937"/>
+        <p14:creationId xmlns:p14="http://schemas.microsoft.com/office/powerpoint/2010/main" val="761408393"/>
       </p:ext>
     </p:extLst>
   </p:cSld>
@@ -25510,7 +25510,7 @@
           <p:nvPr/>
         </p:nvPicPr>
         <p:blipFill>
-          <a:blip xmlns:r="http://schemas.openxmlformats.org/officeDocument/2006/relationships" xmlns:a="http://schemas.openxmlformats.org/drawingml/2006/main" r:embed="R227da731e5aa440b"/>
+          <a:blip xmlns:r="http://schemas.openxmlformats.org/officeDocument/2006/relationships" xmlns:a="http://schemas.openxmlformats.org/drawingml/2006/main" r:embed="R0cd09ba38b994095"/>
           <a:stretch xmlns:a="http://schemas.openxmlformats.org/drawingml/2006/main">
             <a:fillRect l="0" t="0" r="0" b="0"/>
           </a:stretch>
@@ -25530,7 +25530,7 @@
           <p:cNvPr id="3" name="Rectangle 2">
             <a:extLst xmlns:a="http://schemas.openxmlformats.org/drawingml/2006/main">
               <a:ext uri="{FF2B5EF4-FFF2-40B4-BE49-F238E27FC236}">
-                <a16:creationId xmlns:a16="http://schemas.microsoft.com/office/drawing/2014/main" id="{651EB4FA-FBC4-4AC1-9ADB-A76729809842}"/>
+                <a16:creationId xmlns:a16="http://schemas.microsoft.com/office/drawing/2014/main" id="{C2D13FD1-55E1-4DC0-BED0-967B616143E8}"/>
               </a:ext>
             </a:extLst>
           </p:cNvPr>
@@ -25583,7 +25583,7 @@
           <p:cNvPr id="4" name="TextBox 3">
             <a:extLst xmlns:a="http://schemas.openxmlformats.org/drawingml/2006/main">
               <a:ext uri="{FF2B5EF4-FFF2-40B4-BE49-F238E27FC236}">
-                <a16:creationId xmlns:a16="http://schemas.microsoft.com/office/drawing/2014/main" id="{88EDA718-2D19-4310-9211-ECB7EF7DB977}"/>
+                <a16:creationId xmlns:a16="http://schemas.microsoft.com/office/drawing/2014/main" id="{541BDCA5-C181-4B52-BE8E-66B1EA9AC681}"/>
               </a:ext>
             </a:extLst>
           </p:cNvPr>
@@ -25638,7 +25638,7 @@
           <p:cNvPr id="5" name="TextBox 4">
             <a:extLst xmlns:a="http://schemas.openxmlformats.org/drawingml/2006/main">
               <a:ext uri="{FF2B5EF4-FFF2-40B4-BE49-F238E27FC236}">
-                <a16:creationId xmlns:a16="http://schemas.microsoft.com/office/drawing/2014/main" id="{4E69F658-E683-438F-BC8D-4D2D0AE83626}"/>
+                <a16:creationId xmlns:a16="http://schemas.microsoft.com/office/drawing/2014/main" id="{A898EC67-7B50-424C-98C7-375F845C2B71}"/>
               </a:ext>
             </a:extLst>
           </p:cNvPr>
@@ -26041,7 +26041,7 @@
           <p:cNvPr id="7" name="Rectangle 6">
             <a:extLst xmlns:a="http://schemas.openxmlformats.org/drawingml/2006/main">
               <a:ext uri="{FF2B5EF4-FFF2-40B4-BE49-F238E27FC236}">
-                <a16:creationId xmlns:a16="http://schemas.microsoft.com/office/drawing/2014/main" id="{2DF5C28D-8282-43A8-BA1B-2BE869FA774A}"/>
+                <a16:creationId xmlns:a16="http://schemas.microsoft.com/office/drawing/2014/main" id="{9F9F9DBD-B6E9-4730-838F-C2F78ACEB368}"/>
               </a:ext>
             </a:extLst>
           </p:cNvPr>
@@ -26094,7 +26094,7 @@
           <p:cNvPr id="8" name="Rectangle 7">
             <a:extLst xmlns:a="http://schemas.openxmlformats.org/drawingml/2006/main">
               <a:ext uri="{FF2B5EF4-FFF2-40B4-BE49-F238E27FC236}">
-                <a16:creationId xmlns:a16="http://schemas.microsoft.com/office/drawing/2014/main" id="{4EF3FC26-E9BA-4BA8-BA98-8411FAA30FE8}"/>
+                <a16:creationId xmlns:a16="http://schemas.microsoft.com/office/drawing/2014/main" id="{4826B05E-9242-46F5-9FB1-060D8677FE82}"/>
               </a:ext>
             </a:extLst>
           </p:cNvPr>
@@ -26147,7 +26147,7 @@
           <p:cNvPr id="9" name="TextBox 8">
             <a:extLst xmlns:a="http://schemas.openxmlformats.org/drawingml/2006/main">
               <a:ext uri="{FF2B5EF4-FFF2-40B4-BE49-F238E27FC236}">
-                <a16:creationId xmlns:a16="http://schemas.microsoft.com/office/drawing/2014/main" id="{1D0E3DE6-AE10-4428-9C1E-4F67B9BEDF04}"/>
+                <a16:creationId xmlns:a16="http://schemas.microsoft.com/office/drawing/2014/main" id="{9935F6D3-EA27-42D3-9900-12F53EEB5457}"/>
               </a:ext>
             </a:extLst>
           </p:cNvPr>
@@ -26202,7 +26202,7 @@
           <p:cNvPr id="10" name="TextBox 9">
             <a:extLst xmlns:a="http://schemas.openxmlformats.org/drawingml/2006/main">
               <a:ext uri="{FF2B5EF4-FFF2-40B4-BE49-F238E27FC236}">
-                <a16:creationId xmlns:a16="http://schemas.microsoft.com/office/drawing/2014/main" id="{C13ACB85-61DE-46C5-9B6D-BE1C73772500}"/>
+                <a16:creationId xmlns:a16="http://schemas.microsoft.com/office/drawing/2014/main" id="{F6EEF3F9-0120-4C3B-9741-1660B3D437BF}"/>
               </a:ext>
             </a:extLst>
           </p:cNvPr>
@@ -26255,7 +26255,7 @@
     </p:spTree>
     <p:extLst>
       <p:ext uri="{BB962C8B-B14F-4D97-AF65-F5344CB8AC3E}">
-        <p14:creationId xmlns:p14="http://schemas.microsoft.com/office/powerpoint/2010/main" val="981200571"/>
+        <p14:creationId xmlns:p14="http://schemas.microsoft.com/office/powerpoint/2010/main" val="564019717"/>
       </p:ext>
     </p:extLst>
   </p:cSld>
@@ -26283,7 +26283,7 @@
           <p:nvPr/>
         </p:nvPicPr>
         <p:blipFill>
-          <a:blip xmlns:r="http://schemas.openxmlformats.org/officeDocument/2006/relationships" xmlns:a="http://schemas.openxmlformats.org/drawingml/2006/main" r:embed="R57c96eb077de4f23"/>
+          <a:blip xmlns:r="http://schemas.openxmlformats.org/officeDocument/2006/relationships" xmlns:a="http://schemas.openxmlformats.org/drawingml/2006/main" r:embed="R6e18984fec0c4881"/>
           <a:stretch xmlns:a="http://schemas.openxmlformats.org/drawingml/2006/main">
             <a:fillRect l="0" t="0" r="0" b="0"/>
           </a:stretch>
@@ -26303,7 +26303,7 @@
           <p:cNvPr id="3" name="Rectangle 2">
             <a:extLst xmlns:a="http://schemas.openxmlformats.org/drawingml/2006/main">
               <a:ext uri="{FF2B5EF4-FFF2-40B4-BE49-F238E27FC236}">
-                <a16:creationId xmlns:a16="http://schemas.microsoft.com/office/drawing/2014/main" id="{F6B664A5-A938-4F43-9933-0D634EC08F7C}"/>
+                <a16:creationId xmlns:a16="http://schemas.microsoft.com/office/drawing/2014/main" id="{76C22985-8F55-45F6-904D-89A7811176BC}"/>
               </a:ext>
             </a:extLst>
           </p:cNvPr>
@@ -26356,7 +26356,7 @@
           <p:cNvPr id="4" name="TextBox 3">
             <a:extLst xmlns:a="http://schemas.openxmlformats.org/drawingml/2006/main">
               <a:ext uri="{FF2B5EF4-FFF2-40B4-BE49-F238E27FC236}">
-                <a16:creationId xmlns:a16="http://schemas.microsoft.com/office/drawing/2014/main" id="{83141588-7A1A-4F4A-8BC7-D56229350C02}"/>
+                <a16:creationId xmlns:a16="http://schemas.microsoft.com/office/drawing/2014/main" id="{C84D91E4-E40E-4D23-B0A9-DDBCBF042603}"/>
               </a:ext>
             </a:extLst>
           </p:cNvPr>
@@ -26411,7 +26411,7 @@
           <p:cNvPr id="5" name="TextBox 4">
             <a:extLst xmlns:a="http://schemas.openxmlformats.org/drawingml/2006/main">
               <a:ext uri="{FF2B5EF4-FFF2-40B4-BE49-F238E27FC236}">
-                <a16:creationId xmlns:a16="http://schemas.microsoft.com/office/drawing/2014/main" id="{A947F2A7-D3A9-4058-A3E0-3B63D56BEB7D}"/>
+                <a16:creationId xmlns:a16="http://schemas.microsoft.com/office/drawing/2014/main" id="{04DE5228-11C7-4696-B7C2-29B6A7CDEDD7}"/>
               </a:ext>
             </a:extLst>
           </p:cNvPr>
@@ -26814,7 +26814,7 @@
           <p:cNvPr id="7" name="Rectangle 6">
             <a:extLst xmlns:a="http://schemas.openxmlformats.org/drawingml/2006/main">
               <a:ext uri="{FF2B5EF4-FFF2-40B4-BE49-F238E27FC236}">
-                <a16:creationId xmlns:a16="http://schemas.microsoft.com/office/drawing/2014/main" id="{ECCF816C-84D2-436B-A8D8-DE24DD44ECB1}"/>
+                <a16:creationId xmlns:a16="http://schemas.microsoft.com/office/drawing/2014/main" id="{5C804B7C-579F-4D83-A2D7-48987DF50440}"/>
               </a:ext>
             </a:extLst>
           </p:cNvPr>
@@ -26867,7 +26867,7 @@
           <p:cNvPr id="8" name="Rectangle 7">
             <a:extLst xmlns:a="http://schemas.openxmlformats.org/drawingml/2006/main">
               <a:ext uri="{FF2B5EF4-FFF2-40B4-BE49-F238E27FC236}">
-                <a16:creationId xmlns:a16="http://schemas.microsoft.com/office/drawing/2014/main" id="{7685260B-250A-4971-8E81-259C65F53A3E}"/>
+                <a16:creationId xmlns:a16="http://schemas.microsoft.com/office/drawing/2014/main" id="{6022EEEB-41BC-488B-947D-BB091FBAEEE8}"/>
               </a:ext>
             </a:extLst>
           </p:cNvPr>
@@ -26920,7 +26920,7 @@
           <p:cNvPr id="9" name="TextBox 8">
             <a:extLst xmlns:a="http://schemas.openxmlformats.org/drawingml/2006/main">
               <a:ext uri="{FF2B5EF4-FFF2-40B4-BE49-F238E27FC236}">
-                <a16:creationId xmlns:a16="http://schemas.microsoft.com/office/drawing/2014/main" id="{027F0123-0517-4A2F-ADF1-1AFB7C4FF83D}"/>
+                <a16:creationId xmlns:a16="http://schemas.microsoft.com/office/drawing/2014/main" id="{34DC89EA-684E-4422-BEBA-196646D5C896}"/>
               </a:ext>
             </a:extLst>
           </p:cNvPr>
@@ -26975,7 +26975,7 @@
           <p:cNvPr id="10" name="TextBox 9">
             <a:extLst xmlns:a="http://schemas.openxmlformats.org/drawingml/2006/main">
               <a:ext uri="{FF2B5EF4-FFF2-40B4-BE49-F238E27FC236}">
-                <a16:creationId xmlns:a16="http://schemas.microsoft.com/office/drawing/2014/main" id="{F09B0811-F7FA-43D2-AA17-E50863051822}"/>
+                <a16:creationId xmlns:a16="http://schemas.microsoft.com/office/drawing/2014/main" id="{0EBB81E6-6218-4F48-AFF0-8153EEA5B727}"/>
               </a:ext>
             </a:extLst>
           </p:cNvPr>
@@ -27028,7 +27028,7 @@
     </p:spTree>
     <p:extLst>
       <p:ext uri="{BB962C8B-B14F-4D97-AF65-F5344CB8AC3E}">
-        <p14:creationId xmlns:p14="http://schemas.microsoft.com/office/powerpoint/2010/main" val="671907920"/>
+        <p14:creationId xmlns:p14="http://schemas.microsoft.com/office/powerpoint/2010/main" val="1363991994"/>
       </p:ext>
     </p:extLst>
   </p:cSld>
@@ -27052,7 +27052,7 @@
           <p:cNvPr id="2" name="Rectangle 1">
             <a:extLst xmlns:a="http://schemas.openxmlformats.org/drawingml/2006/main">
               <a:ext uri="{FF2B5EF4-FFF2-40B4-BE49-F238E27FC236}">
-                <a16:creationId xmlns:a16="http://schemas.microsoft.com/office/drawing/2014/main" id="{4E315B6D-2903-497D-8D47-89B2DF94A5DB}"/>
+                <a16:creationId xmlns:a16="http://schemas.microsoft.com/office/drawing/2014/main" id="{FAAE1AF0-0825-4C1D-9F11-530B4A035D18}"/>
               </a:ext>
             </a:extLst>
           </p:cNvPr>
@@ -27105,7 +27105,7 @@
           <p:cNvPr id="3" name="TextBox 2">
             <a:extLst xmlns:a="http://schemas.openxmlformats.org/drawingml/2006/main">
               <a:ext uri="{FF2B5EF4-FFF2-40B4-BE49-F238E27FC236}">
-                <a16:creationId xmlns:a16="http://schemas.microsoft.com/office/drawing/2014/main" id="{C5264DDC-8205-4245-A469-81A154C79506}"/>
+                <a16:creationId xmlns:a16="http://schemas.microsoft.com/office/drawing/2014/main" id="{12CDBEC4-3781-4D24-9FEE-79D64BAEF740}"/>
               </a:ext>
             </a:extLst>
           </p:cNvPr>
@@ -27160,7 +27160,7 @@
           <p:cNvPr id="4" name="TextBox 3">
             <a:extLst xmlns:a="http://schemas.openxmlformats.org/drawingml/2006/main">
               <a:ext uri="{FF2B5EF4-FFF2-40B4-BE49-F238E27FC236}">
-                <a16:creationId xmlns:a16="http://schemas.microsoft.com/office/drawing/2014/main" id="{24B477E8-71DC-459B-A25B-092A1F817518}"/>
+                <a16:creationId xmlns:a16="http://schemas.microsoft.com/office/drawing/2014/main" id="{C6109964-F7B5-488F-9AD6-3C368676DDB5}"/>
               </a:ext>
             </a:extLst>
           </p:cNvPr>
@@ -27190,14 +27190,14 @@
                 <a:spcPct val="110000"/>
               </a:lnSpc>
               <a:buNone/>
-              <a:defRPr sz="2000">
+              <a:defRPr sz="1400">
                 <a:latin typeface="Arial"/>
                 <a:ea typeface="Arial"/>
                 <a:cs typeface="Arial"/>
               </a:defRPr>
             </a:pPr>
             <a:r>
-              <a:rPr sz="2000" b="1" i="0">
+              <a:rPr sz="1400" b="1" i="0">
                 <a:solidFill>
                   <a:srgbClr val="FFFFFF"/>
                 </a:solidFill>
@@ -27215,7 +27215,7 @@
           <p:cNvPr id="5" name="TextBox 4">
             <a:extLst xmlns:a="http://schemas.openxmlformats.org/drawingml/2006/main">
               <a:ext uri="{FF2B5EF4-FFF2-40B4-BE49-F238E27FC236}">
-                <a16:creationId xmlns:a16="http://schemas.microsoft.com/office/drawing/2014/main" id="{EDD77EA7-4627-4395-AAC0-9D335ED31309}"/>
+                <a16:creationId xmlns:a16="http://schemas.microsoft.com/office/drawing/2014/main" id="{0C3A2EED-A00F-46CE-AF11-102C23270758}"/>
               </a:ext>
             </a:extLst>
           </p:cNvPr>
@@ -27270,7 +27270,7 @@
           <p:cNvPr id="6" name="Rectangle 5">
             <a:extLst xmlns:a="http://schemas.openxmlformats.org/drawingml/2006/main">
               <a:ext uri="{FF2B5EF4-FFF2-40B4-BE49-F238E27FC236}">
-                <a16:creationId xmlns:a16="http://schemas.microsoft.com/office/drawing/2014/main" id="{51F7F49F-0A25-41D0-ACF4-236AE5D88DEB}"/>
+                <a16:creationId xmlns:a16="http://schemas.microsoft.com/office/drawing/2014/main" id="{8B255386-5EA7-475D-88CE-77646EC78E17}"/>
               </a:ext>
             </a:extLst>
           </p:cNvPr>
@@ -27321,7 +27321,7 @@
     </p:spTree>
     <p:extLst>
       <p:ext uri="{BB962C8B-B14F-4D97-AF65-F5344CB8AC3E}">
-        <p14:creationId xmlns:p14="http://schemas.microsoft.com/office/powerpoint/2010/main" val="1378190464"/>
+        <p14:creationId xmlns:p14="http://schemas.microsoft.com/office/powerpoint/2010/main" val="444243925"/>
       </p:ext>
     </p:extLst>
   </p:cSld>
@@ -27349,7 +27349,7 @@
           <p:nvPr/>
         </p:nvPicPr>
         <p:blipFill>
-          <a:blip xmlns:r="http://schemas.openxmlformats.org/officeDocument/2006/relationships" xmlns:a="http://schemas.openxmlformats.org/drawingml/2006/main" r:embed="R9d1ed80008ad43d3"/>
+          <a:blip xmlns:r="http://schemas.openxmlformats.org/officeDocument/2006/relationships" xmlns:a="http://schemas.openxmlformats.org/drawingml/2006/main" r:embed="R0a8efe93321d47db"/>
           <a:stretch xmlns:a="http://schemas.openxmlformats.org/drawingml/2006/main">
             <a:fillRect l="0" t="0" r="0" b="0"/>
           </a:stretch>
@@ -27369,7 +27369,7 @@
           <p:cNvPr id="3" name="Rectangle 2">
             <a:extLst xmlns:a="http://schemas.openxmlformats.org/drawingml/2006/main">
               <a:ext uri="{FF2B5EF4-FFF2-40B4-BE49-F238E27FC236}">
-                <a16:creationId xmlns:a16="http://schemas.microsoft.com/office/drawing/2014/main" id="{8F0E341D-2AA2-4330-B879-049474354F44}"/>
+                <a16:creationId xmlns:a16="http://schemas.microsoft.com/office/drawing/2014/main" id="{FAA34A0F-96E7-4C2A-A520-76F6BA5D7148}"/>
               </a:ext>
             </a:extLst>
           </p:cNvPr>
@@ -27422,7 +27422,7 @@
           <p:cNvPr id="4" name="TextBox 3">
             <a:extLst xmlns:a="http://schemas.openxmlformats.org/drawingml/2006/main">
               <a:ext uri="{FF2B5EF4-FFF2-40B4-BE49-F238E27FC236}">
-                <a16:creationId xmlns:a16="http://schemas.microsoft.com/office/drawing/2014/main" id="{355F480D-E98C-4831-A2B9-49F8D5562C93}"/>
+                <a16:creationId xmlns:a16="http://schemas.microsoft.com/office/drawing/2014/main" id="{2B76E45C-5196-492A-88CD-9CCC4BB3C664}"/>
               </a:ext>
             </a:extLst>
           </p:cNvPr>
@@ -27477,7 +27477,7 @@
           <p:cNvPr id="5" name="TextBox 4">
             <a:extLst xmlns:a="http://schemas.openxmlformats.org/drawingml/2006/main">
               <a:ext uri="{FF2B5EF4-FFF2-40B4-BE49-F238E27FC236}">
-                <a16:creationId xmlns:a16="http://schemas.microsoft.com/office/drawing/2014/main" id="{FD5F4374-6E45-4151-A47D-7151D26B23B4}"/>
+                <a16:creationId xmlns:a16="http://schemas.microsoft.com/office/drawing/2014/main" id="{12B03CE6-CF17-4479-8C57-3CAE52D1A5A5}"/>
               </a:ext>
             </a:extLst>
           </p:cNvPr>
@@ -28150,7 +28150,7 @@
           <p:cNvPr id="7" name="Rectangle 6">
             <a:extLst xmlns:a="http://schemas.openxmlformats.org/drawingml/2006/main">
               <a:ext uri="{FF2B5EF4-FFF2-40B4-BE49-F238E27FC236}">
-                <a16:creationId xmlns:a16="http://schemas.microsoft.com/office/drawing/2014/main" id="{EAD912AA-87AF-4F30-8C44-3A3F5880BEBA}"/>
+                <a16:creationId xmlns:a16="http://schemas.microsoft.com/office/drawing/2014/main" id="{8C5BBBC4-4B7B-4682-905E-5FB83F60DE17}"/>
               </a:ext>
             </a:extLst>
           </p:cNvPr>
@@ -28203,7 +28203,7 @@
           <p:cNvPr id="8" name="Rectangle 7">
             <a:extLst xmlns:a="http://schemas.openxmlformats.org/drawingml/2006/main">
               <a:ext uri="{FF2B5EF4-FFF2-40B4-BE49-F238E27FC236}">
-                <a16:creationId xmlns:a16="http://schemas.microsoft.com/office/drawing/2014/main" id="{FD0E2F2A-E07A-4301-8484-FD8D74EE6BB0}"/>
+                <a16:creationId xmlns:a16="http://schemas.microsoft.com/office/drawing/2014/main" id="{F095A1D5-34F2-4065-AABA-A5CC4B6B3116}"/>
               </a:ext>
             </a:extLst>
           </p:cNvPr>
@@ -28256,7 +28256,7 @@
           <p:cNvPr id="9" name="TextBox 8">
             <a:extLst xmlns:a="http://schemas.openxmlformats.org/drawingml/2006/main">
               <a:ext uri="{FF2B5EF4-FFF2-40B4-BE49-F238E27FC236}">
-                <a16:creationId xmlns:a16="http://schemas.microsoft.com/office/drawing/2014/main" id="{E840740A-2FEB-40C3-BC19-6E761C66A4E2}"/>
+                <a16:creationId xmlns:a16="http://schemas.microsoft.com/office/drawing/2014/main" id="{1D985A45-404B-4F7E-9E9E-36D07317D788}"/>
               </a:ext>
             </a:extLst>
           </p:cNvPr>
@@ -28311,7 +28311,7 @@
           <p:cNvPr id="10" name="TextBox 9">
             <a:extLst xmlns:a="http://schemas.openxmlformats.org/drawingml/2006/main">
               <a:ext uri="{FF2B5EF4-FFF2-40B4-BE49-F238E27FC236}">
-                <a16:creationId xmlns:a16="http://schemas.microsoft.com/office/drawing/2014/main" id="{8FEA6A4A-A4B3-4E8B-BDDD-0675D29E35A3}"/>
+                <a16:creationId xmlns:a16="http://schemas.microsoft.com/office/drawing/2014/main" id="{F8FA2250-E2F7-4E69-B951-7F522A89650E}"/>
               </a:ext>
             </a:extLst>
           </p:cNvPr>
@@ -28364,7 +28364,7 @@
     </p:spTree>
     <p:extLst>
       <p:ext uri="{BB962C8B-B14F-4D97-AF65-F5344CB8AC3E}">
-        <p14:creationId xmlns:p14="http://schemas.microsoft.com/office/powerpoint/2010/main" val="753041069"/>
+        <p14:creationId xmlns:p14="http://schemas.microsoft.com/office/powerpoint/2010/main" val="395395769"/>
       </p:ext>
     </p:extLst>
   </p:cSld>
@@ -28392,7 +28392,7 @@
           <p:nvPr/>
         </p:nvPicPr>
         <p:blipFill>
-          <a:blip xmlns:r="http://schemas.openxmlformats.org/officeDocument/2006/relationships" xmlns:a="http://schemas.openxmlformats.org/drawingml/2006/main" r:embed="R471fd59d30c044c0"/>
+          <a:blip xmlns:r="http://schemas.openxmlformats.org/officeDocument/2006/relationships" xmlns:a="http://schemas.openxmlformats.org/drawingml/2006/main" r:embed="Rc99aecb1be504386"/>
           <a:stretch xmlns:a="http://schemas.openxmlformats.org/drawingml/2006/main">
             <a:fillRect l="0" t="0" r="0" b="0"/>
           </a:stretch>
@@ -28412,7 +28412,7 @@
           <p:cNvPr id="3" name="Rectangle 2">
             <a:extLst xmlns:a="http://schemas.openxmlformats.org/drawingml/2006/main">
               <a:ext uri="{FF2B5EF4-FFF2-40B4-BE49-F238E27FC236}">
-                <a16:creationId xmlns:a16="http://schemas.microsoft.com/office/drawing/2014/main" id="{EBB48588-6471-4F50-A5CD-11F7AEC1E4EE}"/>
+                <a16:creationId xmlns:a16="http://schemas.microsoft.com/office/drawing/2014/main" id="{1C58E5EE-072B-433B-95D4-02CD07FE4E3E}"/>
               </a:ext>
             </a:extLst>
           </p:cNvPr>
@@ -28465,7 +28465,7 @@
           <p:cNvPr id="4" name="TextBox 3">
             <a:extLst xmlns:a="http://schemas.openxmlformats.org/drawingml/2006/main">
               <a:ext uri="{FF2B5EF4-FFF2-40B4-BE49-F238E27FC236}">
-                <a16:creationId xmlns:a16="http://schemas.microsoft.com/office/drawing/2014/main" id="{4015328C-F398-4BF5-87DE-D1C478EE5779}"/>
+                <a16:creationId xmlns:a16="http://schemas.microsoft.com/office/drawing/2014/main" id="{C6B2A8D9-00E7-458D-BFB0-8AAAF858FE04}"/>
               </a:ext>
             </a:extLst>
           </p:cNvPr>
@@ -28520,7 +28520,7 @@
           <p:cNvPr id="5" name="TextBox 4">
             <a:extLst xmlns:a="http://schemas.openxmlformats.org/drawingml/2006/main">
               <a:ext uri="{FF2B5EF4-FFF2-40B4-BE49-F238E27FC236}">
-                <a16:creationId xmlns:a16="http://schemas.microsoft.com/office/drawing/2014/main" id="{D49429F5-D01D-42E7-9191-F89D676A1D0A}"/>
+                <a16:creationId xmlns:a16="http://schemas.microsoft.com/office/drawing/2014/main" id="{E09EFC4C-26C0-4757-A5C0-E470672775A4}"/>
               </a:ext>
             </a:extLst>
           </p:cNvPr>
@@ -28575,7 +28575,7 @@
           <p:cNvPr id="6" name="TextBox 5">
             <a:extLst xmlns:a="http://schemas.openxmlformats.org/drawingml/2006/main">
               <a:ext uri="{FF2B5EF4-FFF2-40B4-BE49-F238E27FC236}">
-                <a16:creationId xmlns:a16="http://schemas.microsoft.com/office/drawing/2014/main" id="{556871E9-2997-4353-9C76-71E5A64606A7}"/>
+                <a16:creationId xmlns:a16="http://schemas.microsoft.com/office/drawing/2014/main" id="{7D75459E-D89C-4981-A13E-CBE9DAAA7651}"/>
               </a:ext>
             </a:extLst>
           </p:cNvPr>
@@ -28714,7 +28714,7 @@
           <p:cNvPr id="7" name="Rectangle 6">
             <a:extLst xmlns:a="http://schemas.openxmlformats.org/drawingml/2006/main">
               <a:ext uri="{FF2B5EF4-FFF2-40B4-BE49-F238E27FC236}">
-                <a16:creationId xmlns:a16="http://schemas.microsoft.com/office/drawing/2014/main" id="{B17C7D69-FBA2-4EB8-907D-7B6CACF12FE0}"/>
+                <a16:creationId xmlns:a16="http://schemas.microsoft.com/office/drawing/2014/main" id="{4F013372-BED1-4F6B-ACAB-0921B23BB846}"/>
               </a:ext>
             </a:extLst>
           </p:cNvPr>
@@ -28767,7 +28767,7 @@
           <p:cNvPr id="8" name="Rectangle 7">
             <a:extLst xmlns:a="http://schemas.openxmlformats.org/drawingml/2006/main">
               <a:ext uri="{FF2B5EF4-FFF2-40B4-BE49-F238E27FC236}">
-                <a16:creationId xmlns:a16="http://schemas.microsoft.com/office/drawing/2014/main" id="{74BFFE95-086F-4807-8EFD-AD8EAC50EBFC}"/>
+                <a16:creationId xmlns:a16="http://schemas.microsoft.com/office/drawing/2014/main" id="{1CD6A34B-B909-4D41-AE91-1DA1C5C85CF8}"/>
               </a:ext>
             </a:extLst>
           </p:cNvPr>
@@ -28820,7 +28820,7 @@
           <p:cNvPr id="9" name="TextBox 8">
             <a:extLst xmlns:a="http://schemas.openxmlformats.org/drawingml/2006/main">
               <a:ext uri="{FF2B5EF4-FFF2-40B4-BE49-F238E27FC236}">
-                <a16:creationId xmlns:a16="http://schemas.microsoft.com/office/drawing/2014/main" id="{44AB5AC7-E820-4D1E-9181-A730035D29CE}"/>
+                <a16:creationId xmlns:a16="http://schemas.microsoft.com/office/drawing/2014/main" id="{0EF01561-240A-49AA-98DD-499E6099EA72}"/>
               </a:ext>
             </a:extLst>
           </p:cNvPr>
@@ -28875,7 +28875,7 @@
           <p:cNvPr id="10" name="TextBox 9">
             <a:extLst xmlns:a="http://schemas.openxmlformats.org/drawingml/2006/main">
               <a:ext uri="{FF2B5EF4-FFF2-40B4-BE49-F238E27FC236}">
-                <a16:creationId xmlns:a16="http://schemas.microsoft.com/office/drawing/2014/main" id="{258C81BD-F34A-482A-9253-EC4AD0CD0806}"/>
+                <a16:creationId xmlns:a16="http://schemas.microsoft.com/office/drawing/2014/main" id="{977D5EBA-E523-4A89-8A80-45D89551694C}"/>
               </a:ext>
             </a:extLst>
           </p:cNvPr>
@@ -28928,7 +28928,7 @@
     </p:spTree>
     <p:extLst>
       <p:ext uri="{BB962C8B-B14F-4D97-AF65-F5344CB8AC3E}">
-        <p14:creationId xmlns:p14="http://schemas.microsoft.com/office/powerpoint/2010/main" val="467484617"/>
+        <p14:creationId xmlns:p14="http://schemas.microsoft.com/office/powerpoint/2010/main" val="1151682962"/>
       </p:ext>
     </p:extLst>
   </p:cSld>
@@ -28956,7 +28956,7 @@
           <p:nvPr/>
         </p:nvPicPr>
         <p:blipFill>
-          <a:blip xmlns:r="http://schemas.openxmlformats.org/officeDocument/2006/relationships" xmlns:a="http://schemas.openxmlformats.org/drawingml/2006/main" r:embed="R3d4ace7a52e343e0"/>
+          <a:blip xmlns:r="http://schemas.openxmlformats.org/officeDocument/2006/relationships" xmlns:a="http://schemas.openxmlformats.org/drawingml/2006/main" r:embed="R221e891a84c94baf"/>
           <a:stretch xmlns:a="http://schemas.openxmlformats.org/drawingml/2006/main">
             <a:fillRect l="0" t="0" r="0" b="0"/>
           </a:stretch>
@@ -28976,7 +28976,7 @@
           <p:cNvPr id="3" name="Rectangle 2">
             <a:extLst xmlns:a="http://schemas.openxmlformats.org/drawingml/2006/main">
               <a:ext uri="{FF2B5EF4-FFF2-40B4-BE49-F238E27FC236}">
-                <a16:creationId xmlns:a16="http://schemas.microsoft.com/office/drawing/2014/main" id="{61229D59-4F12-4981-8A8A-D3A06DABAD1A}"/>
+                <a16:creationId xmlns:a16="http://schemas.microsoft.com/office/drawing/2014/main" id="{C5675AB7-BC21-458B-B038-66A983ACD70B}"/>
               </a:ext>
             </a:extLst>
           </p:cNvPr>
@@ -29029,7 +29029,7 @@
           <p:cNvPr id="4" name="TextBox 3">
             <a:extLst xmlns:a="http://schemas.openxmlformats.org/drawingml/2006/main">
               <a:ext uri="{FF2B5EF4-FFF2-40B4-BE49-F238E27FC236}">
-                <a16:creationId xmlns:a16="http://schemas.microsoft.com/office/drawing/2014/main" id="{F756DE97-6D3E-445E-B43A-3D4D8F963097}"/>
+                <a16:creationId xmlns:a16="http://schemas.microsoft.com/office/drawing/2014/main" id="{D3D94298-CE89-4235-8213-DAF1358563DF}"/>
               </a:ext>
             </a:extLst>
           </p:cNvPr>
@@ -29084,7 +29084,7 @@
           <p:cNvPr id="5" name="TextBox 4">
             <a:extLst xmlns:a="http://schemas.openxmlformats.org/drawingml/2006/main">
               <a:ext uri="{FF2B5EF4-FFF2-40B4-BE49-F238E27FC236}">
-                <a16:creationId xmlns:a16="http://schemas.microsoft.com/office/drawing/2014/main" id="{CB90B0E4-1B2C-4C9E-8B54-D94E90BF0E12}"/>
+                <a16:creationId xmlns:a16="http://schemas.microsoft.com/office/drawing/2014/main" id="{5576A522-0E14-4A4A-BDAA-1FEFB97ECF10}"/>
               </a:ext>
             </a:extLst>
           </p:cNvPr>
@@ -29649,7 +29649,7 @@
           <p:cNvPr id="7" name="Rectangle 6">
             <a:extLst xmlns:a="http://schemas.openxmlformats.org/drawingml/2006/main">
               <a:ext uri="{FF2B5EF4-FFF2-40B4-BE49-F238E27FC236}">
-                <a16:creationId xmlns:a16="http://schemas.microsoft.com/office/drawing/2014/main" id="{589D8FAF-F426-4A95-96C6-F611E764A01A}"/>
+                <a16:creationId xmlns:a16="http://schemas.microsoft.com/office/drawing/2014/main" id="{C3F68338-11A9-4C64-8EBD-A97ED79CD314}"/>
               </a:ext>
             </a:extLst>
           </p:cNvPr>
@@ -29702,7 +29702,7 @@
           <p:cNvPr id="8" name="Rectangle 7">
             <a:extLst xmlns:a="http://schemas.openxmlformats.org/drawingml/2006/main">
               <a:ext uri="{FF2B5EF4-FFF2-40B4-BE49-F238E27FC236}">
-                <a16:creationId xmlns:a16="http://schemas.microsoft.com/office/drawing/2014/main" id="{7552C34D-D709-4EA3-AF1D-AB8E03B5F333}"/>
+                <a16:creationId xmlns:a16="http://schemas.microsoft.com/office/drawing/2014/main" id="{69D18A1F-7388-4497-8F65-7D9C10A7B664}"/>
               </a:ext>
             </a:extLst>
           </p:cNvPr>
@@ -29755,7 +29755,7 @@
           <p:cNvPr id="9" name="TextBox 8">
             <a:extLst xmlns:a="http://schemas.openxmlformats.org/drawingml/2006/main">
               <a:ext uri="{FF2B5EF4-FFF2-40B4-BE49-F238E27FC236}">
-                <a16:creationId xmlns:a16="http://schemas.microsoft.com/office/drawing/2014/main" id="{A4A142D0-1A1D-4521-8410-366E2F052D7F}"/>
+                <a16:creationId xmlns:a16="http://schemas.microsoft.com/office/drawing/2014/main" id="{BB5DAC8D-96B5-4EE9-9D16-994F20980625}"/>
               </a:ext>
             </a:extLst>
           </p:cNvPr>
@@ -29810,7 +29810,7 @@
           <p:cNvPr id="10" name="TextBox 9">
             <a:extLst xmlns:a="http://schemas.openxmlformats.org/drawingml/2006/main">
               <a:ext uri="{FF2B5EF4-FFF2-40B4-BE49-F238E27FC236}">
-                <a16:creationId xmlns:a16="http://schemas.microsoft.com/office/drawing/2014/main" id="{CC4FE428-B5F0-4929-8799-15832395A110}"/>
+                <a16:creationId xmlns:a16="http://schemas.microsoft.com/office/drawing/2014/main" id="{1BE5F7BE-8619-458D-BE7B-E727A9A3302F}"/>
               </a:ext>
             </a:extLst>
           </p:cNvPr>
@@ -29863,7 +29863,7 @@
     </p:spTree>
     <p:extLst>
       <p:ext uri="{BB962C8B-B14F-4D97-AF65-F5344CB8AC3E}">
-        <p14:creationId xmlns:p14="http://schemas.microsoft.com/office/powerpoint/2010/main" val="303406922"/>
+        <p14:creationId xmlns:p14="http://schemas.microsoft.com/office/powerpoint/2010/main" val="623482091"/>
       </p:ext>
     </p:extLst>
   </p:cSld>
@@ -29891,7 +29891,7 @@
           <p:nvPr/>
         </p:nvPicPr>
         <p:blipFill>
-          <a:blip xmlns:r="http://schemas.openxmlformats.org/officeDocument/2006/relationships" xmlns:a="http://schemas.openxmlformats.org/drawingml/2006/main" r:embed="Rf6b1006898994134"/>
+          <a:blip xmlns:r="http://schemas.openxmlformats.org/officeDocument/2006/relationships" xmlns:a="http://schemas.openxmlformats.org/drawingml/2006/main" r:embed="R834ffe8864bf464c"/>
           <a:stretch xmlns:a="http://schemas.openxmlformats.org/drawingml/2006/main">
             <a:fillRect l="0" t="0" r="0" b="0"/>
           </a:stretch>
@@ -29911,7 +29911,7 @@
           <p:cNvPr id="3" name="Rectangle 2">
             <a:extLst xmlns:a="http://schemas.openxmlformats.org/drawingml/2006/main">
               <a:ext uri="{FF2B5EF4-FFF2-40B4-BE49-F238E27FC236}">
-                <a16:creationId xmlns:a16="http://schemas.microsoft.com/office/drawing/2014/main" id="{5D830749-3932-40E1-BB28-C367189941AF}"/>
+                <a16:creationId xmlns:a16="http://schemas.microsoft.com/office/drawing/2014/main" id="{D4739A57-A6B9-480C-8C7F-7F8DD5E92095}"/>
               </a:ext>
             </a:extLst>
           </p:cNvPr>
@@ -29964,7 +29964,7 @@
           <p:cNvPr id="4" name="TextBox 3">
             <a:extLst xmlns:a="http://schemas.openxmlformats.org/drawingml/2006/main">
               <a:ext uri="{FF2B5EF4-FFF2-40B4-BE49-F238E27FC236}">
-                <a16:creationId xmlns:a16="http://schemas.microsoft.com/office/drawing/2014/main" id="{EC0FA028-559E-4030-9C95-6190E18FF954}"/>
+                <a16:creationId xmlns:a16="http://schemas.microsoft.com/office/drawing/2014/main" id="{9D28D98B-C4F7-474B-A7F6-D41D3D8EA802}"/>
               </a:ext>
             </a:extLst>
           </p:cNvPr>
@@ -30019,7 +30019,7 @@
           <p:cNvPr id="5" name="TextBox 4">
             <a:extLst xmlns:a="http://schemas.openxmlformats.org/drawingml/2006/main">
               <a:ext uri="{FF2B5EF4-FFF2-40B4-BE49-F238E27FC236}">
-                <a16:creationId xmlns:a16="http://schemas.microsoft.com/office/drawing/2014/main" id="{1C0257B7-CF60-4ADA-A654-26879221F8A9}"/>
+                <a16:creationId xmlns:a16="http://schemas.microsoft.com/office/drawing/2014/main" id="{4E69E8C1-F842-4AEE-AE58-16F335CBE9F5}"/>
               </a:ext>
             </a:extLst>
           </p:cNvPr>
@@ -30074,7 +30074,7 @@
           <p:cNvPr id="6" name="TextBox 5">
             <a:extLst xmlns:a="http://schemas.openxmlformats.org/drawingml/2006/main">
               <a:ext uri="{FF2B5EF4-FFF2-40B4-BE49-F238E27FC236}">
-                <a16:creationId xmlns:a16="http://schemas.microsoft.com/office/drawing/2014/main" id="{15DB1AE9-F26E-4C82-A032-52D64CE425C9}"/>
+                <a16:creationId xmlns:a16="http://schemas.microsoft.com/office/drawing/2014/main" id="{501AB750-9737-4D17-AF0D-0B5AEA3A8E00}"/>
               </a:ext>
             </a:extLst>
           </p:cNvPr>
@@ -30213,7 +30213,7 @@
           <p:cNvPr id="7" name="Rectangle 6">
             <a:extLst xmlns:a="http://schemas.openxmlformats.org/drawingml/2006/main">
               <a:ext uri="{FF2B5EF4-FFF2-40B4-BE49-F238E27FC236}">
-                <a16:creationId xmlns:a16="http://schemas.microsoft.com/office/drawing/2014/main" id="{8A5B7214-4391-4E5C-9436-EDF4F9CE5A18}"/>
+                <a16:creationId xmlns:a16="http://schemas.microsoft.com/office/drawing/2014/main" id="{43691CFD-493C-46A3-AE13-25153B199B92}"/>
               </a:ext>
             </a:extLst>
           </p:cNvPr>
@@ -30266,7 +30266,7 @@
           <p:cNvPr id="8" name="Rectangle 7">
             <a:extLst xmlns:a="http://schemas.openxmlformats.org/drawingml/2006/main">
               <a:ext uri="{FF2B5EF4-FFF2-40B4-BE49-F238E27FC236}">
-                <a16:creationId xmlns:a16="http://schemas.microsoft.com/office/drawing/2014/main" id="{C07B5D96-D3EA-422A-9906-2B512BE7A06A}"/>
+                <a16:creationId xmlns:a16="http://schemas.microsoft.com/office/drawing/2014/main" id="{7D4BA525-62CE-4167-8C7E-D73C5F642BCF}"/>
               </a:ext>
             </a:extLst>
           </p:cNvPr>
@@ -30319,7 +30319,7 @@
           <p:cNvPr id="9" name="TextBox 8">
             <a:extLst xmlns:a="http://schemas.openxmlformats.org/drawingml/2006/main">
               <a:ext uri="{FF2B5EF4-FFF2-40B4-BE49-F238E27FC236}">
-                <a16:creationId xmlns:a16="http://schemas.microsoft.com/office/drawing/2014/main" id="{B2E1FDB4-8F6D-4AC4-B34C-7413EAACFC3B}"/>
+                <a16:creationId xmlns:a16="http://schemas.microsoft.com/office/drawing/2014/main" id="{8C38EFC5-4674-41B3-B6D2-99CE126CEB3E}"/>
               </a:ext>
             </a:extLst>
           </p:cNvPr>
@@ -30374,7 +30374,7 @@
           <p:cNvPr id="10" name="TextBox 9">
             <a:extLst xmlns:a="http://schemas.openxmlformats.org/drawingml/2006/main">
               <a:ext uri="{FF2B5EF4-FFF2-40B4-BE49-F238E27FC236}">
-                <a16:creationId xmlns:a16="http://schemas.microsoft.com/office/drawing/2014/main" id="{7F99BB03-AD0C-4058-9CDA-928AA7003B2C}"/>
+                <a16:creationId xmlns:a16="http://schemas.microsoft.com/office/drawing/2014/main" id="{31A85B80-4EA6-41F9-9834-3A12DCB477DD}"/>
               </a:ext>
             </a:extLst>
           </p:cNvPr>
@@ -30427,7 +30427,7 @@
     </p:spTree>
     <p:extLst>
       <p:ext uri="{BB962C8B-B14F-4D97-AF65-F5344CB8AC3E}">
-        <p14:creationId xmlns:p14="http://schemas.microsoft.com/office/powerpoint/2010/main" val="525737326"/>
+        <p14:creationId xmlns:p14="http://schemas.microsoft.com/office/powerpoint/2010/main" val="839635692"/>
       </p:ext>
     </p:extLst>
   </p:cSld>
@@ -30451,7 +30451,7 @@
           <p:cNvPr id="2" name="Rectangle 1">
             <a:extLst xmlns:a="http://schemas.openxmlformats.org/drawingml/2006/main">
               <a:ext uri="{FF2B5EF4-FFF2-40B4-BE49-F238E27FC236}">
-                <a16:creationId xmlns:a16="http://schemas.microsoft.com/office/drawing/2014/main" id="{17CB8AAE-709B-4684-874D-4D9ABAF5388F}"/>
+                <a16:creationId xmlns:a16="http://schemas.microsoft.com/office/drawing/2014/main" id="{9ECDACC2-816D-42C7-86DC-92F6C88FB394}"/>
               </a:ext>
             </a:extLst>
           </p:cNvPr>
@@ -30504,7 +30504,7 @@
           <p:cNvPr id="3" name="TextBox 2">
             <a:extLst xmlns:a="http://schemas.openxmlformats.org/drawingml/2006/main">
               <a:ext uri="{FF2B5EF4-FFF2-40B4-BE49-F238E27FC236}">
-                <a16:creationId xmlns:a16="http://schemas.microsoft.com/office/drawing/2014/main" id="{EBF75BB4-F9D9-47CD-BF07-0C217C0F7A13}"/>
+                <a16:creationId xmlns:a16="http://schemas.microsoft.com/office/drawing/2014/main" id="{BD40E825-D682-47B2-92F8-D199FD51F3DA}"/>
               </a:ext>
             </a:extLst>
           </p:cNvPr>
@@ -30559,7 +30559,7 @@
           <p:cNvPr id="4" name="TextBox 3">
             <a:extLst xmlns:a="http://schemas.openxmlformats.org/drawingml/2006/main">
               <a:ext uri="{FF2B5EF4-FFF2-40B4-BE49-F238E27FC236}">
-                <a16:creationId xmlns:a16="http://schemas.microsoft.com/office/drawing/2014/main" id="{3E39930E-2E6D-4720-A75B-30A2D6554880}"/>
+                <a16:creationId xmlns:a16="http://schemas.microsoft.com/office/drawing/2014/main" id="{36F1559A-0F3C-4201-865A-AE76A424F45C}"/>
               </a:ext>
             </a:extLst>
           </p:cNvPr>
@@ -30589,14 +30589,14 @@
                 <a:spcPct val="110000"/>
               </a:lnSpc>
               <a:buNone/>
-              <a:defRPr sz="2000">
+              <a:defRPr sz="1400">
                 <a:latin typeface="Arial"/>
                 <a:ea typeface="Arial"/>
                 <a:cs typeface="Arial"/>
               </a:defRPr>
             </a:pPr>
             <a:r>
-              <a:rPr sz="2000" b="1" i="0">
+              <a:rPr sz="1400" b="1" i="0">
                 <a:solidFill>
                   <a:srgbClr val="FFFFFF"/>
                 </a:solidFill>
@@ -30614,7 +30614,7 @@
           <p:cNvPr id="5" name="TextBox 4">
             <a:extLst xmlns:a="http://schemas.openxmlformats.org/drawingml/2006/main">
               <a:ext uri="{FF2B5EF4-FFF2-40B4-BE49-F238E27FC236}">
-                <a16:creationId xmlns:a16="http://schemas.microsoft.com/office/drawing/2014/main" id="{00CAFD1D-D85A-4F39-BFEE-3BDD31C96AAB}"/>
+                <a16:creationId xmlns:a16="http://schemas.microsoft.com/office/drawing/2014/main" id="{6B2B9569-689D-45EA-905C-36310CFCAB75}"/>
               </a:ext>
             </a:extLst>
           </p:cNvPr>
@@ -30669,7 +30669,7 @@
           <p:cNvPr id="6" name="Rectangle 5">
             <a:extLst xmlns:a="http://schemas.openxmlformats.org/drawingml/2006/main">
               <a:ext uri="{FF2B5EF4-FFF2-40B4-BE49-F238E27FC236}">
-                <a16:creationId xmlns:a16="http://schemas.microsoft.com/office/drawing/2014/main" id="{DE925D57-D5EC-4F05-890A-D3869BD874EE}"/>
+                <a16:creationId xmlns:a16="http://schemas.microsoft.com/office/drawing/2014/main" id="{20865F67-EBC0-49D0-B390-258E96DAD9A7}"/>
               </a:ext>
             </a:extLst>
           </p:cNvPr>
@@ -30720,7 +30720,7 @@
     </p:spTree>
     <p:extLst>
       <p:ext uri="{BB962C8B-B14F-4D97-AF65-F5344CB8AC3E}">
-        <p14:creationId xmlns:p14="http://schemas.microsoft.com/office/powerpoint/2010/main" val="1181446302"/>
+        <p14:creationId xmlns:p14="http://schemas.microsoft.com/office/powerpoint/2010/main" val="1710348040"/>
       </p:ext>
     </p:extLst>
   </p:cSld>
@@ -30748,7 +30748,7 @@
           <p:nvPr/>
         </p:nvPicPr>
         <p:blipFill>
-          <a:blip xmlns:r="http://schemas.openxmlformats.org/officeDocument/2006/relationships" xmlns:a="http://schemas.openxmlformats.org/drawingml/2006/main" r:embed="Rc8191dd7318d4e0c"/>
+          <a:blip xmlns:r="http://schemas.openxmlformats.org/officeDocument/2006/relationships" xmlns:a="http://schemas.openxmlformats.org/drawingml/2006/main" r:embed="R50301cecf7d24012"/>
           <a:stretch xmlns:a="http://schemas.openxmlformats.org/drawingml/2006/main">
             <a:fillRect l="0" t="0" r="0" b="0"/>
           </a:stretch>
@@ -30768,7 +30768,7 @@
           <p:cNvPr id="3" name="Rectangle 2">
             <a:extLst xmlns:a="http://schemas.openxmlformats.org/drawingml/2006/main">
               <a:ext uri="{FF2B5EF4-FFF2-40B4-BE49-F238E27FC236}">
-                <a16:creationId xmlns:a16="http://schemas.microsoft.com/office/drawing/2014/main" id="{CD013B45-5353-428E-8E6F-6607966CC757}"/>
+                <a16:creationId xmlns:a16="http://schemas.microsoft.com/office/drawing/2014/main" id="{5BA30FC4-99E9-44BF-AC8C-35A9E880B200}"/>
               </a:ext>
             </a:extLst>
           </p:cNvPr>
@@ -30821,7 +30821,7 @@
           <p:cNvPr id="4" name="TextBox 3">
             <a:extLst xmlns:a="http://schemas.openxmlformats.org/drawingml/2006/main">
               <a:ext uri="{FF2B5EF4-FFF2-40B4-BE49-F238E27FC236}">
-                <a16:creationId xmlns:a16="http://schemas.microsoft.com/office/drawing/2014/main" id="{AABF51A8-C52C-4200-A830-43C0609FFDC9}"/>
+                <a16:creationId xmlns:a16="http://schemas.microsoft.com/office/drawing/2014/main" id="{FD974119-7FE7-4A62-A1FD-D00CCC533CCD}"/>
               </a:ext>
             </a:extLst>
           </p:cNvPr>
@@ -30876,7 +30876,7 @@
           <p:cNvPr id="5" name="TextBox 4">
             <a:extLst xmlns:a="http://schemas.openxmlformats.org/drawingml/2006/main">
               <a:ext uri="{FF2B5EF4-FFF2-40B4-BE49-F238E27FC236}">
-                <a16:creationId xmlns:a16="http://schemas.microsoft.com/office/drawing/2014/main" id="{D341B246-7FD2-4436-A238-6FD3471F9C97}"/>
+                <a16:creationId xmlns:a16="http://schemas.microsoft.com/office/drawing/2014/main" id="{26010BAD-0699-4D8A-B795-D58D243475AB}"/>
               </a:ext>
             </a:extLst>
           </p:cNvPr>
@@ -30931,7 +30931,7 @@
           <p:cNvPr id="6" name="Rounded Rectangle 5">
             <a:extLst xmlns:a="http://schemas.openxmlformats.org/drawingml/2006/main">
               <a:ext uri="{FF2B5EF4-FFF2-40B4-BE49-F238E27FC236}">
-                <a16:creationId xmlns:a16="http://schemas.microsoft.com/office/drawing/2014/main" id="{96906AA2-8EB7-4815-8CDE-655B31F6969C}"/>
+                <a16:creationId xmlns:a16="http://schemas.microsoft.com/office/drawing/2014/main" id="{D3C94CB7-330C-46C0-B1E2-E1FA0FDAC5D5}"/>
               </a:ext>
             </a:extLst>
           </p:cNvPr>
@@ -30988,7 +30988,7 @@
           <p:cNvPr id="7" name="TextBox 6">
             <a:extLst xmlns:a="http://schemas.openxmlformats.org/drawingml/2006/main">
               <a:ext uri="{FF2B5EF4-FFF2-40B4-BE49-F238E27FC236}">
-                <a16:creationId xmlns:a16="http://schemas.microsoft.com/office/drawing/2014/main" id="{099E6F2F-9997-4FB7-B9E8-539C0D63EDA4}"/>
+                <a16:creationId xmlns:a16="http://schemas.microsoft.com/office/drawing/2014/main" id="{459197FA-8BF0-480C-A6BD-14C6DFA57A73}"/>
               </a:ext>
             </a:extLst>
           </p:cNvPr>
@@ -31043,7 +31043,7 @@
           <p:cNvPr id="8" name="TextBox 7">
             <a:extLst xmlns:a="http://schemas.openxmlformats.org/drawingml/2006/main">
               <a:ext uri="{FF2B5EF4-FFF2-40B4-BE49-F238E27FC236}">
-                <a16:creationId xmlns:a16="http://schemas.microsoft.com/office/drawing/2014/main" id="{44212F75-341E-455A-A3FC-C6E67118E763}"/>
+                <a16:creationId xmlns:a16="http://schemas.microsoft.com/office/drawing/2014/main" id="{07AD483C-9A5E-4938-816E-84D091159479}"/>
               </a:ext>
             </a:extLst>
           </p:cNvPr>
@@ -31073,14 +31073,14 @@
                 <a:spcPct val="115000"/>
               </a:lnSpc>
               <a:buNone/>
-              <a:defRPr sz="2000">
+              <a:defRPr sz="1400">
                 <a:latin typeface="Arial"/>
                 <a:ea typeface="Arial"/>
                 <a:cs typeface="Arial"/>
               </a:defRPr>
             </a:pPr>
             <a:r>
-              <a:rPr sz="2000" b="1" i="0">
+              <a:rPr sz="1400" b="1" i="0">
                 <a:solidFill>
                   <a:srgbClr val="102A43"/>
                 </a:solidFill>
@@ -31098,7 +31098,7 @@
           <p:cNvPr id="9" name="TextBox 8">
             <a:extLst xmlns:a="http://schemas.openxmlformats.org/drawingml/2006/main">
               <a:ext uri="{FF2B5EF4-FFF2-40B4-BE49-F238E27FC236}">
-                <a16:creationId xmlns:a16="http://schemas.microsoft.com/office/drawing/2014/main" id="{10546824-D212-4386-8054-44194C998E58}"/>
+                <a16:creationId xmlns:a16="http://schemas.microsoft.com/office/drawing/2014/main" id="{C0E22D36-22EC-446A-A300-967023CFB9D1}"/>
               </a:ext>
             </a:extLst>
           </p:cNvPr>
@@ -31210,7 +31210,7 @@
           <p:cNvPr id="10" name="Rounded Rectangle 9">
             <a:extLst xmlns:a="http://schemas.openxmlformats.org/drawingml/2006/main">
               <a:ext uri="{FF2B5EF4-FFF2-40B4-BE49-F238E27FC236}">
-                <a16:creationId xmlns:a16="http://schemas.microsoft.com/office/drawing/2014/main" id="{4AFD911A-EB91-490E-9200-8EE28F600CC9}"/>
+                <a16:creationId xmlns:a16="http://schemas.microsoft.com/office/drawing/2014/main" id="{D98AFD31-49A9-465B-A0B4-365ED048B13E}"/>
               </a:ext>
             </a:extLst>
           </p:cNvPr>
@@ -31267,7 +31267,7 @@
           <p:cNvPr id="11" name="TextBox 10">
             <a:extLst xmlns:a="http://schemas.openxmlformats.org/drawingml/2006/main">
               <a:ext uri="{FF2B5EF4-FFF2-40B4-BE49-F238E27FC236}">
-                <a16:creationId xmlns:a16="http://schemas.microsoft.com/office/drawing/2014/main" id="{CC7CC19C-391B-4DFB-BB5F-268CBB27AB62}"/>
+                <a16:creationId xmlns:a16="http://schemas.microsoft.com/office/drawing/2014/main" id="{6B4A4019-9DEA-4523-8880-B90D537B68B0}"/>
               </a:ext>
             </a:extLst>
           </p:cNvPr>
@@ -31322,7 +31322,7 @@
           <p:cNvPr id="12" name="TextBox 11">
             <a:extLst xmlns:a="http://schemas.openxmlformats.org/drawingml/2006/main">
               <a:ext uri="{FF2B5EF4-FFF2-40B4-BE49-F238E27FC236}">
-                <a16:creationId xmlns:a16="http://schemas.microsoft.com/office/drawing/2014/main" id="{65200762-74E8-4316-8170-28D697B0D3AA}"/>
+                <a16:creationId xmlns:a16="http://schemas.microsoft.com/office/drawing/2014/main" id="{A9243D22-29E1-4165-B50A-D2642B29094D}"/>
               </a:ext>
             </a:extLst>
           </p:cNvPr>
@@ -31352,14 +31352,14 @@
                 <a:spcPct val="115000"/>
               </a:lnSpc>
               <a:buNone/>
-              <a:defRPr sz="2000">
+              <a:defRPr sz="1400">
                 <a:latin typeface="Arial"/>
                 <a:ea typeface="Arial"/>
                 <a:cs typeface="Arial"/>
               </a:defRPr>
             </a:pPr>
             <a:r>
-              <a:rPr sz="2000" b="1" i="0">
+              <a:rPr sz="1400" b="1" i="0">
                 <a:solidFill>
                   <a:srgbClr val="102A43"/>
                 </a:solidFill>
@@ -31377,7 +31377,7 @@
           <p:cNvPr id="13" name="TextBox 12">
             <a:extLst xmlns:a="http://schemas.openxmlformats.org/drawingml/2006/main">
               <a:ext uri="{FF2B5EF4-FFF2-40B4-BE49-F238E27FC236}">
-                <a16:creationId xmlns:a16="http://schemas.microsoft.com/office/drawing/2014/main" id="{C8CC2A4E-ECBA-4A74-B9EC-4AAE1361A574}"/>
+                <a16:creationId xmlns:a16="http://schemas.microsoft.com/office/drawing/2014/main" id="{BC66F91C-4759-4D98-BF3B-77A468D32FBE}"/>
               </a:ext>
             </a:extLst>
           </p:cNvPr>
@@ -31489,7 +31489,7 @@
           <p:cNvPr id="14" name="Rectangle 13">
             <a:extLst xmlns:a="http://schemas.openxmlformats.org/drawingml/2006/main">
               <a:ext uri="{FF2B5EF4-FFF2-40B4-BE49-F238E27FC236}">
-                <a16:creationId xmlns:a16="http://schemas.microsoft.com/office/drawing/2014/main" id="{D40B0600-A148-4180-ADBC-57313AE7E403}"/>
+                <a16:creationId xmlns:a16="http://schemas.microsoft.com/office/drawing/2014/main" id="{B2B21E0C-9F5F-4695-BA66-378664347842}"/>
               </a:ext>
             </a:extLst>
           </p:cNvPr>
@@ -31542,7 +31542,7 @@
           <p:cNvPr id="15" name="Rectangle 14">
             <a:extLst xmlns:a="http://schemas.openxmlformats.org/drawingml/2006/main">
               <a:ext uri="{FF2B5EF4-FFF2-40B4-BE49-F238E27FC236}">
-                <a16:creationId xmlns:a16="http://schemas.microsoft.com/office/drawing/2014/main" id="{181F6D53-DAEE-4AB0-88A1-35A8CE31BD81}"/>
+                <a16:creationId xmlns:a16="http://schemas.microsoft.com/office/drawing/2014/main" id="{D8E98CF8-C14A-4C0E-9F32-2E99E2763D00}"/>
               </a:ext>
             </a:extLst>
           </p:cNvPr>
@@ -31595,7 +31595,7 @@
           <p:cNvPr id="16" name="TextBox 15">
             <a:extLst xmlns:a="http://schemas.openxmlformats.org/drawingml/2006/main">
               <a:ext uri="{FF2B5EF4-FFF2-40B4-BE49-F238E27FC236}">
-                <a16:creationId xmlns:a16="http://schemas.microsoft.com/office/drawing/2014/main" id="{F3101F82-536F-4DE2-9C1F-85C4202BDDA5}"/>
+                <a16:creationId xmlns:a16="http://schemas.microsoft.com/office/drawing/2014/main" id="{1C3C4ACB-4B52-4E77-B7AF-901AF5A69BFF}"/>
               </a:ext>
             </a:extLst>
           </p:cNvPr>
@@ -31650,7 +31650,7 @@
           <p:cNvPr id="17" name="TextBox 16">
             <a:extLst xmlns:a="http://schemas.openxmlformats.org/drawingml/2006/main">
               <a:ext uri="{FF2B5EF4-FFF2-40B4-BE49-F238E27FC236}">
-                <a16:creationId xmlns:a16="http://schemas.microsoft.com/office/drawing/2014/main" id="{3185FA59-3162-4C27-B497-005E637FE364}"/>
+                <a16:creationId xmlns:a16="http://schemas.microsoft.com/office/drawing/2014/main" id="{66F4B51F-1B30-42A8-BDB8-4B05D0AC2D07}"/>
               </a:ext>
             </a:extLst>
           </p:cNvPr>
@@ -31703,7 +31703,7 @@
     </p:spTree>
     <p:extLst>
       <p:ext uri="{BB962C8B-B14F-4D97-AF65-F5344CB8AC3E}">
-        <p14:creationId xmlns:p14="http://schemas.microsoft.com/office/powerpoint/2010/main" val="2022827096"/>
+        <p14:creationId xmlns:p14="http://schemas.microsoft.com/office/powerpoint/2010/main" val="870142437"/>
       </p:ext>
     </p:extLst>
   </p:cSld>
@@ -31731,7 +31731,7 @@
           <p:nvPr/>
         </p:nvPicPr>
         <p:blipFill>
-          <a:blip xmlns:r="http://schemas.openxmlformats.org/officeDocument/2006/relationships" xmlns:a="http://schemas.openxmlformats.org/drawingml/2006/main" r:embed="Rc46de4650448476d"/>
+          <a:blip xmlns:r="http://schemas.openxmlformats.org/officeDocument/2006/relationships" xmlns:a="http://schemas.openxmlformats.org/drawingml/2006/main" r:embed="Rddbd3c955cee492e"/>
           <a:stretch xmlns:a="http://schemas.openxmlformats.org/drawingml/2006/main">
             <a:fillRect l="0" t="0" r="0" b="0"/>
           </a:stretch>
@@ -31751,7 +31751,7 @@
           <p:cNvPr id="3" name="Rectangle 2">
             <a:extLst xmlns:a="http://schemas.openxmlformats.org/drawingml/2006/main">
               <a:ext uri="{FF2B5EF4-FFF2-40B4-BE49-F238E27FC236}">
-                <a16:creationId xmlns:a16="http://schemas.microsoft.com/office/drawing/2014/main" id="{1C419341-6BAF-4107-8BD7-3364B5E487B2}"/>
+                <a16:creationId xmlns:a16="http://schemas.microsoft.com/office/drawing/2014/main" id="{C4B9CD94-5402-4EAF-9551-D15FCA0B2DA5}"/>
               </a:ext>
             </a:extLst>
           </p:cNvPr>
@@ -31804,7 +31804,7 @@
           <p:cNvPr id="4" name="TextBox 3">
             <a:extLst xmlns:a="http://schemas.openxmlformats.org/drawingml/2006/main">
               <a:ext uri="{FF2B5EF4-FFF2-40B4-BE49-F238E27FC236}">
-                <a16:creationId xmlns:a16="http://schemas.microsoft.com/office/drawing/2014/main" id="{BF3F441C-DAAF-4FEA-858B-8F72EE1CD5AE}"/>
+                <a16:creationId xmlns:a16="http://schemas.microsoft.com/office/drawing/2014/main" id="{53404FBA-5F8C-4273-B708-4D40E405081D}"/>
               </a:ext>
             </a:extLst>
           </p:cNvPr>
@@ -31859,7 +31859,7 @@
           <p:cNvPr id="5" name="TextBox 4">
             <a:extLst xmlns:a="http://schemas.openxmlformats.org/drawingml/2006/main">
               <a:ext uri="{FF2B5EF4-FFF2-40B4-BE49-F238E27FC236}">
-                <a16:creationId xmlns:a16="http://schemas.microsoft.com/office/drawing/2014/main" id="{61C390F5-F86E-4E2A-B1DC-FD333EE00BA5}"/>
+                <a16:creationId xmlns:a16="http://schemas.microsoft.com/office/drawing/2014/main" id="{99B44DE9-4561-446A-BF66-2080B816FA2B}"/>
               </a:ext>
             </a:extLst>
           </p:cNvPr>
@@ -31914,7 +31914,7 @@
           <p:cNvPr id="6" name="Rounded Rectangle 5">
             <a:extLst xmlns:a="http://schemas.openxmlformats.org/drawingml/2006/main">
               <a:ext uri="{FF2B5EF4-FFF2-40B4-BE49-F238E27FC236}">
-                <a16:creationId xmlns:a16="http://schemas.microsoft.com/office/drawing/2014/main" id="{58915C84-A34F-487A-A4B1-EB6B41B873D7}"/>
+                <a16:creationId xmlns:a16="http://schemas.microsoft.com/office/drawing/2014/main" id="{E1F751A4-349E-4A3F-9283-2BB19558CCF4}"/>
               </a:ext>
             </a:extLst>
           </p:cNvPr>
@@ -31971,7 +31971,7 @@
           <p:cNvPr id="7" name="TextBox 6">
             <a:extLst xmlns:a="http://schemas.openxmlformats.org/drawingml/2006/main">
               <a:ext uri="{FF2B5EF4-FFF2-40B4-BE49-F238E27FC236}">
-                <a16:creationId xmlns:a16="http://schemas.microsoft.com/office/drawing/2014/main" id="{03E8F9C0-B580-4AEF-944B-8C0C92398125}"/>
+                <a16:creationId xmlns:a16="http://schemas.microsoft.com/office/drawing/2014/main" id="{5FD2ED10-2C6C-432A-ADAD-4EB29C1DD28C}"/>
               </a:ext>
             </a:extLst>
           </p:cNvPr>
@@ -32026,7 +32026,7 @@
           <p:cNvPr id="8" name="TextBox 7">
             <a:extLst xmlns:a="http://schemas.openxmlformats.org/drawingml/2006/main">
               <a:ext uri="{FF2B5EF4-FFF2-40B4-BE49-F238E27FC236}">
-                <a16:creationId xmlns:a16="http://schemas.microsoft.com/office/drawing/2014/main" id="{F49479EE-0167-452E-B507-100FC314C196}"/>
+                <a16:creationId xmlns:a16="http://schemas.microsoft.com/office/drawing/2014/main" id="{BFB7A50E-51D7-4F30-B87F-341B6F26EA21}"/>
               </a:ext>
             </a:extLst>
           </p:cNvPr>
@@ -32038,7 +32038,7 @@
         <p:spPr>
           <a:xfrm xmlns:a="http://schemas.openxmlformats.org/drawingml/2006/main">
             <a:off x="584200" y="2654300"/>
-            <a:ext cx="3318933" cy="701040"/>
+            <a:ext cx="3318933" cy="444500"/>
           </a:xfrm>
           <a:prstGeom xmlns:a="http://schemas.openxmlformats.org/drawingml/2006/main" prst="rect">
             <a:avLst/>
@@ -32056,14 +32056,14 @@
                 <a:spcPct val="115000"/>
               </a:lnSpc>
               <a:buNone/>
-              <a:defRPr sz="2000">
+              <a:defRPr sz="1400">
                 <a:latin typeface="Arial"/>
                 <a:ea typeface="Arial"/>
                 <a:cs typeface="Arial"/>
               </a:defRPr>
             </a:pPr>
             <a:r>
-              <a:rPr sz="2000" b="1" i="0">
+              <a:rPr sz="1400" b="1" i="0">
                 <a:solidFill>
                   <a:srgbClr val="102A43"/>
                 </a:solidFill>
@@ -32081,7 +32081,7 @@
           <p:cNvPr id="9" name="TextBox 8">
             <a:extLst xmlns:a="http://schemas.openxmlformats.org/drawingml/2006/main">
               <a:ext uri="{FF2B5EF4-FFF2-40B4-BE49-F238E27FC236}">
-                <a16:creationId xmlns:a16="http://schemas.microsoft.com/office/drawing/2014/main" id="{9CB73E1D-8F23-448F-A20D-FBC0C7AFD582}"/>
+                <a16:creationId xmlns:a16="http://schemas.microsoft.com/office/drawing/2014/main" id="{5647DEBA-0CCC-4E75-BE49-7CA7C25E0412}"/>
               </a:ext>
             </a:extLst>
           </p:cNvPr>
@@ -32166,7 +32166,7 @@
           <p:cNvPr id="10" name="Rounded Rectangle 9">
             <a:extLst xmlns:a="http://schemas.openxmlformats.org/drawingml/2006/main">
               <a:ext uri="{FF2B5EF4-FFF2-40B4-BE49-F238E27FC236}">
-                <a16:creationId xmlns:a16="http://schemas.microsoft.com/office/drawing/2014/main" id="{1AF430EB-5F63-48F0-88A4-309A2518198B}"/>
+                <a16:creationId xmlns:a16="http://schemas.microsoft.com/office/drawing/2014/main" id="{22E66DC7-F4E6-4C15-AE6E-06FC981BC606}"/>
               </a:ext>
             </a:extLst>
           </p:cNvPr>
@@ -32223,7 +32223,7 @@
           <p:cNvPr id="11" name="TextBox 10">
             <a:extLst xmlns:a="http://schemas.openxmlformats.org/drawingml/2006/main">
               <a:ext uri="{FF2B5EF4-FFF2-40B4-BE49-F238E27FC236}">
-                <a16:creationId xmlns:a16="http://schemas.microsoft.com/office/drawing/2014/main" id="{6AE8315D-2E9A-4C7A-84BA-949E9C47E9D6}"/>
+                <a16:creationId xmlns:a16="http://schemas.microsoft.com/office/drawing/2014/main" id="{114825B3-0633-4C43-B992-0504310B1504}"/>
               </a:ext>
             </a:extLst>
           </p:cNvPr>
@@ -32278,7 +32278,7 @@
           <p:cNvPr id="12" name="TextBox 11">
             <a:extLst xmlns:a="http://schemas.openxmlformats.org/drawingml/2006/main">
               <a:ext uri="{FF2B5EF4-FFF2-40B4-BE49-F238E27FC236}">
-                <a16:creationId xmlns:a16="http://schemas.microsoft.com/office/drawing/2014/main" id="{BFBA73A8-C809-4863-9340-7D78A46C514A}"/>
+                <a16:creationId xmlns:a16="http://schemas.microsoft.com/office/drawing/2014/main" id="{B20043F7-8592-4820-82CE-FA32BBA454A7}"/>
               </a:ext>
             </a:extLst>
           </p:cNvPr>
@@ -32290,7 +32290,7 @@
         <p:spPr>
           <a:xfrm xmlns:a="http://schemas.openxmlformats.org/drawingml/2006/main">
             <a:off x="4436533" y="2654300"/>
-            <a:ext cx="3318933" cy="701040"/>
+            <a:ext cx="3318933" cy="490728"/>
           </a:xfrm>
           <a:prstGeom xmlns:a="http://schemas.openxmlformats.org/drawingml/2006/main" prst="rect">
             <a:avLst/>
@@ -32308,14 +32308,14 @@
                 <a:spcPct val="115000"/>
               </a:lnSpc>
               <a:buNone/>
-              <a:defRPr sz="2000">
+              <a:defRPr sz="1400">
                 <a:latin typeface="Arial"/>
                 <a:ea typeface="Arial"/>
                 <a:cs typeface="Arial"/>
               </a:defRPr>
             </a:pPr>
             <a:r>
-              <a:rPr sz="2000" b="1" i="0">
+              <a:rPr sz="1400" b="1" i="0">
                 <a:solidFill>
                   <a:srgbClr val="102A43"/>
                 </a:solidFill>
@@ -32333,7 +32333,7 @@
           <p:cNvPr id="13" name="TextBox 12">
             <a:extLst xmlns:a="http://schemas.openxmlformats.org/drawingml/2006/main">
               <a:ext uri="{FF2B5EF4-FFF2-40B4-BE49-F238E27FC236}">
-                <a16:creationId xmlns:a16="http://schemas.microsoft.com/office/drawing/2014/main" id="{46820FF3-4DE1-423D-A4D3-06DC0B616507}"/>
+                <a16:creationId xmlns:a16="http://schemas.microsoft.com/office/drawing/2014/main" id="{A74C874D-61FD-48E1-81A4-9A06AED14017}"/>
               </a:ext>
             </a:extLst>
           </p:cNvPr>
@@ -32418,7 +32418,7 @@
           <p:cNvPr id="14" name="Rounded Rectangle 13">
             <a:extLst xmlns:a="http://schemas.openxmlformats.org/drawingml/2006/main">
               <a:ext uri="{FF2B5EF4-FFF2-40B4-BE49-F238E27FC236}">
-                <a16:creationId xmlns:a16="http://schemas.microsoft.com/office/drawing/2014/main" id="{6004EA22-8E7C-4A47-92C7-117E3B3FA8C1}"/>
+                <a16:creationId xmlns:a16="http://schemas.microsoft.com/office/drawing/2014/main" id="{02DEA565-85FC-43E3-BB87-DF56AC349D4D}"/>
               </a:ext>
             </a:extLst>
           </p:cNvPr>
@@ -32475,7 +32475,7 @@
           <p:cNvPr id="15" name="TextBox 14">
             <a:extLst xmlns:a="http://schemas.openxmlformats.org/drawingml/2006/main">
               <a:ext uri="{FF2B5EF4-FFF2-40B4-BE49-F238E27FC236}">
-                <a16:creationId xmlns:a16="http://schemas.microsoft.com/office/drawing/2014/main" id="{269E0A4C-D831-4947-B099-02AB43B46169}"/>
+                <a16:creationId xmlns:a16="http://schemas.microsoft.com/office/drawing/2014/main" id="{FB4650F9-143D-4139-A45D-3F98E81EBCB4}"/>
               </a:ext>
             </a:extLst>
           </p:cNvPr>
@@ -32530,7 +32530,7 @@
           <p:cNvPr id="16" name="TextBox 15">
             <a:extLst xmlns:a="http://schemas.openxmlformats.org/drawingml/2006/main">
               <a:ext uri="{FF2B5EF4-FFF2-40B4-BE49-F238E27FC236}">
-                <a16:creationId xmlns:a16="http://schemas.microsoft.com/office/drawing/2014/main" id="{6F7D6A9E-45D0-4E67-80A3-3E31A43A434E}"/>
+                <a16:creationId xmlns:a16="http://schemas.microsoft.com/office/drawing/2014/main" id="{2F555AB9-BE5E-4F6E-8CBF-CE148CB225AA}"/>
               </a:ext>
             </a:extLst>
           </p:cNvPr>
@@ -32542,7 +32542,7 @@
         <p:spPr>
           <a:xfrm xmlns:a="http://schemas.openxmlformats.org/drawingml/2006/main">
             <a:off x="8288867" y="2654300"/>
-            <a:ext cx="3318933" cy="701040"/>
+            <a:ext cx="3318933" cy="444500"/>
           </a:xfrm>
           <a:prstGeom xmlns:a="http://schemas.openxmlformats.org/drawingml/2006/main" prst="rect">
             <a:avLst/>
@@ -32560,14 +32560,14 @@
                 <a:spcPct val="115000"/>
               </a:lnSpc>
               <a:buNone/>
-              <a:defRPr sz="2000">
+              <a:defRPr sz="1400">
                 <a:latin typeface="Arial"/>
                 <a:ea typeface="Arial"/>
                 <a:cs typeface="Arial"/>
               </a:defRPr>
             </a:pPr>
             <a:r>
-              <a:rPr sz="2000" b="1" i="0">
+              <a:rPr sz="1400" b="1" i="0">
                 <a:solidFill>
                   <a:srgbClr val="102A43"/>
                 </a:solidFill>
@@ -32585,7 +32585,7 @@
           <p:cNvPr id="17" name="TextBox 16">
             <a:extLst xmlns:a="http://schemas.openxmlformats.org/drawingml/2006/main">
               <a:ext uri="{FF2B5EF4-FFF2-40B4-BE49-F238E27FC236}">
-                <a16:creationId xmlns:a16="http://schemas.microsoft.com/office/drawing/2014/main" id="{D20262B9-A5BA-494F-9CDD-00CDABEF5AF1}"/>
+                <a16:creationId xmlns:a16="http://schemas.microsoft.com/office/drawing/2014/main" id="{F2EBD986-D687-42DD-8437-3EC922AB8C16}"/>
               </a:ext>
             </a:extLst>
           </p:cNvPr>
@@ -32670,7 +32670,7 @@
           <p:cNvPr id="18" name="Rectangle 17">
             <a:extLst xmlns:a="http://schemas.openxmlformats.org/drawingml/2006/main">
               <a:ext uri="{FF2B5EF4-FFF2-40B4-BE49-F238E27FC236}">
-                <a16:creationId xmlns:a16="http://schemas.microsoft.com/office/drawing/2014/main" id="{023C8919-050E-4A76-AAE7-3647387ABB5C}"/>
+                <a16:creationId xmlns:a16="http://schemas.microsoft.com/office/drawing/2014/main" id="{D48E0B1C-505E-40AF-9DAB-D6F3078B4B92}"/>
               </a:ext>
             </a:extLst>
           </p:cNvPr>
@@ -32723,7 +32723,7 @@
           <p:cNvPr id="19" name="Rectangle 18">
             <a:extLst xmlns:a="http://schemas.openxmlformats.org/drawingml/2006/main">
               <a:ext uri="{FF2B5EF4-FFF2-40B4-BE49-F238E27FC236}">
-                <a16:creationId xmlns:a16="http://schemas.microsoft.com/office/drawing/2014/main" id="{4275B5E6-040F-4EFE-8004-67D72B5B85AA}"/>
+                <a16:creationId xmlns:a16="http://schemas.microsoft.com/office/drawing/2014/main" id="{8860ABC8-772A-4BE5-903A-C24A2F69DCD5}"/>
               </a:ext>
             </a:extLst>
           </p:cNvPr>
@@ -32776,7 +32776,7 @@
           <p:cNvPr id="20" name="TextBox 19">
             <a:extLst xmlns:a="http://schemas.openxmlformats.org/drawingml/2006/main">
               <a:ext uri="{FF2B5EF4-FFF2-40B4-BE49-F238E27FC236}">
-                <a16:creationId xmlns:a16="http://schemas.microsoft.com/office/drawing/2014/main" id="{0CFB3E25-FA83-483D-980B-8F7A25CA6BC3}"/>
+                <a16:creationId xmlns:a16="http://schemas.microsoft.com/office/drawing/2014/main" id="{BBBF6989-0270-4799-AD55-B063449D75F3}"/>
               </a:ext>
             </a:extLst>
           </p:cNvPr>
@@ -32831,7 +32831,7 @@
           <p:cNvPr id="21" name="TextBox 20">
             <a:extLst xmlns:a="http://schemas.openxmlformats.org/drawingml/2006/main">
               <a:ext uri="{FF2B5EF4-FFF2-40B4-BE49-F238E27FC236}">
-                <a16:creationId xmlns:a16="http://schemas.microsoft.com/office/drawing/2014/main" id="{1F0D412A-6B55-492B-B4EB-DBFF798573C1}"/>
+                <a16:creationId xmlns:a16="http://schemas.microsoft.com/office/drawing/2014/main" id="{49BF5B6E-4A50-41B6-A833-B8FAEE937C81}"/>
               </a:ext>
             </a:extLst>
           </p:cNvPr>
@@ -32884,7 +32884,7 @@
     </p:spTree>
     <p:extLst>
       <p:ext uri="{BB962C8B-B14F-4D97-AF65-F5344CB8AC3E}">
-        <p14:creationId xmlns:p14="http://schemas.microsoft.com/office/powerpoint/2010/main" val="946932492"/>
+        <p14:creationId xmlns:p14="http://schemas.microsoft.com/office/powerpoint/2010/main" val="1595937297"/>
       </p:ext>
     </p:extLst>
   </p:cSld>
@@ -32912,7 +32912,7 @@
           <p:nvPr/>
         </p:nvPicPr>
         <p:blipFill>
-          <a:blip xmlns:r="http://schemas.openxmlformats.org/officeDocument/2006/relationships" xmlns:a="http://schemas.openxmlformats.org/drawingml/2006/main" r:embed="R2eb68530fcc54843"/>
+          <a:blip xmlns:r="http://schemas.openxmlformats.org/officeDocument/2006/relationships" xmlns:a="http://schemas.openxmlformats.org/drawingml/2006/main" r:embed="Rfd914e12e23540d1"/>
           <a:stretch xmlns:a="http://schemas.openxmlformats.org/drawingml/2006/main">
             <a:fillRect l="0" t="0" r="0" b="0"/>
           </a:stretch>
@@ -32932,7 +32932,7 @@
           <p:cNvPr id="3" name="Rectangle 2">
             <a:extLst xmlns:a="http://schemas.openxmlformats.org/drawingml/2006/main">
               <a:ext uri="{FF2B5EF4-FFF2-40B4-BE49-F238E27FC236}">
-                <a16:creationId xmlns:a16="http://schemas.microsoft.com/office/drawing/2014/main" id="{A4DDA7C5-54EB-492F-AC06-AC9E7A7F3B84}"/>
+                <a16:creationId xmlns:a16="http://schemas.microsoft.com/office/drawing/2014/main" id="{917A8940-4B5B-409E-B250-049B8D4F3C69}"/>
               </a:ext>
             </a:extLst>
           </p:cNvPr>
@@ -32985,7 +32985,7 @@
           <p:cNvPr id="4" name="TextBox 3">
             <a:extLst xmlns:a="http://schemas.openxmlformats.org/drawingml/2006/main">
               <a:ext uri="{FF2B5EF4-FFF2-40B4-BE49-F238E27FC236}">
-                <a16:creationId xmlns:a16="http://schemas.microsoft.com/office/drawing/2014/main" id="{E7EBD7A9-A9FB-413C-960E-B7D72C85AE7B}"/>
+                <a16:creationId xmlns:a16="http://schemas.microsoft.com/office/drawing/2014/main" id="{33B8A867-C24F-4B78-9E23-69697B3D3799}"/>
               </a:ext>
             </a:extLst>
           </p:cNvPr>
@@ -33040,7 +33040,7 @@
           <p:cNvPr id="5" name="TextBox 4">
             <a:extLst xmlns:a="http://schemas.openxmlformats.org/drawingml/2006/main">
               <a:ext uri="{FF2B5EF4-FFF2-40B4-BE49-F238E27FC236}">
-                <a16:creationId xmlns:a16="http://schemas.microsoft.com/office/drawing/2014/main" id="{ECE737A8-41BE-433E-972E-F4A78FF0141B}"/>
+                <a16:creationId xmlns:a16="http://schemas.microsoft.com/office/drawing/2014/main" id="{0D1CF9B9-298F-4EC2-8800-78A7F4E0F1C6}"/>
               </a:ext>
             </a:extLst>
           </p:cNvPr>
@@ -33095,7 +33095,7 @@
           <p:cNvPr id="6" name="TextBox 5">
             <a:extLst xmlns:a="http://schemas.openxmlformats.org/drawingml/2006/main">
               <a:ext uri="{FF2B5EF4-FFF2-40B4-BE49-F238E27FC236}">
-                <a16:creationId xmlns:a16="http://schemas.microsoft.com/office/drawing/2014/main" id="{4C968944-EC53-4589-B680-4B825DBCD1A1}"/>
+                <a16:creationId xmlns:a16="http://schemas.microsoft.com/office/drawing/2014/main" id="{A1D0DA0D-99DC-4643-9C87-F9C0E3D42216}"/>
               </a:ext>
             </a:extLst>
           </p:cNvPr>
@@ -33261,7 +33261,7 @@
           <p:cNvPr id="7" name="Rectangle 6">
             <a:extLst xmlns:a="http://schemas.openxmlformats.org/drawingml/2006/main">
               <a:ext uri="{FF2B5EF4-FFF2-40B4-BE49-F238E27FC236}">
-                <a16:creationId xmlns:a16="http://schemas.microsoft.com/office/drawing/2014/main" id="{0CBA238D-9C2E-4C11-8759-28FB9984CA0F}"/>
+                <a16:creationId xmlns:a16="http://schemas.microsoft.com/office/drawing/2014/main" id="{9BBB5326-E689-41F9-AB79-35806BA0E7BE}"/>
               </a:ext>
             </a:extLst>
           </p:cNvPr>
@@ -33314,7 +33314,7 @@
           <p:cNvPr id="8" name="Rectangle 7">
             <a:extLst xmlns:a="http://schemas.openxmlformats.org/drawingml/2006/main">
               <a:ext uri="{FF2B5EF4-FFF2-40B4-BE49-F238E27FC236}">
-                <a16:creationId xmlns:a16="http://schemas.microsoft.com/office/drawing/2014/main" id="{A80C22DD-5708-47F3-88A3-D65FD0164961}"/>
+                <a16:creationId xmlns:a16="http://schemas.microsoft.com/office/drawing/2014/main" id="{AFCF7C63-50A8-4CD4-9F13-E060AC3A3A16}"/>
               </a:ext>
             </a:extLst>
           </p:cNvPr>
@@ -33367,7 +33367,7 @@
           <p:cNvPr id="9" name="TextBox 8">
             <a:extLst xmlns:a="http://schemas.openxmlformats.org/drawingml/2006/main">
               <a:ext uri="{FF2B5EF4-FFF2-40B4-BE49-F238E27FC236}">
-                <a16:creationId xmlns:a16="http://schemas.microsoft.com/office/drawing/2014/main" id="{6CDB0D6B-5BF3-47D5-8356-6BABFA911DB1}"/>
+                <a16:creationId xmlns:a16="http://schemas.microsoft.com/office/drawing/2014/main" id="{D6DD3B90-B41E-4AB4-A05A-A7671D4E568B}"/>
               </a:ext>
             </a:extLst>
           </p:cNvPr>
@@ -33422,7 +33422,7 @@
           <p:cNvPr id="10" name="TextBox 9">
             <a:extLst xmlns:a="http://schemas.openxmlformats.org/drawingml/2006/main">
               <a:ext uri="{FF2B5EF4-FFF2-40B4-BE49-F238E27FC236}">
-                <a16:creationId xmlns:a16="http://schemas.microsoft.com/office/drawing/2014/main" id="{C3BF31A2-CD0B-4D04-9373-72F2CDF1C847}"/>
+                <a16:creationId xmlns:a16="http://schemas.microsoft.com/office/drawing/2014/main" id="{1E3A3337-3823-4E77-8745-83FF144C06C3}"/>
               </a:ext>
             </a:extLst>
           </p:cNvPr>
@@ -33475,7 +33475,7 @@
     </p:spTree>
     <p:extLst>
       <p:ext uri="{BB962C8B-B14F-4D97-AF65-F5344CB8AC3E}">
-        <p14:creationId xmlns:p14="http://schemas.microsoft.com/office/powerpoint/2010/main" val="911721965"/>
+        <p14:creationId xmlns:p14="http://schemas.microsoft.com/office/powerpoint/2010/main" val="1739668757"/>
       </p:ext>
     </p:extLst>
   </p:cSld>
@@ -33503,7 +33503,7 @@
           <p:nvPr/>
         </p:nvPicPr>
         <p:blipFill>
-          <a:blip xmlns:r="http://schemas.openxmlformats.org/officeDocument/2006/relationships" xmlns:a="http://schemas.openxmlformats.org/drawingml/2006/main" r:embed="R4447959223da4261"/>
+          <a:blip xmlns:r="http://schemas.openxmlformats.org/officeDocument/2006/relationships" xmlns:a="http://schemas.openxmlformats.org/drawingml/2006/main" r:embed="R47cee101e38d428e"/>
           <a:stretch xmlns:a="http://schemas.openxmlformats.org/drawingml/2006/main">
             <a:fillRect l="0" t="0" r="0" b="0"/>
           </a:stretch>
@@ -33523,7 +33523,7 @@
           <p:cNvPr id="3" name="Rectangle 2">
             <a:extLst xmlns:a="http://schemas.openxmlformats.org/drawingml/2006/main">
               <a:ext uri="{FF2B5EF4-FFF2-40B4-BE49-F238E27FC236}">
-                <a16:creationId xmlns:a16="http://schemas.microsoft.com/office/drawing/2014/main" id="{C5123BC2-F3D9-427C-8667-9C10F0C754C5}"/>
+                <a16:creationId xmlns:a16="http://schemas.microsoft.com/office/drawing/2014/main" id="{7FA57267-5612-455A-A504-59464C2F54EF}"/>
               </a:ext>
             </a:extLst>
           </p:cNvPr>
@@ -33576,7 +33576,7 @@
           <p:cNvPr id="4" name="TextBox 3">
             <a:extLst xmlns:a="http://schemas.openxmlformats.org/drawingml/2006/main">
               <a:ext uri="{FF2B5EF4-FFF2-40B4-BE49-F238E27FC236}">
-                <a16:creationId xmlns:a16="http://schemas.microsoft.com/office/drawing/2014/main" id="{F083149D-6922-4CCF-A5DD-BCD4B81F5157}"/>
+                <a16:creationId xmlns:a16="http://schemas.microsoft.com/office/drawing/2014/main" id="{32556295-7BAF-45EA-B5F7-0FF26697EAAE}"/>
               </a:ext>
             </a:extLst>
           </p:cNvPr>
@@ -33631,7 +33631,7 @@
           <p:cNvPr id="5" name="TextBox 4">
             <a:extLst xmlns:a="http://schemas.openxmlformats.org/drawingml/2006/main">
               <a:ext uri="{FF2B5EF4-FFF2-40B4-BE49-F238E27FC236}">
-                <a16:creationId xmlns:a16="http://schemas.microsoft.com/office/drawing/2014/main" id="{9EAAB6AB-3746-4B68-BDA4-D95BA92C5688}"/>
+                <a16:creationId xmlns:a16="http://schemas.microsoft.com/office/drawing/2014/main" id="{1AFE5C9A-140C-4A68-93C9-1F900500543B}"/>
               </a:ext>
             </a:extLst>
           </p:cNvPr>
@@ -33686,7 +33686,7 @@
           <p:cNvPr id="6" name="TextBox 5">
             <a:extLst xmlns:a="http://schemas.openxmlformats.org/drawingml/2006/main">
               <a:ext uri="{FF2B5EF4-FFF2-40B4-BE49-F238E27FC236}">
-                <a16:creationId xmlns:a16="http://schemas.microsoft.com/office/drawing/2014/main" id="{EAF7E8EF-DE1B-4534-892B-A6D678D5F094}"/>
+                <a16:creationId xmlns:a16="http://schemas.microsoft.com/office/drawing/2014/main" id="{34F41EFE-934E-4A06-AC1A-BC5556EB64AC}"/>
               </a:ext>
             </a:extLst>
           </p:cNvPr>
@@ -33798,7 +33798,7 @@
           <p:cNvPr id="7" name="Rectangle 6">
             <a:extLst xmlns:a="http://schemas.openxmlformats.org/drawingml/2006/main">
               <a:ext uri="{FF2B5EF4-FFF2-40B4-BE49-F238E27FC236}">
-                <a16:creationId xmlns:a16="http://schemas.microsoft.com/office/drawing/2014/main" id="{1EB74B0C-C0F9-4DE1-AA66-D7D03C9A902A}"/>
+                <a16:creationId xmlns:a16="http://schemas.microsoft.com/office/drawing/2014/main" id="{468D8EB0-9A9D-4E05-B859-B47BA9D207FC}"/>
               </a:ext>
             </a:extLst>
           </p:cNvPr>
@@ -33851,7 +33851,7 @@
           <p:cNvPr id="8" name="Rectangle 7">
             <a:extLst xmlns:a="http://schemas.openxmlformats.org/drawingml/2006/main">
               <a:ext uri="{FF2B5EF4-FFF2-40B4-BE49-F238E27FC236}">
-                <a16:creationId xmlns:a16="http://schemas.microsoft.com/office/drawing/2014/main" id="{D14D5DC9-6CF7-4A0F-9BAC-0E330FF85FB8}"/>
+                <a16:creationId xmlns:a16="http://schemas.microsoft.com/office/drawing/2014/main" id="{66A61F1F-AB2C-42B9-ABDC-FD28C6F4E379}"/>
               </a:ext>
             </a:extLst>
           </p:cNvPr>
@@ -33904,7 +33904,7 @@
           <p:cNvPr id="9" name="TextBox 8">
             <a:extLst xmlns:a="http://schemas.openxmlformats.org/drawingml/2006/main">
               <a:ext uri="{FF2B5EF4-FFF2-40B4-BE49-F238E27FC236}">
-                <a16:creationId xmlns:a16="http://schemas.microsoft.com/office/drawing/2014/main" id="{E04A5E76-14E3-4431-9291-2B8016583875}"/>
+                <a16:creationId xmlns:a16="http://schemas.microsoft.com/office/drawing/2014/main" id="{85707357-AC46-4C3E-A127-B3D75E58C7EB}"/>
               </a:ext>
             </a:extLst>
           </p:cNvPr>
@@ -33959,7 +33959,7 @@
           <p:cNvPr id="10" name="TextBox 9">
             <a:extLst xmlns:a="http://schemas.openxmlformats.org/drawingml/2006/main">
               <a:ext uri="{FF2B5EF4-FFF2-40B4-BE49-F238E27FC236}">
-                <a16:creationId xmlns:a16="http://schemas.microsoft.com/office/drawing/2014/main" id="{35F9B647-B660-48B9-8C58-EBBA2DC5BF6B}"/>
+                <a16:creationId xmlns:a16="http://schemas.microsoft.com/office/drawing/2014/main" id="{8C45326C-6723-4441-819B-2DB27D53D9B1}"/>
               </a:ext>
             </a:extLst>
           </p:cNvPr>
@@ -34012,7 +34012,7 @@
     </p:spTree>
     <p:extLst>
       <p:ext uri="{BB962C8B-B14F-4D97-AF65-F5344CB8AC3E}">
-        <p14:creationId xmlns:p14="http://schemas.microsoft.com/office/powerpoint/2010/main" val="1227785357"/>
+        <p14:creationId xmlns:p14="http://schemas.microsoft.com/office/powerpoint/2010/main" val="1264260838"/>
       </p:ext>
     </p:extLst>
   </p:cSld>
@@ -34040,7 +34040,7 @@
           <p:nvPr/>
         </p:nvPicPr>
         <p:blipFill>
-          <a:blip xmlns:r="http://schemas.openxmlformats.org/officeDocument/2006/relationships" xmlns:a="http://schemas.openxmlformats.org/drawingml/2006/main" r:embed="R9640ad98095c462f"/>
+          <a:blip xmlns:r="http://schemas.openxmlformats.org/officeDocument/2006/relationships" xmlns:a="http://schemas.openxmlformats.org/drawingml/2006/main" r:embed="R15ad9100a53a4855"/>
           <a:stretch xmlns:a="http://schemas.openxmlformats.org/drawingml/2006/main">
             <a:fillRect l="0" t="0" r="0" b="0"/>
           </a:stretch>
@@ -34060,7 +34060,7 @@
           <p:cNvPr id="3" name="Rectangle 2">
             <a:extLst xmlns:a="http://schemas.openxmlformats.org/drawingml/2006/main">
               <a:ext uri="{FF2B5EF4-FFF2-40B4-BE49-F238E27FC236}">
-                <a16:creationId xmlns:a16="http://schemas.microsoft.com/office/drawing/2014/main" id="{D438C22C-8ABA-482A-82B3-2FB04A747BE2}"/>
+                <a16:creationId xmlns:a16="http://schemas.microsoft.com/office/drawing/2014/main" id="{61B34B92-7280-45E0-9974-374A890B087B}"/>
               </a:ext>
             </a:extLst>
           </p:cNvPr>
@@ -34113,7 +34113,7 @@
           <p:cNvPr id="4" name="TextBox 3">
             <a:extLst xmlns:a="http://schemas.openxmlformats.org/drawingml/2006/main">
               <a:ext uri="{FF2B5EF4-FFF2-40B4-BE49-F238E27FC236}">
-                <a16:creationId xmlns:a16="http://schemas.microsoft.com/office/drawing/2014/main" id="{37DB380A-DD7F-46B0-B5EA-B70FA269BDB1}"/>
+                <a16:creationId xmlns:a16="http://schemas.microsoft.com/office/drawing/2014/main" id="{A7FF3EFB-7004-4900-B91C-CD3A72019BE2}"/>
               </a:ext>
             </a:extLst>
           </p:cNvPr>
@@ -34168,7 +34168,7 @@
           <p:cNvPr id="5" name="Rectangle 4">
             <a:extLst xmlns:a="http://schemas.openxmlformats.org/drawingml/2006/main">
               <a:ext uri="{FF2B5EF4-FFF2-40B4-BE49-F238E27FC236}">
-                <a16:creationId xmlns:a16="http://schemas.microsoft.com/office/drawing/2014/main" id="{7A3B918B-2238-4E45-B8FD-EA37DA178919}"/>
+                <a16:creationId xmlns:a16="http://schemas.microsoft.com/office/drawing/2014/main" id="{5E18A146-9B8B-46DC-8405-D7C6288DC4F2}"/>
               </a:ext>
             </a:extLst>
           </p:cNvPr>
@@ -34221,7 +34221,7 @@
           <p:cNvPr id="6" name="TextBox 5">
             <a:extLst xmlns:a="http://schemas.openxmlformats.org/drawingml/2006/main">
               <a:ext uri="{FF2B5EF4-FFF2-40B4-BE49-F238E27FC236}">
-                <a16:creationId xmlns:a16="http://schemas.microsoft.com/office/drawing/2014/main" id="{99E05C22-DDA7-4158-A36F-98A23BFA1990}"/>
+                <a16:creationId xmlns:a16="http://schemas.microsoft.com/office/drawing/2014/main" id="{1F2601C9-48AF-498D-9EC5-09E3C75A90F8}"/>
               </a:ext>
             </a:extLst>
           </p:cNvPr>
@@ -34276,7 +34276,7 @@
           <p:cNvPr id="7" name="TextBox 6">
             <a:extLst xmlns:a="http://schemas.openxmlformats.org/drawingml/2006/main">
               <a:ext uri="{FF2B5EF4-FFF2-40B4-BE49-F238E27FC236}">
-                <a16:creationId xmlns:a16="http://schemas.microsoft.com/office/drawing/2014/main" id="{D587A63C-98E8-4EB4-9E75-AA330C96B7F4}"/>
+                <a16:creationId xmlns:a16="http://schemas.microsoft.com/office/drawing/2014/main" id="{B6C4E3E8-7EF2-4CDC-9E67-DAD79613EC9E}"/>
               </a:ext>
             </a:extLst>
           </p:cNvPr>
@@ -34469,7 +34469,7 @@
           <p:cNvPr id="8" name="Rectangle 7">
             <a:extLst xmlns:a="http://schemas.openxmlformats.org/drawingml/2006/main">
               <a:ext uri="{FF2B5EF4-FFF2-40B4-BE49-F238E27FC236}">
-                <a16:creationId xmlns:a16="http://schemas.microsoft.com/office/drawing/2014/main" id="{867EFC49-9CCC-4F94-83F4-3D6B4890B07E}"/>
+                <a16:creationId xmlns:a16="http://schemas.microsoft.com/office/drawing/2014/main" id="{0C768659-E583-4110-AF18-DF9EE93408C8}"/>
               </a:ext>
             </a:extLst>
           </p:cNvPr>
@@ -34522,7 +34522,7 @@
           <p:cNvPr id="9" name="Rectangle 8">
             <a:extLst xmlns:a="http://schemas.openxmlformats.org/drawingml/2006/main">
               <a:ext uri="{FF2B5EF4-FFF2-40B4-BE49-F238E27FC236}">
-                <a16:creationId xmlns:a16="http://schemas.microsoft.com/office/drawing/2014/main" id="{F07AFE3A-EC3E-4723-9DBB-92298F10EE13}"/>
+                <a16:creationId xmlns:a16="http://schemas.microsoft.com/office/drawing/2014/main" id="{BF3464AF-0E07-4627-B28E-39B4B7EECF2B}"/>
               </a:ext>
             </a:extLst>
           </p:cNvPr>
@@ -34575,7 +34575,7 @@
           <p:cNvPr id="10" name="TextBox 9">
             <a:extLst xmlns:a="http://schemas.openxmlformats.org/drawingml/2006/main">
               <a:ext uri="{FF2B5EF4-FFF2-40B4-BE49-F238E27FC236}">
-                <a16:creationId xmlns:a16="http://schemas.microsoft.com/office/drawing/2014/main" id="{8005E67D-B6C9-494D-91B9-2D7930083FC6}"/>
+                <a16:creationId xmlns:a16="http://schemas.microsoft.com/office/drawing/2014/main" id="{FEA38AE8-3ED2-4AC1-BCED-6CBD5465F4D6}"/>
               </a:ext>
             </a:extLst>
           </p:cNvPr>
@@ -34630,7 +34630,7 @@
           <p:cNvPr id="11" name="TextBox 10">
             <a:extLst xmlns:a="http://schemas.openxmlformats.org/drawingml/2006/main">
               <a:ext uri="{FF2B5EF4-FFF2-40B4-BE49-F238E27FC236}">
-                <a16:creationId xmlns:a16="http://schemas.microsoft.com/office/drawing/2014/main" id="{5D10B24C-EF34-4314-A746-4268EE81D335}"/>
+                <a16:creationId xmlns:a16="http://schemas.microsoft.com/office/drawing/2014/main" id="{3B743E60-6729-4E8E-825E-DC0EAC0C1633}"/>
               </a:ext>
             </a:extLst>
           </p:cNvPr>
@@ -34683,7 +34683,7 @@
     </p:spTree>
     <p:extLst>
       <p:ext uri="{BB962C8B-B14F-4D97-AF65-F5344CB8AC3E}">
-        <p14:creationId xmlns:p14="http://schemas.microsoft.com/office/powerpoint/2010/main" val="1001806473"/>
+        <p14:creationId xmlns:p14="http://schemas.microsoft.com/office/powerpoint/2010/main" val="1302796225"/>
       </p:ext>
     </p:extLst>
   </p:cSld>
@@ -34707,7 +34707,7 @@
           <p:cNvPr id="2" name="Rectangle 1">
             <a:extLst xmlns:a="http://schemas.openxmlformats.org/drawingml/2006/main">
               <a:ext uri="{FF2B5EF4-FFF2-40B4-BE49-F238E27FC236}">
-                <a16:creationId xmlns:a16="http://schemas.microsoft.com/office/drawing/2014/main" id="{4E57174C-A6B2-491D-B5AA-5F48693525A5}"/>
+                <a16:creationId xmlns:a16="http://schemas.microsoft.com/office/drawing/2014/main" id="{DC61294C-5A65-4F4E-823A-8F1CE6211530}"/>
               </a:ext>
             </a:extLst>
           </p:cNvPr>
@@ -34760,7 +34760,7 @@
           <p:cNvPr id="3" name="Rectangle 2">
             <a:extLst xmlns:a="http://schemas.openxmlformats.org/drawingml/2006/main">
               <a:ext uri="{FF2B5EF4-FFF2-40B4-BE49-F238E27FC236}">
-                <a16:creationId xmlns:a16="http://schemas.microsoft.com/office/drawing/2014/main" id="{E72B4ECB-4D49-4CD6-9DA5-6BBE39B132AE}"/>
+                <a16:creationId xmlns:a16="http://schemas.microsoft.com/office/drawing/2014/main" id="{7323B226-FD94-408F-AEE9-415799625888}"/>
               </a:ext>
             </a:extLst>
           </p:cNvPr>
@@ -34813,7 +34813,7 @@
           <p:cNvPr id="4" name="TextBox 3">
             <a:extLst xmlns:a="http://schemas.openxmlformats.org/drawingml/2006/main">
               <a:ext uri="{FF2B5EF4-FFF2-40B4-BE49-F238E27FC236}">
-                <a16:creationId xmlns:a16="http://schemas.microsoft.com/office/drawing/2014/main" id="{9FCC1C00-77B1-452C-BAA9-F898E5E9E2A9}"/>
+                <a16:creationId xmlns:a16="http://schemas.microsoft.com/office/drawing/2014/main" id="{8EA921B9-0D42-461F-B07B-C64961831B23}"/>
               </a:ext>
             </a:extLst>
           </p:cNvPr>
@@ -34868,7 +34868,7 @@
           <p:cNvPr id="5" name="TextBox 4">
             <a:extLst xmlns:a="http://schemas.openxmlformats.org/drawingml/2006/main">
               <a:ext uri="{FF2B5EF4-FFF2-40B4-BE49-F238E27FC236}">
-                <a16:creationId xmlns:a16="http://schemas.microsoft.com/office/drawing/2014/main" id="{0F167B0C-D9F5-4ADC-A63A-B577E167BA40}"/>
+                <a16:creationId xmlns:a16="http://schemas.microsoft.com/office/drawing/2014/main" id="{CBD90FF4-836C-4A2D-934A-B68322D6C57C}"/>
               </a:ext>
             </a:extLst>
           </p:cNvPr>
@@ -34923,7 +34923,7 @@
           <p:cNvPr id="6" name="TextBox 5">
             <a:extLst xmlns:a="http://schemas.openxmlformats.org/drawingml/2006/main">
               <a:ext uri="{FF2B5EF4-FFF2-40B4-BE49-F238E27FC236}">
-                <a16:creationId xmlns:a16="http://schemas.microsoft.com/office/drawing/2014/main" id="{F5EBAC8C-45C4-4EF7-AA9C-3F9E07CDBC9E}"/>
+                <a16:creationId xmlns:a16="http://schemas.microsoft.com/office/drawing/2014/main" id="{6DC1BF23-2C8E-4686-999E-D4864F099802}"/>
               </a:ext>
             </a:extLst>
           </p:cNvPr>
@@ -34978,7 +34978,7 @@
           <p:cNvPr id="7" name="Rectangle 6">
             <a:extLst xmlns:a="http://schemas.openxmlformats.org/drawingml/2006/main">
               <a:ext uri="{FF2B5EF4-FFF2-40B4-BE49-F238E27FC236}">
-                <a16:creationId xmlns:a16="http://schemas.microsoft.com/office/drawing/2014/main" id="{1566E549-0368-4251-8FD8-ED48FA1913BC}"/>
+                <a16:creationId xmlns:a16="http://schemas.microsoft.com/office/drawing/2014/main" id="{94EB5767-0B51-4B10-817C-3D1805B7636A}"/>
               </a:ext>
             </a:extLst>
           </p:cNvPr>
@@ -35029,7 +35029,7 @@
     </p:spTree>
     <p:extLst>
       <p:ext uri="{BB962C8B-B14F-4D97-AF65-F5344CB8AC3E}">
-        <p14:creationId xmlns:p14="http://schemas.microsoft.com/office/powerpoint/2010/main" val="1087632484"/>
+        <p14:creationId xmlns:p14="http://schemas.microsoft.com/office/powerpoint/2010/main" val="556170575"/>
       </p:ext>
     </p:extLst>
   </p:cSld>
@@ -35057,7 +35057,7 @@
           <p:nvPr/>
         </p:nvPicPr>
         <p:blipFill>
-          <a:blip xmlns:r="http://schemas.openxmlformats.org/officeDocument/2006/relationships" xmlns:a="http://schemas.openxmlformats.org/drawingml/2006/main" r:embed="R3c0d0dafefa84a5a"/>
+          <a:blip xmlns:r="http://schemas.openxmlformats.org/officeDocument/2006/relationships" xmlns:a="http://schemas.openxmlformats.org/drawingml/2006/main" r:embed="Ra664b835fad84b62"/>
           <a:stretch xmlns:a="http://schemas.openxmlformats.org/drawingml/2006/main">
             <a:fillRect l="0" t="0" r="0" b="0"/>
           </a:stretch>
@@ -35077,7 +35077,7 @@
           <p:cNvPr id="3" name="Rectangle 2">
             <a:extLst xmlns:a="http://schemas.openxmlformats.org/drawingml/2006/main">
               <a:ext uri="{FF2B5EF4-FFF2-40B4-BE49-F238E27FC236}">
-                <a16:creationId xmlns:a16="http://schemas.microsoft.com/office/drawing/2014/main" id="{380BB520-0BB7-4074-BDED-2793EF130EB6}"/>
+                <a16:creationId xmlns:a16="http://schemas.microsoft.com/office/drawing/2014/main" id="{CD8041EF-4BAE-4605-A985-E5B014344539}"/>
               </a:ext>
             </a:extLst>
           </p:cNvPr>
@@ -35130,7 +35130,7 @@
           <p:cNvPr id="4" name="Rectangle 3">
             <a:extLst xmlns:a="http://schemas.openxmlformats.org/drawingml/2006/main">
               <a:ext uri="{FF2B5EF4-FFF2-40B4-BE49-F238E27FC236}">
-                <a16:creationId xmlns:a16="http://schemas.microsoft.com/office/drawing/2014/main" id="{137AE40C-C15F-473D-BB7E-DEABEC0D9117}"/>
+                <a16:creationId xmlns:a16="http://schemas.microsoft.com/office/drawing/2014/main" id="{B572DBDC-6593-4B48-B4FC-636AD3A78A87}"/>
               </a:ext>
             </a:extLst>
           </p:cNvPr>
@@ -35183,7 +35183,7 @@
           <p:cNvPr id="5" name="Rectangle 4">
             <a:extLst xmlns:a="http://schemas.openxmlformats.org/drawingml/2006/main">
               <a:ext uri="{FF2B5EF4-FFF2-40B4-BE49-F238E27FC236}">
-                <a16:creationId xmlns:a16="http://schemas.microsoft.com/office/drawing/2014/main" id="{FB3042AB-C152-42F2-9B60-ECEFDF1BABAA}"/>
+                <a16:creationId xmlns:a16="http://schemas.microsoft.com/office/drawing/2014/main" id="{C8C0F927-DE5C-4B92-9EC8-624721F22620}"/>
               </a:ext>
             </a:extLst>
           </p:cNvPr>
@@ -35240,7 +35240,7 @@
           <p:nvPr/>
         </p:nvPicPr>
         <p:blipFill>
-          <a:blip xmlns:r="http://schemas.openxmlformats.org/officeDocument/2006/relationships" xmlns:a="http://schemas.openxmlformats.org/drawingml/2006/main" r:embed="Rd9ddb3a649a8440a"/>
+          <a:blip xmlns:r="http://schemas.openxmlformats.org/officeDocument/2006/relationships" xmlns:a="http://schemas.openxmlformats.org/drawingml/2006/main" r:embed="R8e40160ca28b48c5"/>
           <a:stretch xmlns:a="http://schemas.openxmlformats.org/drawingml/2006/main">
             <a:fillRect l="0" t="0" r="0" b="0"/>
           </a:stretch>
@@ -35260,7 +35260,7 @@
           <p:cNvPr id="7" name="Rectangle 6">
             <a:extLst xmlns:a="http://schemas.openxmlformats.org/drawingml/2006/main">
               <a:ext uri="{FF2B5EF4-FFF2-40B4-BE49-F238E27FC236}">
-                <a16:creationId xmlns:a16="http://schemas.microsoft.com/office/drawing/2014/main" id="{AB47FD55-F603-4B41-82A8-C1065626576F}"/>
+                <a16:creationId xmlns:a16="http://schemas.microsoft.com/office/drawing/2014/main" id="{4B62A26B-28B7-40C4-86E1-DD4BA3892BE9}"/>
               </a:ext>
             </a:extLst>
           </p:cNvPr>
@@ -35313,7 +35313,7 @@
           <p:cNvPr id="8" name="TextBox 7">
             <a:extLst xmlns:a="http://schemas.openxmlformats.org/drawingml/2006/main">
               <a:ext uri="{FF2B5EF4-FFF2-40B4-BE49-F238E27FC236}">
-                <a16:creationId xmlns:a16="http://schemas.microsoft.com/office/drawing/2014/main" id="{50AED5EA-FA0F-47BF-ABB7-8ADA76E2DDAA}"/>
+                <a16:creationId xmlns:a16="http://schemas.microsoft.com/office/drawing/2014/main" id="{7FA7000C-4A07-4CB4-AFF1-760C6E229367}"/>
               </a:ext>
             </a:extLst>
           </p:cNvPr>
@@ -35368,7 +35368,7 @@
           <p:cNvPr id="9" name="TextBox 8">
             <a:extLst xmlns:a="http://schemas.openxmlformats.org/drawingml/2006/main">
               <a:ext uri="{FF2B5EF4-FFF2-40B4-BE49-F238E27FC236}">
-                <a16:creationId xmlns:a16="http://schemas.microsoft.com/office/drawing/2014/main" id="{E96FF52D-F002-407B-B791-2EDFB3580CEA}"/>
+                <a16:creationId xmlns:a16="http://schemas.microsoft.com/office/drawing/2014/main" id="{BB2ED613-FB42-4AB3-B7C5-4FF642BB3526}"/>
               </a:ext>
             </a:extLst>
           </p:cNvPr>
@@ -35423,7 +35423,7 @@
           <p:cNvPr id="10" name="TextBox 9">
             <a:extLst xmlns:a="http://schemas.openxmlformats.org/drawingml/2006/main">
               <a:ext uri="{FF2B5EF4-FFF2-40B4-BE49-F238E27FC236}">
-                <a16:creationId xmlns:a16="http://schemas.microsoft.com/office/drawing/2014/main" id="{47BCBE31-1A1C-452D-9367-0BA8702E6E2D}"/>
+                <a16:creationId xmlns:a16="http://schemas.microsoft.com/office/drawing/2014/main" id="{CB984E94-FF21-4D82-BA6D-DCC6DC9AEF6D}"/>
               </a:ext>
             </a:extLst>
           </p:cNvPr>
@@ -35453,14 +35453,14 @@
                 <a:spcPct val="115000"/>
               </a:lnSpc>
               <a:buNone/>
-              <a:defRPr sz="2000">
+              <a:defRPr sz="1400">
                 <a:latin typeface="Arial"/>
                 <a:ea typeface="Arial"/>
                 <a:cs typeface="Arial"/>
               </a:defRPr>
             </a:pPr>
             <a:r>
-              <a:rPr sz="2000" b="1" i="0">
+              <a:rPr sz="1400" b="1" i="0">
                 <a:solidFill>
                   <a:srgbClr val="102A43"/>
                 </a:solidFill>
@@ -35478,7 +35478,7 @@
           <p:cNvPr id="11" name="TextBox 10">
             <a:extLst xmlns:a="http://schemas.openxmlformats.org/drawingml/2006/main">
               <a:ext uri="{FF2B5EF4-FFF2-40B4-BE49-F238E27FC236}">
-                <a16:creationId xmlns:a16="http://schemas.microsoft.com/office/drawing/2014/main" id="{2ADE269B-DCE2-4AA6-8E06-9A6A61CB2320}"/>
+                <a16:creationId xmlns:a16="http://schemas.microsoft.com/office/drawing/2014/main" id="{A0BEEB8C-7CE2-4E6D-9DAA-9AD18879F38E}"/>
               </a:ext>
             </a:extLst>
           </p:cNvPr>
@@ -35533,7 +35533,7 @@
           <p:cNvPr id="12" name="Rectangle 11">
             <a:extLst xmlns:a="http://schemas.openxmlformats.org/drawingml/2006/main">
               <a:ext uri="{FF2B5EF4-FFF2-40B4-BE49-F238E27FC236}">
-                <a16:creationId xmlns:a16="http://schemas.microsoft.com/office/drawing/2014/main" id="{C387D76B-E0B5-45A5-BD30-9A563F4434EB}"/>
+                <a16:creationId xmlns:a16="http://schemas.microsoft.com/office/drawing/2014/main" id="{885B60C0-B335-49DB-9F33-3ACCCE705A9D}"/>
               </a:ext>
             </a:extLst>
           </p:cNvPr>
@@ -35586,7 +35586,7 @@
           <p:cNvPr id="13" name="Rectangle 12">
             <a:extLst xmlns:a="http://schemas.openxmlformats.org/drawingml/2006/main">
               <a:ext uri="{FF2B5EF4-FFF2-40B4-BE49-F238E27FC236}">
-                <a16:creationId xmlns:a16="http://schemas.microsoft.com/office/drawing/2014/main" id="{E52D7108-541C-458E-A153-7E649445069C}"/>
+                <a16:creationId xmlns:a16="http://schemas.microsoft.com/office/drawing/2014/main" id="{EDA98737-F4E0-4C87-9AEB-440318A50217}"/>
               </a:ext>
             </a:extLst>
           </p:cNvPr>
@@ -35639,7 +35639,7 @@
           <p:cNvPr id="14" name="TextBox 13">
             <a:extLst xmlns:a="http://schemas.openxmlformats.org/drawingml/2006/main">
               <a:ext uri="{FF2B5EF4-FFF2-40B4-BE49-F238E27FC236}">
-                <a16:creationId xmlns:a16="http://schemas.microsoft.com/office/drawing/2014/main" id="{EDAA74D3-34C4-491B-8F56-44CC79444AE8}"/>
+                <a16:creationId xmlns:a16="http://schemas.microsoft.com/office/drawing/2014/main" id="{026DAC22-BB65-40B7-B4BC-FE325A4EAB64}"/>
               </a:ext>
             </a:extLst>
           </p:cNvPr>
@@ -35694,7 +35694,7 @@
           <p:cNvPr id="15" name="TextBox 14">
             <a:extLst xmlns:a="http://schemas.openxmlformats.org/drawingml/2006/main">
               <a:ext uri="{FF2B5EF4-FFF2-40B4-BE49-F238E27FC236}">
-                <a16:creationId xmlns:a16="http://schemas.microsoft.com/office/drawing/2014/main" id="{8A09BEA8-259A-42BD-A033-0A7A3064D741}"/>
+                <a16:creationId xmlns:a16="http://schemas.microsoft.com/office/drawing/2014/main" id="{4BA48EF1-E518-46C4-9CDC-203C04917992}"/>
               </a:ext>
             </a:extLst>
           </p:cNvPr>
@@ -35747,7 +35747,7 @@
     </p:spTree>
     <p:extLst>
       <p:ext uri="{BB962C8B-B14F-4D97-AF65-F5344CB8AC3E}">
-        <p14:creationId xmlns:p14="http://schemas.microsoft.com/office/powerpoint/2010/main" val="1454999899"/>
+        <p14:creationId xmlns:p14="http://schemas.microsoft.com/office/powerpoint/2010/main" val="1248991053"/>
       </p:ext>
     </p:extLst>
   </p:cSld>
@@ -35775,7 +35775,7 @@
           <p:nvPr/>
         </p:nvPicPr>
         <p:blipFill>
-          <a:blip xmlns:r="http://schemas.openxmlformats.org/officeDocument/2006/relationships" xmlns:a="http://schemas.openxmlformats.org/drawingml/2006/main" r:embed="R9a769f2155c14b20"/>
+          <a:blip xmlns:r="http://schemas.openxmlformats.org/officeDocument/2006/relationships" xmlns:a="http://schemas.openxmlformats.org/drawingml/2006/main" r:embed="Rade89903776a4ce3"/>
           <a:stretch xmlns:a="http://schemas.openxmlformats.org/drawingml/2006/main">
             <a:fillRect l="0" t="0" r="0" b="0"/>
           </a:stretch>
@@ -35795,7 +35795,7 @@
           <p:cNvPr id="3" name="Rectangle 2">
             <a:extLst xmlns:a="http://schemas.openxmlformats.org/drawingml/2006/main">
               <a:ext uri="{FF2B5EF4-FFF2-40B4-BE49-F238E27FC236}">
-                <a16:creationId xmlns:a16="http://schemas.microsoft.com/office/drawing/2014/main" id="{D6206723-C76F-4F42-A658-D9E1F1A9D7C7}"/>
+                <a16:creationId xmlns:a16="http://schemas.microsoft.com/office/drawing/2014/main" id="{4A3351AB-142B-4E0A-8377-793BB6B33CCA}"/>
               </a:ext>
             </a:extLst>
           </p:cNvPr>
@@ -35848,7 +35848,7 @@
           <p:cNvPr id="4" name="TextBox 3">
             <a:extLst xmlns:a="http://schemas.openxmlformats.org/drawingml/2006/main">
               <a:ext uri="{FF2B5EF4-FFF2-40B4-BE49-F238E27FC236}">
-                <a16:creationId xmlns:a16="http://schemas.microsoft.com/office/drawing/2014/main" id="{63BC477B-DD84-4CA0-ABAC-FDC28EE96CC9}"/>
+                <a16:creationId xmlns:a16="http://schemas.microsoft.com/office/drawing/2014/main" id="{44EB6568-B21E-4DB3-9AE7-145E4AE50B9D}"/>
               </a:ext>
             </a:extLst>
           </p:cNvPr>
@@ -35903,7 +35903,7 @@
           <p:cNvPr id="5" name="TextBox 4">
             <a:extLst xmlns:a="http://schemas.openxmlformats.org/drawingml/2006/main">
               <a:ext uri="{FF2B5EF4-FFF2-40B4-BE49-F238E27FC236}">
-                <a16:creationId xmlns:a16="http://schemas.microsoft.com/office/drawing/2014/main" id="{76236909-2F43-44C3-A03B-F00D7985F828}"/>
+                <a16:creationId xmlns:a16="http://schemas.microsoft.com/office/drawing/2014/main" id="{D9E77697-46FB-4597-876B-10ED3CBD2267}"/>
               </a:ext>
             </a:extLst>
           </p:cNvPr>
@@ -35958,7 +35958,7 @@
           <p:cNvPr id="6" name="TextBox 5">
             <a:extLst xmlns:a="http://schemas.openxmlformats.org/drawingml/2006/main">
               <a:ext uri="{FF2B5EF4-FFF2-40B4-BE49-F238E27FC236}">
-                <a16:creationId xmlns:a16="http://schemas.microsoft.com/office/drawing/2014/main" id="{1242CCFA-7E99-43C1-9B4E-7E66F0627564}"/>
+                <a16:creationId xmlns:a16="http://schemas.microsoft.com/office/drawing/2014/main" id="{BED0A1D3-7D7F-42C8-B289-E006E967FF99}"/>
               </a:ext>
             </a:extLst>
           </p:cNvPr>
@@ -36097,7 +36097,7 @@
           <p:cNvPr id="7" name="Rectangle 6">
             <a:extLst xmlns:a="http://schemas.openxmlformats.org/drawingml/2006/main">
               <a:ext uri="{FF2B5EF4-FFF2-40B4-BE49-F238E27FC236}">
-                <a16:creationId xmlns:a16="http://schemas.microsoft.com/office/drawing/2014/main" id="{FCCA857E-7CA1-4AF4-847C-73BD4C3BBCBA}"/>
+                <a16:creationId xmlns:a16="http://schemas.microsoft.com/office/drawing/2014/main" id="{18022449-1FE0-4495-961D-332A2F8217CE}"/>
               </a:ext>
             </a:extLst>
           </p:cNvPr>
@@ -36150,7 +36150,7 @@
           <p:cNvPr id="8" name="Rectangle 7">
             <a:extLst xmlns:a="http://schemas.openxmlformats.org/drawingml/2006/main">
               <a:ext uri="{FF2B5EF4-FFF2-40B4-BE49-F238E27FC236}">
-                <a16:creationId xmlns:a16="http://schemas.microsoft.com/office/drawing/2014/main" id="{2258019E-936F-4B1C-8292-52D24D02F047}"/>
+                <a16:creationId xmlns:a16="http://schemas.microsoft.com/office/drawing/2014/main" id="{A9EB88D6-D8CA-471D-80CF-08454FADE683}"/>
               </a:ext>
             </a:extLst>
           </p:cNvPr>
@@ -36203,7 +36203,7 @@
           <p:cNvPr id="9" name="TextBox 8">
             <a:extLst xmlns:a="http://schemas.openxmlformats.org/drawingml/2006/main">
               <a:ext uri="{FF2B5EF4-FFF2-40B4-BE49-F238E27FC236}">
-                <a16:creationId xmlns:a16="http://schemas.microsoft.com/office/drawing/2014/main" id="{4FB0B29B-7E1A-449C-A095-E85E32EA5FD5}"/>
+                <a16:creationId xmlns:a16="http://schemas.microsoft.com/office/drawing/2014/main" id="{69FB9C41-243A-4D2C-9E9A-99D39B82A807}"/>
               </a:ext>
             </a:extLst>
           </p:cNvPr>
@@ -36258,7 +36258,7 @@
           <p:cNvPr id="10" name="TextBox 9">
             <a:extLst xmlns:a="http://schemas.openxmlformats.org/drawingml/2006/main">
               <a:ext uri="{FF2B5EF4-FFF2-40B4-BE49-F238E27FC236}">
-                <a16:creationId xmlns:a16="http://schemas.microsoft.com/office/drawing/2014/main" id="{92C27E1F-5D16-420E-8001-0895BC88E54B}"/>
+                <a16:creationId xmlns:a16="http://schemas.microsoft.com/office/drawing/2014/main" id="{28FF55F5-3DB5-40FA-9F33-0EC0B2B731F7}"/>
               </a:ext>
             </a:extLst>
           </p:cNvPr>
@@ -36311,7 +36311,7 @@
     </p:spTree>
     <p:extLst>
       <p:ext uri="{BB962C8B-B14F-4D97-AF65-F5344CB8AC3E}">
-        <p14:creationId xmlns:p14="http://schemas.microsoft.com/office/powerpoint/2010/main" val="1699105943"/>
+        <p14:creationId xmlns:p14="http://schemas.microsoft.com/office/powerpoint/2010/main" val="1097430730"/>
       </p:ext>
     </p:extLst>
   </p:cSld>
@@ -36339,7 +36339,7 @@
           <p:nvPr/>
         </p:nvPicPr>
         <p:blipFill>
-          <a:blip xmlns:r="http://schemas.openxmlformats.org/officeDocument/2006/relationships" xmlns:a="http://schemas.openxmlformats.org/drawingml/2006/main" r:embed="R1bcf6a6ef2a64818"/>
+          <a:blip xmlns:r="http://schemas.openxmlformats.org/officeDocument/2006/relationships" xmlns:a="http://schemas.openxmlformats.org/drawingml/2006/main" r:embed="R97e5f585f58042cc"/>
           <a:stretch xmlns:a="http://schemas.openxmlformats.org/drawingml/2006/main">
             <a:fillRect l="0" t="0" r="0" b="0"/>
           </a:stretch>
@@ -36359,7 +36359,7 @@
           <p:cNvPr id="3" name="Rectangle 2">
             <a:extLst xmlns:a="http://schemas.openxmlformats.org/drawingml/2006/main">
               <a:ext uri="{FF2B5EF4-FFF2-40B4-BE49-F238E27FC236}">
-                <a16:creationId xmlns:a16="http://schemas.microsoft.com/office/drawing/2014/main" id="{595E95DA-8917-4C71-8532-54398CB73AAE}"/>
+                <a16:creationId xmlns:a16="http://schemas.microsoft.com/office/drawing/2014/main" id="{FE48F237-0823-4F56-8C41-F0C78156ADB8}"/>
               </a:ext>
             </a:extLst>
           </p:cNvPr>
@@ -36412,7 +36412,7 @@
           <p:cNvPr id="4" name="TextBox 3">
             <a:extLst xmlns:a="http://schemas.openxmlformats.org/drawingml/2006/main">
               <a:ext uri="{FF2B5EF4-FFF2-40B4-BE49-F238E27FC236}">
-                <a16:creationId xmlns:a16="http://schemas.microsoft.com/office/drawing/2014/main" id="{43410212-C298-45DC-9E8A-BCD66872A9B6}"/>
+                <a16:creationId xmlns:a16="http://schemas.microsoft.com/office/drawing/2014/main" id="{FC75D807-F37C-4D15-B4B7-70DB747E6218}"/>
               </a:ext>
             </a:extLst>
           </p:cNvPr>
@@ -36467,7 +36467,7 @@
           <p:cNvPr id="5" name="TextBox 4">
             <a:extLst xmlns:a="http://schemas.openxmlformats.org/drawingml/2006/main">
               <a:ext uri="{FF2B5EF4-FFF2-40B4-BE49-F238E27FC236}">
-                <a16:creationId xmlns:a16="http://schemas.microsoft.com/office/drawing/2014/main" id="{A821ECC0-178C-4769-A9C4-C35347F7C3B0}"/>
+                <a16:creationId xmlns:a16="http://schemas.microsoft.com/office/drawing/2014/main" id="{886CFF2F-5180-444A-9A09-9717727B49C8}"/>
               </a:ext>
             </a:extLst>
           </p:cNvPr>
@@ -36870,7 +36870,7 @@
           <p:cNvPr id="7" name="Rectangle 6">
             <a:extLst xmlns:a="http://schemas.openxmlformats.org/drawingml/2006/main">
               <a:ext uri="{FF2B5EF4-FFF2-40B4-BE49-F238E27FC236}">
-                <a16:creationId xmlns:a16="http://schemas.microsoft.com/office/drawing/2014/main" id="{8C9E38F6-6FEF-4564-A5DC-B21BD326286E}"/>
+                <a16:creationId xmlns:a16="http://schemas.microsoft.com/office/drawing/2014/main" id="{45F9E570-6548-412F-BB34-FFC2EF9EA2D1}"/>
               </a:ext>
             </a:extLst>
           </p:cNvPr>
@@ -36923,7 +36923,7 @@
           <p:cNvPr id="8" name="Rectangle 7">
             <a:extLst xmlns:a="http://schemas.openxmlformats.org/drawingml/2006/main">
               <a:ext uri="{FF2B5EF4-FFF2-40B4-BE49-F238E27FC236}">
-                <a16:creationId xmlns:a16="http://schemas.microsoft.com/office/drawing/2014/main" id="{09BD1610-AAED-4D93-B177-E334D66E6B76}"/>
+                <a16:creationId xmlns:a16="http://schemas.microsoft.com/office/drawing/2014/main" id="{CF2FA883-87F3-432A-BFC8-FE410161AE48}"/>
               </a:ext>
             </a:extLst>
           </p:cNvPr>
@@ -36976,7 +36976,7 @@
           <p:cNvPr id="9" name="TextBox 8">
             <a:extLst xmlns:a="http://schemas.openxmlformats.org/drawingml/2006/main">
               <a:ext uri="{FF2B5EF4-FFF2-40B4-BE49-F238E27FC236}">
-                <a16:creationId xmlns:a16="http://schemas.microsoft.com/office/drawing/2014/main" id="{3C5CEC1C-8DCE-4713-A3C4-FD3482526609}"/>
+                <a16:creationId xmlns:a16="http://schemas.microsoft.com/office/drawing/2014/main" id="{3C580B0A-DDF6-445D-BACC-1D1CF379628A}"/>
               </a:ext>
             </a:extLst>
           </p:cNvPr>
@@ -37031,7 +37031,7 @@
           <p:cNvPr id="10" name="TextBox 9">
             <a:extLst xmlns:a="http://schemas.openxmlformats.org/drawingml/2006/main">
               <a:ext uri="{FF2B5EF4-FFF2-40B4-BE49-F238E27FC236}">
-                <a16:creationId xmlns:a16="http://schemas.microsoft.com/office/drawing/2014/main" id="{24259919-4C26-4937-B741-A877B48D86B1}"/>
+                <a16:creationId xmlns:a16="http://schemas.microsoft.com/office/drawing/2014/main" id="{B1D681F5-CAF6-4279-857B-8B187965F4CE}"/>
               </a:ext>
             </a:extLst>
           </p:cNvPr>
@@ -37084,7 +37084,7 @@
     </p:spTree>
     <p:extLst>
       <p:ext uri="{BB962C8B-B14F-4D97-AF65-F5344CB8AC3E}">
-        <p14:creationId xmlns:p14="http://schemas.microsoft.com/office/powerpoint/2010/main" val="1218810212"/>
+        <p14:creationId xmlns:p14="http://schemas.microsoft.com/office/powerpoint/2010/main" val="2026134806"/>
       </p:ext>
     </p:extLst>
   </p:cSld>
@@ -37112,7 +37112,7 @@
           <p:nvPr/>
         </p:nvPicPr>
         <p:blipFill>
-          <a:blip xmlns:r="http://schemas.openxmlformats.org/officeDocument/2006/relationships" xmlns:a="http://schemas.openxmlformats.org/drawingml/2006/main" r:embed="R41332a078b384f68"/>
+          <a:blip xmlns:r="http://schemas.openxmlformats.org/officeDocument/2006/relationships" xmlns:a="http://schemas.openxmlformats.org/drawingml/2006/main" r:embed="Rd9b38d4afa3649f6"/>
           <a:stretch xmlns:a="http://schemas.openxmlformats.org/drawingml/2006/main">
             <a:fillRect l="0" t="0" r="0" b="0"/>
           </a:stretch>
@@ -37132,7 +37132,7 @@
           <p:cNvPr id="3" name="Rectangle 2">
             <a:extLst xmlns:a="http://schemas.openxmlformats.org/drawingml/2006/main">
               <a:ext uri="{FF2B5EF4-FFF2-40B4-BE49-F238E27FC236}">
-                <a16:creationId xmlns:a16="http://schemas.microsoft.com/office/drawing/2014/main" id="{B3F4F11A-1EA8-4E82-AC1A-4B97D377AF20}"/>
+                <a16:creationId xmlns:a16="http://schemas.microsoft.com/office/drawing/2014/main" id="{B4462B84-63C5-49CA-8D23-459F2BBF2824}"/>
               </a:ext>
             </a:extLst>
           </p:cNvPr>
@@ -37185,7 +37185,7 @@
           <p:cNvPr id="4" name="TextBox 3">
             <a:extLst xmlns:a="http://schemas.openxmlformats.org/drawingml/2006/main">
               <a:ext uri="{FF2B5EF4-FFF2-40B4-BE49-F238E27FC236}">
-                <a16:creationId xmlns:a16="http://schemas.microsoft.com/office/drawing/2014/main" id="{C6E4A98D-8628-4E96-AEE2-A9F8F39A2877}"/>
+                <a16:creationId xmlns:a16="http://schemas.microsoft.com/office/drawing/2014/main" id="{09A66099-BDE6-4D5D-975E-2072A1C9348A}"/>
               </a:ext>
             </a:extLst>
           </p:cNvPr>
@@ -37240,7 +37240,7 @@
           <p:cNvPr id="5" name="TextBox 4">
             <a:extLst xmlns:a="http://schemas.openxmlformats.org/drawingml/2006/main">
               <a:ext uri="{FF2B5EF4-FFF2-40B4-BE49-F238E27FC236}">
-                <a16:creationId xmlns:a16="http://schemas.microsoft.com/office/drawing/2014/main" id="{D2FDC7C8-9C1D-4735-97FB-A45A3186F416}"/>
+                <a16:creationId xmlns:a16="http://schemas.microsoft.com/office/drawing/2014/main" id="{0501517F-49D2-4C51-9F7B-43E29AEEC257}"/>
               </a:ext>
             </a:extLst>
           </p:cNvPr>
@@ -37295,7 +37295,7 @@
           <p:cNvPr id="6" name="Rounded Rectangle 5">
             <a:extLst xmlns:a="http://schemas.openxmlformats.org/drawingml/2006/main">
               <a:ext uri="{FF2B5EF4-FFF2-40B4-BE49-F238E27FC236}">
-                <a16:creationId xmlns:a16="http://schemas.microsoft.com/office/drawing/2014/main" id="{B74AE7CA-BBF1-48E5-B78E-1B0DE46CA00E}"/>
+                <a16:creationId xmlns:a16="http://schemas.microsoft.com/office/drawing/2014/main" id="{94B03CED-ADAA-4CEE-8069-7CC35FB92AE9}"/>
               </a:ext>
             </a:extLst>
           </p:cNvPr>
@@ -37352,7 +37352,7 @@
           <p:cNvPr id="7" name="TextBox 6">
             <a:extLst xmlns:a="http://schemas.openxmlformats.org/drawingml/2006/main">
               <a:ext uri="{FF2B5EF4-FFF2-40B4-BE49-F238E27FC236}">
-                <a16:creationId xmlns:a16="http://schemas.microsoft.com/office/drawing/2014/main" id="{3A2FD26A-DCE3-442A-9342-89E968B24422}"/>
+                <a16:creationId xmlns:a16="http://schemas.microsoft.com/office/drawing/2014/main" id="{EBC29B99-A846-463D-98D4-B4A3DEA7FC4F}"/>
               </a:ext>
             </a:extLst>
           </p:cNvPr>
@@ -37407,7 +37407,7 @@
           <p:cNvPr id="8" name="TextBox 7">
             <a:extLst xmlns:a="http://schemas.openxmlformats.org/drawingml/2006/main">
               <a:ext uri="{FF2B5EF4-FFF2-40B4-BE49-F238E27FC236}">
-                <a16:creationId xmlns:a16="http://schemas.microsoft.com/office/drawing/2014/main" id="{0BD3CE06-6F42-4274-8EA0-47AD432FDA4C}"/>
+                <a16:creationId xmlns:a16="http://schemas.microsoft.com/office/drawing/2014/main" id="{F7075B46-4AB1-41D8-9EDE-803A50F297BE}"/>
               </a:ext>
             </a:extLst>
           </p:cNvPr>
@@ -37462,7 +37462,7 @@
           <p:cNvPr id="9" name="TextBox 8">
             <a:extLst xmlns:a="http://schemas.openxmlformats.org/drawingml/2006/main">
               <a:ext uri="{FF2B5EF4-FFF2-40B4-BE49-F238E27FC236}">
-                <a16:creationId xmlns:a16="http://schemas.microsoft.com/office/drawing/2014/main" id="{294C5C50-0E30-4FA7-AC29-A8F8F9C27282}"/>
+                <a16:creationId xmlns:a16="http://schemas.microsoft.com/office/drawing/2014/main" id="{ED44A5CA-B40B-4BFB-9034-7D3ADA4AE62D}"/>
               </a:ext>
             </a:extLst>
           </p:cNvPr>
@@ -37517,7 +37517,7 @@
           <p:cNvPr id="10" name="Rounded Rectangle 9">
             <a:extLst xmlns:a="http://schemas.openxmlformats.org/drawingml/2006/main">
               <a:ext uri="{FF2B5EF4-FFF2-40B4-BE49-F238E27FC236}">
-                <a16:creationId xmlns:a16="http://schemas.microsoft.com/office/drawing/2014/main" id="{FD390D2A-77AF-4DE1-9826-625F4AE3F4FD}"/>
+                <a16:creationId xmlns:a16="http://schemas.microsoft.com/office/drawing/2014/main" id="{26917577-19A9-4385-B244-EDA3733FADFE}"/>
               </a:ext>
             </a:extLst>
           </p:cNvPr>
@@ -37574,7 +37574,7 @@
           <p:cNvPr id="11" name="TextBox 10">
             <a:extLst xmlns:a="http://schemas.openxmlformats.org/drawingml/2006/main">
               <a:ext uri="{FF2B5EF4-FFF2-40B4-BE49-F238E27FC236}">
-                <a16:creationId xmlns:a16="http://schemas.microsoft.com/office/drawing/2014/main" id="{EC884528-71C4-41AE-B50D-21B6741002F6}"/>
+                <a16:creationId xmlns:a16="http://schemas.microsoft.com/office/drawing/2014/main" id="{D2E6DFC3-480E-4023-870E-53C42F8BBF8A}"/>
               </a:ext>
             </a:extLst>
           </p:cNvPr>
@@ -37629,7 +37629,7 @@
           <p:cNvPr id="12" name="TextBox 11">
             <a:extLst xmlns:a="http://schemas.openxmlformats.org/drawingml/2006/main">
               <a:ext uri="{FF2B5EF4-FFF2-40B4-BE49-F238E27FC236}">
-                <a16:creationId xmlns:a16="http://schemas.microsoft.com/office/drawing/2014/main" id="{100F14A0-61FC-40B0-9ED8-ECB231A4FB31}"/>
+                <a16:creationId xmlns:a16="http://schemas.microsoft.com/office/drawing/2014/main" id="{E32D46F5-0597-476B-A8B6-E0D81DF997F7}"/>
               </a:ext>
             </a:extLst>
           </p:cNvPr>
@@ -37684,7 +37684,7 @@
           <p:cNvPr id="13" name="TextBox 12">
             <a:extLst xmlns:a="http://schemas.openxmlformats.org/drawingml/2006/main">
               <a:ext uri="{FF2B5EF4-FFF2-40B4-BE49-F238E27FC236}">
-                <a16:creationId xmlns:a16="http://schemas.microsoft.com/office/drawing/2014/main" id="{7E041868-70BC-4628-9871-3BFF25759445}"/>
+                <a16:creationId xmlns:a16="http://schemas.microsoft.com/office/drawing/2014/main" id="{7EAF0010-E48B-480D-B8D1-4122CB200CD7}"/>
               </a:ext>
             </a:extLst>
           </p:cNvPr>
@@ -37739,7 +37739,7 @@
           <p:cNvPr id="14" name="Rounded Rectangle 13">
             <a:extLst xmlns:a="http://schemas.openxmlformats.org/drawingml/2006/main">
               <a:ext uri="{FF2B5EF4-FFF2-40B4-BE49-F238E27FC236}">
-                <a16:creationId xmlns:a16="http://schemas.microsoft.com/office/drawing/2014/main" id="{50FDE06C-4802-4E75-9693-464DCAA42B32}"/>
+                <a16:creationId xmlns:a16="http://schemas.microsoft.com/office/drawing/2014/main" id="{CD92FD11-2F9C-4985-A177-2F5206DE4EE4}"/>
               </a:ext>
             </a:extLst>
           </p:cNvPr>
@@ -37796,7 +37796,7 @@
           <p:cNvPr id="15" name="TextBox 14">
             <a:extLst xmlns:a="http://schemas.openxmlformats.org/drawingml/2006/main">
               <a:ext uri="{FF2B5EF4-FFF2-40B4-BE49-F238E27FC236}">
-                <a16:creationId xmlns:a16="http://schemas.microsoft.com/office/drawing/2014/main" id="{F4852DDA-D08B-4A6E-BF23-65A95024CEA8}"/>
+                <a16:creationId xmlns:a16="http://schemas.microsoft.com/office/drawing/2014/main" id="{EBCA6C6C-0673-447B-ADE2-44B6DCAA7B6B}"/>
               </a:ext>
             </a:extLst>
           </p:cNvPr>
@@ -37851,7 +37851,7 @@
           <p:cNvPr id="16" name="TextBox 15">
             <a:extLst xmlns:a="http://schemas.openxmlformats.org/drawingml/2006/main">
               <a:ext uri="{FF2B5EF4-FFF2-40B4-BE49-F238E27FC236}">
-                <a16:creationId xmlns:a16="http://schemas.microsoft.com/office/drawing/2014/main" id="{591346BD-5ADE-4759-9363-F337472C59E6}"/>
+                <a16:creationId xmlns:a16="http://schemas.microsoft.com/office/drawing/2014/main" id="{4A495F52-9FA2-47AA-9873-A0D649CBFA90}"/>
               </a:ext>
             </a:extLst>
           </p:cNvPr>
@@ -37906,7 +37906,7 @@
           <p:cNvPr id="17" name="TextBox 16">
             <a:extLst xmlns:a="http://schemas.openxmlformats.org/drawingml/2006/main">
               <a:ext uri="{FF2B5EF4-FFF2-40B4-BE49-F238E27FC236}">
-                <a16:creationId xmlns:a16="http://schemas.microsoft.com/office/drawing/2014/main" id="{86BC7127-DA67-42BC-B502-C5A1FDA07EE4}"/>
+                <a16:creationId xmlns:a16="http://schemas.microsoft.com/office/drawing/2014/main" id="{428A2493-1C84-4CF1-8BA9-1319E6D44613}"/>
               </a:ext>
             </a:extLst>
           </p:cNvPr>
@@ -37961,7 +37961,7 @@
           <p:cNvPr id="18" name="Rounded Rectangle 17">
             <a:extLst xmlns:a="http://schemas.openxmlformats.org/drawingml/2006/main">
               <a:ext uri="{FF2B5EF4-FFF2-40B4-BE49-F238E27FC236}">
-                <a16:creationId xmlns:a16="http://schemas.microsoft.com/office/drawing/2014/main" id="{8340FB68-81E7-4443-9D16-04F8AB9DA95D}"/>
+                <a16:creationId xmlns:a16="http://schemas.microsoft.com/office/drawing/2014/main" id="{C80D56D1-B5B9-4D91-90F6-E81A339C9A58}"/>
               </a:ext>
             </a:extLst>
           </p:cNvPr>
@@ -38018,7 +38018,7 @@
           <p:cNvPr id="19" name="TextBox 18">
             <a:extLst xmlns:a="http://schemas.openxmlformats.org/drawingml/2006/main">
               <a:ext uri="{FF2B5EF4-FFF2-40B4-BE49-F238E27FC236}">
-                <a16:creationId xmlns:a16="http://schemas.microsoft.com/office/drawing/2014/main" id="{0FEECEFA-6BDD-4DB3-86A3-8F5A89C821C1}"/>
+                <a16:creationId xmlns:a16="http://schemas.microsoft.com/office/drawing/2014/main" id="{96ACA3CC-1E07-4EB4-8055-8A2E4882EFF0}"/>
               </a:ext>
             </a:extLst>
           </p:cNvPr>
@@ -38073,7 +38073,7 @@
           <p:cNvPr id="20" name="TextBox 19">
             <a:extLst xmlns:a="http://schemas.openxmlformats.org/drawingml/2006/main">
               <a:ext uri="{FF2B5EF4-FFF2-40B4-BE49-F238E27FC236}">
-                <a16:creationId xmlns:a16="http://schemas.microsoft.com/office/drawing/2014/main" id="{9036A7FB-C45B-4ACE-B19B-ACA4E4F74DE1}"/>
+                <a16:creationId xmlns:a16="http://schemas.microsoft.com/office/drawing/2014/main" id="{CDCD89A9-9545-4109-B984-58577A2A89A7}"/>
               </a:ext>
             </a:extLst>
           </p:cNvPr>
@@ -38128,7 +38128,7 @@
           <p:cNvPr id="21" name="Rectangle 20">
             <a:extLst xmlns:a="http://schemas.openxmlformats.org/drawingml/2006/main">
               <a:ext uri="{FF2B5EF4-FFF2-40B4-BE49-F238E27FC236}">
-                <a16:creationId xmlns:a16="http://schemas.microsoft.com/office/drawing/2014/main" id="{203274CD-5F63-4626-B22E-82CD5BB8A733}"/>
+                <a16:creationId xmlns:a16="http://schemas.microsoft.com/office/drawing/2014/main" id="{83A8F364-6669-4B59-8560-3FA84402B2F8}"/>
               </a:ext>
             </a:extLst>
           </p:cNvPr>
@@ -38181,7 +38181,7 @@
           <p:cNvPr id="22" name="Rectangle 21">
             <a:extLst xmlns:a="http://schemas.openxmlformats.org/drawingml/2006/main">
               <a:ext uri="{FF2B5EF4-FFF2-40B4-BE49-F238E27FC236}">
-                <a16:creationId xmlns:a16="http://schemas.microsoft.com/office/drawing/2014/main" id="{AFDD0CAA-DF9C-42CD-AA31-777B2B71131D}"/>
+                <a16:creationId xmlns:a16="http://schemas.microsoft.com/office/drawing/2014/main" id="{AC1092B5-59CD-44B5-B7B4-D8BF0B01451B}"/>
               </a:ext>
             </a:extLst>
           </p:cNvPr>
@@ -38234,7 +38234,7 @@
           <p:cNvPr id="23" name="TextBox 22">
             <a:extLst xmlns:a="http://schemas.openxmlformats.org/drawingml/2006/main">
               <a:ext uri="{FF2B5EF4-FFF2-40B4-BE49-F238E27FC236}">
-                <a16:creationId xmlns:a16="http://schemas.microsoft.com/office/drawing/2014/main" id="{17D1B370-8092-4ABC-AA61-893E43B8F5CB}"/>
+                <a16:creationId xmlns:a16="http://schemas.microsoft.com/office/drawing/2014/main" id="{FCFF1BE6-3DD8-430E-A0CE-5E2E83480E56}"/>
               </a:ext>
             </a:extLst>
           </p:cNvPr>
@@ -38289,7 +38289,7 @@
           <p:cNvPr id="24" name="TextBox 23">
             <a:extLst xmlns:a="http://schemas.openxmlformats.org/drawingml/2006/main">
               <a:ext uri="{FF2B5EF4-FFF2-40B4-BE49-F238E27FC236}">
-                <a16:creationId xmlns:a16="http://schemas.microsoft.com/office/drawing/2014/main" id="{464F1B63-D642-4F2E-9DC9-DCF46345DEE5}"/>
+                <a16:creationId xmlns:a16="http://schemas.microsoft.com/office/drawing/2014/main" id="{1D39E424-56CB-429A-9D89-22C2CA6DB902}"/>
               </a:ext>
             </a:extLst>
           </p:cNvPr>
@@ -38342,7 +38342,7 @@
     </p:spTree>
     <p:extLst>
       <p:ext uri="{BB962C8B-B14F-4D97-AF65-F5344CB8AC3E}">
-        <p14:creationId xmlns:p14="http://schemas.microsoft.com/office/powerpoint/2010/main" val="195225164"/>
+        <p14:creationId xmlns:p14="http://schemas.microsoft.com/office/powerpoint/2010/main" val="610059835"/>
       </p:ext>
     </p:extLst>
   </p:cSld>
@@ -38370,7 +38370,7 @@
           <p:nvPr/>
         </p:nvPicPr>
         <p:blipFill>
-          <a:blip xmlns:r="http://schemas.openxmlformats.org/officeDocument/2006/relationships" xmlns:a="http://schemas.openxmlformats.org/drawingml/2006/main" r:embed="R06bb73a4be0a4783"/>
+          <a:blip xmlns:r="http://schemas.openxmlformats.org/officeDocument/2006/relationships" xmlns:a="http://schemas.openxmlformats.org/drawingml/2006/main" r:embed="R2567903e2e9744c2"/>
           <a:stretch xmlns:a="http://schemas.openxmlformats.org/drawingml/2006/main">
             <a:fillRect l="0" t="0" r="0" b="0"/>
           </a:stretch>
@@ -38390,7 +38390,7 @@
           <p:cNvPr id="3" name="Rectangle 2">
             <a:extLst xmlns:a="http://schemas.openxmlformats.org/drawingml/2006/main">
               <a:ext uri="{FF2B5EF4-FFF2-40B4-BE49-F238E27FC236}">
-                <a16:creationId xmlns:a16="http://schemas.microsoft.com/office/drawing/2014/main" id="{A046B1BA-6259-4BDF-A4C3-0B3E8BAC004B}"/>
+                <a16:creationId xmlns:a16="http://schemas.microsoft.com/office/drawing/2014/main" id="{DF9B6FB2-BACC-4808-98B9-8842EC111E81}"/>
               </a:ext>
             </a:extLst>
           </p:cNvPr>
@@ -38443,7 +38443,7 @@
           <p:cNvPr id="4" name="TextBox 3">
             <a:extLst xmlns:a="http://schemas.openxmlformats.org/drawingml/2006/main">
               <a:ext uri="{FF2B5EF4-FFF2-40B4-BE49-F238E27FC236}">
-                <a16:creationId xmlns:a16="http://schemas.microsoft.com/office/drawing/2014/main" id="{DA69281E-1A0D-48FA-82F0-A29D08275797}"/>
+                <a16:creationId xmlns:a16="http://schemas.microsoft.com/office/drawing/2014/main" id="{815DC0B7-8B25-448B-8857-C5CF0AD3F434}"/>
               </a:ext>
             </a:extLst>
           </p:cNvPr>
@@ -38498,7 +38498,7 @@
           <p:cNvPr id="5" name="TextBox 4">
             <a:extLst xmlns:a="http://schemas.openxmlformats.org/drawingml/2006/main">
               <a:ext uri="{FF2B5EF4-FFF2-40B4-BE49-F238E27FC236}">
-                <a16:creationId xmlns:a16="http://schemas.microsoft.com/office/drawing/2014/main" id="{418B448E-DC88-4A87-8B79-E0E795829966}"/>
+                <a16:creationId xmlns:a16="http://schemas.microsoft.com/office/drawing/2014/main" id="{4600AB37-71FE-4D25-AD44-D295CC6101B3}"/>
               </a:ext>
             </a:extLst>
           </p:cNvPr>
@@ -38553,7 +38553,7 @@
           <p:cNvPr id="6" name="Rounded Rectangle 5">
             <a:extLst xmlns:a="http://schemas.openxmlformats.org/drawingml/2006/main">
               <a:ext uri="{FF2B5EF4-FFF2-40B4-BE49-F238E27FC236}">
-                <a16:creationId xmlns:a16="http://schemas.microsoft.com/office/drawing/2014/main" id="{84E845AA-A48E-45B3-8C2F-B7F37C1F79E1}"/>
+                <a16:creationId xmlns:a16="http://schemas.microsoft.com/office/drawing/2014/main" id="{02D28458-2F3B-47A2-B325-6C46E4ECE447}"/>
               </a:ext>
             </a:extLst>
           </p:cNvPr>
@@ -38610,7 +38610,7 @@
           <p:cNvPr id="7" name="TextBox 6">
             <a:extLst xmlns:a="http://schemas.openxmlformats.org/drawingml/2006/main">
               <a:ext uri="{FF2B5EF4-FFF2-40B4-BE49-F238E27FC236}">
-                <a16:creationId xmlns:a16="http://schemas.microsoft.com/office/drawing/2014/main" id="{EFAB20C2-CC49-40A0-90BD-7B03F199B47C}"/>
+                <a16:creationId xmlns:a16="http://schemas.microsoft.com/office/drawing/2014/main" id="{1ABC8720-EFB8-4F74-A9A3-895AA3826F0A}"/>
               </a:ext>
             </a:extLst>
           </p:cNvPr>
@@ -38665,7 +38665,7 @@
           <p:cNvPr id="8" name="TextBox 7">
             <a:extLst xmlns:a="http://schemas.openxmlformats.org/drawingml/2006/main">
               <a:ext uri="{FF2B5EF4-FFF2-40B4-BE49-F238E27FC236}">
-                <a16:creationId xmlns:a16="http://schemas.microsoft.com/office/drawing/2014/main" id="{F7D6C49D-68C5-4F39-974D-15405936776F}"/>
+                <a16:creationId xmlns:a16="http://schemas.microsoft.com/office/drawing/2014/main" id="{1B33D242-FD43-4504-94BD-83434446A9CE}"/>
               </a:ext>
             </a:extLst>
           </p:cNvPr>
@@ -38677,7 +38677,7 @@
         <p:spPr>
           <a:xfrm xmlns:a="http://schemas.openxmlformats.org/drawingml/2006/main">
             <a:off x="584200" y="2654300"/>
-            <a:ext cx="5245100" cy="701040"/>
+            <a:ext cx="5245100" cy="444500"/>
           </a:xfrm>
           <a:prstGeom xmlns:a="http://schemas.openxmlformats.org/drawingml/2006/main" prst="rect">
             <a:avLst/>
@@ -38695,14 +38695,14 @@
                 <a:spcPct val="115000"/>
               </a:lnSpc>
               <a:buNone/>
-              <a:defRPr sz="2000">
+              <a:defRPr sz="1400">
                 <a:latin typeface="Arial"/>
                 <a:ea typeface="Arial"/>
                 <a:cs typeface="Arial"/>
               </a:defRPr>
             </a:pPr>
             <a:r>
-              <a:rPr sz="2000" b="1" i="0">
+              <a:rPr sz="1400" b="1" i="0">
                 <a:solidFill>
                   <a:srgbClr val="102A43"/>
                 </a:solidFill>
@@ -38720,7 +38720,7 @@
           <p:cNvPr id="9" name="TextBox 8">
             <a:extLst xmlns:a="http://schemas.openxmlformats.org/drawingml/2006/main">
               <a:ext uri="{FF2B5EF4-FFF2-40B4-BE49-F238E27FC236}">
-                <a16:creationId xmlns:a16="http://schemas.microsoft.com/office/drawing/2014/main" id="{36F9CDD8-FD76-4DE5-8D96-599E9E8B78F0}"/>
+                <a16:creationId xmlns:a16="http://schemas.microsoft.com/office/drawing/2014/main" id="{01D71DDE-8461-4806-9FEF-FE1217D2B599}"/>
               </a:ext>
             </a:extLst>
           </p:cNvPr>
@@ -38832,7 +38832,7 @@
           <p:cNvPr id="10" name="Rounded Rectangle 9">
             <a:extLst xmlns:a="http://schemas.openxmlformats.org/drawingml/2006/main">
               <a:ext uri="{FF2B5EF4-FFF2-40B4-BE49-F238E27FC236}">
-                <a16:creationId xmlns:a16="http://schemas.microsoft.com/office/drawing/2014/main" id="{0EB3A078-C5DE-4CAD-BF45-CE8B6EA7E125}"/>
+                <a16:creationId xmlns:a16="http://schemas.microsoft.com/office/drawing/2014/main" id="{87B6F201-E833-45A3-AF3B-0EAB5CC099A5}"/>
               </a:ext>
             </a:extLst>
           </p:cNvPr>
@@ -38889,7 +38889,7 @@
           <p:cNvPr id="11" name="TextBox 10">
             <a:extLst xmlns:a="http://schemas.openxmlformats.org/drawingml/2006/main">
               <a:ext uri="{FF2B5EF4-FFF2-40B4-BE49-F238E27FC236}">
-                <a16:creationId xmlns:a16="http://schemas.microsoft.com/office/drawing/2014/main" id="{75DE6AD0-7634-46B1-894F-C48F074B3D4D}"/>
+                <a16:creationId xmlns:a16="http://schemas.microsoft.com/office/drawing/2014/main" id="{E138E3AD-7A5D-4F62-95EA-161A9782FDC5}"/>
               </a:ext>
             </a:extLst>
           </p:cNvPr>
@@ -38944,7 +38944,7 @@
           <p:cNvPr id="12" name="TextBox 11">
             <a:extLst xmlns:a="http://schemas.openxmlformats.org/drawingml/2006/main">
               <a:ext uri="{FF2B5EF4-FFF2-40B4-BE49-F238E27FC236}">
-                <a16:creationId xmlns:a16="http://schemas.microsoft.com/office/drawing/2014/main" id="{8EA1478B-E7F9-4CD2-AF95-E96AEDC78004}"/>
+                <a16:creationId xmlns:a16="http://schemas.microsoft.com/office/drawing/2014/main" id="{D4C81B06-4B9F-416D-BE92-47D032E9DD44}"/>
               </a:ext>
             </a:extLst>
           </p:cNvPr>
@@ -38974,14 +38974,14 @@
                 <a:spcPct val="115000"/>
               </a:lnSpc>
               <a:buNone/>
-              <a:defRPr sz="2000">
+              <a:defRPr sz="1400">
                 <a:latin typeface="Arial"/>
                 <a:ea typeface="Arial"/>
                 <a:cs typeface="Arial"/>
               </a:defRPr>
             </a:pPr>
             <a:r>
-              <a:rPr sz="2000" b="1" i="0">
+              <a:rPr sz="1400" b="1" i="0">
                 <a:solidFill>
                   <a:srgbClr val="102A43"/>
                 </a:solidFill>
@@ -38999,7 +38999,7 @@
           <p:cNvPr id="13" name="TextBox 12">
             <a:extLst xmlns:a="http://schemas.openxmlformats.org/drawingml/2006/main">
               <a:ext uri="{FF2B5EF4-FFF2-40B4-BE49-F238E27FC236}">
-                <a16:creationId xmlns:a16="http://schemas.microsoft.com/office/drawing/2014/main" id="{F32BEBFB-BCE6-4761-8EB8-AB0698012552}"/>
+                <a16:creationId xmlns:a16="http://schemas.microsoft.com/office/drawing/2014/main" id="{46A5850C-F50B-49E6-8E6F-D44C97D52163}"/>
               </a:ext>
             </a:extLst>
           </p:cNvPr>
@@ -39111,7 +39111,7 @@
           <p:cNvPr id="14" name="Rectangle 13">
             <a:extLst xmlns:a="http://schemas.openxmlformats.org/drawingml/2006/main">
               <a:ext uri="{FF2B5EF4-FFF2-40B4-BE49-F238E27FC236}">
-                <a16:creationId xmlns:a16="http://schemas.microsoft.com/office/drawing/2014/main" id="{7A862F3C-8684-420F-80C3-947E253523C4}"/>
+                <a16:creationId xmlns:a16="http://schemas.microsoft.com/office/drawing/2014/main" id="{F5B405A5-9EEB-40F7-AC99-22CDB7D375A6}"/>
               </a:ext>
             </a:extLst>
           </p:cNvPr>
@@ -39164,7 +39164,7 @@
           <p:cNvPr id="15" name="Rectangle 14">
             <a:extLst xmlns:a="http://schemas.openxmlformats.org/drawingml/2006/main">
               <a:ext uri="{FF2B5EF4-FFF2-40B4-BE49-F238E27FC236}">
-                <a16:creationId xmlns:a16="http://schemas.microsoft.com/office/drawing/2014/main" id="{423372F3-4508-4CEC-A8CD-52EC03A6E6ED}"/>
+                <a16:creationId xmlns:a16="http://schemas.microsoft.com/office/drawing/2014/main" id="{3250588E-3B7C-4F08-884F-081824E2895E}"/>
               </a:ext>
             </a:extLst>
           </p:cNvPr>
@@ -39217,7 +39217,7 @@
           <p:cNvPr id="16" name="TextBox 15">
             <a:extLst xmlns:a="http://schemas.openxmlformats.org/drawingml/2006/main">
               <a:ext uri="{FF2B5EF4-FFF2-40B4-BE49-F238E27FC236}">
-                <a16:creationId xmlns:a16="http://schemas.microsoft.com/office/drawing/2014/main" id="{DB44F395-284E-4165-8B64-C0D329E2B1A4}"/>
+                <a16:creationId xmlns:a16="http://schemas.microsoft.com/office/drawing/2014/main" id="{E23B13F4-6355-42AA-BCF6-7C65537D18AD}"/>
               </a:ext>
             </a:extLst>
           </p:cNvPr>
@@ -39272,7 +39272,7 @@
           <p:cNvPr id="17" name="TextBox 16">
             <a:extLst xmlns:a="http://schemas.openxmlformats.org/drawingml/2006/main">
               <a:ext uri="{FF2B5EF4-FFF2-40B4-BE49-F238E27FC236}">
-                <a16:creationId xmlns:a16="http://schemas.microsoft.com/office/drawing/2014/main" id="{FF81CB55-D3D2-41EB-8769-4555DBFEAFB1}"/>
+                <a16:creationId xmlns:a16="http://schemas.microsoft.com/office/drawing/2014/main" id="{519CF63E-CBEC-4B13-8021-F43183F1E2D4}"/>
               </a:ext>
             </a:extLst>
           </p:cNvPr>
@@ -39325,7 +39325,7 @@
     </p:spTree>
     <p:extLst>
       <p:ext uri="{BB962C8B-B14F-4D97-AF65-F5344CB8AC3E}">
-        <p14:creationId xmlns:p14="http://schemas.microsoft.com/office/powerpoint/2010/main" val="240857242"/>
+        <p14:creationId xmlns:p14="http://schemas.microsoft.com/office/powerpoint/2010/main" val="1761003112"/>
       </p:ext>
     </p:extLst>
   </p:cSld>
@@ -39353,7 +39353,7 @@
           <p:nvPr/>
         </p:nvPicPr>
         <p:blipFill>
-          <a:blip xmlns:r="http://schemas.openxmlformats.org/officeDocument/2006/relationships" xmlns:a="http://schemas.openxmlformats.org/drawingml/2006/main" r:embed="R17534de9339f4c02"/>
+          <a:blip xmlns:r="http://schemas.openxmlformats.org/officeDocument/2006/relationships" xmlns:a="http://schemas.openxmlformats.org/drawingml/2006/main" r:embed="R28882147aa9d4b9b"/>
           <a:stretch xmlns:a="http://schemas.openxmlformats.org/drawingml/2006/main">
             <a:fillRect l="0" t="0" r="0" b="0"/>
           </a:stretch>
@@ -39373,7 +39373,7 @@
           <p:cNvPr id="3" name="Rectangle 2">
             <a:extLst xmlns:a="http://schemas.openxmlformats.org/drawingml/2006/main">
               <a:ext uri="{FF2B5EF4-FFF2-40B4-BE49-F238E27FC236}">
-                <a16:creationId xmlns:a16="http://schemas.microsoft.com/office/drawing/2014/main" id="{E4EECA80-5C6E-4517-BE45-9D89C8BE8DA7}"/>
+                <a16:creationId xmlns:a16="http://schemas.microsoft.com/office/drawing/2014/main" id="{8381D152-7390-4FCB-A72C-6681E427D801}"/>
               </a:ext>
             </a:extLst>
           </p:cNvPr>
@@ -39426,7 +39426,7 @@
           <p:cNvPr id="4" name="TextBox 3">
             <a:extLst xmlns:a="http://schemas.openxmlformats.org/drawingml/2006/main">
               <a:ext uri="{FF2B5EF4-FFF2-40B4-BE49-F238E27FC236}">
-                <a16:creationId xmlns:a16="http://schemas.microsoft.com/office/drawing/2014/main" id="{769428ED-3D70-425D-97FB-04E11DE9C9CB}"/>
+                <a16:creationId xmlns:a16="http://schemas.microsoft.com/office/drawing/2014/main" id="{8AED7B27-B9D6-40EA-865E-E33741CC350E}"/>
               </a:ext>
             </a:extLst>
           </p:cNvPr>
@@ -39481,7 +39481,7 @@
           <p:cNvPr id="5" name="TextBox 4">
             <a:extLst xmlns:a="http://schemas.openxmlformats.org/drawingml/2006/main">
               <a:ext uri="{FF2B5EF4-FFF2-40B4-BE49-F238E27FC236}">
-                <a16:creationId xmlns:a16="http://schemas.microsoft.com/office/drawing/2014/main" id="{912E02BD-4C39-41BF-B5DE-C6B292D26B3A}"/>
+                <a16:creationId xmlns:a16="http://schemas.microsoft.com/office/drawing/2014/main" id="{CFC8941D-C859-42FE-9A6A-B92918754E17}"/>
               </a:ext>
             </a:extLst>
           </p:cNvPr>
@@ -39536,7 +39536,7 @@
           <p:cNvPr id="6" name="Rounded Rectangle 5">
             <a:extLst xmlns:a="http://schemas.openxmlformats.org/drawingml/2006/main">
               <a:ext uri="{FF2B5EF4-FFF2-40B4-BE49-F238E27FC236}">
-                <a16:creationId xmlns:a16="http://schemas.microsoft.com/office/drawing/2014/main" id="{8981F0C4-7D3B-4A76-80A1-1B0F62791DE1}"/>
+                <a16:creationId xmlns:a16="http://schemas.microsoft.com/office/drawing/2014/main" id="{0EDDADCE-B2A0-4D12-9F69-6D9C7ADD8CC6}"/>
               </a:ext>
             </a:extLst>
           </p:cNvPr>
@@ -39593,7 +39593,7 @@
           <p:cNvPr id="7" name="TextBox 6">
             <a:extLst xmlns:a="http://schemas.openxmlformats.org/drawingml/2006/main">
               <a:ext uri="{FF2B5EF4-FFF2-40B4-BE49-F238E27FC236}">
-                <a16:creationId xmlns:a16="http://schemas.microsoft.com/office/drawing/2014/main" id="{5885A145-6267-4AFB-B6BD-F96C0B5469D3}"/>
+                <a16:creationId xmlns:a16="http://schemas.microsoft.com/office/drawing/2014/main" id="{D7FA2B58-2EA4-4175-B7BB-475599C15B3C}"/>
               </a:ext>
             </a:extLst>
           </p:cNvPr>
@@ -39648,7 +39648,7 @@
           <p:cNvPr id="8" name="TextBox 7">
             <a:extLst xmlns:a="http://schemas.openxmlformats.org/drawingml/2006/main">
               <a:ext uri="{FF2B5EF4-FFF2-40B4-BE49-F238E27FC236}">
-                <a16:creationId xmlns:a16="http://schemas.microsoft.com/office/drawing/2014/main" id="{E401DBEE-79FC-4239-835C-270255A2F104}"/>
+                <a16:creationId xmlns:a16="http://schemas.microsoft.com/office/drawing/2014/main" id="{D1C82D56-EB72-47AE-A00E-282EF81F2034}"/>
               </a:ext>
             </a:extLst>
           </p:cNvPr>
@@ -39678,14 +39678,14 @@
                 <a:spcPct val="115000"/>
               </a:lnSpc>
               <a:buNone/>
-              <a:defRPr sz="2000">
+              <a:defRPr sz="1400">
                 <a:latin typeface="Arial"/>
                 <a:ea typeface="Arial"/>
                 <a:cs typeface="Arial"/>
               </a:defRPr>
             </a:pPr>
             <a:r>
-              <a:rPr sz="2000" b="1" i="0">
+              <a:rPr sz="1400" b="1" i="0">
                 <a:solidFill>
                   <a:srgbClr val="102A43"/>
                 </a:solidFill>
@@ -39703,7 +39703,7 @@
           <p:cNvPr id="9" name="TextBox 8">
             <a:extLst xmlns:a="http://schemas.openxmlformats.org/drawingml/2006/main">
               <a:ext uri="{FF2B5EF4-FFF2-40B4-BE49-F238E27FC236}">
-                <a16:creationId xmlns:a16="http://schemas.microsoft.com/office/drawing/2014/main" id="{7FBE6D85-7B62-4B8A-ADA6-F74D2C259E01}"/>
+                <a16:creationId xmlns:a16="http://schemas.microsoft.com/office/drawing/2014/main" id="{DD0464FA-F55B-4E0A-B279-F3156ECED880}"/>
               </a:ext>
             </a:extLst>
           </p:cNvPr>
@@ -39788,7 +39788,7 @@
           <p:cNvPr id="10" name="Rounded Rectangle 9">
             <a:extLst xmlns:a="http://schemas.openxmlformats.org/drawingml/2006/main">
               <a:ext uri="{FF2B5EF4-FFF2-40B4-BE49-F238E27FC236}">
-                <a16:creationId xmlns:a16="http://schemas.microsoft.com/office/drawing/2014/main" id="{90C43B97-222E-41BE-A9F8-CABDBF06D18F}"/>
+                <a16:creationId xmlns:a16="http://schemas.microsoft.com/office/drawing/2014/main" id="{1A6B8E21-BDEB-49C9-BD64-C9D216DA76D4}"/>
               </a:ext>
             </a:extLst>
           </p:cNvPr>
@@ -39845,7 +39845,7 @@
           <p:cNvPr id="11" name="TextBox 10">
             <a:extLst xmlns:a="http://schemas.openxmlformats.org/drawingml/2006/main">
               <a:ext uri="{FF2B5EF4-FFF2-40B4-BE49-F238E27FC236}">
-                <a16:creationId xmlns:a16="http://schemas.microsoft.com/office/drawing/2014/main" id="{F1548632-4491-4E74-BFCD-FD9F68FD3D5F}"/>
+                <a16:creationId xmlns:a16="http://schemas.microsoft.com/office/drawing/2014/main" id="{DD830E0E-C019-45EC-9AE9-DE83887916C0}"/>
               </a:ext>
             </a:extLst>
           </p:cNvPr>
@@ -39900,7 +39900,7 @@
           <p:cNvPr id="12" name="TextBox 11">
             <a:extLst xmlns:a="http://schemas.openxmlformats.org/drawingml/2006/main">
               <a:ext uri="{FF2B5EF4-FFF2-40B4-BE49-F238E27FC236}">
-                <a16:creationId xmlns:a16="http://schemas.microsoft.com/office/drawing/2014/main" id="{954A85F0-6DDE-43DB-9E30-F0D48B9C9C78}"/>
+                <a16:creationId xmlns:a16="http://schemas.microsoft.com/office/drawing/2014/main" id="{4B35A87B-F2D6-4BD4-B7D8-B9B7F464A2A3}"/>
               </a:ext>
             </a:extLst>
           </p:cNvPr>
@@ -39930,14 +39930,14 @@
                 <a:spcPct val="115000"/>
               </a:lnSpc>
               <a:buNone/>
-              <a:defRPr sz="2000">
+              <a:defRPr sz="1400">
                 <a:latin typeface="Arial"/>
                 <a:ea typeface="Arial"/>
                 <a:cs typeface="Arial"/>
               </a:defRPr>
             </a:pPr>
             <a:r>
-              <a:rPr sz="2000" b="1" i="0">
+              <a:rPr sz="1400" b="1" i="0">
                 <a:solidFill>
                   <a:srgbClr val="102A43"/>
                 </a:solidFill>
@@ -39955,7 +39955,7 @@
           <p:cNvPr id="13" name="TextBox 12">
             <a:extLst xmlns:a="http://schemas.openxmlformats.org/drawingml/2006/main">
               <a:ext uri="{FF2B5EF4-FFF2-40B4-BE49-F238E27FC236}">
-                <a16:creationId xmlns:a16="http://schemas.microsoft.com/office/drawing/2014/main" id="{8EF22490-D2EE-41B3-8707-2DEA5DB5AD36}"/>
+                <a16:creationId xmlns:a16="http://schemas.microsoft.com/office/drawing/2014/main" id="{79CC44DF-55C3-4766-9BDA-EEF10DC10195}"/>
               </a:ext>
             </a:extLst>
           </p:cNvPr>
@@ -40067,7 +40067,7 @@
           <p:cNvPr id="14" name="Rectangle 13">
             <a:extLst xmlns:a="http://schemas.openxmlformats.org/drawingml/2006/main">
               <a:ext uri="{FF2B5EF4-FFF2-40B4-BE49-F238E27FC236}">
-                <a16:creationId xmlns:a16="http://schemas.microsoft.com/office/drawing/2014/main" id="{58EFAA7D-2502-4367-9881-453B7BF6DCF5}"/>
+                <a16:creationId xmlns:a16="http://schemas.microsoft.com/office/drawing/2014/main" id="{ED9D88C2-085C-48CC-9F01-C6CDCF0547A1}"/>
               </a:ext>
             </a:extLst>
           </p:cNvPr>
@@ -40120,7 +40120,7 @@
           <p:cNvPr id="15" name="Rectangle 14">
             <a:extLst xmlns:a="http://schemas.openxmlformats.org/drawingml/2006/main">
               <a:ext uri="{FF2B5EF4-FFF2-40B4-BE49-F238E27FC236}">
-                <a16:creationId xmlns:a16="http://schemas.microsoft.com/office/drawing/2014/main" id="{6CCE8AA2-0985-4EE8-A9A1-550310B860FA}"/>
+                <a16:creationId xmlns:a16="http://schemas.microsoft.com/office/drawing/2014/main" id="{2323B898-5FDE-4261-8955-57749B213DA9}"/>
               </a:ext>
             </a:extLst>
           </p:cNvPr>
@@ -40173,7 +40173,7 @@
           <p:cNvPr id="16" name="TextBox 15">
             <a:extLst xmlns:a="http://schemas.openxmlformats.org/drawingml/2006/main">
               <a:ext uri="{FF2B5EF4-FFF2-40B4-BE49-F238E27FC236}">
-                <a16:creationId xmlns:a16="http://schemas.microsoft.com/office/drawing/2014/main" id="{9E8D3B56-FC8E-47E4-A28C-BD53F850F540}"/>
+                <a16:creationId xmlns:a16="http://schemas.microsoft.com/office/drawing/2014/main" id="{096B7602-C8DC-4BD4-BF4C-469926479DBB}"/>
               </a:ext>
             </a:extLst>
           </p:cNvPr>
@@ -40228,7 +40228,7 @@
           <p:cNvPr id="17" name="TextBox 16">
             <a:extLst xmlns:a="http://schemas.openxmlformats.org/drawingml/2006/main">
               <a:ext uri="{FF2B5EF4-FFF2-40B4-BE49-F238E27FC236}">
-                <a16:creationId xmlns:a16="http://schemas.microsoft.com/office/drawing/2014/main" id="{DE6F1478-F966-4001-9640-C8E8351D1735}"/>
+                <a16:creationId xmlns:a16="http://schemas.microsoft.com/office/drawing/2014/main" id="{0E00786E-6B04-4471-A158-10A662600AE7}"/>
               </a:ext>
             </a:extLst>
           </p:cNvPr>
@@ -40281,7 +40281,7 @@
     </p:spTree>
     <p:extLst>
       <p:ext uri="{BB962C8B-B14F-4D97-AF65-F5344CB8AC3E}">
-        <p14:creationId xmlns:p14="http://schemas.microsoft.com/office/powerpoint/2010/main" val="131044100"/>
+        <p14:creationId xmlns:p14="http://schemas.microsoft.com/office/powerpoint/2010/main" val="825162746"/>
       </p:ext>
     </p:extLst>
   </p:cSld>

--- a/Auditoria_y_Control_de_Calidad_BIM_Gesconvial_Sesion6.pptx
+++ b/Auditoria_y_Control_de_Calidad_BIM_Gesconvial_Sesion6.pptx
@@ -2,59 +2,59 @@
 <file path=ppt/presentation.xml><?xml version="1.0" encoding="utf-8"?>
 <p:presentation xmlns:p="http://schemas.openxmlformats.org/presentationml/2006/main">
   <p:sldMasterIdLst>
-    <p:sldMasterId xmlns:r="http://schemas.openxmlformats.org/officeDocument/2006/relationships" id="2147483648" r:id="R2c11ca146439464b"/>
+    <p:sldMasterId xmlns:r="http://schemas.openxmlformats.org/officeDocument/2006/relationships" id="2147483648" r:id="R4308a203e3784184"/>
   </p:sldMasterIdLst>
   <p:notesMasterIdLst>
-    <p:notesMasterId xmlns:r="http://schemas.openxmlformats.org/officeDocument/2006/relationships" r:id="R4a657d065f73415f"/>
+    <p:notesMasterId xmlns:r="http://schemas.openxmlformats.org/officeDocument/2006/relationships" r:id="Rbeb4839daf394cb5"/>
   </p:notesMasterIdLst>
   <p:sldIdLst>
-    <p:sldId xmlns:r="http://schemas.openxmlformats.org/officeDocument/2006/relationships" id="256" r:id="Rde6c9afb50d54b64"/>
-    <p:sldId xmlns:r="http://schemas.openxmlformats.org/officeDocument/2006/relationships" id="257" r:id="R91ae3cb6869242dc"/>
-    <p:sldId xmlns:r="http://schemas.openxmlformats.org/officeDocument/2006/relationships" id="258" r:id="Re575203039704e45"/>
-    <p:sldId xmlns:r="http://schemas.openxmlformats.org/officeDocument/2006/relationships" id="259" r:id="Re2ddc906c9ad4ea8"/>
-    <p:sldId xmlns:r="http://schemas.openxmlformats.org/officeDocument/2006/relationships" id="260" r:id="R32299dd203644f59"/>
-    <p:sldId xmlns:r="http://schemas.openxmlformats.org/officeDocument/2006/relationships" id="261" r:id="R87f7b976411442f9"/>
-    <p:sldId xmlns:r="http://schemas.openxmlformats.org/officeDocument/2006/relationships" id="262" r:id="R22a4abb9ee284846"/>
-    <p:sldId xmlns:r="http://schemas.openxmlformats.org/officeDocument/2006/relationships" id="263" r:id="R23858e3fb6524b88"/>
-    <p:sldId xmlns:r="http://schemas.openxmlformats.org/officeDocument/2006/relationships" id="264" r:id="R98c0df8bc1e94f37"/>
-    <p:sldId xmlns:r="http://schemas.openxmlformats.org/officeDocument/2006/relationships" id="265" r:id="R59b129bf4456438d"/>
-    <p:sldId xmlns:r="http://schemas.openxmlformats.org/officeDocument/2006/relationships" id="266" r:id="Rd7da1f0603074af9"/>
-    <p:sldId xmlns:r="http://schemas.openxmlformats.org/officeDocument/2006/relationships" id="267" r:id="R02a7e0d828ed49b7"/>
-    <p:sldId xmlns:r="http://schemas.openxmlformats.org/officeDocument/2006/relationships" id="268" r:id="R6a691dbb966243e7"/>
-    <p:sldId xmlns:r="http://schemas.openxmlformats.org/officeDocument/2006/relationships" id="269" r:id="Ra92eec2fc8994e69"/>
-    <p:sldId xmlns:r="http://schemas.openxmlformats.org/officeDocument/2006/relationships" id="270" r:id="R194eb49cf1ed4e44"/>
-    <p:sldId xmlns:r="http://schemas.openxmlformats.org/officeDocument/2006/relationships" id="271" r:id="Rc6cbad2ce2c941e9"/>
-    <p:sldId xmlns:r="http://schemas.openxmlformats.org/officeDocument/2006/relationships" id="272" r:id="R5bab25a8269540a8"/>
-    <p:sldId xmlns:r="http://schemas.openxmlformats.org/officeDocument/2006/relationships" id="273" r:id="Rdc9d6efe4d0741e8"/>
-    <p:sldId xmlns:r="http://schemas.openxmlformats.org/officeDocument/2006/relationships" id="274" r:id="R17565914cabc4a33"/>
-    <p:sldId xmlns:r="http://schemas.openxmlformats.org/officeDocument/2006/relationships" id="275" r:id="R25152b05d937476f"/>
-    <p:sldId xmlns:r="http://schemas.openxmlformats.org/officeDocument/2006/relationships" id="276" r:id="R1c0d420ced01424b"/>
-    <p:sldId xmlns:r="http://schemas.openxmlformats.org/officeDocument/2006/relationships" id="277" r:id="R64b7982ffc7243cd"/>
-    <p:sldId xmlns:r="http://schemas.openxmlformats.org/officeDocument/2006/relationships" id="278" r:id="Rc033553f137c4152"/>
-    <p:sldId xmlns:r="http://schemas.openxmlformats.org/officeDocument/2006/relationships" id="279" r:id="R9a155352a22f482c"/>
-    <p:sldId xmlns:r="http://schemas.openxmlformats.org/officeDocument/2006/relationships" id="280" r:id="R6c831b4a8d844f6c"/>
-    <p:sldId xmlns:r="http://schemas.openxmlformats.org/officeDocument/2006/relationships" id="281" r:id="R56ff9d4ebd794c4c"/>
-    <p:sldId xmlns:r="http://schemas.openxmlformats.org/officeDocument/2006/relationships" id="282" r:id="R91a2195164c64406"/>
-    <p:sldId xmlns:r="http://schemas.openxmlformats.org/officeDocument/2006/relationships" id="283" r:id="R0dc75c560ffd494c"/>
-    <p:sldId xmlns:r="http://schemas.openxmlformats.org/officeDocument/2006/relationships" id="284" r:id="Rb1ec2d7f5ad34b4b"/>
-    <p:sldId xmlns:r="http://schemas.openxmlformats.org/officeDocument/2006/relationships" id="285" r:id="R865cf8a32aa54e7a"/>
-    <p:sldId xmlns:r="http://schemas.openxmlformats.org/officeDocument/2006/relationships" id="286" r:id="Rb684a0de4b0e45c1"/>
-    <p:sldId xmlns:r="http://schemas.openxmlformats.org/officeDocument/2006/relationships" id="287" r:id="R1b76c7fc15174785"/>
-    <p:sldId xmlns:r="http://schemas.openxmlformats.org/officeDocument/2006/relationships" id="288" r:id="Rd48af766cb094934"/>
-    <p:sldId xmlns:r="http://schemas.openxmlformats.org/officeDocument/2006/relationships" id="289" r:id="R2b7904ac2b934eb6"/>
-    <p:sldId xmlns:r="http://schemas.openxmlformats.org/officeDocument/2006/relationships" id="290" r:id="R6d2c7d5ff2d94989"/>
-    <p:sldId xmlns:r="http://schemas.openxmlformats.org/officeDocument/2006/relationships" id="291" r:id="R4f19401f0e2546c5"/>
-    <p:sldId xmlns:r="http://schemas.openxmlformats.org/officeDocument/2006/relationships" id="292" r:id="R6050303a04124511"/>
-    <p:sldId xmlns:r="http://schemas.openxmlformats.org/officeDocument/2006/relationships" id="293" r:id="R49432e512ea34295"/>
-    <p:sldId xmlns:r="http://schemas.openxmlformats.org/officeDocument/2006/relationships" id="294" r:id="R6facf9bcd8d34391"/>
-    <p:sldId xmlns:r="http://schemas.openxmlformats.org/officeDocument/2006/relationships" id="295" r:id="R106b479636214142"/>
-    <p:sldId xmlns:r="http://schemas.openxmlformats.org/officeDocument/2006/relationships" id="296" r:id="R0515c20b87524da5"/>
-    <p:sldId xmlns:r="http://schemas.openxmlformats.org/officeDocument/2006/relationships" id="297" r:id="Rf26ffd5b0fdf4c51"/>
-    <p:sldId xmlns:r="http://schemas.openxmlformats.org/officeDocument/2006/relationships" id="298" r:id="R4afeb3940cca4f3e"/>
-    <p:sldId xmlns:r="http://schemas.openxmlformats.org/officeDocument/2006/relationships" id="299" r:id="R92560ac9a58845ce"/>
-    <p:sldId xmlns:r="http://schemas.openxmlformats.org/officeDocument/2006/relationships" id="300" r:id="Rb4dad8830b244891"/>
-    <p:sldId xmlns:r="http://schemas.openxmlformats.org/officeDocument/2006/relationships" id="301" r:id="R826e6ff2d8a3447f"/>
-    <p:sldId xmlns:r="http://schemas.openxmlformats.org/officeDocument/2006/relationships" id="302" r:id="R4065fb467bab4e63"/>
+    <p:sldId xmlns:r="http://schemas.openxmlformats.org/officeDocument/2006/relationships" id="256" r:id="R4753459624e8469f"/>
+    <p:sldId xmlns:r="http://schemas.openxmlformats.org/officeDocument/2006/relationships" id="257" r:id="Ra435816ad976492d"/>
+    <p:sldId xmlns:r="http://schemas.openxmlformats.org/officeDocument/2006/relationships" id="258" r:id="R829ffdbb3a2b4fbf"/>
+    <p:sldId xmlns:r="http://schemas.openxmlformats.org/officeDocument/2006/relationships" id="259" r:id="Rb799cc291d434993"/>
+    <p:sldId xmlns:r="http://schemas.openxmlformats.org/officeDocument/2006/relationships" id="260" r:id="R54139dec2a824ae1"/>
+    <p:sldId xmlns:r="http://schemas.openxmlformats.org/officeDocument/2006/relationships" id="261" r:id="R75ecf857c43647a1"/>
+    <p:sldId xmlns:r="http://schemas.openxmlformats.org/officeDocument/2006/relationships" id="262" r:id="R4a8764f7ff15405e"/>
+    <p:sldId xmlns:r="http://schemas.openxmlformats.org/officeDocument/2006/relationships" id="263" r:id="R70ca82781a954572"/>
+    <p:sldId xmlns:r="http://schemas.openxmlformats.org/officeDocument/2006/relationships" id="264" r:id="Ree448ce4f43b420d"/>
+    <p:sldId xmlns:r="http://schemas.openxmlformats.org/officeDocument/2006/relationships" id="265" r:id="Rfe7533e6f85b4486"/>
+    <p:sldId xmlns:r="http://schemas.openxmlformats.org/officeDocument/2006/relationships" id="266" r:id="Ra23d1c6197bf40db"/>
+    <p:sldId xmlns:r="http://schemas.openxmlformats.org/officeDocument/2006/relationships" id="267" r:id="Rf173deae72ac461c"/>
+    <p:sldId xmlns:r="http://schemas.openxmlformats.org/officeDocument/2006/relationships" id="268" r:id="R201dbf8a629b4336"/>
+    <p:sldId xmlns:r="http://schemas.openxmlformats.org/officeDocument/2006/relationships" id="269" r:id="R44ed4ca80cc04703"/>
+    <p:sldId xmlns:r="http://schemas.openxmlformats.org/officeDocument/2006/relationships" id="270" r:id="R0851e0a1840844e9"/>
+    <p:sldId xmlns:r="http://schemas.openxmlformats.org/officeDocument/2006/relationships" id="271" r:id="Ra00f253231044d28"/>
+    <p:sldId xmlns:r="http://schemas.openxmlformats.org/officeDocument/2006/relationships" id="272" r:id="Ra8786b46852642bd"/>
+    <p:sldId xmlns:r="http://schemas.openxmlformats.org/officeDocument/2006/relationships" id="273" r:id="R903ebb23d1f14d1a"/>
+    <p:sldId xmlns:r="http://schemas.openxmlformats.org/officeDocument/2006/relationships" id="274" r:id="R62497e959255482f"/>
+    <p:sldId xmlns:r="http://schemas.openxmlformats.org/officeDocument/2006/relationships" id="275" r:id="Rb3fab9395b5241ec"/>
+    <p:sldId xmlns:r="http://schemas.openxmlformats.org/officeDocument/2006/relationships" id="276" r:id="Rbc5a2dc04ae04c9d"/>
+    <p:sldId xmlns:r="http://schemas.openxmlformats.org/officeDocument/2006/relationships" id="277" r:id="R3f4596e264f04e4a"/>
+    <p:sldId xmlns:r="http://schemas.openxmlformats.org/officeDocument/2006/relationships" id="278" r:id="Rf3ceffa058254b5e"/>
+    <p:sldId xmlns:r="http://schemas.openxmlformats.org/officeDocument/2006/relationships" id="279" r:id="R7d5155e5020246fc"/>
+    <p:sldId xmlns:r="http://schemas.openxmlformats.org/officeDocument/2006/relationships" id="280" r:id="Ra1acbd3410e94ab2"/>
+    <p:sldId xmlns:r="http://schemas.openxmlformats.org/officeDocument/2006/relationships" id="281" r:id="Rf3fece1f098241d2"/>
+    <p:sldId xmlns:r="http://schemas.openxmlformats.org/officeDocument/2006/relationships" id="282" r:id="Rb114b9908aba4a7d"/>
+    <p:sldId xmlns:r="http://schemas.openxmlformats.org/officeDocument/2006/relationships" id="283" r:id="Rd1572b12d31346a4"/>
+    <p:sldId xmlns:r="http://schemas.openxmlformats.org/officeDocument/2006/relationships" id="284" r:id="R36aad7acf57c4dbb"/>
+    <p:sldId xmlns:r="http://schemas.openxmlformats.org/officeDocument/2006/relationships" id="285" r:id="R46805fc49e8648e3"/>
+    <p:sldId xmlns:r="http://schemas.openxmlformats.org/officeDocument/2006/relationships" id="286" r:id="R699233a8b9954de1"/>
+    <p:sldId xmlns:r="http://schemas.openxmlformats.org/officeDocument/2006/relationships" id="287" r:id="R82c1bb438ae645cb"/>
+    <p:sldId xmlns:r="http://schemas.openxmlformats.org/officeDocument/2006/relationships" id="288" r:id="R197515a23d654798"/>
+    <p:sldId xmlns:r="http://schemas.openxmlformats.org/officeDocument/2006/relationships" id="289" r:id="Rf6782f3f1e864a50"/>
+    <p:sldId xmlns:r="http://schemas.openxmlformats.org/officeDocument/2006/relationships" id="290" r:id="Rb4b522305a81446f"/>
+    <p:sldId xmlns:r="http://schemas.openxmlformats.org/officeDocument/2006/relationships" id="291" r:id="Re7e01f009b7f42fd"/>
+    <p:sldId xmlns:r="http://schemas.openxmlformats.org/officeDocument/2006/relationships" id="292" r:id="Ra52f189fd7704c88"/>
+    <p:sldId xmlns:r="http://schemas.openxmlformats.org/officeDocument/2006/relationships" id="293" r:id="Rab599235bbc94b98"/>
+    <p:sldId xmlns:r="http://schemas.openxmlformats.org/officeDocument/2006/relationships" id="294" r:id="R954cb92b230b4510"/>
+    <p:sldId xmlns:r="http://schemas.openxmlformats.org/officeDocument/2006/relationships" id="295" r:id="Rc2c4325daca6468d"/>
+    <p:sldId xmlns:r="http://schemas.openxmlformats.org/officeDocument/2006/relationships" id="296" r:id="R6cefc1f8eac94e9e"/>
+    <p:sldId xmlns:r="http://schemas.openxmlformats.org/officeDocument/2006/relationships" id="297" r:id="R2d064d4826264e59"/>
+    <p:sldId xmlns:r="http://schemas.openxmlformats.org/officeDocument/2006/relationships" id="298" r:id="R07b0a5bc6a6d4983"/>
+    <p:sldId xmlns:r="http://schemas.openxmlformats.org/officeDocument/2006/relationships" id="299" r:id="Rf8eb674cef9d4837"/>
+    <p:sldId xmlns:r="http://schemas.openxmlformats.org/officeDocument/2006/relationships" id="300" r:id="R7290a977379b47ac"/>
+    <p:sldId xmlns:r="http://schemas.openxmlformats.org/officeDocument/2006/relationships" id="301" r:id="R6c6987eb84c24dcd"/>
+    <p:sldId xmlns:r="http://schemas.openxmlformats.org/officeDocument/2006/relationships" id="302" r:id="Rb5ce04ac099744a5"/>
   </p:sldIdLst>
   <p:sldSz cx="12192000" cy="6858000"/>
   <p:notesSz cx="6858000" cy="9144000"/>
@@ -3590,7 +3590,7 @@
           <p:cNvPr id="2" name="Title 1">
             <a:extLst xmlns:a="http://schemas.openxmlformats.org/drawingml/2006/main">
               <a:ext uri="{FF2B5EF4-FFF2-40B4-BE49-F238E27FC236}">
-                <a16:creationId xmlns:a16="http://schemas.microsoft.com/office/drawing/2014/main" id="{F62064BE-B93F-474C-83C2-AF07EC9FEDA7}"/>
+                <a16:creationId xmlns:a16="http://schemas.microsoft.com/office/drawing/2014/main" id="{AA04C3BB-B492-4F4D-B16D-C70C1FC7E96A}"/>
               </a:ext>
             </a:extLst>
           </p:cNvPr>
@@ -3623,7 +3623,7 @@
           <p:cNvPr id="3" name="Subtitle 2">
             <a:extLst xmlns:a="http://schemas.openxmlformats.org/drawingml/2006/main">
               <a:ext uri="{FF2B5EF4-FFF2-40B4-BE49-F238E27FC236}">
-                <a16:creationId xmlns:a16="http://schemas.microsoft.com/office/drawing/2014/main" id="{F6A6A300-D3AC-48FF-8C36-F5CC7DA9193A}"/>
+                <a16:creationId xmlns:a16="http://schemas.microsoft.com/office/drawing/2014/main" id="{8C2CB944-9DD9-4533-A944-5F079CF3471F}"/>
               </a:ext>
             </a:extLst>
           </p:cNvPr>
@@ -3747,7 +3747,7 @@
           <p:cNvPr id="4" name="Date Placeholder 3">
             <a:extLst xmlns:a="http://schemas.openxmlformats.org/drawingml/2006/main">
               <a:ext uri="{FF2B5EF4-FFF2-40B4-BE49-F238E27FC236}">
-                <a16:creationId xmlns:a16="http://schemas.microsoft.com/office/drawing/2014/main" id="{9C988E6D-3AAC-4A8F-8333-97E842F0A6CF}"/>
+                <a16:creationId xmlns:a16="http://schemas.microsoft.com/office/drawing/2014/main" id="{7C39BC73-73F1-4280-B4C1-E584A6DACB29}"/>
               </a:ext>
             </a:extLst>
           </p:cNvPr>
@@ -3775,7 +3775,7 @@
           <p:cNvPr id="5" name="Footer Placeholder 4">
             <a:extLst xmlns:a="http://schemas.openxmlformats.org/drawingml/2006/main">
               <a:ext uri="{FF2B5EF4-FFF2-40B4-BE49-F238E27FC236}">
-                <a16:creationId xmlns:a16="http://schemas.microsoft.com/office/drawing/2014/main" id="{0EDE719F-1281-48CD-976E-B3A0F492F84F}"/>
+                <a16:creationId xmlns:a16="http://schemas.microsoft.com/office/drawing/2014/main" id="{7640B7AA-A7DC-4075-9B70-21BE22CB10FB}"/>
               </a:ext>
             </a:extLst>
           </p:cNvPr>
@@ -3800,7 +3800,7 @@
           <p:cNvPr id="6" name="Slide Number Placeholder 5">
             <a:extLst xmlns:a="http://schemas.openxmlformats.org/drawingml/2006/main">
               <a:ext uri="{FF2B5EF4-FFF2-40B4-BE49-F238E27FC236}">
-                <a16:creationId xmlns:a16="http://schemas.microsoft.com/office/drawing/2014/main" id="{FC1B0D7A-13C8-4ADC-8E49-BBC6808403D0}"/>
+                <a16:creationId xmlns:a16="http://schemas.microsoft.com/office/drawing/2014/main" id="{1679A127-706C-437F-8F45-0A2B245613B0}"/>
               </a:ext>
             </a:extLst>
           </p:cNvPr>
@@ -3845,7 +3845,7 @@
           <p:cNvPr id="2" name="Title 1">
             <a:extLst xmlns:a="http://schemas.openxmlformats.org/drawingml/2006/main">
               <a:ext uri="{FF2B5EF4-FFF2-40B4-BE49-F238E27FC236}">
-                <a16:creationId xmlns:a16="http://schemas.microsoft.com/office/drawing/2014/main" id="{95F79DB7-EDE6-466E-A882-05D5E9C9F43F}"/>
+                <a16:creationId xmlns:a16="http://schemas.microsoft.com/office/drawing/2014/main" id="{D2C4A6D3-CFCC-42FE-8905-23D2171E73F0}"/>
               </a:ext>
             </a:extLst>
           </p:cNvPr>
@@ -3873,7 +3873,7 @@
           <p:cNvPr id="3" name="Vertical Text Placeholder 2">
             <a:extLst xmlns:a="http://schemas.openxmlformats.org/drawingml/2006/main">
               <a:ext uri="{FF2B5EF4-FFF2-40B4-BE49-F238E27FC236}">
-                <a16:creationId xmlns:a16="http://schemas.microsoft.com/office/drawing/2014/main" id="{F661EC00-F948-4CFA-B15B-91F699C1539C}"/>
+                <a16:creationId xmlns:a16="http://schemas.microsoft.com/office/drawing/2014/main" id="{C9CA6C3E-22E8-4AE6-BA94-089A12733894}"/>
               </a:ext>
             </a:extLst>
           </p:cNvPr>
@@ -3936,7 +3936,7 @@
           <p:cNvPr id="4" name="Date Placeholder 3">
             <a:extLst xmlns:a="http://schemas.openxmlformats.org/drawingml/2006/main">
               <a:ext uri="{FF2B5EF4-FFF2-40B4-BE49-F238E27FC236}">
-                <a16:creationId xmlns:a16="http://schemas.microsoft.com/office/drawing/2014/main" id="{426070CB-36B6-4269-9F39-EFE0ECE8F8D0}"/>
+                <a16:creationId xmlns:a16="http://schemas.microsoft.com/office/drawing/2014/main" id="{A65F120F-04A4-4F4C-A750-509672392FC1}"/>
               </a:ext>
             </a:extLst>
           </p:cNvPr>
@@ -3964,7 +3964,7 @@
           <p:cNvPr id="5" name="Footer Placeholder 4">
             <a:extLst xmlns:a="http://schemas.openxmlformats.org/drawingml/2006/main">
               <a:ext uri="{FF2B5EF4-FFF2-40B4-BE49-F238E27FC236}">
-                <a16:creationId xmlns:a16="http://schemas.microsoft.com/office/drawing/2014/main" id="{E14D633A-474B-43C4-8FAA-CCBCB6A942F4}"/>
+                <a16:creationId xmlns:a16="http://schemas.microsoft.com/office/drawing/2014/main" id="{E202F089-E540-4320-B953-063462FE02EF}"/>
               </a:ext>
             </a:extLst>
           </p:cNvPr>
@@ -3989,7 +3989,7 @@
           <p:cNvPr id="6" name="Slide Number Placeholder 5">
             <a:extLst xmlns:a="http://schemas.openxmlformats.org/drawingml/2006/main">
               <a:ext uri="{FF2B5EF4-FFF2-40B4-BE49-F238E27FC236}">
-                <a16:creationId xmlns:a16="http://schemas.microsoft.com/office/drawing/2014/main" id="{83A81F3A-A06D-4DDD-94F8-C78B378EAE07}"/>
+                <a16:creationId xmlns:a16="http://schemas.microsoft.com/office/drawing/2014/main" id="{86107C7F-3B80-4222-8AEC-03B6EC94F81E}"/>
               </a:ext>
             </a:extLst>
           </p:cNvPr>
@@ -4034,7 +4034,7 @@
           <p:cNvPr id="2" name="Vertical Title 1">
             <a:extLst xmlns:a="http://schemas.openxmlformats.org/drawingml/2006/main">
               <a:ext uri="{FF2B5EF4-FFF2-40B4-BE49-F238E27FC236}">
-                <a16:creationId xmlns:a16="http://schemas.microsoft.com/office/drawing/2014/main" id="{0F3873A2-EAE2-48F7-8816-74DA9790AA09}"/>
+                <a16:creationId xmlns:a16="http://schemas.microsoft.com/office/drawing/2014/main" id="{370C4CA1-B70B-41A2-9190-AA0DC544FCB3}"/>
               </a:ext>
             </a:extLst>
           </p:cNvPr>
@@ -4067,7 +4067,7 @@
           <p:cNvPr id="3" name="Vertical Text Placeholder 2">
             <a:extLst xmlns:a="http://schemas.openxmlformats.org/drawingml/2006/main">
               <a:ext uri="{FF2B5EF4-FFF2-40B4-BE49-F238E27FC236}">
-                <a16:creationId xmlns:a16="http://schemas.microsoft.com/office/drawing/2014/main" id="{F56CBD85-D31C-47DC-9EA2-E61A3640B0FD}"/>
+                <a16:creationId xmlns:a16="http://schemas.microsoft.com/office/drawing/2014/main" id="{52DEBA20-45A3-462D-A464-1E3CF0673340}"/>
               </a:ext>
             </a:extLst>
           </p:cNvPr>
@@ -4135,7 +4135,7 @@
           <p:cNvPr id="4" name="Date Placeholder 3">
             <a:extLst xmlns:a="http://schemas.openxmlformats.org/drawingml/2006/main">
               <a:ext uri="{FF2B5EF4-FFF2-40B4-BE49-F238E27FC236}">
-                <a16:creationId xmlns:a16="http://schemas.microsoft.com/office/drawing/2014/main" id="{91EB44A8-80E8-401F-8858-36619B4C4FF3}"/>
+                <a16:creationId xmlns:a16="http://schemas.microsoft.com/office/drawing/2014/main" id="{E949141C-FE4D-4690-ADB5-29807CCB2A4D}"/>
               </a:ext>
             </a:extLst>
           </p:cNvPr>
@@ -4163,7 +4163,7 @@
           <p:cNvPr id="5" name="Footer Placeholder 4">
             <a:extLst xmlns:a="http://schemas.openxmlformats.org/drawingml/2006/main">
               <a:ext uri="{FF2B5EF4-FFF2-40B4-BE49-F238E27FC236}">
-                <a16:creationId xmlns:a16="http://schemas.microsoft.com/office/drawing/2014/main" id="{7045CB85-3000-429E-B9E7-DF0E85DB1F8B}"/>
+                <a16:creationId xmlns:a16="http://schemas.microsoft.com/office/drawing/2014/main" id="{862C825F-D63C-4B64-9FBA-C01781CD65F9}"/>
               </a:ext>
             </a:extLst>
           </p:cNvPr>
@@ -4188,7 +4188,7 @@
           <p:cNvPr id="6" name="Slide Number Placeholder 5">
             <a:extLst xmlns:a="http://schemas.openxmlformats.org/drawingml/2006/main">
               <a:ext uri="{FF2B5EF4-FFF2-40B4-BE49-F238E27FC236}">
-                <a16:creationId xmlns:a16="http://schemas.microsoft.com/office/drawing/2014/main" id="{C8F3AFDA-5E41-49CA-84FC-CC1116D62D5C}"/>
+                <a16:creationId xmlns:a16="http://schemas.microsoft.com/office/drawing/2014/main" id="{FE27A6BF-2346-4259-ACA4-2B81D84C54D1}"/>
               </a:ext>
             </a:extLst>
           </p:cNvPr>
@@ -4233,7 +4233,7 @@
           <p:cNvPr id="2" name="Title 1">
             <a:extLst xmlns:a="http://schemas.openxmlformats.org/drawingml/2006/main">
               <a:ext uri="{FF2B5EF4-FFF2-40B4-BE49-F238E27FC236}">
-                <a16:creationId xmlns:a16="http://schemas.microsoft.com/office/drawing/2014/main" id="{67D3FAD7-0085-45B4-836C-0C5AEF9280FC}"/>
+                <a16:creationId xmlns:a16="http://schemas.microsoft.com/office/drawing/2014/main" id="{64183EC5-4EB4-45B2-A625-7159D67EC8F1}"/>
               </a:ext>
             </a:extLst>
           </p:cNvPr>
@@ -4261,7 +4261,7 @@
           <p:cNvPr id="3" name="Content Placeholder 2">
             <a:extLst xmlns:a="http://schemas.openxmlformats.org/drawingml/2006/main">
               <a:ext uri="{FF2B5EF4-FFF2-40B4-BE49-F238E27FC236}">
-                <a16:creationId xmlns:a16="http://schemas.microsoft.com/office/drawing/2014/main" id="{309A5883-62CD-4011-9108-480B740FA257}"/>
+                <a16:creationId xmlns:a16="http://schemas.microsoft.com/office/drawing/2014/main" id="{AE96CC88-4DA7-4F94-B1C0-4037CC412439}"/>
               </a:ext>
             </a:extLst>
           </p:cNvPr>
@@ -4324,7 +4324,7 @@
           <p:cNvPr id="4" name="Date Placeholder 3">
             <a:extLst xmlns:a="http://schemas.openxmlformats.org/drawingml/2006/main">
               <a:ext uri="{FF2B5EF4-FFF2-40B4-BE49-F238E27FC236}">
-                <a16:creationId xmlns:a16="http://schemas.microsoft.com/office/drawing/2014/main" id="{1F6A3706-7A3C-4420-A5C4-0DAE8E4E4718}"/>
+                <a16:creationId xmlns:a16="http://schemas.microsoft.com/office/drawing/2014/main" id="{C305D71D-97B9-4F3B-8092-3B1BCD5F2439}"/>
               </a:ext>
             </a:extLst>
           </p:cNvPr>
@@ -4352,7 +4352,7 @@
           <p:cNvPr id="5" name="Footer Placeholder 4">
             <a:extLst xmlns:a="http://schemas.openxmlformats.org/drawingml/2006/main">
               <a:ext uri="{FF2B5EF4-FFF2-40B4-BE49-F238E27FC236}">
-                <a16:creationId xmlns:a16="http://schemas.microsoft.com/office/drawing/2014/main" id="{F4BFEBAB-767A-4A51-AD57-B5D4C6831B16}"/>
+                <a16:creationId xmlns:a16="http://schemas.microsoft.com/office/drawing/2014/main" id="{1C380D0A-D998-43BE-BB47-DF6AD45A698B}"/>
               </a:ext>
             </a:extLst>
           </p:cNvPr>
@@ -4377,7 +4377,7 @@
           <p:cNvPr id="6" name="Slide Number Placeholder 5">
             <a:extLst xmlns:a="http://schemas.openxmlformats.org/drawingml/2006/main">
               <a:ext uri="{FF2B5EF4-FFF2-40B4-BE49-F238E27FC236}">
-                <a16:creationId xmlns:a16="http://schemas.microsoft.com/office/drawing/2014/main" id="{912ABCEA-76B1-41B8-A69B-5AF5CA5E0B1A}"/>
+                <a16:creationId xmlns:a16="http://schemas.microsoft.com/office/drawing/2014/main" id="{8FCAFFB4-A8A3-4F50-94C2-B15343955EBE}"/>
               </a:ext>
             </a:extLst>
           </p:cNvPr>
@@ -4422,7 +4422,7 @@
           <p:cNvPr id="2" name="Title 1">
             <a:extLst xmlns:a="http://schemas.openxmlformats.org/drawingml/2006/main">
               <a:ext uri="{FF2B5EF4-FFF2-40B4-BE49-F238E27FC236}">
-                <a16:creationId xmlns:a16="http://schemas.microsoft.com/office/drawing/2014/main" id="{C4122EB5-69D2-4A50-9F60-35B9368FF79E}"/>
+                <a16:creationId xmlns:a16="http://schemas.microsoft.com/office/drawing/2014/main" id="{69DF4EA7-46C4-4DF1-AE80-9D9A67739EAE}"/>
               </a:ext>
             </a:extLst>
           </p:cNvPr>
@@ -4460,7 +4460,7 @@
           <p:cNvPr id="3" name="Text Placeholder 2">
             <a:extLst xmlns:a="http://schemas.openxmlformats.org/drawingml/2006/main">
               <a:ext uri="{FF2B5EF4-FFF2-40B4-BE49-F238E27FC236}">
-                <a16:creationId xmlns:a16="http://schemas.microsoft.com/office/drawing/2014/main" id="{8EE14D84-20BB-4E29-8278-DC6D5016E501}"/>
+                <a16:creationId xmlns:a16="http://schemas.microsoft.com/office/drawing/2014/main" id="{86282AF4-6D2B-40B2-A27E-3F0F639BFB0E}"/>
               </a:ext>
             </a:extLst>
           </p:cNvPr>
@@ -4586,7 +4586,7 @@
           <p:cNvPr id="4" name="Date Placeholder 3">
             <a:extLst xmlns:a="http://schemas.openxmlformats.org/drawingml/2006/main">
               <a:ext uri="{FF2B5EF4-FFF2-40B4-BE49-F238E27FC236}">
-                <a16:creationId xmlns:a16="http://schemas.microsoft.com/office/drawing/2014/main" id="{6A8105B4-F6FA-4A7A-9CD8-919D33963299}"/>
+                <a16:creationId xmlns:a16="http://schemas.microsoft.com/office/drawing/2014/main" id="{954037DC-C193-4EB8-AE65-7E3F4086A76F}"/>
               </a:ext>
             </a:extLst>
           </p:cNvPr>
@@ -4614,7 +4614,7 @@
           <p:cNvPr id="5" name="Footer Placeholder 4">
             <a:extLst xmlns:a="http://schemas.openxmlformats.org/drawingml/2006/main">
               <a:ext uri="{FF2B5EF4-FFF2-40B4-BE49-F238E27FC236}">
-                <a16:creationId xmlns:a16="http://schemas.microsoft.com/office/drawing/2014/main" id="{9A7C3F2B-74BE-4FE6-9664-E61259447295}"/>
+                <a16:creationId xmlns:a16="http://schemas.microsoft.com/office/drawing/2014/main" id="{0242896E-CA80-4850-B595-347CC1EA93A0}"/>
               </a:ext>
             </a:extLst>
           </p:cNvPr>
@@ -4639,7 +4639,7 @@
           <p:cNvPr id="6" name="Slide Number Placeholder 5">
             <a:extLst xmlns:a="http://schemas.openxmlformats.org/drawingml/2006/main">
               <a:ext uri="{FF2B5EF4-FFF2-40B4-BE49-F238E27FC236}">
-                <a16:creationId xmlns:a16="http://schemas.microsoft.com/office/drawing/2014/main" id="{2C723FE0-9BE8-4C5C-9C55-DE189FD45279}"/>
+                <a16:creationId xmlns:a16="http://schemas.microsoft.com/office/drawing/2014/main" id="{51714BB3-081B-455B-8B3F-77C2DE4FB0BF}"/>
               </a:ext>
             </a:extLst>
           </p:cNvPr>
@@ -4684,7 +4684,7 @@
           <p:cNvPr id="2" name="Title 1">
             <a:extLst xmlns:a="http://schemas.openxmlformats.org/drawingml/2006/main">
               <a:ext uri="{FF2B5EF4-FFF2-40B4-BE49-F238E27FC236}">
-                <a16:creationId xmlns:a16="http://schemas.microsoft.com/office/drawing/2014/main" id="{2171030C-6065-49D8-8A9D-618A4C84B2F5}"/>
+                <a16:creationId xmlns:a16="http://schemas.microsoft.com/office/drawing/2014/main" id="{D8A2CC86-01FD-490E-9183-0E7047D219D4}"/>
               </a:ext>
             </a:extLst>
           </p:cNvPr>
@@ -4712,7 +4712,7 @@
           <p:cNvPr id="3" name="Content Placeholder 2">
             <a:extLst xmlns:a="http://schemas.openxmlformats.org/drawingml/2006/main">
               <a:ext uri="{FF2B5EF4-FFF2-40B4-BE49-F238E27FC236}">
-                <a16:creationId xmlns:a16="http://schemas.microsoft.com/office/drawing/2014/main" id="{EA6E140C-F660-4E41-8167-0501FF322B0D}"/>
+                <a16:creationId xmlns:a16="http://schemas.microsoft.com/office/drawing/2014/main" id="{E35E81B6-F11E-453A-BD06-155FD34E1B1B}"/>
               </a:ext>
             </a:extLst>
           </p:cNvPr>
@@ -4817,7 +4817,7 @@
           <p:cNvPr id="4" name="Content Placeholder 3">
             <a:extLst xmlns:a="http://schemas.openxmlformats.org/drawingml/2006/main">
               <a:ext uri="{FF2B5EF4-FFF2-40B4-BE49-F238E27FC236}">
-                <a16:creationId xmlns:a16="http://schemas.microsoft.com/office/drawing/2014/main" id="{374BA057-33DF-4999-8C2E-D8EF8E188F1C}"/>
+                <a16:creationId xmlns:a16="http://schemas.microsoft.com/office/drawing/2014/main" id="{1D0A2521-7217-4EB4-84A7-2B98F0F9BA99}"/>
               </a:ext>
             </a:extLst>
           </p:cNvPr>
@@ -4922,7 +4922,7 @@
           <p:cNvPr id="5" name="Date Placeholder 4">
             <a:extLst xmlns:a="http://schemas.openxmlformats.org/drawingml/2006/main">
               <a:ext uri="{FF2B5EF4-FFF2-40B4-BE49-F238E27FC236}">
-                <a16:creationId xmlns:a16="http://schemas.microsoft.com/office/drawing/2014/main" id="{931540D3-C5EB-4EBD-B435-B55A445B1037}"/>
+                <a16:creationId xmlns:a16="http://schemas.microsoft.com/office/drawing/2014/main" id="{D58765F8-B419-4764-8904-B42C61C09E87}"/>
               </a:ext>
             </a:extLst>
           </p:cNvPr>
@@ -4950,7 +4950,7 @@
           <p:cNvPr id="6" name="Footer Placeholder 5">
             <a:extLst xmlns:a="http://schemas.openxmlformats.org/drawingml/2006/main">
               <a:ext uri="{FF2B5EF4-FFF2-40B4-BE49-F238E27FC236}">
-                <a16:creationId xmlns:a16="http://schemas.microsoft.com/office/drawing/2014/main" id="{5CB02741-4990-4F48-96EA-16AA15FF6070}"/>
+                <a16:creationId xmlns:a16="http://schemas.microsoft.com/office/drawing/2014/main" id="{B4E56297-2A9D-4EB4-88F5-3ABEF3F8F866}"/>
               </a:ext>
             </a:extLst>
           </p:cNvPr>
@@ -4975,7 +4975,7 @@
           <p:cNvPr id="7" name="Slide Number Placeholder 6">
             <a:extLst xmlns:a="http://schemas.openxmlformats.org/drawingml/2006/main">
               <a:ext uri="{FF2B5EF4-FFF2-40B4-BE49-F238E27FC236}">
-                <a16:creationId xmlns:a16="http://schemas.microsoft.com/office/drawing/2014/main" id="{6BCD1B5E-5633-416C-B760-2304B71FAB7E}"/>
+                <a16:creationId xmlns:a16="http://schemas.microsoft.com/office/drawing/2014/main" id="{037634F0-9D80-4152-B3BB-87AFC210013B}"/>
               </a:ext>
             </a:extLst>
           </p:cNvPr>
@@ -5020,7 +5020,7 @@
           <p:cNvPr id="2" name="Title 1">
             <a:extLst xmlns:a="http://schemas.openxmlformats.org/drawingml/2006/main">
               <a:ext uri="{FF2B5EF4-FFF2-40B4-BE49-F238E27FC236}">
-                <a16:creationId xmlns:a16="http://schemas.microsoft.com/office/drawing/2014/main" id="{50E67B1B-CEF5-4EC9-89FB-3DC04AD50F80}"/>
+                <a16:creationId xmlns:a16="http://schemas.microsoft.com/office/drawing/2014/main" id="{61A71628-1D3D-4093-951B-4BB22425C057}"/>
               </a:ext>
             </a:extLst>
           </p:cNvPr>
@@ -5053,7 +5053,7 @@
           <p:cNvPr id="3" name="Text Placeholder 2">
             <a:extLst xmlns:a="http://schemas.openxmlformats.org/drawingml/2006/main">
               <a:ext uri="{FF2B5EF4-FFF2-40B4-BE49-F238E27FC236}">
-                <a16:creationId xmlns:a16="http://schemas.microsoft.com/office/drawing/2014/main" id="{91C2E8A2-4996-449D-BD85-1A74A99B074A}"/>
+                <a16:creationId xmlns:a16="http://schemas.microsoft.com/office/drawing/2014/main" id="{A2137B8C-827D-44D4-A724-AD338BF128C0}"/>
               </a:ext>
             </a:extLst>
           </p:cNvPr>
@@ -5125,7 +5125,7 @@
           <p:cNvPr id="4" name="Content Placeholder 3">
             <a:extLst xmlns:a="http://schemas.openxmlformats.org/drawingml/2006/main">
               <a:ext uri="{FF2B5EF4-FFF2-40B4-BE49-F238E27FC236}">
-                <a16:creationId xmlns:a16="http://schemas.microsoft.com/office/drawing/2014/main" id="{7D006DFA-81A6-4696-9F40-89571E57BA1C}"/>
+                <a16:creationId xmlns:a16="http://schemas.microsoft.com/office/drawing/2014/main" id="{8500D561-4D7B-4AE4-9897-EFEC0A11707E}"/>
               </a:ext>
             </a:extLst>
           </p:cNvPr>
@@ -5230,7 +5230,7 @@
           <p:cNvPr id="5" name="Text Placeholder 4">
             <a:extLst xmlns:a="http://schemas.openxmlformats.org/drawingml/2006/main">
               <a:ext uri="{FF2B5EF4-FFF2-40B4-BE49-F238E27FC236}">
-                <a16:creationId xmlns:a16="http://schemas.microsoft.com/office/drawing/2014/main" id="{4B1C0AB5-B4D2-490B-95E3-5A5F05B819D7}"/>
+                <a16:creationId xmlns:a16="http://schemas.microsoft.com/office/drawing/2014/main" id="{1FB97A42-C050-4812-8C23-54483CB55200}"/>
               </a:ext>
             </a:extLst>
           </p:cNvPr>
@@ -5302,7 +5302,7 @@
           <p:cNvPr id="6" name="Content Placeholder 5">
             <a:extLst xmlns:a="http://schemas.openxmlformats.org/drawingml/2006/main">
               <a:ext uri="{FF2B5EF4-FFF2-40B4-BE49-F238E27FC236}">
-                <a16:creationId xmlns:a16="http://schemas.microsoft.com/office/drawing/2014/main" id="{99EBE332-B52E-48F9-A4AD-04A823B73E3E}"/>
+                <a16:creationId xmlns:a16="http://schemas.microsoft.com/office/drawing/2014/main" id="{85AE6CC6-E5B5-4CBD-856C-D0AB49ADE2CC}"/>
               </a:ext>
             </a:extLst>
           </p:cNvPr>
@@ -5407,7 +5407,7 @@
           <p:cNvPr id="7" name="Date Placeholder 6">
             <a:extLst xmlns:a="http://schemas.openxmlformats.org/drawingml/2006/main">
               <a:ext uri="{FF2B5EF4-FFF2-40B4-BE49-F238E27FC236}">
-                <a16:creationId xmlns:a16="http://schemas.microsoft.com/office/drawing/2014/main" id="{3D7F5171-BA0D-42A4-AEE4-B54A29EF5C62}"/>
+                <a16:creationId xmlns:a16="http://schemas.microsoft.com/office/drawing/2014/main" id="{EFC1E2F9-F6DE-4495-9992-C9A70EA665D1}"/>
               </a:ext>
             </a:extLst>
           </p:cNvPr>
@@ -5435,7 +5435,7 @@
           <p:cNvPr id="8" name="Footer Placeholder 7">
             <a:extLst xmlns:a="http://schemas.openxmlformats.org/drawingml/2006/main">
               <a:ext uri="{FF2B5EF4-FFF2-40B4-BE49-F238E27FC236}">
-                <a16:creationId xmlns:a16="http://schemas.microsoft.com/office/drawing/2014/main" id="{901B7606-16AF-4005-8F81-DBDF206B000D}"/>
+                <a16:creationId xmlns:a16="http://schemas.microsoft.com/office/drawing/2014/main" id="{C183136F-6298-4743-8A64-8C27FA709F1B}"/>
               </a:ext>
             </a:extLst>
           </p:cNvPr>
@@ -5460,7 +5460,7 @@
           <p:cNvPr id="9" name="Slide Number Placeholder 8">
             <a:extLst xmlns:a="http://schemas.openxmlformats.org/drawingml/2006/main">
               <a:ext uri="{FF2B5EF4-FFF2-40B4-BE49-F238E27FC236}">
-                <a16:creationId xmlns:a16="http://schemas.microsoft.com/office/drawing/2014/main" id="{BA8F9DFC-92FD-4F1D-9783-36A1E56D4F41}"/>
+                <a16:creationId xmlns:a16="http://schemas.microsoft.com/office/drawing/2014/main" id="{C3A0AB01-C9EC-45EA-8AEC-3AD114917F7C}"/>
               </a:ext>
             </a:extLst>
           </p:cNvPr>
@@ -5505,7 +5505,7 @@
           <p:cNvPr id="2" name="Title 1">
             <a:extLst xmlns:a="http://schemas.openxmlformats.org/drawingml/2006/main">
               <a:ext uri="{FF2B5EF4-FFF2-40B4-BE49-F238E27FC236}">
-                <a16:creationId xmlns:a16="http://schemas.microsoft.com/office/drawing/2014/main" id="{A550108E-B957-43F6-8A1A-8FA5DAD5ABD1}"/>
+                <a16:creationId xmlns:a16="http://schemas.microsoft.com/office/drawing/2014/main" id="{736BC65A-E140-4570-B3D2-718087140877}"/>
               </a:ext>
             </a:extLst>
           </p:cNvPr>
@@ -5533,7 +5533,7 @@
           <p:cNvPr id="3" name="Date Placeholder 2">
             <a:extLst xmlns:a="http://schemas.openxmlformats.org/drawingml/2006/main">
               <a:ext uri="{FF2B5EF4-FFF2-40B4-BE49-F238E27FC236}">
-                <a16:creationId xmlns:a16="http://schemas.microsoft.com/office/drawing/2014/main" id="{D333789D-36B5-427B-8E38-738A98931151}"/>
+                <a16:creationId xmlns:a16="http://schemas.microsoft.com/office/drawing/2014/main" id="{125EDA69-E748-4F9F-90C8-6E8A54011965}"/>
               </a:ext>
             </a:extLst>
           </p:cNvPr>
@@ -5561,7 +5561,7 @@
           <p:cNvPr id="4" name="Footer Placeholder 3">
             <a:extLst xmlns:a="http://schemas.openxmlformats.org/drawingml/2006/main">
               <a:ext uri="{FF2B5EF4-FFF2-40B4-BE49-F238E27FC236}">
-                <a16:creationId xmlns:a16="http://schemas.microsoft.com/office/drawing/2014/main" id="{1418B133-D9A3-4AC5-BD18-C5AC3CC1FAB9}"/>
+                <a16:creationId xmlns:a16="http://schemas.microsoft.com/office/drawing/2014/main" id="{E683677E-184C-4644-A3BF-A2A4AE6DB26D}"/>
               </a:ext>
             </a:extLst>
           </p:cNvPr>
@@ -5586,7 +5586,7 @@
           <p:cNvPr id="5" name="Slide Number Placeholder 4">
             <a:extLst xmlns:a="http://schemas.openxmlformats.org/drawingml/2006/main">
               <a:ext uri="{FF2B5EF4-FFF2-40B4-BE49-F238E27FC236}">
-                <a16:creationId xmlns:a16="http://schemas.microsoft.com/office/drawing/2014/main" id="{20B7525B-3558-41A9-BC92-77593EEB560D}"/>
+                <a16:creationId xmlns:a16="http://schemas.microsoft.com/office/drawing/2014/main" id="{6A380E51-5C83-4456-8A37-65A763D29B6C}"/>
               </a:ext>
             </a:extLst>
           </p:cNvPr>
@@ -5631,7 +5631,7 @@
           <p:cNvPr id="2" name="Date Placeholder 1">
             <a:extLst xmlns:a="http://schemas.openxmlformats.org/drawingml/2006/main">
               <a:ext uri="{FF2B5EF4-FFF2-40B4-BE49-F238E27FC236}">
-                <a16:creationId xmlns:a16="http://schemas.microsoft.com/office/drawing/2014/main" id="{FBEC506F-F92B-4EC5-A954-BF3FF5B2C789}"/>
+                <a16:creationId xmlns:a16="http://schemas.microsoft.com/office/drawing/2014/main" id="{075111AF-7DB3-4E5B-A758-2B65BE2B69C2}"/>
               </a:ext>
             </a:extLst>
           </p:cNvPr>
@@ -5659,7 +5659,7 @@
           <p:cNvPr id="3" name="Footer Placeholder 2">
             <a:extLst xmlns:a="http://schemas.openxmlformats.org/drawingml/2006/main">
               <a:ext uri="{FF2B5EF4-FFF2-40B4-BE49-F238E27FC236}">
-                <a16:creationId xmlns:a16="http://schemas.microsoft.com/office/drawing/2014/main" id="{81413566-FA15-4E23-9C6D-DC7E0620CE83}"/>
+                <a16:creationId xmlns:a16="http://schemas.microsoft.com/office/drawing/2014/main" id="{25A9406A-2554-4292-915B-A8442CD5C08C}"/>
               </a:ext>
             </a:extLst>
           </p:cNvPr>
@@ -5684,7 +5684,7 @@
           <p:cNvPr id="4" name="Slide Number Placeholder 3">
             <a:extLst xmlns:a="http://schemas.openxmlformats.org/drawingml/2006/main">
               <a:ext uri="{FF2B5EF4-FFF2-40B4-BE49-F238E27FC236}">
-                <a16:creationId xmlns:a16="http://schemas.microsoft.com/office/drawing/2014/main" id="{55FB8566-F8DB-40EA-8F6C-E9BA7BEFD39F}"/>
+                <a16:creationId xmlns:a16="http://schemas.microsoft.com/office/drawing/2014/main" id="{4DC1A195-B51E-4541-8397-A15AFEF4D040}"/>
               </a:ext>
             </a:extLst>
           </p:cNvPr>
@@ -5729,7 +5729,7 @@
           <p:cNvPr id="2" name="Title 1">
             <a:extLst xmlns:a="http://schemas.openxmlformats.org/drawingml/2006/main">
               <a:ext uri="{FF2B5EF4-FFF2-40B4-BE49-F238E27FC236}">
-                <a16:creationId xmlns:a16="http://schemas.microsoft.com/office/drawing/2014/main" id="{E6CE9CD6-B401-455C-9A05-55CF81161F2A}"/>
+                <a16:creationId xmlns:a16="http://schemas.microsoft.com/office/drawing/2014/main" id="{9AA43643-EBDF-45A6-A35B-0BB6F93CD139}"/>
               </a:ext>
             </a:extLst>
           </p:cNvPr>
@@ -5767,7 +5767,7 @@
           <p:cNvPr id="3" name="Content Placeholder 2">
             <a:extLst xmlns:a="http://schemas.openxmlformats.org/drawingml/2006/main">
               <a:ext uri="{FF2B5EF4-FFF2-40B4-BE49-F238E27FC236}">
-                <a16:creationId xmlns:a16="http://schemas.microsoft.com/office/drawing/2014/main" id="{09FA535E-7FDB-443E-80EC-30792C41EE62}"/>
+                <a16:creationId xmlns:a16="http://schemas.microsoft.com/office/drawing/2014/main" id="{D0789693-9267-4A8E-A20A-843F9D16D787}"/>
               </a:ext>
             </a:extLst>
           </p:cNvPr>
@@ -5872,7 +5872,7 @@
           <p:cNvPr id="4" name="Text Placeholder 3">
             <a:extLst xmlns:a="http://schemas.openxmlformats.org/drawingml/2006/main">
               <a:ext uri="{FF2B5EF4-FFF2-40B4-BE49-F238E27FC236}">
-                <a16:creationId xmlns:a16="http://schemas.microsoft.com/office/drawing/2014/main" id="{C333B990-D3D2-4659-9B3F-4B90515F44C7}"/>
+                <a16:creationId xmlns:a16="http://schemas.microsoft.com/office/drawing/2014/main" id="{215E6510-90F2-48F5-9A17-2E56198CB534}"/>
               </a:ext>
             </a:extLst>
           </p:cNvPr>
@@ -5944,7 +5944,7 @@
           <p:cNvPr id="5" name="Date Placeholder 4">
             <a:extLst xmlns:a="http://schemas.openxmlformats.org/drawingml/2006/main">
               <a:ext uri="{FF2B5EF4-FFF2-40B4-BE49-F238E27FC236}">
-                <a16:creationId xmlns:a16="http://schemas.microsoft.com/office/drawing/2014/main" id="{938901E3-C307-4A4E-AEF4-25D3C30D1CDB}"/>
+                <a16:creationId xmlns:a16="http://schemas.microsoft.com/office/drawing/2014/main" id="{32788246-BA5E-4161-9EAC-15F3592D0EC6}"/>
               </a:ext>
             </a:extLst>
           </p:cNvPr>
@@ -5972,7 +5972,7 @@
           <p:cNvPr id="6" name="Footer Placeholder 5">
             <a:extLst xmlns:a="http://schemas.openxmlformats.org/drawingml/2006/main">
               <a:ext uri="{FF2B5EF4-FFF2-40B4-BE49-F238E27FC236}">
-                <a16:creationId xmlns:a16="http://schemas.microsoft.com/office/drawing/2014/main" id="{8F9A89AB-5515-4094-BF5E-7F2046ADC0D6}"/>
+                <a16:creationId xmlns:a16="http://schemas.microsoft.com/office/drawing/2014/main" id="{05567497-D26B-435F-9A5C-9757A3614B28}"/>
               </a:ext>
             </a:extLst>
           </p:cNvPr>
@@ -5997,7 +5997,7 @@
           <p:cNvPr id="7" name="Slide Number Placeholder 6">
             <a:extLst xmlns:a="http://schemas.openxmlformats.org/drawingml/2006/main">
               <a:ext uri="{FF2B5EF4-FFF2-40B4-BE49-F238E27FC236}">
-                <a16:creationId xmlns:a16="http://schemas.microsoft.com/office/drawing/2014/main" id="{CC4B240E-4CDB-4668-9307-A2BEA845A2A7}"/>
+                <a16:creationId xmlns:a16="http://schemas.microsoft.com/office/drawing/2014/main" id="{B0F47045-9FC3-4F6D-BD71-04AC98DBEBDE}"/>
               </a:ext>
             </a:extLst>
           </p:cNvPr>
@@ -6042,7 +6042,7 @@
           <p:cNvPr id="2" name="Title 1">
             <a:extLst xmlns:a="http://schemas.openxmlformats.org/drawingml/2006/main">
               <a:ext uri="{FF2B5EF4-FFF2-40B4-BE49-F238E27FC236}">
-                <a16:creationId xmlns:a16="http://schemas.microsoft.com/office/drawing/2014/main" id="{7AF72CC0-780E-4181-8D5B-4CA67ADB1FA4}"/>
+                <a16:creationId xmlns:a16="http://schemas.microsoft.com/office/drawing/2014/main" id="{7225B833-C167-4A56-87AE-4A67E48E3C4B}"/>
               </a:ext>
             </a:extLst>
           </p:cNvPr>
@@ -6080,7 +6080,7 @@
           <p:cNvPr id="3" name="Picture Placeholder 2">
             <a:extLst xmlns:a="http://schemas.openxmlformats.org/drawingml/2006/main">
               <a:ext uri="{FF2B5EF4-FFF2-40B4-BE49-F238E27FC236}">
-                <a16:creationId xmlns:a16="http://schemas.microsoft.com/office/drawing/2014/main" id="{4FC2E5C4-3C26-45CE-967D-B4EE0345F40C}"/>
+                <a16:creationId xmlns:a16="http://schemas.microsoft.com/office/drawing/2014/main" id="{AE595703-9115-4CA5-BB7F-4D1E31B7B34A}"/>
               </a:ext>
             </a:extLst>
           </p:cNvPr>
@@ -6147,7 +6147,7 @@
           <p:cNvPr id="4" name="Text Placeholder 3">
             <a:extLst xmlns:a="http://schemas.openxmlformats.org/drawingml/2006/main">
               <a:ext uri="{FF2B5EF4-FFF2-40B4-BE49-F238E27FC236}">
-                <a16:creationId xmlns:a16="http://schemas.microsoft.com/office/drawing/2014/main" id="{58D09FC5-55AE-45AA-924C-313A39624FAE}"/>
+                <a16:creationId xmlns:a16="http://schemas.microsoft.com/office/drawing/2014/main" id="{942EB4E8-2D7C-4634-BAB0-D26C442D02FE}"/>
               </a:ext>
             </a:extLst>
           </p:cNvPr>
@@ -6219,7 +6219,7 @@
           <p:cNvPr id="5" name="Date Placeholder 4">
             <a:extLst xmlns:a="http://schemas.openxmlformats.org/drawingml/2006/main">
               <a:ext uri="{FF2B5EF4-FFF2-40B4-BE49-F238E27FC236}">
-                <a16:creationId xmlns:a16="http://schemas.microsoft.com/office/drawing/2014/main" id="{75EB1D66-764F-4769-8680-4E831840CF8B}"/>
+                <a16:creationId xmlns:a16="http://schemas.microsoft.com/office/drawing/2014/main" id="{10D63F19-AB61-4401-93B1-BECEFE481AA4}"/>
               </a:ext>
             </a:extLst>
           </p:cNvPr>
@@ -6247,7 +6247,7 @@
           <p:cNvPr id="6" name="Footer Placeholder 5">
             <a:extLst xmlns:a="http://schemas.openxmlformats.org/drawingml/2006/main">
               <a:ext uri="{FF2B5EF4-FFF2-40B4-BE49-F238E27FC236}">
-                <a16:creationId xmlns:a16="http://schemas.microsoft.com/office/drawing/2014/main" id="{813A60E1-9B5D-4701-BF79-5F0739672672}"/>
+                <a16:creationId xmlns:a16="http://schemas.microsoft.com/office/drawing/2014/main" id="{9A86E8D1-F418-4679-B0AC-DB389F39C425}"/>
               </a:ext>
             </a:extLst>
           </p:cNvPr>
@@ -6272,7 +6272,7 @@
           <p:cNvPr id="7" name="Slide Number Placeholder 6">
             <a:extLst xmlns:a="http://schemas.openxmlformats.org/drawingml/2006/main">
               <a:ext uri="{FF2B5EF4-FFF2-40B4-BE49-F238E27FC236}">
-                <a16:creationId xmlns:a16="http://schemas.microsoft.com/office/drawing/2014/main" id="{18290B2D-CD88-4115-94EA-9E48E1B1DB82}"/>
+                <a16:creationId xmlns:a16="http://schemas.microsoft.com/office/drawing/2014/main" id="{23A3C921-A0C0-460D-95E0-D5F57599F329}"/>
               </a:ext>
             </a:extLst>
           </p:cNvPr>
@@ -6322,7 +6322,7 @@
           <p:cNvPr id="2" name="Title Placeholder 1">
             <a:extLst xmlns:a="http://schemas.openxmlformats.org/drawingml/2006/main">
               <a:ext uri="{FF2B5EF4-FFF2-40B4-BE49-F238E27FC236}">
-                <a16:creationId xmlns:a16="http://schemas.microsoft.com/office/drawing/2014/main" id="{63AC5473-87EF-4DF6-82F2-8C0479A9B317}"/>
+                <a16:creationId xmlns:a16="http://schemas.microsoft.com/office/drawing/2014/main" id="{A8A8264E-0237-4DE5-B59F-F5E7DAB09197}"/>
               </a:ext>
             </a:extLst>
           </p:cNvPr>
@@ -6360,7 +6360,7 @@
           <p:cNvPr id="3" name="Text Placeholder 2">
             <a:extLst xmlns:a="http://schemas.openxmlformats.org/drawingml/2006/main">
               <a:ext uri="{FF2B5EF4-FFF2-40B4-BE49-F238E27FC236}">
-                <a16:creationId xmlns:a16="http://schemas.microsoft.com/office/drawing/2014/main" id="{0C26BC7B-7EA2-48A3-8562-0BA467D002F3}"/>
+                <a16:creationId xmlns:a16="http://schemas.microsoft.com/office/drawing/2014/main" id="{3F29E324-7899-4DB4-A002-9341AA629AAE}"/>
               </a:ext>
             </a:extLst>
           </p:cNvPr>
@@ -6433,7 +6433,7 @@
           <p:cNvPr id="4" name="Date Placeholder 3">
             <a:extLst xmlns:a="http://schemas.openxmlformats.org/drawingml/2006/main">
               <a:ext uri="{FF2B5EF4-FFF2-40B4-BE49-F238E27FC236}">
-                <a16:creationId xmlns:a16="http://schemas.microsoft.com/office/drawing/2014/main" id="{93200F80-51F5-43C8-A629-19EC546AC5AF}"/>
+                <a16:creationId xmlns:a16="http://schemas.microsoft.com/office/drawing/2014/main" id="{75CEB0EF-D986-4A0D-8B76-60195CF595CA}"/>
               </a:ext>
             </a:extLst>
           </p:cNvPr>
@@ -6480,7 +6480,7 @@
           <p:cNvPr id="5" name="Footer Placeholder 4">
             <a:extLst xmlns:a="http://schemas.openxmlformats.org/drawingml/2006/main">
               <a:ext uri="{FF2B5EF4-FFF2-40B4-BE49-F238E27FC236}">
-                <a16:creationId xmlns:a16="http://schemas.microsoft.com/office/drawing/2014/main" id="{94D0EA44-22FC-4B03-8392-2D5C4FD11D27}"/>
+                <a16:creationId xmlns:a16="http://schemas.microsoft.com/office/drawing/2014/main" id="{99DB782B-0B15-4F69-B9B5-0C4130E92E9D}"/>
               </a:ext>
             </a:extLst>
           </p:cNvPr>
@@ -6524,7 +6524,7 @@
           <p:cNvPr id="6" name="Slide Number Placeholder 5">
             <a:extLst xmlns:a="http://schemas.openxmlformats.org/drawingml/2006/main">
               <a:ext uri="{FF2B5EF4-FFF2-40B4-BE49-F238E27FC236}">
-                <a16:creationId xmlns:a16="http://schemas.microsoft.com/office/drawing/2014/main" id="{19E32D69-845D-4F51-BE19-54B2320C511A}"/>
+                <a16:creationId xmlns:a16="http://schemas.microsoft.com/office/drawing/2014/main" id="{BED4C7D4-2B9F-406C-967D-CD5E054E07C8}"/>
               </a:ext>
             </a:extLst>
           </p:cNvPr>
@@ -6570,17 +6570,17 @@
   </p:cSld>
   <p:clrMap bg1="lt1" tx1="dk1" bg2="lt2" tx2="dk2" accent1="accent1" accent2="accent2" accent3="accent3" accent4="accent4" accent5="accent5" accent6="accent6" hlink="hlink" folHlink="folHlink"/>
   <p:sldLayoutIdLst>
-    <p:sldLayoutId xmlns:r="http://schemas.openxmlformats.org/officeDocument/2006/relationships" id="2147483649" r:id="R5900edfdd6714684"/>
-    <p:sldLayoutId xmlns:r="http://schemas.openxmlformats.org/officeDocument/2006/relationships" id="2147483650" r:id="R2c6c0c8c127c4f19"/>
-    <p:sldLayoutId xmlns:r="http://schemas.openxmlformats.org/officeDocument/2006/relationships" id="2147483651" r:id="Rc32789f209e14f06"/>
-    <p:sldLayoutId xmlns:r="http://schemas.openxmlformats.org/officeDocument/2006/relationships" id="2147483652" r:id="Rf80915e22d0446ec"/>
-    <p:sldLayoutId xmlns:r="http://schemas.openxmlformats.org/officeDocument/2006/relationships" id="2147483653" r:id="R8bbe74fce49b4b67"/>
-    <p:sldLayoutId xmlns:r="http://schemas.openxmlformats.org/officeDocument/2006/relationships" id="2147483654" r:id="R0398c8c994454858"/>
-    <p:sldLayoutId xmlns:r="http://schemas.openxmlformats.org/officeDocument/2006/relationships" id="2147483655" r:id="Rc7e4ae4de22343ce"/>
-    <p:sldLayoutId xmlns:r="http://schemas.openxmlformats.org/officeDocument/2006/relationships" id="2147483656" r:id="R06e98b95b87f4ece"/>
-    <p:sldLayoutId xmlns:r="http://schemas.openxmlformats.org/officeDocument/2006/relationships" id="2147483657" r:id="R63b47d48bfd545e7"/>
-    <p:sldLayoutId xmlns:r="http://schemas.openxmlformats.org/officeDocument/2006/relationships" id="2147483658" r:id="Re307f883bf8a43fb"/>
-    <p:sldLayoutId xmlns:r="http://schemas.openxmlformats.org/officeDocument/2006/relationships" id="2147483659" r:id="Re831b50a375f4dc1"/>
+    <p:sldLayoutId xmlns:r="http://schemas.openxmlformats.org/officeDocument/2006/relationships" id="2147483649" r:id="R8baf7c8e2c8c4bc9"/>
+    <p:sldLayoutId xmlns:r="http://schemas.openxmlformats.org/officeDocument/2006/relationships" id="2147483650" r:id="Rdeba14227f8447cb"/>
+    <p:sldLayoutId xmlns:r="http://schemas.openxmlformats.org/officeDocument/2006/relationships" id="2147483651" r:id="Rf0e02a7f5f4c48d9"/>
+    <p:sldLayoutId xmlns:r="http://schemas.openxmlformats.org/officeDocument/2006/relationships" id="2147483652" r:id="R0f1a0a7ce69646a1"/>
+    <p:sldLayoutId xmlns:r="http://schemas.openxmlformats.org/officeDocument/2006/relationships" id="2147483653" r:id="R692dda8a47b44bec"/>
+    <p:sldLayoutId xmlns:r="http://schemas.openxmlformats.org/officeDocument/2006/relationships" id="2147483654" r:id="Rc1c74d4275714fc5"/>
+    <p:sldLayoutId xmlns:r="http://schemas.openxmlformats.org/officeDocument/2006/relationships" id="2147483655" r:id="Rb1e782405d63489e"/>
+    <p:sldLayoutId xmlns:r="http://schemas.openxmlformats.org/officeDocument/2006/relationships" id="2147483656" r:id="R4a9ef2acf9744937"/>
+    <p:sldLayoutId xmlns:r="http://schemas.openxmlformats.org/officeDocument/2006/relationships" id="2147483657" r:id="R490cf7cf7af14fcb"/>
+    <p:sldLayoutId xmlns:r="http://schemas.openxmlformats.org/officeDocument/2006/relationships" id="2147483658" r:id="R040d7a9382cd4b3c"/>
+    <p:sldLayoutId xmlns:r="http://schemas.openxmlformats.org/officeDocument/2006/relationships" id="2147483659" r:id="R4a78e59230db4fe8"/>
   </p:sldLayoutIdLst>
   <p:txStyles>
     <p:titleStyle>
@@ -7130,7 +7130,7 @@
           <p:nvPr/>
         </p:nvPicPr>
         <p:blipFill>
-          <a:blip xmlns:r="http://schemas.openxmlformats.org/officeDocument/2006/relationships" xmlns:a="http://schemas.openxmlformats.org/drawingml/2006/main" r:embed="R6e796732ca8a4092"/>
+          <a:blip xmlns:r="http://schemas.openxmlformats.org/officeDocument/2006/relationships" xmlns:a="http://schemas.openxmlformats.org/drawingml/2006/main" r:embed="R13ae306ecc244e17"/>
           <a:stretch xmlns:a="http://schemas.openxmlformats.org/drawingml/2006/main">
             <a:fillRect l="0" t="0" r="0" b="0"/>
           </a:stretch>
@@ -7150,7 +7150,7 @@
           <p:cNvPr id="3" name="Rectangle 2">
             <a:extLst xmlns:a="http://schemas.openxmlformats.org/drawingml/2006/main">
               <a:ext uri="{FF2B5EF4-FFF2-40B4-BE49-F238E27FC236}">
-                <a16:creationId xmlns:a16="http://schemas.microsoft.com/office/drawing/2014/main" id="{2B1BD44E-67EE-4727-8EDE-5ED12B572751}"/>
+                <a16:creationId xmlns:a16="http://schemas.microsoft.com/office/drawing/2014/main" id="{58BA57AA-58AF-4DFD-89A6-CF0399D33E7F}"/>
               </a:ext>
             </a:extLst>
           </p:cNvPr>
@@ -7203,7 +7203,7 @@
           <p:cNvPr id="4" name="Rectangle 3">
             <a:extLst xmlns:a="http://schemas.openxmlformats.org/drawingml/2006/main">
               <a:ext uri="{FF2B5EF4-FFF2-40B4-BE49-F238E27FC236}">
-                <a16:creationId xmlns:a16="http://schemas.microsoft.com/office/drawing/2014/main" id="{8000E7F1-FBA3-43CD-BC40-EEA4223A7DB2}"/>
+                <a16:creationId xmlns:a16="http://schemas.microsoft.com/office/drawing/2014/main" id="{DE8B2F94-CFF1-4824-A1F0-0F70CEA94A9A}"/>
               </a:ext>
             </a:extLst>
           </p:cNvPr>
@@ -7256,7 +7256,7 @@
           <p:cNvPr id="5" name="Rectangle 4">
             <a:extLst xmlns:a="http://schemas.openxmlformats.org/drawingml/2006/main">
               <a:ext uri="{FF2B5EF4-FFF2-40B4-BE49-F238E27FC236}">
-                <a16:creationId xmlns:a16="http://schemas.microsoft.com/office/drawing/2014/main" id="{59B24076-0FAF-4B59-843F-50FCE3291C8D}"/>
+                <a16:creationId xmlns:a16="http://schemas.microsoft.com/office/drawing/2014/main" id="{0E6A86D5-BCCD-4414-AFC0-8C2A72BDE720}"/>
               </a:ext>
             </a:extLst>
           </p:cNvPr>
@@ -7313,7 +7313,7 @@
           <p:nvPr/>
         </p:nvPicPr>
         <p:blipFill>
-          <a:blip xmlns:r="http://schemas.openxmlformats.org/officeDocument/2006/relationships" xmlns:a="http://schemas.openxmlformats.org/drawingml/2006/main" r:embed="R4693ca4b97304f3f"/>
+          <a:blip xmlns:r="http://schemas.openxmlformats.org/officeDocument/2006/relationships" xmlns:a="http://schemas.openxmlformats.org/drawingml/2006/main" r:embed="R03e9a90fc36a485b"/>
           <a:stretch xmlns:a="http://schemas.openxmlformats.org/drawingml/2006/main">
             <a:fillRect l="0" t="0" r="0" b="0"/>
           </a:stretch>
@@ -7333,7 +7333,7 @@
           <p:cNvPr id="7" name="Rectangle 6">
             <a:extLst xmlns:a="http://schemas.openxmlformats.org/drawingml/2006/main">
               <a:ext uri="{FF2B5EF4-FFF2-40B4-BE49-F238E27FC236}">
-                <a16:creationId xmlns:a16="http://schemas.microsoft.com/office/drawing/2014/main" id="{AECCA0E9-6AD7-49CF-A451-2871FFA8E297}"/>
+                <a16:creationId xmlns:a16="http://schemas.microsoft.com/office/drawing/2014/main" id="{6975ACC4-622B-4653-ACCF-9FE482242DB9}"/>
               </a:ext>
             </a:extLst>
           </p:cNvPr>
@@ -7386,7 +7386,7 @@
           <p:cNvPr id="8" name="TextBox 7">
             <a:extLst xmlns:a="http://schemas.openxmlformats.org/drawingml/2006/main">
               <a:ext uri="{FF2B5EF4-FFF2-40B4-BE49-F238E27FC236}">
-                <a16:creationId xmlns:a16="http://schemas.microsoft.com/office/drawing/2014/main" id="{0163E539-75F1-45EB-B908-2ACB205C0144}"/>
+                <a16:creationId xmlns:a16="http://schemas.microsoft.com/office/drawing/2014/main" id="{A3A2C2C3-3180-4FBD-A105-4D79E5F59885}"/>
               </a:ext>
             </a:extLst>
           </p:cNvPr>
@@ -7441,7 +7441,7 @@
           <p:cNvPr id="9" name="TextBox 8">
             <a:extLst xmlns:a="http://schemas.openxmlformats.org/drawingml/2006/main">
               <a:ext uri="{FF2B5EF4-FFF2-40B4-BE49-F238E27FC236}">
-                <a16:creationId xmlns:a16="http://schemas.microsoft.com/office/drawing/2014/main" id="{129A1FC2-55AA-4395-A5A3-E28979AA7F12}"/>
+                <a16:creationId xmlns:a16="http://schemas.microsoft.com/office/drawing/2014/main" id="{B3AD24A6-4FB0-41E8-B076-C5D78CEFAFCE}"/>
               </a:ext>
             </a:extLst>
           </p:cNvPr>
@@ -7496,7 +7496,7 @@
           <p:cNvPr id="10" name="TextBox 9">
             <a:extLst xmlns:a="http://schemas.openxmlformats.org/drawingml/2006/main">
               <a:ext uri="{FF2B5EF4-FFF2-40B4-BE49-F238E27FC236}">
-                <a16:creationId xmlns:a16="http://schemas.microsoft.com/office/drawing/2014/main" id="{3BCD87DA-F8A3-4312-B33A-0EB77F997B3E}"/>
+                <a16:creationId xmlns:a16="http://schemas.microsoft.com/office/drawing/2014/main" id="{6082AB82-8872-4C17-9970-D2A5AD764124}"/>
               </a:ext>
             </a:extLst>
           </p:cNvPr>
@@ -7508,7 +7508,7 @@
         <p:spPr>
           <a:xfrm xmlns:a="http://schemas.openxmlformats.org/drawingml/2006/main">
             <a:off x="406400" y="1968500"/>
-            <a:ext cx="5588000" cy="1072896"/>
+            <a:ext cx="5588000" cy="825500"/>
           </a:xfrm>
           <a:prstGeom xmlns:a="http://schemas.openxmlformats.org/drawingml/2006/main" prst="rect">
             <a:avLst/>
@@ -7526,14 +7526,14 @@
                 <a:spcPct val="110000"/>
               </a:lnSpc>
               <a:buNone/>
-              <a:defRPr sz="3200">
+              <a:defRPr sz="2400">
                 <a:latin typeface="Arial"/>
                 <a:ea typeface="Arial"/>
                 <a:cs typeface="Arial"/>
               </a:defRPr>
             </a:pPr>
             <a:r>
-              <a:rPr sz="3200" b="1" i="0">
+              <a:rPr sz="2400" b="1" i="0">
                 <a:solidFill>
                   <a:srgbClr val="0B1220"/>
                 </a:solidFill>
@@ -7551,7 +7551,7 @@
           <p:cNvPr id="11" name="TextBox 10">
             <a:extLst xmlns:a="http://schemas.openxmlformats.org/drawingml/2006/main">
               <a:ext uri="{FF2B5EF4-FFF2-40B4-BE49-F238E27FC236}">
-                <a16:creationId xmlns:a16="http://schemas.microsoft.com/office/drawing/2014/main" id="{101BE1B4-8132-4F3A-B69B-5E937BBE2241}"/>
+                <a16:creationId xmlns:a16="http://schemas.microsoft.com/office/drawing/2014/main" id="{A71C16A0-DEC7-4170-AFDF-2DFF911A0362}"/>
               </a:ext>
             </a:extLst>
           </p:cNvPr>
@@ -7606,7 +7606,7 @@
           <p:cNvPr id="12" name="TextBox 11">
             <a:extLst xmlns:a="http://schemas.openxmlformats.org/drawingml/2006/main">
               <a:ext uri="{FF2B5EF4-FFF2-40B4-BE49-F238E27FC236}">
-                <a16:creationId xmlns:a16="http://schemas.microsoft.com/office/drawing/2014/main" id="{CE549616-6C02-46D0-8A3C-1D846DC13CD5}"/>
+                <a16:creationId xmlns:a16="http://schemas.microsoft.com/office/drawing/2014/main" id="{E89E6496-896A-4BE1-8862-98F49C52C288}"/>
               </a:ext>
             </a:extLst>
           </p:cNvPr>
@@ -7661,19 +7661,19 @@
           <p:cNvPr id="13" name="TextBox 12">
             <a:extLst xmlns:a="http://schemas.openxmlformats.org/drawingml/2006/main">
               <a:ext uri="{FF2B5EF4-FFF2-40B4-BE49-F238E27FC236}">
-                <a16:creationId xmlns:a16="http://schemas.microsoft.com/office/drawing/2014/main" id="{8ABE5C01-BAD1-47BD-B696-B841405FED51}"/>
-              </a:ext>
-            </a:extLst>
-          </p:cNvPr>
-          <p:cNvSpPr>
-            <a:spLocks xmlns:a="http://schemas.openxmlformats.org/drawingml/2006/main" noGrp="1"/>
-          </p:cNvSpPr>
-          <p:nvPr/>
-        </p:nvSpPr>
-        <p:spPr>
-          <a:xfrm xmlns:a="http://schemas.openxmlformats.org/drawingml/2006/main">
-            <a:off x="406400" y="3873500"/>
-            <a:ext cx="5207000" cy="254000"/>
+                <a16:creationId xmlns:a16="http://schemas.microsoft.com/office/drawing/2014/main" id="{E5888317-3724-4D3A-8A5F-77C551E43EA3}"/>
+              </a:ext>
+            </a:extLst>
+          </p:cNvPr>
+          <p:cNvSpPr>
+            <a:spLocks xmlns:a="http://schemas.openxmlformats.org/drawingml/2006/main" noGrp="1"/>
+          </p:cNvSpPr>
+          <p:nvPr/>
+        </p:nvSpPr>
+        <p:spPr>
+          <a:xfrm xmlns:a="http://schemas.openxmlformats.org/drawingml/2006/main">
+            <a:off x="406400" y="3962400"/>
+            <a:ext cx="5207000" cy="247650"/>
           </a:xfrm>
           <a:prstGeom xmlns:a="http://schemas.openxmlformats.org/drawingml/2006/main" prst="rect">
             <a:avLst/>
@@ -7716,7 +7716,7 @@
           <p:cNvPr id="14" name="Rectangle 13">
             <a:extLst xmlns:a="http://schemas.openxmlformats.org/drawingml/2006/main">
               <a:ext uri="{FF2B5EF4-FFF2-40B4-BE49-F238E27FC236}">
-                <a16:creationId xmlns:a16="http://schemas.microsoft.com/office/drawing/2014/main" id="{EA8AFEC2-20CB-4860-AB52-E21D4EC23835}"/>
+                <a16:creationId xmlns:a16="http://schemas.microsoft.com/office/drawing/2014/main" id="{54810B61-8FF9-42F4-A993-7F2FC5623454}"/>
               </a:ext>
             </a:extLst>
           </p:cNvPr>
@@ -7769,7 +7769,7 @@
           <p:cNvPr id="15" name="Rectangle 14">
             <a:extLst xmlns:a="http://schemas.openxmlformats.org/drawingml/2006/main">
               <a:ext uri="{FF2B5EF4-FFF2-40B4-BE49-F238E27FC236}">
-                <a16:creationId xmlns:a16="http://schemas.microsoft.com/office/drawing/2014/main" id="{65B6311D-E2CA-4DEA-9572-9D3E4415254D}"/>
+                <a16:creationId xmlns:a16="http://schemas.microsoft.com/office/drawing/2014/main" id="{FA2BCA20-3AE4-4BF0-9134-60BD42E094A2}"/>
               </a:ext>
             </a:extLst>
           </p:cNvPr>
@@ -7822,7 +7822,7 @@
           <p:cNvPr id="16" name="TextBox 15">
             <a:extLst xmlns:a="http://schemas.openxmlformats.org/drawingml/2006/main">
               <a:ext uri="{FF2B5EF4-FFF2-40B4-BE49-F238E27FC236}">
-                <a16:creationId xmlns:a16="http://schemas.microsoft.com/office/drawing/2014/main" id="{353D2028-40ED-4D9F-939F-8EB90422C219}"/>
+                <a16:creationId xmlns:a16="http://schemas.microsoft.com/office/drawing/2014/main" id="{ECED4DCD-6A17-4981-985D-FA11655D6F56}"/>
               </a:ext>
             </a:extLst>
           </p:cNvPr>
@@ -7877,7 +7877,7 @@
           <p:cNvPr id="17" name="TextBox 16">
             <a:extLst xmlns:a="http://schemas.openxmlformats.org/drawingml/2006/main">
               <a:ext uri="{FF2B5EF4-FFF2-40B4-BE49-F238E27FC236}">
-                <a16:creationId xmlns:a16="http://schemas.microsoft.com/office/drawing/2014/main" id="{359F0294-4D6F-4606-AF86-B746AEE3CE04}"/>
+                <a16:creationId xmlns:a16="http://schemas.microsoft.com/office/drawing/2014/main" id="{205EF80B-DA01-4B26-A5FB-6835079AD124}"/>
               </a:ext>
             </a:extLst>
           </p:cNvPr>
@@ -7930,7 +7930,7 @@
     </p:spTree>
     <p:extLst>
       <p:ext uri="{BB962C8B-B14F-4D97-AF65-F5344CB8AC3E}">
-        <p14:creationId xmlns:p14="http://schemas.microsoft.com/office/powerpoint/2010/main" val="2037800595"/>
+        <p14:creationId xmlns:p14="http://schemas.microsoft.com/office/powerpoint/2010/main" val="1665714533"/>
       </p:ext>
     </p:extLst>
   </p:cSld>
@@ -7958,7 +7958,7 @@
           <p:nvPr/>
         </p:nvPicPr>
         <p:blipFill>
-          <a:blip xmlns:r="http://schemas.openxmlformats.org/officeDocument/2006/relationships" xmlns:a="http://schemas.openxmlformats.org/drawingml/2006/main" r:embed="R735d807f72e64309"/>
+          <a:blip xmlns:r="http://schemas.openxmlformats.org/officeDocument/2006/relationships" xmlns:a="http://schemas.openxmlformats.org/drawingml/2006/main" r:embed="R6c17174c87da44ea"/>
           <a:stretch xmlns:a="http://schemas.openxmlformats.org/drawingml/2006/main">
             <a:fillRect l="0" t="0" r="0" b="0"/>
           </a:stretch>
@@ -7978,7 +7978,7 @@
           <p:cNvPr id="3" name="Rectangle 2">
             <a:extLst xmlns:a="http://schemas.openxmlformats.org/drawingml/2006/main">
               <a:ext uri="{FF2B5EF4-FFF2-40B4-BE49-F238E27FC236}">
-                <a16:creationId xmlns:a16="http://schemas.microsoft.com/office/drawing/2014/main" id="{0BAD4AAF-282E-4AD4-B0C4-B23AC318FFB6}"/>
+                <a16:creationId xmlns:a16="http://schemas.microsoft.com/office/drawing/2014/main" id="{59813184-AEC0-4D28-9359-B50E2A11D0B4}"/>
               </a:ext>
             </a:extLst>
           </p:cNvPr>
@@ -8031,7 +8031,7 @@
           <p:cNvPr id="4" name="TextBox 3">
             <a:extLst xmlns:a="http://schemas.openxmlformats.org/drawingml/2006/main">
               <a:ext uri="{FF2B5EF4-FFF2-40B4-BE49-F238E27FC236}">
-                <a16:creationId xmlns:a16="http://schemas.microsoft.com/office/drawing/2014/main" id="{32383C36-11EA-498D-ACEE-87093BC4EDD4}"/>
+                <a16:creationId xmlns:a16="http://schemas.microsoft.com/office/drawing/2014/main" id="{9350FC28-6FB3-4068-A9B7-765781986B3E}"/>
               </a:ext>
             </a:extLst>
           </p:cNvPr>
@@ -8086,7 +8086,7 @@
           <p:cNvPr id="5" name="TextBox 4">
             <a:extLst xmlns:a="http://schemas.openxmlformats.org/drawingml/2006/main">
               <a:ext uri="{FF2B5EF4-FFF2-40B4-BE49-F238E27FC236}">
-                <a16:creationId xmlns:a16="http://schemas.microsoft.com/office/drawing/2014/main" id="{A21BD24F-6D53-4943-830A-171874CB0AB9}"/>
+                <a16:creationId xmlns:a16="http://schemas.microsoft.com/office/drawing/2014/main" id="{AD9E5F2A-5AE4-4230-8DCA-EE9C8C023F52}"/>
               </a:ext>
             </a:extLst>
           </p:cNvPr>
@@ -8098,7 +8098,7 @@
         <p:spPr>
           <a:xfrm xmlns:a="http://schemas.openxmlformats.org/drawingml/2006/main">
             <a:off x="406400" y="1473200"/>
-            <a:ext cx="10477500" cy="1072896"/>
+            <a:ext cx="10477500" cy="804672"/>
           </a:xfrm>
           <a:prstGeom xmlns:a="http://schemas.openxmlformats.org/drawingml/2006/main" prst="rect">
             <a:avLst/>
@@ -8116,14 +8116,14 @@
                 <a:spcPct val="110000"/>
               </a:lnSpc>
               <a:buNone/>
-              <a:defRPr sz="3200">
+              <a:defRPr sz="2400">
                 <a:latin typeface="Arial"/>
                 <a:ea typeface="Arial"/>
                 <a:cs typeface="Arial"/>
               </a:defRPr>
             </a:pPr>
             <a:r>
-              <a:rPr sz="3200" b="1" i="0">
+              <a:rPr sz="2400" b="1" i="0">
                 <a:solidFill>
                   <a:srgbClr val="102A43"/>
                 </a:solidFill>
@@ -8327,7 +8327,7 @@
           <p:cNvPr id="7" name="Rectangle 6">
             <a:extLst xmlns:a="http://schemas.openxmlformats.org/drawingml/2006/main">
               <a:ext uri="{FF2B5EF4-FFF2-40B4-BE49-F238E27FC236}">
-                <a16:creationId xmlns:a16="http://schemas.microsoft.com/office/drawing/2014/main" id="{30DB4684-1D0F-4EF1-86CB-2B2FAD99433B}"/>
+                <a16:creationId xmlns:a16="http://schemas.microsoft.com/office/drawing/2014/main" id="{2375D240-F822-4E28-82AC-A4E57D1DCE17}"/>
               </a:ext>
             </a:extLst>
           </p:cNvPr>
@@ -8380,7 +8380,7 @@
           <p:cNvPr id="8" name="Rectangle 7">
             <a:extLst xmlns:a="http://schemas.openxmlformats.org/drawingml/2006/main">
               <a:ext uri="{FF2B5EF4-FFF2-40B4-BE49-F238E27FC236}">
-                <a16:creationId xmlns:a16="http://schemas.microsoft.com/office/drawing/2014/main" id="{7DD254A5-4147-4797-ADAC-2F3C6B213B3E}"/>
+                <a16:creationId xmlns:a16="http://schemas.microsoft.com/office/drawing/2014/main" id="{75D8CB23-823E-41F8-A1B3-3556DC8C9E49}"/>
               </a:ext>
             </a:extLst>
           </p:cNvPr>
@@ -8433,7 +8433,7 @@
           <p:cNvPr id="9" name="TextBox 8">
             <a:extLst xmlns:a="http://schemas.openxmlformats.org/drawingml/2006/main">
               <a:ext uri="{FF2B5EF4-FFF2-40B4-BE49-F238E27FC236}">
-                <a16:creationId xmlns:a16="http://schemas.microsoft.com/office/drawing/2014/main" id="{8FDD4180-E651-4586-A59A-25BBFAF29093}"/>
+                <a16:creationId xmlns:a16="http://schemas.microsoft.com/office/drawing/2014/main" id="{C4713C8A-7E23-410B-8B31-8AE971118F2B}"/>
               </a:ext>
             </a:extLst>
           </p:cNvPr>
@@ -8488,7 +8488,7 @@
           <p:cNvPr id="10" name="TextBox 9">
             <a:extLst xmlns:a="http://schemas.openxmlformats.org/drawingml/2006/main">
               <a:ext uri="{FF2B5EF4-FFF2-40B4-BE49-F238E27FC236}">
-                <a16:creationId xmlns:a16="http://schemas.microsoft.com/office/drawing/2014/main" id="{E4EF5A21-BF5E-4077-A98E-36BBDC81D43C}"/>
+                <a16:creationId xmlns:a16="http://schemas.microsoft.com/office/drawing/2014/main" id="{3867A0B5-20B2-407B-9712-A6EA9367B248}"/>
               </a:ext>
             </a:extLst>
           </p:cNvPr>
@@ -8541,7 +8541,7 @@
     </p:spTree>
     <p:extLst>
       <p:ext uri="{BB962C8B-B14F-4D97-AF65-F5344CB8AC3E}">
-        <p14:creationId xmlns:p14="http://schemas.microsoft.com/office/powerpoint/2010/main" val="1585150990"/>
+        <p14:creationId xmlns:p14="http://schemas.microsoft.com/office/powerpoint/2010/main" val="1580732135"/>
       </p:ext>
     </p:extLst>
   </p:cSld>
@@ -8569,7 +8569,7 @@
           <p:nvPr/>
         </p:nvPicPr>
         <p:blipFill>
-          <a:blip xmlns:r="http://schemas.openxmlformats.org/officeDocument/2006/relationships" xmlns:a="http://schemas.openxmlformats.org/drawingml/2006/main" r:embed="R2345d2c34c604c2f"/>
+          <a:blip xmlns:r="http://schemas.openxmlformats.org/officeDocument/2006/relationships" xmlns:a="http://schemas.openxmlformats.org/drawingml/2006/main" r:embed="R0d7e710f9f0a418f"/>
           <a:stretch xmlns:a="http://schemas.openxmlformats.org/drawingml/2006/main">
             <a:fillRect l="0" t="0" r="0" b="0"/>
           </a:stretch>
@@ -8589,7 +8589,7 @@
           <p:cNvPr id="3" name="Rectangle 2">
             <a:extLst xmlns:a="http://schemas.openxmlformats.org/drawingml/2006/main">
               <a:ext uri="{FF2B5EF4-FFF2-40B4-BE49-F238E27FC236}">
-                <a16:creationId xmlns:a16="http://schemas.microsoft.com/office/drawing/2014/main" id="{7991C748-902C-43B4-8F09-DCAB8D5968A5}"/>
+                <a16:creationId xmlns:a16="http://schemas.microsoft.com/office/drawing/2014/main" id="{AE706CE0-DD27-459B-90CF-A78628324AFD}"/>
               </a:ext>
             </a:extLst>
           </p:cNvPr>
@@ -8642,7 +8642,7 @@
           <p:cNvPr id="4" name="TextBox 3">
             <a:extLst xmlns:a="http://schemas.openxmlformats.org/drawingml/2006/main">
               <a:ext uri="{FF2B5EF4-FFF2-40B4-BE49-F238E27FC236}">
-                <a16:creationId xmlns:a16="http://schemas.microsoft.com/office/drawing/2014/main" id="{957DBFF4-6FE5-47DE-801D-911C7CE7020F}"/>
+                <a16:creationId xmlns:a16="http://schemas.microsoft.com/office/drawing/2014/main" id="{B5B60F68-A02E-426A-B36B-04D91A641A7F}"/>
               </a:ext>
             </a:extLst>
           </p:cNvPr>
@@ -8697,7 +8697,7 @@
           <p:cNvPr id="5" name="TextBox 4">
             <a:extLst xmlns:a="http://schemas.openxmlformats.org/drawingml/2006/main">
               <a:ext uri="{FF2B5EF4-FFF2-40B4-BE49-F238E27FC236}">
-                <a16:creationId xmlns:a16="http://schemas.microsoft.com/office/drawing/2014/main" id="{755FF586-DF63-4841-BBCF-4382AC290835}"/>
+                <a16:creationId xmlns:a16="http://schemas.microsoft.com/office/drawing/2014/main" id="{D82F4E2C-E9E5-405D-A127-7B8B9F8AD391}"/>
               </a:ext>
             </a:extLst>
           </p:cNvPr>
@@ -8727,14 +8727,14 @@
                 <a:spcPct val="110000"/>
               </a:lnSpc>
               <a:buNone/>
-              <a:defRPr sz="3200">
+              <a:defRPr sz="2400">
                 <a:latin typeface="Arial"/>
                 <a:ea typeface="Arial"/>
                 <a:cs typeface="Arial"/>
               </a:defRPr>
             </a:pPr>
             <a:r>
-              <a:rPr sz="3200" b="1" i="0">
+              <a:rPr sz="2400" b="1" i="0">
                 <a:solidFill>
                   <a:srgbClr val="102A43"/>
                 </a:solidFill>
@@ -8752,7 +8752,7 @@
           <p:cNvPr id="6" name="TextBox 5">
             <a:extLst xmlns:a="http://schemas.openxmlformats.org/drawingml/2006/main">
               <a:ext uri="{FF2B5EF4-FFF2-40B4-BE49-F238E27FC236}">
-                <a16:creationId xmlns:a16="http://schemas.microsoft.com/office/drawing/2014/main" id="{AA87925E-D3EE-4CD3-B8BE-DF84F7E700AC}"/>
+                <a16:creationId xmlns:a16="http://schemas.microsoft.com/office/drawing/2014/main" id="{4131B8A7-7187-4BB9-AD57-3E20093941DD}"/>
               </a:ext>
             </a:extLst>
           </p:cNvPr>
@@ -8864,7 +8864,7 @@
           <p:cNvPr id="7" name="TextBox 6">
             <a:extLst xmlns:a="http://schemas.openxmlformats.org/drawingml/2006/main">
               <a:ext uri="{FF2B5EF4-FFF2-40B4-BE49-F238E27FC236}">
-                <a16:creationId xmlns:a16="http://schemas.microsoft.com/office/drawing/2014/main" id="{2A995C89-7441-4C25-9357-3EC6FF25C6B2}"/>
+                <a16:creationId xmlns:a16="http://schemas.microsoft.com/office/drawing/2014/main" id="{752BE485-AB0F-401F-98FA-E8B9313B7F7D}"/>
               </a:ext>
             </a:extLst>
           </p:cNvPr>
@@ -8919,7 +8919,7 @@
           <p:cNvPr id="8" name="Rectangle 7">
             <a:extLst xmlns:a="http://schemas.openxmlformats.org/drawingml/2006/main">
               <a:ext uri="{FF2B5EF4-FFF2-40B4-BE49-F238E27FC236}">
-                <a16:creationId xmlns:a16="http://schemas.microsoft.com/office/drawing/2014/main" id="{CB99B7EB-8813-4434-8AF0-F0CE23DA3DF4}"/>
+                <a16:creationId xmlns:a16="http://schemas.microsoft.com/office/drawing/2014/main" id="{EFCC883B-7B70-47CE-B4E6-FB71B60C1170}"/>
               </a:ext>
             </a:extLst>
           </p:cNvPr>
@@ -8972,7 +8972,7 @@
           <p:cNvPr id="9" name="Rectangle 8">
             <a:extLst xmlns:a="http://schemas.openxmlformats.org/drawingml/2006/main">
               <a:ext uri="{FF2B5EF4-FFF2-40B4-BE49-F238E27FC236}">
-                <a16:creationId xmlns:a16="http://schemas.microsoft.com/office/drawing/2014/main" id="{66ED9753-3023-43D4-B3CD-B42AE233DB97}"/>
+                <a16:creationId xmlns:a16="http://schemas.microsoft.com/office/drawing/2014/main" id="{A7C21C71-FCB6-478E-8F44-4D4241AFC686}"/>
               </a:ext>
             </a:extLst>
           </p:cNvPr>
@@ -9025,7 +9025,7 @@
           <p:cNvPr id="10" name="TextBox 9">
             <a:extLst xmlns:a="http://schemas.openxmlformats.org/drawingml/2006/main">
               <a:ext uri="{FF2B5EF4-FFF2-40B4-BE49-F238E27FC236}">
-                <a16:creationId xmlns:a16="http://schemas.microsoft.com/office/drawing/2014/main" id="{56EEBBD2-1CEF-4391-BA08-3F70F7E06476}"/>
+                <a16:creationId xmlns:a16="http://schemas.microsoft.com/office/drawing/2014/main" id="{41E5EE30-F231-4BF2-83B3-1276401A01D4}"/>
               </a:ext>
             </a:extLst>
           </p:cNvPr>
@@ -9080,7 +9080,7 @@
           <p:cNvPr id="11" name="TextBox 10">
             <a:extLst xmlns:a="http://schemas.openxmlformats.org/drawingml/2006/main">
               <a:ext uri="{FF2B5EF4-FFF2-40B4-BE49-F238E27FC236}">
-                <a16:creationId xmlns:a16="http://schemas.microsoft.com/office/drawing/2014/main" id="{AFF50F80-5864-4452-8795-43197398A531}"/>
+                <a16:creationId xmlns:a16="http://schemas.microsoft.com/office/drawing/2014/main" id="{81D2AF1D-431A-49B9-8302-DEF693DABBD3}"/>
               </a:ext>
             </a:extLst>
           </p:cNvPr>
@@ -9133,7 +9133,7 @@
     </p:spTree>
     <p:extLst>
       <p:ext uri="{BB962C8B-B14F-4D97-AF65-F5344CB8AC3E}">
-        <p14:creationId xmlns:p14="http://schemas.microsoft.com/office/powerpoint/2010/main" val="1743920400"/>
+        <p14:creationId xmlns:p14="http://schemas.microsoft.com/office/powerpoint/2010/main" val="193777172"/>
       </p:ext>
     </p:extLst>
   </p:cSld>
@@ -9157,7 +9157,7 @@
           <p:cNvPr id="2" name="Rectangle 1">
             <a:extLst xmlns:a="http://schemas.openxmlformats.org/drawingml/2006/main">
               <a:ext uri="{FF2B5EF4-FFF2-40B4-BE49-F238E27FC236}">
-                <a16:creationId xmlns:a16="http://schemas.microsoft.com/office/drawing/2014/main" id="{41DE855B-3838-41A1-A26D-A5D945FFBFF5}"/>
+                <a16:creationId xmlns:a16="http://schemas.microsoft.com/office/drawing/2014/main" id="{C343155E-D690-4A8A-8EE9-D0AAC7D887D7}"/>
               </a:ext>
             </a:extLst>
           </p:cNvPr>
@@ -9210,7 +9210,7 @@
           <p:cNvPr id="3" name="TextBox 2">
             <a:extLst xmlns:a="http://schemas.openxmlformats.org/drawingml/2006/main">
               <a:ext uri="{FF2B5EF4-FFF2-40B4-BE49-F238E27FC236}">
-                <a16:creationId xmlns:a16="http://schemas.microsoft.com/office/drawing/2014/main" id="{F662546B-071F-4208-BEBE-0AFE86D06CD4}"/>
+                <a16:creationId xmlns:a16="http://schemas.microsoft.com/office/drawing/2014/main" id="{F17FDDFF-6BDB-47B1-9EDA-76B8413315E0}"/>
               </a:ext>
             </a:extLst>
           </p:cNvPr>
@@ -9265,7 +9265,7 @@
           <p:cNvPr id="4" name="TextBox 3">
             <a:extLst xmlns:a="http://schemas.openxmlformats.org/drawingml/2006/main">
               <a:ext uri="{FF2B5EF4-FFF2-40B4-BE49-F238E27FC236}">
-                <a16:creationId xmlns:a16="http://schemas.microsoft.com/office/drawing/2014/main" id="{A223A738-33AF-468C-963A-90A6C020966B}"/>
+                <a16:creationId xmlns:a16="http://schemas.microsoft.com/office/drawing/2014/main" id="{26470779-7BE6-4F66-BD71-98204B1A1593}"/>
               </a:ext>
             </a:extLst>
           </p:cNvPr>
@@ -9320,7 +9320,7 @@
           <p:cNvPr id="5" name="TextBox 4">
             <a:extLst xmlns:a="http://schemas.openxmlformats.org/drawingml/2006/main">
               <a:ext uri="{FF2B5EF4-FFF2-40B4-BE49-F238E27FC236}">
-                <a16:creationId xmlns:a16="http://schemas.microsoft.com/office/drawing/2014/main" id="{9861F382-BBD1-4333-8715-49F5B2C362F6}"/>
+                <a16:creationId xmlns:a16="http://schemas.microsoft.com/office/drawing/2014/main" id="{2AD75CE6-8428-4BBA-A0FC-5BB92E30ED26}"/>
               </a:ext>
             </a:extLst>
           </p:cNvPr>
@@ -9375,7 +9375,7 @@
           <p:cNvPr id="6" name="Rectangle 5">
             <a:extLst xmlns:a="http://schemas.openxmlformats.org/drawingml/2006/main">
               <a:ext uri="{FF2B5EF4-FFF2-40B4-BE49-F238E27FC236}">
-                <a16:creationId xmlns:a16="http://schemas.microsoft.com/office/drawing/2014/main" id="{1415DE0D-EE52-44E2-BD8C-9D5B117F8F54}"/>
+                <a16:creationId xmlns:a16="http://schemas.microsoft.com/office/drawing/2014/main" id="{61C51211-D980-4F35-B0EA-453FFCC21BFC}"/>
               </a:ext>
             </a:extLst>
           </p:cNvPr>
@@ -9426,7 +9426,7 @@
     </p:spTree>
     <p:extLst>
       <p:ext uri="{BB962C8B-B14F-4D97-AF65-F5344CB8AC3E}">
-        <p14:creationId xmlns:p14="http://schemas.microsoft.com/office/powerpoint/2010/main" val="1913622166"/>
+        <p14:creationId xmlns:p14="http://schemas.microsoft.com/office/powerpoint/2010/main" val="881733826"/>
       </p:ext>
     </p:extLst>
   </p:cSld>
@@ -9454,7 +9454,7 @@
           <p:nvPr/>
         </p:nvPicPr>
         <p:blipFill>
-          <a:blip xmlns:r="http://schemas.openxmlformats.org/officeDocument/2006/relationships" xmlns:a="http://schemas.openxmlformats.org/drawingml/2006/main" r:embed="Rd5f148462c7b4636"/>
+          <a:blip xmlns:r="http://schemas.openxmlformats.org/officeDocument/2006/relationships" xmlns:a="http://schemas.openxmlformats.org/drawingml/2006/main" r:embed="R2cfd7fe0b5dd4a22"/>
           <a:stretch xmlns:a="http://schemas.openxmlformats.org/drawingml/2006/main">
             <a:fillRect l="0" t="0" r="0" b="0"/>
           </a:stretch>
@@ -9474,7 +9474,7 @@
           <p:cNvPr id="3" name="Rectangle 2">
             <a:extLst xmlns:a="http://schemas.openxmlformats.org/drawingml/2006/main">
               <a:ext uri="{FF2B5EF4-FFF2-40B4-BE49-F238E27FC236}">
-                <a16:creationId xmlns:a16="http://schemas.microsoft.com/office/drawing/2014/main" id="{07099AC9-F6B5-4967-82E3-B46DBDB9EA56}"/>
+                <a16:creationId xmlns:a16="http://schemas.microsoft.com/office/drawing/2014/main" id="{48FFBD0D-A340-4BAD-BBFB-E51D225D3B0C}"/>
               </a:ext>
             </a:extLst>
           </p:cNvPr>
@@ -9527,7 +9527,7 @@
           <p:cNvPr id="4" name="TextBox 3">
             <a:extLst xmlns:a="http://schemas.openxmlformats.org/drawingml/2006/main">
               <a:ext uri="{FF2B5EF4-FFF2-40B4-BE49-F238E27FC236}">
-                <a16:creationId xmlns:a16="http://schemas.microsoft.com/office/drawing/2014/main" id="{946F3464-80D4-401A-A34D-6E67D8A7306E}"/>
+                <a16:creationId xmlns:a16="http://schemas.microsoft.com/office/drawing/2014/main" id="{8329DCFE-6E23-4CAD-B991-A967FE9F9B08}"/>
               </a:ext>
             </a:extLst>
           </p:cNvPr>
@@ -9582,7 +9582,7 @@
           <p:cNvPr id="5" name="TextBox 4">
             <a:extLst xmlns:a="http://schemas.openxmlformats.org/drawingml/2006/main">
               <a:ext uri="{FF2B5EF4-FFF2-40B4-BE49-F238E27FC236}">
-                <a16:creationId xmlns:a16="http://schemas.microsoft.com/office/drawing/2014/main" id="{13811FB1-4984-4F62-852B-5F33BF346F0D}"/>
+                <a16:creationId xmlns:a16="http://schemas.microsoft.com/office/drawing/2014/main" id="{BDD9E825-C365-488D-8DE5-4D4F2F969EF8}"/>
               </a:ext>
             </a:extLst>
           </p:cNvPr>
@@ -9612,14 +9612,14 @@
                 <a:spcPct val="110000"/>
               </a:lnSpc>
               <a:buNone/>
-              <a:defRPr sz="3200">
+              <a:defRPr sz="2400">
                 <a:latin typeface="Arial"/>
                 <a:ea typeface="Arial"/>
                 <a:cs typeface="Arial"/>
               </a:defRPr>
             </a:pPr>
             <a:r>
-              <a:rPr sz="3200" b="1" i="0">
+              <a:rPr sz="2400" b="1" i="0">
                 <a:solidFill>
                   <a:srgbClr val="102A43"/>
                 </a:solidFill>
@@ -9637,7 +9637,7 @@
           <p:cNvPr id="6" name="Rounded Rectangle 5">
             <a:extLst xmlns:a="http://schemas.openxmlformats.org/drawingml/2006/main">
               <a:ext uri="{FF2B5EF4-FFF2-40B4-BE49-F238E27FC236}">
-                <a16:creationId xmlns:a16="http://schemas.microsoft.com/office/drawing/2014/main" id="{9FA97D81-8538-4B28-BFB7-79F1DCC21B58}"/>
+                <a16:creationId xmlns:a16="http://schemas.microsoft.com/office/drawing/2014/main" id="{3A1AA9A8-EA14-4667-87C0-F7863CB444BE}"/>
               </a:ext>
             </a:extLst>
           </p:cNvPr>
@@ -9694,7 +9694,7 @@
           <p:cNvPr id="7" name="TextBox 6">
             <a:extLst xmlns:a="http://schemas.openxmlformats.org/drawingml/2006/main">
               <a:ext uri="{FF2B5EF4-FFF2-40B4-BE49-F238E27FC236}">
-                <a16:creationId xmlns:a16="http://schemas.microsoft.com/office/drawing/2014/main" id="{13A1FBA3-AADC-40D9-97A4-BA37DAB2F97F}"/>
+                <a16:creationId xmlns:a16="http://schemas.microsoft.com/office/drawing/2014/main" id="{35096008-62D7-46EB-ADA4-D1A8D04461C6}"/>
               </a:ext>
             </a:extLst>
           </p:cNvPr>
@@ -9749,7 +9749,7 @@
           <p:cNvPr id="8" name="TextBox 7">
             <a:extLst xmlns:a="http://schemas.openxmlformats.org/drawingml/2006/main">
               <a:ext uri="{FF2B5EF4-FFF2-40B4-BE49-F238E27FC236}">
-                <a16:creationId xmlns:a16="http://schemas.microsoft.com/office/drawing/2014/main" id="{DAC4F606-2611-425F-B24D-BE468258FC09}"/>
+                <a16:creationId xmlns:a16="http://schemas.microsoft.com/office/drawing/2014/main" id="{99994378-0969-49BE-8E26-9F57598DB7B6}"/>
               </a:ext>
             </a:extLst>
           </p:cNvPr>
@@ -9804,7 +9804,7 @@
           <p:cNvPr id="9" name="TextBox 8">
             <a:extLst xmlns:a="http://schemas.openxmlformats.org/drawingml/2006/main">
               <a:ext uri="{FF2B5EF4-FFF2-40B4-BE49-F238E27FC236}">
-                <a16:creationId xmlns:a16="http://schemas.microsoft.com/office/drawing/2014/main" id="{DD172158-D7B9-470B-9E2D-880AC3CA2ADD}"/>
+                <a16:creationId xmlns:a16="http://schemas.microsoft.com/office/drawing/2014/main" id="{A7C12EB2-ED12-44A5-8E76-C453F8D69F3F}"/>
               </a:ext>
             </a:extLst>
           </p:cNvPr>
@@ -9889,7 +9889,7 @@
           <p:cNvPr id="10" name="Rounded Rectangle 9">
             <a:extLst xmlns:a="http://schemas.openxmlformats.org/drawingml/2006/main">
               <a:ext uri="{FF2B5EF4-FFF2-40B4-BE49-F238E27FC236}">
-                <a16:creationId xmlns:a16="http://schemas.microsoft.com/office/drawing/2014/main" id="{2F1C8407-372E-4054-8D6E-F4EF8A5B0B11}"/>
+                <a16:creationId xmlns:a16="http://schemas.microsoft.com/office/drawing/2014/main" id="{825243B5-1DF7-4039-AC0B-F86F93296AB7}"/>
               </a:ext>
             </a:extLst>
           </p:cNvPr>
@@ -9946,7 +9946,7 @@
           <p:cNvPr id="11" name="TextBox 10">
             <a:extLst xmlns:a="http://schemas.openxmlformats.org/drawingml/2006/main">
               <a:ext uri="{FF2B5EF4-FFF2-40B4-BE49-F238E27FC236}">
-                <a16:creationId xmlns:a16="http://schemas.microsoft.com/office/drawing/2014/main" id="{601FFB1D-DC2F-4531-A3DF-FB9810FAD953}"/>
+                <a16:creationId xmlns:a16="http://schemas.microsoft.com/office/drawing/2014/main" id="{190A1752-C68B-45E2-BC7B-93FA90BDA4B2}"/>
               </a:ext>
             </a:extLst>
           </p:cNvPr>
@@ -10001,7 +10001,7 @@
           <p:cNvPr id="12" name="TextBox 11">
             <a:extLst xmlns:a="http://schemas.openxmlformats.org/drawingml/2006/main">
               <a:ext uri="{FF2B5EF4-FFF2-40B4-BE49-F238E27FC236}">
-                <a16:creationId xmlns:a16="http://schemas.microsoft.com/office/drawing/2014/main" id="{B5BAB4EF-00B7-44F8-88E0-C54284955FD4}"/>
+                <a16:creationId xmlns:a16="http://schemas.microsoft.com/office/drawing/2014/main" id="{D3D73E23-1A41-40CD-9F5C-2F8695DCB86D}"/>
               </a:ext>
             </a:extLst>
           </p:cNvPr>
@@ -10056,7 +10056,7 @@
           <p:cNvPr id="13" name="TextBox 12">
             <a:extLst xmlns:a="http://schemas.openxmlformats.org/drawingml/2006/main">
               <a:ext uri="{FF2B5EF4-FFF2-40B4-BE49-F238E27FC236}">
-                <a16:creationId xmlns:a16="http://schemas.microsoft.com/office/drawing/2014/main" id="{3FFB54D2-B0D1-4C1A-8183-B79E510C1D17}"/>
+                <a16:creationId xmlns:a16="http://schemas.microsoft.com/office/drawing/2014/main" id="{4298CC6E-79BE-4DB3-BA48-E4E12F95C531}"/>
               </a:ext>
             </a:extLst>
           </p:cNvPr>
@@ -10141,7 +10141,7 @@
           <p:cNvPr id="14" name="Rounded Rectangle 13">
             <a:extLst xmlns:a="http://schemas.openxmlformats.org/drawingml/2006/main">
               <a:ext uri="{FF2B5EF4-FFF2-40B4-BE49-F238E27FC236}">
-                <a16:creationId xmlns:a16="http://schemas.microsoft.com/office/drawing/2014/main" id="{D1FD2B5A-1BA3-4F0C-8A9E-D5551BA8B8D2}"/>
+                <a16:creationId xmlns:a16="http://schemas.microsoft.com/office/drawing/2014/main" id="{7BA24F5A-AD70-4C45-B1CA-6812604FCE91}"/>
               </a:ext>
             </a:extLst>
           </p:cNvPr>
@@ -10198,7 +10198,7 @@
           <p:cNvPr id="15" name="TextBox 14">
             <a:extLst xmlns:a="http://schemas.openxmlformats.org/drawingml/2006/main">
               <a:ext uri="{FF2B5EF4-FFF2-40B4-BE49-F238E27FC236}">
-                <a16:creationId xmlns:a16="http://schemas.microsoft.com/office/drawing/2014/main" id="{A52101A6-4C6A-4079-B18F-F1450FCD389C}"/>
+                <a16:creationId xmlns:a16="http://schemas.microsoft.com/office/drawing/2014/main" id="{57B66E5F-B1F0-48AF-85C2-FEE7E25E95A5}"/>
               </a:ext>
             </a:extLst>
           </p:cNvPr>
@@ -10253,7 +10253,7 @@
           <p:cNvPr id="16" name="TextBox 15">
             <a:extLst xmlns:a="http://schemas.openxmlformats.org/drawingml/2006/main">
               <a:ext uri="{FF2B5EF4-FFF2-40B4-BE49-F238E27FC236}">
-                <a16:creationId xmlns:a16="http://schemas.microsoft.com/office/drawing/2014/main" id="{C9DDA60A-0223-4675-A3EA-8EF4D04135F7}"/>
+                <a16:creationId xmlns:a16="http://schemas.microsoft.com/office/drawing/2014/main" id="{439D52E7-2BCA-4E33-93CC-09BB1B63620A}"/>
               </a:ext>
             </a:extLst>
           </p:cNvPr>
@@ -10308,7 +10308,7 @@
           <p:cNvPr id="17" name="TextBox 16">
             <a:extLst xmlns:a="http://schemas.openxmlformats.org/drawingml/2006/main">
               <a:ext uri="{FF2B5EF4-FFF2-40B4-BE49-F238E27FC236}">
-                <a16:creationId xmlns:a16="http://schemas.microsoft.com/office/drawing/2014/main" id="{B0C90782-C3DA-40E8-9114-ED7CED4598D2}"/>
+                <a16:creationId xmlns:a16="http://schemas.microsoft.com/office/drawing/2014/main" id="{4E728214-3548-4588-8E8C-965AF80142C1}"/>
               </a:ext>
             </a:extLst>
           </p:cNvPr>
@@ -10393,7 +10393,7 @@
           <p:cNvPr id="18" name="Rectangle 17">
             <a:extLst xmlns:a="http://schemas.openxmlformats.org/drawingml/2006/main">
               <a:ext uri="{FF2B5EF4-FFF2-40B4-BE49-F238E27FC236}">
-                <a16:creationId xmlns:a16="http://schemas.microsoft.com/office/drawing/2014/main" id="{655F4121-885C-4EDF-939C-30004211C910}"/>
+                <a16:creationId xmlns:a16="http://schemas.microsoft.com/office/drawing/2014/main" id="{4D50A336-2862-4012-990A-C6BDDB9DC78A}"/>
               </a:ext>
             </a:extLst>
           </p:cNvPr>
@@ -10446,7 +10446,7 @@
           <p:cNvPr id="19" name="Rectangle 18">
             <a:extLst xmlns:a="http://schemas.openxmlformats.org/drawingml/2006/main">
               <a:ext uri="{FF2B5EF4-FFF2-40B4-BE49-F238E27FC236}">
-                <a16:creationId xmlns:a16="http://schemas.microsoft.com/office/drawing/2014/main" id="{3BA7AEF5-2665-4EAE-A94E-89A60D0DAB25}"/>
+                <a16:creationId xmlns:a16="http://schemas.microsoft.com/office/drawing/2014/main" id="{FD786EDE-AF17-471B-AF7D-98B119F76CCC}"/>
               </a:ext>
             </a:extLst>
           </p:cNvPr>
@@ -10499,7 +10499,7 @@
           <p:cNvPr id="20" name="TextBox 19">
             <a:extLst xmlns:a="http://schemas.openxmlformats.org/drawingml/2006/main">
               <a:ext uri="{FF2B5EF4-FFF2-40B4-BE49-F238E27FC236}">
-                <a16:creationId xmlns:a16="http://schemas.microsoft.com/office/drawing/2014/main" id="{8FCA503D-2A2E-4E89-9D53-F81740C3CF77}"/>
+                <a16:creationId xmlns:a16="http://schemas.microsoft.com/office/drawing/2014/main" id="{FBF576BC-34C2-4175-BADE-B85C7AFC5195}"/>
               </a:ext>
             </a:extLst>
           </p:cNvPr>
@@ -10554,7 +10554,7 @@
           <p:cNvPr id="21" name="TextBox 20">
             <a:extLst xmlns:a="http://schemas.openxmlformats.org/drawingml/2006/main">
               <a:ext uri="{FF2B5EF4-FFF2-40B4-BE49-F238E27FC236}">
-                <a16:creationId xmlns:a16="http://schemas.microsoft.com/office/drawing/2014/main" id="{A0A251E0-14B4-4B38-ABBC-3C4D37759034}"/>
+                <a16:creationId xmlns:a16="http://schemas.microsoft.com/office/drawing/2014/main" id="{C98E6116-1E3D-43C8-B96E-C31C7CB86971}"/>
               </a:ext>
             </a:extLst>
           </p:cNvPr>
@@ -10607,7 +10607,7 @@
     </p:spTree>
     <p:extLst>
       <p:ext uri="{BB962C8B-B14F-4D97-AF65-F5344CB8AC3E}">
-        <p14:creationId xmlns:p14="http://schemas.microsoft.com/office/powerpoint/2010/main" val="1228304313"/>
+        <p14:creationId xmlns:p14="http://schemas.microsoft.com/office/powerpoint/2010/main" val="611316022"/>
       </p:ext>
     </p:extLst>
   </p:cSld>
@@ -10635,7 +10635,7 @@
           <p:nvPr/>
         </p:nvPicPr>
         <p:blipFill>
-          <a:blip xmlns:r="http://schemas.openxmlformats.org/officeDocument/2006/relationships" xmlns:a="http://schemas.openxmlformats.org/drawingml/2006/main" r:embed="R23d5fe809298437b"/>
+          <a:blip xmlns:r="http://schemas.openxmlformats.org/officeDocument/2006/relationships" xmlns:a="http://schemas.openxmlformats.org/drawingml/2006/main" r:embed="R02d8440f85c94776"/>
           <a:stretch xmlns:a="http://schemas.openxmlformats.org/drawingml/2006/main">
             <a:fillRect l="0" t="0" r="0" b="0"/>
           </a:stretch>
@@ -10655,7 +10655,7 @@
           <p:cNvPr id="3" name="Rectangle 2">
             <a:extLst xmlns:a="http://schemas.openxmlformats.org/drawingml/2006/main">
               <a:ext uri="{FF2B5EF4-FFF2-40B4-BE49-F238E27FC236}">
-                <a16:creationId xmlns:a16="http://schemas.microsoft.com/office/drawing/2014/main" id="{6A811E23-C73E-4AA9-9382-7828084819E9}"/>
+                <a16:creationId xmlns:a16="http://schemas.microsoft.com/office/drawing/2014/main" id="{4A83456A-3D36-4B7D-993E-AD39A34E811B}"/>
               </a:ext>
             </a:extLst>
           </p:cNvPr>
@@ -10708,7 +10708,7 @@
           <p:cNvPr id="4" name="TextBox 3">
             <a:extLst xmlns:a="http://schemas.openxmlformats.org/drawingml/2006/main">
               <a:ext uri="{FF2B5EF4-FFF2-40B4-BE49-F238E27FC236}">
-                <a16:creationId xmlns:a16="http://schemas.microsoft.com/office/drawing/2014/main" id="{E1F61D86-E297-461B-BE6D-12A9DF4416B2}"/>
+                <a16:creationId xmlns:a16="http://schemas.microsoft.com/office/drawing/2014/main" id="{847C516E-EECE-4622-8343-FD1262E56D1E}"/>
               </a:ext>
             </a:extLst>
           </p:cNvPr>
@@ -10763,7 +10763,7 @@
           <p:cNvPr id="5" name="TextBox 4">
             <a:extLst xmlns:a="http://schemas.openxmlformats.org/drawingml/2006/main">
               <a:ext uri="{FF2B5EF4-FFF2-40B4-BE49-F238E27FC236}">
-                <a16:creationId xmlns:a16="http://schemas.microsoft.com/office/drawing/2014/main" id="{793E5516-196C-4D8D-ABCD-8249EF2AE957}"/>
+                <a16:creationId xmlns:a16="http://schemas.microsoft.com/office/drawing/2014/main" id="{56C13D1F-10A4-46B3-B8BD-964DB34360C1}"/>
               </a:ext>
             </a:extLst>
           </p:cNvPr>
@@ -10775,7 +10775,7 @@
         <p:spPr>
           <a:xfrm xmlns:a="http://schemas.openxmlformats.org/drawingml/2006/main">
             <a:off x="406400" y="1473200"/>
-            <a:ext cx="10477500" cy="536448"/>
+            <a:ext cx="10477500" cy="533400"/>
           </a:xfrm>
           <a:prstGeom xmlns:a="http://schemas.openxmlformats.org/drawingml/2006/main" prst="rect">
             <a:avLst/>
@@ -10793,14 +10793,14 @@
                 <a:spcPct val="110000"/>
               </a:lnSpc>
               <a:buNone/>
-              <a:defRPr sz="3200">
+              <a:defRPr sz="2400">
                 <a:latin typeface="Arial"/>
                 <a:ea typeface="Arial"/>
                 <a:cs typeface="Arial"/>
               </a:defRPr>
             </a:pPr>
             <a:r>
-              <a:rPr sz="3200" b="1" i="0">
+              <a:rPr sz="2400" b="1" i="0">
                 <a:solidFill>
                   <a:srgbClr val="102A43"/>
                 </a:solidFill>
@@ -11163,7 +11163,7 @@
           <p:cNvPr id="7" name="Rectangle 6">
             <a:extLst xmlns:a="http://schemas.openxmlformats.org/drawingml/2006/main">
               <a:ext uri="{FF2B5EF4-FFF2-40B4-BE49-F238E27FC236}">
-                <a16:creationId xmlns:a16="http://schemas.microsoft.com/office/drawing/2014/main" id="{68015DF1-FD1B-4896-A208-4B1D217A579D}"/>
+                <a16:creationId xmlns:a16="http://schemas.microsoft.com/office/drawing/2014/main" id="{3F1A35B0-9DC3-43DE-B261-37E8D11964AF}"/>
               </a:ext>
             </a:extLst>
           </p:cNvPr>
@@ -11216,7 +11216,7 @@
           <p:cNvPr id="8" name="Rectangle 7">
             <a:extLst xmlns:a="http://schemas.openxmlformats.org/drawingml/2006/main">
               <a:ext uri="{FF2B5EF4-FFF2-40B4-BE49-F238E27FC236}">
-                <a16:creationId xmlns:a16="http://schemas.microsoft.com/office/drawing/2014/main" id="{5000062A-0558-4F48-986B-B87E3E77AA40}"/>
+                <a16:creationId xmlns:a16="http://schemas.microsoft.com/office/drawing/2014/main" id="{98621F96-986C-4330-B80A-5E97F26207D3}"/>
               </a:ext>
             </a:extLst>
           </p:cNvPr>
@@ -11269,7 +11269,7 @@
           <p:cNvPr id="9" name="TextBox 8">
             <a:extLst xmlns:a="http://schemas.openxmlformats.org/drawingml/2006/main">
               <a:ext uri="{FF2B5EF4-FFF2-40B4-BE49-F238E27FC236}">
-                <a16:creationId xmlns:a16="http://schemas.microsoft.com/office/drawing/2014/main" id="{EC01D459-82C5-4222-A0A1-97A649169180}"/>
+                <a16:creationId xmlns:a16="http://schemas.microsoft.com/office/drawing/2014/main" id="{864F8F67-DDA6-416A-B4EF-EF3C3CB0712E}"/>
               </a:ext>
             </a:extLst>
           </p:cNvPr>
@@ -11324,7 +11324,7 @@
           <p:cNvPr id="10" name="TextBox 9">
             <a:extLst xmlns:a="http://schemas.openxmlformats.org/drawingml/2006/main">
               <a:ext uri="{FF2B5EF4-FFF2-40B4-BE49-F238E27FC236}">
-                <a16:creationId xmlns:a16="http://schemas.microsoft.com/office/drawing/2014/main" id="{9AD53575-2672-49E9-8EBF-7C1DB07FE4BA}"/>
+                <a16:creationId xmlns:a16="http://schemas.microsoft.com/office/drawing/2014/main" id="{0E36E416-42FF-41CA-BB94-B62F8E5A6223}"/>
               </a:ext>
             </a:extLst>
           </p:cNvPr>
@@ -11377,7 +11377,7 @@
     </p:spTree>
     <p:extLst>
       <p:ext uri="{BB962C8B-B14F-4D97-AF65-F5344CB8AC3E}">
-        <p14:creationId xmlns:p14="http://schemas.microsoft.com/office/powerpoint/2010/main" val="1365408980"/>
+        <p14:creationId xmlns:p14="http://schemas.microsoft.com/office/powerpoint/2010/main" val="712728180"/>
       </p:ext>
     </p:extLst>
   </p:cSld>
@@ -11405,7 +11405,7 @@
           <p:nvPr/>
         </p:nvPicPr>
         <p:blipFill>
-          <a:blip xmlns:r="http://schemas.openxmlformats.org/officeDocument/2006/relationships" xmlns:a="http://schemas.openxmlformats.org/drawingml/2006/main" r:embed="R2f54e7ec7b8f4460"/>
+          <a:blip xmlns:r="http://schemas.openxmlformats.org/officeDocument/2006/relationships" xmlns:a="http://schemas.openxmlformats.org/drawingml/2006/main" r:embed="R170895c765b944c7"/>
           <a:stretch xmlns:a="http://schemas.openxmlformats.org/drawingml/2006/main">
             <a:fillRect l="0" t="0" r="0" b="0"/>
           </a:stretch>
@@ -11425,7 +11425,7 @@
           <p:cNvPr id="3" name="Rectangle 2">
             <a:extLst xmlns:a="http://schemas.openxmlformats.org/drawingml/2006/main">
               <a:ext uri="{FF2B5EF4-FFF2-40B4-BE49-F238E27FC236}">
-                <a16:creationId xmlns:a16="http://schemas.microsoft.com/office/drawing/2014/main" id="{3328197D-03B9-49E0-B449-2390E8463ED1}"/>
+                <a16:creationId xmlns:a16="http://schemas.microsoft.com/office/drawing/2014/main" id="{43F265D5-F495-4251-B55C-49AE46810CAE}"/>
               </a:ext>
             </a:extLst>
           </p:cNvPr>
@@ -11478,7 +11478,7 @@
           <p:cNvPr id="4" name="TextBox 3">
             <a:extLst xmlns:a="http://schemas.openxmlformats.org/drawingml/2006/main">
               <a:ext uri="{FF2B5EF4-FFF2-40B4-BE49-F238E27FC236}">
-                <a16:creationId xmlns:a16="http://schemas.microsoft.com/office/drawing/2014/main" id="{BF169FD0-C2B1-4DA6-83B8-F48A5BAED331}"/>
+                <a16:creationId xmlns:a16="http://schemas.microsoft.com/office/drawing/2014/main" id="{7C6BD4AC-0662-471B-9B19-5B2FAE6CC504}"/>
               </a:ext>
             </a:extLst>
           </p:cNvPr>
@@ -11533,7 +11533,7 @@
           <p:cNvPr id="5" name="TextBox 4">
             <a:extLst xmlns:a="http://schemas.openxmlformats.org/drawingml/2006/main">
               <a:ext uri="{FF2B5EF4-FFF2-40B4-BE49-F238E27FC236}">
-                <a16:creationId xmlns:a16="http://schemas.microsoft.com/office/drawing/2014/main" id="{B4EC9621-0882-40DF-AA13-8C32B5B9C646}"/>
+                <a16:creationId xmlns:a16="http://schemas.microsoft.com/office/drawing/2014/main" id="{C7ABBE41-E353-4F15-A971-4315738CF967}"/>
               </a:ext>
             </a:extLst>
           </p:cNvPr>
@@ -11563,14 +11563,14 @@
                 <a:spcPct val="110000"/>
               </a:lnSpc>
               <a:buNone/>
-              <a:defRPr sz="3200">
+              <a:defRPr sz="2400">
                 <a:latin typeface="Arial"/>
                 <a:ea typeface="Arial"/>
                 <a:cs typeface="Arial"/>
               </a:defRPr>
             </a:pPr>
             <a:r>
-              <a:rPr sz="3200" b="1" i="0">
+              <a:rPr sz="2400" b="1" i="0">
                 <a:solidFill>
                   <a:srgbClr val="102A43"/>
                 </a:solidFill>
@@ -11588,7 +11588,7 @@
           <p:cNvPr id="6" name="TextBox 5">
             <a:extLst xmlns:a="http://schemas.openxmlformats.org/drawingml/2006/main">
               <a:ext uri="{FF2B5EF4-FFF2-40B4-BE49-F238E27FC236}">
-                <a16:creationId xmlns:a16="http://schemas.microsoft.com/office/drawing/2014/main" id="{0737A664-97B0-48D2-BD94-DDA83971069C}"/>
+                <a16:creationId xmlns:a16="http://schemas.microsoft.com/office/drawing/2014/main" id="{87CBF326-8F18-402A-A28C-4FA48DFD7BC7}"/>
               </a:ext>
             </a:extLst>
           </p:cNvPr>
@@ -11727,7 +11727,7 @@
           <p:cNvPr id="7" name="Rectangle 6">
             <a:extLst xmlns:a="http://schemas.openxmlformats.org/drawingml/2006/main">
               <a:ext uri="{FF2B5EF4-FFF2-40B4-BE49-F238E27FC236}">
-                <a16:creationId xmlns:a16="http://schemas.microsoft.com/office/drawing/2014/main" id="{4A1C1A52-F7D4-4E1B-98F4-86E9EB34A3CE}"/>
+                <a16:creationId xmlns:a16="http://schemas.microsoft.com/office/drawing/2014/main" id="{06547FB7-A1F8-4584-B526-4F3D7063E1CE}"/>
               </a:ext>
             </a:extLst>
           </p:cNvPr>
@@ -11780,7 +11780,7 @@
           <p:cNvPr id="8" name="Rectangle 7">
             <a:extLst xmlns:a="http://schemas.openxmlformats.org/drawingml/2006/main">
               <a:ext uri="{FF2B5EF4-FFF2-40B4-BE49-F238E27FC236}">
-                <a16:creationId xmlns:a16="http://schemas.microsoft.com/office/drawing/2014/main" id="{EEC74E1C-B15A-4652-864C-A2D1D814C612}"/>
+                <a16:creationId xmlns:a16="http://schemas.microsoft.com/office/drawing/2014/main" id="{C236ED15-03AD-4D55-9455-7444E83FD355}"/>
               </a:ext>
             </a:extLst>
           </p:cNvPr>
@@ -11833,7 +11833,7 @@
           <p:cNvPr id="9" name="TextBox 8">
             <a:extLst xmlns:a="http://schemas.openxmlformats.org/drawingml/2006/main">
               <a:ext uri="{FF2B5EF4-FFF2-40B4-BE49-F238E27FC236}">
-                <a16:creationId xmlns:a16="http://schemas.microsoft.com/office/drawing/2014/main" id="{2CF8D616-2A10-4B8C-9055-AE31A3771743}"/>
+                <a16:creationId xmlns:a16="http://schemas.microsoft.com/office/drawing/2014/main" id="{BAE5D929-5A13-43F1-A0B5-0D387F4B198B}"/>
               </a:ext>
             </a:extLst>
           </p:cNvPr>
@@ -11888,7 +11888,7 @@
           <p:cNvPr id="10" name="TextBox 9">
             <a:extLst xmlns:a="http://schemas.openxmlformats.org/drawingml/2006/main">
               <a:ext uri="{FF2B5EF4-FFF2-40B4-BE49-F238E27FC236}">
-                <a16:creationId xmlns:a16="http://schemas.microsoft.com/office/drawing/2014/main" id="{15E47439-7E9F-4021-9145-A17027D739A7}"/>
+                <a16:creationId xmlns:a16="http://schemas.microsoft.com/office/drawing/2014/main" id="{228D4A93-CFD1-40E9-93FE-2AEB8870BCB3}"/>
               </a:ext>
             </a:extLst>
           </p:cNvPr>
@@ -11941,7 +11941,7 @@
     </p:spTree>
     <p:extLst>
       <p:ext uri="{BB962C8B-B14F-4D97-AF65-F5344CB8AC3E}">
-        <p14:creationId xmlns:p14="http://schemas.microsoft.com/office/powerpoint/2010/main" val="1188926140"/>
+        <p14:creationId xmlns:p14="http://schemas.microsoft.com/office/powerpoint/2010/main" val="1714107599"/>
       </p:ext>
     </p:extLst>
   </p:cSld>
@@ -11969,7 +11969,7 @@
           <p:nvPr/>
         </p:nvPicPr>
         <p:blipFill>
-          <a:blip xmlns:r="http://schemas.openxmlformats.org/officeDocument/2006/relationships" xmlns:a="http://schemas.openxmlformats.org/drawingml/2006/main" r:embed="R235e7a3636ec4223"/>
+          <a:blip xmlns:r="http://schemas.openxmlformats.org/officeDocument/2006/relationships" xmlns:a="http://schemas.openxmlformats.org/drawingml/2006/main" r:embed="R605413d73304493b"/>
           <a:stretch xmlns:a="http://schemas.openxmlformats.org/drawingml/2006/main">
             <a:fillRect l="0" t="0" r="0" b="0"/>
           </a:stretch>
@@ -11989,7 +11989,7 @@
           <p:cNvPr id="3" name="Rectangle 2">
             <a:extLst xmlns:a="http://schemas.openxmlformats.org/drawingml/2006/main">
               <a:ext uri="{FF2B5EF4-FFF2-40B4-BE49-F238E27FC236}">
-                <a16:creationId xmlns:a16="http://schemas.microsoft.com/office/drawing/2014/main" id="{D7878FBC-3B83-460B-826A-8B1670396A2A}"/>
+                <a16:creationId xmlns:a16="http://schemas.microsoft.com/office/drawing/2014/main" id="{601ADB7D-7C05-4226-B118-6D13406E6EB1}"/>
               </a:ext>
             </a:extLst>
           </p:cNvPr>
@@ -12042,7 +12042,7 @@
           <p:cNvPr id="4" name="TextBox 3">
             <a:extLst xmlns:a="http://schemas.openxmlformats.org/drawingml/2006/main">
               <a:ext uri="{FF2B5EF4-FFF2-40B4-BE49-F238E27FC236}">
-                <a16:creationId xmlns:a16="http://schemas.microsoft.com/office/drawing/2014/main" id="{D399A5D2-475E-4B00-994F-C1B009EFFA2C}"/>
+                <a16:creationId xmlns:a16="http://schemas.microsoft.com/office/drawing/2014/main" id="{905A13E0-47DB-46C1-B616-AB4D58DD350B}"/>
               </a:ext>
             </a:extLst>
           </p:cNvPr>
@@ -12097,7 +12097,7 @@
           <p:cNvPr id="5" name="TextBox 4">
             <a:extLst xmlns:a="http://schemas.openxmlformats.org/drawingml/2006/main">
               <a:ext uri="{FF2B5EF4-FFF2-40B4-BE49-F238E27FC236}">
-                <a16:creationId xmlns:a16="http://schemas.microsoft.com/office/drawing/2014/main" id="{A64E75BA-3414-45B7-8EB2-023635E57DCA}"/>
+                <a16:creationId xmlns:a16="http://schemas.microsoft.com/office/drawing/2014/main" id="{8006EF95-6F0A-488D-9F9B-8049D79A3384}"/>
               </a:ext>
             </a:extLst>
           </p:cNvPr>
@@ -12127,14 +12127,14 @@
                 <a:spcPct val="110000"/>
               </a:lnSpc>
               <a:buNone/>
-              <a:defRPr sz="3200">
+              <a:defRPr sz="2400">
                 <a:latin typeface="Arial"/>
                 <a:ea typeface="Arial"/>
                 <a:cs typeface="Arial"/>
               </a:defRPr>
             </a:pPr>
             <a:r>
-              <a:rPr sz="3200" b="1" i="0">
+              <a:rPr sz="2400" b="1" i="0">
                 <a:solidFill>
                   <a:srgbClr val="102A43"/>
                 </a:solidFill>
@@ -12152,7 +12152,7 @@
           <p:cNvPr id="6" name="TextBox 5">
             <a:extLst xmlns:a="http://schemas.openxmlformats.org/drawingml/2006/main">
               <a:ext uri="{FF2B5EF4-FFF2-40B4-BE49-F238E27FC236}">
-                <a16:creationId xmlns:a16="http://schemas.microsoft.com/office/drawing/2014/main" id="{1347656C-09DC-4D9A-AE6D-2E024D9A65B0}"/>
+                <a16:creationId xmlns:a16="http://schemas.microsoft.com/office/drawing/2014/main" id="{DC83B306-2752-44CB-B2C4-14959C405D75}"/>
               </a:ext>
             </a:extLst>
           </p:cNvPr>
@@ -12291,7 +12291,7 @@
           <p:cNvPr id="7" name="Rectangle 6">
             <a:extLst xmlns:a="http://schemas.openxmlformats.org/drawingml/2006/main">
               <a:ext uri="{FF2B5EF4-FFF2-40B4-BE49-F238E27FC236}">
-                <a16:creationId xmlns:a16="http://schemas.microsoft.com/office/drawing/2014/main" id="{519FE6E9-D387-4DD0-B478-72BE2E1298E8}"/>
+                <a16:creationId xmlns:a16="http://schemas.microsoft.com/office/drawing/2014/main" id="{15F419FC-C401-447F-9F5E-9FE4D48A7B1B}"/>
               </a:ext>
             </a:extLst>
           </p:cNvPr>
@@ -12344,7 +12344,7 @@
           <p:cNvPr id="8" name="Rectangle 7">
             <a:extLst xmlns:a="http://schemas.openxmlformats.org/drawingml/2006/main">
               <a:ext uri="{FF2B5EF4-FFF2-40B4-BE49-F238E27FC236}">
-                <a16:creationId xmlns:a16="http://schemas.microsoft.com/office/drawing/2014/main" id="{2399DC91-616B-40B8-BC20-2FDD7B42A400}"/>
+                <a16:creationId xmlns:a16="http://schemas.microsoft.com/office/drawing/2014/main" id="{D80D3EEF-2DFB-4E46-9025-7D829747DB49}"/>
               </a:ext>
             </a:extLst>
           </p:cNvPr>
@@ -12397,7 +12397,7 @@
           <p:cNvPr id="9" name="TextBox 8">
             <a:extLst xmlns:a="http://schemas.openxmlformats.org/drawingml/2006/main">
               <a:ext uri="{FF2B5EF4-FFF2-40B4-BE49-F238E27FC236}">
-                <a16:creationId xmlns:a16="http://schemas.microsoft.com/office/drawing/2014/main" id="{A6AFE685-DA32-42F3-9B79-332667498B85}"/>
+                <a16:creationId xmlns:a16="http://schemas.microsoft.com/office/drawing/2014/main" id="{F3F7AD8D-03E2-4FF5-A087-B127D429B156}"/>
               </a:ext>
             </a:extLst>
           </p:cNvPr>
@@ -12452,7 +12452,7 @@
           <p:cNvPr id="10" name="TextBox 9">
             <a:extLst xmlns:a="http://schemas.openxmlformats.org/drawingml/2006/main">
               <a:ext uri="{FF2B5EF4-FFF2-40B4-BE49-F238E27FC236}">
-                <a16:creationId xmlns:a16="http://schemas.microsoft.com/office/drawing/2014/main" id="{2C89D1AA-FB82-4F0B-B1A7-B1B88A37D009}"/>
+                <a16:creationId xmlns:a16="http://schemas.microsoft.com/office/drawing/2014/main" id="{033B31FF-FFB1-4180-9B63-8ABA8640C8B8}"/>
               </a:ext>
             </a:extLst>
           </p:cNvPr>
@@ -12505,7 +12505,7 @@
     </p:spTree>
     <p:extLst>
       <p:ext uri="{BB962C8B-B14F-4D97-AF65-F5344CB8AC3E}">
-        <p14:creationId xmlns:p14="http://schemas.microsoft.com/office/powerpoint/2010/main" val="1305478462"/>
+        <p14:creationId xmlns:p14="http://schemas.microsoft.com/office/powerpoint/2010/main" val="1901383611"/>
       </p:ext>
     </p:extLst>
   </p:cSld>
@@ -12533,7 +12533,7 @@
           <p:nvPr/>
         </p:nvPicPr>
         <p:blipFill>
-          <a:blip xmlns:r="http://schemas.openxmlformats.org/officeDocument/2006/relationships" xmlns:a="http://schemas.openxmlformats.org/drawingml/2006/main" r:embed="Raa40443a2a724e0b"/>
+          <a:blip xmlns:r="http://schemas.openxmlformats.org/officeDocument/2006/relationships" xmlns:a="http://schemas.openxmlformats.org/drawingml/2006/main" r:embed="Rcf6b77a052f74775"/>
           <a:stretch xmlns:a="http://schemas.openxmlformats.org/drawingml/2006/main">
             <a:fillRect l="0" t="0" r="0" b="0"/>
           </a:stretch>
@@ -12553,7 +12553,7 @@
           <p:cNvPr id="3" name="Rectangle 2">
             <a:extLst xmlns:a="http://schemas.openxmlformats.org/drawingml/2006/main">
               <a:ext uri="{FF2B5EF4-FFF2-40B4-BE49-F238E27FC236}">
-                <a16:creationId xmlns:a16="http://schemas.microsoft.com/office/drawing/2014/main" id="{8388B7B5-41E8-4425-BB43-B0C5C3E165DB}"/>
+                <a16:creationId xmlns:a16="http://schemas.microsoft.com/office/drawing/2014/main" id="{E440EA2D-0CB9-4769-AEBB-2930085F3603}"/>
               </a:ext>
             </a:extLst>
           </p:cNvPr>
@@ -12606,7 +12606,7 @@
           <p:cNvPr id="4" name="TextBox 3">
             <a:extLst xmlns:a="http://schemas.openxmlformats.org/drawingml/2006/main">
               <a:ext uri="{FF2B5EF4-FFF2-40B4-BE49-F238E27FC236}">
-                <a16:creationId xmlns:a16="http://schemas.microsoft.com/office/drawing/2014/main" id="{C3716168-C0AD-4EC5-B75E-5745E69430ED}"/>
+                <a16:creationId xmlns:a16="http://schemas.microsoft.com/office/drawing/2014/main" id="{8B2843B0-385A-4916-B308-77309C8F362B}"/>
               </a:ext>
             </a:extLst>
           </p:cNvPr>
@@ -12661,7 +12661,7 @@
           <p:cNvPr id="5" name="TextBox 4">
             <a:extLst xmlns:a="http://schemas.openxmlformats.org/drawingml/2006/main">
               <a:ext uri="{FF2B5EF4-FFF2-40B4-BE49-F238E27FC236}">
-                <a16:creationId xmlns:a16="http://schemas.microsoft.com/office/drawing/2014/main" id="{D256076F-BA25-43D6-B61B-2452898F5F26}"/>
+                <a16:creationId xmlns:a16="http://schemas.microsoft.com/office/drawing/2014/main" id="{7ED4E826-0914-48EC-BA79-D000C1E9EF82}"/>
               </a:ext>
             </a:extLst>
           </p:cNvPr>
@@ -12691,14 +12691,14 @@
                 <a:spcPct val="110000"/>
               </a:lnSpc>
               <a:buNone/>
-              <a:defRPr sz="3200">
+              <a:defRPr sz="2400">
                 <a:latin typeface="Arial"/>
                 <a:ea typeface="Arial"/>
                 <a:cs typeface="Arial"/>
               </a:defRPr>
             </a:pPr>
             <a:r>
-              <a:rPr sz="3200" b="1" i="0">
+              <a:rPr sz="2400" b="1" i="0">
                 <a:solidFill>
                   <a:srgbClr val="102A43"/>
                 </a:solidFill>
@@ -12716,7 +12716,7 @@
           <p:cNvPr id="6" name="TextBox 5">
             <a:extLst xmlns:a="http://schemas.openxmlformats.org/drawingml/2006/main">
               <a:ext uri="{FF2B5EF4-FFF2-40B4-BE49-F238E27FC236}">
-                <a16:creationId xmlns:a16="http://schemas.microsoft.com/office/drawing/2014/main" id="{96F73B21-3A05-43DE-A96F-E718AB42EB4B}"/>
+                <a16:creationId xmlns:a16="http://schemas.microsoft.com/office/drawing/2014/main" id="{1E5C9BF6-AA90-4AF9-B5A6-2799D7046344}"/>
               </a:ext>
             </a:extLst>
           </p:cNvPr>
@@ -12855,7 +12855,7 @@
           <p:cNvPr id="7" name="Rectangle 6">
             <a:extLst xmlns:a="http://schemas.openxmlformats.org/drawingml/2006/main">
               <a:ext uri="{FF2B5EF4-FFF2-40B4-BE49-F238E27FC236}">
-                <a16:creationId xmlns:a16="http://schemas.microsoft.com/office/drawing/2014/main" id="{5E475B82-36D6-49A9-A710-650547606588}"/>
+                <a16:creationId xmlns:a16="http://schemas.microsoft.com/office/drawing/2014/main" id="{5A112BCD-337B-481A-88EE-2B1E153DC8C3}"/>
               </a:ext>
             </a:extLst>
           </p:cNvPr>
@@ -12908,7 +12908,7 @@
           <p:cNvPr id="8" name="Rectangle 7">
             <a:extLst xmlns:a="http://schemas.openxmlformats.org/drawingml/2006/main">
               <a:ext uri="{FF2B5EF4-FFF2-40B4-BE49-F238E27FC236}">
-                <a16:creationId xmlns:a16="http://schemas.microsoft.com/office/drawing/2014/main" id="{929DE466-D3AE-4EBD-9D87-742983429B79}"/>
+                <a16:creationId xmlns:a16="http://schemas.microsoft.com/office/drawing/2014/main" id="{7368D776-828F-489D-90D3-A700990DC423}"/>
               </a:ext>
             </a:extLst>
           </p:cNvPr>
@@ -12961,7 +12961,7 @@
           <p:cNvPr id="9" name="TextBox 8">
             <a:extLst xmlns:a="http://schemas.openxmlformats.org/drawingml/2006/main">
               <a:ext uri="{FF2B5EF4-FFF2-40B4-BE49-F238E27FC236}">
-                <a16:creationId xmlns:a16="http://schemas.microsoft.com/office/drawing/2014/main" id="{3B52C25D-4796-44EE-96D4-1790B3CCB68A}"/>
+                <a16:creationId xmlns:a16="http://schemas.microsoft.com/office/drawing/2014/main" id="{130EA0B0-0A03-4FA8-B8F8-A264A57A284A}"/>
               </a:ext>
             </a:extLst>
           </p:cNvPr>
@@ -13016,7 +13016,7 @@
           <p:cNvPr id="10" name="TextBox 9">
             <a:extLst xmlns:a="http://schemas.openxmlformats.org/drawingml/2006/main">
               <a:ext uri="{FF2B5EF4-FFF2-40B4-BE49-F238E27FC236}">
-                <a16:creationId xmlns:a16="http://schemas.microsoft.com/office/drawing/2014/main" id="{66A84D79-5905-4748-B33E-7B0BB46491B6}"/>
+                <a16:creationId xmlns:a16="http://schemas.microsoft.com/office/drawing/2014/main" id="{C9FD34CE-ADC2-4C7B-8695-1ED68A125444}"/>
               </a:ext>
             </a:extLst>
           </p:cNvPr>
@@ -13069,7 +13069,7 @@
     </p:spTree>
     <p:extLst>
       <p:ext uri="{BB962C8B-B14F-4D97-AF65-F5344CB8AC3E}">
-        <p14:creationId xmlns:p14="http://schemas.microsoft.com/office/powerpoint/2010/main" val="1824023592"/>
+        <p14:creationId xmlns:p14="http://schemas.microsoft.com/office/powerpoint/2010/main" val="485180556"/>
       </p:ext>
     </p:extLst>
   </p:cSld>
@@ -13097,7 +13097,7 @@
           <p:nvPr/>
         </p:nvPicPr>
         <p:blipFill>
-          <a:blip xmlns:r="http://schemas.openxmlformats.org/officeDocument/2006/relationships" xmlns:a="http://schemas.openxmlformats.org/drawingml/2006/main" r:embed="R8138b7121fcc439a"/>
+          <a:blip xmlns:r="http://schemas.openxmlformats.org/officeDocument/2006/relationships" xmlns:a="http://schemas.openxmlformats.org/drawingml/2006/main" r:embed="R21f89434e6004cda"/>
           <a:stretch xmlns:a="http://schemas.openxmlformats.org/drawingml/2006/main">
             <a:fillRect l="0" t="0" r="0" b="0"/>
           </a:stretch>
@@ -13117,7 +13117,7 @@
           <p:cNvPr id="3" name="Rectangle 2">
             <a:extLst xmlns:a="http://schemas.openxmlformats.org/drawingml/2006/main">
               <a:ext uri="{FF2B5EF4-FFF2-40B4-BE49-F238E27FC236}">
-                <a16:creationId xmlns:a16="http://schemas.microsoft.com/office/drawing/2014/main" id="{D423E3AD-D522-4FA2-93D5-B8A773D6379C}"/>
+                <a16:creationId xmlns:a16="http://schemas.microsoft.com/office/drawing/2014/main" id="{9D03F895-98CE-4E0C-A48D-A43DEB381D62}"/>
               </a:ext>
             </a:extLst>
           </p:cNvPr>
@@ -13170,7 +13170,7 @@
           <p:cNvPr id="4" name="TextBox 3">
             <a:extLst xmlns:a="http://schemas.openxmlformats.org/drawingml/2006/main">
               <a:ext uri="{FF2B5EF4-FFF2-40B4-BE49-F238E27FC236}">
-                <a16:creationId xmlns:a16="http://schemas.microsoft.com/office/drawing/2014/main" id="{716BD035-2B31-41FE-986D-97873064FE01}"/>
+                <a16:creationId xmlns:a16="http://schemas.microsoft.com/office/drawing/2014/main" id="{BF81688D-64BD-40C4-92E7-099B1C99D88B}"/>
               </a:ext>
             </a:extLst>
           </p:cNvPr>
@@ -13225,7 +13225,7 @@
           <p:cNvPr id="5" name="TextBox 4">
             <a:extLst xmlns:a="http://schemas.openxmlformats.org/drawingml/2006/main">
               <a:ext uri="{FF2B5EF4-FFF2-40B4-BE49-F238E27FC236}">
-                <a16:creationId xmlns:a16="http://schemas.microsoft.com/office/drawing/2014/main" id="{FAF4892D-4787-449A-A141-C9C0B72D8978}"/>
+                <a16:creationId xmlns:a16="http://schemas.microsoft.com/office/drawing/2014/main" id="{BDAD5DA9-1F18-429E-9B39-EB4E06ADBC20}"/>
               </a:ext>
             </a:extLst>
           </p:cNvPr>
@@ -13237,7 +13237,7 @@
         <p:spPr>
           <a:xfrm xmlns:a="http://schemas.openxmlformats.org/drawingml/2006/main">
             <a:off x="406400" y="1473200"/>
-            <a:ext cx="10477500" cy="1072896"/>
+            <a:ext cx="10477500" cy="571500"/>
           </a:xfrm>
           <a:prstGeom xmlns:a="http://schemas.openxmlformats.org/drawingml/2006/main" prst="rect">
             <a:avLst/>
@@ -13255,14 +13255,14 @@
                 <a:spcPct val="110000"/>
               </a:lnSpc>
               <a:buNone/>
-              <a:defRPr sz="3200">
+              <a:defRPr sz="2400">
                 <a:latin typeface="Arial"/>
                 <a:ea typeface="Arial"/>
                 <a:cs typeface="Arial"/>
               </a:defRPr>
             </a:pPr>
             <a:r>
-              <a:rPr sz="3200" b="1" i="0">
+              <a:rPr sz="2400" b="1" i="0">
                 <a:solidFill>
                   <a:srgbClr val="102A43"/>
                 </a:solidFill>
@@ -13280,7 +13280,7 @@
           <p:cNvPr id="6" name="TextBox 5">
             <a:extLst xmlns:a="http://schemas.openxmlformats.org/drawingml/2006/main">
               <a:ext uri="{FF2B5EF4-FFF2-40B4-BE49-F238E27FC236}">
-                <a16:creationId xmlns:a16="http://schemas.microsoft.com/office/drawing/2014/main" id="{C9601C30-8A42-415D-B780-0E2CB1AC3C39}"/>
+                <a16:creationId xmlns:a16="http://schemas.microsoft.com/office/drawing/2014/main" id="{C6BB9951-689F-49A8-B2C3-1E619399D694}"/>
               </a:ext>
             </a:extLst>
           </p:cNvPr>
@@ -13419,7 +13419,7 @@
           <p:cNvPr id="7" name="Rectangle 6">
             <a:extLst xmlns:a="http://schemas.openxmlformats.org/drawingml/2006/main">
               <a:ext uri="{FF2B5EF4-FFF2-40B4-BE49-F238E27FC236}">
-                <a16:creationId xmlns:a16="http://schemas.microsoft.com/office/drawing/2014/main" id="{A84150A0-0565-46B9-A2D1-A0ABBEE73136}"/>
+                <a16:creationId xmlns:a16="http://schemas.microsoft.com/office/drawing/2014/main" id="{BA1E72EA-A3A4-4D59-B0E5-20642E3993AE}"/>
               </a:ext>
             </a:extLst>
           </p:cNvPr>
@@ -13472,7 +13472,7 @@
           <p:cNvPr id="8" name="Rectangle 7">
             <a:extLst xmlns:a="http://schemas.openxmlformats.org/drawingml/2006/main">
               <a:ext uri="{FF2B5EF4-FFF2-40B4-BE49-F238E27FC236}">
-                <a16:creationId xmlns:a16="http://schemas.microsoft.com/office/drawing/2014/main" id="{9980BE68-8440-4F14-8421-A31D88CE1765}"/>
+                <a16:creationId xmlns:a16="http://schemas.microsoft.com/office/drawing/2014/main" id="{424BA304-9F7D-43D4-A88F-D94C367880E5}"/>
               </a:ext>
             </a:extLst>
           </p:cNvPr>
@@ -13525,7 +13525,7 @@
           <p:cNvPr id="9" name="TextBox 8">
             <a:extLst xmlns:a="http://schemas.openxmlformats.org/drawingml/2006/main">
               <a:ext uri="{FF2B5EF4-FFF2-40B4-BE49-F238E27FC236}">
-                <a16:creationId xmlns:a16="http://schemas.microsoft.com/office/drawing/2014/main" id="{C1CDECF5-D3E2-4257-9EF4-7B6982DAE01D}"/>
+                <a16:creationId xmlns:a16="http://schemas.microsoft.com/office/drawing/2014/main" id="{BCA8ED62-0B85-49A5-9693-520D4309C9FA}"/>
               </a:ext>
             </a:extLst>
           </p:cNvPr>
@@ -13580,7 +13580,7 @@
           <p:cNvPr id="10" name="TextBox 9">
             <a:extLst xmlns:a="http://schemas.openxmlformats.org/drawingml/2006/main">
               <a:ext uri="{FF2B5EF4-FFF2-40B4-BE49-F238E27FC236}">
-                <a16:creationId xmlns:a16="http://schemas.microsoft.com/office/drawing/2014/main" id="{474C8CBD-02B5-44F9-8B7D-2DB6FE5A517B}"/>
+                <a16:creationId xmlns:a16="http://schemas.microsoft.com/office/drawing/2014/main" id="{1BF29BF1-D8B1-44DC-ABB5-3DC2AFC98370}"/>
               </a:ext>
             </a:extLst>
           </p:cNvPr>
@@ -13633,7 +13633,7 @@
     </p:spTree>
     <p:extLst>
       <p:ext uri="{BB962C8B-B14F-4D97-AF65-F5344CB8AC3E}">
-        <p14:creationId xmlns:p14="http://schemas.microsoft.com/office/powerpoint/2010/main" val="1975869608"/>
+        <p14:creationId xmlns:p14="http://schemas.microsoft.com/office/powerpoint/2010/main" val="1303216959"/>
       </p:ext>
     </p:extLst>
   </p:cSld>
@@ -13661,7 +13661,7 @@
           <p:nvPr/>
         </p:nvPicPr>
         <p:blipFill>
-          <a:blip xmlns:r="http://schemas.openxmlformats.org/officeDocument/2006/relationships" xmlns:a="http://schemas.openxmlformats.org/drawingml/2006/main" r:embed="R4dbfee369d4e49af"/>
+          <a:blip xmlns:r="http://schemas.openxmlformats.org/officeDocument/2006/relationships" xmlns:a="http://schemas.openxmlformats.org/drawingml/2006/main" r:embed="Rc24ab9409ae340e1"/>
           <a:stretch xmlns:a="http://schemas.openxmlformats.org/drawingml/2006/main">
             <a:fillRect l="0" t="0" r="0" b="0"/>
           </a:stretch>
@@ -13681,7 +13681,7 @@
           <p:cNvPr id="3" name="Rectangle 2">
             <a:extLst xmlns:a="http://schemas.openxmlformats.org/drawingml/2006/main">
               <a:ext uri="{FF2B5EF4-FFF2-40B4-BE49-F238E27FC236}">
-                <a16:creationId xmlns:a16="http://schemas.microsoft.com/office/drawing/2014/main" id="{D731CA7B-82BA-4156-89DA-61E4844EA797}"/>
+                <a16:creationId xmlns:a16="http://schemas.microsoft.com/office/drawing/2014/main" id="{6C2CC02E-8FF0-45B4-8A01-C92515487427}"/>
               </a:ext>
             </a:extLst>
           </p:cNvPr>
@@ -13734,7 +13734,7 @@
           <p:cNvPr id="4" name="TextBox 3">
             <a:extLst xmlns:a="http://schemas.openxmlformats.org/drawingml/2006/main">
               <a:ext uri="{FF2B5EF4-FFF2-40B4-BE49-F238E27FC236}">
-                <a16:creationId xmlns:a16="http://schemas.microsoft.com/office/drawing/2014/main" id="{34C0EF72-43E0-46A4-9F39-2707B03C9A52}"/>
+                <a16:creationId xmlns:a16="http://schemas.microsoft.com/office/drawing/2014/main" id="{447FED62-05C8-4129-B29C-457BDD23658D}"/>
               </a:ext>
             </a:extLst>
           </p:cNvPr>
@@ -13789,7 +13789,7 @@
           <p:cNvPr id="5" name="TextBox 4">
             <a:extLst xmlns:a="http://schemas.openxmlformats.org/drawingml/2006/main">
               <a:ext uri="{FF2B5EF4-FFF2-40B4-BE49-F238E27FC236}">
-                <a16:creationId xmlns:a16="http://schemas.microsoft.com/office/drawing/2014/main" id="{4766B6BE-4BBD-4728-B696-85924D11D3A0}"/>
+                <a16:creationId xmlns:a16="http://schemas.microsoft.com/office/drawing/2014/main" id="{B206BB5D-ABB2-4454-BEFE-D91A46DC3782}"/>
               </a:ext>
             </a:extLst>
           </p:cNvPr>
@@ -13801,7 +13801,7 @@
         <p:spPr>
           <a:xfrm xmlns:a="http://schemas.openxmlformats.org/drawingml/2006/main">
             <a:off x="406400" y="1460500"/>
-            <a:ext cx="11379200" cy="536448"/>
+            <a:ext cx="11379200" cy="533400"/>
           </a:xfrm>
           <a:prstGeom xmlns:a="http://schemas.openxmlformats.org/drawingml/2006/main" prst="rect">
             <a:avLst/>
@@ -13819,14 +13819,14 @@
                 <a:spcPct val="110000"/>
               </a:lnSpc>
               <a:buNone/>
-              <a:defRPr sz="3200">
+              <a:defRPr sz="2400">
                 <a:latin typeface="Arial"/>
                 <a:ea typeface="Arial"/>
                 <a:cs typeface="Arial"/>
               </a:defRPr>
             </a:pPr>
             <a:r>
-              <a:rPr sz="3200" b="1" i="0">
+              <a:rPr sz="2400" b="1" i="0">
                 <a:solidFill>
                   <a:srgbClr val="102A43"/>
                 </a:solidFill>
@@ -13844,7 +13844,7 @@
           <p:cNvPr id="6" name="Rounded Rectangle 5">
             <a:extLst xmlns:a="http://schemas.openxmlformats.org/drawingml/2006/main">
               <a:ext uri="{FF2B5EF4-FFF2-40B4-BE49-F238E27FC236}">
-                <a16:creationId xmlns:a16="http://schemas.microsoft.com/office/drawing/2014/main" id="{F36F2853-C2FF-410C-BAED-13502F52A945}"/>
+                <a16:creationId xmlns:a16="http://schemas.microsoft.com/office/drawing/2014/main" id="{58C395C6-3D0A-4E6B-BEC7-E7618B18B217}"/>
               </a:ext>
             </a:extLst>
           </p:cNvPr>
@@ -13901,7 +13901,7 @@
           <p:cNvPr id="7" name="TextBox 6">
             <a:extLst xmlns:a="http://schemas.openxmlformats.org/drawingml/2006/main">
               <a:ext uri="{FF2B5EF4-FFF2-40B4-BE49-F238E27FC236}">
-                <a16:creationId xmlns:a16="http://schemas.microsoft.com/office/drawing/2014/main" id="{839685EC-A3E1-4442-94D7-523CEF43F477}"/>
+                <a16:creationId xmlns:a16="http://schemas.microsoft.com/office/drawing/2014/main" id="{AD47C8A3-740E-4721-8C45-BC3F62EBF0DC}"/>
               </a:ext>
             </a:extLst>
           </p:cNvPr>
@@ -13956,7 +13956,7 @@
           <p:cNvPr id="8" name="TextBox 7">
             <a:extLst xmlns:a="http://schemas.openxmlformats.org/drawingml/2006/main">
               <a:ext uri="{FF2B5EF4-FFF2-40B4-BE49-F238E27FC236}">
-                <a16:creationId xmlns:a16="http://schemas.microsoft.com/office/drawing/2014/main" id="{BCC83EB8-1171-4647-B497-CF1A51E254AD}"/>
+                <a16:creationId xmlns:a16="http://schemas.microsoft.com/office/drawing/2014/main" id="{7B174371-1536-40B4-910F-E7DE733A232B}"/>
               </a:ext>
             </a:extLst>
           </p:cNvPr>
@@ -14011,7 +14011,7 @@
           <p:cNvPr id="9" name="TextBox 8">
             <a:extLst xmlns:a="http://schemas.openxmlformats.org/drawingml/2006/main">
               <a:ext uri="{FF2B5EF4-FFF2-40B4-BE49-F238E27FC236}">
-                <a16:creationId xmlns:a16="http://schemas.microsoft.com/office/drawing/2014/main" id="{D23F0488-BA6C-466D-BDD1-4B436767E34F}"/>
+                <a16:creationId xmlns:a16="http://schemas.microsoft.com/office/drawing/2014/main" id="{FB381012-B5FC-4D4F-961C-E678F03C9067}"/>
               </a:ext>
             </a:extLst>
           </p:cNvPr>
@@ -14066,7 +14066,7 @@
           <p:cNvPr id="10" name="Rounded Rectangle 9">
             <a:extLst xmlns:a="http://schemas.openxmlformats.org/drawingml/2006/main">
               <a:ext uri="{FF2B5EF4-FFF2-40B4-BE49-F238E27FC236}">
-                <a16:creationId xmlns:a16="http://schemas.microsoft.com/office/drawing/2014/main" id="{F1F48037-A996-4A00-8D36-10C0C0EC6C86}"/>
+                <a16:creationId xmlns:a16="http://schemas.microsoft.com/office/drawing/2014/main" id="{6F0E3221-39F5-4BEA-9998-AB4E3C5A0040}"/>
               </a:ext>
             </a:extLst>
           </p:cNvPr>
@@ -14123,7 +14123,7 @@
           <p:cNvPr id="11" name="TextBox 10">
             <a:extLst xmlns:a="http://schemas.openxmlformats.org/drawingml/2006/main">
               <a:ext uri="{FF2B5EF4-FFF2-40B4-BE49-F238E27FC236}">
-                <a16:creationId xmlns:a16="http://schemas.microsoft.com/office/drawing/2014/main" id="{2811895E-969F-4174-9239-4128C6BD58DC}"/>
+                <a16:creationId xmlns:a16="http://schemas.microsoft.com/office/drawing/2014/main" id="{A9933848-6C48-4855-8F6A-BD8D4F5CC19E}"/>
               </a:ext>
             </a:extLst>
           </p:cNvPr>
@@ -14178,7 +14178,7 @@
           <p:cNvPr id="12" name="TextBox 11">
             <a:extLst xmlns:a="http://schemas.openxmlformats.org/drawingml/2006/main">
               <a:ext uri="{FF2B5EF4-FFF2-40B4-BE49-F238E27FC236}">
-                <a16:creationId xmlns:a16="http://schemas.microsoft.com/office/drawing/2014/main" id="{CB4835FB-5055-4656-944D-E4C80A3A9193}"/>
+                <a16:creationId xmlns:a16="http://schemas.microsoft.com/office/drawing/2014/main" id="{AFBFDD87-1C65-4F77-B20E-7C3B4315660A}"/>
               </a:ext>
             </a:extLst>
           </p:cNvPr>
@@ -14233,7 +14233,7 @@
           <p:cNvPr id="13" name="TextBox 12">
             <a:extLst xmlns:a="http://schemas.openxmlformats.org/drawingml/2006/main">
               <a:ext uri="{FF2B5EF4-FFF2-40B4-BE49-F238E27FC236}">
-                <a16:creationId xmlns:a16="http://schemas.microsoft.com/office/drawing/2014/main" id="{4FBB5CED-8A3F-46BF-A11B-2412067B327F}"/>
+                <a16:creationId xmlns:a16="http://schemas.microsoft.com/office/drawing/2014/main" id="{C001FD6B-77D0-4417-8C20-32624D5179C2}"/>
               </a:ext>
             </a:extLst>
           </p:cNvPr>
@@ -14288,7 +14288,7 @@
           <p:cNvPr id="14" name="Rounded Rectangle 13">
             <a:extLst xmlns:a="http://schemas.openxmlformats.org/drawingml/2006/main">
               <a:ext uri="{FF2B5EF4-FFF2-40B4-BE49-F238E27FC236}">
-                <a16:creationId xmlns:a16="http://schemas.microsoft.com/office/drawing/2014/main" id="{6A50999E-5ECE-4746-A250-F3AECDECDD91}"/>
+                <a16:creationId xmlns:a16="http://schemas.microsoft.com/office/drawing/2014/main" id="{BA08DA77-DFB0-413A-A35B-CA6BE0825426}"/>
               </a:ext>
             </a:extLst>
           </p:cNvPr>
@@ -14345,7 +14345,7 @@
           <p:cNvPr id="15" name="TextBox 14">
             <a:extLst xmlns:a="http://schemas.openxmlformats.org/drawingml/2006/main">
               <a:ext uri="{FF2B5EF4-FFF2-40B4-BE49-F238E27FC236}">
-                <a16:creationId xmlns:a16="http://schemas.microsoft.com/office/drawing/2014/main" id="{3B47A4C9-7691-4817-A606-5042281AAE7B}"/>
+                <a16:creationId xmlns:a16="http://schemas.microsoft.com/office/drawing/2014/main" id="{AD78DED4-8E09-4922-AC7F-792EA6BD5AD3}"/>
               </a:ext>
             </a:extLst>
           </p:cNvPr>
@@ -14400,7 +14400,7 @@
           <p:cNvPr id="16" name="TextBox 15">
             <a:extLst xmlns:a="http://schemas.openxmlformats.org/drawingml/2006/main">
               <a:ext uri="{FF2B5EF4-FFF2-40B4-BE49-F238E27FC236}">
-                <a16:creationId xmlns:a16="http://schemas.microsoft.com/office/drawing/2014/main" id="{C9DF3C68-63DB-484C-81CF-5EB05BCECA83}"/>
+                <a16:creationId xmlns:a16="http://schemas.microsoft.com/office/drawing/2014/main" id="{A772657C-E9C3-4869-A340-324059497045}"/>
               </a:ext>
             </a:extLst>
           </p:cNvPr>
@@ -14455,7 +14455,7 @@
           <p:cNvPr id="17" name="TextBox 16">
             <a:extLst xmlns:a="http://schemas.openxmlformats.org/drawingml/2006/main">
               <a:ext uri="{FF2B5EF4-FFF2-40B4-BE49-F238E27FC236}">
-                <a16:creationId xmlns:a16="http://schemas.microsoft.com/office/drawing/2014/main" id="{825B5DFA-59E2-4375-B4D4-7605F3AB0C26}"/>
+                <a16:creationId xmlns:a16="http://schemas.microsoft.com/office/drawing/2014/main" id="{139B7423-405C-4D1E-A332-7A07F3438D46}"/>
               </a:ext>
             </a:extLst>
           </p:cNvPr>
@@ -14510,7 +14510,7 @@
           <p:cNvPr id="18" name="Rounded Rectangle 17">
             <a:extLst xmlns:a="http://schemas.openxmlformats.org/drawingml/2006/main">
               <a:ext uri="{FF2B5EF4-FFF2-40B4-BE49-F238E27FC236}">
-                <a16:creationId xmlns:a16="http://schemas.microsoft.com/office/drawing/2014/main" id="{78445A3C-812D-4801-8314-B02249C2209A}"/>
+                <a16:creationId xmlns:a16="http://schemas.microsoft.com/office/drawing/2014/main" id="{70E46D30-5032-45FC-82B1-3208349238F3}"/>
               </a:ext>
             </a:extLst>
           </p:cNvPr>
@@ -14567,7 +14567,7 @@
           <p:cNvPr id="19" name="TextBox 18">
             <a:extLst xmlns:a="http://schemas.openxmlformats.org/drawingml/2006/main">
               <a:ext uri="{FF2B5EF4-FFF2-40B4-BE49-F238E27FC236}">
-                <a16:creationId xmlns:a16="http://schemas.microsoft.com/office/drawing/2014/main" id="{1B3C332D-5B25-43F8-AB06-8D5A15A6102E}"/>
+                <a16:creationId xmlns:a16="http://schemas.microsoft.com/office/drawing/2014/main" id="{99A6DAB0-2C50-44DE-8275-DD323B51496A}"/>
               </a:ext>
             </a:extLst>
           </p:cNvPr>
@@ -14622,7 +14622,7 @@
           <p:cNvPr id="20" name="TextBox 19">
             <a:extLst xmlns:a="http://schemas.openxmlformats.org/drawingml/2006/main">
               <a:ext uri="{FF2B5EF4-FFF2-40B4-BE49-F238E27FC236}">
-                <a16:creationId xmlns:a16="http://schemas.microsoft.com/office/drawing/2014/main" id="{142AF688-E3A4-4240-A883-38E29C39A995}"/>
+                <a16:creationId xmlns:a16="http://schemas.microsoft.com/office/drawing/2014/main" id="{2E916E6C-E5A7-46B8-9B3F-0A94170E5CE6}"/>
               </a:ext>
             </a:extLst>
           </p:cNvPr>
@@ -14677,7 +14677,7 @@
           <p:cNvPr id="21" name="Rectangle 20">
             <a:extLst xmlns:a="http://schemas.openxmlformats.org/drawingml/2006/main">
               <a:ext uri="{FF2B5EF4-FFF2-40B4-BE49-F238E27FC236}">
-                <a16:creationId xmlns:a16="http://schemas.microsoft.com/office/drawing/2014/main" id="{6A4A4A96-CCA0-4AD8-BAAB-349FACE19666}"/>
+                <a16:creationId xmlns:a16="http://schemas.microsoft.com/office/drawing/2014/main" id="{D7EA44E3-7857-4A26-9D18-93DF49FBB46C}"/>
               </a:ext>
             </a:extLst>
           </p:cNvPr>
@@ -14730,7 +14730,7 @@
           <p:cNvPr id="22" name="Rectangle 21">
             <a:extLst xmlns:a="http://schemas.openxmlformats.org/drawingml/2006/main">
               <a:ext uri="{FF2B5EF4-FFF2-40B4-BE49-F238E27FC236}">
-                <a16:creationId xmlns:a16="http://schemas.microsoft.com/office/drawing/2014/main" id="{36B378A8-F84F-422D-B9D2-69996648EA4F}"/>
+                <a16:creationId xmlns:a16="http://schemas.microsoft.com/office/drawing/2014/main" id="{2619AE2A-8B88-4DC3-8AAC-875E915B4F72}"/>
               </a:ext>
             </a:extLst>
           </p:cNvPr>
@@ -14783,7 +14783,7 @@
           <p:cNvPr id="23" name="TextBox 22">
             <a:extLst xmlns:a="http://schemas.openxmlformats.org/drawingml/2006/main">
               <a:ext uri="{FF2B5EF4-FFF2-40B4-BE49-F238E27FC236}">
-                <a16:creationId xmlns:a16="http://schemas.microsoft.com/office/drawing/2014/main" id="{886B766F-5854-49BC-B877-DD78A33C51E0}"/>
+                <a16:creationId xmlns:a16="http://schemas.microsoft.com/office/drawing/2014/main" id="{BECC3841-4478-4319-8340-79BA1D9F5E7C}"/>
               </a:ext>
             </a:extLst>
           </p:cNvPr>
@@ -14838,7 +14838,7 @@
           <p:cNvPr id="24" name="TextBox 23">
             <a:extLst xmlns:a="http://schemas.openxmlformats.org/drawingml/2006/main">
               <a:ext uri="{FF2B5EF4-FFF2-40B4-BE49-F238E27FC236}">
-                <a16:creationId xmlns:a16="http://schemas.microsoft.com/office/drawing/2014/main" id="{F07B36A7-B46C-49F1-AE3D-C9043AEC96CC}"/>
+                <a16:creationId xmlns:a16="http://schemas.microsoft.com/office/drawing/2014/main" id="{B4278C1C-4CA8-48E1-87A6-39990745DB59}"/>
               </a:ext>
             </a:extLst>
           </p:cNvPr>
@@ -14891,7 +14891,7 @@
     </p:spTree>
     <p:extLst>
       <p:ext uri="{BB962C8B-B14F-4D97-AF65-F5344CB8AC3E}">
-        <p14:creationId xmlns:p14="http://schemas.microsoft.com/office/powerpoint/2010/main" val="1217233571"/>
+        <p14:creationId xmlns:p14="http://schemas.microsoft.com/office/powerpoint/2010/main" val="1466992395"/>
       </p:ext>
     </p:extLst>
   </p:cSld>
@@ -14919,7 +14919,7 @@
           <p:nvPr/>
         </p:nvPicPr>
         <p:blipFill>
-          <a:blip xmlns:r="http://schemas.openxmlformats.org/officeDocument/2006/relationships" xmlns:a="http://schemas.openxmlformats.org/drawingml/2006/main" r:embed="R1d837df132304788"/>
+          <a:blip xmlns:r="http://schemas.openxmlformats.org/officeDocument/2006/relationships" xmlns:a="http://schemas.openxmlformats.org/drawingml/2006/main" r:embed="R5c42482391694c15"/>
           <a:stretch xmlns:a="http://schemas.openxmlformats.org/drawingml/2006/main">
             <a:fillRect l="0" t="0" r="0" b="0"/>
           </a:stretch>
@@ -14939,7 +14939,7 @@
           <p:cNvPr id="3" name="Rectangle 2">
             <a:extLst xmlns:a="http://schemas.openxmlformats.org/drawingml/2006/main">
               <a:ext uri="{FF2B5EF4-FFF2-40B4-BE49-F238E27FC236}">
-                <a16:creationId xmlns:a16="http://schemas.microsoft.com/office/drawing/2014/main" id="{6102BA15-F438-46EA-8DD3-6D943F1D0A30}"/>
+                <a16:creationId xmlns:a16="http://schemas.microsoft.com/office/drawing/2014/main" id="{DAE1F47C-ED99-4DF5-9020-29EBB9D5FC49}"/>
               </a:ext>
             </a:extLst>
           </p:cNvPr>
@@ -14992,7 +14992,7 @@
           <p:cNvPr id="4" name="TextBox 3">
             <a:extLst xmlns:a="http://schemas.openxmlformats.org/drawingml/2006/main">
               <a:ext uri="{FF2B5EF4-FFF2-40B4-BE49-F238E27FC236}">
-                <a16:creationId xmlns:a16="http://schemas.microsoft.com/office/drawing/2014/main" id="{DFBFBEDE-80DA-4D90-B8D3-19E6063CD872}"/>
+                <a16:creationId xmlns:a16="http://schemas.microsoft.com/office/drawing/2014/main" id="{F02BC459-7581-47C5-92E3-9F49F1761903}"/>
               </a:ext>
             </a:extLst>
           </p:cNvPr>
@@ -15047,7 +15047,7 @@
           <p:cNvPr id="5" name="TextBox 4">
             <a:extLst xmlns:a="http://schemas.openxmlformats.org/drawingml/2006/main">
               <a:ext uri="{FF2B5EF4-FFF2-40B4-BE49-F238E27FC236}">
-                <a16:creationId xmlns:a16="http://schemas.microsoft.com/office/drawing/2014/main" id="{4FDE7516-7B5B-4374-BC02-98B9DD543470}"/>
+                <a16:creationId xmlns:a16="http://schemas.microsoft.com/office/drawing/2014/main" id="{94CAFFD8-3D9C-4593-8ACD-A2B1F0DDF790}"/>
               </a:ext>
             </a:extLst>
           </p:cNvPr>
@@ -15059,7 +15059,7 @@
         <p:spPr>
           <a:xfrm xmlns:a="http://schemas.openxmlformats.org/drawingml/2006/main">
             <a:off x="406400" y="1473200"/>
-            <a:ext cx="11379200" cy="560832"/>
+            <a:ext cx="11379200" cy="533400"/>
           </a:xfrm>
           <a:prstGeom xmlns:a="http://schemas.openxmlformats.org/drawingml/2006/main" prst="rect">
             <a:avLst/>
@@ -15077,14 +15077,14 @@
                 <a:spcPct val="115000"/>
               </a:lnSpc>
               <a:buNone/>
-              <a:defRPr sz="3200">
+              <a:defRPr sz="2400">
                 <a:latin typeface="Arial"/>
                 <a:ea typeface="Arial"/>
                 <a:cs typeface="Arial"/>
               </a:defRPr>
             </a:pPr>
             <a:r>
-              <a:rPr sz="3200" b="1" i="0">
+              <a:rPr sz="2400" b="1" i="0">
                 <a:solidFill>
                   <a:srgbClr val="102A43"/>
                 </a:solidFill>
@@ -15102,7 +15102,7 @@
           <p:cNvPr id="6" name="TextBox 5">
             <a:extLst xmlns:a="http://schemas.openxmlformats.org/drawingml/2006/main">
               <a:ext uri="{FF2B5EF4-FFF2-40B4-BE49-F238E27FC236}">
-                <a16:creationId xmlns:a16="http://schemas.microsoft.com/office/drawing/2014/main" id="{FD724BB3-8600-40B1-ACC5-D568DCA00556}"/>
+                <a16:creationId xmlns:a16="http://schemas.microsoft.com/office/drawing/2014/main" id="{5F02F678-996B-4CD1-B314-5C8386376304}"/>
               </a:ext>
             </a:extLst>
           </p:cNvPr>
@@ -15157,7 +15157,7 @@
           <p:cNvPr id="7" name="TextBox 6">
             <a:extLst xmlns:a="http://schemas.openxmlformats.org/drawingml/2006/main">
               <a:ext uri="{FF2B5EF4-FFF2-40B4-BE49-F238E27FC236}">
-                <a16:creationId xmlns:a16="http://schemas.microsoft.com/office/drawing/2014/main" id="{DB584CEA-95E8-442D-B9D6-D1D8F1C4EF85}"/>
+                <a16:creationId xmlns:a16="http://schemas.microsoft.com/office/drawing/2014/main" id="{A14DCB44-536D-4F7E-BA66-576C6F0CD407}"/>
               </a:ext>
             </a:extLst>
           </p:cNvPr>
@@ -15212,7 +15212,7 @@
           <p:cNvPr id="8" name="Rectangle 7">
             <a:extLst xmlns:a="http://schemas.openxmlformats.org/drawingml/2006/main">
               <a:ext uri="{FF2B5EF4-FFF2-40B4-BE49-F238E27FC236}">
-                <a16:creationId xmlns:a16="http://schemas.microsoft.com/office/drawing/2014/main" id="{793E46E4-A133-4353-A431-A6828CBE0549}"/>
+                <a16:creationId xmlns:a16="http://schemas.microsoft.com/office/drawing/2014/main" id="{EA6711CD-1891-4D30-B2AE-8ECD2627D1E2}"/>
               </a:ext>
             </a:extLst>
           </p:cNvPr>
@@ -15265,7 +15265,7 @@
           <p:cNvPr id="9" name="TextBox 8">
             <a:extLst xmlns:a="http://schemas.openxmlformats.org/drawingml/2006/main">
               <a:ext uri="{FF2B5EF4-FFF2-40B4-BE49-F238E27FC236}">
-                <a16:creationId xmlns:a16="http://schemas.microsoft.com/office/drawing/2014/main" id="{5C14B654-FB29-41FF-9CF2-0217F4850B66}"/>
+                <a16:creationId xmlns:a16="http://schemas.microsoft.com/office/drawing/2014/main" id="{499DD68A-54C6-48CF-BF18-606915F33C58}"/>
               </a:ext>
             </a:extLst>
           </p:cNvPr>
@@ -15320,7 +15320,7 @@
           <p:cNvPr id="10" name="TextBox 9">
             <a:extLst xmlns:a="http://schemas.openxmlformats.org/drawingml/2006/main">
               <a:ext uri="{FF2B5EF4-FFF2-40B4-BE49-F238E27FC236}">
-                <a16:creationId xmlns:a16="http://schemas.microsoft.com/office/drawing/2014/main" id="{C6B18BB9-B9E9-4725-B8AA-B01B6C1783FD}"/>
+                <a16:creationId xmlns:a16="http://schemas.microsoft.com/office/drawing/2014/main" id="{4850BADE-1235-48EC-8EC2-37709CE3BA19}"/>
               </a:ext>
             </a:extLst>
           </p:cNvPr>
@@ -15375,7 +15375,7 @@
           <p:cNvPr id="11" name="Rectangle 10">
             <a:extLst xmlns:a="http://schemas.openxmlformats.org/drawingml/2006/main">
               <a:ext uri="{FF2B5EF4-FFF2-40B4-BE49-F238E27FC236}">
-                <a16:creationId xmlns:a16="http://schemas.microsoft.com/office/drawing/2014/main" id="{3CD06A7D-A8CC-4D83-AA82-44A2DEEB1F95}"/>
+                <a16:creationId xmlns:a16="http://schemas.microsoft.com/office/drawing/2014/main" id="{EF83DFCB-64EE-4011-A4A7-C93BCEB109B3}"/>
               </a:ext>
             </a:extLst>
           </p:cNvPr>
@@ -15428,7 +15428,7 @@
           <p:cNvPr id="12" name="TextBox 11">
             <a:extLst xmlns:a="http://schemas.openxmlformats.org/drawingml/2006/main">
               <a:ext uri="{FF2B5EF4-FFF2-40B4-BE49-F238E27FC236}">
-                <a16:creationId xmlns:a16="http://schemas.microsoft.com/office/drawing/2014/main" id="{BFD7FA43-B00C-4AE6-A417-A5A3F00F9EDE}"/>
+                <a16:creationId xmlns:a16="http://schemas.microsoft.com/office/drawing/2014/main" id="{D3C5E1EA-384F-4BE5-A65C-FD886138F39F}"/>
               </a:ext>
             </a:extLst>
           </p:cNvPr>
@@ -15483,7 +15483,7 @@
           <p:cNvPr id="13" name="TextBox 12">
             <a:extLst xmlns:a="http://schemas.openxmlformats.org/drawingml/2006/main">
               <a:ext uri="{FF2B5EF4-FFF2-40B4-BE49-F238E27FC236}">
-                <a16:creationId xmlns:a16="http://schemas.microsoft.com/office/drawing/2014/main" id="{CFECDD9B-B8E1-477C-ACF4-730FD0B69A62}"/>
+                <a16:creationId xmlns:a16="http://schemas.microsoft.com/office/drawing/2014/main" id="{E947DBDE-9EA8-4524-ADF8-8F136CCCF4E6}"/>
               </a:ext>
             </a:extLst>
           </p:cNvPr>
@@ -15538,7 +15538,7 @@
           <p:cNvPr id="14" name="Rectangle 13">
             <a:extLst xmlns:a="http://schemas.openxmlformats.org/drawingml/2006/main">
               <a:ext uri="{FF2B5EF4-FFF2-40B4-BE49-F238E27FC236}">
-                <a16:creationId xmlns:a16="http://schemas.microsoft.com/office/drawing/2014/main" id="{D1A4347D-399B-4046-A101-1F220ED01A96}"/>
+                <a16:creationId xmlns:a16="http://schemas.microsoft.com/office/drawing/2014/main" id="{CB218A9C-5EA7-4A51-A197-8BD849532DA4}"/>
               </a:ext>
             </a:extLst>
           </p:cNvPr>
@@ -15591,7 +15591,7 @@
           <p:cNvPr id="15" name="TextBox 14">
             <a:extLst xmlns:a="http://schemas.openxmlformats.org/drawingml/2006/main">
               <a:ext uri="{FF2B5EF4-FFF2-40B4-BE49-F238E27FC236}">
-                <a16:creationId xmlns:a16="http://schemas.microsoft.com/office/drawing/2014/main" id="{C6B4CBBF-E27A-4B0F-8B4F-E83EF611C7BB}"/>
+                <a16:creationId xmlns:a16="http://schemas.microsoft.com/office/drawing/2014/main" id="{B82E4311-78D4-4196-A05E-745F1DD440C1}"/>
               </a:ext>
             </a:extLst>
           </p:cNvPr>
@@ -15646,7 +15646,7 @@
           <p:cNvPr id="16" name="TextBox 15">
             <a:extLst xmlns:a="http://schemas.openxmlformats.org/drawingml/2006/main">
               <a:ext uri="{FF2B5EF4-FFF2-40B4-BE49-F238E27FC236}">
-                <a16:creationId xmlns:a16="http://schemas.microsoft.com/office/drawing/2014/main" id="{8FDF05C3-8DDB-43AD-B2B0-328F5CC92C80}"/>
+                <a16:creationId xmlns:a16="http://schemas.microsoft.com/office/drawing/2014/main" id="{47208DE4-EE62-467A-9440-BE9043FBE9CF}"/>
               </a:ext>
             </a:extLst>
           </p:cNvPr>
@@ -15701,7 +15701,7 @@
           <p:cNvPr id="17" name="Rectangle 16">
             <a:extLst xmlns:a="http://schemas.openxmlformats.org/drawingml/2006/main">
               <a:ext uri="{FF2B5EF4-FFF2-40B4-BE49-F238E27FC236}">
-                <a16:creationId xmlns:a16="http://schemas.microsoft.com/office/drawing/2014/main" id="{C2FE937E-5DC7-48FC-9236-055125F7ED03}"/>
+                <a16:creationId xmlns:a16="http://schemas.microsoft.com/office/drawing/2014/main" id="{7AA7A26C-AA99-481B-BD55-E8D0FD2B96AE}"/>
               </a:ext>
             </a:extLst>
           </p:cNvPr>
@@ -15754,7 +15754,7 @@
           <p:cNvPr id="18" name="TextBox 17">
             <a:extLst xmlns:a="http://schemas.openxmlformats.org/drawingml/2006/main">
               <a:ext uri="{FF2B5EF4-FFF2-40B4-BE49-F238E27FC236}">
-                <a16:creationId xmlns:a16="http://schemas.microsoft.com/office/drawing/2014/main" id="{3F05320B-85FA-40D6-A7C9-13791955D782}"/>
+                <a16:creationId xmlns:a16="http://schemas.microsoft.com/office/drawing/2014/main" id="{AACD3031-3C1C-4551-B297-569CCC74BCA0}"/>
               </a:ext>
             </a:extLst>
           </p:cNvPr>
@@ -15809,7 +15809,7 @@
           <p:cNvPr id="19" name="TextBox 18">
             <a:extLst xmlns:a="http://schemas.openxmlformats.org/drawingml/2006/main">
               <a:ext uri="{FF2B5EF4-FFF2-40B4-BE49-F238E27FC236}">
-                <a16:creationId xmlns:a16="http://schemas.microsoft.com/office/drawing/2014/main" id="{E3AF855D-EFF8-49FF-990F-4EFE3A958962}"/>
+                <a16:creationId xmlns:a16="http://schemas.microsoft.com/office/drawing/2014/main" id="{CDE505C8-D74E-4C1A-91F9-C226CD8985CE}"/>
               </a:ext>
             </a:extLst>
           </p:cNvPr>
@@ -15864,7 +15864,7 @@
           <p:cNvPr id="20" name="Rectangle 19">
             <a:extLst xmlns:a="http://schemas.openxmlformats.org/drawingml/2006/main">
               <a:ext uri="{FF2B5EF4-FFF2-40B4-BE49-F238E27FC236}">
-                <a16:creationId xmlns:a16="http://schemas.microsoft.com/office/drawing/2014/main" id="{153D4E5B-C8BB-451D-B230-3EAD927B08E5}"/>
+                <a16:creationId xmlns:a16="http://schemas.microsoft.com/office/drawing/2014/main" id="{4607183A-B3CB-4D5F-9A71-8F36A123B59B}"/>
               </a:ext>
             </a:extLst>
           </p:cNvPr>
@@ -15917,7 +15917,7 @@
           <p:cNvPr id="21" name="TextBox 20">
             <a:extLst xmlns:a="http://schemas.openxmlformats.org/drawingml/2006/main">
               <a:ext uri="{FF2B5EF4-FFF2-40B4-BE49-F238E27FC236}">
-                <a16:creationId xmlns:a16="http://schemas.microsoft.com/office/drawing/2014/main" id="{9E469EC7-8259-4A8C-A72F-4B323D5432F7}"/>
+                <a16:creationId xmlns:a16="http://schemas.microsoft.com/office/drawing/2014/main" id="{1FA3A23A-6E6B-4462-A0F5-3AE935488F27}"/>
               </a:ext>
             </a:extLst>
           </p:cNvPr>
@@ -15972,7 +15972,7 @@
           <p:cNvPr id="22" name="TextBox 21">
             <a:extLst xmlns:a="http://schemas.openxmlformats.org/drawingml/2006/main">
               <a:ext uri="{FF2B5EF4-FFF2-40B4-BE49-F238E27FC236}">
-                <a16:creationId xmlns:a16="http://schemas.microsoft.com/office/drawing/2014/main" id="{4EDF4E68-D39F-4B64-9A6D-DB723918DA29}"/>
+                <a16:creationId xmlns:a16="http://schemas.microsoft.com/office/drawing/2014/main" id="{F4A9E2E9-3DD2-481A-9DF3-02CA879662F9}"/>
               </a:ext>
             </a:extLst>
           </p:cNvPr>
@@ -16027,7 +16027,7 @@
           <p:cNvPr id="23" name="Rectangle 22">
             <a:extLst xmlns:a="http://schemas.openxmlformats.org/drawingml/2006/main">
               <a:ext uri="{FF2B5EF4-FFF2-40B4-BE49-F238E27FC236}">
-                <a16:creationId xmlns:a16="http://schemas.microsoft.com/office/drawing/2014/main" id="{F4B5B6EA-E5B8-46E3-8C69-B281FAF489AC}"/>
+                <a16:creationId xmlns:a16="http://schemas.microsoft.com/office/drawing/2014/main" id="{277DB764-2E05-4A56-ACD9-F1834FE7D2D5}"/>
               </a:ext>
             </a:extLst>
           </p:cNvPr>
@@ -16080,7 +16080,7 @@
           <p:cNvPr id="24" name="Rectangle 23">
             <a:extLst xmlns:a="http://schemas.openxmlformats.org/drawingml/2006/main">
               <a:ext uri="{FF2B5EF4-FFF2-40B4-BE49-F238E27FC236}">
-                <a16:creationId xmlns:a16="http://schemas.microsoft.com/office/drawing/2014/main" id="{741060DF-3665-4AD5-B604-1A3B5D6CCE97}"/>
+                <a16:creationId xmlns:a16="http://schemas.microsoft.com/office/drawing/2014/main" id="{1965C474-9AF8-4B4F-9DD2-57292721D343}"/>
               </a:ext>
             </a:extLst>
           </p:cNvPr>
@@ -16133,7 +16133,7 @@
           <p:cNvPr id="25" name="Rectangle 24">
             <a:extLst xmlns:a="http://schemas.openxmlformats.org/drawingml/2006/main">
               <a:ext uri="{FF2B5EF4-FFF2-40B4-BE49-F238E27FC236}">
-                <a16:creationId xmlns:a16="http://schemas.microsoft.com/office/drawing/2014/main" id="{7A5FF4AC-75C0-4E84-97C3-DF63013C6E43}"/>
+                <a16:creationId xmlns:a16="http://schemas.microsoft.com/office/drawing/2014/main" id="{9844AE1E-F3EA-4FA1-B8D8-6992AB7CCED0}"/>
               </a:ext>
             </a:extLst>
           </p:cNvPr>
@@ -16186,7 +16186,7 @@
           <p:cNvPr id="26" name="TextBox 25">
             <a:extLst xmlns:a="http://schemas.openxmlformats.org/drawingml/2006/main">
               <a:ext uri="{FF2B5EF4-FFF2-40B4-BE49-F238E27FC236}">
-                <a16:creationId xmlns:a16="http://schemas.microsoft.com/office/drawing/2014/main" id="{45EF9CD4-2A2B-4C9D-A2A1-3CC52696AE66}"/>
+                <a16:creationId xmlns:a16="http://schemas.microsoft.com/office/drawing/2014/main" id="{1670C5B0-269C-4BE2-93A2-9E6C4DFB68ED}"/>
               </a:ext>
             </a:extLst>
           </p:cNvPr>
@@ -16241,7 +16241,7 @@
           <p:cNvPr id="27" name="TextBox 26">
             <a:extLst xmlns:a="http://schemas.openxmlformats.org/drawingml/2006/main">
               <a:ext uri="{FF2B5EF4-FFF2-40B4-BE49-F238E27FC236}">
-                <a16:creationId xmlns:a16="http://schemas.microsoft.com/office/drawing/2014/main" id="{52659C20-6CDE-4581-A1A8-7B76DCF2644C}"/>
+                <a16:creationId xmlns:a16="http://schemas.microsoft.com/office/drawing/2014/main" id="{7DD66647-6330-4585-BD79-D45C814F1614}"/>
               </a:ext>
             </a:extLst>
           </p:cNvPr>
@@ -16294,7 +16294,7 @@
     </p:spTree>
     <p:extLst>
       <p:ext uri="{BB962C8B-B14F-4D97-AF65-F5344CB8AC3E}">
-        <p14:creationId xmlns:p14="http://schemas.microsoft.com/office/powerpoint/2010/main" val="1387366781"/>
+        <p14:creationId xmlns:p14="http://schemas.microsoft.com/office/powerpoint/2010/main" val="880995251"/>
       </p:ext>
     </p:extLst>
   </p:cSld>
@@ -16322,7 +16322,7 @@
           <p:nvPr/>
         </p:nvPicPr>
         <p:blipFill>
-          <a:blip xmlns:r="http://schemas.openxmlformats.org/officeDocument/2006/relationships" xmlns:a="http://schemas.openxmlformats.org/drawingml/2006/main" r:embed="R088bbb40c6f04434"/>
+          <a:blip xmlns:r="http://schemas.openxmlformats.org/officeDocument/2006/relationships" xmlns:a="http://schemas.openxmlformats.org/drawingml/2006/main" r:embed="Ra8b2ed67c62748b5"/>
           <a:stretch xmlns:a="http://schemas.openxmlformats.org/drawingml/2006/main">
             <a:fillRect l="0" t="0" r="0" b="0"/>
           </a:stretch>
@@ -16342,7 +16342,7 @@
           <p:cNvPr id="3" name="Rectangle 2">
             <a:extLst xmlns:a="http://schemas.openxmlformats.org/drawingml/2006/main">
               <a:ext uri="{FF2B5EF4-FFF2-40B4-BE49-F238E27FC236}">
-                <a16:creationId xmlns:a16="http://schemas.microsoft.com/office/drawing/2014/main" id="{F1FD715F-83C4-48B9-A6B0-E1B6502EF227}"/>
+                <a16:creationId xmlns:a16="http://schemas.microsoft.com/office/drawing/2014/main" id="{653215BA-E24A-4070-A66D-B9D8ADF7CF6A}"/>
               </a:ext>
             </a:extLst>
           </p:cNvPr>
@@ -16395,7 +16395,7 @@
           <p:cNvPr id="4" name="TextBox 3">
             <a:extLst xmlns:a="http://schemas.openxmlformats.org/drawingml/2006/main">
               <a:ext uri="{FF2B5EF4-FFF2-40B4-BE49-F238E27FC236}">
-                <a16:creationId xmlns:a16="http://schemas.microsoft.com/office/drawing/2014/main" id="{7585E13D-8ABE-41DE-8B1A-48F5A8DEAC7E}"/>
+                <a16:creationId xmlns:a16="http://schemas.microsoft.com/office/drawing/2014/main" id="{A36D403F-7E1F-45D0-811F-B221FF53C4B0}"/>
               </a:ext>
             </a:extLst>
           </p:cNvPr>
@@ -16450,7 +16450,7 @@
           <p:cNvPr id="5" name="TextBox 4">
             <a:extLst xmlns:a="http://schemas.openxmlformats.org/drawingml/2006/main">
               <a:ext uri="{FF2B5EF4-FFF2-40B4-BE49-F238E27FC236}">
-                <a16:creationId xmlns:a16="http://schemas.microsoft.com/office/drawing/2014/main" id="{12CB82E0-5392-4AF9-A819-AFCBAB44338D}"/>
+                <a16:creationId xmlns:a16="http://schemas.microsoft.com/office/drawing/2014/main" id="{469615E2-B9B3-4EA8-856C-768590D05635}"/>
               </a:ext>
             </a:extLst>
           </p:cNvPr>
@@ -16462,7 +16462,7 @@
         <p:spPr>
           <a:xfrm xmlns:a="http://schemas.openxmlformats.org/drawingml/2006/main">
             <a:off x="406400" y="1473200"/>
-            <a:ext cx="10477500" cy="536448"/>
+            <a:ext cx="10477500" cy="533400"/>
           </a:xfrm>
           <a:prstGeom xmlns:a="http://schemas.openxmlformats.org/drawingml/2006/main" prst="rect">
             <a:avLst/>
@@ -16480,14 +16480,14 @@
                 <a:spcPct val="110000"/>
               </a:lnSpc>
               <a:buNone/>
-              <a:defRPr sz="3200">
+              <a:defRPr sz="2400">
                 <a:latin typeface="Arial"/>
                 <a:ea typeface="Arial"/>
                 <a:cs typeface="Arial"/>
               </a:defRPr>
             </a:pPr>
             <a:r>
-              <a:rPr sz="3200" b="1" i="0">
+              <a:rPr sz="2400" b="1" i="0">
                 <a:solidFill>
                   <a:srgbClr val="102A43"/>
                 </a:solidFill>
@@ -16955,7 +16955,7 @@
           <p:cNvPr id="7" name="Rectangle 6">
             <a:extLst xmlns:a="http://schemas.openxmlformats.org/drawingml/2006/main">
               <a:ext uri="{FF2B5EF4-FFF2-40B4-BE49-F238E27FC236}">
-                <a16:creationId xmlns:a16="http://schemas.microsoft.com/office/drawing/2014/main" id="{C0EB3D40-5AB4-4BD6-86A7-FE9D52933E33}"/>
+                <a16:creationId xmlns:a16="http://schemas.microsoft.com/office/drawing/2014/main" id="{A9668AEA-B891-48E6-9C1B-A8E45329E472}"/>
               </a:ext>
             </a:extLst>
           </p:cNvPr>
@@ -17008,7 +17008,7 @@
           <p:cNvPr id="8" name="Rectangle 7">
             <a:extLst xmlns:a="http://schemas.openxmlformats.org/drawingml/2006/main">
               <a:ext uri="{FF2B5EF4-FFF2-40B4-BE49-F238E27FC236}">
-                <a16:creationId xmlns:a16="http://schemas.microsoft.com/office/drawing/2014/main" id="{1D3B27A4-0316-42CE-9816-043BD5E54356}"/>
+                <a16:creationId xmlns:a16="http://schemas.microsoft.com/office/drawing/2014/main" id="{CF53ECCD-5ACB-46F5-8513-1E1FD7D98EEC}"/>
               </a:ext>
             </a:extLst>
           </p:cNvPr>
@@ -17061,7 +17061,7 @@
           <p:cNvPr id="9" name="TextBox 8">
             <a:extLst xmlns:a="http://schemas.openxmlformats.org/drawingml/2006/main">
               <a:ext uri="{FF2B5EF4-FFF2-40B4-BE49-F238E27FC236}">
-                <a16:creationId xmlns:a16="http://schemas.microsoft.com/office/drawing/2014/main" id="{34BC8C78-C9AD-49AA-A1F0-1EC19B32C3D4}"/>
+                <a16:creationId xmlns:a16="http://schemas.microsoft.com/office/drawing/2014/main" id="{505CB3A9-A2BB-4BA4-9E4F-5AC05A92B16C}"/>
               </a:ext>
             </a:extLst>
           </p:cNvPr>
@@ -17116,7 +17116,7 @@
           <p:cNvPr id="10" name="TextBox 9">
             <a:extLst xmlns:a="http://schemas.openxmlformats.org/drawingml/2006/main">
               <a:ext uri="{FF2B5EF4-FFF2-40B4-BE49-F238E27FC236}">
-                <a16:creationId xmlns:a16="http://schemas.microsoft.com/office/drawing/2014/main" id="{5ABC86BE-A55D-4F5A-B956-B3430F8E7C86}"/>
+                <a16:creationId xmlns:a16="http://schemas.microsoft.com/office/drawing/2014/main" id="{72BE43E6-E460-448A-8CE1-51BBBACDBCDC}"/>
               </a:ext>
             </a:extLst>
           </p:cNvPr>
@@ -17169,7 +17169,7 @@
     </p:spTree>
     <p:extLst>
       <p:ext uri="{BB962C8B-B14F-4D97-AF65-F5344CB8AC3E}">
-        <p14:creationId xmlns:p14="http://schemas.microsoft.com/office/powerpoint/2010/main" val="500357184"/>
+        <p14:creationId xmlns:p14="http://schemas.microsoft.com/office/powerpoint/2010/main" val="2139128521"/>
       </p:ext>
     </p:extLst>
   </p:cSld>
@@ -17197,7 +17197,7 @@
           <p:nvPr/>
         </p:nvPicPr>
         <p:blipFill>
-          <a:blip xmlns:r="http://schemas.openxmlformats.org/officeDocument/2006/relationships" xmlns:a="http://schemas.openxmlformats.org/drawingml/2006/main" r:embed="R22bfd9596fa94174"/>
+          <a:blip xmlns:r="http://schemas.openxmlformats.org/officeDocument/2006/relationships" xmlns:a="http://schemas.openxmlformats.org/drawingml/2006/main" r:embed="R1521e4367f21403a"/>
           <a:stretch xmlns:a="http://schemas.openxmlformats.org/drawingml/2006/main">
             <a:fillRect l="0" t="0" r="0" b="0"/>
           </a:stretch>
@@ -17217,7 +17217,7 @@
           <p:cNvPr id="3" name="Rectangle 2">
             <a:extLst xmlns:a="http://schemas.openxmlformats.org/drawingml/2006/main">
               <a:ext uri="{FF2B5EF4-FFF2-40B4-BE49-F238E27FC236}">
-                <a16:creationId xmlns:a16="http://schemas.microsoft.com/office/drawing/2014/main" id="{40810BF2-2B4C-4159-B6F4-BDC7EA00CCA4}"/>
+                <a16:creationId xmlns:a16="http://schemas.microsoft.com/office/drawing/2014/main" id="{035CC269-ABC1-40B5-A265-36CB5B8C4DF5}"/>
               </a:ext>
             </a:extLst>
           </p:cNvPr>
@@ -17270,7 +17270,7 @@
           <p:cNvPr id="4" name="TextBox 3">
             <a:extLst xmlns:a="http://schemas.openxmlformats.org/drawingml/2006/main">
               <a:ext uri="{FF2B5EF4-FFF2-40B4-BE49-F238E27FC236}">
-                <a16:creationId xmlns:a16="http://schemas.microsoft.com/office/drawing/2014/main" id="{6A589FFD-B35E-4317-986D-82C27A6D504A}"/>
+                <a16:creationId xmlns:a16="http://schemas.microsoft.com/office/drawing/2014/main" id="{C5682014-4BFC-4D73-9B13-3BC6AD2A34AE}"/>
               </a:ext>
             </a:extLst>
           </p:cNvPr>
@@ -17325,7 +17325,7 @@
           <p:cNvPr id="5" name="TextBox 4">
             <a:extLst xmlns:a="http://schemas.openxmlformats.org/drawingml/2006/main">
               <a:ext uri="{FF2B5EF4-FFF2-40B4-BE49-F238E27FC236}">
-                <a16:creationId xmlns:a16="http://schemas.microsoft.com/office/drawing/2014/main" id="{8BE82D30-5054-46A8-BB01-62628D3ECFE5}"/>
+                <a16:creationId xmlns:a16="http://schemas.microsoft.com/office/drawing/2014/main" id="{8BC78F24-DFA6-48E4-934A-F1E4538527AC}"/>
               </a:ext>
             </a:extLst>
           </p:cNvPr>
@@ -17337,7 +17337,7 @@
         <p:spPr>
           <a:xfrm xmlns:a="http://schemas.openxmlformats.org/drawingml/2006/main">
             <a:off x="406400" y="1473200"/>
-            <a:ext cx="10477500" cy="536448"/>
+            <a:ext cx="10477500" cy="533400"/>
           </a:xfrm>
           <a:prstGeom xmlns:a="http://schemas.openxmlformats.org/drawingml/2006/main" prst="rect">
             <a:avLst/>
@@ -17355,14 +17355,14 @@
                 <a:spcPct val="110000"/>
               </a:lnSpc>
               <a:buNone/>
-              <a:defRPr sz="3200">
+              <a:defRPr sz="2400">
                 <a:latin typeface="Arial"/>
                 <a:ea typeface="Arial"/>
                 <a:cs typeface="Arial"/>
               </a:defRPr>
             </a:pPr>
             <a:r>
-              <a:rPr sz="3200" b="1" i="0">
+              <a:rPr sz="2400" b="1" i="0">
                 <a:solidFill>
                   <a:srgbClr val="102A43"/>
                 </a:solidFill>
@@ -17620,7 +17620,7 @@
           <p:cNvPr id="7" name="Rectangle 6">
             <a:extLst xmlns:a="http://schemas.openxmlformats.org/drawingml/2006/main">
               <a:ext uri="{FF2B5EF4-FFF2-40B4-BE49-F238E27FC236}">
-                <a16:creationId xmlns:a16="http://schemas.microsoft.com/office/drawing/2014/main" id="{FAFFFAC2-9971-4514-8F72-E48FD80EDBCD}"/>
+                <a16:creationId xmlns:a16="http://schemas.microsoft.com/office/drawing/2014/main" id="{67ECA60D-EE44-4692-8FDF-62CF1FE0FBF1}"/>
               </a:ext>
             </a:extLst>
           </p:cNvPr>
@@ -17673,7 +17673,7 @@
           <p:cNvPr id="8" name="Rectangle 7">
             <a:extLst xmlns:a="http://schemas.openxmlformats.org/drawingml/2006/main">
               <a:ext uri="{FF2B5EF4-FFF2-40B4-BE49-F238E27FC236}">
-                <a16:creationId xmlns:a16="http://schemas.microsoft.com/office/drawing/2014/main" id="{3A7A6E75-CC0C-456E-8843-AF7CBEFD0275}"/>
+                <a16:creationId xmlns:a16="http://schemas.microsoft.com/office/drawing/2014/main" id="{849486BE-A930-405B-954C-17D490EC9814}"/>
               </a:ext>
             </a:extLst>
           </p:cNvPr>
@@ -17726,7 +17726,7 @@
           <p:cNvPr id="9" name="TextBox 8">
             <a:extLst xmlns:a="http://schemas.openxmlformats.org/drawingml/2006/main">
               <a:ext uri="{FF2B5EF4-FFF2-40B4-BE49-F238E27FC236}">
-                <a16:creationId xmlns:a16="http://schemas.microsoft.com/office/drawing/2014/main" id="{C65E964B-E8BF-4614-B3A1-15351509366F}"/>
+                <a16:creationId xmlns:a16="http://schemas.microsoft.com/office/drawing/2014/main" id="{C9BF1BCB-32C4-4E9D-AC7B-ED9672FBE7D9}"/>
               </a:ext>
             </a:extLst>
           </p:cNvPr>
@@ -17781,7 +17781,7 @@
           <p:cNvPr id="10" name="TextBox 9">
             <a:extLst xmlns:a="http://schemas.openxmlformats.org/drawingml/2006/main">
               <a:ext uri="{FF2B5EF4-FFF2-40B4-BE49-F238E27FC236}">
-                <a16:creationId xmlns:a16="http://schemas.microsoft.com/office/drawing/2014/main" id="{33E4554F-24C7-4388-8018-C9B3DD4413F0}"/>
+                <a16:creationId xmlns:a16="http://schemas.microsoft.com/office/drawing/2014/main" id="{10E30FCC-4A05-4FB7-867A-9194F7ACAE4F}"/>
               </a:ext>
             </a:extLst>
           </p:cNvPr>
@@ -17834,7 +17834,7 @@
     </p:spTree>
     <p:extLst>
       <p:ext uri="{BB962C8B-B14F-4D97-AF65-F5344CB8AC3E}">
-        <p14:creationId xmlns:p14="http://schemas.microsoft.com/office/powerpoint/2010/main" val="165902265"/>
+        <p14:creationId xmlns:p14="http://schemas.microsoft.com/office/powerpoint/2010/main" val="901876281"/>
       </p:ext>
     </p:extLst>
   </p:cSld>
@@ -17858,7 +17858,7 @@
           <p:cNvPr id="2" name="Rectangle 1">
             <a:extLst xmlns:a="http://schemas.openxmlformats.org/drawingml/2006/main">
               <a:ext uri="{FF2B5EF4-FFF2-40B4-BE49-F238E27FC236}">
-                <a16:creationId xmlns:a16="http://schemas.microsoft.com/office/drawing/2014/main" id="{49952883-92D6-4968-A308-BC08B127DE53}"/>
+                <a16:creationId xmlns:a16="http://schemas.microsoft.com/office/drawing/2014/main" id="{5FC93508-AB7B-4751-882D-961A71A6274B}"/>
               </a:ext>
             </a:extLst>
           </p:cNvPr>
@@ -17911,7 +17911,7 @@
           <p:cNvPr id="3" name="TextBox 2">
             <a:extLst xmlns:a="http://schemas.openxmlformats.org/drawingml/2006/main">
               <a:ext uri="{FF2B5EF4-FFF2-40B4-BE49-F238E27FC236}">
-                <a16:creationId xmlns:a16="http://schemas.microsoft.com/office/drawing/2014/main" id="{6DBF2AB3-49C8-41B2-BA4A-B41BBF8D6141}"/>
+                <a16:creationId xmlns:a16="http://schemas.microsoft.com/office/drawing/2014/main" id="{37E821D9-1010-4AE2-91C8-76FBB7BDCE6E}"/>
               </a:ext>
             </a:extLst>
           </p:cNvPr>
@@ -17966,7 +17966,7 @@
           <p:cNvPr id="4" name="TextBox 3">
             <a:extLst xmlns:a="http://schemas.openxmlformats.org/drawingml/2006/main">
               <a:ext uri="{FF2B5EF4-FFF2-40B4-BE49-F238E27FC236}">
-                <a16:creationId xmlns:a16="http://schemas.microsoft.com/office/drawing/2014/main" id="{4C090AD5-36E2-4866-B4A4-72F2988F037B}"/>
+                <a16:creationId xmlns:a16="http://schemas.microsoft.com/office/drawing/2014/main" id="{73086CFD-6A10-4422-83E7-6BE70358E23B}"/>
               </a:ext>
             </a:extLst>
           </p:cNvPr>
@@ -18021,7 +18021,7 @@
           <p:cNvPr id="5" name="TextBox 4">
             <a:extLst xmlns:a="http://schemas.openxmlformats.org/drawingml/2006/main">
               <a:ext uri="{FF2B5EF4-FFF2-40B4-BE49-F238E27FC236}">
-                <a16:creationId xmlns:a16="http://schemas.microsoft.com/office/drawing/2014/main" id="{8F97A187-BE11-4381-AB68-21C4F294CF46}"/>
+                <a16:creationId xmlns:a16="http://schemas.microsoft.com/office/drawing/2014/main" id="{DAA08D7C-602F-45AF-89B4-DEACC0DC8C50}"/>
               </a:ext>
             </a:extLst>
           </p:cNvPr>
@@ -18076,7 +18076,7 @@
           <p:cNvPr id="6" name="Rectangle 5">
             <a:extLst xmlns:a="http://schemas.openxmlformats.org/drawingml/2006/main">
               <a:ext uri="{FF2B5EF4-FFF2-40B4-BE49-F238E27FC236}">
-                <a16:creationId xmlns:a16="http://schemas.microsoft.com/office/drawing/2014/main" id="{E087D014-FC15-48C3-8E2D-7A3A85467122}"/>
+                <a16:creationId xmlns:a16="http://schemas.microsoft.com/office/drawing/2014/main" id="{ED203CB7-B022-49BD-9927-9452D4E46948}"/>
               </a:ext>
             </a:extLst>
           </p:cNvPr>
@@ -18127,7 +18127,7 @@
     </p:spTree>
     <p:extLst>
       <p:ext uri="{BB962C8B-B14F-4D97-AF65-F5344CB8AC3E}">
-        <p14:creationId xmlns:p14="http://schemas.microsoft.com/office/powerpoint/2010/main" val="1161924770"/>
+        <p14:creationId xmlns:p14="http://schemas.microsoft.com/office/powerpoint/2010/main" val="332815283"/>
       </p:ext>
     </p:extLst>
   </p:cSld>
@@ -18155,7 +18155,7 @@
           <p:nvPr/>
         </p:nvPicPr>
         <p:blipFill>
-          <a:blip xmlns:r="http://schemas.openxmlformats.org/officeDocument/2006/relationships" xmlns:a="http://schemas.openxmlformats.org/drawingml/2006/main" r:embed="Ra9612fb87bab4296"/>
+          <a:blip xmlns:r="http://schemas.openxmlformats.org/officeDocument/2006/relationships" xmlns:a="http://schemas.openxmlformats.org/drawingml/2006/main" r:embed="R6a78a08c62844830"/>
           <a:stretch xmlns:a="http://schemas.openxmlformats.org/drawingml/2006/main">
             <a:fillRect l="0" t="0" r="0" b="0"/>
           </a:stretch>
@@ -18175,7 +18175,7 @@
           <p:cNvPr id="3" name="Rectangle 2">
             <a:extLst xmlns:a="http://schemas.openxmlformats.org/drawingml/2006/main">
               <a:ext uri="{FF2B5EF4-FFF2-40B4-BE49-F238E27FC236}">
-                <a16:creationId xmlns:a16="http://schemas.microsoft.com/office/drawing/2014/main" id="{F65B02C7-CCFC-4C7E-9ACD-F89C95A5F866}"/>
+                <a16:creationId xmlns:a16="http://schemas.microsoft.com/office/drawing/2014/main" id="{72EF3A71-1F7A-41CA-8465-3DE42F8889E6}"/>
               </a:ext>
             </a:extLst>
           </p:cNvPr>
@@ -18228,7 +18228,7 @@
           <p:cNvPr id="4" name="TextBox 3">
             <a:extLst xmlns:a="http://schemas.openxmlformats.org/drawingml/2006/main">
               <a:ext uri="{FF2B5EF4-FFF2-40B4-BE49-F238E27FC236}">
-                <a16:creationId xmlns:a16="http://schemas.microsoft.com/office/drawing/2014/main" id="{3FEB06DE-8834-4B6A-B7EE-3AF81245BECA}"/>
+                <a16:creationId xmlns:a16="http://schemas.microsoft.com/office/drawing/2014/main" id="{77BAED90-3994-402A-9ED0-11048CAADD32}"/>
               </a:ext>
             </a:extLst>
           </p:cNvPr>
@@ -18283,7 +18283,7 @@
           <p:cNvPr id="5" name="TextBox 4">
             <a:extLst xmlns:a="http://schemas.openxmlformats.org/drawingml/2006/main">
               <a:ext uri="{FF2B5EF4-FFF2-40B4-BE49-F238E27FC236}">
-                <a16:creationId xmlns:a16="http://schemas.microsoft.com/office/drawing/2014/main" id="{03C2F289-D841-43F5-BA66-C52E1E6E4317}"/>
+                <a16:creationId xmlns:a16="http://schemas.microsoft.com/office/drawing/2014/main" id="{58BF4FC6-FFDB-4293-8D84-201CCF1EE340}"/>
               </a:ext>
             </a:extLst>
           </p:cNvPr>
@@ -18313,14 +18313,14 @@
                 <a:spcPct val="110000"/>
               </a:lnSpc>
               <a:buNone/>
-              <a:defRPr sz="3200">
+              <a:defRPr sz="2400">
                 <a:latin typeface="Arial"/>
                 <a:ea typeface="Arial"/>
                 <a:cs typeface="Arial"/>
               </a:defRPr>
             </a:pPr>
             <a:r>
-              <a:rPr sz="3200" b="1" i="0">
+              <a:rPr sz="2400" b="1" i="0">
                 <a:solidFill>
                   <a:srgbClr val="102A43"/>
                 </a:solidFill>
@@ -18338,7 +18338,7 @@
           <p:cNvPr id="6" name="TextBox 5">
             <a:extLst xmlns:a="http://schemas.openxmlformats.org/drawingml/2006/main">
               <a:ext uri="{FF2B5EF4-FFF2-40B4-BE49-F238E27FC236}">
-                <a16:creationId xmlns:a16="http://schemas.microsoft.com/office/drawing/2014/main" id="{294B889C-1DF1-418A-96C1-0CA5073065CA}"/>
+                <a16:creationId xmlns:a16="http://schemas.microsoft.com/office/drawing/2014/main" id="{B0F486FA-4403-4BFC-A657-40D7441ABA3E}"/>
               </a:ext>
             </a:extLst>
           </p:cNvPr>
@@ -18477,7 +18477,7 @@
           <p:cNvPr id="7" name="Rectangle 6">
             <a:extLst xmlns:a="http://schemas.openxmlformats.org/drawingml/2006/main">
               <a:ext uri="{FF2B5EF4-FFF2-40B4-BE49-F238E27FC236}">
-                <a16:creationId xmlns:a16="http://schemas.microsoft.com/office/drawing/2014/main" id="{57B55BBE-1ABC-4305-9FC7-9C61FA3F3838}"/>
+                <a16:creationId xmlns:a16="http://schemas.microsoft.com/office/drawing/2014/main" id="{5B85C264-C0E4-4943-9FC6-687EC5BDEBB0}"/>
               </a:ext>
             </a:extLst>
           </p:cNvPr>
@@ -18530,7 +18530,7 @@
           <p:cNvPr id="8" name="Rectangle 7">
             <a:extLst xmlns:a="http://schemas.openxmlformats.org/drawingml/2006/main">
               <a:ext uri="{FF2B5EF4-FFF2-40B4-BE49-F238E27FC236}">
-                <a16:creationId xmlns:a16="http://schemas.microsoft.com/office/drawing/2014/main" id="{61FCAFC9-0B9F-4CF0-AC58-6DA1E10449E2}"/>
+                <a16:creationId xmlns:a16="http://schemas.microsoft.com/office/drawing/2014/main" id="{E2A48235-D0F8-4925-A237-04DD8CD6E73E}"/>
               </a:ext>
             </a:extLst>
           </p:cNvPr>
@@ -18583,7 +18583,7 @@
           <p:cNvPr id="9" name="TextBox 8">
             <a:extLst xmlns:a="http://schemas.openxmlformats.org/drawingml/2006/main">
               <a:ext uri="{FF2B5EF4-FFF2-40B4-BE49-F238E27FC236}">
-                <a16:creationId xmlns:a16="http://schemas.microsoft.com/office/drawing/2014/main" id="{BD50CE5B-74C5-4183-A490-9BFADE1797D6}"/>
+                <a16:creationId xmlns:a16="http://schemas.microsoft.com/office/drawing/2014/main" id="{13E2EFB2-7972-45F1-BCA1-DC135E86A4FF}"/>
               </a:ext>
             </a:extLst>
           </p:cNvPr>
@@ -18638,7 +18638,7 @@
           <p:cNvPr id="10" name="TextBox 9">
             <a:extLst xmlns:a="http://schemas.openxmlformats.org/drawingml/2006/main">
               <a:ext uri="{FF2B5EF4-FFF2-40B4-BE49-F238E27FC236}">
-                <a16:creationId xmlns:a16="http://schemas.microsoft.com/office/drawing/2014/main" id="{56536C9C-C6BB-4754-9DF5-FA6C99CD003B}"/>
+                <a16:creationId xmlns:a16="http://schemas.microsoft.com/office/drawing/2014/main" id="{BAEA9FC4-DEF1-4C1C-9840-F1F958694080}"/>
               </a:ext>
             </a:extLst>
           </p:cNvPr>
@@ -18691,7 +18691,7 @@
     </p:spTree>
     <p:extLst>
       <p:ext uri="{BB962C8B-B14F-4D97-AF65-F5344CB8AC3E}">
-        <p14:creationId xmlns:p14="http://schemas.microsoft.com/office/powerpoint/2010/main" val="1207891734"/>
+        <p14:creationId xmlns:p14="http://schemas.microsoft.com/office/powerpoint/2010/main" val="1871594898"/>
       </p:ext>
     </p:extLst>
   </p:cSld>
@@ -18719,7 +18719,7 @@
           <p:nvPr/>
         </p:nvPicPr>
         <p:blipFill>
-          <a:blip xmlns:r="http://schemas.openxmlformats.org/officeDocument/2006/relationships" xmlns:a="http://schemas.openxmlformats.org/drawingml/2006/main" r:embed="Rc4e5c08fe6814854"/>
+          <a:blip xmlns:r="http://schemas.openxmlformats.org/officeDocument/2006/relationships" xmlns:a="http://schemas.openxmlformats.org/drawingml/2006/main" r:embed="R8a6319bb71514d6d"/>
           <a:stretch xmlns:a="http://schemas.openxmlformats.org/drawingml/2006/main">
             <a:fillRect l="0" t="0" r="0" b="0"/>
           </a:stretch>
@@ -18739,7 +18739,7 @@
           <p:cNvPr id="3" name="Rectangle 2">
             <a:extLst xmlns:a="http://schemas.openxmlformats.org/drawingml/2006/main">
               <a:ext uri="{FF2B5EF4-FFF2-40B4-BE49-F238E27FC236}">
-                <a16:creationId xmlns:a16="http://schemas.microsoft.com/office/drawing/2014/main" id="{83696817-AD2D-40C2-B76B-D6D977BD7841}"/>
+                <a16:creationId xmlns:a16="http://schemas.microsoft.com/office/drawing/2014/main" id="{8E491A9D-B522-4A3B-963A-96051AB9490C}"/>
               </a:ext>
             </a:extLst>
           </p:cNvPr>
@@ -18792,7 +18792,7 @@
           <p:cNvPr id="4" name="TextBox 3">
             <a:extLst xmlns:a="http://schemas.openxmlformats.org/drawingml/2006/main">
               <a:ext uri="{FF2B5EF4-FFF2-40B4-BE49-F238E27FC236}">
-                <a16:creationId xmlns:a16="http://schemas.microsoft.com/office/drawing/2014/main" id="{E2AEA87E-C475-4800-8D55-932CB61E18F2}"/>
+                <a16:creationId xmlns:a16="http://schemas.microsoft.com/office/drawing/2014/main" id="{20743144-8484-4A4D-92D0-EB784FC5BAB3}"/>
               </a:ext>
             </a:extLst>
           </p:cNvPr>
@@ -18847,7 +18847,7 @@
           <p:cNvPr id="5" name="TextBox 4">
             <a:extLst xmlns:a="http://schemas.openxmlformats.org/drawingml/2006/main">
               <a:ext uri="{FF2B5EF4-FFF2-40B4-BE49-F238E27FC236}">
-                <a16:creationId xmlns:a16="http://schemas.microsoft.com/office/drawing/2014/main" id="{D899DBE2-2FF3-47BE-8AFB-68F3BB3EA5C0}"/>
+                <a16:creationId xmlns:a16="http://schemas.microsoft.com/office/drawing/2014/main" id="{7FF0FF26-39BD-47F9-AEA7-34069B11F0B6}"/>
               </a:ext>
             </a:extLst>
           </p:cNvPr>
@@ -18859,7 +18859,7 @@
         <p:spPr>
           <a:xfrm xmlns:a="http://schemas.openxmlformats.org/drawingml/2006/main">
             <a:off x="406400" y="1473200"/>
-            <a:ext cx="10477500" cy="1072896"/>
+            <a:ext cx="10477500" cy="533400"/>
           </a:xfrm>
           <a:prstGeom xmlns:a="http://schemas.openxmlformats.org/drawingml/2006/main" prst="rect">
             <a:avLst/>
@@ -18877,14 +18877,14 @@
                 <a:spcPct val="110000"/>
               </a:lnSpc>
               <a:buNone/>
-              <a:defRPr sz="3200">
+              <a:defRPr sz="2400">
                 <a:latin typeface="Arial"/>
                 <a:ea typeface="Arial"/>
                 <a:cs typeface="Arial"/>
               </a:defRPr>
             </a:pPr>
             <a:r>
-              <a:rPr sz="3200" b="1" i="0">
+              <a:rPr sz="2400" b="1" i="0">
                 <a:solidFill>
                   <a:srgbClr val="102A43"/>
                 </a:solidFill>
@@ -19142,7 +19142,7 @@
           <p:cNvPr id="7" name="Rectangle 6">
             <a:extLst xmlns:a="http://schemas.openxmlformats.org/drawingml/2006/main">
               <a:ext uri="{FF2B5EF4-FFF2-40B4-BE49-F238E27FC236}">
-                <a16:creationId xmlns:a16="http://schemas.microsoft.com/office/drawing/2014/main" id="{C59DF45A-EED3-407E-B1A2-3784ACCA43AA}"/>
+                <a16:creationId xmlns:a16="http://schemas.microsoft.com/office/drawing/2014/main" id="{219835C8-B944-4E0D-9390-5696CFC18736}"/>
               </a:ext>
             </a:extLst>
           </p:cNvPr>
@@ -19195,7 +19195,7 @@
           <p:cNvPr id="8" name="Rectangle 7">
             <a:extLst xmlns:a="http://schemas.openxmlformats.org/drawingml/2006/main">
               <a:ext uri="{FF2B5EF4-FFF2-40B4-BE49-F238E27FC236}">
-                <a16:creationId xmlns:a16="http://schemas.microsoft.com/office/drawing/2014/main" id="{C2EF8DCA-E716-467D-9FBA-5E5026F02E00}"/>
+                <a16:creationId xmlns:a16="http://schemas.microsoft.com/office/drawing/2014/main" id="{130DFD89-60BA-4099-A71A-543EC3A98419}"/>
               </a:ext>
             </a:extLst>
           </p:cNvPr>
@@ -19248,7 +19248,7 @@
           <p:cNvPr id="9" name="TextBox 8">
             <a:extLst xmlns:a="http://schemas.openxmlformats.org/drawingml/2006/main">
               <a:ext uri="{FF2B5EF4-FFF2-40B4-BE49-F238E27FC236}">
-                <a16:creationId xmlns:a16="http://schemas.microsoft.com/office/drawing/2014/main" id="{85520594-6A65-4C58-9CEF-27AB455205E6}"/>
+                <a16:creationId xmlns:a16="http://schemas.microsoft.com/office/drawing/2014/main" id="{81EB28DF-A36F-49DF-8A0F-AFAD59A7B23B}"/>
               </a:ext>
             </a:extLst>
           </p:cNvPr>
@@ -19303,7 +19303,7 @@
           <p:cNvPr id="10" name="TextBox 9">
             <a:extLst xmlns:a="http://schemas.openxmlformats.org/drawingml/2006/main">
               <a:ext uri="{FF2B5EF4-FFF2-40B4-BE49-F238E27FC236}">
-                <a16:creationId xmlns:a16="http://schemas.microsoft.com/office/drawing/2014/main" id="{4B118EE2-B8A7-436B-A475-DF8F6C5E1D8B}"/>
+                <a16:creationId xmlns:a16="http://schemas.microsoft.com/office/drawing/2014/main" id="{EA1E7BD7-D734-44A8-8527-6B4707303470}"/>
               </a:ext>
             </a:extLst>
           </p:cNvPr>
@@ -19356,7 +19356,7 @@
     </p:spTree>
     <p:extLst>
       <p:ext uri="{BB962C8B-B14F-4D97-AF65-F5344CB8AC3E}">
-        <p14:creationId xmlns:p14="http://schemas.microsoft.com/office/powerpoint/2010/main" val="1254958480"/>
+        <p14:creationId xmlns:p14="http://schemas.microsoft.com/office/powerpoint/2010/main" val="1861098532"/>
       </p:ext>
     </p:extLst>
   </p:cSld>
@@ -19384,7 +19384,7 @@
           <p:nvPr/>
         </p:nvPicPr>
         <p:blipFill>
-          <a:blip xmlns:r="http://schemas.openxmlformats.org/officeDocument/2006/relationships" xmlns:a="http://schemas.openxmlformats.org/drawingml/2006/main" r:embed="Ra4e8bd3aa88a44e8"/>
+          <a:blip xmlns:r="http://schemas.openxmlformats.org/officeDocument/2006/relationships" xmlns:a="http://schemas.openxmlformats.org/drawingml/2006/main" r:embed="R70bef2a86441428b"/>
           <a:stretch xmlns:a="http://schemas.openxmlformats.org/drawingml/2006/main">
             <a:fillRect l="0" t="0" r="0" b="0"/>
           </a:stretch>
@@ -19404,7 +19404,7 @@
           <p:cNvPr id="3" name="Rectangle 2">
             <a:extLst xmlns:a="http://schemas.openxmlformats.org/drawingml/2006/main">
               <a:ext uri="{FF2B5EF4-FFF2-40B4-BE49-F238E27FC236}">
-                <a16:creationId xmlns:a16="http://schemas.microsoft.com/office/drawing/2014/main" id="{3FEFE794-71E4-4F2A-A222-0D159D762E01}"/>
+                <a16:creationId xmlns:a16="http://schemas.microsoft.com/office/drawing/2014/main" id="{6AB2AF79-0BCF-4FDE-9C85-40F8F797E79D}"/>
               </a:ext>
             </a:extLst>
           </p:cNvPr>
@@ -19457,7 +19457,7 @@
           <p:cNvPr id="4" name="TextBox 3">
             <a:extLst xmlns:a="http://schemas.openxmlformats.org/drawingml/2006/main">
               <a:ext uri="{FF2B5EF4-FFF2-40B4-BE49-F238E27FC236}">
-                <a16:creationId xmlns:a16="http://schemas.microsoft.com/office/drawing/2014/main" id="{B95F55BD-D649-4570-B49F-DC4E03833F39}"/>
+                <a16:creationId xmlns:a16="http://schemas.microsoft.com/office/drawing/2014/main" id="{EB6ADDBE-C912-4245-8059-F620891C2142}"/>
               </a:ext>
             </a:extLst>
           </p:cNvPr>
@@ -19512,7 +19512,7 @@
           <p:cNvPr id="5" name="TextBox 4">
             <a:extLst xmlns:a="http://schemas.openxmlformats.org/drawingml/2006/main">
               <a:ext uri="{FF2B5EF4-FFF2-40B4-BE49-F238E27FC236}">
-                <a16:creationId xmlns:a16="http://schemas.microsoft.com/office/drawing/2014/main" id="{C243A085-9D44-48CE-8C03-B75D3EC9B62B}"/>
+                <a16:creationId xmlns:a16="http://schemas.microsoft.com/office/drawing/2014/main" id="{E49FB312-66AD-4190-8B13-F3013D00376B}"/>
               </a:ext>
             </a:extLst>
           </p:cNvPr>
@@ -19524,7 +19524,7 @@
         <p:spPr>
           <a:xfrm xmlns:a="http://schemas.openxmlformats.org/drawingml/2006/main">
             <a:off x="406400" y="1473200"/>
-            <a:ext cx="10477500" cy="536448"/>
+            <a:ext cx="10477500" cy="533400"/>
           </a:xfrm>
           <a:prstGeom xmlns:a="http://schemas.openxmlformats.org/drawingml/2006/main" prst="rect">
             <a:avLst/>
@@ -19542,14 +19542,14 @@
                 <a:spcPct val="110000"/>
               </a:lnSpc>
               <a:buNone/>
-              <a:defRPr sz="3200">
+              <a:defRPr sz="2400">
                 <a:latin typeface="Arial"/>
                 <a:ea typeface="Arial"/>
                 <a:cs typeface="Arial"/>
               </a:defRPr>
             </a:pPr>
             <a:r>
-              <a:rPr sz="3200" b="1" i="0">
+              <a:rPr sz="2400" b="1" i="0">
                 <a:solidFill>
                   <a:srgbClr val="102A43"/>
                 </a:solidFill>
@@ -19861,7 +19861,7 @@
           <p:cNvPr id="7" name="Rectangle 6">
             <a:extLst xmlns:a="http://schemas.openxmlformats.org/drawingml/2006/main">
               <a:ext uri="{FF2B5EF4-FFF2-40B4-BE49-F238E27FC236}">
-                <a16:creationId xmlns:a16="http://schemas.microsoft.com/office/drawing/2014/main" id="{E58F7AAC-CDEA-4F8D-8879-EA7124C24569}"/>
+                <a16:creationId xmlns:a16="http://schemas.microsoft.com/office/drawing/2014/main" id="{E3C6509B-ACEF-4364-B492-EB41A5EEC0A2}"/>
               </a:ext>
             </a:extLst>
           </p:cNvPr>
@@ -19914,7 +19914,7 @@
           <p:cNvPr id="8" name="Rectangle 7">
             <a:extLst xmlns:a="http://schemas.openxmlformats.org/drawingml/2006/main">
               <a:ext uri="{FF2B5EF4-FFF2-40B4-BE49-F238E27FC236}">
-                <a16:creationId xmlns:a16="http://schemas.microsoft.com/office/drawing/2014/main" id="{8E09AC0D-F25B-4EBA-87C3-C50012C63F2F}"/>
+                <a16:creationId xmlns:a16="http://schemas.microsoft.com/office/drawing/2014/main" id="{9DCEB169-03A6-4DC6-8091-E3A2E8FB64A1}"/>
               </a:ext>
             </a:extLst>
           </p:cNvPr>
@@ -19967,7 +19967,7 @@
           <p:cNvPr id="9" name="TextBox 8">
             <a:extLst xmlns:a="http://schemas.openxmlformats.org/drawingml/2006/main">
               <a:ext uri="{FF2B5EF4-FFF2-40B4-BE49-F238E27FC236}">
-                <a16:creationId xmlns:a16="http://schemas.microsoft.com/office/drawing/2014/main" id="{53EDB69D-C11F-482C-B8C7-91E2BF2F9146}"/>
+                <a16:creationId xmlns:a16="http://schemas.microsoft.com/office/drawing/2014/main" id="{B37AAA57-9B27-4492-A22B-1050B4E7157F}"/>
               </a:ext>
             </a:extLst>
           </p:cNvPr>
@@ -20022,7 +20022,7 @@
           <p:cNvPr id="10" name="TextBox 9">
             <a:extLst xmlns:a="http://schemas.openxmlformats.org/drawingml/2006/main">
               <a:ext uri="{FF2B5EF4-FFF2-40B4-BE49-F238E27FC236}">
-                <a16:creationId xmlns:a16="http://schemas.microsoft.com/office/drawing/2014/main" id="{5555B6F3-0DD4-407A-BE24-0A25140F299A}"/>
+                <a16:creationId xmlns:a16="http://schemas.microsoft.com/office/drawing/2014/main" id="{BF2FB8F0-F5AD-4259-A912-04792330232A}"/>
               </a:ext>
             </a:extLst>
           </p:cNvPr>
@@ -20075,7 +20075,7 @@
     </p:spTree>
     <p:extLst>
       <p:ext uri="{BB962C8B-B14F-4D97-AF65-F5344CB8AC3E}">
-        <p14:creationId xmlns:p14="http://schemas.microsoft.com/office/powerpoint/2010/main" val="1643882200"/>
+        <p14:creationId xmlns:p14="http://schemas.microsoft.com/office/powerpoint/2010/main" val="1730758347"/>
       </p:ext>
     </p:extLst>
   </p:cSld>
@@ -20103,7 +20103,7 @@
           <p:nvPr/>
         </p:nvPicPr>
         <p:blipFill>
-          <a:blip xmlns:r="http://schemas.openxmlformats.org/officeDocument/2006/relationships" xmlns:a="http://schemas.openxmlformats.org/drawingml/2006/main" r:embed="R637bcf4be47b4ec7"/>
+          <a:blip xmlns:r="http://schemas.openxmlformats.org/officeDocument/2006/relationships" xmlns:a="http://schemas.openxmlformats.org/drawingml/2006/main" r:embed="Re2ddf924f23543ae"/>
           <a:stretch xmlns:a="http://schemas.openxmlformats.org/drawingml/2006/main">
             <a:fillRect l="0" t="0" r="0" b="0"/>
           </a:stretch>
@@ -20123,7 +20123,7 @@
           <p:cNvPr id="3" name="Rectangle 2">
             <a:extLst xmlns:a="http://schemas.openxmlformats.org/drawingml/2006/main">
               <a:ext uri="{FF2B5EF4-FFF2-40B4-BE49-F238E27FC236}">
-                <a16:creationId xmlns:a16="http://schemas.microsoft.com/office/drawing/2014/main" id="{D353CDDD-56F1-4504-90A4-E6C6FCC7E597}"/>
+                <a16:creationId xmlns:a16="http://schemas.microsoft.com/office/drawing/2014/main" id="{3987DEF1-0707-46D5-9313-EDEE045AF43F}"/>
               </a:ext>
             </a:extLst>
           </p:cNvPr>
@@ -20176,7 +20176,7 @@
           <p:cNvPr id="4" name="TextBox 3">
             <a:extLst xmlns:a="http://schemas.openxmlformats.org/drawingml/2006/main">
               <a:ext uri="{FF2B5EF4-FFF2-40B4-BE49-F238E27FC236}">
-                <a16:creationId xmlns:a16="http://schemas.microsoft.com/office/drawing/2014/main" id="{0093C643-67DD-4527-82D6-9139E76A2CB2}"/>
+                <a16:creationId xmlns:a16="http://schemas.microsoft.com/office/drawing/2014/main" id="{E7AF2DBF-FE16-4186-91AA-10BCF55AD0FC}"/>
               </a:ext>
             </a:extLst>
           </p:cNvPr>
@@ -20231,7 +20231,7 @@
           <p:cNvPr id="5" name="TextBox 4">
             <a:extLst xmlns:a="http://schemas.openxmlformats.org/drawingml/2006/main">
               <a:ext uri="{FF2B5EF4-FFF2-40B4-BE49-F238E27FC236}">
-                <a16:creationId xmlns:a16="http://schemas.microsoft.com/office/drawing/2014/main" id="{8151A1AD-80C3-4B63-873A-69E39AE7C80A}"/>
+                <a16:creationId xmlns:a16="http://schemas.microsoft.com/office/drawing/2014/main" id="{C2DB01A6-4D42-4CC6-B723-2617AE267C13}"/>
               </a:ext>
             </a:extLst>
           </p:cNvPr>
@@ -20243,7 +20243,7 @@
         <p:spPr>
           <a:xfrm xmlns:a="http://schemas.openxmlformats.org/drawingml/2006/main">
             <a:off x="406400" y="1473200"/>
-            <a:ext cx="10477500" cy="536448"/>
+            <a:ext cx="10477500" cy="533400"/>
           </a:xfrm>
           <a:prstGeom xmlns:a="http://schemas.openxmlformats.org/drawingml/2006/main" prst="rect">
             <a:avLst/>
@@ -20261,14 +20261,14 @@
                 <a:spcPct val="110000"/>
               </a:lnSpc>
               <a:buNone/>
-              <a:defRPr sz="3200">
+              <a:defRPr sz="2400">
                 <a:latin typeface="Arial"/>
                 <a:ea typeface="Arial"/>
                 <a:cs typeface="Arial"/>
               </a:defRPr>
             </a:pPr>
             <a:r>
-              <a:rPr sz="3200" b="1" i="0">
+              <a:rPr sz="2400" b="1" i="0">
                 <a:solidFill>
                   <a:srgbClr val="102A43"/>
                 </a:solidFill>
@@ -20580,7 +20580,7 @@
           <p:cNvPr id="7" name="Rectangle 6">
             <a:extLst xmlns:a="http://schemas.openxmlformats.org/drawingml/2006/main">
               <a:ext uri="{FF2B5EF4-FFF2-40B4-BE49-F238E27FC236}">
-                <a16:creationId xmlns:a16="http://schemas.microsoft.com/office/drawing/2014/main" id="{AE342F68-F0E5-4CA2-B356-E8090902E035}"/>
+                <a16:creationId xmlns:a16="http://schemas.microsoft.com/office/drawing/2014/main" id="{2F70913F-F0C7-4BE4-B9BF-BD651054D753}"/>
               </a:ext>
             </a:extLst>
           </p:cNvPr>
@@ -20633,7 +20633,7 @@
           <p:cNvPr id="8" name="Rectangle 7">
             <a:extLst xmlns:a="http://schemas.openxmlformats.org/drawingml/2006/main">
               <a:ext uri="{FF2B5EF4-FFF2-40B4-BE49-F238E27FC236}">
-                <a16:creationId xmlns:a16="http://schemas.microsoft.com/office/drawing/2014/main" id="{F34F137E-94D6-4A69-8647-0BCCF62CFBAD}"/>
+                <a16:creationId xmlns:a16="http://schemas.microsoft.com/office/drawing/2014/main" id="{449CAFC0-C647-4C40-B239-242006DBFBE5}"/>
               </a:ext>
             </a:extLst>
           </p:cNvPr>
@@ -20686,7 +20686,7 @@
           <p:cNvPr id="9" name="TextBox 8">
             <a:extLst xmlns:a="http://schemas.openxmlformats.org/drawingml/2006/main">
               <a:ext uri="{FF2B5EF4-FFF2-40B4-BE49-F238E27FC236}">
-                <a16:creationId xmlns:a16="http://schemas.microsoft.com/office/drawing/2014/main" id="{5A4574E5-69AC-4C50-B47B-374823236EE3}"/>
+                <a16:creationId xmlns:a16="http://schemas.microsoft.com/office/drawing/2014/main" id="{AB6E991C-EE42-492F-BF35-CEC9DE7C45D6}"/>
               </a:ext>
             </a:extLst>
           </p:cNvPr>
@@ -20741,7 +20741,7 @@
           <p:cNvPr id="10" name="TextBox 9">
             <a:extLst xmlns:a="http://schemas.openxmlformats.org/drawingml/2006/main">
               <a:ext uri="{FF2B5EF4-FFF2-40B4-BE49-F238E27FC236}">
-                <a16:creationId xmlns:a16="http://schemas.microsoft.com/office/drawing/2014/main" id="{30FA7AF3-BC97-4A7F-B085-7054044A68A9}"/>
+                <a16:creationId xmlns:a16="http://schemas.microsoft.com/office/drawing/2014/main" id="{836CC166-DA18-4FAC-AF4E-4A3CC10AD753}"/>
               </a:ext>
             </a:extLst>
           </p:cNvPr>
@@ -20794,7 +20794,7 @@
     </p:spTree>
     <p:extLst>
       <p:ext uri="{BB962C8B-B14F-4D97-AF65-F5344CB8AC3E}">
-        <p14:creationId xmlns:p14="http://schemas.microsoft.com/office/powerpoint/2010/main" val="880804159"/>
+        <p14:creationId xmlns:p14="http://schemas.microsoft.com/office/powerpoint/2010/main" val="1850487246"/>
       </p:ext>
     </p:extLst>
   </p:cSld>
@@ -20822,7 +20822,7 @@
           <p:nvPr/>
         </p:nvPicPr>
         <p:blipFill>
-          <a:blip xmlns:r="http://schemas.openxmlformats.org/officeDocument/2006/relationships" xmlns:a="http://schemas.openxmlformats.org/drawingml/2006/main" r:embed="R2f9677f193cb4b45"/>
+          <a:blip xmlns:r="http://schemas.openxmlformats.org/officeDocument/2006/relationships" xmlns:a="http://schemas.openxmlformats.org/drawingml/2006/main" r:embed="Rf9f0b07b593d49dc"/>
           <a:stretch xmlns:a="http://schemas.openxmlformats.org/drawingml/2006/main">
             <a:fillRect l="0" t="0" r="0" b="0"/>
           </a:stretch>
@@ -20842,7 +20842,7 @@
           <p:cNvPr id="3" name="Rectangle 2">
             <a:extLst xmlns:a="http://schemas.openxmlformats.org/drawingml/2006/main">
               <a:ext uri="{FF2B5EF4-FFF2-40B4-BE49-F238E27FC236}">
-                <a16:creationId xmlns:a16="http://schemas.microsoft.com/office/drawing/2014/main" id="{4F2A9E09-69AC-407F-B93A-AD5C3C352191}"/>
+                <a16:creationId xmlns:a16="http://schemas.microsoft.com/office/drawing/2014/main" id="{D3E0FD5C-650A-41BF-9D85-4E993C427388}"/>
               </a:ext>
             </a:extLst>
           </p:cNvPr>
@@ -20895,7 +20895,7 @@
           <p:cNvPr id="4" name="TextBox 3">
             <a:extLst xmlns:a="http://schemas.openxmlformats.org/drawingml/2006/main">
               <a:ext uri="{FF2B5EF4-FFF2-40B4-BE49-F238E27FC236}">
-                <a16:creationId xmlns:a16="http://schemas.microsoft.com/office/drawing/2014/main" id="{5788D930-9D87-490B-AC05-7C4C9218B6A2}"/>
+                <a16:creationId xmlns:a16="http://schemas.microsoft.com/office/drawing/2014/main" id="{F0024F65-C011-4531-9CC8-8C9C53BBCDFC}"/>
               </a:ext>
             </a:extLst>
           </p:cNvPr>
@@ -20950,7 +20950,7 @@
           <p:cNvPr id="5" name="TextBox 4">
             <a:extLst xmlns:a="http://schemas.openxmlformats.org/drawingml/2006/main">
               <a:ext uri="{FF2B5EF4-FFF2-40B4-BE49-F238E27FC236}">
-                <a16:creationId xmlns:a16="http://schemas.microsoft.com/office/drawing/2014/main" id="{47754E5F-BC1E-41F5-8CCD-A0558ED32C0D}"/>
+                <a16:creationId xmlns:a16="http://schemas.microsoft.com/office/drawing/2014/main" id="{1E858FB0-77DC-473E-9856-7FAFD833CFB0}"/>
               </a:ext>
             </a:extLst>
           </p:cNvPr>
@@ -20962,7 +20962,7 @@
         <p:spPr>
           <a:xfrm xmlns:a="http://schemas.openxmlformats.org/drawingml/2006/main">
             <a:off x="406400" y="1473200"/>
-            <a:ext cx="10477500" cy="536448"/>
+            <a:ext cx="10477500" cy="533400"/>
           </a:xfrm>
           <a:prstGeom xmlns:a="http://schemas.openxmlformats.org/drawingml/2006/main" prst="rect">
             <a:avLst/>
@@ -20980,14 +20980,14 @@
                 <a:spcPct val="110000"/>
               </a:lnSpc>
               <a:buNone/>
-              <a:defRPr sz="3200">
+              <a:defRPr sz="2400">
                 <a:latin typeface="Arial"/>
                 <a:ea typeface="Arial"/>
                 <a:cs typeface="Arial"/>
               </a:defRPr>
             </a:pPr>
             <a:r>
-              <a:rPr sz="3200" b="1" i="0">
+              <a:rPr sz="2400" b="1" i="0">
                 <a:solidFill>
                   <a:srgbClr val="102A43"/>
                 </a:solidFill>
@@ -21245,7 +21245,7 @@
           <p:cNvPr id="7" name="Rectangle 6">
             <a:extLst xmlns:a="http://schemas.openxmlformats.org/drawingml/2006/main">
               <a:ext uri="{FF2B5EF4-FFF2-40B4-BE49-F238E27FC236}">
-                <a16:creationId xmlns:a16="http://schemas.microsoft.com/office/drawing/2014/main" id="{1D2995CD-1A5E-4071-A2CC-18D97CB84581}"/>
+                <a16:creationId xmlns:a16="http://schemas.microsoft.com/office/drawing/2014/main" id="{2B078939-35D6-4211-8058-9AAA15A3FD06}"/>
               </a:ext>
             </a:extLst>
           </p:cNvPr>
@@ -21298,7 +21298,7 @@
           <p:cNvPr id="8" name="Rectangle 7">
             <a:extLst xmlns:a="http://schemas.openxmlformats.org/drawingml/2006/main">
               <a:ext uri="{FF2B5EF4-FFF2-40B4-BE49-F238E27FC236}">
-                <a16:creationId xmlns:a16="http://schemas.microsoft.com/office/drawing/2014/main" id="{01442C76-B7F1-4B46-B11C-88812EC2C847}"/>
+                <a16:creationId xmlns:a16="http://schemas.microsoft.com/office/drawing/2014/main" id="{8C6CA73A-FEE1-4F0D-AC8F-B28126BAE8FB}"/>
               </a:ext>
             </a:extLst>
           </p:cNvPr>
@@ -21351,7 +21351,7 @@
           <p:cNvPr id="9" name="TextBox 8">
             <a:extLst xmlns:a="http://schemas.openxmlformats.org/drawingml/2006/main">
               <a:ext uri="{FF2B5EF4-FFF2-40B4-BE49-F238E27FC236}">
-                <a16:creationId xmlns:a16="http://schemas.microsoft.com/office/drawing/2014/main" id="{BB80A08D-AA50-4AE0-95FE-C171FEB66766}"/>
+                <a16:creationId xmlns:a16="http://schemas.microsoft.com/office/drawing/2014/main" id="{84708F36-BC2B-48B9-820C-C2588E28B8D2}"/>
               </a:ext>
             </a:extLst>
           </p:cNvPr>
@@ -21406,7 +21406,7 @@
           <p:cNvPr id="10" name="TextBox 9">
             <a:extLst xmlns:a="http://schemas.openxmlformats.org/drawingml/2006/main">
               <a:ext uri="{FF2B5EF4-FFF2-40B4-BE49-F238E27FC236}">
-                <a16:creationId xmlns:a16="http://schemas.microsoft.com/office/drawing/2014/main" id="{EAB71AB5-E99D-4392-9C66-C2CB8530EA21}"/>
+                <a16:creationId xmlns:a16="http://schemas.microsoft.com/office/drawing/2014/main" id="{8B819FE2-966C-42D3-B641-978544AFEF42}"/>
               </a:ext>
             </a:extLst>
           </p:cNvPr>
@@ -21459,7 +21459,7 @@
     </p:spTree>
     <p:extLst>
       <p:ext uri="{BB962C8B-B14F-4D97-AF65-F5344CB8AC3E}">
-        <p14:creationId xmlns:p14="http://schemas.microsoft.com/office/powerpoint/2010/main" val="1043340758"/>
+        <p14:creationId xmlns:p14="http://schemas.microsoft.com/office/powerpoint/2010/main" val="334491444"/>
       </p:ext>
     </p:extLst>
   </p:cSld>
@@ -21487,7 +21487,7 @@
           <p:nvPr/>
         </p:nvPicPr>
         <p:blipFill>
-          <a:blip xmlns:r="http://schemas.openxmlformats.org/officeDocument/2006/relationships" xmlns:a="http://schemas.openxmlformats.org/drawingml/2006/main" r:embed="R081a1e7ac59f4fe9"/>
+          <a:blip xmlns:r="http://schemas.openxmlformats.org/officeDocument/2006/relationships" xmlns:a="http://schemas.openxmlformats.org/drawingml/2006/main" r:embed="R53d2282a738c4aa5"/>
           <a:stretch xmlns:a="http://schemas.openxmlformats.org/drawingml/2006/main">
             <a:fillRect l="0" t="0" r="0" b="0"/>
           </a:stretch>
@@ -21507,7 +21507,7 @@
           <p:cNvPr id="3" name="Rectangle 2">
             <a:extLst xmlns:a="http://schemas.openxmlformats.org/drawingml/2006/main">
               <a:ext uri="{FF2B5EF4-FFF2-40B4-BE49-F238E27FC236}">
-                <a16:creationId xmlns:a16="http://schemas.microsoft.com/office/drawing/2014/main" id="{22525A74-908B-4DEA-B5AC-D0EB8E73DFBB}"/>
+                <a16:creationId xmlns:a16="http://schemas.microsoft.com/office/drawing/2014/main" id="{99004289-7B4E-4713-8648-E5AAFED89C97}"/>
               </a:ext>
             </a:extLst>
           </p:cNvPr>
@@ -21560,7 +21560,7 @@
           <p:cNvPr id="4" name="TextBox 3">
             <a:extLst xmlns:a="http://schemas.openxmlformats.org/drawingml/2006/main">
               <a:ext uri="{FF2B5EF4-FFF2-40B4-BE49-F238E27FC236}">
-                <a16:creationId xmlns:a16="http://schemas.microsoft.com/office/drawing/2014/main" id="{7857AF5D-A934-4057-BE97-06E0A7B8C920}"/>
+                <a16:creationId xmlns:a16="http://schemas.microsoft.com/office/drawing/2014/main" id="{61D9F96A-86A1-46D7-A45C-AA3DB7F8FE2C}"/>
               </a:ext>
             </a:extLst>
           </p:cNvPr>
@@ -21615,7 +21615,7 @@
           <p:cNvPr id="5" name="TextBox 4">
             <a:extLst xmlns:a="http://schemas.openxmlformats.org/drawingml/2006/main">
               <a:ext uri="{FF2B5EF4-FFF2-40B4-BE49-F238E27FC236}">
-                <a16:creationId xmlns:a16="http://schemas.microsoft.com/office/drawing/2014/main" id="{A6F97781-C476-4B15-995E-462CA01E07C6}"/>
+                <a16:creationId xmlns:a16="http://schemas.microsoft.com/office/drawing/2014/main" id="{FEFCA80B-7F4A-4AB0-9530-C10882F66F48}"/>
               </a:ext>
             </a:extLst>
           </p:cNvPr>
@@ -21645,14 +21645,14 @@
                 <a:spcPct val="110000"/>
               </a:lnSpc>
               <a:buNone/>
-              <a:defRPr sz="3200">
+              <a:defRPr sz="2400">
                 <a:latin typeface="Arial"/>
                 <a:ea typeface="Arial"/>
                 <a:cs typeface="Arial"/>
               </a:defRPr>
             </a:pPr>
             <a:r>
-              <a:rPr sz="3200" b="1" i="0">
+              <a:rPr sz="2400" b="1" i="0">
                 <a:solidFill>
                   <a:srgbClr val="102A43"/>
                 </a:solidFill>
@@ -21670,7 +21670,7 @@
           <p:cNvPr id="6" name="TextBox 5">
             <a:extLst xmlns:a="http://schemas.openxmlformats.org/drawingml/2006/main">
               <a:ext uri="{FF2B5EF4-FFF2-40B4-BE49-F238E27FC236}">
-                <a16:creationId xmlns:a16="http://schemas.microsoft.com/office/drawing/2014/main" id="{2F2079BC-12CC-48BB-9998-ACA10B723EA4}"/>
+                <a16:creationId xmlns:a16="http://schemas.microsoft.com/office/drawing/2014/main" id="{C6CEC304-C393-49F5-A440-14F756C6F6CC}"/>
               </a:ext>
             </a:extLst>
           </p:cNvPr>
@@ -21836,7 +21836,7 @@
           <p:cNvPr id="7" name="Rectangle 6">
             <a:extLst xmlns:a="http://schemas.openxmlformats.org/drawingml/2006/main">
               <a:ext uri="{FF2B5EF4-FFF2-40B4-BE49-F238E27FC236}">
-                <a16:creationId xmlns:a16="http://schemas.microsoft.com/office/drawing/2014/main" id="{B9C45D9D-A8A0-48A6-96E5-217195A6871C}"/>
+                <a16:creationId xmlns:a16="http://schemas.microsoft.com/office/drawing/2014/main" id="{6C2541E6-C675-4BF4-A2F8-D8409DCEE798}"/>
               </a:ext>
             </a:extLst>
           </p:cNvPr>
@@ -21889,7 +21889,7 @@
           <p:cNvPr id="8" name="Rectangle 7">
             <a:extLst xmlns:a="http://schemas.openxmlformats.org/drawingml/2006/main">
               <a:ext uri="{FF2B5EF4-FFF2-40B4-BE49-F238E27FC236}">
-                <a16:creationId xmlns:a16="http://schemas.microsoft.com/office/drawing/2014/main" id="{65EDB572-872E-4620-BD06-B31CB26A76D7}"/>
+                <a16:creationId xmlns:a16="http://schemas.microsoft.com/office/drawing/2014/main" id="{71288AC0-D208-41E7-A916-E264759FFA80}"/>
               </a:ext>
             </a:extLst>
           </p:cNvPr>
@@ -21942,7 +21942,7 @@
           <p:cNvPr id="9" name="TextBox 8">
             <a:extLst xmlns:a="http://schemas.openxmlformats.org/drawingml/2006/main">
               <a:ext uri="{FF2B5EF4-FFF2-40B4-BE49-F238E27FC236}">
-                <a16:creationId xmlns:a16="http://schemas.microsoft.com/office/drawing/2014/main" id="{A1E47ABA-8512-40F4-AE64-B2CF810AC4CC}"/>
+                <a16:creationId xmlns:a16="http://schemas.microsoft.com/office/drawing/2014/main" id="{A9311551-611B-4487-9642-F9ACD3EB8998}"/>
               </a:ext>
             </a:extLst>
           </p:cNvPr>
@@ -21997,7 +21997,7 @@
           <p:cNvPr id="10" name="TextBox 9">
             <a:extLst xmlns:a="http://schemas.openxmlformats.org/drawingml/2006/main">
               <a:ext uri="{FF2B5EF4-FFF2-40B4-BE49-F238E27FC236}">
-                <a16:creationId xmlns:a16="http://schemas.microsoft.com/office/drawing/2014/main" id="{CACCA7E1-6A7C-47A2-8F48-829BBB10727B}"/>
+                <a16:creationId xmlns:a16="http://schemas.microsoft.com/office/drawing/2014/main" id="{B33C18EB-9E23-4FBD-B793-C0E542024CF1}"/>
               </a:ext>
             </a:extLst>
           </p:cNvPr>
@@ -22050,7 +22050,7 @@
     </p:spTree>
     <p:extLst>
       <p:ext uri="{BB962C8B-B14F-4D97-AF65-F5344CB8AC3E}">
-        <p14:creationId xmlns:p14="http://schemas.microsoft.com/office/powerpoint/2010/main" val="2104398574"/>
+        <p14:creationId xmlns:p14="http://schemas.microsoft.com/office/powerpoint/2010/main" val="1508672839"/>
       </p:ext>
     </p:extLst>
   </p:cSld>
@@ -22078,7 +22078,7 @@
           <p:nvPr/>
         </p:nvPicPr>
         <p:blipFill>
-          <a:blip xmlns:r="http://schemas.openxmlformats.org/officeDocument/2006/relationships" xmlns:a="http://schemas.openxmlformats.org/drawingml/2006/main" r:embed="R84ddd73aadfc4213"/>
+          <a:blip xmlns:r="http://schemas.openxmlformats.org/officeDocument/2006/relationships" xmlns:a="http://schemas.openxmlformats.org/drawingml/2006/main" r:embed="R7db963c71cc24462"/>
           <a:stretch xmlns:a="http://schemas.openxmlformats.org/drawingml/2006/main">
             <a:fillRect l="0" t="0" r="0" b="0"/>
           </a:stretch>
@@ -22098,7 +22098,7 @@
           <p:cNvPr id="3" name="Rectangle 2">
             <a:extLst xmlns:a="http://schemas.openxmlformats.org/drawingml/2006/main">
               <a:ext uri="{FF2B5EF4-FFF2-40B4-BE49-F238E27FC236}">
-                <a16:creationId xmlns:a16="http://schemas.microsoft.com/office/drawing/2014/main" id="{FE42386E-F44F-4C43-8657-1AAD10406C76}"/>
+                <a16:creationId xmlns:a16="http://schemas.microsoft.com/office/drawing/2014/main" id="{02D03E54-3094-4CF0-838B-1C472B2E5971}"/>
               </a:ext>
             </a:extLst>
           </p:cNvPr>
@@ -22151,7 +22151,7 @@
           <p:cNvPr id="4" name="TextBox 3">
             <a:extLst xmlns:a="http://schemas.openxmlformats.org/drawingml/2006/main">
               <a:ext uri="{FF2B5EF4-FFF2-40B4-BE49-F238E27FC236}">
-                <a16:creationId xmlns:a16="http://schemas.microsoft.com/office/drawing/2014/main" id="{AFF56B87-849A-4F25-9B3C-7DD0AEA2EFB1}"/>
+                <a16:creationId xmlns:a16="http://schemas.microsoft.com/office/drawing/2014/main" id="{3C1C678F-D758-4D7B-97B3-A4186FDAB914}"/>
               </a:ext>
             </a:extLst>
           </p:cNvPr>
@@ -22206,7 +22206,7 @@
           <p:cNvPr id="5" name="TextBox 4">
             <a:extLst xmlns:a="http://schemas.openxmlformats.org/drawingml/2006/main">
               <a:ext uri="{FF2B5EF4-FFF2-40B4-BE49-F238E27FC236}">
-                <a16:creationId xmlns:a16="http://schemas.microsoft.com/office/drawing/2014/main" id="{A2FD7F62-A27D-402E-B906-62A894C44146}"/>
+                <a16:creationId xmlns:a16="http://schemas.microsoft.com/office/drawing/2014/main" id="{86326868-C974-4CB2-A8E9-30C3799D0CE9}"/>
               </a:ext>
             </a:extLst>
           </p:cNvPr>
@@ -22236,14 +22236,14 @@
                 <a:spcPct val="110000"/>
               </a:lnSpc>
               <a:buNone/>
-              <a:defRPr sz="3200">
+              <a:defRPr sz="2400">
                 <a:latin typeface="Arial"/>
                 <a:ea typeface="Arial"/>
                 <a:cs typeface="Arial"/>
               </a:defRPr>
             </a:pPr>
             <a:r>
-              <a:rPr sz="3200" b="1" i="0">
+              <a:rPr sz="2400" b="1" i="0">
                 <a:solidFill>
                   <a:srgbClr val="102A43"/>
                 </a:solidFill>
@@ -22261,7 +22261,7 @@
           <p:cNvPr id="6" name="TextBox 5">
             <a:extLst xmlns:a="http://schemas.openxmlformats.org/drawingml/2006/main">
               <a:ext uri="{FF2B5EF4-FFF2-40B4-BE49-F238E27FC236}">
-                <a16:creationId xmlns:a16="http://schemas.microsoft.com/office/drawing/2014/main" id="{B4EDB26E-36CA-4342-B848-DC4A1DC1CD35}"/>
+                <a16:creationId xmlns:a16="http://schemas.microsoft.com/office/drawing/2014/main" id="{0448F73E-B50E-4545-8E97-F8978E23BB80}"/>
               </a:ext>
             </a:extLst>
           </p:cNvPr>
@@ -22373,7 +22373,7 @@
           <p:cNvPr id="7" name="Rectangle 6">
             <a:extLst xmlns:a="http://schemas.openxmlformats.org/drawingml/2006/main">
               <a:ext uri="{FF2B5EF4-FFF2-40B4-BE49-F238E27FC236}">
-                <a16:creationId xmlns:a16="http://schemas.microsoft.com/office/drawing/2014/main" id="{070B1369-3066-46F1-87A8-21B6FFCB6433}"/>
+                <a16:creationId xmlns:a16="http://schemas.microsoft.com/office/drawing/2014/main" id="{1890A15A-A344-485D-AB9A-41A3867814F3}"/>
               </a:ext>
             </a:extLst>
           </p:cNvPr>
@@ -22426,7 +22426,7 @@
           <p:cNvPr id="8" name="Rectangle 7">
             <a:extLst xmlns:a="http://schemas.openxmlformats.org/drawingml/2006/main">
               <a:ext uri="{FF2B5EF4-FFF2-40B4-BE49-F238E27FC236}">
-                <a16:creationId xmlns:a16="http://schemas.microsoft.com/office/drawing/2014/main" id="{FF242952-3F1D-4DF3-945F-272FD6A57E0F}"/>
+                <a16:creationId xmlns:a16="http://schemas.microsoft.com/office/drawing/2014/main" id="{C605696F-8C3F-46AC-8A90-469417E641F9}"/>
               </a:ext>
             </a:extLst>
           </p:cNvPr>
@@ -22479,7 +22479,7 @@
           <p:cNvPr id="9" name="TextBox 8">
             <a:extLst xmlns:a="http://schemas.openxmlformats.org/drawingml/2006/main">
               <a:ext uri="{FF2B5EF4-FFF2-40B4-BE49-F238E27FC236}">
-                <a16:creationId xmlns:a16="http://schemas.microsoft.com/office/drawing/2014/main" id="{4D532712-1941-4163-B0A8-B9E3BCF01162}"/>
+                <a16:creationId xmlns:a16="http://schemas.microsoft.com/office/drawing/2014/main" id="{AB443E15-BCD9-4184-8502-FBC475C6C71C}"/>
               </a:ext>
             </a:extLst>
           </p:cNvPr>
@@ -22534,7 +22534,7 @@
           <p:cNvPr id="10" name="TextBox 9">
             <a:extLst xmlns:a="http://schemas.openxmlformats.org/drawingml/2006/main">
               <a:ext uri="{FF2B5EF4-FFF2-40B4-BE49-F238E27FC236}">
-                <a16:creationId xmlns:a16="http://schemas.microsoft.com/office/drawing/2014/main" id="{252BFCBB-7D3F-4EB8-88DE-A9F8288AB1FF}"/>
+                <a16:creationId xmlns:a16="http://schemas.microsoft.com/office/drawing/2014/main" id="{DACB0261-8DFC-4433-839A-110C93837EF4}"/>
               </a:ext>
             </a:extLst>
           </p:cNvPr>
@@ -22587,7 +22587,7 @@
     </p:spTree>
     <p:extLst>
       <p:ext uri="{BB962C8B-B14F-4D97-AF65-F5344CB8AC3E}">
-        <p14:creationId xmlns:p14="http://schemas.microsoft.com/office/powerpoint/2010/main" val="1699292491"/>
+        <p14:creationId xmlns:p14="http://schemas.microsoft.com/office/powerpoint/2010/main" val="492510382"/>
       </p:ext>
     </p:extLst>
   </p:cSld>
@@ -22611,7 +22611,7 @@
           <p:cNvPr id="2" name="Rectangle 1">
             <a:extLst xmlns:a="http://schemas.openxmlformats.org/drawingml/2006/main">
               <a:ext uri="{FF2B5EF4-FFF2-40B4-BE49-F238E27FC236}">
-                <a16:creationId xmlns:a16="http://schemas.microsoft.com/office/drawing/2014/main" id="{4AC666F2-2826-4FD4-9979-961CAA7B8E7F}"/>
+                <a16:creationId xmlns:a16="http://schemas.microsoft.com/office/drawing/2014/main" id="{0BEC1D31-2FDC-489E-B4AE-23A38329D278}"/>
               </a:ext>
             </a:extLst>
           </p:cNvPr>
@@ -22664,7 +22664,7 @@
           <p:cNvPr id="3" name="TextBox 2">
             <a:extLst xmlns:a="http://schemas.openxmlformats.org/drawingml/2006/main">
               <a:ext uri="{FF2B5EF4-FFF2-40B4-BE49-F238E27FC236}">
-                <a16:creationId xmlns:a16="http://schemas.microsoft.com/office/drawing/2014/main" id="{5C8C36C1-FBA3-48B8-8470-06B2A6FF13A2}"/>
+                <a16:creationId xmlns:a16="http://schemas.microsoft.com/office/drawing/2014/main" id="{703FC37C-9F8E-4AA1-B2CD-ABCAA1F72F14}"/>
               </a:ext>
             </a:extLst>
           </p:cNvPr>
@@ -22694,14 +22694,14 @@
                 <a:spcPct val="115000"/>
               </a:lnSpc>
               <a:buNone/>
-              <a:defRPr sz="3200">
+              <a:defRPr sz="2400">
                 <a:latin typeface="Arial"/>
                 <a:ea typeface="Arial"/>
                 <a:cs typeface="Arial"/>
               </a:defRPr>
             </a:pPr>
             <a:r>
-              <a:rPr sz="3200" b="1" i="0">
+              <a:rPr sz="2400" b="1" i="0">
                 <a:solidFill>
                   <a:srgbClr val="E6003C"/>
                 </a:solidFill>
@@ -22719,7 +22719,7 @@
           <p:cNvPr id="4" name="TextBox 3">
             <a:extLst xmlns:a="http://schemas.openxmlformats.org/drawingml/2006/main">
               <a:ext uri="{FF2B5EF4-FFF2-40B4-BE49-F238E27FC236}">
-                <a16:creationId xmlns:a16="http://schemas.microsoft.com/office/drawing/2014/main" id="{6FC76F7D-4B7D-475B-9C21-26B2AE8995D4}"/>
+                <a16:creationId xmlns:a16="http://schemas.microsoft.com/office/drawing/2014/main" id="{0C42002B-B6E0-453C-AB3C-AC21E3ABE618}"/>
               </a:ext>
             </a:extLst>
           </p:cNvPr>
@@ -22774,7 +22774,7 @@
           <p:cNvPr id="5" name="TextBox 4">
             <a:extLst xmlns:a="http://schemas.openxmlformats.org/drawingml/2006/main">
               <a:ext uri="{FF2B5EF4-FFF2-40B4-BE49-F238E27FC236}">
-                <a16:creationId xmlns:a16="http://schemas.microsoft.com/office/drawing/2014/main" id="{14C1AD4F-6487-4B5B-8566-8BF3B46E6F97}"/>
+                <a16:creationId xmlns:a16="http://schemas.microsoft.com/office/drawing/2014/main" id="{DCB18E78-8007-45B6-BEAF-B5E78AE6BE6B}"/>
               </a:ext>
             </a:extLst>
           </p:cNvPr>
@@ -22829,7 +22829,7 @@
           <p:cNvPr id="6" name="Rectangle 5">
             <a:extLst xmlns:a="http://schemas.openxmlformats.org/drawingml/2006/main">
               <a:ext uri="{FF2B5EF4-FFF2-40B4-BE49-F238E27FC236}">
-                <a16:creationId xmlns:a16="http://schemas.microsoft.com/office/drawing/2014/main" id="{42E4FF27-5EC4-47F6-8C93-EF7808AEEE65}"/>
+                <a16:creationId xmlns:a16="http://schemas.microsoft.com/office/drawing/2014/main" id="{B7B0B65F-B8B9-44C6-A069-81567BB31A0B}"/>
               </a:ext>
             </a:extLst>
           </p:cNvPr>
@@ -22880,7 +22880,7 @@
     </p:spTree>
     <p:extLst>
       <p:ext uri="{BB962C8B-B14F-4D97-AF65-F5344CB8AC3E}">
-        <p14:creationId xmlns:p14="http://schemas.microsoft.com/office/powerpoint/2010/main" val="382331257"/>
+        <p14:creationId xmlns:p14="http://schemas.microsoft.com/office/powerpoint/2010/main" val="759215092"/>
       </p:ext>
     </p:extLst>
   </p:cSld>
@@ -22904,7 +22904,7 @@
           <p:cNvPr id="2" name="Rectangle 1">
             <a:extLst xmlns:a="http://schemas.openxmlformats.org/drawingml/2006/main">
               <a:ext uri="{FF2B5EF4-FFF2-40B4-BE49-F238E27FC236}">
-                <a16:creationId xmlns:a16="http://schemas.microsoft.com/office/drawing/2014/main" id="{E1EBD97C-7B72-481F-8EE4-401E624541BE}"/>
+                <a16:creationId xmlns:a16="http://schemas.microsoft.com/office/drawing/2014/main" id="{FC54538D-B501-4246-BC77-26853E108E0A}"/>
               </a:ext>
             </a:extLst>
           </p:cNvPr>
@@ -22957,7 +22957,7 @@
           <p:cNvPr id="3" name="TextBox 2">
             <a:extLst xmlns:a="http://schemas.openxmlformats.org/drawingml/2006/main">
               <a:ext uri="{FF2B5EF4-FFF2-40B4-BE49-F238E27FC236}">
-                <a16:creationId xmlns:a16="http://schemas.microsoft.com/office/drawing/2014/main" id="{C132AD41-86F0-4591-84E1-B11409719471}"/>
+                <a16:creationId xmlns:a16="http://schemas.microsoft.com/office/drawing/2014/main" id="{9042ABE5-6ECD-42B4-BDA7-320FFD1F1BEC}"/>
               </a:ext>
             </a:extLst>
           </p:cNvPr>
@@ -23012,7 +23012,7 @@
           <p:cNvPr id="4" name="TextBox 3">
             <a:extLst xmlns:a="http://schemas.openxmlformats.org/drawingml/2006/main">
               <a:ext uri="{FF2B5EF4-FFF2-40B4-BE49-F238E27FC236}">
-                <a16:creationId xmlns:a16="http://schemas.microsoft.com/office/drawing/2014/main" id="{C9D8EE02-F1B8-49F6-9031-741A85A9694D}"/>
+                <a16:creationId xmlns:a16="http://schemas.microsoft.com/office/drawing/2014/main" id="{1F2B1F2E-0C2D-479E-8955-50119B676E0B}"/>
               </a:ext>
             </a:extLst>
           </p:cNvPr>
@@ -23067,7 +23067,7 @@
           <p:cNvPr id="5" name="TextBox 4">
             <a:extLst xmlns:a="http://schemas.openxmlformats.org/drawingml/2006/main">
               <a:ext uri="{FF2B5EF4-FFF2-40B4-BE49-F238E27FC236}">
-                <a16:creationId xmlns:a16="http://schemas.microsoft.com/office/drawing/2014/main" id="{8F047408-F0B3-4189-8A2B-934BCF96119C}"/>
+                <a16:creationId xmlns:a16="http://schemas.microsoft.com/office/drawing/2014/main" id="{1BE62186-84C8-4A47-A741-46F97FE63A8E}"/>
               </a:ext>
             </a:extLst>
           </p:cNvPr>
@@ -23122,7 +23122,7 @@
           <p:cNvPr id="6" name="Rectangle 5">
             <a:extLst xmlns:a="http://schemas.openxmlformats.org/drawingml/2006/main">
               <a:ext uri="{FF2B5EF4-FFF2-40B4-BE49-F238E27FC236}">
-                <a16:creationId xmlns:a16="http://schemas.microsoft.com/office/drawing/2014/main" id="{A4ED6CBC-0A86-4191-8610-A594F7F38793}"/>
+                <a16:creationId xmlns:a16="http://schemas.microsoft.com/office/drawing/2014/main" id="{9A0CAF4B-58D4-4A10-AF6C-59D61ACAEE69}"/>
               </a:ext>
             </a:extLst>
           </p:cNvPr>
@@ -23173,7 +23173,7 @@
     </p:spTree>
     <p:extLst>
       <p:ext uri="{BB962C8B-B14F-4D97-AF65-F5344CB8AC3E}">
-        <p14:creationId xmlns:p14="http://schemas.microsoft.com/office/powerpoint/2010/main" val="1908348370"/>
+        <p14:creationId xmlns:p14="http://schemas.microsoft.com/office/powerpoint/2010/main" val="1444438052"/>
       </p:ext>
     </p:extLst>
   </p:cSld>
@@ -23201,7 +23201,7 @@
           <p:nvPr/>
         </p:nvPicPr>
         <p:blipFill>
-          <a:blip xmlns:r="http://schemas.openxmlformats.org/officeDocument/2006/relationships" xmlns:a="http://schemas.openxmlformats.org/drawingml/2006/main" r:embed="Rfb24378a38094d68"/>
+          <a:blip xmlns:r="http://schemas.openxmlformats.org/officeDocument/2006/relationships" xmlns:a="http://schemas.openxmlformats.org/drawingml/2006/main" r:embed="Rf113a6ae03f648cf"/>
           <a:stretch xmlns:a="http://schemas.openxmlformats.org/drawingml/2006/main">
             <a:fillRect l="0" t="0" r="0" b="0"/>
           </a:stretch>
@@ -23221,7 +23221,7 @@
           <p:cNvPr id="3" name="Rectangle 2">
             <a:extLst xmlns:a="http://schemas.openxmlformats.org/drawingml/2006/main">
               <a:ext uri="{FF2B5EF4-FFF2-40B4-BE49-F238E27FC236}">
-                <a16:creationId xmlns:a16="http://schemas.microsoft.com/office/drawing/2014/main" id="{88996200-B914-4294-BA14-ED7682ABB107}"/>
+                <a16:creationId xmlns:a16="http://schemas.microsoft.com/office/drawing/2014/main" id="{07CF1A9F-6217-467A-9729-7D120421EEA7}"/>
               </a:ext>
             </a:extLst>
           </p:cNvPr>
@@ -23274,7 +23274,7 @@
           <p:cNvPr id="4" name="TextBox 3">
             <a:extLst xmlns:a="http://schemas.openxmlformats.org/drawingml/2006/main">
               <a:ext uri="{FF2B5EF4-FFF2-40B4-BE49-F238E27FC236}">
-                <a16:creationId xmlns:a16="http://schemas.microsoft.com/office/drawing/2014/main" id="{BDDB4189-5768-4747-8B3B-6BB2EC80B851}"/>
+                <a16:creationId xmlns:a16="http://schemas.microsoft.com/office/drawing/2014/main" id="{A3565CC0-C40A-4550-AE16-CE10ECF23239}"/>
               </a:ext>
             </a:extLst>
           </p:cNvPr>
@@ -23329,7 +23329,7 @@
           <p:cNvPr id="5" name="TextBox 4">
             <a:extLst xmlns:a="http://schemas.openxmlformats.org/drawingml/2006/main">
               <a:ext uri="{FF2B5EF4-FFF2-40B4-BE49-F238E27FC236}">
-                <a16:creationId xmlns:a16="http://schemas.microsoft.com/office/drawing/2014/main" id="{D8B39F2F-27DC-4713-B54A-2F9B08888D4F}"/>
+                <a16:creationId xmlns:a16="http://schemas.microsoft.com/office/drawing/2014/main" id="{8E0E32A2-6D47-49A8-9111-11B3D5A96079}"/>
               </a:ext>
             </a:extLst>
           </p:cNvPr>
@@ -23359,14 +23359,14 @@
                 <a:spcPct val="110000"/>
               </a:lnSpc>
               <a:buNone/>
-              <a:defRPr sz="3200">
+              <a:defRPr sz="2400">
                 <a:latin typeface="Arial"/>
                 <a:ea typeface="Arial"/>
                 <a:cs typeface="Arial"/>
               </a:defRPr>
             </a:pPr>
             <a:r>
-              <a:rPr sz="3200" b="1" i="0">
+              <a:rPr sz="2400" b="1" i="0">
                 <a:solidFill>
                   <a:srgbClr val="102A43"/>
                 </a:solidFill>
@@ -23384,7 +23384,7 @@
           <p:cNvPr id="6" name="TextBox 5">
             <a:extLst xmlns:a="http://schemas.openxmlformats.org/drawingml/2006/main">
               <a:ext uri="{FF2B5EF4-FFF2-40B4-BE49-F238E27FC236}">
-                <a16:creationId xmlns:a16="http://schemas.microsoft.com/office/drawing/2014/main" id="{A3FBD4C7-4103-4462-A0BE-985CA1F4470C}"/>
+                <a16:creationId xmlns:a16="http://schemas.microsoft.com/office/drawing/2014/main" id="{93AA44EE-769D-4ADD-8C32-57FCD0ACEC04}"/>
               </a:ext>
             </a:extLst>
           </p:cNvPr>
@@ -23523,7 +23523,7 @@
           <p:cNvPr id="7" name="Rectangle 6">
             <a:extLst xmlns:a="http://schemas.openxmlformats.org/drawingml/2006/main">
               <a:ext uri="{FF2B5EF4-FFF2-40B4-BE49-F238E27FC236}">
-                <a16:creationId xmlns:a16="http://schemas.microsoft.com/office/drawing/2014/main" id="{F02246D3-2E65-48F9-9D22-B247CEB1B9B0}"/>
+                <a16:creationId xmlns:a16="http://schemas.microsoft.com/office/drawing/2014/main" id="{8987C3F6-0FD8-42A9-AC5E-64960A4EDBEB}"/>
               </a:ext>
             </a:extLst>
           </p:cNvPr>
@@ -23576,7 +23576,7 @@
           <p:cNvPr id="8" name="Rectangle 7">
             <a:extLst xmlns:a="http://schemas.openxmlformats.org/drawingml/2006/main">
               <a:ext uri="{FF2B5EF4-FFF2-40B4-BE49-F238E27FC236}">
-                <a16:creationId xmlns:a16="http://schemas.microsoft.com/office/drawing/2014/main" id="{E5D7B930-BC86-4ECA-AB76-F314BB23C1B7}"/>
+                <a16:creationId xmlns:a16="http://schemas.microsoft.com/office/drawing/2014/main" id="{9832ABB1-DA7F-4D24-B49C-6E9037E9B8C1}"/>
               </a:ext>
             </a:extLst>
           </p:cNvPr>
@@ -23629,7 +23629,7 @@
           <p:cNvPr id="9" name="TextBox 8">
             <a:extLst xmlns:a="http://schemas.openxmlformats.org/drawingml/2006/main">
               <a:ext uri="{FF2B5EF4-FFF2-40B4-BE49-F238E27FC236}">
-                <a16:creationId xmlns:a16="http://schemas.microsoft.com/office/drawing/2014/main" id="{7E7D07F8-4D98-462A-A6D2-2965D2545B2F}"/>
+                <a16:creationId xmlns:a16="http://schemas.microsoft.com/office/drawing/2014/main" id="{C58444F6-3F53-4C94-8F85-7FC605EB2784}"/>
               </a:ext>
             </a:extLst>
           </p:cNvPr>
@@ -23684,7 +23684,7 @@
           <p:cNvPr id="10" name="TextBox 9">
             <a:extLst xmlns:a="http://schemas.openxmlformats.org/drawingml/2006/main">
               <a:ext uri="{FF2B5EF4-FFF2-40B4-BE49-F238E27FC236}">
-                <a16:creationId xmlns:a16="http://schemas.microsoft.com/office/drawing/2014/main" id="{F631EE90-9243-4598-96D0-DACCE65141F7}"/>
+                <a16:creationId xmlns:a16="http://schemas.microsoft.com/office/drawing/2014/main" id="{4B641345-DE91-4E34-A1BA-23AE1F9BE364}"/>
               </a:ext>
             </a:extLst>
           </p:cNvPr>
@@ -23737,7 +23737,7 @@
     </p:spTree>
     <p:extLst>
       <p:ext uri="{BB962C8B-B14F-4D97-AF65-F5344CB8AC3E}">
-        <p14:creationId xmlns:p14="http://schemas.microsoft.com/office/powerpoint/2010/main" val="1744798693"/>
+        <p14:creationId xmlns:p14="http://schemas.microsoft.com/office/powerpoint/2010/main" val="63443601"/>
       </p:ext>
     </p:extLst>
   </p:cSld>
@@ -23765,7 +23765,7 @@
           <p:nvPr/>
         </p:nvPicPr>
         <p:blipFill>
-          <a:blip xmlns:r="http://schemas.openxmlformats.org/officeDocument/2006/relationships" xmlns:a="http://schemas.openxmlformats.org/drawingml/2006/main" r:embed="R5262f81ea2a745c9"/>
+          <a:blip xmlns:r="http://schemas.openxmlformats.org/officeDocument/2006/relationships" xmlns:a="http://schemas.openxmlformats.org/drawingml/2006/main" r:embed="Rfba69ee9ec2040a4"/>
           <a:stretch xmlns:a="http://schemas.openxmlformats.org/drawingml/2006/main">
             <a:fillRect l="0" t="0" r="0" b="0"/>
           </a:stretch>
@@ -23785,7 +23785,7 @@
           <p:cNvPr id="3" name="Rectangle 2">
             <a:extLst xmlns:a="http://schemas.openxmlformats.org/drawingml/2006/main">
               <a:ext uri="{FF2B5EF4-FFF2-40B4-BE49-F238E27FC236}">
-                <a16:creationId xmlns:a16="http://schemas.microsoft.com/office/drawing/2014/main" id="{111E4C72-308D-4AA8-8FC3-D1171AA441A5}"/>
+                <a16:creationId xmlns:a16="http://schemas.microsoft.com/office/drawing/2014/main" id="{DD5AE09D-E4A9-4D93-B455-372D1CC35AFC}"/>
               </a:ext>
             </a:extLst>
           </p:cNvPr>
@@ -23838,7 +23838,7 @@
           <p:cNvPr id="4" name="TextBox 3">
             <a:extLst xmlns:a="http://schemas.openxmlformats.org/drawingml/2006/main">
               <a:ext uri="{FF2B5EF4-FFF2-40B4-BE49-F238E27FC236}">
-                <a16:creationId xmlns:a16="http://schemas.microsoft.com/office/drawing/2014/main" id="{EDB70754-C93E-41B3-8BF1-1C356D92C4E8}"/>
+                <a16:creationId xmlns:a16="http://schemas.microsoft.com/office/drawing/2014/main" id="{5B10FCCC-0E42-4A3E-8204-26787B07F23A}"/>
               </a:ext>
             </a:extLst>
           </p:cNvPr>
@@ -23893,7 +23893,7 @@
           <p:cNvPr id="5" name="TextBox 4">
             <a:extLst xmlns:a="http://schemas.openxmlformats.org/drawingml/2006/main">
               <a:ext uri="{FF2B5EF4-FFF2-40B4-BE49-F238E27FC236}">
-                <a16:creationId xmlns:a16="http://schemas.microsoft.com/office/drawing/2014/main" id="{869FCA2F-587B-4665-B6D2-C32D2398A4D5}"/>
+                <a16:creationId xmlns:a16="http://schemas.microsoft.com/office/drawing/2014/main" id="{087E921A-A5E7-4896-8E8E-2747F37161CE}"/>
               </a:ext>
             </a:extLst>
           </p:cNvPr>
@@ -23923,14 +23923,14 @@
                 <a:spcPct val="110000"/>
               </a:lnSpc>
               <a:buNone/>
-              <a:defRPr sz="3200">
+              <a:defRPr sz="2400">
                 <a:latin typeface="Arial"/>
                 <a:ea typeface="Arial"/>
                 <a:cs typeface="Arial"/>
               </a:defRPr>
             </a:pPr>
             <a:r>
-              <a:rPr sz="3200" b="1" i="0">
+              <a:rPr sz="2400" b="1" i="0">
                 <a:solidFill>
                   <a:srgbClr val="102A43"/>
                 </a:solidFill>
@@ -23948,7 +23948,7 @@
           <p:cNvPr id="6" name="Rounded Rectangle 5">
             <a:extLst xmlns:a="http://schemas.openxmlformats.org/drawingml/2006/main">
               <a:ext uri="{FF2B5EF4-FFF2-40B4-BE49-F238E27FC236}">
-                <a16:creationId xmlns:a16="http://schemas.microsoft.com/office/drawing/2014/main" id="{9D3A49E9-295E-4461-B8EF-CBABF10B5C5E}"/>
+                <a16:creationId xmlns:a16="http://schemas.microsoft.com/office/drawing/2014/main" id="{08A6E409-A0AA-48FF-BE7A-C07499334B67}"/>
               </a:ext>
             </a:extLst>
           </p:cNvPr>
@@ -24005,7 +24005,7 @@
           <p:cNvPr id="7" name="TextBox 6">
             <a:extLst xmlns:a="http://schemas.openxmlformats.org/drawingml/2006/main">
               <a:ext uri="{FF2B5EF4-FFF2-40B4-BE49-F238E27FC236}">
-                <a16:creationId xmlns:a16="http://schemas.microsoft.com/office/drawing/2014/main" id="{8F9C3F1A-FEF3-4375-B9DC-969FC5CD834F}"/>
+                <a16:creationId xmlns:a16="http://schemas.microsoft.com/office/drawing/2014/main" id="{5D0B418B-C32C-4E67-A0B0-97DAEF154DEA}"/>
               </a:ext>
             </a:extLst>
           </p:cNvPr>
@@ -24060,7 +24060,7 @@
           <p:cNvPr id="8" name="TextBox 7">
             <a:extLst xmlns:a="http://schemas.openxmlformats.org/drawingml/2006/main">
               <a:ext uri="{FF2B5EF4-FFF2-40B4-BE49-F238E27FC236}">
-                <a16:creationId xmlns:a16="http://schemas.microsoft.com/office/drawing/2014/main" id="{E8C12906-6EDC-4972-8A18-0938D1AE786D}"/>
+                <a16:creationId xmlns:a16="http://schemas.microsoft.com/office/drawing/2014/main" id="{FF7F3E32-2DD3-4136-A66B-B2BEA12EB7EA}"/>
               </a:ext>
             </a:extLst>
           </p:cNvPr>
@@ -24115,7 +24115,7 @@
           <p:cNvPr id="9" name="TextBox 8">
             <a:extLst xmlns:a="http://schemas.openxmlformats.org/drawingml/2006/main">
               <a:ext uri="{FF2B5EF4-FFF2-40B4-BE49-F238E27FC236}">
-                <a16:creationId xmlns:a16="http://schemas.microsoft.com/office/drawing/2014/main" id="{6694E4A9-6AAE-4313-9CA3-10550E1BD818}"/>
+                <a16:creationId xmlns:a16="http://schemas.microsoft.com/office/drawing/2014/main" id="{A829D3A4-7799-4FA6-BA63-2DD20505F066}"/>
               </a:ext>
             </a:extLst>
           </p:cNvPr>
@@ -24200,7 +24200,7 @@
           <p:cNvPr id="10" name="Rounded Rectangle 9">
             <a:extLst xmlns:a="http://schemas.openxmlformats.org/drawingml/2006/main">
               <a:ext uri="{FF2B5EF4-FFF2-40B4-BE49-F238E27FC236}">
-                <a16:creationId xmlns:a16="http://schemas.microsoft.com/office/drawing/2014/main" id="{4D9F4501-372F-4FA0-88AF-DFE2D32C7D09}"/>
+                <a16:creationId xmlns:a16="http://schemas.microsoft.com/office/drawing/2014/main" id="{41C926C7-F3EB-45CC-A1E3-DAC7A3590037}"/>
               </a:ext>
             </a:extLst>
           </p:cNvPr>
@@ -24257,7 +24257,7 @@
           <p:cNvPr id="11" name="TextBox 10">
             <a:extLst xmlns:a="http://schemas.openxmlformats.org/drawingml/2006/main">
               <a:ext uri="{FF2B5EF4-FFF2-40B4-BE49-F238E27FC236}">
-                <a16:creationId xmlns:a16="http://schemas.microsoft.com/office/drawing/2014/main" id="{44BA1CB6-5DBA-48D5-BA73-3F952B3C0B3A}"/>
+                <a16:creationId xmlns:a16="http://schemas.microsoft.com/office/drawing/2014/main" id="{F0B8966F-FC81-444B-9915-6C4C5B0F3D85}"/>
               </a:ext>
             </a:extLst>
           </p:cNvPr>
@@ -24312,7 +24312,7 @@
           <p:cNvPr id="12" name="TextBox 11">
             <a:extLst xmlns:a="http://schemas.openxmlformats.org/drawingml/2006/main">
               <a:ext uri="{FF2B5EF4-FFF2-40B4-BE49-F238E27FC236}">
-                <a16:creationId xmlns:a16="http://schemas.microsoft.com/office/drawing/2014/main" id="{C8F00639-B717-4B6F-8E9C-543149009806}"/>
+                <a16:creationId xmlns:a16="http://schemas.microsoft.com/office/drawing/2014/main" id="{5D257A7A-EDC6-4CA4-806B-DAD1FE4918F8}"/>
               </a:ext>
             </a:extLst>
           </p:cNvPr>
@@ -24367,7 +24367,7 @@
           <p:cNvPr id="13" name="TextBox 12">
             <a:extLst xmlns:a="http://schemas.openxmlformats.org/drawingml/2006/main">
               <a:ext uri="{FF2B5EF4-FFF2-40B4-BE49-F238E27FC236}">
-                <a16:creationId xmlns:a16="http://schemas.microsoft.com/office/drawing/2014/main" id="{7EB8C9EA-9083-4E0A-86A8-F785582D13DC}"/>
+                <a16:creationId xmlns:a16="http://schemas.microsoft.com/office/drawing/2014/main" id="{A3369275-18D1-4F39-A56B-AF73B906FA98}"/>
               </a:ext>
             </a:extLst>
           </p:cNvPr>
@@ -24452,7 +24452,7 @@
           <p:cNvPr id="14" name="Rounded Rectangle 13">
             <a:extLst xmlns:a="http://schemas.openxmlformats.org/drawingml/2006/main">
               <a:ext uri="{FF2B5EF4-FFF2-40B4-BE49-F238E27FC236}">
-                <a16:creationId xmlns:a16="http://schemas.microsoft.com/office/drawing/2014/main" id="{5195B6EF-4B1E-477E-B71A-A32CF8A4C2DF}"/>
+                <a16:creationId xmlns:a16="http://schemas.microsoft.com/office/drawing/2014/main" id="{B055D2A4-750F-46AF-8696-2453E08B2D8A}"/>
               </a:ext>
             </a:extLst>
           </p:cNvPr>
@@ -24509,7 +24509,7 @@
           <p:cNvPr id="15" name="TextBox 14">
             <a:extLst xmlns:a="http://schemas.openxmlformats.org/drawingml/2006/main">
               <a:ext uri="{FF2B5EF4-FFF2-40B4-BE49-F238E27FC236}">
-                <a16:creationId xmlns:a16="http://schemas.microsoft.com/office/drawing/2014/main" id="{F6EE932D-2436-4E48-BFC3-C18ED759AF61}"/>
+                <a16:creationId xmlns:a16="http://schemas.microsoft.com/office/drawing/2014/main" id="{8F48734C-8224-4002-A8C2-0879AFAEF104}"/>
               </a:ext>
             </a:extLst>
           </p:cNvPr>
@@ -24564,7 +24564,7 @@
           <p:cNvPr id="16" name="TextBox 15">
             <a:extLst xmlns:a="http://schemas.openxmlformats.org/drawingml/2006/main">
               <a:ext uri="{FF2B5EF4-FFF2-40B4-BE49-F238E27FC236}">
-                <a16:creationId xmlns:a16="http://schemas.microsoft.com/office/drawing/2014/main" id="{2BBBE039-372A-4A28-ADFC-2B97CD34F28B}"/>
+                <a16:creationId xmlns:a16="http://schemas.microsoft.com/office/drawing/2014/main" id="{67B24FD2-2CC7-4119-A6AD-7BFC8702705F}"/>
               </a:ext>
             </a:extLst>
           </p:cNvPr>
@@ -24619,7 +24619,7 @@
           <p:cNvPr id="17" name="TextBox 16">
             <a:extLst xmlns:a="http://schemas.openxmlformats.org/drawingml/2006/main">
               <a:ext uri="{FF2B5EF4-FFF2-40B4-BE49-F238E27FC236}">
-                <a16:creationId xmlns:a16="http://schemas.microsoft.com/office/drawing/2014/main" id="{A9805D3E-363B-4D36-9105-35F14749AD77}"/>
+                <a16:creationId xmlns:a16="http://schemas.microsoft.com/office/drawing/2014/main" id="{6B2AB6AF-B631-438D-9A6B-EAE40B76924D}"/>
               </a:ext>
             </a:extLst>
           </p:cNvPr>
@@ -24704,7 +24704,7 @@
           <p:cNvPr id="18" name="Rectangle 17">
             <a:extLst xmlns:a="http://schemas.openxmlformats.org/drawingml/2006/main">
               <a:ext uri="{FF2B5EF4-FFF2-40B4-BE49-F238E27FC236}">
-                <a16:creationId xmlns:a16="http://schemas.microsoft.com/office/drawing/2014/main" id="{5414D7FB-5EAD-43BF-9082-30ECCAA30471}"/>
+                <a16:creationId xmlns:a16="http://schemas.microsoft.com/office/drawing/2014/main" id="{CE6B00C8-3393-4260-A929-191C6DE1D1B3}"/>
               </a:ext>
             </a:extLst>
           </p:cNvPr>
@@ -24757,7 +24757,7 @@
           <p:cNvPr id="19" name="Rectangle 18">
             <a:extLst xmlns:a="http://schemas.openxmlformats.org/drawingml/2006/main">
               <a:ext uri="{FF2B5EF4-FFF2-40B4-BE49-F238E27FC236}">
-                <a16:creationId xmlns:a16="http://schemas.microsoft.com/office/drawing/2014/main" id="{8A7B6023-E33E-4BF4-AE78-6C0D8D610D57}"/>
+                <a16:creationId xmlns:a16="http://schemas.microsoft.com/office/drawing/2014/main" id="{B051487A-F502-431D-A707-DEB6EDB4BB62}"/>
               </a:ext>
             </a:extLst>
           </p:cNvPr>
@@ -24810,7 +24810,7 @@
           <p:cNvPr id="20" name="TextBox 19">
             <a:extLst xmlns:a="http://schemas.openxmlformats.org/drawingml/2006/main">
               <a:ext uri="{FF2B5EF4-FFF2-40B4-BE49-F238E27FC236}">
-                <a16:creationId xmlns:a16="http://schemas.microsoft.com/office/drawing/2014/main" id="{20BA57C9-C3C9-42A2-AE48-2FD30CEDE5C0}"/>
+                <a16:creationId xmlns:a16="http://schemas.microsoft.com/office/drawing/2014/main" id="{93467E98-0967-4227-9D59-F74F52C46A93}"/>
               </a:ext>
             </a:extLst>
           </p:cNvPr>
@@ -24865,7 +24865,7 @@
           <p:cNvPr id="21" name="TextBox 20">
             <a:extLst xmlns:a="http://schemas.openxmlformats.org/drawingml/2006/main">
               <a:ext uri="{FF2B5EF4-FFF2-40B4-BE49-F238E27FC236}">
-                <a16:creationId xmlns:a16="http://schemas.microsoft.com/office/drawing/2014/main" id="{7A7B7D61-2169-47AE-97CA-E25CCAC30D89}"/>
+                <a16:creationId xmlns:a16="http://schemas.microsoft.com/office/drawing/2014/main" id="{0328B5B7-B109-4896-8591-27441CE6C151}"/>
               </a:ext>
             </a:extLst>
           </p:cNvPr>
@@ -24918,7 +24918,7 @@
     </p:spTree>
     <p:extLst>
       <p:ext uri="{BB962C8B-B14F-4D97-AF65-F5344CB8AC3E}">
-        <p14:creationId xmlns:p14="http://schemas.microsoft.com/office/powerpoint/2010/main" val="237549872"/>
+        <p14:creationId xmlns:p14="http://schemas.microsoft.com/office/powerpoint/2010/main" val="1493114137"/>
       </p:ext>
     </p:extLst>
   </p:cSld>
@@ -24946,7 +24946,7 @@
           <p:nvPr/>
         </p:nvPicPr>
         <p:blipFill>
-          <a:blip xmlns:r="http://schemas.openxmlformats.org/officeDocument/2006/relationships" xmlns:a="http://schemas.openxmlformats.org/drawingml/2006/main" r:embed="R9c1bddaa980b4bf0"/>
+          <a:blip xmlns:r="http://schemas.openxmlformats.org/officeDocument/2006/relationships" xmlns:a="http://schemas.openxmlformats.org/drawingml/2006/main" r:embed="R7c9b4d1fd3404da8"/>
           <a:stretch xmlns:a="http://schemas.openxmlformats.org/drawingml/2006/main">
             <a:fillRect l="0" t="0" r="0" b="0"/>
           </a:stretch>
@@ -24966,7 +24966,7 @@
           <p:cNvPr id="3" name="Rectangle 2">
             <a:extLst xmlns:a="http://schemas.openxmlformats.org/drawingml/2006/main">
               <a:ext uri="{FF2B5EF4-FFF2-40B4-BE49-F238E27FC236}">
-                <a16:creationId xmlns:a16="http://schemas.microsoft.com/office/drawing/2014/main" id="{DC339CB9-74EE-402A-8BA3-0D91B1C003D6}"/>
+                <a16:creationId xmlns:a16="http://schemas.microsoft.com/office/drawing/2014/main" id="{2F7B10A7-432D-4C6A-8783-8EC7DD7A8D55}"/>
               </a:ext>
             </a:extLst>
           </p:cNvPr>
@@ -25019,7 +25019,7 @@
           <p:cNvPr id="4" name="TextBox 3">
             <a:extLst xmlns:a="http://schemas.openxmlformats.org/drawingml/2006/main">
               <a:ext uri="{FF2B5EF4-FFF2-40B4-BE49-F238E27FC236}">
-                <a16:creationId xmlns:a16="http://schemas.microsoft.com/office/drawing/2014/main" id="{4ED8E926-CD03-4E78-8E90-6C3A99519DA8}"/>
+                <a16:creationId xmlns:a16="http://schemas.microsoft.com/office/drawing/2014/main" id="{4ACDB82B-9DFA-426F-A7DB-52AEE8DC980E}"/>
               </a:ext>
             </a:extLst>
           </p:cNvPr>
@@ -25074,7 +25074,7 @@
           <p:cNvPr id="5" name="TextBox 4">
             <a:extLst xmlns:a="http://schemas.openxmlformats.org/drawingml/2006/main">
               <a:ext uri="{FF2B5EF4-FFF2-40B4-BE49-F238E27FC236}">
-                <a16:creationId xmlns:a16="http://schemas.microsoft.com/office/drawing/2014/main" id="{AD19BFF5-431C-4226-9BF0-68260E98FFD5}"/>
+                <a16:creationId xmlns:a16="http://schemas.microsoft.com/office/drawing/2014/main" id="{2D3336CA-2B75-4814-A0CA-34560A78927C}"/>
               </a:ext>
             </a:extLst>
           </p:cNvPr>
@@ -25104,14 +25104,14 @@
                 <a:spcPct val="110000"/>
               </a:lnSpc>
               <a:buNone/>
-              <a:defRPr sz="3200">
+              <a:defRPr sz="2400">
                 <a:latin typeface="Arial"/>
                 <a:ea typeface="Arial"/>
                 <a:cs typeface="Arial"/>
               </a:defRPr>
             </a:pPr>
             <a:r>
-              <a:rPr sz="3200" b="1" i="0">
+              <a:rPr sz="2400" b="1" i="0">
                 <a:solidFill>
                   <a:srgbClr val="102A43"/>
                 </a:solidFill>
@@ -25129,7 +25129,7 @@
           <p:cNvPr id="6" name="TextBox 5">
             <a:extLst xmlns:a="http://schemas.openxmlformats.org/drawingml/2006/main">
               <a:ext uri="{FF2B5EF4-FFF2-40B4-BE49-F238E27FC236}">
-                <a16:creationId xmlns:a16="http://schemas.microsoft.com/office/drawing/2014/main" id="{284AD74C-051D-49F6-ADFC-C64D3A6C94E5}"/>
+                <a16:creationId xmlns:a16="http://schemas.microsoft.com/office/drawing/2014/main" id="{8C26F293-BCF2-4550-9AF0-FC5AEBDA4CFE}"/>
               </a:ext>
             </a:extLst>
           </p:cNvPr>
@@ -25268,7 +25268,7 @@
           <p:cNvPr id="7" name="Rectangle 6">
             <a:extLst xmlns:a="http://schemas.openxmlformats.org/drawingml/2006/main">
               <a:ext uri="{FF2B5EF4-FFF2-40B4-BE49-F238E27FC236}">
-                <a16:creationId xmlns:a16="http://schemas.microsoft.com/office/drawing/2014/main" id="{D5482D18-FCB0-46A8-989B-F0E3894BCF9B}"/>
+                <a16:creationId xmlns:a16="http://schemas.microsoft.com/office/drawing/2014/main" id="{09BA1C5F-A702-42BE-B841-BB8B41B6DDF9}"/>
               </a:ext>
             </a:extLst>
           </p:cNvPr>
@@ -25321,7 +25321,7 @@
           <p:cNvPr id="8" name="Rectangle 7">
             <a:extLst xmlns:a="http://schemas.openxmlformats.org/drawingml/2006/main">
               <a:ext uri="{FF2B5EF4-FFF2-40B4-BE49-F238E27FC236}">
-                <a16:creationId xmlns:a16="http://schemas.microsoft.com/office/drawing/2014/main" id="{FB99F4BC-17BB-486D-A499-3D22388B6E07}"/>
+                <a16:creationId xmlns:a16="http://schemas.microsoft.com/office/drawing/2014/main" id="{7E7A9206-75C5-4A1F-B98A-0CAED8016D4E}"/>
               </a:ext>
             </a:extLst>
           </p:cNvPr>
@@ -25374,7 +25374,7 @@
           <p:cNvPr id="9" name="TextBox 8">
             <a:extLst xmlns:a="http://schemas.openxmlformats.org/drawingml/2006/main">
               <a:ext uri="{FF2B5EF4-FFF2-40B4-BE49-F238E27FC236}">
-                <a16:creationId xmlns:a16="http://schemas.microsoft.com/office/drawing/2014/main" id="{8C3FC312-43B0-4535-95E0-7B6EBF78BF6C}"/>
+                <a16:creationId xmlns:a16="http://schemas.microsoft.com/office/drawing/2014/main" id="{4D738AB2-6591-4070-B744-428B8DF60293}"/>
               </a:ext>
             </a:extLst>
           </p:cNvPr>
@@ -25429,7 +25429,7 @@
           <p:cNvPr id="10" name="TextBox 9">
             <a:extLst xmlns:a="http://schemas.openxmlformats.org/drawingml/2006/main">
               <a:ext uri="{FF2B5EF4-FFF2-40B4-BE49-F238E27FC236}">
-                <a16:creationId xmlns:a16="http://schemas.microsoft.com/office/drawing/2014/main" id="{C46F2F48-60A9-4D3F-A479-F3AD8DAB12AF}"/>
+                <a16:creationId xmlns:a16="http://schemas.microsoft.com/office/drawing/2014/main" id="{7606353C-A949-443A-9403-5218852D6F5C}"/>
               </a:ext>
             </a:extLst>
           </p:cNvPr>
@@ -25482,7 +25482,7 @@
     </p:spTree>
     <p:extLst>
       <p:ext uri="{BB962C8B-B14F-4D97-AF65-F5344CB8AC3E}">
-        <p14:creationId xmlns:p14="http://schemas.microsoft.com/office/powerpoint/2010/main" val="761408393"/>
+        <p14:creationId xmlns:p14="http://schemas.microsoft.com/office/powerpoint/2010/main" val="557305587"/>
       </p:ext>
     </p:extLst>
   </p:cSld>
@@ -25510,7 +25510,7 @@
           <p:nvPr/>
         </p:nvPicPr>
         <p:blipFill>
-          <a:blip xmlns:r="http://schemas.openxmlformats.org/officeDocument/2006/relationships" xmlns:a="http://schemas.openxmlformats.org/drawingml/2006/main" r:embed="R0cd09ba38b994095"/>
+          <a:blip xmlns:r="http://schemas.openxmlformats.org/officeDocument/2006/relationships" xmlns:a="http://schemas.openxmlformats.org/drawingml/2006/main" r:embed="R2ac74bdc23be4421"/>
           <a:stretch xmlns:a="http://schemas.openxmlformats.org/drawingml/2006/main">
             <a:fillRect l="0" t="0" r="0" b="0"/>
           </a:stretch>
@@ -25530,7 +25530,7 @@
           <p:cNvPr id="3" name="Rectangle 2">
             <a:extLst xmlns:a="http://schemas.openxmlformats.org/drawingml/2006/main">
               <a:ext uri="{FF2B5EF4-FFF2-40B4-BE49-F238E27FC236}">
-                <a16:creationId xmlns:a16="http://schemas.microsoft.com/office/drawing/2014/main" id="{C2D13FD1-55E1-4DC0-BED0-967B616143E8}"/>
+                <a16:creationId xmlns:a16="http://schemas.microsoft.com/office/drawing/2014/main" id="{A78F5909-F608-4FD4-AAC4-A53CDD1CAE3E}"/>
               </a:ext>
             </a:extLst>
           </p:cNvPr>
@@ -25583,7 +25583,7 @@
           <p:cNvPr id="4" name="TextBox 3">
             <a:extLst xmlns:a="http://schemas.openxmlformats.org/drawingml/2006/main">
               <a:ext uri="{FF2B5EF4-FFF2-40B4-BE49-F238E27FC236}">
-                <a16:creationId xmlns:a16="http://schemas.microsoft.com/office/drawing/2014/main" id="{541BDCA5-C181-4B52-BE8E-66B1EA9AC681}"/>
+                <a16:creationId xmlns:a16="http://schemas.microsoft.com/office/drawing/2014/main" id="{F75ECA5D-70A3-4349-AF54-78CA9C945750}"/>
               </a:ext>
             </a:extLst>
           </p:cNvPr>
@@ -25638,7 +25638,7 @@
           <p:cNvPr id="5" name="TextBox 4">
             <a:extLst xmlns:a="http://schemas.openxmlformats.org/drawingml/2006/main">
               <a:ext uri="{FF2B5EF4-FFF2-40B4-BE49-F238E27FC236}">
-                <a16:creationId xmlns:a16="http://schemas.microsoft.com/office/drawing/2014/main" id="{A898EC67-7B50-424C-98C7-375F845C2B71}"/>
+                <a16:creationId xmlns:a16="http://schemas.microsoft.com/office/drawing/2014/main" id="{DF09FB45-B892-43B6-BE4C-89E0600C1B63}"/>
               </a:ext>
             </a:extLst>
           </p:cNvPr>
@@ -25650,7 +25650,7 @@
         <p:spPr>
           <a:xfrm xmlns:a="http://schemas.openxmlformats.org/drawingml/2006/main">
             <a:off x="406400" y="1473200"/>
-            <a:ext cx="10477500" cy="536448"/>
+            <a:ext cx="10477500" cy="533400"/>
           </a:xfrm>
           <a:prstGeom xmlns:a="http://schemas.openxmlformats.org/drawingml/2006/main" prst="rect">
             <a:avLst/>
@@ -25668,14 +25668,14 @@
                 <a:spcPct val="110000"/>
               </a:lnSpc>
               <a:buNone/>
-              <a:defRPr sz="3200">
+              <a:defRPr sz="2400">
                 <a:latin typeface="Arial"/>
                 <a:ea typeface="Arial"/>
                 <a:cs typeface="Arial"/>
               </a:defRPr>
             </a:pPr>
             <a:r>
-              <a:rPr sz="3200" b="1" i="0">
+              <a:rPr sz="2400" b="1" i="0">
                 <a:solidFill>
                   <a:srgbClr val="102A43"/>
                 </a:solidFill>
@@ -26041,7 +26041,7 @@
           <p:cNvPr id="7" name="Rectangle 6">
             <a:extLst xmlns:a="http://schemas.openxmlformats.org/drawingml/2006/main">
               <a:ext uri="{FF2B5EF4-FFF2-40B4-BE49-F238E27FC236}">
-                <a16:creationId xmlns:a16="http://schemas.microsoft.com/office/drawing/2014/main" id="{9F9F9DBD-B6E9-4730-838F-C2F78ACEB368}"/>
+                <a16:creationId xmlns:a16="http://schemas.microsoft.com/office/drawing/2014/main" id="{2D7673FA-C957-41CE-A87C-A30C0B3F3BB7}"/>
               </a:ext>
             </a:extLst>
           </p:cNvPr>
@@ -26094,7 +26094,7 @@
           <p:cNvPr id="8" name="Rectangle 7">
             <a:extLst xmlns:a="http://schemas.openxmlformats.org/drawingml/2006/main">
               <a:ext uri="{FF2B5EF4-FFF2-40B4-BE49-F238E27FC236}">
-                <a16:creationId xmlns:a16="http://schemas.microsoft.com/office/drawing/2014/main" id="{4826B05E-9242-46F5-9FB1-060D8677FE82}"/>
+                <a16:creationId xmlns:a16="http://schemas.microsoft.com/office/drawing/2014/main" id="{D99CFEB4-1487-449B-90A7-57F3F115EFA7}"/>
               </a:ext>
             </a:extLst>
           </p:cNvPr>
@@ -26147,7 +26147,7 @@
           <p:cNvPr id="9" name="TextBox 8">
             <a:extLst xmlns:a="http://schemas.openxmlformats.org/drawingml/2006/main">
               <a:ext uri="{FF2B5EF4-FFF2-40B4-BE49-F238E27FC236}">
-                <a16:creationId xmlns:a16="http://schemas.microsoft.com/office/drawing/2014/main" id="{9935F6D3-EA27-42D3-9900-12F53EEB5457}"/>
+                <a16:creationId xmlns:a16="http://schemas.microsoft.com/office/drawing/2014/main" id="{798503A1-EBF6-4617-A60E-CE4C2DE88758}"/>
               </a:ext>
             </a:extLst>
           </p:cNvPr>
@@ -26202,7 +26202,7 @@
           <p:cNvPr id="10" name="TextBox 9">
             <a:extLst xmlns:a="http://schemas.openxmlformats.org/drawingml/2006/main">
               <a:ext uri="{FF2B5EF4-FFF2-40B4-BE49-F238E27FC236}">
-                <a16:creationId xmlns:a16="http://schemas.microsoft.com/office/drawing/2014/main" id="{F6EEF3F9-0120-4C3B-9741-1660B3D437BF}"/>
+                <a16:creationId xmlns:a16="http://schemas.microsoft.com/office/drawing/2014/main" id="{677FB844-8D8F-4C4E-9E18-3469F5EC4C90}"/>
               </a:ext>
             </a:extLst>
           </p:cNvPr>
@@ -26255,7 +26255,7 @@
     </p:spTree>
     <p:extLst>
       <p:ext uri="{BB962C8B-B14F-4D97-AF65-F5344CB8AC3E}">
-        <p14:creationId xmlns:p14="http://schemas.microsoft.com/office/powerpoint/2010/main" val="564019717"/>
+        <p14:creationId xmlns:p14="http://schemas.microsoft.com/office/powerpoint/2010/main" val="17375217"/>
       </p:ext>
     </p:extLst>
   </p:cSld>
@@ -26283,7 +26283,7 @@
           <p:nvPr/>
         </p:nvPicPr>
         <p:blipFill>
-          <a:blip xmlns:r="http://schemas.openxmlformats.org/officeDocument/2006/relationships" xmlns:a="http://schemas.openxmlformats.org/drawingml/2006/main" r:embed="R6e18984fec0c4881"/>
+          <a:blip xmlns:r="http://schemas.openxmlformats.org/officeDocument/2006/relationships" xmlns:a="http://schemas.openxmlformats.org/drawingml/2006/main" r:embed="R14425f3786244d55"/>
           <a:stretch xmlns:a="http://schemas.openxmlformats.org/drawingml/2006/main">
             <a:fillRect l="0" t="0" r="0" b="0"/>
           </a:stretch>
@@ -26303,7 +26303,7 @@
           <p:cNvPr id="3" name="Rectangle 2">
             <a:extLst xmlns:a="http://schemas.openxmlformats.org/drawingml/2006/main">
               <a:ext uri="{FF2B5EF4-FFF2-40B4-BE49-F238E27FC236}">
-                <a16:creationId xmlns:a16="http://schemas.microsoft.com/office/drawing/2014/main" id="{76C22985-8F55-45F6-904D-89A7811176BC}"/>
+                <a16:creationId xmlns:a16="http://schemas.microsoft.com/office/drawing/2014/main" id="{BDB37FF7-F379-4F35-ABCF-D972AAC48C0E}"/>
               </a:ext>
             </a:extLst>
           </p:cNvPr>
@@ -26356,7 +26356,7 @@
           <p:cNvPr id="4" name="TextBox 3">
             <a:extLst xmlns:a="http://schemas.openxmlformats.org/drawingml/2006/main">
               <a:ext uri="{FF2B5EF4-FFF2-40B4-BE49-F238E27FC236}">
-                <a16:creationId xmlns:a16="http://schemas.microsoft.com/office/drawing/2014/main" id="{C84D91E4-E40E-4D23-B0A9-DDBCBF042603}"/>
+                <a16:creationId xmlns:a16="http://schemas.microsoft.com/office/drawing/2014/main" id="{AA68B8A8-8200-4F4B-805F-BA9FB72F00DB}"/>
               </a:ext>
             </a:extLst>
           </p:cNvPr>
@@ -26411,7 +26411,7 @@
           <p:cNvPr id="5" name="TextBox 4">
             <a:extLst xmlns:a="http://schemas.openxmlformats.org/drawingml/2006/main">
               <a:ext uri="{FF2B5EF4-FFF2-40B4-BE49-F238E27FC236}">
-                <a16:creationId xmlns:a16="http://schemas.microsoft.com/office/drawing/2014/main" id="{04DE5228-11C7-4696-B7C2-29B6A7CDEDD7}"/>
+                <a16:creationId xmlns:a16="http://schemas.microsoft.com/office/drawing/2014/main" id="{4B35264E-070E-49BA-906A-1DC7EA9A94A2}"/>
               </a:ext>
             </a:extLst>
           </p:cNvPr>
@@ -26423,7 +26423,7 @@
         <p:spPr>
           <a:xfrm xmlns:a="http://schemas.openxmlformats.org/drawingml/2006/main">
             <a:off x="406400" y="1473200"/>
-            <a:ext cx="10477500" cy="536448"/>
+            <a:ext cx="10477500" cy="533400"/>
           </a:xfrm>
           <a:prstGeom xmlns:a="http://schemas.openxmlformats.org/drawingml/2006/main" prst="rect">
             <a:avLst/>
@@ -26441,14 +26441,14 @@
                 <a:spcPct val="110000"/>
               </a:lnSpc>
               <a:buNone/>
-              <a:defRPr sz="3200">
+              <a:defRPr sz="2400">
                 <a:latin typeface="Arial"/>
                 <a:ea typeface="Arial"/>
                 <a:cs typeface="Arial"/>
               </a:defRPr>
             </a:pPr>
             <a:r>
-              <a:rPr sz="3200" b="1" i="0">
+              <a:rPr sz="2400" b="1" i="0">
                 <a:solidFill>
                   <a:srgbClr val="102A43"/>
                 </a:solidFill>
@@ -26814,7 +26814,7 @@
           <p:cNvPr id="7" name="Rectangle 6">
             <a:extLst xmlns:a="http://schemas.openxmlformats.org/drawingml/2006/main">
               <a:ext uri="{FF2B5EF4-FFF2-40B4-BE49-F238E27FC236}">
-                <a16:creationId xmlns:a16="http://schemas.microsoft.com/office/drawing/2014/main" id="{5C804B7C-579F-4D83-A2D7-48987DF50440}"/>
+                <a16:creationId xmlns:a16="http://schemas.microsoft.com/office/drawing/2014/main" id="{669D5E0C-294F-43BF-A574-0E599F558E12}"/>
               </a:ext>
             </a:extLst>
           </p:cNvPr>
@@ -26867,7 +26867,7 @@
           <p:cNvPr id="8" name="Rectangle 7">
             <a:extLst xmlns:a="http://schemas.openxmlformats.org/drawingml/2006/main">
               <a:ext uri="{FF2B5EF4-FFF2-40B4-BE49-F238E27FC236}">
-                <a16:creationId xmlns:a16="http://schemas.microsoft.com/office/drawing/2014/main" id="{6022EEEB-41BC-488B-947D-BB091FBAEEE8}"/>
+                <a16:creationId xmlns:a16="http://schemas.microsoft.com/office/drawing/2014/main" id="{4375D4ED-3273-4F6B-A758-D22672E96037}"/>
               </a:ext>
             </a:extLst>
           </p:cNvPr>
@@ -26920,7 +26920,7 @@
           <p:cNvPr id="9" name="TextBox 8">
             <a:extLst xmlns:a="http://schemas.openxmlformats.org/drawingml/2006/main">
               <a:ext uri="{FF2B5EF4-FFF2-40B4-BE49-F238E27FC236}">
-                <a16:creationId xmlns:a16="http://schemas.microsoft.com/office/drawing/2014/main" id="{34DC89EA-684E-4422-BEBA-196646D5C896}"/>
+                <a16:creationId xmlns:a16="http://schemas.microsoft.com/office/drawing/2014/main" id="{D5F5401D-389B-406E-80D7-8D862BC4E15A}"/>
               </a:ext>
             </a:extLst>
           </p:cNvPr>
@@ -26975,7 +26975,7 @@
           <p:cNvPr id="10" name="TextBox 9">
             <a:extLst xmlns:a="http://schemas.openxmlformats.org/drawingml/2006/main">
               <a:ext uri="{FF2B5EF4-FFF2-40B4-BE49-F238E27FC236}">
-                <a16:creationId xmlns:a16="http://schemas.microsoft.com/office/drawing/2014/main" id="{0EBB81E6-6218-4F48-AFF0-8153EEA5B727}"/>
+                <a16:creationId xmlns:a16="http://schemas.microsoft.com/office/drawing/2014/main" id="{17A9EECE-A0CA-4DF3-8AA5-E9C117FCF6F4}"/>
               </a:ext>
             </a:extLst>
           </p:cNvPr>
@@ -27028,7 +27028,7 @@
     </p:spTree>
     <p:extLst>
       <p:ext uri="{BB962C8B-B14F-4D97-AF65-F5344CB8AC3E}">
-        <p14:creationId xmlns:p14="http://schemas.microsoft.com/office/powerpoint/2010/main" val="1363991994"/>
+        <p14:creationId xmlns:p14="http://schemas.microsoft.com/office/powerpoint/2010/main" val="115882061"/>
       </p:ext>
     </p:extLst>
   </p:cSld>
@@ -27052,7 +27052,7 @@
           <p:cNvPr id="2" name="Rectangle 1">
             <a:extLst xmlns:a="http://schemas.openxmlformats.org/drawingml/2006/main">
               <a:ext uri="{FF2B5EF4-FFF2-40B4-BE49-F238E27FC236}">
-                <a16:creationId xmlns:a16="http://schemas.microsoft.com/office/drawing/2014/main" id="{FAAE1AF0-0825-4C1D-9F11-530B4A035D18}"/>
+                <a16:creationId xmlns:a16="http://schemas.microsoft.com/office/drawing/2014/main" id="{8F2A4891-A796-48E7-B205-DB55D9E550FE}"/>
               </a:ext>
             </a:extLst>
           </p:cNvPr>
@@ -27105,7 +27105,7 @@
           <p:cNvPr id="3" name="TextBox 2">
             <a:extLst xmlns:a="http://schemas.openxmlformats.org/drawingml/2006/main">
               <a:ext uri="{FF2B5EF4-FFF2-40B4-BE49-F238E27FC236}">
-                <a16:creationId xmlns:a16="http://schemas.microsoft.com/office/drawing/2014/main" id="{12CDBEC4-3781-4D24-9FEE-79D64BAEF740}"/>
+                <a16:creationId xmlns:a16="http://schemas.microsoft.com/office/drawing/2014/main" id="{11388B17-5611-40A4-A5BD-043DE27E722E}"/>
               </a:ext>
             </a:extLst>
           </p:cNvPr>
@@ -27160,7 +27160,7 @@
           <p:cNvPr id="4" name="TextBox 3">
             <a:extLst xmlns:a="http://schemas.openxmlformats.org/drawingml/2006/main">
               <a:ext uri="{FF2B5EF4-FFF2-40B4-BE49-F238E27FC236}">
-                <a16:creationId xmlns:a16="http://schemas.microsoft.com/office/drawing/2014/main" id="{C6109964-F7B5-488F-9AD6-3C368676DDB5}"/>
+                <a16:creationId xmlns:a16="http://schemas.microsoft.com/office/drawing/2014/main" id="{4F113233-E1F2-4180-AF49-B3B5D2165323}"/>
               </a:ext>
             </a:extLst>
           </p:cNvPr>
@@ -27215,7 +27215,7 @@
           <p:cNvPr id="5" name="TextBox 4">
             <a:extLst xmlns:a="http://schemas.openxmlformats.org/drawingml/2006/main">
               <a:ext uri="{FF2B5EF4-FFF2-40B4-BE49-F238E27FC236}">
-                <a16:creationId xmlns:a16="http://schemas.microsoft.com/office/drawing/2014/main" id="{0C3A2EED-A00F-46CE-AF11-102C23270758}"/>
+                <a16:creationId xmlns:a16="http://schemas.microsoft.com/office/drawing/2014/main" id="{0D3A8A22-6F95-40F5-8728-A787F6B05EE9}"/>
               </a:ext>
             </a:extLst>
           </p:cNvPr>
@@ -27270,7 +27270,7 @@
           <p:cNvPr id="6" name="Rectangle 5">
             <a:extLst xmlns:a="http://schemas.openxmlformats.org/drawingml/2006/main">
               <a:ext uri="{FF2B5EF4-FFF2-40B4-BE49-F238E27FC236}">
-                <a16:creationId xmlns:a16="http://schemas.microsoft.com/office/drawing/2014/main" id="{8B255386-5EA7-475D-88CE-77646EC78E17}"/>
+                <a16:creationId xmlns:a16="http://schemas.microsoft.com/office/drawing/2014/main" id="{86B677AD-ACA0-4D5C-898E-12967CA722A5}"/>
               </a:ext>
             </a:extLst>
           </p:cNvPr>
@@ -27321,7 +27321,7 @@
     </p:spTree>
     <p:extLst>
       <p:ext uri="{BB962C8B-B14F-4D97-AF65-F5344CB8AC3E}">
-        <p14:creationId xmlns:p14="http://schemas.microsoft.com/office/powerpoint/2010/main" val="444243925"/>
+        <p14:creationId xmlns:p14="http://schemas.microsoft.com/office/powerpoint/2010/main" val="1460304289"/>
       </p:ext>
     </p:extLst>
   </p:cSld>
@@ -27349,7 +27349,7 @@
           <p:nvPr/>
         </p:nvPicPr>
         <p:blipFill>
-          <a:blip xmlns:r="http://schemas.openxmlformats.org/officeDocument/2006/relationships" xmlns:a="http://schemas.openxmlformats.org/drawingml/2006/main" r:embed="R0a8efe93321d47db"/>
+          <a:blip xmlns:r="http://schemas.openxmlformats.org/officeDocument/2006/relationships" xmlns:a="http://schemas.openxmlformats.org/drawingml/2006/main" r:embed="R744e38dfe91846c5"/>
           <a:stretch xmlns:a="http://schemas.openxmlformats.org/drawingml/2006/main">
             <a:fillRect l="0" t="0" r="0" b="0"/>
           </a:stretch>
@@ -27369,7 +27369,7 @@
           <p:cNvPr id="3" name="Rectangle 2">
             <a:extLst xmlns:a="http://schemas.openxmlformats.org/drawingml/2006/main">
               <a:ext uri="{FF2B5EF4-FFF2-40B4-BE49-F238E27FC236}">
-                <a16:creationId xmlns:a16="http://schemas.microsoft.com/office/drawing/2014/main" id="{FAA34A0F-96E7-4C2A-A520-76F6BA5D7148}"/>
+                <a16:creationId xmlns:a16="http://schemas.microsoft.com/office/drawing/2014/main" id="{1E58A694-8E4D-417B-A869-1B32DDB94D6B}"/>
               </a:ext>
             </a:extLst>
           </p:cNvPr>
@@ -27422,7 +27422,7 @@
           <p:cNvPr id="4" name="TextBox 3">
             <a:extLst xmlns:a="http://schemas.openxmlformats.org/drawingml/2006/main">
               <a:ext uri="{FF2B5EF4-FFF2-40B4-BE49-F238E27FC236}">
-                <a16:creationId xmlns:a16="http://schemas.microsoft.com/office/drawing/2014/main" id="{2B76E45C-5196-492A-88CD-9CCC4BB3C664}"/>
+                <a16:creationId xmlns:a16="http://schemas.microsoft.com/office/drawing/2014/main" id="{5769110E-2D64-4A30-9842-6E59591EB905}"/>
               </a:ext>
             </a:extLst>
           </p:cNvPr>
@@ -27477,7 +27477,7 @@
           <p:cNvPr id="5" name="TextBox 4">
             <a:extLst xmlns:a="http://schemas.openxmlformats.org/drawingml/2006/main">
               <a:ext uri="{FF2B5EF4-FFF2-40B4-BE49-F238E27FC236}">
-                <a16:creationId xmlns:a16="http://schemas.microsoft.com/office/drawing/2014/main" id="{12B03CE6-CF17-4479-8C57-3CAE52D1A5A5}"/>
+                <a16:creationId xmlns:a16="http://schemas.microsoft.com/office/drawing/2014/main" id="{544B987C-2374-4215-A33C-F49D746ADA90}"/>
               </a:ext>
             </a:extLst>
           </p:cNvPr>
@@ -27489,7 +27489,7 @@
         <p:spPr>
           <a:xfrm xmlns:a="http://schemas.openxmlformats.org/drawingml/2006/main">
             <a:off x="406400" y="1473200"/>
-            <a:ext cx="10477500" cy="536448"/>
+            <a:ext cx="10477500" cy="533400"/>
           </a:xfrm>
           <a:prstGeom xmlns:a="http://schemas.openxmlformats.org/drawingml/2006/main" prst="rect">
             <a:avLst/>
@@ -27507,14 +27507,14 @@
                 <a:spcPct val="110000"/>
               </a:lnSpc>
               <a:buNone/>
-              <a:defRPr sz="3200">
+              <a:defRPr sz="2400">
                 <a:latin typeface="Arial"/>
                 <a:ea typeface="Arial"/>
                 <a:cs typeface="Arial"/>
               </a:defRPr>
             </a:pPr>
             <a:r>
-              <a:rPr sz="3200" b="1" i="0">
+              <a:rPr sz="2400" b="1" i="0">
                 <a:solidFill>
                   <a:srgbClr val="102A43"/>
                 </a:solidFill>
@@ -28150,7 +28150,7 @@
           <p:cNvPr id="7" name="Rectangle 6">
             <a:extLst xmlns:a="http://schemas.openxmlformats.org/drawingml/2006/main">
               <a:ext uri="{FF2B5EF4-FFF2-40B4-BE49-F238E27FC236}">
-                <a16:creationId xmlns:a16="http://schemas.microsoft.com/office/drawing/2014/main" id="{8C5BBBC4-4B7B-4682-905E-5FB83F60DE17}"/>
+                <a16:creationId xmlns:a16="http://schemas.microsoft.com/office/drawing/2014/main" id="{C4810A2A-5FEC-46AD-AD72-B93E7F6B2AA5}"/>
               </a:ext>
             </a:extLst>
           </p:cNvPr>
@@ -28203,7 +28203,7 @@
           <p:cNvPr id="8" name="Rectangle 7">
             <a:extLst xmlns:a="http://schemas.openxmlformats.org/drawingml/2006/main">
               <a:ext uri="{FF2B5EF4-FFF2-40B4-BE49-F238E27FC236}">
-                <a16:creationId xmlns:a16="http://schemas.microsoft.com/office/drawing/2014/main" id="{F095A1D5-34F2-4065-AABA-A5CC4B6B3116}"/>
+                <a16:creationId xmlns:a16="http://schemas.microsoft.com/office/drawing/2014/main" id="{1889E74D-9C1F-40EC-B4A4-B53EA2BD0D9C}"/>
               </a:ext>
             </a:extLst>
           </p:cNvPr>
@@ -28256,7 +28256,7 @@
           <p:cNvPr id="9" name="TextBox 8">
             <a:extLst xmlns:a="http://schemas.openxmlformats.org/drawingml/2006/main">
               <a:ext uri="{FF2B5EF4-FFF2-40B4-BE49-F238E27FC236}">
-                <a16:creationId xmlns:a16="http://schemas.microsoft.com/office/drawing/2014/main" id="{1D985A45-404B-4F7E-9E9E-36D07317D788}"/>
+                <a16:creationId xmlns:a16="http://schemas.microsoft.com/office/drawing/2014/main" id="{CEA9E51E-0DB3-49F1-986C-14A7B100D806}"/>
               </a:ext>
             </a:extLst>
           </p:cNvPr>
@@ -28311,7 +28311,7 @@
           <p:cNvPr id="10" name="TextBox 9">
             <a:extLst xmlns:a="http://schemas.openxmlformats.org/drawingml/2006/main">
               <a:ext uri="{FF2B5EF4-FFF2-40B4-BE49-F238E27FC236}">
-                <a16:creationId xmlns:a16="http://schemas.microsoft.com/office/drawing/2014/main" id="{F8FA2250-E2F7-4E69-B951-7F522A89650E}"/>
+                <a16:creationId xmlns:a16="http://schemas.microsoft.com/office/drawing/2014/main" id="{A2D7793C-FF8F-431D-9E68-A437FCEFDA09}"/>
               </a:ext>
             </a:extLst>
           </p:cNvPr>
@@ -28364,7 +28364,7 @@
     </p:spTree>
     <p:extLst>
       <p:ext uri="{BB962C8B-B14F-4D97-AF65-F5344CB8AC3E}">
-        <p14:creationId xmlns:p14="http://schemas.microsoft.com/office/powerpoint/2010/main" val="395395769"/>
+        <p14:creationId xmlns:p14="http://schemas.microsoft.com/office/powerpoint/2010/main" val="66912420"/>
       </p:ext>
     </p:extLst>
   </p:cSld>
@@ -28392,7 +28392,7 @@
           <p:nvPr/>
         </p:nvPicPr>
         <p:blipFill>
-          <a:blip xmlns:r="http://schemas.openxmlformats.org/officeDocument/2006/relationships" xmlns:a="http://schemas.openxmlformats.org/drawingml/2006/main" r:embed="Rc99aecb1be504386"/>
+          <a:blip xmlns:r="http://schemas.openxmlformats.org/officeDocument/2006/relationships" xmlns:a="http://schemas.openxmlformats.org/drawingml/2006/main" r:embed="Rb567862a85f44b95"/>
           <a:stretch xmlns:a="http://schemas.openxmlformats.org/drawingml/2006/main">
             <a:fillRect l="0" t="0" r="0" b="0"/>
           </a:stretch>
@@ -28412,7 +28412,7 @@
           <p:cNvPr id="3" name="Rectangle 2">
             <a:extLst xmlns:a="http://schemas.openxmlformats.org/drawingml/2006/main">
               <a:ext uri="{FF2B5EF4-FFF2-40B4-BE49-F238E27FC236}">
-                <a16:creationId xmlns:a16="http://schemas.microsoft.com/office/drawing/2014/main" id="{1C58E5EE-072B-433B-95D4-02CD07FE4E3E}"/>
+                <a16:creationId xmlns:a16="http://schemas.microsoft.com/office/drawing/2014/main" id="{4E102174-4308-4C21-9DF6-FA8995A61E7E}"/>
               </a:ext>
             </a:extLst>
           </p:cNvPr>
@@ -28465,7 +28465,7 @@
           <p:cNvPr id="4" name="TextBox 3">
             <a:extLst xmlns:a="http://schemas.openxmlformats.org/drawingml/2006/main">
               <a:ext uri="{FF2B5EF4-FFF2-40B4-BE49-F238E27FC236}">
-                <a16:creationId xmlns:a16="http://schemas.microsoft.com/office/drawing/2014/main" id="{C6B2A8D9-00E7-458D-BFB0-8AAAF858FE04}"/>
+                <a16:creationId xmlns:a16="http://schemas.microsoft.com/office/drawing/2014/main" id="{059091C0-2AD6-4FC1-AD8A-55E43B46F4F3}"/>
               </a:ext>
             </a:extLst>
           </p:cNvPr>
@@ -28520,7 +28520,7 @@
           <p:cNvPr id="5" name="TextBox 4">
             <a:extLst xmlns:a="http://schemas.openxmlformats.org/drawingml/2006/main">
               <a:ext uri="{FF2B5EF4-FFF2-40B4-BE49-F238E27FC236}">
-                <a16:creationId xmlns:a16="http://schemas.microsoft.com/office/drawing/2014/main" id="{E09EFC4C-26C0-4757-A5C0-E470672775A4}"/>
+                <a16:creationId xmlns:a16="http://schemas.microsoft.com/office/drawing/2014/main" id="{0AB4CB0A-1E12-4548-B492-BA8B899FDE9E}"/>
               </a:ext>
             </a:extLst>
           </p:cNvPr>
@@ -28550,14 +28550,14 @@
                 <a:spcPct val="110000"/>
               </a:lnSpc>
               <a:buNone/>
-              <a:defRPr sz="3200">
+              <a:defRPr sz="2400">
                 <a:latin typeface="Arial"/>
                 <a:ea typeface="Arial"/>
                 <a:cs typeface="Arial"/>
               </a:defRPr>
             </a:pPr>
             <a:r>
-              <a:rPr sz="3200" b="1" i="0">
+              <a:rPr sz="2400" b="1" i="0">
                 <a:solidFill>
                   <a:srgbClr val="102A43"/>
                 </a:solidFill>
@@ -28575,7 +28575,7 @@
           <p:cNvPr id="6" name="TextBox 5">
             <a:extLst xmlns:a="http://schemas.openxmlformats.org/drawingml/2006/main">
               <a:ext uri="{FF2B5EF4-FFF2-40B4-BE49-F238E27FC236}">
-                <a16:creationId xmlns:a16="http://schemas.microsoft.com/office/drawing/2014/main" id="{7D75459E-D89C-4981-A13E-CBE9DAAA7651}"/>
+                <a16:creationId xmlns:a16="http://schemas.microsoft.com/office/drawing/2014/main" id="{CF8A9809-DDBE-4655-B81D-CCAF0AA41B6A}"/>
               </a:ext>
             </a:extLst>
           </p:cNvPr>
@@ -28714,7 +28714,7 @@
           <p:cNvPr id="7" name="Rectangle 6">
             <a:extLst xmlns:a="http://schemas.openxmlformats.org/drawingml/2006/main">
               <a:ext uri="{FF2B5EF4-FFF2-40B4-BE49-F238E27FC236}">
-                <a16:creationId xmlns:a16="http://schemas.microsoft.com/office/drawing/2014/main" id="{4F013372-BED1-4F6B-ACAB-0921B23BB846}"/>
+                <a16:creationId xmlns:a16="http://schemas.microsoft.com/office/drawing/2014/main" id="{948EF193-DAC8-4BD7-8D19-121223877C72}"/>
               </a:ext>
             </a:extLst>
           </p:cNvPr>
@@ -28767,7 +28767,7 @@
           <p:cNvPr id="8" name="Rectangle 7">
             <a:extLst xmlns:a="http://schemas.openxmlformats.org/drawingml/2006/main">
               <a:ext uri="{FF2B5EF4-FFF2-40B4-BE49-F238E27FC236}">
-                <a16:creationId xmlns:a16="http://schemas.microsoft.com/office/drawing/2014/main" id="{1CD6A34B-B909-4D41-AE91-1DA1C5C85CF8}"/>
+                <a16:creationId xmlns:a16="http://schemas.microsoft.com/office/drawing/2014/main" id="{CFE0A866-FB3A-4D32-8CD4-DF4CF293510E}"/>
               </a:ext>
             </a:extLst>
           </p:cNvPr>
@@ -28820,7 +28820,7 @@
           <p:cNvPr id="9" name="TextBox 8">
             <a:extLst xmlns:a="http://schemas.openxmlformats.org/drawingml/2006/main">
               <a:ext uri="{FF2B5EF4-FFF2-40B4-BE49-F238E27FC236}">
-                <a16:creationId xmlns:a16="http://schemas.microsoft.com/office/drawing/2014/main" id="{0EF01561-240A-49AA-98DD-499E6099EA72}"/>
+                <a16:creationId xmlns:a16="http://schemas.microsoft.com/office/drawing/2014/main" id="{9E3FB8A9-81A8-462F-84CE-A7BE3E7DDD30}"/>
               </a:ext>
             </a:extLst>
           </p:cNvPr>
@@ -28875,7 +28875,7 @@
           <p:cNvPr id="10" name="TextBox 9">
             <a:extLst xmlns:a="http://schemas.openxmlformats.org/drawingml/2006/main">
               <a:ext uri="{FF2B5EF4-FFF2-40B4-BE49-F238E27FC236}">
-                <a16:creationId xmlns:a16="http://schemas.microsoft.com/office/drawing/2014/main" id="{977D5EBA-E523-4A89-8A80-45D89551694C}"/>
+                <a16:creationId xmlns:a16="http://schemas.microsoft.com/office/drawing/2014/main" id="{C4191349-94B5-4FFD-899F-60B3735322D2}"/>
               </a:ext>
             </a:extLst>
           </p:cNvPr>
@@ -28928,7 +28928,7 @@
     </p:spTree>
     <p:extLst>
       <p:ext uri="{BB962C8B-B14F-4D97-AF65-F5344CB8AC3E}">
-        <p14:creationId xmlns:p14="http://schemas.microsoft.com/office/powerpoint/2010/main" val="1151682962"/>
+        <p14:creationId xmlns:p14="http://schemas.microsoft.com/office/powerpoint/2010/main" val="369662085"/>
       </p:ext>
     </p:extLst>
   </p:cSld>
@@ -28956,7 +28956,7 @@
           <p:nvPr/>
         </p:nvPicPr>
         <p:blipFill>
-          <a:blip xmlns:r="http://schemas.openxmlformats.org/officeDocument/2006/relationships" xmlns:a="http://schemas.openxmlformats.org/drawingml/2006/main" r:embed="R221e891a84c94baf"/>
+          <a:blip xmlns:r="http://schemas.openxmlformats.org/officeDocument/2006/relationships" xmlns:a="http://schemas.openxmlformats.org/drawingml/2006/main" r:embed="R3582d9053b9245d1"/>
           <a:stretch xmlns:a="http://schemas.openxmlformats.org/drawingml/2006/main">
             <a:fillRect l="0" t="0" r="0" b="0"/>
           </a:stretch>
@@ -28976,7 +28976,7 @@
           <p:cNvPr id="3" name="Rectangle 2">
             <a:extLst xmlns:a="http://schemas.openxmlformats.org/drawingml/2006/main">
               <a:ext uri="{FF2B5EF4-FFF2-40B4-BE49-F238E27FC236}">
-                <a16:creationId xmlns:a16="http://schemas.microsoft.com/office/drawing/2014/main" id="{C5675AB7-BC21-458B-B038-66A983ACD70B}"/>
+                <a16:creationId xmlns:a16="http://schemas.microsoft.com/office/drawing/2014/main" id="{31BD70EA-F7FF-4FE7-B5EA-CFAE9407F8C0}"/>
               </a:ext>
             </a:extLst>
           </p:cNvPr>
@@ -29029,7 +29029,7 @@
           <p:cNvPr id="4" name="TextBox 3">
             <a:extLst xmlns:a="http://schemas.openxmlformats.org/drawingml/2006/main">
               <a:ext uri="{FF2B5EF4-FFF2-40B4-BE49-F238E27FC236}">
-                <a16:creationId xmlns:a16="http://schemas.microsoft.com/office/drawing/2014/main" id="{D3D94298-CE89-4235-8213-DAF1358563DF}"/>
+                <a16:creationId xmlns:a16="http://schemas.microsoft.com/office/drawing/2014/main" id="{82F32E23-7133-4EF6-BC55-578E0059043B}"/>
               </a:ext>
             </a:extLst>
           </p:cNvPr>
@@ -29084,7 +29084,7 @@
           <p:cNvPr id="5" name="TextBox 4">
             <a:extLst xmlns:a="http://schemas.openxmlformats.org/drawingml/2006/main">
               <a:ext uri="{FF2B5EF4-FFF2-40B4-BE49-F238E27FC236}">
-                <a16:creationId xmlns:a16="http://schemas.microsoft.com/office/drawing/2014/main" id="{5576A522-0E14-4A4A-BDAA-1FEFB97ECF10}"/>
+                <a16:creationId xmlns:a16="http://schemas.microsoft.com/office/drawing/2014/main" id="{DF4B68CF-8E8B-482E-8025-5A2EA012F141}"/>
               </a:ext>
             </a:extLst>
           </p:cNvPr>
@@ -29096,7 +29096,7 @@
         <p:spPr>
           <a:xfrm xmlns:a="http://schemas.openxmlformats.org/drawingml/2006/main">
             <a:off x="406400" y="1473200"/>
-            <a:ext cx="10477500" cy="536448"/>
+            <a:ext cx="10477500" cy="533400"/>
           </a:xfrm>
           <a:prstGeom xmlns:a="http://schemas.openxmlformats.org/drawingml/2006/main" prst="rect">
             <a:avLst/>
@@ -29114,14 +29114,14 @@
                 <a:spcPct val="110000"/>
               </a:lnSpc>
               <a:buNone/>
-              <a:defRPr sz="3200">
+              <a:defRPr sz="2400">
                 <a:latin typeface="Arial"/>
                 <a:ea typeface="Arial"/>
                 <a:cs typeface="Arial"/>
               </a:defRPr>
             </a:pPr>
             <a:r>
-              <a:rPr sz="3200" b="1" i="0">
+              <a:rPr sz="2400" b="1" i="0">
                 <a:solidFill>
                   <a:srgbClr val="102A43"/>
                 </a:solidFill>
@@ -29649,7 +29649,7 @@
           <p:cNvPr id="7" name="Rectangle 6">
             <a:extLst xmlns:a="http://schemas.openxmlformats.org/drawingml/2006/main">
               <a:ext uri="{FF2B5EF4-FFF2-40B4-BE49-F238E27FC236}">
-                <a16:creationId xmlns:a16="http://schemas.microsoft.com/office/drawing/2014/main" id="{C3F68338-11A9-4C64-8EBD-A97ED79CD314}"/>
+                <a16:creationId xmlns:a16="http://schemas.microsoft.com/office/drawing/2014/main" id="{0089BE35-384C-4A6F-A7F0-A47B9F0ADA2D}"/>
               </a:ext>
             </a:extLst>
           </p:cNvPr>
@@ -29702,7 +29702,7 @@
           <p:cNvPr id="8" name="Rectangle 7">
             <a:extLst xmlns:a="http://schemas.openxmlformats.org/drawingml/2006/main">
               <a:ext uri="{FF2B5EF4-FFF2-40B4-BE49-F238E27FC236}">
-                <a16:creationId xmlns:a16="http://schemas.microsoft.com/office/drawing/2014/main" id="{69D18A1F-7388-4497-8F65-7D9C10A7B664}"/>
+                <a16:creationId xmlns:a16="http://schemas.microsoft.com/office/drawing/2014/main" id="{447908BB-3E3B-4D04-BA5B-DEA71383931A}"/>
               </a:ext>
             </a:extLst>
           </p:cNvPr>
@@ -29755,7 +29755,7 @@
           <p:cNvPr id="9" name="TextBox 8">
             <a:extLst xmlns:a="http://schemas.openxmlformats.org/drawingml/2006/main">
               <a:ext uri="{FF2B5EF4-FFF2-40B4-BE49-F238E27FC236}">
-                <a16:creationId xmlns:a16="http://schemas.microsoft.com/office/drawing/2014/main" id="{BB5DAC8D-96B5-4EE9-9D16-994F20980625}"/>
+                <a16:creationId xmlns:a16="http://schemas.microsoft.com/office/drawing/2014/main" id="{8073867E-35A5-4C8B-87FA-A82385900FD9}"/>
               </a:ext>
             </a:extLst>
           </p:cNvPr>
@@ -29810,7 +29810,7 @@
           <p:cNvPr id="10" name="TextBox 9">
             <a:extLst xmlns:a="http://schemas.openxmlformats.org/drawingml/2006/main">
               <a:ext uri="{FF2B5EF4-FFF2-40B4-BE49-F238E27FC236}">
-                <a16:creationId xmlns:a16="http://schemas.microsoft.com/office/drawing/2014/main" id="{1BE5F7BE-8619-458D-BE7B-E727A9A3302F}"/>
+                <a16:creationId xmlns:a16="http://schemas.microsoft.com/office/drawing/2014/main" id="{735C5E0B-1B4B-4AC9-97E7-2D27A0EA747A}"/>
               </a:ext>
             </a:extLst>
           </p:cNvPr>
@@ -29863,7 +29863,7 @@
     </p:spTree>
     <p:extLst>
       <p:ext uri="{BB962C8B-B14F-4D97-AF65-F5344CB8AC3E}">
-        <p14:creationId xmlns:p14="http://schemas.microsoft.com/office/powerpoint/2010/main" val="623482091"/>
+        <p14:creationId xmlns:p14="http://schemas.microsoft.com/office/powerpoint/2010/main" val="139957307"/>
       </p:ext>
     </p:extLst>
   </p:cSld>
@@ -29891,7 +29891,7 @@
           <p:nvPr/>
         </p:nvPicPr>
         <p:blipFill>
-          <a:blip xmlns:r="http://schemas.openxmlformats.org/officeDocument/2006/relationships" xmlns:a="http://schemas.openxmlformats.org/drawingml/2006/main" r:embed="R834ffe8864bf464c"/>
+          <a:blip xmlns:r="http://schemas.openxmlformats.org/officeDocument/2006/relationships" xmlns:a="http://schemas.openxmlformats.org/drawingml/2006/main" r:embed="R4fd7fe78c9f347df"/>
           <a:stretch xmlns:a="http://schemas.openxmlformats.org/drawingml/2006/main">
             <a:fillRect l="0" t="0" r="0" b="0"/>
           </a:stretch>
@@ -29911,7 +29911,7 @@
           <p:cNvPr id="3" name="Rectangle 2">
             <a:extLst xmlns:a="http://schemas.openxmlformats.org/drawingml/2006/main">
               <a:ext uri="{FF2B5EF4-FFF2-40B4-BE49-F238E27FC236}">
-                <a16:creationId xmlns:a16="http://schemas.microsoft.com/office/drawing/2014/main" id="{D4739A57-A6B9-480C-8C7F-7F8DD5E92095}"/>
+                <a16:creationId xmlns:a16="http://schemas.microsoft.com/office/drawing/2014/main" id="{B30774D3-F31C-45D4-B709-3CC04CA3A8F8}"/>
               </a:ext>
             </a:extLst>
           </p:cNvPr>
@@ -29964,7 +29964,7 @@
           <p:cNvPr id="4" name="TextBox 3">
             <a:extLst xmlns:a="http://schemas.openxmlformats.org/drawingml/2006/main">
               <a:ext uri="{FF2B5EF4-FFF2-40B4-BE49-F238E27FC236}">
-                <a16:creationId xmlns:a16="http://schemas.microsoft.com/office/drawing/2014/main" id="{9D28D98B-C4F7-474B-A7F6-D41D3D8EA802}"/>
+                <a16:creationId xmlns:a16="http://schemas.microsoft.com/office/drawing/2014/main" id="{FD5A9403-1408-4B4A-A1C2-C0589DED36E2}"/>
               </a:ext>
             </a:extLst>
           </p:cNvPr>
@@ -30019,7 +30019,7 @@
           <p:cNvPr id="5" name="TextBox 4">
             <a:extLst xmlns:a="http://schemas.openxmlformats.org/drawingml/2006/main">
               <a:ext uri="{FF2B5EF4-FFF2-40B4-BE49-F238E27FC236}">
-                <a16:creationId xmlns:a16="http://schemas.microsoft.com/office/drawing/2014/main" id="{4E69E8C1-F842-4AEE-AE58-16F335CBE9F5}"/>
+                <a16:creationId xmlns:a16="http://schemas.microsoft.com/office/drawing/2014/main" id="{C18EB873-7000-4EED-8D6F-1605C5650FBB}"/>
               </a:ext>
             </a:extLst>
           </p:cNvPr>
@@ -30049,14 +30049,14 @@
                 <a:spcPct val="110000"/>
               </a:lnSpc>
               <a:buNone/>
-              <a:defRPr sz="3200">
+              <a:defRPr sz="2400">
                 <a:latin typeface="Arial"/>
                 <a:ea typeface="Arial"/>
                 <a:cs typeface="Arial"/>
               </a:defRPr>
             </a:pPr>
             <a:r>
-              <a:rPr sz="3200" b="1" i="0">
+              <a:rPr sz="2400" b="1" i="0">
                 <a:solidFill>
                   <a:srgbClr val="102A43"/>
                 </a:solidFill>
@@ -30074,7 +30074,7 @@
           <p:cNvPr id="6" name="TextBox 5">
             <a:extLst xmlns:a="http://schemas.openxmlformats.org/drawingml/2006/main">
               <a:ext uri="{FF2B5EF4-FFF2-40B4-BE49-F238E27FC236}">
-                <a16:creationId xmlns:a16="http://schemas.microsoft.com/office/drawing/2014/main" id="{501AB750-9737-4D17-AF0D-0B5AEA3A8E00}"/>
+                <a16:creationId xmlns:a16="http://schemas.microsoft.com/office/drawing/2014/main" id="{DCBD1183-88FD-47DE-98C4-9167AF0E7196}"/>
               </a:ext>
             </a:extLst>
           </p:cNvPr>
@@ -30213,7 +30213,7 @@
           <p:cNvPr id="7" name="Rectangle 6">
             <a:extLst xmlns:a="http://schemas.openxmlformats.org/drawingml/2006/main">
               <a:ext uri="{FF2B5EF4-FFF2-40B4-BE49-F238E27FC236}">
-                <a16:creationId xmlns:a16="http://schemas.microsoft.com/office/drawing/2014/main" id="{43691CFD-493C-46A3-AE13-25153B199B92}"/>
+                <a16:creationId xmlns:a16="http://schemas.microsoft.com/office/drawing/2014/main" id="{D4CB4CF9-EF12-4D60-AAFC-7F95308A3C10}"/>
               </a:ext>
             </a:extLst>
           </p:cNvPr>
@@ -30266,7 +30266,7 @@
           <p:cNvPr id="8" name="Rectangle 7">
             <a:extLst xmlns:a="http://schemas.openxmlformats.org/drawingml/2006/main">
               <a:ext uri="{FF2B5EF4-FFF2-40B4-BE49-F238E27FC236}">
-                <a16:creationId xmlns:a16="http://schemas.microsoft.com/office/drawing/2014/main" id="{7D4BA525-62CE-4167-8C7E-D73C5F642BCF}"/>
+                <a16:creationId xmlns:a16="http://schemas.microsoft.com/office/drawing/2014/main" id="{E6ED423C-AE83-4440-8D0F-33F8559F6CA4}"/>
               </a:ext>
             </a:extLst>
           </p:cNvPr>
@@ -30319,7 +30319,7 @@
           <p:cNvPr id="9" name="TextBox 8">
             <a:extLst xmlns:a="http://schemas.openxmlformats.org/drawingml/2006/main">
               <a:ext uri="{FF2B5EF4-FFF2-40B4-BE49-F238E27FC236}">
-                <a16:creationId xmlns:a16="http://schemas.microsoft.com/office/drawing/2014/main" id="{8C38EFC5-4674-41B3-B6D2-99CE126CEB3E}"/>
+                <a16:creationId xmlns:a16="http://schemas.microsoft.com/office/drawing/2014/main" id="{BF0F4E8A-948F-48EF-9E7A-337CAD7E8D8A}"/>
               </a:ext>
             </a:extLst>
           </p:cNvPr>
@@ -30374,7 +30374,7 @@
           <p:cNvPr id="10" name="TextBox 9">
             <a:extLst xmlns:a="http://schemas.openxmlformats.org/drawingml/2006/main">
               <a:ext uri="{FF2B5EF4-FFF2-40B4-BE49-F238E27FC236}">
-                <a16:creationId xmlns:a16="http://schemas.microsoft.com/office/drawing/2014/main" id="{31A85B80-4EA6-41F9-9834-3A12DCB477DD}"/>
+                <a16:creationId xmlns:a16="http://schemas.microsoft.com/office/drawing/2014/main" id="{24D91225-F7DD-47D3-95B5-5B68C717BBCC}"/>
               </a:ext>
             </a:extLst>
           </p:cNvPr>
@@ -30427,7 +30427,7 @@
     </p:spTree>
     <p:extLst>
       <p:ext uri="{BB962C8B-B14F-4D97-AF65-F5344CB8AC3E}">
-        <p14:creationId xmlns:p14="http://schemas.microsoft.com/office/powerpoint/2010/main" val="839635692"/>
+        <p14:creationId xmlns:p14="http://schemas.microsoft.com/office/powerpoint/2010/main" val="992390725"/>
       </p:ext>
     </p:extLst>
   </p:cSld>
@@ -30451,7 +30451,7 @@
           <p:cNvPr id="2" name="Rectangle 1">
             <a:extLst xmlns:a="http://schemas.openxmlformats.org/drawingml/2006/main">
               <a:ext uri="{FF2B5EF4-FFF2-40B4-BE49-F238E27FC236}">
-                <a16:creationId xmlns:a16="http://schemas.microsoft.com/office/drawing/2014/main" id="{9ECDACC2-816D-42C7-86DC-92F6C88FB394}"/>
+                <a16:creationId xmlns:a16="http://schemas.microsoft.com/office/drawing/2014/main" id="{4F3E4358-25F4-4AAA-A2A5-86F6FAEE2D66}"/>
               </a:ext>
             </a:extLst>
           </p:cNvPr>
@@ -30504,7 +30504,7 @@
           <p:cNvPr id="3" name="TextBox 2">
             <a:extLst xmlns:a="http://schemas.openxmlformats.org/drawingml/2006/main">
               <a:ext uri="{FF2B5EF4-FFF2-40B4-BE49-F238E27FC236}">
-                <a16:creationId xmlns:a16="http://schemas.microsoft.com/office/drawing/2014/main" id="{BD40E825-D682-47B2-92F8-D199FD51F3DA}"/>
+                <a16:creationId xmlns:a16="http://schemas.microsoft.com/office/drawing/2014/main" id="{A1129E9C-03C2-4F81-A1F4-8553E9A2671C}"/>
               </a:ext>
             </a:extLst>
           </p:cNvPr>
@@ -30559,7 +30559,7 @@
           <p:cNvPr id="4" name="TextBox 3">
             <a:extLst xmlns:a="http://schemas.openxmlformats.org/drawingml/2006/main">
               <a:ext uri="{FF2B5EF4-FFF2-40B4-BE49-F238E27FC236}">
-                <a16:creationId xmlns:a16="http://schemas.microsoft.com/office/drawing/2014/main" id="{36F1559A-0F3C-4201-865A-AE76A424F45C}"/>
+                <a16:creationId xmlns:a16="http://schemas.microsoft.com/office/drawing/2014/main" id="{9489F436-50B0-4575-B27B-EA83E8AD0341}"/>
               </a:ext>
             </a:extLst>
           </p:cNvPr>
@@ -30614,7 +30614,7 @@
           <p:cNvPr id="5" name="TextBox 4">
             <a:extLst xmlns:a="http://schemas.openxmlformats.org/drawingml/2006/main">
               <a:ext uri="{FF2B5EF4-FFF2-40B4-BE49-F238E27FC236}">
-                <a16:creationId xmlns:a16="http://schemas.microsoft.com/office/drawing/2014/main" id="{6B2B9569-689D-45EA-905C-36310CFCAB75}"/>
+                <a16:creationId xmlns:a16="http://schemas.microsoft.com/office/drawing/2014/main" id="{820ED20C-5AE6-4EB7-A630-CAC5358586D5}"/>
               </a:ext>
             </a:extLst>
           </p:cNvPr>
@@ -30669,7 +30669,7 @@
           <p:cNvPr id="6" name="Rectangle 5">
             <a:extLst xmlns:a="http://schemas.openxmlformats.org/drawingml/2006/main">
               <a:ext uri="{FF2B5EF4-FFF2-40B4-BE49-F238E27FC236}">
-                <a16:creationId xmlns:a16="http://schemas.microsoft.com/office/drawing/2014/main" id="{20865F67-EBC0-49D0-B390-258E96DAD9A7}"/>
+                <a16:creationId xmlns:a16="http://schemas.microsoft.com/office/drawing/2014/main" id="{823EAC63-3FDB-4F79-95B7-98EBD1F53FC3}"/>
               </a:ext>
             </a:extLst>
           </p:cNvPr>
@@ -30720,7 +30720,7 @@
     </p:spTree>
     <p:extLst>
       <p:ext uri="{BB962C8B-B14F-4D97-AF65-F5344CB8AC3E}">
-        <p14:creationId xmlns:p14="http://schemas.microsoft.com/office/powerpoint/2010/main" val="1710348040"/>
+        <p14:creationId xmlns:p14="http://schemas.microsoft.com/office/powerpoint/2010/main" val="2127419584"/>
       </p:ext>
     </p:extLst>
   </p:cSld>
@@ -30748,7 +30748,7 @@
           <p:nvPr/>
         </p:nvPicPr>
         <p:blipFill>
-          <a:blip xmlns:r="http://schemas.openxmlformats.org/officeDocument/2006/relationships" xmlns:a="http://schemas.openxmlformats.org/drawingml/2006/main" r:embed="R50301cecf7d24012"/>
+          <a:blip xmlns:r="http://schemas.openxmlformats.org/officeDocument/2006/relationships" xmlns:a="http://schemas.openxmlformats.org/drawingml/2006/main" r:embed="R3b334977b1da4600"/>
           <a:stretch xmlns:a="http://schemas.openxmlformats.org/drawingml/2006/main">
             <a:fillRect l="0" t="0" r="0" b="0"/>
           </a:stretch>
@@ -30768,7 +30768,7 @@
           <p:cNvPr id="3" name="Rectangle 2">
             <a:extLst xmlns:a="http://schemas.openxmlformats.org/drawingml/2006/main">
               <a:ext uri="{FF2B5EF4-FFF2-40B4-BE49-F238E27FC236}">
-                <a16:creationId xmlns:a16="http://schemas.microsoft.com/office/drawing/2014/main" id="{5BA30FC4-99E9-44BF-AC8C-35A9E880B200}"/>
+                <a16:creationId xmlns:a16="http://schemas.microsoft.com/office/drawing/2014/main" id="{F40C2788-0BCC-4AC3-8EA4-DE87918C2711}"/>
               </a:ext>
             </a:extLst>
           </p:cNvPr>
@@ -30821,7 +30821,7 @@
           <p:cNvPr id="4" name="TextBox 3">
             <a:extLst xmlns:a="http://schemas.openxmlformats.org/drawingml/2006/main">
               <a:ext uri="{FF2B5EF4-FFF2-40B4-BE49-F238E27FC236}">
-                <a16:creationId xmlns:a16="http://schemas.microsoft.com/office/drawing/2014/main" id="{FD974119-7FE7-4A62-A1FD-D00CCC533CCD}"/>
+                <a16:creationId xmlns:a16="http://schemas.microsoft.com/office/drawing/2014/main" id="{D175F0BD-FB94-411D-BC3B-454D0D19B258}"/>
               </a:ext>
             </a:extLst>
           </p:cNvPr>
@@ -30876,7 +30876,7 @@
           <p:cNvPr id="5" name="TextBox 4">
             <a:extLst xmlns:a="http://schemas.openxmlformats.org/drawingml/2006/main">
               <a:ext uri="{FF2B5EF4-FFF2-40B4-BE49-F238E27FC236}">
-                <a16:creationId xmlns:a16="http://schemas.microsoft.com/office/drawing/2014/main" id="{26010BAD-0699-4D8A-B795-D58D243475AB}"/>
+                <a16:creationId xmlns:a16="http://schemas.microsoft.com/office/drawing/2014/main" id="{515368F6-3F64-4FBB-817A-C1C582473963}"/>
               </a:ext>
             </a:extLst>
           </p:cNvPr>
@@ -30906,14 +30906,14 @@
                 <a:spcPct val="110000"/>
               </a:lnSpc>
               <a:buNone/>
-              <a:defRPr sz="3200">
+              <a:defRPr sz="2400">
                 <a:latin typeface="Arial"/>
                 <a:ea typeface="Arial"/>
                 <a:cs typeface="Arial"/>
               </a:defRPr>
             </a:pPr>
             <a:r>
-              <a:rPr sz="3200" b="1" i="0">
+              <a:rPr sz="2400" b="1" i="0">
                 <a:solidFill>
                   <a:srgbClr val="102A43"/>
                 </a:solidFill>
@@ -30931,7 +30931,7 @@
           <p:cNvPr id="6" name="Rounded Rectangle 5">
             <a:extLst xmlns:a="http://schemas.openxmlformats.org/drawingml/2006/main">
               <a:ext uri="{FF2B5EF4-FFF2-40B4-BE49-F238E27FC236}">
-                <a16:creationId xmlns:a16="http://schemas.microsoft.com/office/drawing/2014/main" id="{D3C94CB7-330C-46C0-B1E2-E1FA0FDAC5D5}"/>
+                <a16:creationId xmlns:a16="http://schemas.microsoft.com/office/drawing/2014/main" id="{43174FE3-3D80-494C-96A6-D1C2543BD3C6}"/>
               </a:ext>
             </a:extLst>
           </p:cNvPr>
@@ -30988,7 +30988,7 @@
           <p:cNvPr id="7" name="TextBox 6">
             <a:extLst xmlns:a="http://schemas.openxmlformats.org/drawingml/2006/main">
               <a:ext uri="{FF2B5EF4-FFF2-40B4-BE49-F238E27FC236}">
-                <a16:creationId xmlns:a16="http://schemas.microsoft.com/office/drawing/2014/main" id="{459197FA-8BF0-480C-A6BD-14C6DFA57A73}"/>
+                <a16:creationId xmlns:a16="http://schemas.microsoft.com/office/drawing/2014/main" id="{272472B2-42F7-474F-8CA2-47316A8BC461}"/>
               </a:ext>
             </a:extLst>
           </p:cNvPr>
@@ -31043,7 +31043,7 @@
           <p:cNvPr id="8" name="TextBox 7">
             <a:extLst xmlns:a="http://schemas.openxmlformats.org/drawingml/2006/main">
               <a:ext uri="{FF2B5EF4-FFF2-40B4-BE49-F238E27FC236}">
-                <a16:creationId xmlns:a16="http://schemas.microsoft.com/office/drawing/2014/main" id="{07AD483C-9A5E-4938-816E-84D091159479}"/>
+                <a16:creationId xmlns:a16="http://schemas.microsoft.com/office/drawing/2014/main" id="{5C8C2792-FAC7-416D-A2E5-DCD856660969}"/>
               </a:ext>
             </a:extLst>
           </p:cNvPr>
@@ -31098,7 +31098,7 @@
           <p:cNvPr id="9" name="TextBox 8">
             <a:extLst xmlns:a="http://schemas.openxmlformats.org/drawingml/2006/main">
               <a:ext uri="{FF2B5EF4-FFF2-40B4-BE49-F238E27FC236}">
-                <a16:creationId xmlns:a16="http://schemas.microsoft.com/office/drawing/2014/main" id="{C0E22D36-22EC-446A-A300-967023CFB9D1}"/>
+                <a16:creationId xmlns:a16="http://schemas.microsoft.com/office/drawing/2014/main" id="{BA012A10-87CA-46C0-AD3F-17D67D27F99D}"/>
               </a:ext>
             </a:extLst>
           </p:cNvPr>
@@ -31210,7 +31210,7 @@
           <p:cNvPr id="10" name="Rounded Rectangle 9">
             <a:extLst xmlns:a="http://schemas.openxmlformats.org/drawingml/2006/main">
               <a:ext uri="{FF2B5EF4-FFF2-40B4-BE49-F238E27FC236}">
-                <a16:creationId xmlns:a16="http://schemas.microsoft.com/office/drawing/2014/main" id="{D98AFD31-49A9-465B-A0B4-365ED048B13E}"/>
+                <a16:creationId xmlns:a16="http://schemas.microsoft.com/office/drawing/2014/main" id="{DDD1492A-7BB1-4B7D-8173-8F9C238CBFE3}"/>
               </a:ext>
             </a:extLst>
           </p:cNvPr>
@@ -31267,7 +31267,7 @@
           <p:cNvPr id="11" name="TextBox 10">
             <a:extLst xmlns:a="http://schemas.openxmlformats.org/drawingml/2006/main">
               <a:ext uri="{FF2B5EF4-FFF2-40B4-BE49-F238E27FC236}">
-                <a16:creationId xmlns:a16="http://schemas.microsoft.com/office/drawing/2014/main" id="{6B4A4019-9DEA-4523-8880-B90D537B68B0}"/>
+                <a16:creationId xmlns:a16="http://schemas.microsoft.com/office/drawing/2014/main" id="{6860D9B9-3A4A-4EB1-B54F-E596C0ADF33C}"/>
               </a:ext>
             </a:extLst>
           </p:cNvPr>
@@ -31322,7 +31322,7 @@
           <p:cNvPr id="12" name="TextBox 11">
             <a:extLst xmlns:a="http://schemas.openxmlformats.org/drawingml/2006/main">
               <a:ext uri="{FF2B5EF4-FFF2-40B4-BE49-F238E27FC236}">
-                <a16:creationId xmlns:a16="http://schemas.microsoft.com/office/drawing/2014/main" id="{A9243D22-29E1-4165-B50A-D2642B29094D}"/>
+                <a16:creationId xmlns:a16="http://schemas.microsoft.com/office/drawing/2014/main" id="{11642E65-45E1-4C23-A237-E0E52155CD39}"/>
               </a:ext>
             </a:extLst>
           </p:cNvPr>
@@ -31377,7 +31377,7 @@
           <p:cNvPr id="13" name="TextBox 12">
             <a:extLst xmlns:a="http://schemas.openxmlformats.org/drawingml/2006/main">
               <a:ext uri="{FF2B5EF4-FFF2-40B4-BE49-F238E27FC236}">
-                <a16:creationId xmlns:a16="http://schemas.microsoft.com/office/drawing/2014/main" id="{BC66F91C-4759-4D98-BF3B-77A468D32FBE}"/>
+                <a16:creationId xmlns:a16="http://schemas.microsoft.com/office/drawing/2014/main" id="{64DF2B24-EC3C-4334-BF6C-5C44AA19D36D}"/>
               </a:ext>
             </a:extLst>
           </p:cNvPr>
@@ -31489,7 +31489,7 @@
           <p:cNvPr id="14" name="Rectangle 13">
             <a:extLst xmlns:a="http://schemas.openxmlformats.org/drawingml/2006/main">
               <a:ext uri="{FF2B5EF4-FFF2-40B4-BE49-F238E27FC236}">
-                <a16:creationId xmlns:a16="http://schemas.microsoft.com/office/drawing/2014/main" id="{B2B21E0C-9F5F-4695-BA66-378664347842}"/>
+                <a16:creationId xmlns:a16="http://schemas.microsoft.com/office/drawing/2014/main" id="{FB86DB28-30F5-44BC-A46F-27A7549F527F}"/>
               </a:ext>
             </a:extLst>
           </p:cNvPr>
@@ -31542,7 +31542,7 @@
           <p:cNvPr id="15" name="Rectangle 14">
             <a:extLst xmlns:a="http://schemas.openxmlformats.org/drawingml/2006/main">
               <a:ext uri="{FF2B5EF4-FFF2-40B4-BE49-F238E27FC236}">
-                <a16:creationId xmlns:a16="http://schemas.microsoft.com/office/drawing/2014/main" id="{D8E98CF8-C14A-4C0E-9F32-2E99E2763D00}"/>
+                <a16:creationId xmlns:a16="http://schemas.microsoft.com/office/drawing/2014/main" id="{8E2077BB-2315-4B7B-B6CF-5313B33BA226}"/>
               </a:ext>
             </a:extLst>
           </p:cNvPr>
@@ -31595,7 +31595,7 @@
           <p:cNvPr id="16" name="TextBox 15">
             <a:extLst xmlns:a="http://schemas.openxmlformats.org/drawingml/2006/main">
               <a:ext uri="{FF2B5EF4-FFF2-40B4-BE49-F238E27FC236}">
-                <a16:creationId xmlns:a16="http://schemas.microsoft.com/office/drawing/2014/main" id="{1C3C4ACB-4B52-4E77-B7AF-901AF5A69BFF}"/>
+                <a16:creationId xmlns:a16="http://schemas.microsoft.com/office/drawing/2014/main" id="{746CFF46-4075-4715-87CA-F69C302875C6}"/>
               </a:ext>
             </a:extLst>
           </p:cNvPr>
@@ -31650,7 +31650,7 @@
           <p:cNvPr id="17" name="TextBox 16">
             <a:extLst xmlns:a="http://schemas.openxmlformats.org/drawingml/2006/main">
               <a:ext uri="{FF2B5EF4-FFF2-40B4-BE49-F238E27FC236}">
-                <a16:creationId xmlns:a16="http://schemas.microsoft.com/office/drawing/2014/main" id="{66F4B51F-1B30-42A8-BDB8-4B05D0AC2D07}"/>
+                <a16:creationId xmlns:a16="http://schemas.microsoft.com/office/drawing/2014/main" id="{CC8AF364-C9C7-4B96-8E5F-2126319D0575}"/>
               </a:ext>
             </a:extLst>
           </p:cNvPr>
@@ -31703,7 +31703,7 @@
     </p:spTree>
     <p:extLst>
       <p:ext uri="{BB962C8B-B14F-4D97-AF65-F5344CB8AC3E}">
-        <p14:creationId xmlns:p14="http://schemas.microsoft.com/office/powerpoint/2010/main" val="870142437"/>
+        <p14:creationId xmlns:p14="http://schemas.microsoft.com/office/powerpoint/2010/main" val="1748867900"/>
       </p:ext>
     </p:extLst>
   </p:cSld>
@@ -31731,7 +31731,7 @@
           <p:nvPr/>
         </p:nvPicPr>
         <p:blipFill>
-          <a:blip xmlns:r="http://schemas.openxmlformats.org/officeDocument/2006/relationships" xmlns:a="http://schemas.openxmlformats.org/drawingml/2006/main" r:embed="Rddbd3c955cee492e"/>
+          <a:blip xmlns:r="http://schemas.openxmlformats.org/officeDocument/2006/relationships" xmlns:a="http://schemas.openxmlformats.org/drawingml/2006/main" r:embed="Rce8ae774dbd948d1"/>
           <a:stretch xmlns:a="http://schemas.openxmlformats.org/drawingml/2006/main">
             <a:fillRect l="0" t="0" r="0" b="0"/>
           </a:stretch>
@@ -31751,7 +31751,7 @@
           <p:cNvPr id="3" name="Rectangle 2">
             <a:extLst xmlns:a="http://schemas.openxmlformats.org/drawingml/2006/main">
               <a:ext uri="{FF2B5EF4-FFF2-40B4-BE49-F238E27FC236}">
-                <a16:creationId xmlns:a16="http://schemas.microsoft.com/office/drawing/2014/main" id="{C4B9CD94-5402-4EAF-9551-D15FCA0B2DA5}"/>
+                <a16:creationId xmlns:a16="http://schemas.microsoft.com/office/drawing/2014/main" id="{7B88C431-1039-4132-B659-174BFA6A03E6}"/>
               </a:ext>
             </a:extLst>
           </p:cNvPr>
@@ -31804,7 +31804,7 @@
           <p:cNvPr id="4" name="TextBox 3">
             <a:extLst xmlns:a="http://schemas.openxmlformats.org/drawingml/2006/main">
               <a:ext uri="{FF2B5EF4-FFF2-40B4-BE49-F238E27FC236}">
-                <a16:creationId xmlns:a16="http://schemas.microsoft.com/office/drawing/2014/main" id="{53404FBA-5F8C-4273-B708-4D40E405081D}"/>
+                <a16:creationId xmlns:a16="http://schemas.microsoft.com/office/drawing/2014/main" id="{9FDF90D8-C3E3-4797-AD5D-A30767172A8B}"/>
               </a:ext>
             </a:extLst>
           </p:cNvPr>
@@ -31859,7 +31859,7 @@
           <p:cNvPr id="5" name="TextBox 4">
             <a:extLst xmlns:a="http://schemas.openxmlformats.org/drawingml/2006/main">
               <a:ext uri="{FF2B5EF4-FFF2-40B4-BE49-F238E27FC236}">
-                <a16:creationId xmlns:a16="http://schemas.microsoft.com/office/drawing/2014/main" id="{99B44DE9-4561-446A-BF66-2080B816FA2B}"/>
+                <a16:creationId xmlns:a16="http://schemas.microsoft.com/office/drawing/2014/main" id="{E14CD31F-83FA-4328-B1DC-CB167B0E7C7B}"/>
               </a:ext>
             </a:extLst>
           </p:cNvPr>
@@ -31871,7 +31871,7 @@
         <p:spPr>
           <a:xfrm xmlns:a="http://schemas.openxmlformats.org/drawingml/2006/main">
             <a:off x="406400" y="1473200"/>
-            <a:ext cx="10477500" cy="1072896"/>
+            <a:ext cx="10477500" cy="571500"/>
           </a:xfrm>
           <a:prstGeom xmlns:a="http://schemas.openxmlformats.org/drawingml/2006/main" prst="rect">
             <a:avLst/>
@@ -31889,14 +31889,14 @@
                 <a:spcPct val="110000"/>
               </a:lnSpc>
               <a:buNone/>
-              <a:defRPr sz="3200">
+              <a:defRPr sz="2400">
                 <a:latin typeface="Arial"/>
                 <a:ea typeface="Arial"/>
                 <a:cs typeface="Arial"/>
               </a:defRPr>
             </a:pPr>
             <a:r>
-              <a:rPr sz="3200" b="1" i="0">
+              <a:rPr sz="2400" b="1" i="0">
                 <a:solidFill>
                   <a:srgbClr val="102A43"/>
                 </a:solidFill>
@@ -31914,7 +31914,7 @@
           <p:cNvPr id="6" name="Rounded Rectangle 5">
             <a:extLst xmlns:a="http://schemas.openxmlformats.org/drawingml/2006/main">
               <a:ext uri="{FF2B5EF4-FFF2-40B4-BE49-F238E27FC236}">
-                <a16:creationId xmlns:a16="http://schemas.microsoft.com/office/drawing/2014/main" id="{E1F751A4-349E-4A3F-9283-2BB19558CCF4}"/>
+                <a16:creationId xmlns:a16="http://schemas.microsoft.com/office/drawing/2014/main" id="{97C1DDE7-968D-448D-9185-4B32065A913A}"/>
               </a:ext>
             </a:extLst>
           </p:cNvPr>
@@ -31971,7 +31971,7 @@
           <p:cNvPr id="7" name="TextBox 6">
             <a:extLst xmlns:a="http://schemas.openxmlformats.org/drawingml/2006/main">
               <a:ext uri="{FF2B5EF4-FFF2-40B4-BE49-F238E27FC236}">
-                <a16:creationId xmlns:a16="http://schemas.microsoft.com/office/drawing/2014/main" id="{5FD2ED10-2C6C-432A-ADAD-4EB29C1DD28C}"/>
+                <a16:creationId xmlns:a16="http://schemas.microsoft.com/office/drawing/2014/main" id="{0CB4FC7F-814D-4A6E-B836-0160D642A70A}"/>
               </a:ext>
             </a:extLst>
           </p:cNvPr>
@@ -32026,7 +32026,7 @@
           <p:cNvPr id="8" name="TextBox 7">
             <a:extLst xmlns:a="http://schemas.openxmlformats.org/drawingml/2006/main">
               <a:ext uri="{FF2B5EF4-FFF2-40B4-BE49-F238E27FC236}">
-                <a16:creationId xmlns:a16="http://schemas.microsoft.com/office/drawing/2014/main" id="{BFB7A50E-51D7-4F30-B87F-341B6F26EA21}"/>
+                <a16:creationId xmlns:a16="http://schemas.microsoft.com/office/drawing/2014/main" id="{772A4E41-561E-4BD6-9242-C2FE6362C8C5}"/>
               </a:ext>
             </a:extLst>
           </p:cNvPr>
@@ -32081,7 +32081,7 @@
           <p:cNvPr id="9" name="TextBox 8">
             <a:extLst xmlns:a="http://schemas.openxmlformats.org/drawingml/2006/main">
               <a:ext uri="{FF2B5EF4-FFF2-40B4-BE49-F238E27FC236}">
-                <a16:creationId xmlns:a16="http://schemas.microsoft.com/office/drawing/2014/main" id="{5647DEBA-0CCC-4E75-BE49-7CA7C25E0412}"/>
+                <a16:creationId xmlns:a16="http://schemas.microsoft.com/office/drawing/2014/main" id="{117C5A97-3B4F-473D-8F53-104CE9BF68E4}"/>
               </a:ext>
             </a:extLst>
           </p:cNvPr>
@@ -32166,7 +32166,7 @@
           <p:cNvPr id="10" name="Rounded Rectangle 9">
             <a:extLst xmlns:a="http://schemas.openxmlformats.org/drawingml/2006/main">
               <a:ext uri="{FF2B5EF4-FFF2-40B4-BE49-F238E27FC236}">
-                <a16:creationId xmlns:a16="http://schemas.microsoft.com/office/drawing/2014/main" id="{22E66DC7-F4E6-4C15-AE6E-06FC981BC606}"/>
+                <a16:creationId xmlns:a16="http://schemas.microsoft.com/office/drawing/2014/main" id="{2ECBF512-1C28-4AE0-B797-722CB0A51255}"/>
               </a:ext>
             </a:extLst>
           </p:cNvPr>
@@ -32223,7 +32223,7 @@
           <p:cNvPr id="11" name="TextBox 10">
             <a:extLst xmlns:a="http://schemas.openxmlformats.org/drawingml/2006/main">
               <a:ext uri="{FF2B5EF4-FFF2-40B4-BE49-F238E27FC236}">
-                <a16:creationId xmlns:a16="http://schemas.microsoft.com/office/drawing/2014/main" id="{114825B3-0633-4C43-B992-0504310B1504}"/>
+                <a16:creationId xmlns:a16="http://schemas.microsoft.com/office/drawing/2014/main" id="{CD2A9841-9484-4FF7-AED2-636A1BD0442C}"/>
               </a:ext>
             </a:extLst>
           </p:cNvPr>
@@ -32278,7 +32278,7 @@
           <p:cNvPr id="12" name="TextBox 11">
             <a:extLst xmlns:a="http://schemas.openxmlformats.org/drawingml/2006/main">
               <a:ext uri="{FF2B5EF4-FFF2-40B4-BE49-F238E27FC236}">
-                <a16:creationId xmlns:a16="http://schemas.microsoft.com/office/drawing/2014/main" id="{B20043F7-8592-4820-82CE-FA32BBA454A7}"/>
+                <a16:creationId xmlns:a16="http://schemas.microsoft.com/office/drawing/2014/main" id="{88297EE9-929B-4AA9-B3C1-0E7124CF650B}"/>
               </a:ext>
             </a:extLst>
           </p:cNvPr>
@@ -32333,7 +32333,7 @@
           <p:cNvPr id="13" name="TextBox 12">
             <a:extLst xmlns:a="http://schemas.openxmlformats.org/drawingml/2006/main">
               <a:ext uri="{FF2B5EF4-FFF2-40B4-BE49-F238E27FC236}">
-                <a16:creationId xmlns:a16="http://schemas.microsoft.com/office/drawing/2014/main" id="{A74C874D-61FD-48E1-81A4-9A06AED14017}"/>
+                <a16:creationId xmlns:a16="http://schemas.microsoft.com/office/drawing/2014/main" id="{22CA0483-E580-4B51-89BB-09705D82A3E1}"/>
               </a:ext>
             </a:extLst>
           </p:cNvPr>
@@ -32418,7 +32418,7 @@
           <p:cNvPr id="14" name="Rounded Rectangle 13">
             <a:extLst xmlns:a="http://schemas.openxmlformats.org/drawingml/2006/main">
               <a:ext uri="{FF2B5EF4-FFF2-40B4-BE49-F238E27FC236}">
-                <a16:creationId xmlns:a16="http://schemas.microsoft.com/office/drawing/2014/main" id="{02DEA565-85FC-43E3-BB87-DF56AC349D4D}"/>
+                <a16:creationId xmlns:a16="http://schemas.microsoft.com/office/drawing/2014/main" id="{6FCD4E5C-423F-4843-9DDE-D879C4879804}"/>
               </a:ext>
             </a:extLst>
           </p:cNvPr>
@@ -32475,7 +32475,7 @@
           <p:cNvPr id="15" name="TextBox 14">
             <a:extLst xmlns:a="http://schemas.openxmlformats.org/drawingml/2006/main">
               <a:ext uri="{FF2B5EF4-FFF2-40B4-BE49-F238E27FC236}">
-                <a16:creationId xmlns:a16="http://schemas.microsoft.com/office/drawing/2014/main" id="{FB4650F9-143D-4139-A45D-3F98E81EBCB4}"/>
+                <a16:creationId xmlns:a16="http://schemas.microsoft.com/office/drawing/2014/main" id="{DA5D0598-17C2-4B88-A55B-7862635FCB2E}"/>
               </a:ext>
             </a:extLst>
           </p:cNvPr>
@@ -32530,7 +32530,7 @@
           <p:cNvPr id="16" name="TextBox 15">
             <a:extLst xmlns:a="http://schemas.openxmlformats.org/drawingml/2006/main">
               <a:ext uri="{FF2B5EF4-FFF2-40B4-BE49-F238E27FC236}">
-                <a16:creationId xmlns:a16="http://schemas.microsoft.com/office/drawing/2014/main" id="{2F555AB9-BE5E-4F6E-8CBF-CE148CB225AA}"/>
+                <a16:creationId xmlns:a16="http://schemas.microsoft.com/office/drawing/2014/main" id="{8DA6D27E-688C-4B89-A071-D216FECCF34D}"/>
               </a:ext>
             </a:extLst>
           </p:cNvPr>
@@ -32585,7 +32585,7 @@
           <p:cNvPr id="17" name="TextBox 16">
             <a:extLst xmlns:a="http://schemas.openxmlformats.org/drawingml/2006/main">
               <a:ext uri="{FF2B5EF4-FFF2-40B4-BE49-F238E27FC236}">
-                <a16:creationId xmlns:a16="http://schemas.microsoft.com/office/drawing/2014/main" id="{F2EBD986-D687-42DD-8437-3EC922AB8C16}"/>
+                <a16:creationId xmlns:a16="http://schemas.microsoft.com/office/drawing/2014/main" id="{599469EA-6410-43E2-AFDF-CA9F6E444943}"/>
               </a:ext>
             </a:extLst>
           </p:cNvPr>
@@ -32670,7 +32670,7 @@
           <p:cNvPr id="18" name="Rectangle 17">
             <a:extLst xmlns:a="http://schemas.openxmlformats.org/drawingml/2006/main">
               <a:ext uri="{FF2B5EF4-FFF2-40B4-BE49-F238E27FC236}">
-                <a16:creationId xmlns:a16="http://schemas.microsoft.com/office/drawing/2014/main" id="{D48E0B1C-505E-40AF-9DAB-D6F3078B4B92}"/>
+                <a16:creationId xmlns:a16="http://schemas.microsoft.com/office/drawing/2014/main" id="{00283468-253F-4C68-8C17-503D2611072B}"/>
               </a:ext>
             </a:extLst>
           </p:cNvPr>
@@ -32723,7 +32723,7 @@
           <p:cNvPr id="19" name="Rectangle 18">
             <a:extLst xmlns:a="http://schemas.openxmlformats.org/drawingml/2006/main">
               <a:ext uri="{FF2B5EF4-FFF2-40B4-BE49-F238E27FC236}">
-                <a16:creationId xmlns:a16="http://schemas.microsoft.com/office/drawing/2014/main" id="{8860ABC8-772A-4BE5-903A-C24A2F69DCD5}"/>
+                <a16:creationId xmlns:a16="http://schemas.microsoft.com/office/drawing/2014/main" id="{1C7F722B-1919-4E77-9B3A-A9D65F0286D8}"/>
               </a:ext>
             </a:extLst>
           </p:cNvPr>
@@ -32776,7 +32776,7 @@
           <p:cNvPr id="20" name="TextBox 19">
             <a:extLst xmlns:a="http://schemas.openxmlformats.org/drawingml/2006/main">
               <a:ext uri="{FF2B5EF4-FFF2-40B4-BE49-F238E27FC236}">
-                <a16:creationId xmlns:a16="http://schemas.microsoft.com/office/drawing/2014/main" id="{BBBF6989-0270-4799-AD55-B063449D75F3}"/>
+                <a16:creationId xmlns:a16="http://schemas.microsoft.com/office/drawing/2014/main" id="{561860F8-8099-4DAE-BCFA-8CD36945370C}"/>
               </a:ext>
             </a:extLst>
           </p:cNvPr>
@@ -32831,7 +32831,7 @@
           <p:cNvPr id="21" name="TextBox 20">
             <a:extLst xmlns:a="http://schemas.openxmlformats.org/drawingml/2006/main">
               <a:ext uri="{FF2B5EF4-FFF2-40B4-BE49-F238E27FC236}">
-                <a16:creationId xmlns:a16="http://schemas.microsoft.com/office/drawing/2014/main" id="{49BF5B6E-4A50-41B6-A833-B8FAEE937C81}"/>
+                <a16:creationId xmlns:a16="http://schemas.microsoft.com/office/drawing/2014/main" id="{756DD93A-B95C-4BC0-858B-EE68328FEF74}"/>
               </a:ext>
             </a:extLst>
           </p:cNvPr>
@@ -32884,7 +32884,7 @@
     </p:spTree>
     <p:extLst>
       <p:ext uri="{BB962C8B-B14F-4D97-AF65-F5344CB8AC3E}">
-        <p14:creationId xmlns:p14="http://schemas.microsoft.com/office/powerpoint/2010/main" val="1595937297"/>
+        <p14:creationId xmlns:p14="http://schemas.microsoft.com/office/powerpoint/2010/main" val="1106946989"/>
       </p:ext>
     </p:extLst>
   </p:cSld>
@@ -32912,7 +32912,7 @@
           <p:nvPr/>
         </p:nvPicPr>
         <p:blipFill>
-          <a:blip xmlns:r="http://schemas.openxmlformats.org/officeDocument/2006/relationships" xmlns:a="http://schemas.openxmlformats.org/drawingml/2006/main" r:embed="Rfd914e12e23540d1"/>
+          <a:blip xmlns:r="http://schemas.openxmlformats.org/officeDocument/2006/relationships" xmlns:a="http://schemas.openxmlformats.org/drawingml/2006/main" r:embed="R06ffe689fa2a4f8a"/>
           <a:stretch xmlns:a="http://schemas.openxmlformats.org/drawingml/2006/main">
             <a:fillRect l="0" t="0" r="0" b="0"/>
           </a:stretch>
@@ -32932,7 +32932,7 @@
           <p:cNvPr id="3" name="Rectangle 2">
             <a:extLst xmlns:a="http://schemas.openxmlformats.org/drawingml/2006/main">
               <a:ext uri="{FF2B5EF4-FFF2-40B4-BE49-F238E27FC236}">
-                <a16:creationId xmlns:a16="http://schemas.microsoft.com/office/drawing/2014/main" id="{917A8940-4B5B-409E-B250-049B8D4F3C69}"/>
+                <a16:creationId xmlns:a16="http://schemas.microsoft.com/office/drawing/2014/main" id="{81180F9F-FFCC-4C4A-A8FB-468EF91F86E5}"/>
               </a:ext>
             </a:extLst>
           </p:cNvPr>
@@ -32985,7 +32985,7 @@
           <p:cNvPr id="4" name="TextBox 3">
             <a:extLst xmlns:a="http://schemas.openxmlformats.org/drawingml/2006/main">
               <a:ext uri="{FF2B5EF4-FFF2-40B4-BE49-F238E27FC236}">
-                <a16:creationId xmlns:a16="http://schemas.microsoft.com/office/drawing/2014/main" id="{33B8A867-C24F-4B78-9E23-69697B3D3799}"/>
+                <a16:creationId xmlns:a16="http://schemas.microsoft.com/office/drawing/2014/main" id="{C7581686-A65B-4116-A4C8-1FE19276A612}"/>
               </a:ext>
             </a:extLst>
           </p:cNvPr>
@@ -33040,7 +33040,7 @@
           <p:cNvPr id="5" name="TextBox 4">
             <a:extLst xmlns:a="http://schemas.openxmlformats.org/drawingml/2006/main">
               <a:ext uri="{FF2B5EF4-FFF2-40B4-BE49-F238E27FC236}">
-                <a16:creationId xmlns:a16="http://schemas.microsoft.com/office/drawing/2014/main" id="{0D1CF9B9-298F-4EC2-8800-78A7F4E0F1C6}"/>
+                <a16:creationId xmlns:a16="http://schemas.microsoft.com/office/drawing/2014/main" id="{F980B98D-90E6-4D07-BCDD-CD17EC7A1A9E}"/>
               </a:ext>
             </a:extLst>
           </p:cNvPr>
@@ -33070,14 +33070,14 @@
                 <a:spcPct val="110000"/>
               </a:lnSpc>
               <a:buNone/>
-              <a:defRPr sz="3200">
+              <a:defRPr sz="2400">
                 <a:latin typeface="Arial"/>
                 <a:ea typeface="Arial"/>
                 <a:cs typeface="Arial"/>
               </a:defRPr>
             </a:pPr>
             <a:r>
-              <a:rPr sz="3200" b="1" i="0">
+              <a:rPr sz="2400" b="1" i="0">
                 <a:solidFill>
                   <a:srgbClr val="102A43"/>
                 </a:solidFill>
@@ -33095,7 +33095,7 @@
           <p:cNvPr id="6" name="TextBox 5">
             <a:extLst xmlns:a="http://schemas.openxmlformats.org/drawingml/2006/main">
               <a:ext uri="{FF2B5EF4-FFF2-40B4-BE49-F238E27FC236}">
-                <a16:creationId xmlns:a16="http://schemas.microsoft.com/office/drawing/2014/main" id="{A1D0DA0D-99DC-4643-9C87-F9C0E3D42216}"/>
+                <a16:creationId xmlns:a16="http://schemas.microsoft.com/office/drawing/2014/main" id="{D0026497-79D1-49AB-B5F4-F738DFC84217}"/>
               </a:ext>
             </a:extLst>
           </p:cNvPr>
@@ -33261,7 +33261,7 @@
           <p:cNvPr id="7" name="Rectangle 6">
             <a:extLst xmlns:a="http://schemas.openxmlformats.org/drawingml/2006/main">
               <a:ext uri="{FF2B5EF4-FFF2-40B4-BE49-F238E27FC236}">
-                <a16:creationId xmlns:a16="http://schemas.microsoft.com/office/drawing/2014/main" id="{9BBB5326-E689-41F9-AB79-35806BA0E7BE}"/>
+                <a16:creationId xmlns:a16="http://schemas.microsoft.com/office/drawing/2014/main" id="{1244F5F5-4FD2-43B5-A628-05B8FB4E354C}"/>
               </a:ext>
             </a:extLst>
           </p:cNvPr>
@@ -33314,7 +33314,7 @@
           <p:cNvPr id="8" name="Rectangle 7">
             <a:extLst xmlns:a="http://schemas.openxmlformats.org/drawingml/2006/main">
               <a:ext uri="{FF2B5EF4-FFF2-40B4-BE49-F238E27FC236}">
-                <a16:creationId xmlns:a16="http://schemas.microsoft.com/office/drawing/2014/main" id="{AFCF7C63-50A8-4CD4-9F13-E060AC3A3A16}"/>
+                <a16:creationId xmlns:a16="http://schemas.microsoft.com/office/drawing/2014/main" id="{C5BF43F3-3EF4-44EF-88A0-A8F765348662}"/>
               </a:ext>
             </a:extLst>
           </p:cNvPr>
@@ -33367,7 +33367,7 @@
           <p:cNvPr id="9" name="TextBox 8">
             <a:extLst xmlns:a="http://schemas.openxmlformats.org/drawingml/2006/main">
               <a:ext uri="{FF2B5EF4-FFF2-40B4-BE49-F238E27FC236}">
-                <a16:creationId xmlns:a16="http://schemas.microsoft.com/office/drawing/2014/main" id="{D6DD3B90-B41E-4AB4-A05A-A7671D4E568B}"/>
+                <a16:creationId xmlns:a16="http://schemas.microsoft.com/office/drawing/2014/main" id="{3D78A5C3-7FB7-45CC-A9D6-368EDD7D2DAD}"/>
               </a:ext>
             </a:extLst>
           </p:cNvPr>
@@ -33422,7 +33422,7 @@
           <p:cNvPr id="10" name="TextBox 9">
             <a:extLst xmlns:a="http://schemas.openxmlformats.org/drawingml/2006/main">
               <a:ext uri="{FF2B5EF4-FFF2-40B4-BE49-F238E27FC236}">
-                <a16:creationId xmlns:a16="http://schemas.microsoft.com/office/drawing/2014/main" id="{1E3A3337-3823-4E77-8745-83FF144C06C3}"/>
+                <a16:creationId xmlns:a16="http://schemas.microsoft.com/office/drawing/2014/main" id="{8151AB80-027E-4F1A-9E1B-AB252D2CF3BE}"/>
               </a:ext>
             </a:extLst>
           </p:cNvPr>
@@ -33475,7 +33475,7 @@
     </p:spTree>
     <p:extLst>
       <p:ext uri="{BB962C8B-B14F-4D97-AF65-F5344CB8AC3E}">
-        <p14:creationId xmlns:p14="http://schemas.microsoft.com/office/powerpoint/2010/main" val="1739668757"/>
+        <p14:creationId xmlns:p14="http://schemas.microsoft.com/office/powerpoint/2010/main" val="1733600924"/>
       </p:ext>
     </p:extLst>
   </p:cSld>
@@ -33503,7 +33503,7 @@
           <p:nvPr/>
         </p:nvPicPr>
         <p:blipFill>
-          <a:blip xmlns:r="http://schemas.openxmlformats.org/officeDocument/2006/relationships" xmlns:a="http://schemas.openxmlformats.org/drawingml/2006/main" r:embed="R47cee101e38d428e"/>
+          <a:blip xmlns:r="http://schemas.openxmlformats.org/officeDocument/2006/relationships" xmlns:a="http://schemas.openxmlformats.org/drawingml/2006/main" r:embed="R9da3034a4dcf47a7"/>
           <a:stretch xmlns:a="http://schemas.openxmlformats.org/drawingml/2006/main">
             <a:fillRect l="0" t="0" r="0" b="0"/>
           </a:stretch>
@@ -33523,7 +33523,7 @@
           <p:cNvPr id="3" name="Rectangle 2">
             <a:extLst xmlns:a="http://schemas.openxmlformats.org/drawingml/2006/main">
               <a:ext uri="{FF2B5EF4-FFF2-40B4-BE49-F238E27FC236}">
-                <a16:creationId xmlns:a16="http://schemas.microsoft.com/office/drawing/2014/main" id="{7FA57267-5612-455A-A504-59464C2F54EF}"/>
+                <a16:creationId xmlns:a16="http://schemas.microsoft.com/office/drawing/2014/main" id="{C81391C9-9061-4834-856C-09FA4627D328}"/>
               </a:ext>
             </a:extLst>
           </p:cNvPr>
@@ -33576,7 +33576,7 @@
           <p:cNvPr id="4" name="TextBox 3">
             <a:extLst xmlns:a="http://schemas.openxmlformats.org/drawingml/2006/main">
               <a:ext uri="{FF2B5EF4-FFF2-40B4-BE49-F238E27FC236}">
-                <a16:creationId xmlns:a16="http://schemas.microsoft.com/office/drawing/2014/main" id="{32556295-7BAF-45EA-B5F7-0FF26697EAAE}"/>
+                <a16:creationId xmlns:a16="http://schemas.microsoft.com/office/drawing/2014/main" id="{5316B755-4CA3-4671-B990-C0C2D6ED16CD}"/>
               </a:ext>
             </a:extLst>
           </p:cNvPr>
@@ -33631,7 +33631,7 @@
           <p:cNvPr id="5" name="TextBox 4">
             <a:extLst xmlns:a="http://schemas.openxmlformats.org/drawingml/2006/main">
               <a:ext uri="{FF2B5EF4-FFF2-40B4-BE49-F238E27FC236}">
-                <a16:creationId xmlns:a16="http://schemas.microsoft.com/office/drawing/2014/main" id="{1AFE5C9A-140C-4A68-93C9-1F900500543B}"/>
+                <a16:creationId xmlns:a16="http://schemas.microsoft.com/office/drawing/2014/main" id="{EEE8E250-9A72-4E84-866D-33D9631F1088}"/>
               </a:ext>
             </a:extLst>
           </p:cNvPr>
@@ -33661,14 +33661,14 @@
                 <a:spcPct val="110000"/>
               </a:lnSpc>
               <a:buNone/>
-              <a:defRPr sz="3200">
+              <a:defRPr sz="2400">
                 <a:latin typeface="Arial"/>
                 <a:ea typeface="Arial"/>
                 <a:cs typeface="Arial"/>
               </a:defRPr>
             </a:pPr>
             <a:r>
-              <a:rPr sz="3200" b="1" i="0">
+              <a:rPr sz="2400" b="1" i="0">
                 <a:solidFill>
                   <a:srgbClr val="102A43"/>
                 </a:solidFill>
@@ -33686,7 +33686,7 @@
           <p:cNvPr id="6" name="TextBox 5">
             <a:extLst xmlns:a="http://schemas.openxmlformats.org/drawingml/2006/main">
               <a:ext uri="{FF2B5EF4-FFF2-40B4-BE49-F238E27FC236}">
-                <a16:creationId xmlns:a16="http://schemas.microsoft.com/office/drawing/2014/main" id="{34F41EFE-934E-4A06-AC1A-BC5556EB64AC}"/>
+                <a16:creationId xmlns:a16="http://schemas.microsoft.com/office/drawing/2014/main" id="{823AB13B-F87F-45FE-85F7-14F0DA222A8D}"/>
               </a:ext>
             </a:extLst>
           </p:cNvPr>
@@ -33798,7 +33798,7 @@
           <p:cNvPr id="7" name="Rectangle 6">
             <a:extLst xmlns:a="http://schemas.openxmlformats.org/drawingml/2006/main">
               <a:ext uri="{FF2B5EF4-FFF2-40B4-BE49-F238E27FC236}">
-                <a16:creationId xmlns:a16="http://schemas.microsoft.com/office/drawing/2014/main" id="{468D8EB0-9A9D-4E05-B859-B47BA9D207FC}"/>
+                <a16:creationId xmlns:a16="http://schemas.microsoft.com/office/drawing/2014/main" id="{F90C9814-B272-49AC-A269-C0872424F116}"/>
               </a:ext>
             </a:extLst>
           </p:cNvPr>
@@ -33851,7 +33851,7 @@
           <p:cNvPr id="8" name="Rectangle 7">
             <a:extLst xmlns:a="http://schemas.openxmlformats.org/drawingml/2006/main">
               <a:ext uri="{FF2B5EF4-FFF2-40B4-BE49-F238E27FC236}">
-                <a16:creationId xmlns:a16="http://schemas.microsoft.com/office/drawing/2014/main" id="{66A61F1F-AB2C-42B9-ABDC-FD28C6F4E379}"/>
+                <a16:creationId xmlns:a16="http://schemas.microsoft.com/office/drawing/2014/main" id="{38F2121E-942D-49B3-900E-9D599294ECF1}"/>
               </a:ext>
             </a:extLst>
           </p:cNvPr>
@@ -33904,7 +33904,7 @@
           <p:cNvPr id="9" name="TextBox 8">
             <a:extLst xmlns:a="http://schemas.openxmlformats.org/drawingml/2006/main">
               <a:ext uri="{FF2B5EF4-FFF2-40B4-BE49-F238E27FC236}">
-                <a16:creationId xmlns:a16="http://schemas.microsoft.com/office/drawing/2014/main" id="{85707357-AC46-4C3E-A127-B3D75E58C7EB}"/>
+                <a16:creationId xmlns:a16="http://schemas.microsoft.com/office/drawing/2014/main" id="{25C26AE9-C777-4778-8F42-EC7CF2BF04A8}"/>
               </a:ext>
             </a:extLst>
           </p:cNvPr>
@@ -33959,7 +33959,7 @@
           <p:cNvPr id="10" name="TextBox 9">
             <a:extLst xmlns:a="http://schemas.openxmlformats.org/drawingml/2006/main">
               <a:ext uri="{FF2B5EF4-FFF2-40B4-BE49-F238E27FC236}">
-                <a16:creationId xmlns:a16="http://schemas.microsoft.com/office/drawing/2014/main" id="{8C45326C-6723-4441-819B-2DB27D53D9B1}"/>
+                <a16:creationId xmlns:a16="http://schemas.microsoft.com/office/drawing/2014/main" id="{A573BFFD-6BAC-4B69-90F0-587C1E98AFB5}"/>
               </a:ext>
             </a:extLst>
           </p:cNvPr>
@@ -34012,7 +34012,7 @@
     </p:spTree>
     <p:extLst>
       <p:ext uri="{BB962C8B-B14F-4D97-AF65-F5344CB8AC3E}">
-        <p14:creationId xmlns:p14="http://schemas.microsoft.com/office/powerpoint/2010/main" val="1264260838"/>
+        <p14:creationId xmlns:p14="http://schemas.microsoft.com/office/powerpoint/2010/main" val="711988249"/>
       </p:ext>
     </p:extLst>
   </p:cSld>
@@ -34040,7 +34040,7 @@
           <p:nvPr/>
         </p:nvPicPr>
         <p:blipFill>
-          <a:blip xmlns:r="http://schemas.openxmlformats.org/officeDocument/2006/relationships" xmlns:a="http://schemas.openxmlformats.org/drawingml/2006/main" r:embed="R15ad9100a53a4855"/>
+          <a:blip xmlns:r="http://schemas.openxmlformats.org/officeDocument/2006/relationships" xmlns:a="http://schemas.openxmlformats.org/drawingml/2006/main" r:embed="Rb6094dc05c0c4445"/>
           <a:stretch xmlns:a="http://schemas.openxmlformats.org/drawingml/2006/main">
             <a:fillRect l="0" t="0" r="0" b="0"/>
           </a:stretch>
@@ -34060,7 +34060,7 @@
           <p:cNvPr id="3" name="Rectangle 2">
             <a:extLst xmlns:a="http://schemas.openxmlformats.org/drawingml/2006/main">
               <a:ext uri="{FF2B5EF4-FFF2-40B4-BE49-F238E27FC236}">
-                <a16:creationId xmlns:a16="http://schemas.microsoft.com/office/drawing/2014/main" id="{61B34B92-7280-45E0-9974-374A890B087B}"/>
+                <a16:creationId xmlns:a16="http://schemas.microsoft.com/office/drawing/2014/main" id="{FFE638E1-90F2-4129-A4F5-CDBF7DFD224D}"/>
               </a:ext>
             </a:extLst>
           </p:cNvPr>
@@ -34113,7 +34113,7 @@
           <p:cNvPr id="4" name="TextBox 3">
             <a:extLst xmlns:a="http://schemas.openxmlformats.org/drawingml/2006/main">
               <a:ext uri="{FF2B5EF4-FFF2-40B4-BE49-F238E27FC236}">
-                <a16:creationId xmlns:a16="http://schemas.microsoft.com/office/drawing/2014/main" id="{A7FF3EFB-7004-4900-B91C-CD3A72019BE2}"/>
+                <a16:creationId xmlns:a16="http://schemas.microsoft.com/office/drawing/2014/main" id="{62E8A79C-D12C-44E2-9195-109DE1B63BEC}"/>
               </a:ext>
             </a:extLst>
           </p:cNvPr>
@@ -34168,7 +34168,7 @@
           <p:cNvPr id="5" name="Rectangle 4">
             <a:extLst xmlns:a="http://schemas.openxmlformats.org/drawingml/2006/main">
               <a:ext uri="{FF2B5EF4-FFF2-40B4-BE49-F238E27FC236}">
-                <a16:creationId xmlns:a16="http://schemas.microsoft.com/office/drawing/2014/main" id="{5E18A146-9B8B-46DC-8405-D7C6288DC4F2}"/>
+                <a16:creationId xmlns:a16="http://schemas.microsoft.com/office/drawing/2014/main" id="{BAC4FB01-7177-4619-9E32-711AEBEA0041}"/>
               </a:ext>
             </a:extLst>
           </p:cNvPr>
@@ -34221,7 +34221,7 @@
           <p:cNvPr id="6" name="TextBox 5">
             <a:extLst xmlns:a="http://schemas.openxmlformats.org/drawingml/2006/main">
               <a:ext uri="{FF2B5EF4-FFF2-40B4-BE49-F238E27FC236}">
-                <a16:creationId xmlns:a16="http://schemas.microsoft.com/office/drawing/2014/main" id="{1F2601C9-48AF-498D-9EC5-09E3C75A90F8}"/>
+                <a16:creationId xmlns:a16="http://schemas.microsoft.com/office/drawing/2014/main" id="{16A6B7FA-66A9-4CA8-A439-91AF2D238EC9}"/>
               </a:ext>
             </a:extLst>
           </p:cNvPr>
@@ -34276,7 +34276,7 @@
           <p:cNvPr id="7" name="TextBox 6">
             <a:extLst xmlns:a="http://schemas.openxmlformats.org/drawingml/2006/main">
               <a:ext uri="{FF2B5EF4-FFF2-40B4-BE49-F238E27FC236}">
-                <a16:creationId xmlns:a16="http://schemas.microsoft.com/office/drawing/2014/main" id="{B6C4E3E8-7EF2-4CDC-9E67-DAD79613EC9E}"/>
+                <a16:creationId xmlns:a16="http://schemas.microsoft.com/office/drawing/2014/main" id="{53D9FF50-E840-4E37-BE8E-17BC1CECE78D}"/>
               </a:ext>
             </a:extLst>
           </p:cNvPr>
@@ -34469,7 +34469,7 @@
           <p:cNvPr id="8" name="Rectangle 7">
             <a:extLst xmlns:a="http://schemas.openxmlformats.org/drawingml/2006/main">
               <a:ext uri="{FF2B5EF4-FFF2-40B4-BE49-F238E27FC236}">
-                <a16:creationId xmlns:a16="http://schemas.microsoft.com/office/drawing/2014/main" id="{0C768659-E583-4110-AF18-DF9EE93408C8}"/>
+                <a16:creationId xmlns:a16="http://schemas.microsoft.com/office/drawing/2014/main" id="{CDFD200F-9199-41E9-BA2A-874DAF7AC81A}"/>
               </a:ext>
             </a:extLst>
           </p:cNvPr>
@@ -34522,7 +34522,7 @@
           <p:cNvPr id="9" name="Rectangle 8">
             <a:extLst xmlns:a="http://schemas.openxmlformats.org/drawingml/2006/main">
               <a:ext uri="{FF2B5EF4-FFF2-40B4-BE49-F238E27FC236}">
-                <a16:creationId xmlns:a16="http://schemas.microsoft.com/office/drawing/2014/main" id="{BF3464AF-0E07-4627-B28E-39B4B7EECF2B}"/>
+                <a16:creationId xmlns:a16="http://schemas.microsoft.com/office/drawing/2014/main" id="{D0F3F815-84C5-4FCA-90AD-DAD56FF426C7}"/>
               </a:ext>
             </a:extLst>
           </p:cNvPr>
@@ -34575,7 +34575,7 @@
           <p:cNvPr id="10" name="TextBox 9">
             <a:extLst xmlns:a="http://schemas.openxmlformats.org/drawingml/2006/main">
               <a:ext uri="{FF2B5EF4-FFF2-40B4-BE49-F238E27FC236}">
-                <a16:creationId xmlns:a16="http://schemas.microsoft.com/office/drawing/2014/main" id="{FEA38AE8-3ED2-4AC1-BCED-6CBD5465F4D6}"/>
+                <a16:creationId xmlns:a16="http://schemas.microsoft.com/office/drawing/2014/main" id="{F82687DC-C742-4ADA-8319-5D5C552AD232}"/>
               </a:ext>
             </a:extLst>
           </p:cNvPr>
@@ -34630,7 +34630,7 @@
           <p:cNvPr id="11" name="TextBox 10">
             <a:extLst xmlns:a="http://schemas.openxmlformats.org/drawingml/2006/main">
               <a:ext uri="{FF2B5EF4-FFF2-40B4-BE49-F238E27FC236}">
-                <a16:creationId xmlns:a16="http://schemas.microsoft.com/office/drawing/2014/main" id="{3B743E60-6729-4E8E-825E-DC0EAC0C1633}"/>
+                <a16:creationId xmlns:a16="http://schemas.microsoft.com/office/drawing/2014/main" id="{6EA64C8E-6216-405D-970D-674C8FC6433F}"/>
               </a:ext>
             </a:extLst>
           </p:cNvPr>
@@ -34683,7 +34683,7 @@
     </p:spTree>
     <p:extLst>
       <p:ext uri="{BB962C8B-B14F-4D97-AF65-F5344CB8AC3E}">
-        <p14:creationId xmlns:p14="http://schemas.microsoft.com/office/powerpoint/2010/main" val="1302796225"/>
+        <p14:creationId xmlns:p14="http://schemas.microsoft.com/office/powerpoint/2010/main" val="1205352725"/>
       </p:ext>
     </p:extLst>
   </p:cSld>
@@ -34707,7 +34707,7 @@
           <p:cNvPr id="2" name="Rectangle 1">
             <a:extLst xmlns:a="http://schemas.openxmlformats.org/drawingml/2006/main">
               <a:ext uri="{FF2B5EF4-FFF2-40B4-BE49-F238E27FC236}">
-                <a16:creationId xmlns:a16="http://schemas.microsoft.com/office/drawing/2014/main" id="{DC61294C-5A65-4F4E-823A-8F1CE6211530}"/>
+                <a16:creationId xmlns:a16="http://schemas.microsoft.com/office/drawing/2014/main" id="{75B36800-B28A-411E-8B85-6E1B1A46AA83}"/>
               </a:ext>
             </a:extLst>
           </p:cNvPr>
@@ -34760,7 +34760,7 @@
           <p:cNvPr id="3" name="Rectangle 2">
             <a:extLst xmlns:a="http://schemas.openxmlformats.org/drawingml/2006/main">
               <a:ext uri="{FF2B5EF4-FFF2-40B4-BE49-F238E27FC236}">
-                <a16:creationId xmlns:a16="http://schemas.microsoft.com/office/drawing/2014/main" id="{7323B226-FD94-408F-AEE9-415799625888}"/>
+                <a16:creationId xmlns:a16="http://schemas.microsoft.com/office/drawing/2014/main" id="{DE828E7E-2E5A-42E9-A2A4-94F44119DB97}"/>
               </a:ext>
             </a:extLst>
           </p:cNvPr>
@@ -34813,7 +34813,7 @@
           <p:cNvPr id="4" name="TextBox 3">
             <a:extLst xmlns:a="http://schemas.openxmlformats.org/drawingml/2006/main">
               <a:ext uri="{FF2B5EF4-FFF2-40B4-BE49-F238E27FC236}">
-                <a16:creationId xmlns:a16="http://schemas.microsoft.com/office/drawing/2014/main" id="{8EA921B9-0D42-461F-B07B-C64961831B23}"/>
+                <a16:creationId xmlns:a16="http://schemas.microsoft.com/office/drawing/2014/main" id="{21F7DE9D-7385-4A2E-8697-4D00647B27DC}"/>
               </a:ext>
             </a:extLst>
           </p:cNvPr>
@@ -34868,7 +34868,7 @@
           <p:cNvPr id="5" name="TextBox 4">
             <a:extLst xmlns:a="http://schemas.openxmlformats.org/drawingml/2006/main">
               <a:ext uri="{FF2B5EF4-FFF2-40B4-BE49-F238E27FC236}">
-                <a16:creationId xmlns:a16="http://schemas.microsoft.com/office/drawing/2014/main" id="{CBD90FF4-836C-4A2D-934A-B68322D6C57C}"/>
+                <a16:creationId xmlns:a16="http://schemas.microsoft.com/office/drawing/2014/main" id="{9749B99A-CF54-4432-B207-BFF543ABF041}"/>
               </a:ext>
             </a:extLst>
           </p:cNvPr>
@@ -34923,7 +34923,7 @@
           <p:cNvPr id="6" name="TextBox 5">
             <a:extLst xmlns:a="http://schemas.openxmlformats.org/drawingml/2006/main">
               <a:ext uri="{FF2B5EF4-FFF2-40B4-BE49-F238E27FC236}">
-                <a16:creationId xmlns:a16="http://schemas.microsoft.com/office/drawing/2014/main" id="{6DC1BF23-2C8E-4686-999E-D4864F099802}"/>
+                <a16:creationId xmlns:a16="http://schemas.microsoft.com/office/drawing/2014/main" id="{78D092F7-4A7B-4C05-BECA-5B4747AEDCF9}"/>
               </a:ext>
             </a:extLst>
           </p:cNvPr>
@@ -34978,7 +34978,7 @@
           <p:cNvPr id="7" name="Rectangle 6">
             <a:extLst xmlns:a="http://schemas.openxmlformats.org/drawingml/2006/main">
               <a:ext uri="{FF2B5EF4-FFF2-40B4-BE49-F238E27FC236}">
-                <a16:creationId xmlns:a16="http://schemas.microsoft.com/office/drawing/2014/main" id="{94EB5767-0B51-4B10-817C-3D1805B7636A}"/>
+                <a16:creationId xmlns:a16="http://schemas.microsoft.com/office/drawing/2014/main" id="{266E9824-69ED-4492-B086-67E0074623C2}"/>
               </a:ext>
             </a:extLst>
           </p:cNvPr>
@@ -35029,7 +35029,7 @@
     </p:spTree>
     <p:extLst>
       <p:ext uri="{BB962C8B-B14F-4D97-AF65-F5344CB8AC3E}">
-        <p14:creationId xmlns:p14="http://schemas.microsoft.com/office/powerpoint/2010/main" val="556170575"/>
+        <p14:creationId xmlns:p14="http://schemas.microsoft.com/office/powerpoint/2010/main" val="420219369"/>
       </p:ext>
     </p:extLst>
   </p:cSld>
@@ -35057,7 +35057,7 @@
           <p:nvPr/>
         </p:nvPicPr>
         <p:blipFill>
-          <a:blip xmlns:r="http://schemas.openxmlformats.org/officeDocument/2006/relationships" xmlns:a="http://schemas.openxmlformats.org/drawingml/2006/main" r:embed="Ra664b835fad84b62"/>
+          <a:blip xmlns:r="http://schemas.openxmlformats.org/officeDocument/2006/relationships" xmlns:a="http://schemas.openxmlformats.org/drawingml/2006/main" r:embed="Rd9117a0add6041b1"/>
           <a:stretch xmlns:a="http://schemas.openxmlformats.org/drawingml/2006/main">
             <a:fillRect l="0" t="0" r="0" b="0"/>
           </a:stretch>
@@ -35077,7 +35077,7 @@
           <p:cNvPr id="3" name="Rectangle 2">
             <a:extLst xmlns:a="http://schemas.openxmlformats.org/drawingml/2006/main">
               <a:ext uri="{FF2B5EF4-FFF2-40B4-BE49-F238E27FC236}">
-                <a16:creationId xmlns:a16="http://schemas.microsoft.com/office/drawing/2014/main" id="{CD8041EF-4BAE-4605-A985-E5B014344539}"/>
+                <a16:creationId xmlns:a16="http://schemas.microsoft.com/office/drawing/2014/main" id="{44D074A8-74DA-4E88-96BE-E1774C60CBD8}"/>
               </a:ext>
             </a:extLst>
           </p:cNvPr>
@@ -35130,7 +35130,7 @@
           <p:cNvPr id="4" name="Rectangle 3">
             <a:extLst xmlns:a="http://schemas.openxmlformats.org/drawingml/2006/main">
               <a:ext uri="{FF2B5EF4-FFF2-40B4-BE49-F238E27FC236}">
-                <a16:creationId xmlns:a16="http://schemas.microsoft.com/office/drawing/2014/main" id="{B572DBDC-6593-4B48-B4FC-636AD3A78A87}"/>
+                <a16:creationId xmlns:a16="http://schemas.microsoft.com/office/drawing/2014/main" id="{C37A0591-0175-4355-B012-E263450FE6F4}"/>
               </a:ext>
             </a:extLst>
           </p:cNvPr>
@@ -35183,7 +35183,7 @@
           <p:cNvPr id="5" name="Rectangle 4">
             <a:extLst xmlns:a="http://schemas.openxmlformats.org/drawingml/2006/main">
               <a:ext uri="{FF2B5EF4-FFF2-40B4-BE49-F238E27FC236}">
-                <a16:creationId xmlns:a16="http://schemas.microsoft.com/office/drawing/2014/main" id="{C8C0F927-DE5C-4B92-9EC8-624721F22620}"/>
+                <a16:creationId xmlns:a16="http://schemas.microsoft.com/office/drawing/2014/main" id="{2C50AD7E-AE1D-483C-8D0B-023772FBE362}"/>
               </a:ext>
             </a:extLst>
           </p:cNvPr>
@@ -35240,7 +35240,7 @@
           <p:nvPr/>
         </p:nvPicPr>
         <p:blipFill>
-          <a:blip xmlns:r="http://schemas.openxmlformats.org/officeDocument/2006/relationships" xmlns:a="http://schemas.openxmlformats.org/drawingml/2006/main" r:embed="R8e40160ca28b48c5"/>
+          <a:blip xmlns:r="http://schemas.openxmlformats.org/officeDocument/2006/relationships" xmlns:a="http://schemas.openxmlformats.org/drawingml/2006/main" r:embed="Rc7c375328e954974"/>
           <a:stretch xmlns:a="http://schemas.openxmlformats.org/drawingml/2006/main">
             <a:fillRect l="0" t="0" r="0" b="0"/>
           </a:stretch>
@@ -35260,7 +35260,7 @@
           <p:cNvPr id="7" name="Rectangle 6">
             <a:extLst xmlns:a="http://schemas.openxmlformats.org/drawingml/2006/main">
               <a:ext uri="{FF2B5EF4-FFF2-40B4-BE49-F238E27FC236}">
-                <a16:creationId xmlns:a16="http://schemas.microsoft.com/office/drawing/2014/main" id="{4B62A26B-28B7-40C4-86E1-DD4BA3892BE9}"/>
+                <a16:creationId xmlns:a16="http://schemas.microsoft.com/office/drawing/2014/main" id="{CA171227-EB60-4358-9F53-072153434CC0}"/>
               </a:ext>
             </a:extLst>
           </p:cNvPr>
@@ -35313,7 +35313,7 @@
           <p:cNvPr id="8" name="TextBox 7">
             <a:extLst xmlns:a="http://schemas.openxmlformats.org/drawingml/2006/main">
               <a:ext uri="{FF2B5EF4-FFF2-40B4-BE49-F238E27FC236}">
-                <a16:creationId xmlns:a16="http://schemas.microsoft.com/office/drawing/2014/main" id="{7FA7000C-4A07-4CB4-AFF1-760C6E229367}"/>
+                <a16:creationId xmlns:a16="http://schemas.microsoft.com/office/drawing/2014/main" id="{7093CDC3-EFBD-4D2E-A39D-15923D8AE22C}"/>
               </a:ext>
             </a:extLst>
           </p:cNvPr>
@@ -35368,7 +35368,7 @@
           <p:cNvPr id="9" name="TextBox 8">
             <a:extLst xmlns:a="http://schemas.openxmlformats.org/drawingml/2006/main">
               <a:ext uri="{FF2B5EF4-FFF2-40B4-BE49-F238E27FC236}">
-                <a16:creationId xmlns:a16="http://schemas.microsoft.com/office/drawing/2014/main" id="{BB2ED613-FB42-4AB3-B7C5-4FF642BB3526}"/>
+                <a16:creationId xmlns:a16="http://schemas.microsoft.com/office/drawing/2014/main" id="{1C3FA8F4-3DAB-43A5-8FBB-D61494C6CDA1}"/>
               </a:ext>
             </a:extLst>
           </p:cNvPr>
@@ -35423,7 +35423,7 @@
           <p:cNvPr id="10" name="TextBox 9">
             <a:extLst xmlns:a="http://schemas.openxmlformats.org/drawingml/2006/main">
               <a:ext uri="{FF2B5EF4-FFF2-40B4-BE49-F238E27FC236}">
-                <a16:creationId xmlns:a16="http://schemas.microsoft.com/office/drawing/2014/main" id="{CB984E94-FF21-4D82-BA6D-DCC6DC9AEF6D}"/>
+                <a16:creationId xmlns:a16="http://schemas.microsoft.com/office/drawing/2014/main" id="{26D0FA69-73F7-44B9-ABCE-9EAEF4D79F90}"/>
               </a:ext>
             </a:extLst>
           </p:cNvPr>
@@ -35478,7 +35478,7 @@
           <p:cNvPr id="11" name="TextBox 10">
             <a:extLst xmlns:a="http://schemas.openxmlformats.org/drawingml/2006/main">
               <a:ext uri="{FF2B5EF4-FFF2-40B4-BE49-F238E27FC236}">
-                <a16:creationId xmlns:a16="http://schemas.microsoft.com/office/drawing/2014/main" id="{A0BEEB8C-7CE2-4E6D-9DAA-9AD18879F38E}"/>
+                <a16:creationId xmlns:a16="http://schemas.microsoft.com/office/drawing/2014/main" id="{A702D4FF-FD51-4304-AEFC-88474E4800CD}"/>
               </a:ext>
             </a:extLst>
           </p:cNvPr>
@@ -35533,7 +35533,7 @@
           <p:cNvPr id="12" name="Rectangle 11">
             <a:extLst xmlns:a="http://schemas.openxmlformats.org/drawingml/2006/main">
               <a:ext uri="{FF2B5EF4-FFF2-40B4-BE49-F238E27FC236}">
-                <a16:creationId xmlns:a16="http://schemas.microsoft.com/office/drawing/2014/main" id="{885B60C0-B335-49DB-9F33-3ACCCE705A9D}"/>
+                <a16:creationId xmlns:a16="http://schemas.microsoft.com/office/drawing/2014/main" id="{20F2169F-CEB3-4E19-ADF7-AEB7BFE03A31}"/>
               </a:ext>
             </a:extLst>
           </p:cNvPr>
@@ -35586,7 +35586,7 @@
           <p:cNvPr id="13" name="Rectangle 12">
             <a:extLst xmlns:a="http://schemas.openxmlformats.org/drawingml/2006/main">
               <a:ext uri="{FF2B5EF4-FFF2-40B4-BE49-F238E27FC236}">
-                <a16:creationId xmlns:a16="http://schemas.microsoft.com/office/drawing/2014/main" id="{EDA98737-F4E0-4C87-9AEB-440318A50217}"/>
+                <a16:creationId xmlns:a16="http://schemas.microsoft.com/office/drawing/2014/main" id="{8C9DED68-0FEE-4C0C-B65C-F49C1E16A9BD}"/>
               </a:ext>
             </a:extLst>
           </p:cNvPr>
@@ -35639,7 +35639,7 @@
           <p:cNvPr id="14" name="TextBox 13">
             <a:extLst xmlns:a="http://schemas.openxmlformats.org/drawingml/2006/main">
               <a:ext uri="{FF2B5EF4-FFF2-40B4-BE49-F238E27FC236}">
-                <a16:creationId xmlns:a16="http://schemas.microsoft.com/office/drawing/2014/main" id="{026DAC22-BB65-40B7-B4BC-FE325A4EAB64}"/>
+                <a16:creationId xmlns:a16="http://schemas.microsoft.com/office/drawing/2014/main" id="{70A2A2A7-D567-4400-9C39-4D6E3C59C0DE}"/>
               </a:ext>
             </a:extLst>
           </p:cNvPr>
@@ -35694,7 +35694,7 @@
           <p:cNvPr id="15" name="TextBox 14">
             <a:extLst xmlns:a="http://schemas.openxmlformats.org/drawingml/2006/main">
               <a:ext uri="{FF2B5EF4-FFF2-40B4-BE49-F238E27FC236}">
-                <a16:creationId xmlns:a16="http://schemas.microsoft.com/office/drawing/2014/main" id="{4BA48EF1-E518-46C4-9CDC-203C04917992}"/>
+                <a16:creationId xmlns:a16="http://schemas.microsoft.com/office/drawing/2014/main" id="{D88594CE-B222-4377-84D1-D53724B1F8DF}"/>
               </a:ext>
             </a:extLst>
           </p:cNvPr>
@@ -35747,7 +35747,7 @@
     </p:spTree>
     <p:extLst>
       <p:ext uri="{BB962C8B-B14F-4D97-AF65-F5344CB8AC3E}">
-        <p14:creationId xmlns:p14="http://schemas.microsoft.com/office/powerpoint/2010/main" val="1248991053"/>
+        <p14:creationId xmlns:p14="http://schemas.microsoft.com/office/powerpoint/2010/main" val="53061051"/>
       </p:ext>
     </p:extLst>
   </p:cSld>
@@ -35775,7 +35775,7 @@
           <p:nvPr/>
         </p:nvPicPr>
         <p:blipFill>
-          <a:blip xmlns:r="http://schemas.openxmlformats.org/officeDocument/2006/relationships" xmlns:a="http://schemas.openxmlformats.org/drawingml/2006/main" r:embed="Rade89903776a4ce3"/>
+          <a:blip xmlns:r="http://schemas.openxmlformats.org/officeDocument/2006/relationships" xmlns:a="http://schemas.openxmlformats.org/drawingml/2006/main" r:embed="R1ee705cffd054c92"/>
           <a:stretch xmlns:a="http://schemas.openxmlformats.org/drawingml/2006/main">
             <a:fillRect l="0" t="0" r="0" b="0"/>
           </a:stretch>
@@ -35795,7 +35795,7 @@
           <p:cNvPr id="3" name="Rectangle 2">
             <a:extLst xmlns:a="http://schemas.openxmlformats.org/drawingml/2006/main">
               <a:ext uri="{FF2B5EF4-FFF2-40B4-BE49-F238E27FC236}">
-                <a16:creationId xmlns:a16="http://schemas.microsoft.com/office/drawing/2014/main" id="{4A3351AB-142B-4E0A-8377-793BB6B33CCA}"/>
+                <a16:creationId xmlns:a16="http://schemas.microsoft.com/office/drawing/2014/main" id="{4EDB78F2-C001-4661-BCD3-311B60FADD01}"/>
               </a:ext>
             </a:extLst>
           </p:cNvPr>
@@ -35848,7 +35848,7 @@
           <p:cNvPr id="4" name="TextBox 3">
             <a:extLst xmlns:a="http://schemas.openxmlformats.org/drawingml/2006/main">
               <a:ext uri="{FF2B5EF4-FFF2-40B4-BE49-F238E27FC236}">
-                <a16:creationId xmlns:a16="http://schemas.microsoft.com/office/drawing/2014/main" id="{44EB6568-B21E-4DB3-9AE7-145E4AE50B9D}"/>
+                <a16:creationId xmlns:a16="http://schemas.microsoft.com/office/drawing/2014/main" id="{A849DC1B-1B25-43AE-A305-E40F4432C9A5}"/>
               </a:ext>
             </a:extLst>
           </p:cNvPr>
@@ -35903,7 +35903,7 @@
           <p:cNvPr id="5" name="TextBox 4">
             <a:extLst xmlns:a="http://schemas.openxmlformats.org/drawingml/2006/main">
               <a:ext uri="{FF2B5EF4-FFF2-40B4-BE49-F238E27FC236}">
-                <a16:creationId xmlns:a16="http://schemas.microsoft.com/office/drawing/2014/main" id="{D9E77697-46FB-4597-876B-10ED3CBD2267}"/>
+                <a16:creationId xmlns:a16="http://schemas.microsoft.com/office/drawing/2014/main" id="{F4CFEA9E-2608-49D7-8F4E-05B4AAE51A49}"/>
               </a:ext>
             </a:extLst>
           </p:cNvPr>
@@ -35933,14 +35933,14 @@
                 <a:spcPct val="110000"/>
               </a:lnSpc>
               <a:buNone/>
-              <a:defRPr sz="3200">
+              <a:defRPr sz="2400">
                 <a:latin typeface="Arial"/>
                 <a:ea typeface="Arial"/>
                 <a:cs typeface="Arial"/>
               </a:defRPr>
             </a:pPr>
             <a:r>
-              <a:rPr sz="3200" b="1" i="0">
+              <a:rPr sz="2400" b="1" i="0">
                 <a:solidFill>
                   <a:srgbClr val="102A43"/>
                 </a:solidFill>
@@ -35958,7 +35958,7 @@
           <p:cNvPr id="6" name="TextBox 5">
             <a:extLst xmlns:a="http://schemas.openxmlformats.org/drawingml/2006/main">
               <a:ext uri="{FF2B5EF4-FFF2-40B4-BE49-F238E27FC236}">
-                <a16:creationId xmlns:a16="http://schemas.microsoft.com/office/drawing/2014/main" id="{BED0A1D3-7D7F-42C8-B289-E006E967FF99}"/>
+                <a16:creationId xmlns:a16="http://schemas.microsoft.com/office/drawing/2014/main" id="{D111DCCF-EE17-44D6-8B14-21094B19A9DA}"/>
               </a:ext>
             </a:extLst>
           </p:cNvPr>
@@ -36097,7 +36097,7 @@
           <p:cNvPr id="7" name="Rectangle 6">
             <a:extLst xmlns:a="http://schemas.openxmlformats.org/drawingml/2006/main">
               <a:ext uri="{FF2B5EF4-FFF2-40B4-BE49-F238E27FC236}">
-                <a16:creationId xmlns:a16="http://schemas.microsoft.com/office/drawing/2014/main" id="{18022449-1FE0-4495-961D-332A2F8217CE}"/>
+                <a16:creationId xmlns:a16="http://schemas.microsoft.com/office/drawing/2014/main" id="{E894C116-C584-4F2B-AC58-6DA748C46647}"/>
               </a:ext>
             </a:extLst>
           </p:cNvPr>
@@ -36150,7 +36150,7 @@
           <p:cNvPr id="8" name="Rectangle 7">
             <a:extLst xmlns:a="http://schemas.openxmlformats.org/drawingml/2006/main">
               <a:ext uri="{FF2B5EF4-FFF2-40B4-BE49-F238E27FC236}">
-                <a16:creationId xmlns:a16="http://schemas.microsoft.com/office/drawing/2014/main" id="{A9EB88D6-D8CA-471D-80CF-08454FADE683}"/>
+                <a16:creationId xmlns:a16="http://schemas.microsoft.com/office/drawing/2014/main" id="{65F8E8ED-CC3F-4582-BA49-9E14C878027F}"/>
               </a:ext>
             </a:extLst>
           </p:cNvPr>
@@ -36203,7 +36203,7 @@
           <p:cNvPr id="9" name="TextBox 8">
             <a:extLst xmlns:a="http://schemas.openxmlformats.org/drawingml/2006/main">
               <a:ext uri="{FF2B5EF4-FFF2-40B4-BE49-F238E27FC236}">
-                <a16:creationId xmlns:a16="http://schemas.microsoft.com/office/drawing/2014/main" id="{69FB9C41-243A-4D2C-9E9A-99D39B82A807}"/>
+                <a16:creationId xmlns:a16="http://schemas.microsoft.com/office/drawing/2014/main" id="{CA512614-9391-4DEB-99B4-F5BD041AE4A9}"/>
               </a:ext>
             </a:extLst>
           </p:cNvPr>
@@ -36258,7 +36258,7 @@
           <p:cNvPr id="10" name="TextBox 9">
             <a:extLst xmlns:a="http://schemas.openxmlformats.org/drawingml/2006/main">
               <a:ext uri="{FF2B5EF4-FFF2-40B4-BE49-F238E27FC236}">
-                <a16:creationId xmlns:a16="http://schemas.microsoft.com/office/drawing/2014/main" id="{28FF55F5-3DB5-40FA-9F33-0EC0B2B731F7}"/>
+                <a16:creationId xmlns:a16="http://schemas.microsoft.com/office/drawing/2014/main" id="{91354291-6FFF-4BEF-BAAE-AF87F194082E}"/>
               </a:ext>
             </a:extLst>
           </p:cNvPr>
@@ -36311,7 +36311,7 @@
     </p:spTree>
     <p:extLst>
       <p:ext uri="{BB962C8B-B14F-4D97-AF65-F5344CB8AC3E}">
-        <p14:creationId xmlns:p14="http://schemas.microsoft.com/office/powerpoint/2010/main" val="1097430730"/>
+        <p14:creationId xmlns:p14="http://schemas.microsoft.com/office/powerpoint/2010/main" val="133890083"/>
       </p:ext>
     </p:extLst>
   </p:cSld>
@@ -36339,7 +36339,7 @@
           <p:nvPr/>
         </p:nvPicPr>
         <p:blipFill>
-          <a:blip xmlns:r="http://schemas.openxmlformats.org/officeDocument/2006/relationships" xmlns:a="http://schemas.openxmlformats.org/drawingml/2006/main" r:embed="R97e5f585f58042cc"/>
+          <a:blip xmlns:r="http://schemas.openxmlformats.org/officeDocument/2006/relationships" xmlns:a="http://schemas.openxmlformats.org/drawingml/2006/main" r:embed="Rdba5c4e3342a463d"/>
           <a:stretch xmlns:a="http://schemas.openxmlformats.org/drawingml/2006/main">
             <a:fillRect l="0" t="0" r="0" b="0"/>
           </a:stretch>
@@ -36359,7 +36359,7 @@
           <p:cNvPr id="3" name="Rectangle 2">
             <a:extLst xmlns:a="http://schemas.openxmlformats.org/drawingml/2006/main">
               <a:ext uri="{FF2B5EF4-FFF2-40B4-BE49-F238E27FC236}">
-                <a16:creationId xmlns:a16="http://schemas.microsoft.com/office/drawing/2014/main" id="{FE48F237-0823-4F56-8C41-F0C78156ADB8}"/>
+                <a16:creationId xmlns:a16="http://schemas.microsoft.com/office/drawing/2014/main" id="{A725602B-6536-4464-882A-E14B2FFB08AF}"/>
               </a:ext>
             </a:extLst>
           </p:cNvPr>
@@ -36412,7 +36412,7 @@
           <p:cNvPr id="4" name="TextBox 3">
             <a:extLst xmlns:a="http://schemas.openxmlformats.org/drawingml/2006/main">
               <a:ext uri="{FF2B5EF4-FFF2-40B4-BE49-F238E27FC236}">
-                <a16:creationId xmlns:a16="http://schemas.microsoft.com/office/drawing/2014/main" id="{FC75D807-F37C-4D15-B4B7-70DB747E6218}"/>
+                <a16:creationId xmlns:a16="http://schemas.microsoft.com/office/drawing/2014/main" id="{D5099256-9219-44D8-A713-EE528E6786E1}"/>
               </a:ext>
             </a:extLst>
           </p:cNvPr>
@@ -36467,7 +36467,7 @@
           <p:cNvPr id="5" name="TextBox 4">
             <a:extLst xmlns:a="http://schemas.openxmlformats.org/drawingml/2006/main">
               <a:ext uri="{FF2B5EF4-FFF2-40B4-BE49-F238E27FC236}">
-                <a16:creationId xmlns:a16="http://schemas.microsoft.com/office/drawing/2014/main" id="{886CFF2F-5180-444A-9A09-9717727B49C8}"/>
+                <a16:creationId xmlns:a16="http://schemas.microsoft.com/office/drawing/2014/main" id="{FAA4B9C8-7DBD-44D2-A946-C5EAAF940395}"/>
               </a:ext>
             </a:extLst>
           </p:cNvPr>
@@ -36479,7 +36479,7 @@
         <p:spPr>
           <a:xfrm xmlns:a="http://schemas.openxmlformats.org/drawingml/2006/main">
             <a:off x="406400" y="1473200"/>
-            <a:ext cx="10477500" cy="536448"/>
+            <a:ext cx="10477500" cy="533400"/>
           </a:xfrm>
           <a:prstGeom xmlns:a="http://schemas.openxmlformats.org/drawingml/2006/main" prst="rect">
             <a:avLst/>
@@ -36497,14 +36497,14 @@
                 <a:spcPct val="110000"/>
               </a:lnSpc>
               <a:buNone/>
-              <a:defRPr sz="3200">
+              <a:defRPr sz="2400">
                 <a:latin typeface="Arial"/>
                 <a:ea typeface="Arial"/>
                 <a:cs typeface="Arial"/>
               </a:defRPr>
             </a:pPr>
             <a:r>
-              <a:rPr sz="3200" b="1" i="0">
+              <a:rPr sz="2400" b="1" i="0">
                 <a:solidFill>
                   <a:srgbClr val="102A43"/>
                 </a:solidFill>
@@ -36870,7 +36870,7 @@
           <p:cNvPr id="7" name="Rectangle 6">
             <a:extLst xmlns:a="http://schemas.openxmlformats.org/drawingml/2006/main">
               <a:ext uri="{FF2B5EF4-FFF2-40B4-BE49-F238E27FC236}">
-                <a16:creationId xmlns:a16="http://schemas.microsoft.com/office/drawing/2014/main" id="{45F9E570-6548-412F-BB34-FFC2EF9EA2D1}"/>
+                <a16:creationId xmlns:a16="http://schemas.microsoft.com/office/drawing/2014/main" id="{F965813B-8EC8-4A26-B8E3-9534F3BFCCCE}"/>
               </a:ext>
             </a:extLst>
           </p:cNvPr>
@@ -36923,7 +36923,7 @@
           <p:cNvPr id="8" name="Rectangle 7">
             <a:extLst xmlns:a="http://schemas.openxmlformats.org/drawingml/2006/main">
               <a:ext uri="{FF2B5EF4-FFF2-40B4-BE49-F238E27FC236}">
-                <a16:creationId xmlns:a16="http://schemas.microsoft.com/office/drawing/2014/main" id="{CF2FA883-87F3-432A-BFC8-FE410161AE48}"/>
+                <a16:creationId xmlns:a16="http://schemas.microsoft.com/office/drawing/2014/main" id="{D8E593AB-74C8-4E5A-96CB-DDA514DFB541}"/>
               </a:ext>
             </a:extLst>
           </p:cNvPr>
@@ -36976,7 +36976,7 @@
           <p:cNvPr id="9" name="TextBox 8">
             <a:extLst xmlns:a="http://schemas.openxmlformats.org/drawingml/2006/main">
               <a:ext uri="{FF2B5EF4-FFF2-40B4-BE49-F238E27FC236}">
-                <a16:creationId xmlns:a16="http://schemas.microsoft.com/office/drawing/2014/main" id="{3C580B0A-DDF6-445D-BACC-1D1CF379628A}"/>
+                <a16:creationId xmlns:a16="http://schemas.microsoft.com/office/drawing/2014/main" id="{312E8389-F62B-44BD-B7C5-04DDD6D229EC}"/>
               </a:ext>
             </a:extLst>
           </p:cNvPr>
@@ -37031,7 +37031,7 @@
           <p:cNvPr id="10" name="TextBox 9">
             <a:extLst xmlns:a="http://schemas.openxmlformats.org/drawingml/2006/main">
               <a:ext uri="{FF2B5EF4-FFF2-40B4-BE49-F238E27FC236}">
-                <a16:creationId xmlns:a16="http://schemas.microsoft.com/office/drawing/2014/main" id="{B1D681F5-CAF6-4279-857B-8B187965F4CE}"/>
+                <a16:creationId xmlns:a16="http://schemas.microsoft.com/office/drawing/2014/main" id="{02A21B0E-E7E3-488D-9F9F-EC1196A2D690}"/>
               </a:ext>
             </a:extLst>
           </p:cNvPr>
@@ -37084,7 +37084,7 @@
     </p:spTree>
     <p:extLst>
       <p:ext uri="{BB962C8B-B14F-4D97-AF65-F5344CB8AC3E}">
-        <p14:creationId xmlns:p14="http://schemas.microsoft.com/office/powerpoint/2010/main" val="2026134806"/>
+        <p14:creationId xmlns:p14="http://schemas.microsoft.com/office/powerpoint/2010/main" val="587955775"/>
       </p:ext>
     </p:extLst>
   </p:cSld>
@@ -37112,7 +37112,7 @@
           <p:nvPr/>
         </p:nvPicPr>
         <p:blipFill>
-          <a:blip xmlns:r="http://schemas.openxmlformats.org/officeDocument/2006/relationships" xmlns:a="http://schemas.openxmlformats.org/drawingml/2006/main" r:embed="Rd9b38d4afa3649f6"/>
+          <a:blip xmlns:r="http://schemas.openxmlformats.org/officeDocument/2006/relationships" xmlns:a="http://schemas.openxmlformats.org/drawingml/2006/main" r:embed="Ree2fdc8a5c354191"/>
           <a:stretch xmlns:a="http://schemas.openxmlformats.org/drawingml/2006/main">
             <a:fillRect l="0" t="0" r="0" b="0"/>
           </a:stretch>
@@ -37132,7 +37132,7 @@
           <p:cNvPr id="3" name="Rectangle 2">
             <a:extLst xmlns:a="http://schemas.openxmlformats.org/drawingml/2006/main">
               <a:ext uri="{FF2B5EF4-FFF2-40B4-BE49-F238E27FC236}">
-                <a16:creationId xmlns:a16="http://schemas.microsoft.com/office/drawing/2014/main" id="{B4462B84-63C5-49CA-8D23-459F2BBF2824}"/>
+                <a16:creationId xmlns:a16="http://schemas.microsoft.com/office/drawing/2014/main" id="{A2650306-08E8-4C66-895F-25DA9EAE980C}"/>
               </a:ext>
             </a:extLst>
           </p:cNvPr>
@@ -37185,7 +37185,7 @@
           <p:cNvPr id="4" name="TextBox 3">
             <a:extLst xmlns:a="http://schemas.openxmlformats.org/drawingml/2006/main">
               <a:ext uri="{FF2B5EF4-FFF2-40B4-BE49-F238E27FC236}">
-                <a16:creationId xmlns:a16="http://schemas.microsoft.com/office/drawing/2014/main" id="{09A66099-BDE6-4D5D-975E-2072A1C9348A}"/>
+                <a16:creationId xmlns:a16="http://schemas.microsoft.com/office/drawing/2014/main" id="{E75A4FF6-9ABE-47D3-8BD7-8FCB808FA45F}"/>
               </a:ext>
             </a:extLst>
           </p:cNvPr>
@@ -37240,7 +37240,7 @@
           <p:cNvPr id="5" name="TextBox 4">
             <a:extLst xmlns:a="http://schemas.openxmlformats.org/drawingml/2006/main">
               <a:ext uri="{FF2B5EF4-FFF2-40B4-BE49-F238E27FC236}">
-                <a16:creationId xmlns:a16="http://schemas.microsoft.com/office/drawing/2014/main" id="{0501517F-49D2-4C51-9F7B-43E29AEEC257}"/>
+                <a16:creationId xmlns:a16="http://schemas.microsoft.com/office/drawing/2014/main" id="{52851513-0A08-4F32-BB3F-CA6E8AA7F4C5}"/>
               </a:ext>
             </a:extLst>
           </p:cNvPr>
@@ -37252,7 +37252,7 @@
         <p:spPr>
           <a:xfrm xmlns:a="http://schemas.openxmlformats.org/drawingml/2006/main">
             <a:off x="406400" y="1460500"/>
-            <a:ext cx="11379200" cy="536448"/>
+            <a:ext cx="11379200" cy="533400"/>
           </a:xfrm>
           <a:prstGeom xmlns:a="http://schemas.openxmlformats.org/drawingml/2006/main" prst="rect">
             <a:avLst/>
@@ -37270,14 +37270,14 @@
                 <a:spcPct val="110000"/>
               </a:lnSpc>
               <a:buNone/>
-              <a:defRPr sz="3200">
+              <a:defRPr sz="2400">
                 <a:latin typeface="Arial"/>
                 <a:ea typeface="Arial"/>
                 <a:cs typeface="Arial"/>
               </a:defRPr>
             </a:pPr>
             <a:r>
-              <a:rPr sz="3200" b="1" i="0">
+              <a:rPr sz="2400" b="1" i="0">
                 <a:solidFill>
                   <a:srgbClr val="102A43"/>
                 </a:solidFill>
@@ -37295,7 +37295,7 @@
           <p:cNvPr id="6" name="Rounded Rectangle 5">
             <a:extLst xmlns:a="http://schemas.openxmlformats.org/drawingml/2006/main">
               <a:ext uri="{FF2B5EF4-FFF2-40B4-BE49-F238E27FC236}">
-                <a16:creationId xmlns:a16="http://schemas.microsoft.com/office/drawing/2014/main" id="{94B03CED-ADAA-4CEE-8069-7CC35FB92AE9}"/>
+                <a16:creationId xmlns:a16="http://schemas.microsoft.com/office/drawing/2014/main" id="{716A0025-1A49-47FC-A902-24D7554E6B19}"/>
               </a:ext>
             </a:extLst>
           </p:cNvPr>
@@ -37352,7 +37352,7 @@
           <p:cNvPr id="7" name="TextBox 6">
             <a:extLst xmlns:a="http://schemas.openxmlformats.org/drawingml/2006/main">
               <a:ext uri="{FF2B5EF4-FFF2-40B4-BE49-F238E27FC236}">
-                <a16:creationId xmlns:a16="http://schemas.microsoft.com/office/drawing/2014/main" id="{EBC29B99-A846-463D-98D4-B4A3DEA7FC4F}"/>
+                <a16:creationId xmlns:a16="http://schemas.microsoft.com/office/drawing/2014/main" id="{E7FA4829-F4E3-45F6-888E-0BE33C061DA7}"/>
               </a:ext>
             </a:extLst>
           </p:cNvPr>
@@ -37407,7 +37407,7 @@
           <p:cNvPr id="8" name="TextBox 7">
             <a:extLst xmlns:a="http://schemas.openxmlformats.org/drawingml/2006/main">
               <a:ext uri="{FF2B5EF4-FFF2-40B4-BE49-F238E27FC236}">
-                <a16:creationId xmlns:a16="http://schemas.microsoft.com/office/drawing/2014/main" id="{F7075B46-4AB1-41D8-9EDE-803A50F297BE}"/>
+                <a16:creationId xmlns:a16="http://schemas.microsoft.com/office/drawing/2014/main" id="{4ED51C64-9F43-4BD7-AEFE-791024EBB89E}"/>
               </a:ext>
             </a:extLst>
           </p:cNvPr>
@@ -37462,7 +37462,7 @@
           <p:cNvPr id="9" name="TextBox 8">
             <a:extLst xmlns:a="http://schemas.openxmlformats.org/drawingml/2006/main">
               <a:ext uri="{FF2B5EF4-FFF2-40B4-BE49-F238E27FC236}">
-                <a16:creationId xmlns:a16="http://schemas.microsoft.com/office/drawing/2014/main" id="{ED44A5CA-B40B-4BFB-9034-7D3ADA4AE62D}"/>
+                <a16:creationId xmlns:a16="http://schemas.microsoft.com/office/drawing/2014/main" id="{51AB56B7-C420-4446-8BA1-80883AEB58D4}"/>
               </a:ext>
             </a:extLst>
           </p:cNvPr>
@@ -37517,7 +37517,7 @@
           <p:cNvPr id="10" name="Rounded Rectangle 9">
             <a:extLst xmlns:a="http://schemas.openxmlformats.org/drawingml/2006/main">
               <a:ext uri="{FF2B5EF4-FFF2-40B4-BE49-F238E27FC236}">
-                <a16:creationId xmlns:a16="http://schemas.microsoft.com/office/drawing/2014/main" id="{26917577-19A9-4385-B244-EDA3733FADFE}"/>
+                <a16:creationId xmlns:a16="http://schemas.microsoft.com/office/drawing/2014/main" id="{9289F339-E83C-474B-9248-6D3938A9E559}"/>
               </a:ext>
             </a:extLst>
           </p:cNvPr>
@@ -37574,7 +37574,7 @@
           <p:cNvPr id="11" name="TextBox 10">
             <a:extLst xmlns:a="http://schemas.openxmlformats.org/drawingml/2006/main">
               <a:ext uri="{FF2B5EF4-FFF2-40B4-BE49-F238E27FC236}">
-                <a16:creationId xmlns:a16="http://schemas.microsoft.com/office/drawing/2014/main" id="{D2E6DFC3-480E-4023-870E-53C42F8BBF8A}"/>
+                <a16:creationId xmlns:a16="http://schemas.microsoft.com/office/drawing/2014/main" id="{A1B256AB-6869-40A0-8E68-369FEB3EFED4}"/>
               </a:ext>
             </a:extLst>
           </p:cNvPr>
@@ -37629,7 +37629,7 @@
           <p:cNvPr id="12" name="TextBox 11">
             <a:extLst xmlns:a="http://schemas.openxmlformats.org/drawingml/2006/main">
               <a:ext uri="{FF2B5EF4-FFF2-40B4-BE49-F238E27FC236}">
-                <a16:creationId xmlns:a16="http://schemas.microsoft.com/office/drawing/2014/main" id="{E32D46F5-0597-476B-A8B6-E0D81DF997F7}"/>
+                <a16:creationId xmlns:a16="http://schemas.microsoft.com/office/drawing/2014/main" id="{3BFB9863-416E-4119-9CB5-CC863923D5AF}"/>
               </a:ext>
             </a:extLst>
           </p:cNvPr>
@@ -37684,7 +37684,7 @@
           <p:cNvPr id="13" name="TextBox 12">
             <a:extLst xmlns:a="http://schemas.openxmlformats.org/drawingml/2006/main">
               <a:ext uri="{FF2B5EF4-FFF2-40B4-BE49-F238E27FC236}">
-                <a16:creationId xmlns:a16="http://schemas.microsoft.com/office/drawing/2014/main" id="{7EAF0010-E48B-480D-B8D1-4122CB200CD7}"/>
+                <a16:creationId xmlns:a16="http://schemas.microsoft.com/office/drawing/2014/main" id="{8A1CC234-71B1-4467-B39B-DFB91B08088E}"/>
               </a:ext>
             </a:extLst>
           </p:cNvPr>
@@ -37739,7 +37739,7 @@
           <p:cNvPr id="14" name="Rounded Rectangle 13">
             <a:extLst xmlns:a="http://schemas.openxmlformats.org/drawingml/2006/main">
               <a:ext uri="{FF2B5EF4-FFF2-40B4-BE49-F238E27FC236}">
-                <a16:creationId xmlns:a16="http://schemas.microsoft.com/office/drawing/2014/main" id="{CD92FD11-2F9C-4985-A177-2F5206DE4EE4}"/>
+                <a16:creationId xmlns:a16="http://schemas.microsoft.com/office/drawing/2014/main" id="{8AA32D99-C58A-464C-8C5C-A684DFD4F777}"/>
               </a:ext>
             </a:extLst>
           </p:cNvPr>
@@ -37796,7 +37796,7 @@
           <p:cNvPr id="15" name="TextBox 14">
             <a:extLst xmlns:a="http://schemas.openxmlformats.org/drawingml/2006/main">
               <a:ext uri="{FF2B5EF4-FFF2-40B4-BE49-F238E27FC236}">
-                <a16:creationId xmlns:a16="http://schemas.microsoft.com/office/drawing/2014/main" id="{EBCA6C6C-0673-447B-ADE2-44B6DCAA7B6B}"/>
+                <a16:creationId xmlns:a16="http://schemas.microsoft.com/office/drawing/2014/main" id="{79A6F5AA-C5E2-46D5-A7C7-8A577F5E5A62}"/>
               </a:ext>
             </a:extLst>
           </p:cNvPr>
@@ -37851,7 +37851,7 @@
           <p:cNvPr id="16" name="TextBox 15">
             <a:extLst xmlns:a="http://schemas.openxmlformats.org/drawingml/2006/main">
               <a:ext uri="{FF2B5EF4-FFF2-40B4-BE49-F238E27FC236}">
-                <a16:creationId xmlns:a16="http://schemas.microsoft.com/office/drawing/2014/main" id="{4A495F52-9FA2-47AA-9873-A0D649CBFA90}"/>
+                <a16:creationId xmlns:a16="http://schemas.microsoft.com/office/drawing/2014/main" id="{77AF79AF-E14C-41D2-B765-CFF1001D3CFE}"/>
               </a:ext>
             </a:extLst>
           </p:cNvPr>
@@ -37906,7 +37906,7 @@
           <p:cNvPr id="17" name="TextBox 16">
             <a:extLst xmlns:a="http://schemas.openxmlformats.org/drawingml/2006/main">
               <a:ext uri="{FF2B5EF4-FFF2-40B4-BE49-F238E27FC236}">
-                <a16:creationId xmlns:a16="http://schemas.microsoft.com/office/drawing/2014/main" id="{428A2493-1C84-4CF1-8BA9-1319E6D44613}"/>
+                <a16:creationId xmlns:a16="http://schemas.microsoft.com/office/drawing/2014/main" id="{588B0F5F-4FDE-4BB5-B1DE-722CBDCEA11F}"/>
               </a:ext>
             </a:extLst>
           </p:cNvPr>
@@ -37961,7 +37961,7 @@
           <p:cNvPr id="18" name="Rounded Rectangle 17">
             <a:extLst xmlns:a="http://schemas.openxmlformats.org/drawingml/2006/main">
               <a:ext uri="{FF2B5EF4-FFF2-40B4-BE49-F238E27FC236}">
-                <a16:creationId xmlns:a16="http://schemas.microsoft.com/office/drawing/2014/main" id="{C80D56D1-B5B9-4D91-90F6-E81A339C9A58}"/>
+                <a16:creationId xmlns:a16="http://schemas.microsoft.com/office/drawing/2014/main" id="{C9A4C6A1-B53E-46C5-AA2E-D93271390273}"/>
               </a:ext>
             </a:extLst>
           </p:cNvPr>
@@ -38018,7 +38018,7 @@
           <p:cNvPr id="19" name="TextBox 18">
             <a:extLst xmlns:a="http://schemas.openxmlformats.org/drawingml/2006/main">
               <a:ext uri="{FF2B5EF4-FFF2-40B4-BE49-F238E27FC236}">
-                <a16:creationId xmlns:a16="http://schemas.microsoft.com/office/drawing/2014/main" id="{96ACA3CC-1E07-4EB4-8055-8A2E4882EFF0}"/>
+                <a16:creationId xmlns:a16="http://schemas.microsoft.com/office/drawing/2014/main" id="{8CBCDDB8-924E-4BE6-8412-BD1EF7467765}"/>
               </a:ext>
             </a:extLst>
           </p:cNvPr>
@@ -38073,7 +38073,7 @@
           <p:cNvPr id="20" name="TextBox 19">
             <a:extLst xmlns:a="http://schemas.openxmlformats.org/drawingml/2006/main">
               <a:ext uri="{FF2B5EF4-FFF2-40B4-BE49-F238E27FC236}">
-                <a16:creationId xmlns:a16="http://schemas.microsoft.com/office/drawing/2014/main" id="{CDCD89A9-9545-4109-B984-58577A2A89A7}"/>
+                <a16:creationId xmlns:a16="http://schemas.microsoft.com/office/drawing/2014/main" id="{E7B262E9-C2CD-40CC-930F-624DEC42F988}"/>
               </a:ext>
             </a:extLst>
           </p:cNvPr>
@@ -38128,7 +38128,7 @@
           <p:cNvPr id="21" name="Rectangle 20">
             <a:extLst xmlns:a="http://schemas.openxmlformats.org/drawingml/2006/main">
               <a:ext uri="{FF2B5EF4-FFF2-40B4-BE49-F238E27FC236}">
-                <a16:creationId xmlns:a16="http://schemas.microsoft.com/office/drawing/2014/main" id="{83A8F364-6669-4B59-8560-3FA84402B2F8}"/>
+                <a16:creationId xmlns:a16="http://schemas.microsoft.com/office/drawing/2014/main" id="{AC45C18B-AE1E-41CA-AA22-BE6CAF6D1C57}"/>
               </a:ext>
             </a:extLst>
           </p:cNvPr>
@@ -38181,7 +38181,7 @@
           <p:cNvPr id="22" name="Rectangle 21">
             <a:extLst xmlns:a="http://schemas.openxmlformats.org/drawingml/2006/main">
               <a:ext uri="{FF2B5EF4-FFF2-40B4-BE49-F238E27FC236}">
-                <a16:creationId xmlns:a16="http://schemas.microsoft.com/office/drawing/2014/main" id="{AC1092B5-59CD-44B5-B7B4-D8BF0B01451B}"/>
+                <a16:creationId xmlns:a16="http://schemas.microsoft.com/office/drawing/2014/main" id="{C425C717-246D-4862-8D68-CC2A00EFC198}"/>
               </a:ext>
             </a:extLst>
           </p:cNvPr>
@@ -38234,7 +38234,7 @@
           <p:cNvPr id="23" name="TextBox 22">
             <a:extLst xmlns:a="http://schemas.openxmlformats.org/drawingml/2006/main">
               <a:ext uri="{FF2B5EF4-FFF2-40B4-BE49-F238E27FC236}">
-                <a16:creationId xmlns:a16="http://schemas.microsoft.com/office/drawing/2014/main" id="{FCFF1BE6-3DD8-430E-A0CE-5E2E83480E56}"/>
+                <a16:creationId xmlns:a16="http://schemas.microsoft.com/office/drawing/2014/main" id="{0032E518-F43E-46AB-925A-8F5DBF64DB79}"/>
               </a:ext>
             </a:extLst>
           </p:cNvPr>
@@ -38289,7 +38289,7 @@
           <p:cNvPr id="24" name="TextBox 23">
             <a:extLst xmlns:a="http://schemas.openxmlformats.org/drawingml/2006/main">
               <a:ext uri="{FF2B5EF4-FFF2-40B4-BE49-F238E27FC236}">
-                <a16:creationId xmlns:a16="http://schemas.microsoft.com/office/drawing/2014/main" id="{1D39E424-56CB-429A-9D89-22C2CA6DB902}"/>
+                <a16:creationId xmlns:a16="http://schemas.microsoft.com/office/drawing/2014/main" id="{3D191BDF-C28F-4AAA-88D7-FB3769F6BBC1}"/>
               </a:ext>
             </a:extLst>
           </p:cNvPr>
@@ -38342,7 +38342,7 @@
     </p:spTree>
     <p:extLst>
       <p:ext uri="{BB962C8B-B14F-4D97-AF65-F5344CB8AC3E}">
-        <p14:creationId xmlns:p14="http://schemas.microsoft.com/office/powerpoint/2010/main" val="610059835"/>
+        <p14:creationId xmlns:p14="http://schemas.microsoft.com/office/powerpoint/2010/main" val="830365738"/>
       </p:ext>
     </p:extLst>
   </p:cSld>
@@ -38370,7 +38370,7 @@
           <p:nvPr/>
         </p:nvPicPr>
         <p:blipFill>
-          <a:blip xmlns:r="http://schemas.openxmlformats.org/officeDocument/2006/relationships" xmlns:a="http://schemas.openxmlformats.org/drawingml/2006/main" r:embed="R2567903e2e9744c2"/>
+          <a:blip xmlns:r="http://schemas.openxmlformats.org/officeDocument/2006/relationships" xmlns:a="http://schemas.openxmlformats.org/drawingml/2006/main" r:embed="R1cf4707857134717"/>
           <a:stretch xmlns:a="http://schemas.openxmlformats.org/drawingml/2006/main">
             <a:fillRect l="0" t="0" r="0" b="0"/>
           </a:stretch>
@@ -38390,7 +38390,7 @@
           <p:cNvPr id="3" name="Rectangle 2">
             <a:extLst xmlns:a="http://schemas.openxmlformats.org/drawingml/2006/main">
               <a:ext uri="{FF2B5EF4-FFF2-40B4-BE49-F238E27FC236}">
-                <a16:creationId xmlns:a16="http://schemas.microsoft.com/office/drawing/2014/main" id="{DF9B6FB2-BACC-4808-98B9-8842EC111E81}"/>
+                <a16:creationId xmlns:a16="http://schemas.microsoft.com/office/drawing/2014/main" id="{D0DEED4D-10F1-4286-A5BC-5602B9B374D4}"/>
               </a:ext>
             </a:extLst>
           </p:cNvPr>
@@ -38443,7 +38443,7 @@
           <p:cNvPr id="4" name="TextBox 3">
             <a:extLst xmlns:a="http://schemas.openxmlformats.org/drawingml/2006/main">
               <a:ext uri="{FF2B5EF4-FFF2-40B4-BE49-F238E27FC236}">
-                <a16:creationId xmlns:a16="http://schemas.microsoft.com/office/drawing/2014/main" id="{815DC0B7-8B25-448B-8857-C5CF0AD3F434}"/>
+                <a16:creationId xmlns:a16="http://schemas.microsoft.com/office/drawing/2014/main" id="{1BEE53CA-223B-4FE6-9286-88E092D5076D}"/>
               </a:ext>
             </a:extLst>
           </p:cNvPr>
@@ -38498,7 +38498,7 @@
           <p:cNvPr id="5" name="TextBox 4">
             <a:extLst xmlns:a="http://schemas.openxmlformats.org/drawingml/2006/main">
               <a:ext uri="{FF2B5EF4-FFF2-40B4-BE49-F238E27FC236}">
-                <a16:creationId xmlns:a16="http://schemas.microsoft.com/office/drawing/2014/main" id="{4600AB37-71FE-4D25-AD44-D295CC6101B3}"/>
+                <a16:creationId xmlns:a16="http://schemas.microsoft.com/office/drawing/2014/main" id="{CDA25C46-B86B-41D9-9FA4-6ADB9CA6A714}"/>
               </a:ext>
             </a:extLst>
           </p:cNvPr>
@@ -38528,14 +38528,14 @@
                 <a:spcPct val="110000"/>
               </a:lnSpc>
               <a:buNone/>
-              <a:defRPr sz="3200">
+              <a:defRPr sz="2400">
                 <a:latin typeface="Arial"/>
                 <a:ea typeface="Arial"/>
                 <a:cs typeface="Arial"/>
               </a:defRPr>
             </a:pPr>
             <a:r>
-              <a:rPr sz="3200" b="1" i="0">
+              <a:rPr sz="2400" b="1" i="0">
                 <a:solidFill>
                   <a:srgbClr val="102A43"/>
                 </a:solidFill>
@@ -38553,7 +38553,7 @@
           <p:cNvPr id="6" name="Rounded Rectangle 5">
             <a:extLst xmlns:a="http://schemas.openxmlformats.org/drawingml/2006/main">
               <a:ext uri="{FF2B5EF4-FFF2-40B4-BE49-F238E27FC236}">
-                <a16:creationId xmlns:a16="http://schemas.microsoft.com/office/drawing/2014/main" id="{02D28458-2F3B-47A2-B325-6C46E4ECE447}"/>
+                <a16:creationId xmlns:a16="http://schemas.microsoft.com/office/drawing/2014/main" id="{1C722CFA-52F0-48BE-B341-8B76CA61549A}"/>
               </a:ext>
             </a:extLst>
           </p:cNvPr>
@@ -38610,7 +38610,7 @@
           <p:cNvPr id="7" name="TextBox 6">
             <a:extLst xmlns:a="http://schemas.openxmlformats.org/drawingml/2006/main">
               <a:ext uri="{FF2B5EF4-FFF2-40B4-BE49-F238E27FC236}">
-                <a16:creationId xmlns:a16="http://schemas.microsoft.com/office/drawing/2014/main" id="{1ABC8720-EFB8-4F74-A9A3-895AA3826F0A}"/>
+                <a16:creationId xmlns:a16="http://schemas.microsoft.com/office/drawing/2014/main" id="{294786A0-FF41-457D-B6FE-60CB40BB0F0D}"/>
               </a:ext>
             </a:extLst>
           </p:cNvPr>
@@ -38665,7 +38665,7 @@
           <p:cNvPr id="8" name="TextBox 7">
             <a:extLst xmlns:a="http://schemas.openxmlformats.org/drawingml/2006/main">
               <a:ext uri="{FF2B5EF4-FFF2-40B4-BE49-F238E27FC236}">
-                <a16:creationId xmlns:a16="http://schemas.microsoft.com/office/drawing/2014/main" id="{1B33D242-FD43-4504-94BD-83434446A9CE}"/>
+                <a16:creationId xmlns:a16="http://schemas.microsoft.com/office/drawing/2014/main" id="{59C9006A-E566-4159-9683-903BC7F97984}"/>
               </a:ext>
             </a:extLst>
           </p:cNvPr>
@@ -38720,7 +38720,7 @@
           <p:cNvPr id="9" name="TextBox 8">
             <a:extLst xmlns:a="http://schemas.openxmlformats.org/drawingml/2006/main">
               <a:ext uri="{FF2B5EF4-FFF2-40B4-BE49-F238E27FC236}">
-                <a16:creationId xmlns:a16="http://schemas.microsoft.com/office/drawing/2014/main" id="{01D71DDE-8461-4806-9FEF-FE1217D2B599}"/>
+                <a16:creationId xmlns:a16="http://schemas.microsoft.com/office/drawing/2014/main" id="{C0104AEB-0FA9-42A6-8806-09F1964C1A56}"/>
               </a:ext>
             </a:extLst>
           </p:cNvPr>
@@ -38832,7 +38832,7 @@
           <p:cNvPr id="10" name="Rounded Rectangle 9">
             <a:extLst xmlns:a="http://schemas.openxmlformats.org/drawingml/2006/main">
               <a:ext uri="{FF2B5EF4-FFF2-40B4-BE49-F238E27FC236}">
-                <a16:creationId xmlns:a16="http://schemas.microsoft.com/office/drawing/2014/main" id="{87B6F201-E833-45A3-AF3B-0EAB5CC099A5}"/>
+                <a16:creationId xmlns:a16="http://schemas.microsoft.com/office/drawing/2014/main" id="{49DF24BF-4222-428F-A8DA-EF02AA3A4E68}"/>
               </a:ext>
             </a:extLst>
           </p:cNvPr>
@@ -38889,7 +38889,7 @@
           <p:cNvPr id="11" name="TextBox 10">
             <a:extLst xmlns:a="http://schemas.openxmlformats.org/drawingml/2006/main">
               <a:ext uri="{FF2B5EF4-FFF2-40B4-BE49-F238E27FC236}">
-                <a16:creationId xmlns:a16="http://schemas.microsoft.com/office/drawing/2014/main" id="{E138E3AD-7A5D-4F62-95EA-161A9782FDC5}"/>
+                <a16:creationId xmlns:a16="http://schemas.microsoft.com/office/drawing/2014/main" id="{1DE153DE-4212-4969-80A7-37D59FD73F18}"/>
               </a:ext>
             </a:extLst>
           </p:cNvPr>
@@ -38944,7 +38944,7 @@
           <p:cNvPr id="12" name="TextBox 11">
             <a:extLst xmlns:a="http://schemas.openxmlformats.org/drawingml/2006/main">
               <a:ext uri="{FF2B5EF4-FFF2-40B4-BE49-F238E27FC236}">
-                <a16:creationId xmlns:a16="http://schemas.microsoft.com/office/drawing/2014/main" id="{D4C81B06-4B9F-416D-BE92-47D032E9DD44}"/>
+                <a16:creationId xmlns:a16="http://schemas.microsoft.com/office/drawing/2014/main" id="{812D1A24-693E-4479-875A-6175DC2A59DA}"/>
               </a:ext>
             </a:extLst>
           </p:cNvPr>
@@ -38999,7 +38999,7 @@
           <p:cNvPr id="13" name="TextBox 12">
             <a:extLst xmlns:a="http://schemas.openxmlformats.org/drawingml/2006/main">
               <a:ext uri="{FF2B5EF4-FFF2-40B4-BE49-F238E27FC236}">
-                <a16:creationId xmlns:a16="http://schemas.microsoft.com/office/drawing/2014/main" id="{46A5850C-F50B-49E6-8E6F-D44C97D52163}"/>
+                <a16:creationId xmlns:a16="http://schemas.microsoft.com/office/drawing/2014/main" id="{D35FEC6D-AA1A-4719-80DA-F8766372481F}"/>
               </a:ext>
             </a:extLst>
           </p:cNvPr>
@@ -39111,7 +39111,7 @@
           <p:cNvPr id="14" name="Rectangle 13">
             <a:extLst xmlns:a="http://schemas.openxmlformats.org/drawingml/2006/main">
               <a:ext uri="{FF2B5EF4-FFF2-40B4-BE49-F238E27FC236}">
-                <a16:creationId xmlns:a16="http://schemas.microsoft.com/office/drawing/2014/main" id="{F5B405A5-9EEB-40F7-AC99-22CDB7D375A6}"/>
+                <a16:creationId xmlns:a16="http://schemas.microsoft.com/office/drawing/2014/main" id="{0631BB45-0BCE-4EB1-AB48-6CCCA54654E4}"/>
               </a:ext>
             </a:extLst>
           </p:cNvPr>
@@ -39164,7 +39164,7 @@
           <p:cNvPr id="15" name="Rectangle 14">
             <a:extLst xmlns:a="http://schemas.openxmlformats.org/drawingml/2006/main">
               <a:ext uri="{FF2B5EF4-FFF2-40B4-BE49-F238E27FC236}">
-                <a16:creationId xmlns:a16="http://schemas.microsoft.com/office/drawing/2014/main" id="{3250588E-3B7C-4F08-884F-081824E2895E}"/>
+                <a16:creationId xmlns:a16="http://schemas.microsoft.com/office/drawing/2014/main" id="{FA981D05-CC0D-4318-BF87-B6FA02827135}"/>
               </a:ext>
             </a:extLst>
           </p:cNvPr>
@@ -39217,7 +39217,7 @@
           <p:cNvPr id="16" name="TextBox 15">
             <a:extLst xmlns:a="http://schemas.openxmlformats.org/drawingml/2006/main">
               <a:ext uri="{FF2B5EF4-FFF2-40B4-BE49-F238E27FC236}">
-                <a16:creationId xmlns:a16="http://schemas.microsoft.com/office/drawing/2014/main" id="{E23B13F4-6355-42AA-BCF6-7C65537D18AD}"/>
+                <a16:creationId xmlns:a16="http://schemas.microsoft.com/office/drawing/2014/main" id="{A67BADA4-03C7-4883-9995-08EA9434CB47}"/>
               </a:ext>
             </a:extLst>
           </p:cNvPr>
@@ -39272,7 +39272,7 @@
           <p:cNvPr id="17" name="TextBox 16">
             <a:extLst xmlns:a="http://schemas.openxmlformats.org/drawingml/2006/main">
               <a:ext uri="{FF2B5EF4-FFF2-40B4-BE49-F238E27FC236}">
-                <a16:creationId xmlns:a16="http://schemas.microsoft.com/office/drawing/2014/main" id="{519CF63E-CBEC-4B13-8021-F43183F1E2D4}"/>
+                <a16:creationId xmlns:a16="http://schemas.microsoft.com/office/drawing/2014/main" id="{291D3627-9ED3-4E60-9271-7756073E3E5E}"/>
               </a:ext>
             </a:extLst>
           </p:cNvPr>
@@ -39325,7 +39325,7 @@
     </p:spTree>
     <p:extLst>
       <p:ext uri="{BB962C8B-B14F-4D97-AF65-F5344CB8AC3E}">
-        <p14:creationId xmlns:p14="http://schemas.microsoft.com/office/powerpoint/2010/main" val="1761003112"/>
+        <p14:creationId xmlns:p14="http://schemas.microsoft.com/office/powerpoint/2010/main" val="1975800270"/>
       </p:ext>
     </p:extLst>
   </p:cSld>
@@ -39353,7 +39353,7 @@
           <p:nvPr/>
         </p:nvPicPr>
         <p:blipFill>
-          <a:blip xmlns:r="http://schemas.openxmlformats.org/officeDocument/2006/relationships" xmlns:a="http://schemas.openxmlformats.org/drawingml/2006/main" r:embed="R28882147aa9d4b9b"/>
+          <a:blip xmlns:r="http://schemas.openxmlformats.org/officeDocument/2006/relationships" xmlns:a="http://schemas.openxmlformats.org/drawingml/2006/main" r:embed="R97234c2a96084180"/>
           <a:stretch xmlns:a="http://schemas.openxmlformats.org/drawingml/2006/main">
             <a:fillRect l="0" t="0" r="0" b="0"/>
           </a:stretch>
@@ -39373,7 +39373,7 @@
           <p:cNvPr id="3" name="Rectangle 2">
             <a:extLst xmlns:a="http://schemas.openxmlformats.org/drawingml/2006/main">
               <a:ext uri="{FF2B5EF4-FFF2-40B4-BE49-F238E27FC236}">
-                <a16:creationId xmlns:a16="http://schemas.microsoft.com/office/drawing/2014/main" id="{8381D152-7390-4FCB-A72C-6681E427D801}"/>
+                <a16:creationId xmlns:a16="http://schemas.microsoft.com/office/drawing/2014/main" id="{DEE9EB7A-403B-4047-B8F6-8F9873C982DB}"/>
               </a:ext>
             </a:extLst>
           </p:cNvPr>
@@ -39426,7 +39426,7 @@
           <p:cNvPr id="4" name="TextBox 3">
             <a:extLst xmlns:a="http://schemas.openxmlformats.org/drawingml/2006/main">
               <a:ext uri="{FF2B5EF4-FFF2-40B4-BE49-F238E27FC236}">
-                <a16:creationId xmlns:a16="http://schemas.microsoft.com/office/drawing/2014/main" id="{8AED7B27-B9D6-40EA-865E-E33741CC350E}"/>
+                <a16:creationId xmlns:a16="http://schemas.microsoft.com/office/drawing/2014/main" id="{49A42260-0452-445C-AF21-6EE42DD2BB6D}"/>
               </a:ext>
             </a:extLst>
           </p:cNvPr>
@@ -39481,7 +39481,7 @@
           <p:cNvPr id="5" name="TextBox 4">
             <a:extLst xmlns:a="http://schemas.openxmlformats.org/drawingml/2006/main">
               <a:ext uri="{FF2B5EF4-FFF2-40B4-BE49-F238E27FC236}">
-                <a16:creationId xmlns:a16="http://schemas.microsoft.com/office/drawing/2014/main" id="{CFC8941D-C859-42FE-9A6A-B92918754E17}"/>
+                <a16:creationId xmlns:a16="http://schemas.microsoft.com/office/drawing/2014/main" id="{044C81A3-1AB7-41EB-B689-806D07EDB00B}"/>
               </a:ext>
             </a:extLst>
           </p:cNvPr>
@@ -39511,14 +39511,14 @@
                 <a:spcPct val="110000"/>
               </a:lnSpc>
               <a:buNone/>
-              <a:defRPr sz="3200">
+              <a:defRPr sz="2400">
                 <a:latin typeface="Arial"/>
                 <a:ea typeface="Arial"/>
                 <a:cs typeface="Arial"/>
               </a:defRPr>
             </a:pPr>
             <a:r>
-              <a:rPr sz="3200" b="1" i="0">
+              <a:rPr sz="2400" b="1" i="0">
                 <a:solidFill>
                   <a:srgbClr val="102A43"/>
                 </a:solidFill>
@@ -39536,7 +39536,7 @@
           <p:cNvPr id="6" name="Rounded Rectangle 5">
             <a:extLst xmlns:a="http://schemas.openxmlformats.org/drawingml/2006/main">
               <a:ext uri="{FF2B5EF4-FFF2-40B4-BE49-F238E27FC236}">
-                <a16:creationId xmlns:a16="http://schemas.microsoft.com/office/drawing/2014/main" id="{0EDDADCE-B2A0-4D12-9F69-6D9C7ADD8CC6}"/>
+                <a16:creationId xmlns:a16="http://schemas.microsoft.com/office/drawing/2014/main" id="{94AF22D2-F9AF-4179-9DD5-A772F8E1E300}"/>
               </a:ext>
             </a:extLst>
           </p:cNvPr>
@@ -39593,7 +39593,7 @@
           <p:cNvPr id="7" name="TextBox 6">
             <a:extLst xmlns:a="http://schemas.openxmlformats.org/drawingml/2006/main">
               <a:ext uri="{FF2B5EF4-FFF2-40B4-BE49-F238E27FC236}">
-                <a16:creationId xmlns:a16="http://schemas.microsoft.com/office/drawing/2014/main" id="{D7FA2B58-2EA4-4175-B7BB-475599C15B3C}"/>
+                <a16:creationId xmlns:a16="http://schemas.microsoft.com/office/drawing/2014/main" id="{E5264BA3-65FA-46F3-B99C-92C2DD6B69FA}"/>
               </a:ext>
             </a:extLst>
           </p:cNvPr>
@@ -39648,7 +39648,7 @@
           <p:cNvPr id="8" name="TextBox 7">
             <a:extLst xmlns:a="http://schemas.openxmlformats.org/drawingml/2006/main">
               <a:ext uri="{FF2B5EF4-FFF2-40B4-BE49-F238E27FC236}">
-                <a16:creationId xmlns:a16="http://schemas.microsoft.com/office/drawing/2014/main" id="{D1C82D56-EB72-47AE-A00E-282EF81F2034}"/>
+                <a16:creationId xmlns:a16="http://schemas.microsoft.com/office/drawing/2014/main" id="{2E35EEE2-57D2-40A3-89C5-06FEB3B7BABC}"/>
               </a:ext>
             </a:extLst>
           </p:cNvPr>
@@ -39703,7 +39703,7 @@
           <p:cNvPr id="9" name="TextBox 8">
             <a:extLst xmlns:a="http://schemas.openxmlformats.org/drawingml/2006/main">
               <a:ext uri="{FF2B5EF4-FFF2-40B4-BE49-F238E27FC236}">
-                <a16:creationId xmlns:a16="http://schemas.microsoft.com/office/drawing/2014/main" id="{DD0464FA-F55B-4E0A-B279-F3156ECED880}"/>
+                <a16:creationId xmlns:a16="http://schemas.microsoft.com/office/drawing/2014/main" id="{7480D4DF-545E-4FAA-BE2E-B98629630BD8}"/>
               </a:ext>
             </a:extLst>
           </p:cNvPr>
@@ -39788,7 +39788,7 @@
           <p:cNvPr id="10" name="Rounded Rectangle 9">
             <a:extLst xmlns:a="http://schemas.openxmlformats.org/drawingml/2006/main">
               <a:ext uri="{FF2B5EF4-FFF2-40B4-BE49-F238E27FC236}">
-                <a16:creationId xmlns:a16="http://schemas.microsoft.com/office/drawing/2014/main" id="{1A6B8E21-BDEB-49C9-BD64-C9D216DA76D4}"/>
+                <a16:creationId xmlns:a16="http://schemas.microsoft.com/office/drawing/2014/main" id="{94103D25-6E77-4372-8927-B6A3C34675BE}"/>
               </a:ext>
             </a:extLst>
           </p:cNvPr>
@@ -39845,7 +39845,7 @@
           <p:cNvPr id="11" name="TextBox 10">
             <a:extLst xmlns:a="http://schemas.openxmlformats.org/drawingml/2006/main">
               <a:ext uri="{FF2B5EF4-FFF2-40B4-BE49-F238E27FC236}">
-                <a16:creationId xmlns:a16="http://schemas.microsoft.com/office/drawing/2014/main" id="{DD830E0E-C019-45EC-9AE9-DE83887916C0}"/>
+                <a16:creationId xmlns:a16="http://schemas.microsoft.com/office/drawing/2014/main" id="{9415B924-16FA-4D56-8C10-EB5052DD1091}"/>
               </a:ext>
             </a:extLst>
           </p:cNvPr>
@@ -39900,7 +39900,7 @@
           <p:cNvPr id="12" name="TextBox 11">
             <a:extLst xmlns:a="http://schemas.openxmlformats.org/drawingml/2006/main">
               <a:ext uri="{FF2B5EF4-FFF2-40B4-BE49-F238E27FC236}">
-                <a16:creationId xmlns:a16="http://schemas.microsoft.com/office/drawing/2014/main" id="{4B35A87B-F2D6-4BD4-B7D8-B9B7F464A2A3}"/>
+                <a16:creationId xmlns:a16="http://schemas.microsoft.com/office/drawing/2014/main" id="{3B2C41B6-3A88-409B-BD99-0BA28E5CA89A}"/>
               </a:ext>
             </a:extLst>
           </p:cNvPr>
@@ -39955,7 +39955,7 @@
           <p:cNvPr id="13" name="TextBox 12">
             <a:extLst xmlns:a="http://schemas.openxmlformats.org/drawingml/2006/main">
               <a:ext uri="{FF2B5EF4-FFF2-40B4-BE49-F238E27FC236}">
-                <a16:creationId xmlns:a16="http://schemas.microsoft.com/office/drawing/2014/main" id="{79CC44DF-55C3-4766-9BDA-EEF10DC10195}"/>
+                <a16:creationId xmlns:a16="http://schemas.microsoft.com/office/drawing/2014/main" id="{EAE5BB4B-7A3B-4BD8-866E-FF770BF58F06}"/>
               </a:ext>
             </a:extLst>
           </p:cNvPr>
@@ -40067,7 +40067,7 @@
           <p:cNvPr id="14" name="Rectangle 13">
             <a:extLst xmlns:a="http://schemas.openxmlformats.org/drawingml/2006/main">
               <a:ext uri="{FF2B5EF4-FFF2-40B4-BE49-F238E27FC236}">
-                <a16:creationId xmlns:a16="http://schemas.microsoft.com/office/drawing/2014/main" id="{ED9D88C2-085C-48CC-9F01-C6CDCF0547A1}"/>
+                <a16:creationId xmlns:a16="http://schemas.microsoft.com/office/drawing/2014/main" id="{6BEE48C9-4A0D-426E-B11B-41A16012431A}"/>
               </a:ext>
             </a:extLst>
           </p:cNvPr>
@@ -40120,7 +40120,7 @@
           <p:cNvPr id="15" name="Rectangle 14">
             <a:extLst xmlns:a="http://schemas.openxmlformats.org/drawingml/2006/main">
               <a:ext uri="{FF2B5EF4-FFF2-40B4-BE49-F238E27FC236}">
-                <a16:creationId xmlns:a16="http://schemas.microsoft.com/office/drawing/2014/main" id="{2323B898-5FDE-4261-8955-57749B213DA9}"/>
+                <a16:creationId xmlns:a16="http://schemas.microsoft.com/office/drawing/2014/main" id="{009A905C-9F6D-4C6D-ABA5-E38DA4AF65BD}"/>
               </a:ext>
             </a:extLst>
           </p:cNvPr>
@@ -40173,7 +40173,7 @@
           <p:cNvPr id="16" name="TextBox 15">
             <a:extLst xmlns:a="http://schemas.openxmlformats.org/drawingml/2006/main">
               <a:ext uri="{FF2B5EF4-FFF2-40B4-BE49-F238E27FC236}">
-                <a16:creationId xmlns:a16="http://schemas.microsoft.com/office/drawing/2014/main" id="{096B7602-C8DC-4BD4-BF4C-469926479DBB}"/>
+                <a16:creationId xmlns:a16="http://schemas.microsoft.com/office/drawing/2014/main" id="{DB629423-D9AD-431A-8D93-4664FA74C00C}"/>
               </a:ext>
             </a:extLst>
           </p:cNvPr>
@@ -40228,7 +40228,7 @@
           <p:cNvPr id="17" name="TextBox 16">
             <a:extLst xmlns:a="http://schemas.openxmlformats.org/drawingml/2006/main">
               <a:ext uri="{FF2B5EF4-FFF2-40B4-BE49-F238E27FC236}">
-                <a16:creationId xmlns:a16="http://schemas.microsoft.com/office/drawing/2014/main" id="{0E00786E-6B04-4471-A158-10A662600AE7}"/>
+                <a16:creationId xmlns:a16="http://schemas.microsoft.com/office/drawing/2014/main" id="{488D2B46-24B4-4D89-BCC3-4226CD24E446}"/>
               </a:ext>
             </a:extLst>
           </p:cNvPr>
@@ -40281,7 +40281,7 @@
     </p:spTree>
     <p:extLst>
       <p:ext uri="{BB962C8B-B14F-4D97-AF65-F5344CB8AC3E}">
-        <p14:creationId xmlns:p14="http://schemas.microsoft.com/office/powerpoint/2010/main" val="825162746"/>
+        <p14:creationId xmlns:p14="http://schemas.microsoft.com/office/powerpoint/2010/main" val="1605982773"/>
       </p:ext>
     </p:extLst>
   </p:cSld>
